--- a/PPTs/ZDELETED.pptx
+++ b/PPTs/ZDELETED.pptx
@@ -5,23 +5,25 @@
     <p:sldMasterId id="2147483660" r:id="rId1"/>
   </p:sldMasterIdLst>
   <p:notesMasterIdLst>
-    <p:notesMasterId r:id="rId16"/>
+    <p:notesMasterId r:id="rId18"/>
   </p:notesMasterIdLst>
   <p:sldIdLst>
     <p:sldId id="256" r:id="rId2"/>
-    <p:sldId id="475" r:id="rId3"/>
-    <p:sldId id="473" r:id="rId4"/>
-    <p:sldId id="306" r:id="rId5"/>
-    <p:sldId id="322" r:id="rId6"/>
-    <p:sldId id="323" r:id="rId7"/>
-    <p:sldId id="325" r:id="rId8"/>
-    <p:sldId id="324" r:id="rId9"/>
-    <p:sldId id="525" r:id="rId10"/>
-    <p:sldId id="261" r:id="rId11"/>
-    <p:sldId id="264" r:id="rId12"/>
-    <p:sldId id="262" r:id="rId13"/>
-    <p:sldId id="265" r:id="rId14"/>
-    <p:sldId id="379" r:id="rId15"/>
+    <p:sldId id="335" r:id="rId3"/>
+    <p:sldId id="813" r:id="rId4"/>
+    <p:sldId id="475" r:id="rId5"/>
+    <p:sldId id="473" r:id="rId6"/>
+    <p:sldId id="306" r:id="rId7"/>
+    <p:sldId id="322" r:id="rId8"/>
+    <p:sldId id="323" r:id="rId9"/>
+    <p:sldId id="325" r:id="rId10"/>
+    <p:sldId id="324" r:id="rId11"/>
+    <p:sldId id="525" r:id="rId12"/>
+    <p:sldId id="261" r:id="rId13"/>
+    <p:sldId id="264" r:id="rId14"/>
+    <p:sldId id="262" r:id="rId15"/>
+    <p:sldId id="265" r:id="rId16"/>
+    <p:sldId id="379" r:id="rId17"/>
   </p:sldIdLst>
   <p:sldSz cx="9144000" cy="6858000" type="screen4x3"/>
   <p:notesSz cx="6858000" cy="9144000"/>
@@ -142,7 +144,7 @@
 <file path=ppt/revisionInfo.xml><?xml version="1.0" encoding="utf-8"?>
 <p1510:revInfo xmlns:a="http://schemas.openxmlformats.org/drawingml/2006/main" xmlns:r="http://schemas.openxmlformats.org/officeDocument/2006/relationships" xmlns:p1510="http://schemas.microsoft.com/office/powerpoint/2015/10/main">
   <p1510:revLst>
-    <p1510:client id="{74B15ED0-6DB4-4108-82C9-64F0E8E52BFB}" v="7" dt="2025-09-23T19:54:54.880"/>
+    <p1510:client id="{74B15ED0-6DB4-4108-82C9-64F0E8E52BFB}" v="8" dt="2025-09-26T22:04:43.310"/>
   </p1510:revLst>
 </p1510:revInfo>
 </file>
@@ -152,7 +154,7 @@
   <pc:docChgLst>
     <pc:chgData name="Zonghua Gu" userId="9a7e1853e1951ef5" providerId="LiveId" clId="{CF1FAA12-072C-4ED5-BA76-0FFFAEFDB88A}"/>
     <pc:docChg chg="custSel addSld delSld modSld">
-      <pc:chgData name="Zonghua Gu" userId="9a7e1853e1951ef5" providerId="LiveId" clId="{CF1FAA12-072C-4ED5-BA76-0FFFAEFDB88A}" dt="2025-09-23T19:54:54.877" v="19"/>
+      <pc:chgData name="Zonghua Gu" userId="9a7e1853e1951ef5" providerId="LiveId" clId="{CF1FAA12-072C-4ED5-BA76-0FFFAEFDB88A}" dt="2025-09-26T22:04:43.298" v="20"/>
       <pc:docMkLst>
         <pc:docMk/>
       </pc:docMkLst>
@@ -460,6 +462,13 @@
           <pc:sldMk cId="3816386607" sldId="335"/>
         </pc:sldMkLst>
       </pc:sldChg>
+      <pc:sldChg chg="add">
+        <pc:chgData name="Zonghua Gu" userId="9a7e1853e1951ef5" providerId="LiveId" clId="{CF1FAA12-072C-4ED5-BA76-0FFFAEFDB88A}" dt="2025-09-26T22:04:43.298" v="20"/>
+        <pc:sldMkLst>
+          <pc:docMk/>
+          <pc:sldMk cId="4015228595" sldId="335"/>
+        </pc:sldMkLst>
+      </pc:sldChg>
       <pc:sldChg chg="del">
         <pc:chgData name="Zonghua Gu" userId="9a7e1853e1951ef5" providerId="LiveId" clId="{CF1FAA12-072C-4ED5-BA76-0FFFAEFDB88A}" dt="2025-09-18T02:54:06.006" v="9" actId="47"/>
         <pc:sldMkLst>
@@ -551,6 +560,13 @@
           <pc:sldMk cId="3686948551" sldId="525"/>
         </pc:sldMkLst>
       </pc:sldChg>
+      <pc:sldChg chg="add">
+        <pc:chgData name="Zonghua Gu" userId="9a7e1853e1951ef5" providerId="LiveId" clId="{CF1FAA12-072C-4ED5-BA76-0FFFAEFDB88A}" dt="2025-09-26T22:04:43.298" v="20"/>
+        <pc:sldMkLst>
+          <pc:docMk/>
+          <pc:sldMk cId="464193995" sldId="813"/>
+        </pc:sldMkLst>
+      </pc:sldChg>
     </pc:docChg>
   </pc:docChgLst>
 </pc:chgInfo>
@@ -639,7 +655,7 @@
             <a:fld id="{3AC3A17A-95E8-4381-B66B-5D6DE2B3048A}" type="datetimeFigureOut">
               <a:rPr lang="en-US" smtClean="0"/>
               <a:pPr/>
-              <a:t>9/23/2025</a:t>
+              <a:t>9/26/2025</a:t>
             </a:fld>
             <a:endParaRPr lang="en-US"/>
           </a:p>
@@ -907,6 +923,86 @@
 </p:notesMaster>
 </file>
 
+<file path=ppt/notesSlides/notesSlide1.xml><?xml version="1.0" encoding="utf-8"?>
+<p:notes xmlns:a="http://schemas.openxmlformats.org/drawingml/2006/main" xmlns:r="http://schemas.openxmlformats.org/officeDocument/2006/relationships" xmlns:p="http://schemas.openxmlformats.org/presentationml/2006/main">
+  <p:cSld>
+    <p:spTree>
+      <p:nvGrpSpPr>
+        <p:cNvPr id="1" name=""/>
+        <p:cNvGrpSpPr/>
+        <p:nvPr/>
+      </p:nvGrpSpPr>
+      <p:grpSpPr>
+        <a:xfrm>
+          <a:off x="0" y="0"/>
+          <a:ext cx="0" cy="0"/>
+          <a:chOff x="0" y="0"/>
+          <a:chExt cx="0" cy="0"/>
+        </a:xfrm>
+      </p:grpSpPr>
+      <p:sp>
+        <p:nvSpPr>
+          <p:cNvPr id="47106" name="Rectangle 2"/>
+          <p:cNvSpPr>
+            <a:spLocks noGrp="1" noChangeArrowheads="1"/>
+          </p:cNvSpPr>
+          <p:nvPr>
+            <p:ph type="body" idx="1"/>
+          </p:nvPr>
+        </p:nvSpPr>
+        <p:spPr>
+          <a:xfrm>
+            <a:off x="924810" y="4404346"/>
+            <a:ext cx="5100458" cy="4170576"/>
+          </a:xfrm>
+          <a:solidFill>
+            <a:srgbClr val="FFFFFF"/>
+          </a:solidFill>
+          <a:ln>
+            <a:solidFill>
+              <a:srgbClr val="000000"/>
+            </a:solidFill>
+          </a:ln>
+        </p:spPr>
+        <p:txBody>
+          <a:bodyPr lIns="92350" tIns="46174" rIns="92350" bIns="46174"/>
+          <a:lstStyle/>
+          <a:p>
+            <a:endParaRPr lang="en-US" dirty="0"/>
+          </a:p>
+        </p:txBody>
+      </p:sp>
+      <p:sp>
+        <p:nvSpPr>
+          <p:cNvPr id="47107" name="Rectangle 3"/>
+          <p:cNvSpPr>
+            <a:spLocks noGrp="1" noRot="1" noChangeAspect="1" noChangeArrowheads="1" noTextEdit="1"/>
+          </p:cNvSpPr>
+          <p:nvPr>
+            <p:ph type="sldImg"/>
+          </p:nvPr>
+        </p:nvSpPr>
+        <p:spPr>
+          <a:xfrm>
+            <a:off x="546100" y="863600"/>
+            <a:ext cx="5870575" cy="3303588"/>
+          </a:xfrm>
+          <a:ln/>
+        </p:spPr>
+      </p:sp>
+    </p:spTree>
+    <p:extLst>
+      <p:ext uri="{BB962C8B-B14F-4D97-AF65-F5344CB8AC3E}">
+        <p14:creationId xmlns:p14="http://schemas.microsoft.com/office/powerpoint/2010/main" val="2424995160"/>
+      </p:ext>
+    </p:extLst>
+  </p:cSld>
+  <p:clrMapOvr>
+    <a:masterClrMapping/>
+  </p:clrMapOvr>
+</p:notes>
+</file>
+
 <file path=ppt/slideLayouts/slideLayout1.xml><?xml version="1.0" encoding="utf-8"?>
 <p:sldLayout xmlns:a="http://schemas.openxmlformats.org/drawingml/2006/main" xmlns:r="http://schemas.openxmlformats.org/officeDocument/2006/relationships" xmlns:p="http://schemas.openxmlformats.org/presentationml/2006/main" showMasterSp="0" type="title" preserve="1">
   <p:cSld name="Title Slide">
@@ -1050,7 +1146,7 @@
             <a:fld id="{966FEA0E-C2DF-4252-97AD-54F2B7E07EAC}" type="datetime1">
               <a:rPr lang="en-US" smtClean="0"/>
               <a:pPr eaLnBrk="1" latinLnBrk="0" hangingPunct="1"/>
-              <a:t>9/23/2025</a:t>
+              <a:t>9/26/2025</a:t>
             </a:fld>
             <a:endParaRPr lang="en-US" sz="1600" dirty="0"/>
           </a:p>
@@ -1411,7 +1507,7 @@
             <a:fld id="{69EF9524-0CAA-4F98-BAC2-CE6B712F5E94}" type="datetime1">
               <a:rPr lang="en-US" smtClean="0"/>
               <a:pPr eaLnBrk="1" latinLnBrk="0" hangingPunct="1"/>
-              <a:t>9/23/2025</a:t>
+              <a:t>9/26/2025</a:t>
             </a:fld>
             <a:endParaRPr lang="en-US"/>
           </a:p>
@@ -1588,7 +1684,7 @@
             <a:fld id="{CB20516D-6F89-4C89-8307-32A716E22875}" type="datetime1">
               <a:rPr lang="en-US" smtClean="0"/>
               <a:pPr eaLnBrk="1" latinLnBrk="0" hangingPunct="1"/>
-              <a:t>9/23/2025</a:t>
+              <a:t>9/26/2025</a:t>
             </a:fld>
             <a:endParaRPr lang="en-US"/>
           </a:p>
@@ -1825,7 +1921,7 @@
             <a:fld id="{0CD88620-7329-4FC3-B65D-4EA691138F1B}" type="datetime1">
               <a:rPr lang="en-US" smtClean="0"/>
               <a:pPr eaLnBrk="1" latinLnBrk="0" hangingPunct="1"/>
-              <a:t>9/23/2025</a:t>
+              <a:t>9/26/2025</a:t>
             </a:fld>
             <a:endParaRPr lang="en-US" dirty="0"/>
           </a:p>
@@ -2096,7 +2192,7 @@
             <a:fld id="{0E46F3A1-5653-427D-9F78-56077401431A}" type="datetime1">
               <a:rPr lang="en-US" smtClean="0"/>
               <a:pPr eaLnBrk="1" latinLnBrk="0" hangingPunct="1"/>
-              <a:t>9/23/2025</a:t>
+              <a:t>9/26/2025</a:t>
             </a:fld>
             <a:endParaRPr lang="en-US" dirty="0"/>
           </a:p>
@@ -2318,7 +2414,7 @@
             <a:fld id="{CB67FC03-415A-45F0-B002-DF181377F7DC}" type="datetime1">
               <a:rPr lang="en-US" smtClean="0"/>
               <a:pPr eaLnBrk="1" latinLnBrk="0" hangingPunct="1"/>
-              <a:t>9/23/2025</a:t>
+              <a:t>9/26/2025</a:t>
             </a:fld>
             <a:endParaRPr lang="en-US"/>
           </a:p>
@@ -2672,7 +2768,7 @@
             <a:fld id="{1B6FC726-A0B4-4FC7-90F5-F17415A5C1A3}" type="datetime1">
               <a:rPr lang="en-US" smtClean="0"/>
               <a:pPr eaLnBrk="1" latinLnBrk="0" hangingPunct="1"/>
-              <a:t>9/23/2025</a:t>
+              <a:t>9/26/2025</a:t>
             </a:fld>
             <a:endParaRPr lang="en-US"/>
           </a:p>
@@ -2906,7 +3002,7 @@
             <a:fld id="{BE217211-C3F9-4892-9CC3-C7105638567D}" type="datetime1">
               <a:rPr lang="en-US" smtClean="0"/>
               <a:pPr eaLnBrk="1" latinLnBrk="0" hangingPunct="1"/>
-              <a:t>9/23/2025</a:t>
+              <a:t>9/26/2025</a:t>
             </a:fld>
             <a:endParaRPr lang="en-US"/>
           </a:p>
@@ -3049,7 +3145,7 @@
             <a:fld id="{BA713E6A-6B26-4373-A75B-EF395DC64F9E}" type="datetime1">
               <a:rPr lang="en-US" smtClean="0"/>
               <a:pPr eaLnBrk="1" latinLnBrk="0" hangingPunct="1"/>
-              <a:t>9/23/2025</a:t>
+              <a:t>9/26/2025</a:t>
             </a:fld>
             <a:endParaRPr lang="en-US"/>
           </a:p>
@@ -3328,7 +3424,7 @@
             <a:fld id="{57EB41EF-4260-415A-8DD6-FEDCC46E7EFC}" type="datetime1">
               <a:rPr lang="en-US" smtClean="0"/>
               <a:pPr eaLnBrk="1" latinLnBrk="0" hangingPunct="1"/>
-              <a:t>9/23/2025</a:t>
+              <a:t>9/26/2025</a:t>
             </a:fld>
             <a:endParaRPr lang="en-US"/>
           </a:p>
@@ -3737,7 +3833,7 @@
             <a:fld id="{6BDA80A0-06CC-4492-94A0-E8516751045E}" type="datetime1">
               <a:rPr lang="en-US" smtClean="0"/>
               <a:pPr eaLnBrk="1" latinLnBrk="0" hangingPunct="1"/>
-              <a:t>9/23/2025</a:t>
+              <a:t>9/26/2025</a:t>
             </a:fld>
             <a:endParaRPr lang="en-US"/>
           </a:p>
@@ -4076,7 +4172,7 @@
             <a:fld id="{A25B5B4B-57EE-495D-8E74-A657CFD8BB6C}" type="datetime1">
               <a:rPr lang="en-US" smtClean="0"/>
               <a:pPr eaLnBrk="1" latinLnBrk="0" hangingPunct="1"/>
-              <a:t>9/23/2025</a:t>
+              <a:t>9/26/2025</a:t>
             </a:fld>
             <a:endParaRPr lang="en-US" sz="1400" dirty="0">
               <a:solidFill>
@@ -4896,7 +4992,7 @@
           <a:p>
             <a:r>
               <a:rPr lang="en-US" dirty="0"/>
-              <a:t>64-bit Logic Shift Left</a:t>
+              <a:t>Implementation of Barrel Shifter</a:t>
             </a:r>
           </a:p>
         </p:txBody>
@@ -4921,28 +5017,1421 @@
               <a:pPr/>
               <a:t>10</a:t>
             </a:fld>
-            <a:endParaRPr kumimoji="0" lang="en-US" dirty="0"/>
+            <a:endParaRPr kumimoji="0" lang="en-US"/>
+          </a:p>
+        </p:txBody>
+      </p:sp>
+      <p:sp>
+        <p:nvSpPr>
+          <p:cNvPr id="4" name="Rectangle 3"/>
+          <p:cNvSpPr/>
+          <p:nvPr/>
+        </p:nvSpPr>
+        <p:spPr>
+          <a:xfrm>
+            <a:off x="235826" y="5117068"/>
+            <a:ext cx="5791200" cy="369332"/>
+          </a:xfrm>
+          <a:prstGeom prst="rect">
+            <a:avLst/>
+          </a:prstGeom>
+        </p:spPr>
+        <p:txBody>
+          <a:bodyPr wrap="square">
+            <a:spAutoFit/>
+          </a:bodyPr>
+          <a:lstStyle/>
+          <a:p>
+            <a:r>
+              <a:rPr lang="en-US" dirty="0"/>
+              <a:t>Example four-bit Barrel shifter that performs </a:t>
+            </a:r>
+            <a:r>
+              <a:rPr lang="en-US" b="1" dirty="0"/>
+              <a:t>rotate right</a:t>
+            </a:r>
+          </a:p>
+        </p:txBody>
+      </p:sp>
+      <p:graphicFrame>
+        <p:nvGraphicFramePr>
+          <p:cNvPr id="5" name="Table 4"/>
+          <p:cNvGraphicFramePr>
+            <a:graphicFrameLocks noGrp="1"/>
+          </p:cNvGraphicFramePr>
+          <p:nvPr>
+            <p:extLst>
+              <p:ext uri="{D42A27DB-BD31-4B8C-83A1-F6EECF244321}">
+                <p14:modId xmlns:p14="http://schemas.microsoft.com/office/powerpoint/2010/main" val="2190145348"/>
+              </p:ext>
+            </p:extLst>
+          </p:nvPr>
+        </p:nvGraphicFramePr>
+        <p:xfrm>
+          <a:off x="6248400" y="2418965"/>
+          <a:ext cx="2590800" cy="2045730"/>
+        </p:xfrm>
+        <a:graphic>
+          <a:graphicData uri="http://schemas.openxmlformats.org/drawingml/2006/table">
+            <a:tbl>
+              <a:tblPr firstRow="1" firstCol="1" bandRow="1">
+                <a:tableStyleId>{B301B821-A1FF-4177-AEE7-76D212191A09}</a:tableStyleId>
+              </a:tblPr>
+              <a:tblGrid>
+                <a:gridCol w="417963">
+                  <a:extLst>
+                    <a:ext uri="{9D8B030D-6E8A-4147-A177-3AD203B41FA5}">
+                      <a16:colId xmlns:a16="http://schemas.microsoft.com/office/drawing/2014/main" val="20000"/>
+                    </a:ext>
+                  </a:extLst>
+                </a:gridCol>
+                <a:gridCol w="417009">
+                  <a:extLst>
+                    <a:ext uri="{9D8B030D-6E8A-4147-A177-3AD203B41FA5}">
+                      <a16:colId xmlns:a16="http://schemas.microsoft.com/office/drawing/2014/main" val="20001"/>
+                    </a:ext>
+                  </a:extLst>
+                </a:gridCol>
+                <a:gridCol w="438957">
+                  <a:extLst>
+                    <a:ext uri="{9D8B030D-6E8A-4147-A177-3AD203B41FA5}">
+                      <a16:colId xmlns:a16="http://schemas.microsoft.com/office/drawing/2014/main" val="20002"/>
+                    </a:ext>
+                  </a:extLst>
+                </a:gridCol>
+                <a:gridCol w="438957">
+                  <a:extLst>
+                    <a:ext uri="{9D8B030D-6E8A-4147-A177-3AD203B41FA5}">
+                      <a16:colId xmlns:a16="http://schemas.microsoft.com/office/drawing/2014/main" val="20003"/>
+                    </a:ext>
+                  </a:extLst>
+                </a:gridCol>
+                <a:gridCol w="438957">
+                  <a:extLst>
+                    <a:ext uri="{9D8B030D-6E8A-4147-A177-3AD203B41FA5}">
+                      <a16:colId xmlns:a16="http://schemas.microsoft.com/office/drawing/2014/main" val="20004"/>
+                    </a:ext>
+                  </a:extLst>
+                </a:gridCol>
+                <a:gridCol w="438957">
+                  <a:extLst>
+                    <a:ext uri="{9D8B030D-6E8A-4147-A177-3AD203B41FA5}">
+                      <a16:colId xmlns:a16="http://schemas.microsoft.com/office/drawing/2014/main" val="20005"/>
+                    </a:ext>
+                  </a:extLst>
+                </a:gridCol>
+              </a:tblGrid>
+              <a:tr h="409146">
+                <a:tc>
+                  <a:txBody>
+                    <a:bodyPr/>
+                    <a:lstStyle/>
+                    <a:p>
+                      <a:pPr marL="0" marR="0" algn="ctr">
+                        <a:spcBef>
+                          <a:spcPts val="0"/>
+                        </a:spcBef>
+                        <a:spcAft>
+                          <a:spcPts val="0"/>
+                        </a:spcAft>
+                      </a:pPr>
+                      <a:r>
+                        <a:rPr lang="en-US" sz="1800" dirty="0" err="1">
+                          <a:effectLst/>
+                        </a:rPr>
+                        <a:t>S</a:t>
+                      </a:r>
+                      <a:r>
+                        <a:rPr lang="en-US" sz="1800" baseline="-25000" dirty="0" err="1">
+                          <a:effectLst/>
+                        </a:rPr>
+                        <a:t>1</a:t>
+                      </a:r>
+                      <a:endParaRPr lang="en-US" sz="1800" dirty="0">
+                        <a:effectLst/>
+                        <a:latin typeface="Consolas" panose="020B0609020204030204" pitchFamily="49" charset="0"/>
+                        <a:ea typeface="宋体"/>
+                        <a:cs typeface="Consolas" panose="020B0609020204030204" pitchFamily="49" charset="0"/>
+                      </a:endParaRPr>
+                    </a:p>
+                  </a:txBody>
+                  <a:tcPr marL="68580" marR="68580" marT="0" marB="0" anchor="ctr"/>
+                </a:tc>
+                <a:tc>
+                  <a:txBody>
+                    <a:bodyPr/>
+                    <a:lstStyle/>
+                    <a:p>
+                      <a:pPr marL="0" marR="0" algn="ctr">
+                        <a:spcBef>
+                          <a:spcPts val="0"/>
+                        </a:spcBef>
+                        <a:spcAft>
+                          <a:spcPts val="0"/>
+                        </a:spcAft>
+                      </a:pPr>
+                      <a:r>
+                        <a:rPr lang="en-US" sz="1800" dirty="0" err="1">
+                          <a:effectLst/>
+                        </a:rPr>
+                        <a:t>S</a:t>
+                      </a:r>
+                      <a:r>
+                        <a:rPr lang="en-US" sz="1800" baseline="-25000" dirty="0" err="1">
+                          <a:effectLst/>
+                        </a:rPr>
+                        <a:t>0</a:t>
+                      </a:r>
+                      <a:endParaRPr lang="en-US" sz="1800" dirty="0">
+                        <a:effectLst/>
+                        <a:latin typeface="Consolas" panose="020B0609020204030204" pitchFamily="49" charset="0"/>
+                        <a:ea typeface="宋体"/>
+                        <a:cs typeface="Consolas" panose="020B0609020204030204" pitchFamily="49" charset="0"/>
+                      </a:endParaRPr>
+                    </a:p>
+                  </a:txBody>
+                  <a:tcPr marL="68580" marR="68580" marT="0" marB="0" anchor="ctr">
+                    <a:lnR w="19050" cap="flat" cmpd="sng" algn="ctr">
+                      <a:solidFill>
+                        <a:schemeClr val="tx1"/>
+                      </a:solidFill>
+                      <a:prstDash val="solid"/>
+                      <a:round/>
+                      <a:headEnd type="none" w="med" len="med"/>
+                      <a:tailEnd type="none" w="med" len="med"/>
+                    </a:lnR>
+                  </a:tcPr>
+                </a:tc>
+                <a:tc>
+                  <a:txBody>
+                    <a:bodyPr/>
+                    <a:lstStyle/>
+                    <a:p>
+                      <a:pPr marL="0" marR="0" algn="ctr">
+                        <a:spcBef>
+                          <a:spcPts val="0"/>
+                        </a:spcBef>
+                        <a:spcAft>
+                          <a:spcPts val="0"/>
+                        </a:spcAft>
+                      </a:pPr>
+                      <a:r>
+                        <a:rPr lang="en-US" sz="1800">
+                          <a:effectLst/>
+                        </a:rPr>
+                        <a:t>Y</a:t>
+                      </a:r>
+                      <a:r>
+                        <a:rPr lang="en-US" sz="1800" baseline="-25000">
+                          <a:effectLst/>
+                        </a:rPr>
+                        <a:t>3</a:t>
+                      </a:r>
+                      <a:endParaRPr lang="en-US" sz="1800">
+                        <a:effectLst/>
+                        <a:latin typeface="Consolas" panose="020B0609020204030204" pitchFamily="49" charset="0"/>
+                        <a:ea typeface="宋体"/>
+                        <a:cs typeface="Consolas" panose="020B0609020204030204" pitchFamily="49" charset="0"/>
+                      </a:endParaRPr>
+                    </a:p>
+                  </a:txBody>
+                  <a:tcPr marL="68580" marR="68580" marT="0" marB="0" anchor="ctr">
+                    <a:lnL w="19050" cap="flat" cmpd="sng" algn="ctr">
+                      <a:solidFill>
+                        <a:schemeClr val="tx1"/>
+                      </a:solidFill>
+                      <a:prstDash val="solid"/>
+                      <a:round/>
+                      <a:headEnd type="none" w="med" len="med"/>
+                      <a:tailEnd type="none" w="med" len="med"/>
+                    </a:lnL>
+                  </a:tcPr>
+                </a:tc>
+                <a:tc>
+                  <a:txBody>
+                    <a:bodyPr/>
+                    <a:lstStyle/>
+                    <a:p>
+                      <a:pPr marL="0" marR="0" algn="ctr">
+                        <a:spcBef>
+                          <a:spcPts val="0"/>
+                        </a:spcBef>
+                        <a:spcAft>
+                          <a:spcPts val="0"/>
+                        </a:spcAft>
+                      </a:pPr>
+                      <a:r>
+                        <a:rPr lang="en-US" sz="1800">
+                          <a:effectLst/>
+                        </a:rPr>
+                        <a:t>Y</a:t>
+                      </a:r>
+                      <a:r>
+                        <a:rPr lang="en-US" sz="1800" baseline="-25000">
+                          <a:effectLst/>
+                        </a:rPr>
+                        <a:t>2</a:t>
+                      </a:r>
+                      <a:endParaRPr lang="en-US" sz="1800">
+                        <a:effectLst/>
+                        <a:latin typeface="Consolas" panose="020B0609020204030204" pitchFamily="49" charset="0"/>
+                        <a:ea typeface="宋体"/>
+                        <a:cs typeface="Consolas" panose="020B0609020204030204" pitchFamily="49" charset="0"/>
+                      </a:endParaRPr>
+                    </a:p>
+                  </a:txBody>
+                  <a:tcPr marL="68580" marR="68580" marT="0" marB="0" anchor="ctr"/>
+                </a:tc>
+                <a:tc>
+                  <a:txBody>
+                    <a:bodyPr/>
+                    <a:lstStyle/>
+                    <a:p>
+                      <a:pPr marL="0" marR="0" algn="ctr">
+                        <a:spcBef>
+                          <a:spcPts val="0"/>
+                        </a:spcBef>
+                        <a:spcAft>
+                          <a:spcPts val="0"/>
+                        </a:spcAft>
+                      </a:pPr>
+                      <a:r>
+                        <a:rPr lang="en-US" sz="1800">
+                          <a:effectLst/>
+                        </a:rPr>
+                        <a:t>Y</a:t>
+                      </a:r>
+                      <a:r>
+                        <a:rPr lang="en-US" sz="1800" baseline="-25000">
+                          <a:effectLst/>
+                        </a:rPr>
+                        <a:t>1</a:t>
+                      </a:r>
+                      <a:endParaRPr lang="en-US" sz="1800">
+                        <a:effectLst/>
+                        <a:latin typeface="Consolas" panose="020B0609020204030204" pitchFamily="49" charset="0"/>
+                        <a:ea typeface="宋体"/>
+                        <a:cs typeface="Consolas" panose="020B0609020204030204" pitchFamily="49" charset="0"/>
+                      </a:endParaRPr>
+                    </a:p>
+                  </a:txBody>
+                  <a:tcPr marL="68580" marR="68580" marT="0" marB="0" anchor="ctr"/>
+                </a:tc>
+                <a:tc>
+                  <a:txBody>
+                    <a:bodyPr/>
+                    <a:lstStyle/>
+                    <a:p>
+                      <a:pPr marL="0" marR="0" algn="ctr">
+                        <a:spcBef>
+                          <a:spcPts val="0"/>
+                        </a:spcBef>
+                        <a:spcAft>
+                          <a:spcPts val="0"/>
+                        </a:spcAft>
+                      </a:pPr>
+                      <a:r>
+                        <a:rPr lang="en-US" sz="1800">
+                          <a:effectLst/>
+                        </a:rPr>
+                        <a:t>Y</a:t>
+                      </a:r>
+                      <a:r>
+                        <a:rPr lang="en-US" sz="1800" baseline="-25000">
+                          <a:effectLst/>
+                        </a:rPr>
+                        <a:t>0</a:t>
+                      </a:r>
+                      <a:endParaRPr lang="en-US" sz="1800">
+                        <a:effectLst/>
+                        <a:latin typeface="Consolas" panose="020B0609020204030204" pitchFamily="49" charset="0"/>
+                        <a:ea typeface="宋体"/>
+                        <a:cs typeface="Consolas" panose="020B0609020204030204" pitchFamily="49" charset="0"/>
+                      </a:endParaRPr>
+                    </a:p>
+                  </a:txBody>
+                  <a:tcPr marL="68580" marR="68580" marT="0" marB="0" anchor="ctr"/>
+                </a:tc>
+                <a:extLst>
+                  <a:ext uri="{0D108BD9-81ED-4DB2-BD59-A6C34878D82A}">
+                    <a16:rowId xmlns:a16="http://schemas.microsoft.com/office/drawing/2014/main" val="10000"/>
+                  </a:ext>
+                </a:extLst>
+              </a:tr>
+              <a:tr h="409146">
+                <a:tc>
+                  <a:txBody>
+                    <a:bodyPr/>
+                    <a:lstStyle/>
+                    <a:p>
+                      <a:pPr marL="0" marR="0" algn="ctr">
+                        <a:spcBef>
+                          <a:spcPts val="0"/>
+                        </a:spcBef>
+                        <a:spcAft>
+                          <a:spcPts val="0"/>
+                        </a:spcAft>
+                      </a:pPr>
+                      <a:r>
+                        <a:rPr lang="en-US" sz="1800" b="1" dirty="0">
+                          <a:effectLst/>
+                          <a:latin typeface="Consolas" panose="020B0609020204030204" pitchFamily="49" charset="0"/>
+                          <a:cs typeface="Consolas" panose="020B0609020204030204" pitchFamily="49" charset="0"/>
+                        </a:rPr>
+                        <a:t>0</a:t>
+                      </a:r>
+                      <a:endParaRPr lang="en-US" sz="1800" b="1" dirty="0">
+                        <a:effectLst/>
+                        <a:latin typeface="Consolas" panose="020B0609020204030204" pitchFamily="49" charset="0"/>
+                        <a:ea typeface="宋体"/>
+                        <a:cs typeface="Consolas" panose="020B0609020204030204" pitchFamily="49" charset="0"/>
+                      </a:endParaRPr>
+                    </a:p>
+                  </a:txBody>
+                  <a:tcPr marL="68580" marR="68580" marT="0" marB="0" anchor="ctr"/>
+                </a:tc>
+                <a:tc>
+                  <a:txBody>
+                    <a:bodyPr/>
+                    <a:lstStyle/>
+                    <a:p>
+                      <a:pPr marL="0" marR="0" algn="ctr">
+                        <a:spcBef>
+                          <a:spcPts val="0"/>
+                        </a:spcBef>
+                        <a:spcAft>
+                          <a:spcPts val="0"/>
+                        </a:spcAft>
+                      </a:pPr>
+                      <a:r>
+                        <a:rPr lang="en-US" sz="1800" b="1" dirty="0">
+                          <a:effectLst/>
+                          <a:latin typeface="Consolas" panose="020B0609020204030204" pitchFamily="49" charset="0"/>
+                          <a:cs typeface="Consolas" panose="020B0609020204030204" pitchFamily="49" charset="0"/>
+                        </a:rPr>
+                        <a:t>0</a:t>
+                      </a:r>
+                      <a:endParaRPr lang="en-US" sz="1800" b="1" dirty="0">
+                        <a:effectLst/>
+                        <a:latin typeface="Consolas" panose="020B0609020204030204" pitchFamily="49" charset="0"/>
+                        <a:ea typeface="宋体"/>
+                        <a:cs typeface="Consolas" panose="020B0609020204030204" pitchFamily="49" charset="0"/>
+                      </a:endParaRPr>
+                    </a:p>
+                  </a:txBody>
+                  <a:tcPr marL="68580" marR="68580" marT="0" marB="0" anchor="ctr">
+                    <a:lnR w="19050" cap="flat" cmpd="sng" algn="ctr">
+                      <a:solidFill>
+                        <a:schemeClr val="tx1"/>
+                      </a:solidFill>
+                      <a:prstDash val="solid"/>
+                      <a:round/>
+                      <a:headEnd type="none" w="med" len="med"/>
+                      <a:tailEnd type="none" w="med" len="med"/>
+                    </a:lnR>
+                  </a:tcPr>
+                </a:tc>
+                <a:tc>
+                  <a:txBody>
+                    <a:bodyPr/>
+                    <a:lstStyle/>
+                    <a:p>
+                      <a:pPr marL="0" marR="0" algn="ctr">
+                        <a:spcBef>
+                          <a:spcPts val="0"/>
+                        </a:spcBef>
+                        <a:spcAft>
+                          <a:spcPts val="0"/>
+                        </a:spcAft>
+                      </a:pPr>
+                      <a:r>
+                        <a:rPr lang="en-US" sz="1800" dirty="0" err="1">
+                          <a:effectLst/>
+                        </a:rPr>
+                        <a:t>D</a:t>
+                      </a:r>
+                      <a:r>
+                        <a:rPr lang="en-US" sz="1800" baseline="-25000" dirty="0" err="1">
+                          <a:effectLst/>
+                        </a:rPr>
+                        <a:t>3</a:t>
+                      </a:r>
+                      <a:endParaRPr lang="en-US" sz="1800" dirty="0">
+                        <a:effectLst/>
+                        <a:latin typeface="Consolas" panose="020B0609020204030204" pitchFamily="49" charset="0"/>
+                        <a:ea typeface="宋体"/>
+                        <a:cs typeface="Consolas" panose="020B0609020204030204" pitchFamily="49" charset="0"/>
+                      </a:endParaRPr>
+                    </a:p>
+                  </a:txBody>
+                  <a:tcPr marL="68580" marR="68580" marT="0" marB="0" anchor="ctr">
+                    <a:lnL w="19050" cap="flat" cmpd="sng" algn="ctr">
+                      <a:solidFill>
+                        <a:schemeClr val="tx1"/>
+                      </a:solidFill>
+                      <a:prstDash val="solid"/>
+                      <a:round/>
+                      <a:headEnd type="none" w="med" len="med"/>
+                      <a:tailEnd type="none" w="med" len="med"/>
+                    </a:lnL>
+                  </a:tcPr>
+                </a:tc>
+                <a:tc>
+                  <a:txBody>
+                    <a:bodyPr/>
+                    <a:lstStyle/>
+                    <a:p>
+                      <a:pPr marL="0" marR="0" algn="ctr">
+                        <a:spcBef>
+                          <a:spcPts val="0"/>
+                        </a:spcBef>
+                        <a:spcAft>
+                          <a:spcPts val="0"/>
+                        </a:spcAft>
+                      </a:pPr>
+                      <a:r>
+                        <a:rPr lang="en-US" sz="1800">
+                          <a:effectLst/>
+                        </a:rPr>
+                        <a:t>D</a:t>
+                      </a:r>
+                      <a:r>
+                        <a:rPr lang="en-US" sz="1800" baseline="-25000">
+                          <a:effectLst/>
+                        </a:rPr>
+                        <a:t>2</a:t>
+                      </a:r>
+                      <a:endParaRPr lang="en-US" sz="1800">
+                        <a:effectLst/>
+                        <a:latin typeface="Consolas" panose="020B0609020204030204" pitchFamily="49" charset="0"/>
+                        <a:ea typeface="宋体"/>
+                        <a:cs typeface="Consolas" panose="020B0609020204030204" pitchFamily="49" charset="0"/>
+                      </a:endParaRPr>
+                    </a:p>
+                  </a:txBody>
+                  <a:tcPr marL="68580" marR="68580" marT="0" marB="0" anchor="ctr"/>
+                </a:tc>
+                <a:tc>
+                  <a:txBody>
+                    <a:bodyPr/>
+                    <a:lstStyle/>
+                    <a:p>
+                      <a:pPr marL="0" marR="0" algn="ctr">
+                        <a:spcBef>
+                          <a:spcPts val="0"/>
+                        </a:spcBef>
+                        <a:spcAft>
+                          <a:spcPts val="0"/>
+                        </a:spcAft>
+                      </a:pPr>
+                      <a:r>
+                        <a:rPr lang="en-US" sz="1800">
+                          <a:effectLst/>
+                        </a:rPr>
+                        <a:t>D</a:t>
+                      </a:r>
+                      <a:r>
+                        <a:rPr lang="en-US" sz="1800" baseline="-25000">
+                          <a:effectLst/>
+                        </a:rPr>
+                        <a:t>1</a:t>
+                      </a:r>
+                      <a:endParaRPr lang="en-US" sz="1800">
+                        <a:effectLst/>
+                        <a:latin typeface="Consolas" panose="020B0609020204030204" pitchFamily="49" charset="0"/>
+                        <a:ea typeface="宋体"/>
+                        <a:cs typeface="Consolas" panose="020B0609020204030204" pitchFamily="49" charset="0"/>
+                      </a:endParaRPr>
+                    </a:p>
+                  </a:txBody>
+                  <a:tcPr marL="68580" marR="68580" marT="0" marB="0" anchor="ctr"/>
+                </a:tc>
+                <a:tc>
+                  <a:txBody>
+                    <a:bodyPr/>
+                    <a:lstStyle/>
+                    <a:p>
+                      <a:pPr marL="0" marR="0" algn="ctr">
+                        <a:spcBef>
+                          <a:spcPts val="0"/>
+                        </a:spcBef>
+                        <a:spcAft>
+                          <a:spcPts val="0"/>
+                        </a:spcAft>
+                      </a:pPr>
+                      <a:r>
+                        <a:rPr lang="en-US" sz="1800">
+                          <a:effectLst/>
+                        </a:rPr>
+                        <a:t>D</a:t>
+                      </a:r>
+                      <a:r>
+                        <a:rPr lang="en-US" sz="1800" baseline="-25000">
+                          <a:effectLst/>
+                        </a:rPr>
+                        <a:t>0</a:t>
+                      </a:r>
+                      <a:endParaRPr lang="en-US" sz="1800">
+                        <a:effectLst/>
+                        <a:latin typeface="Consolas" panose="020B0609020204030204" pitchFamily="49" charset="0"/>
+                        <a:ea typeface="宋体"/>
+                        <a:cs typeface="Consolas" panose="020B0609020204030204" pitchFamily="49" charset="0"/>
+                      </a:endParaRPr>
+                    </a:p>
+                  </a:txBody>
+                  <a:tcPr marL="68580" marR="68580" marT="0" marB="0" anchor="ctr"/>
+                </a:tc>
+                <a:extLst>
+                  <a:ext uri="{0D108BD9-81ED-4DB2-BD59-A6C34878D82A}">
+                    <a16:rowId xmlns:a16="http://schemas.microsoft.com/office/drawing/2014/main" val="10001"/>
+                  </a:ext>
+                </a:extLst>
+              </a:tr>
+              <a:tr h="409146">
+                <a:tc>
+                  <a:txBody>
+                    <a:bodyPr/>
+                    <a:lstStyle/>
+                    <a:p>
+                      <a:pPr marL="0" marR="0" algn="ctr">
+                        <a:spcBef>
+                          <a:spcPts val="0"/>
+                        </a:spcBef>
+                        <a:spcAft>
+                          <a:spcPts val="0"/>
+                        </a:spcAft>
+                      </a:pPr>
+                      <a:r>
+                        <a:rPr lang="en-US" sz="1800" b="1" dirty="0">
+                          <a:effectLst/>
+                          <a:latin typeface="Consolas" panose="020B0609020204030204" pitchFamily="49" charset="0"/>
+                          <a:cs typeface="Consolas" panose="020B0609020204030204" pitchFamily="49" charset="0"/>
+                        </a:rPr>
+                        <a:t>0</a:t>
+                      </a:r>
+                      <a:endParaRPr lang="en-US" sz="1800" b="1" dirty="0">
+                        <a:effectLst/>
+                        <a:latin typeface="Consolas" panose="020B0609020204030204" pitchFamily="49" charset="0"/>
+                        <a:ea typeface="宋体"/>
+                        <a:cs typeface="Consolas" panose="020B0609020204030204" pitchFamily="49" charset="0"/>
+                      </a:endParaRPr>
+                    </a:p>
+                  </a:txBody>
+                  <a:tcPr marL="68580" marR="68580" marT="0" marB="0" anchor="ctr"/>
+                </a:tc>
+                <a:tc>
+                  <a:txBody>
+                    <a:bodyPr/>
+                    <a:lstStyle/>
+                    <a:p>
+                      <a:pPr marL="0" marR="0" algn="ctr">
+                        <a:spcBef>
+                          <a:spcPts val="0"/>
+                        </a:spcBef>
+                        <a:spcAft>
+                          <a:spcPts val="0"/>
+                        </a:spcAft>
+                      </a:pPr>
+                      <a:r>
+                        <a:rPr lang="en-US" sz="1800" b="1" dirty="0">
+                          <a:effectLst/>
+                          <a:latin typeface="Consolas" panose="020B0609020204030204" pitchFamily="49" charset="0"/>
+                          <a:cs typeface="Consolas" panose="020B0609020204030204" pitchFamily="49" charset="0"/>
+                        </a:rPr>
+                        <a:t>1</a:t>
+                      </a:r>
+                      <a:endParaRPr lang="en-US" sz="1800" b="1" dirty="0">
+                        <a:effectLst/>
+                        <a:latin typeface="Consolas" panose="020B0609020204030204" pitchFamily="49" charset="0"/>
+                        <a:ea typeface="宋体"/>
+                        <a:cs typeface="Consolas" panose="020B0609020204030204" pitchFamily="49" charset="0"/>
+                      </a:endParaRPr>
+                    </a:p>
+                  </a:txBody>
+                  <a:tcPr marL="68580" marR="68580" marT="0" marB="0" anchor="ctr">
+                    <a:lnR w="19050" cap="flat" cmpd="sng" algn="ctr">
+                      <a:solidFill>
+                        <a:schemeClr val="tx1"/>
+                      </a:solidFill>
+                      <a:prstDash val="solid"/>
+                      <a:round/>
+                      <a:headEnd type="none" w="med" len="med"/>
+                      <a:tailEnd type="none" w="med" len="med"/>
+                    </a:lnR>
+                  </a:tcPr>
+                </a:tc>
+                <a:tc>
+                  <a:txBody>
+                    <a:bodyPr/>
+                    <a:lstStyle/>
+                    <a:p>
+                      <a:pPr marL="0" marR="0" algn="ctr">
+                        <a:spcBef>
+                          <a:spcPts val="0"/>
+                        </a:spcBef>
+                        <a:spcAft>
+                          <a:spcPts val="0"/>
+                        </a:spcAft>
+                      </a:pPr>
+                      <a:r>
+                        <a:rPr lang="en-US" sz="1800" dirty="0" err="1">
+                          <a:effectLst/>
+                        </a:rPr>
+                        <a:t>D</a:t>
+                      </a:r>
+                      <a:r>
+                        <a:rPr lang="en-US" sz="1800" baseline="-25000" dirty="0" err="1">
+                          <a:effectLst/>
+                        </a:rPr>
+                        <a:t>0</a:t>
+                      </a:r>
+                      <a:endParaRPr lang="en-US" sz="1800" dirty="0">
+                        <a:effectLst/>
+                        <a:latin typeface="Consolas" panose="020B0609020204030204" pitchFamily="49" charset="0"/>
+                        <a:ea typeface="宋体"/>
+                        <a:cs typeface="Consolas" panose="020B0609020204030204" pitchFamily="49" charset="0"/>
+                      </a:endParaRPr>
+                    </a:p>
+                  </a:txBody>
+                  <a:tcPr marL="68580" marR="68580" marT="0" marB="0" anchor="ctr">
+                    <a:lnL w="19050" cap="flat" cmpd="sng" algn="ctr">
+                      <a:solidFill>
+                        <a:schemeClr val="tx1"/>
+                      </a:solidFill>
+                      <a:prstDash val="solid"/>
+                      <a:round/>
+                      <a:headEnd type="none" w="med" len="med"/>
+                      <a:tailEnd type="none" w="med" len="med"/>
+                    </a:lnL>
+                  </a:tcPr>
+                </a:tc>
+                <a:tc>
+                  <a:txBody>
+                    <a:bodyPr/>
+                    <a:lstStyle/>
+                    <a:p>
+                      <a:pPr marL="0" marR="0" algn="ctr">
+                        <a:spcBef>
+                          <a:spcPts val="0"/>
+                        </a:spcBef>
+                        <a:spcAft>
+                          <a:spcPts val="0"/>
+                        </a:spcAft>
+                      </a:pPr>
+                      <a:r>
+                        <a:rPr lang="en-US" sz="1800" dirty="0" err="1">
+                          <a:effectLst/>
+                        </a:rPr>
+                        <a:t>D</a:t>
+                      </a:r>
+                      <a:r>
+                        <a:rPr lang="en-US" sz="1800" baseline="-25000" dirty="0" err="1">
+                          <a:effectLst/>
+                        </a:rPr>
+                        <a:t>3</a:t>
+                      </a:r>
+                      <a:endParaRPr lang="en-US" sz="1800" dirty="0">
+                        <a:effectLst/>
+                        <a:latin typeface="Consolas" panose="020B0609020204030204" pitchFamily="49" charset="0"/>
+                        <a:ea typeface="宋体"/>
+                        <a:cs typeface="Consolas" panose="020B0609020204030204" pitchFamily="49" charset="0"/>
+                      </a:endParaRPr>
+                    </a:p>
+                  </a:txBody>
+                  <a:tcPr marL="68580" marR="68580" marT="0" marB="0" anchor="ctr"/>
+                </a:tc>
+                <a:tc>
+                  <a:txBody>
+                    <a:bodyPr/>
+                    <a:lstStyle/>
+                    <a:p>
+                      <a:pPr marL="0" marR="0" algn="ctr">
+                        <a:spcBef>
+                          <a:spcPts val="0"/>
+                        </a:spcBef>
+                        <a:spcAft>
+                          <a:spcPts val="0"/>
+                        </a:spcAft>
+                      </a:pPr>
+                      <a:r>
+                        <a:rPr lang="en-US" sz="1800">
+                          <a:effectLst/>
+                        </a:rPr>
+                        <a:t>D</a:t>
+                      </a:r>
+                      <a:r>
+                        <a:rPr lang="en-US" sz="1800" baseline="-25000">
+                          <a:effectLst/>
+                        </a:rPr>
+                        <a:t>2</a:t>
+                      </a:r>
+                      <a:endParaRPr lang="en-US" sz="1800">
+                        <a:effectLst/>
+                        <a:latin typeface="Consolas" panose="020B0609020204030204" pitchFamily="49" charset="0"/>
+                        <a:ea typeface="宋体"/>
+                        <a:cs typeface="Consolas" panose="020B0609020204030204" pitchFamily="49" charset="0"/>
+                      </a:endParaRPr>
+                    </a:p>
+                  </a:txBody>
+                  <a:tcPr marL="68580" marR="68580" marT="0" marB="0" anchor="ctr"/>
+                </a:tc>
+                <a:tc>
+                  <a:txBody>
+                    <a:bodyPr/>
+                    <a:lstStyle/>
+                    <a:p>
+                      <a:pPr marL="0" marR="0" algn="ctr">
+                        <a:spcBef>
+                          <a:spcPts val="0"/>
+                        </a:spcBef>
+                        <a:spcAft>
+                          <a:spcPts val="0"/>
+                        </a:spcAft>
+                      </a:pPr>
+                      <a:r>
+                        <a:rPr lang="en-US" sz="1800">
+                          <a:effectLst/>
+                        </a:rPr>
+                        <a:t>D</a:t>
+                      </a:r>
+                      <a:r>
+                        <a:rPr lang="en-US" sz="1800" baseline="-25000">
+                          <a:effectLst/>
+                        </a:rPr>
+                        <a:t>1</a:t>
+                      </a:r>
+                      <a:endParaRPr lang="en-US" sz="1800">
+                        <a:effectLst/>
+                        <a:latin typeface="Consolas" panose="020B0609020204030204" pitchFamily="49" charset="0"/>
+                        <a:ea typeface="宋体"/>
+                        <a:cs typeface="Consolas" panose="020B0609020204030204" pitchFamily="49" charset="0"/>
+                      </a:endParaRPr>
+                    </a:p>
+                  </a:txBody>
+                  <a:tcPr marL="68580" marR="68580" marT="0" marB="0" anchor="ctr"/>
+                </a:tc>
+                <a:extLst>
+                  <a:ext uri="{0D108BD9-81ED-4DB2-BD59-A6C34878D82A}">
+                    <a16:rowId xmlns:a16="http://schemas.microsoft.com/office/drawing/2014/main" val="10002"/>
+                  </a:ext>
+                </a:extLst>
+              </a:tr>
+              <a:tr h="409146">
+                <a:tc>
+                  <a:txBody>
+                    <a:bodyPr/>
+                    <a:lstStyle/>
+                    <a:p>
+                      <a:pPr marL="0" marR="0" algn="ctr">
+                        <a:spcBef>
+                          <a:spcPts val="0"/>
+                        </a:spcBef>
+                        <a:spcAft>
+                          <a:spcPts val="0"/>
+                        </a:spcAft>
+                      </a:pPr>
+                      <a:r>
+                        <a:rPr lang="en-US" sz="1800" b="1">
+                          <a:effectLst/>
+                          <a:latin typeface="Consolas" panose="020B0609020204030204" pitchFamily="49" charset="0"/>
+                          <a:cs typeface="Consolas" panose="020B0609020204030204" pitchFamily="49" charset="0"/>
+                        </a:rPr>
+                        <a:t>1</a:t>
+                      </a:r>
+                      <a:endParaRPr lang="en-US" sz="1800" b="1">
+                        <a:effectLst/>
+                        <a:latin typeface="Consolas" panose="020B0609020204030204" pitchFamily="49" charset="0"/>
+                        <a:ea typeface="宋体"/>
+                        <a:cs typeface="Consolas" panose="020B0609020204030204" pitchFamily="49" charset="0"/>
+                      </a:endParaRPr>
+                    </a:p>
+                  </a:txBody>
+                  <a:tcPr marL="68580" marR="68580" marT="0" marB="0" anchor="ctr"/>
+                </a:tc>
+                <a:tc>
+                  <a:txBody>
+                    <a:bodyPr/>
+                    <a:lstStyle/>
+                    <a:p>
+                      <a:pPr marL="0" marR="0" algn="ctr">
+                        <a:spcBef>
+                          <a:spcPts val="0"/>
+                        </a:spcBef>
+                        <a:spcAft>
+                          <a:spcPts val="0"/>
+                        </a:spcAft>
+                      </a:pPr>
+                      <a:r>
+                        <a:rPr lang="en-US" sz="1800" b="1" dirty="0">
+                          <a:effectLst/>
+                          <a:latin typeface="Consolas" panose="020B0609020204030204" pitchFamily="49" charset="0"/>
+                          <a:cs typeface="Consolas" panose="020B0609020204030204" pitchFamily="49" charset="0"/>
+                        </a:rPr>
+                        <a:t>0</a:t>
+                      </a:r>
+                      <a:endParaRPr lang="en-US" sz="1800" b="1" dirty="0">
+                        <a:effectLst/>
+                        <a:latin typeface="Consolas" panose="020B0609020204030204" pitchFamily="49" charset="0"/>
+                        <a:ea typeface="宋体"/>
+                        <a:cs typeface="Consolas" panose="020B0609020204030204" pitchFamily="49" charset="0"/>
+                      </a:endParaRPr>
+                    </a:p>
+                  </a:txBody>
+                  <a:tcPr marL="68580" marR="68580" marT="0" marB="0" anchor="ctr">
+                    <a:lnR w="19050" cap="flat" cmpd="sng" algn="ctr">
+                      <a:solidFill>
+                        <a:schemeClr val="tx1"/>
+                      </a:solidFill>
+                      <a:prstDash val="solid"/>
+                      <a:round/>
+                      <a:headEnd type="none" w="med" len="med"/>
+                      <a:tailEnd type="none" w="med" len="med"/>
+                    </a:lnR>
+                  </a:tcPr>
+                </a:tc>
+                <a:tc>
+                  <a:txBody>
+                    <a:bodyPr/>
+                    <a:lstStyle/>
+                    <a:p>
+                      <a:pPr marL="0" marR="0" algn="ctr">
+                        <a:spcBef>
+                          <a:spcPts val="0"/>
+                        </a:spcBef>
+                        <a:spcAft>
+                          <a:spcPts val="0"/>
+                        </a:spcAft>
+                      </a:pPr>
+                      <a:r>
+                        <a:rPr lang="en-US" sz="1800">
+                          <a:effectLst/>
+                        </a:rPr>
+                        <a:t>D</a:t>
+                      </a:r>
+                      <a:r>
+                        <a:rPr lang="en-US" sz="1800" baseline="-25000">
+                          <a:effectLst/>
+                        </a:rPr>
+                        <a:t>1</a:t>
+                      </a:r>
+                      <a:endParaRPr lang="en-US" sz="1800">
+                        <a:effectLst/>
+                        <a:latin typeface="Consolas" panose="020B0609020204030204" pitchFamily="49" charset="0"/>
+                        <a:ea typeface="宋体"/>
+                        <a:cs typeface="Consolas" panose="020B0609020204030204" pitchFamily="49" charset="0"/>
+                      </a:endParaRPr>
+                    </a:p>
+                  </a:txBody>
+                  <a:tcPr marL="68580" marR="68580" marT="0" marB="0" anchor="ctr">
+                    <a:lnL w="19050" cap="flat" cmpd="sng" algn="ctr">
+                      <a:solidFill>
+                        <a:schemeClr val="tx1"/>
+                      </a:solidFill>
+                      <a:prstDash val="solid"/>
+                      <a:round/>
+                      <a:headEnd type="none" w="med" len="med"/>
+                      <a:tailEnd type="none" w="med" len="med"/>
+                    </a:lnL>
+                  </a:tcPr>
+                </a:tc>
+                <a:tc>
+                  <a:txBody>
+                    <a:bodyPr/>
+                    <a:lstStyle/>
+                    <a:p>
+                      <a:pPr marL="0" marR="0" algn="ctr">
+                        <a:spcBef>
+                          <a:spcPts val="0"/>
+                        </a:spcBef>
+                        <a:spcAft>
+                          <a:spcPts val="0"/>
+                        </a:spcAft>
+                      </a:pPr>
+                      <a:r>
+                        <a:rPr lang="en-US" sz="1800" dirty="0" err="1">
+                          <a:effectLst/>
+                        </a:rPr>
+                        <a:t>D</a:t>
+                      </a:r>
+                      <a:r>
+                        <a:rPr lang="en-US" sz="1800" baseline="-25000" dirty="0" err="1">
+                          <a:effectLst/>
+                        </a:rPr>
+                        <a:t>0</a:t>
+                      </a:r>
+                      <a:endParaRPr lang="en-US" sz="1800" dirty="0">
+                        <a:effectLst/>
+                        <a:latin typeface="Consolas" panose="020B0609020204030204" pitchFamily="49" charset="0"/>
+                        <a:ea typeface="宋体"/>
+                        <a:cs typeface="Consolas" panose="020B0609020204030204" pitchFamily="49" charset="0"/>
+                      </a:endParaRPr>
+                    </a:p>
+                  </a:txBody>
+                  <a:tcPr marL="68580" marR="68580" marT="0" marB="0" anchor="ctr"/>
+                </a:tc>
+                <a:tc>
+                  <a:txBody>
+                    <a:bodyPr/>
+                    <a:lstStyle/>
+                    <a:p>
+                      <a:pPr marL="0" marR="0" algn="ctr">
+                        <a:spcBef>
+                          <a:spcPts val="0"/>
+                        </a:spcBef>
+                        <a:spcAft>
+                          <a:spcPts val="0"/>
+                        </a:spcAft>
+                      </a:pPr>
+                      <a:r>
+                        <a:rPr lang="en-US" sz="1800" dirty="0" err="1">
+                          <a:effectLst/>
+                        </a:rPr>
+                        <a:t>D</a:t>
+                      </a:r>
+                      <a:r>
+                        <a:rPr lang="en-US" sz="1800" baseline="-25000" dirty="0" err="1">
+                          <a:effectLst/>
+                        </a:rPr>
+                        <a:t>3</a:t>
+                      </a:r>
+                      <a:endParaRPr lang="en-US" sz="1800" dirty="0">
+                        <a:effectLst/>
+                        <a:latin typeface="Consolas" panose="020B0609020204030204" pitchFamily="49" charset="0"/>
+                        <a:ea typeface="宋体"/>
+                        <a:cs typeface="Consolas" panose="020B0609020204030204" pitchFamily="49" charset="0"/>
+                      </a:endParaRPr>
+                    </a:p>
+                  </a:txBody>
+                  <a:tcPr marL="68580" marR="68580" marT="0" marB="0" anchor="ctr"/>
+                </a:tc>
+                <a:tc>
+                  <a:txBody>
+                    <a:bodyPr/>
+                    <a:lstStyle/>
+                    <a:p>
+                      <a:pPr marL="0" marR="0" algn="ctr">
+                        <a:spcBef>
+                          <a:spcPts val="0"/>
+                        </a:spcBef>
+                        <a:spcAft>
+                          <a:spcPts val="0"/>
+                        </a:spcAft>
+                      </a:pPr>
+                      <a:r>
+                        <a:rPr lang="en-US" sz="1800">
+                          <a:effectLst/>
+                        </a:rPr>
+                        <a:t>D</a:t>
+                      </a:r>
+                      <a:r>
+                        <a:rPr lang="en-US" sz="1800" baseline="-25000">
+                          <a:effectLst/>
+                        </a:rPr>
+                        <a:t>2</a:t>
+                      </a:r>
+                      <a:endParaRPr lang="en-US" sz="1800">
+                        <a:effectLst/>
+                        <a:latin typeface="Consolas" panose="020B0609020204030204" pitchFamily="49" charset="0"/>
+                        <a:ea typeface="宋体"/>
+                        <a:cs typeface="Consolas" panose="020B0609020204030204" pitchFamily="49" charset="0"/>
+                      </a:endParaRPr>
+                    </a:p>
+                  </a:txBody>
+                  <a:tcPr marL="68580" marR="68580" marT="0" marB="0" anchor="ctr"/>
+                </a:tc>
+                <a:extLst>
+                  <a:ext uri="{0D108BD9-81ED-4DB2-BD59-A6C34878D82A}">
+                    <a16:rowId xmlns:a16="http://schemas.microsoft.com/office/drawing/2014/main" val="10003"/>
+                  </a:ext>
+                </a:extLst>
+              </a:tr>
+              <a:tr h="409146">
+                <a:tc>
+                  <a:txBody>
+                    <a:bodyPr/>
+                    <a:lstStyle/>
+                    <a:p>
+                      <a:pPr marL="0" marR="0" algn="ctr">
+                        <a:spcBef>
+                          <a:spcPts val="0"/>
+                        </a:spcBef>
+                        <a:spcAft>
+                          <a:spcPts val="0"/>
+                        </a:spcAft>
+                      </a:pPr>
+                      <a:r>
+                        <a:rPr lang="en-US" sz="1800" b="1" dirty="0">
+                          <a:solidFill>
+                            <a:srgbClr val="FF0000"/>
+                          </a:solidFill>
+                          <a:effectLst/>
+                          <a:latin typeface="Consolas" panose="020B0609020204030204" pitchFamily="49" charset="0"/>
+                          <a:cs typeface="Consolas" panose="020B0609020204030204" pitchFamily="49" charset="0"/>
+                        </a:rPr>
+                        <a:t>1</a:t>
+                      </a:r>
+                      <a:endParaRPr lang="en-US" sz="1800" b="1" dirty="0">
+                        <a:solidFill>
+                          <a:srgbClr val="FF0000"/>
+                        </a:solidFill>
+                        <a:effectLst/>
+                        <a:latin typeface="Consolas" panose="020B0609020204030204" pitchFamily="49" charset="0"/>
+                        <a:ea typeface="宋体"/>
+                        <a:cs typeface="Consolas" panose="020B0609020204030204" pitchFamily="49" charset="0"/>
+                      </a:endParaRPr>
+                    </a:p>
+                  </a:txBody>
+                  <a:tcPr marL="68580" marR="68580" marT="0" marB="0" anchor="ctr"/>
+                </a:tc>
+                <a:tc>
+                  <a:txBody>
+                    <a:bodyPr/>
+                    <a:lstStyle/>
+                    <a:p>
+                      <a:pPr marL="0" marR="0" algn="ctr">
+                        <a:spcBef>
+                          <a:spcPts val="0"/>
+                        </a:spcBef>
+                        <a:spcAft>
+                          <a:spcPts val="0"/>
+                        </a:spcAft>
+                      </a:pPr>
+                      <a:r>
+                        <a:rPr lang="en-US" sz="1800" b="1" dirty="0">
+                          <a:solidFill>
+                            <a:srgbClr val="FF0000"/>
+                          </a:solidFill>
+                          <a:effectLst/>
+                          <a:latin typeface="Consolas" panose="020B0609020204030204" pitchFamily="49" charset="0"/>
+                          <a:cs typeface="Consolas" panose="020B0609020204030204" pitchFamily="49" charset="0"/>
+                        </a:rPr>
+                        <a:t>1</a:t>
+                      </a:r>
+                      <a:endParaRPr lang="en-US" sz="1800" b="1" dirty="0">
+                        <a:solidFill>
+                          <a:srgbClr val="FF0000"/>
+                        </a:solidFill>
+                        <a:effectLst/>
+                        <a:latin typeface="Consolas" panose="020B0609020204030204" pitchFamily="49" charset="0"/>
+                        <a:ea typeface="宋体"/>
+                        <a:cs typeface="Consolas" panose="020B0609020204030204" pitchFamily="49" charset="0"/>
+                      </a:endParaRPr>
+                    </a:p>
+                  </a:txBody>
+                  <a:tcPr marL="68580" marR="68580" marT="0" marB="0" anchor="ctr">
+                    <a:lnR w="19050" cap="flat" cmpd="sng" algn="ctr">
+                      <a:solidFill>
+                        <a:schemeClr val="tx1"/>
+                      </a:solidFill>
+                      <a:prstDash val="solid"/>
+                      <a:round/>
+                      <a:headEnd type="none" w="med" len="med"/>
+                      <a:tailEnd type="none" w="med" len="med"/>
+                    </a:lnR>
+                  </a:tcPr>
+                </a:tc>
+                <a:tc>
+                  <a:txBody>
+                    <a:bodyPr/>
+                    <a:lstStyle/>
+                    <a:p>
+                      <a:pPr marL="0" marR="0" algn="ctr">
+                        <a:spcBef>
+                          <a:spcPts val="0"/>
+                        </a:spcBef>
+                        <a:spcAft>
+                          <a:spcPts val="0"/>
+                        </a:spcAft>
+                      </a:pPr>
+                      <a:r>
+                        <a:rPr lang="en-US" sz="1800" dirty="0" err="1">
+                          <a:solidFill>
+                            <a:srgbClr val="FF0000"/>
+                          </a:solidFill>
+                          <a:effectLst/>
+                        </a:rPr>
+                        <a:t>D</a:t>
+                      </a:r>
+                      <a:r>
+                        <a:rPr lang="en-US" sz="1800" baseline="-25000" dirty="0" err="1">
+                          <a:solidFill>
+                            <a:srgbClr val="FF0000"/>
+                          </a:solidFill>
+                          <a:effectLst/>
+                        </a:rPr>
+                        <a:t>2</a:t>
+                      </a:r>
+                      <a:endParaRPr lang="en-US" sz="1800" dirty="0">
+                        <a:solidFill>
+                          <a:srgbClr val="FF0000"/>
+                        </a:solidFill>
+                        <a:effectLst/>
+                        <a:latin typeface="Consolas" panose="020B0609020204030204" pitchFamily="49" charset="0"/>
+                        <a:ea typeface="宋体"/>
+                        <a:cs typeface="Consolas" panose="020B0609020204030204" pitchFamily="49" charset="0"/>
+                      </a:endParaRPr>
+                    </a:p>
+                  </a:txBody>
+                  <a:tcPr marL="68580" marR="68580" marT="0" marB="0" anchor="ctr">
+                    <a:lnL w="19050" cap="flat" cmpd="sng" algn="ctr">
+                      <a:solidFill>
+                        <a:schemeClr val="tx1"/>
+                      </a:solidFill>
+                      <a:prstDash val="solid"/>
+                      <a:round/>
+                      <a:headEnd type="none" w="med" len="med"/>
+                      <a:tailEnd type="none" w="med" len="med"/>
+                    </a:lnL>
+                  </a:tcPr>
+                </a:tc>
+                <a:tc>
+                  <a:txBody>
+                    <a:bodyPr/>
+                    <a:lstStyle/>
+                    <a:p>
+                      <a:pPr marL="0" marR="0" algn="ctr">
+                        <a:spcBef>
+                          <a:spcPts val="0"/>
+                        </a:spcBef>
+                        <a:spcAft>
+                          <a:spcPts val="0"/>
+                        </a:spcAft>
+                      </a:pPr>
+                      <a:r>
+                        <a:rPr lang="en-US" sz="1800" dirty="0" err="1">
+                          <a:solidFill>
+                            <a:srgbClr val="FF0000"/>
+                          </a:solidFill>
+                          <a:effectLst/>
+                        </a:rPr>
+                        <a:t>D</a:t>
+                      </a:r>
+                      <a:r>
+                        <a:rPr lang="en-US" sz="1800" baseline="-25000" dirty="0" err="1">
+                          <a:solidFill>
+                            <a:srgbClr val="FF0000"/>
+                          </a:solidFill>
+                          <a:effectLst/>
+                        </a:rPr>
+                        <a:t>1</a:t>
+                      </a:r>
+                      <a:endParaRPr lang="en-US" sz="1800" dirty="0">
+                        <a:solidFill>
+                          <a:srgbClr val="FF0000"/>
+                        </a:solidFill>
+                        <a:effectLst/>
+                        <a:latin typeface="Consolas" panose="020B0609020204030204" pitchFamily="49" charset="0"/>
+                        <a:ea typeface="宋体"/>
+                        <a:cs typeface="Consolas" panose="020B0609020204030204" pitchFamily="49" charset="0"/>
+                      </a:endParaRPr>
+                    </a:p>
+                  </a:txBody>
+                  <a:tcPr marL="68580" marR="68580" marT="0" marB="0" anchor="ctr"/>
+                </a:tc>
+                <a:tc>
+                  <a:txBody>
+                    <a:bodyPr/>
+                    <a:lstStyle/>
+                    <a:p>
+                      <a:pPr marL="0" marR="0" algn="ctr">
+                        <a:spcBef>
+                          <a:spcPts val="0"/>
+                        </a:spcBef>
+                        <a:spcAft>
+                          <a:spcPts val="0"/>
+                        </a:spcAft>
+                      </a:pPr>
+                      <a:r>
+                        <a:rPr lang="en-US" sz="1800" dirty="0" err="1">
+                          <a:solidFill>
+                            <a:srgbClr val="FF0000"/>
+                          </a:solidFill>
+                          <a:effectLst/>
+                        </a:rPr>
+                        <a:t>D</a:t>
+                      </a:r>
+                      <a:r>
+                        <a:rPr lang="en-US" sz="1800" baseline="-25000" dirty="0" err="1">
+                          <a:solidFill>
+                            <a:srgbClr val="FF0000"/>
+                          </a:solidFill>
+                          <a:effectLst/>
+                        </a:rPr>
+                        <a:t>0</a:t>
+                      </a:r>
+                      <a:endParaRPr lang="en-US" sz="1800" dirty="0">
+                        <a:solidFill>
+                          <a:srgbClr val="FF0000"/>
+                        </a:solidFill>
+                        <a:effectLst/>
+                        <a:latin typeface="Consolas" panose="020B0609020204030204" pitchFamily="49" charset="0"/>
+                        <a:ea typeface="宋体"/>
+                        <a:cs typeface="Consolas" panose="020B0609020204030204" pitchFamily="49" charset="0"/>
+                      </a:endParaRPr>
+                    </a:p>
+                  </a:txBody>
+                  <a:tcPr marL="68580" marR="68580" marT="0" marB="0" anchor="ctr"/>
+                </a:tc>
+                <a:tc>
+                  <a:txBody>
+                    <a:bodyPr/>
+                    <a:lstStyle/>
+                    <a:p>
+                      <a:pPr marL="0" marR="0" algn="ctr">
+                        <a:spcBef>
+                          <a:spcPts val="0"/>
+                        </a:spcBef>
+                        <a:spcAft>
+                          <a:spcPts val="0"/>
+                        </a:spcAft>
+                      </a:pPr>
+                      <a:r>
+                        <a:rPr lang="en-US" sz="1800" dirty="0" err="1">
+                          <a:solidFill>
+                            <a:srgbClr val="FF0000"/>
+                          </a:solidFill>
+                          <a:effectLst/>
+                        </a:rPr>
+                        <a:t>D</a:t>
+                      </a:r>
+                      <a:r>
+                        <a:rPr lang="en-US" sz="1800" baseline="-25000" dirty="0" err="1">
+                          <a:solidFill>
+                            <a:srgbClr val="FF0000"/>
+                          </a:solidFill>
+                          <a:effectLst/>
+                        </a:rPr>
+                        <a:t>3</a:t>
+                      </a:r>
+                      <a:endParaRPr lang="en-US" sz="1800" dirty="0">
+                        <a:solidFill>
+                          <a:srgbClr val="FF0000"/>
+                        </a:solidFill>
+                        <a:effectLst/>
+                        <a:latin typeface="Consolas" panose="020B0609020204030204" pitchFamily="49" charset="0"/>
+                        <a:ea typeface="宋体"/>
+                        <a:cs typeface="Consolas" panose="020B0609020204030204" pitchFamily="49" charset="0"/>
+                      </a:endParaRPr>
+                    </a:p>
+                  </a:txBody>
+                  <a:tcPr marL="68580" marR="68580" marT="0" marB="0" anchor="ctr"/>
+                </a:tc>
+                <a:extLst>
+                  <a:ext uri="{0D108BD9-81ED-4DB2-BD59-A6C34878D82A}">
+                    <a16:rowId xmlns:a16="http://schemas.microsoft.com/office/drawing/2014/main" val="10004"/>
+                  </a:ext>
+                </a:extLst>
+              </a:tr>
+            </a:tbl>
+          </a:graphicData>
+        </a:graphic>
+      </p:graphicFrame>
+      <p:sp>
+        <p:nvSpPr>
+          <p:cNvPr id="8" name="Rectangle 7"/>
+          <p:cNvSpPr/>
+          <p:nvPr/>
+        </p:nvSpPr>
+        <p:spPr>
+          <a:xfrm>
+            <a:off x="457200" y="1371600"/>
+            <a:ext cx="8153400" cy="369332"/>
+          </a:xfrm>
+          <a:prstGeom prst="rect">
+            <a:avLst/>
+          </a:prstGeom>
+        </p:spPr>
+        <p:txBody>
+          <a:bodyPr wrap="square">
+            <a:spAutoFit/>
+          </a:bodyPr>
+          <a:lstStyle/>
+          <a:p>
+            <a:r>
+              <a:rPr lang="en-US" dirty="0">
+                <a:solidFill>
+                  <a:srgbClr val="C00000"/>
+                </a:solidFill>
+              </a:rPr>
+              <a:t>Example:  </a:t>
+            </a:r>
+            <a:r>
+              <a:rPr lang="en-US" dirty="0" err="1">
+                <a:solidFill>
+                  <a:srgbClr val="C00000"/>
+                </a:solidFill>
+                <a:latin typeface="Consolas" panose="020B0609020204030204" pitchFamily="49" charset="0"/>
+                <a:cs typeface="Consolas" panose="020B0609020204030204" pitchFamily="49" charset="0"/>
+              </a:rPr>
+              <a:t>S</a:t>
+            </a:r>
+            <a:r>
+              <a:rPr lang="en-US" baseline="-25000" dirty="0" err="1">
+                <a:solidFill>
+                  <a:srgbClr val="C00000"/>
+                </a:solidFill>
+                <a:latin typeface="Consolas" panose="020B0609020204030204" pitchFamily="49" charset="0"/>
+                <a:cs typeface="Consolas" panose="020B0609020204030204" pitchFamily="49" charset="0"/>
+              </a:rPr>
+              <a:t>1</a:t>
+            </a:r>
+            <a:r>
+              <a:rPr lang="en-US" dirty="0" err="1">
+                <a:solidFill>
+                  <a:srgbClr val="C00000"/>
+                </a:solidFill>
+                <a:latin typeface="Consolas" panose="020B0609020204030204" pitchFamily="49" charset="0"/>
+                <a:cs typeface="Consolas" panose="020B0609020204030204" pitchFamily="49" charset="0"/>
+              </a:rPr>
+              <a:t>S</a:t>
+            </a:r>
+            <a:r>
+              <a:rPr lang="en-US" baseline="-25000" dirty="0" err="1">
+                <a:solidFill>
+                  <a:srgbClr val="C00000"/>
+                </a:solidFill>
+                <a:latin typeface="Consolas" panose="020B0609020204030204" pitchFamily="49" charset="0"/>
+                <a:cs typeface="Consolas" panose="020B0609020204030204" pitchFamily="49" charset="0"/>
+              </a:rPr>
+              <a:t>0</a:t>
+            </a:r>
+            <a:r>
+              <a:rPr lang="en-US" dirty="0">
+                <a:solidFill>
+                  <a:srgbClr val="C00000"/>
+                </a:solidFill>
+                <a:latin typeface="Consolas" panose="020B0609020204030204" pitchFamily="49" charset="0"/>
+                <a:cs typeface="Consolas" panose="020B0609020204030204" pitchFamily="49" charset="0"/>
+              </a:rPr>
+              <a:t> = 11</a:t>
+            </a:r>
           </a:p>
         </p:txBody>
       </p:sp>
       <p:pic>
         <p:nvPicPr>
-          <p:cNvPr id="4" name="Picture 3"/>
+          <p:cNvPr id="7" name="Picture 6"/>
           <p:cNvPicPr>
             <a:picLocks noChangeAspect="1"/>
           </p:cNvPicPr>
           <p:nvPr/>
         </p:nvPicPr>
         <p:blipFill>
-          <a:blip r:embed="rId2"/>
+          <a:blip r:embed="rId2" cstate="print">
+            <a:extLst>
+              <a:ext uri="{28A0092B-C50C-407E-A947-70E740481C1C}">
+                <a14:useLocalDpi xmlns:a14="http://schemas.microsoft.com/office/drawing/2010/main" val="0"/>
+              </a:ext>
+            </a:extLst>
+          </a:blip>
           <a:stretch>
             <a:fillRect/>
           </a:stretch>
         </p:blipFill>
         <p:spPr>
           <a:xfrm>
-            <a:off x="256124" y="3086370"/>
-            <a:ext cx="8631751" cy="685260"/>
+            <a:off x="256021" y="2179314"/>
+            <a:ext cx="5611379" cy="2773686"/>
           </a:xfrm>
           <a:prstGeom prst="rect">
             <a:avLst/>
@@ -4952,7 +6441,7 @@
     </p:spTree>
     <p:extLst>
       <p:ext uri="{BB962C8B-B14F-4D97-AF65-F5344CB8AC3E}">
-        <p14:creationId xmlns:p14="http://schemas.microsoft.com/office/powerpoint/2010/main" val="2714306100"/>
+        <p14:creationId xmlns:p14="http://schemas.microsoft.com/office/powerpoint/2010/main" val="2177597633"/>
       </p:ext>
     </p:extLst>
   </p:cSld>
@@ -4995,8 +6484,14 @@
           <a:lstStyle/>
           <a:p>
             <a:r>
+              <a:rPr lang="en-US" b="1" dirty="0">
+                <a:latin typeface="Consolas" panose="020B0609020204030204" pitchFamily="49" charset="0"/>
+              </a:rPr>
+              <a:t>ADR</a:t>
+            </a:r>
+            <a:r>
               <a:rPr lang="en-US" dirty="0"/>
-              <a:t>64-bit Logic Shift Left</a:t>
+              <a:t> Pseudo-instruction</a:t>
             </a:r>
           </a:p>
         </p:txBody>
@@ -5020,6 +6515,312 @@
               <a:rPr kumimoji="0" lang="en-US" smtClean="0"/>
               <a:pPr/>
               <a:t>11</a:t>
+            </a:fld>
+            <a:endParaRPr kumimoji="0" lang="en-US" dirty="0"/>
+          </a:p>
+        </p:txBody>
+      </p:sp>
+      <p:sp>
+        <p:nvSpPr>
+          <p:cNvPr id="4" name="Content Placeholder 3"/>
+          <p:cNvSpPr>
+            <a:spLocks noGrp="1"/>
+          </p:cNvSpPr>
+          <p:nvPr>
+            <p:ph sz="quarter" idx="1"/>
+          </p:nvPr>
+        </p:nvSpPr>
+        <p:spPr/>
+        <p:txBody>
+          <a:bodyPr/>
+          <a:lstStyle/>
+          <a:p>
+            <a:r>
+              <a:rPr lang="en-US" b="1" dirty="0">
+                <a:latin typeface="Consolas" panose="020B0609020204030204" pitchFamily="49" charset="0"/>
+              </a:rPr>
+              <a:t>ADR</a:t>
+            </a:r>
+            <a:r>
+              <a:rPr lang="en-US" dirty="0"/>
+              <a:t>: loads a program-relative or register-relative address into a register</a:t>
+            </a:r>
+          </a:p>
+        </p:txBody>
+      </p:sp>
+      <p:sp>
+        <p:nvSpPr>
+          <p:cNvPr id="5" name="Rectangle 4"/>
+          <p:cNvSpPr/>
+          <p:nvPr/>
+        </p:nvSpPr>
+        <p:spPr>
+          <a:xfrm>
+            <a:off x="1524000" y="3124200"/>
+            <a:ext cx="5715000" cy="738664"/>
+          </a:xfrm>
+          <a:prstGeom prst="rect">
+            <a:avLst/>
+          </a:prstGeom>
+        </p:spPr>
+        <p:style>
+          <a:lnRef idx="2">
+            <a:schemeClr val="accent1"/>
+          </a:lnRef>
+          <a:fillRef idx="1">
+            <a:schemeClr val="lt1"/>
+          </a:fillRef>
+          <a:effectRef idx="0">
+            <a:schemeClr val="accent1"/>
+          </a:effectRef>
+          <a:fontRef idx="minor">
+            <a:schemeClr val="dk1"/>
+          </a:fontRef>
+        </p:style>
+        <p:txBody>
+          <a:bodyPr wrap="square">
+            <a:spAutoFit/>
+          </a:bodyPr>
+          <a:lstStyle/>
+          <a:p>
+            <a:r>
+              <a:rPr lang="en-US" dirty="0">
+                <a:latin typeface="Consolas" panose="020B0609020204030204" pitchFamily="49" charset="0"/>
+              </a:rPr>
+              <a:t>start  MOV r0,#10      </a:t>
+            </a:r>
+            <a:r>
+              <a:rPr lang="en-US" dirty="0">
+                <a:solidFill>
+                  <a:schemeClr val="bg1">
+                    <a:lumMod val="50000"/>
+                  </a:schemeClr>
+                </a:solidFill>
+                <a:latin typeface="Consolas" panose="020B0609020204030204" pitchFamily="49" charset="0"/>
+              </a:rPr>
+              <a:t>; 32-bit instruction</a:t>
+            </a:r>
+          </a:p>
+          <a:p>
+            <a:r>
+              <a:rPr lang="en-US" dirty="0">
+                <a:latin typeface="Consolas" panose="020B0609020204030204" pitchFamily="49" charset="0"/>
+              </a:rPr>
+              <a:t>       ADR r4,start    </a:t>
+            </a:r>
+            <a:r>
+              <a:rPr lang="en-US" dirty="0">
+                <a:solidFill>
+                  <a:schemeClr val="bg1">
+                    <a:lumMod val="50000"/>
+                  </a:schemeClr>
+                </a:solidFill>
+                <a:latin typeface="Consolas" panose="020B0609020204030204" pitchFamily="49" charset="0"/>
+              </a:rPr>
+              <a:t>; 32-bit instruction</a:t>
+            </a:r>
+          </a:p>
+          <a:p>
+            <a:r>
+              <a:rPr lang="en-US" dirty="0">
+                <a:latin typeface="Consolas" panose="020B0609020204030204" pitchFamily="49" charset="0"/>
+              </a:rPr>
+              <a:t>                       </a:t>
+            </a:r>
+            <a:r>
+              <a:rPr lang="en-US" dirty="0">
+                <a:solidFill>
+                  <a:schemeClr val="bg1">
+                    <a:lumMod val="50000"/>
+                  </a:schemeClr>
+                </a:solidFill>
+                <a:latin typeface="Consolas" panose="020B0609020204030204" pitchFamily="49" charset="0"/>
+              </a:rPr>
+              <a:t>; =&gt; </a:t>
+            </a:r>
+            <a:r>
+              <a:rPr lang="en-US" dirty="0">
+                <a:solidFill>
+                  <a:srgbClr val="0041FF"/>
+                </a:solidFill>
+                <a:latin typeface="Consolas" panose="020B0609020204030204" pitchFamily="49" charset="0"/>
+              </a:rPr>
+              <a:t>SUB r4,pc,#0xc</a:t>
+            </a:r>
+          </a:p>
+        </p:txBody>
+      </p:sp>
+    </p:spTree>
+    <p:extLst>
+      <p:ext uri="{BB962C8B-B14F-4D97-AF65-F5344CB8AC3E}">
+        <p14:creationId xmlns:p14="http://schemas.microsoft.com/office/powerpoint/2010/main" val="3686948551"/>
+      </p:ext>
+    </p:extLst>
+  </p:cSld>
+  <p:clrMapOvr>
+    <a:masterClrMapping/>
+  </p:clrMapOvr>
+</p:sld>
+</file>
+
+<file path=ppt/slides/slide12.xml><?xml version="1.0" encoding="utf-8"?>
+<p:sld xmlns:a="http://schemas.openxmlformats.org/drawingml/2006/main" xmlns:r="http://schemas.openxmlformats.org/officeDocument/2006/relationships" xmlns:p="http://schemas.openxmlformats.org/presentationml/2006/main">
+  <p:cSld>
+    <p:spTree>
+      <p:nvGrpSpPr>
+        <p:cNvPr id="1" name=""/>
+        <p:cNvGrpSpPr/>
+        <p:nvPr/>
+      </p:nvGrpSpPr>
+      <p:grpSpPr>
+        <a:xfrm>
+          <a:off x="0" y="0"/>
+          <a:ext cx="0" cy="0"/>
+          <a:chOff x="0" y="0"/>
+          <a:chExt cx="0" cy="0"/>
+        </a:xfrm>
+      </p:grpSpPr>
+      <p:sp>
+        <p:nvSpPr>
+          <p:cNvPr id="2" name="Title 1"/>
+          <p:cNvSpPr>
+            <a:spLocks noGrp="1"/>
+          </p:cNvSpPr>
+          <p:nvPr>
+            <p:ph type="title"/>
+          </p:nvPr>
+        </p:nvSpPr>
+        <p:spPr/>
+        <p:txBody>
+          <a:bodyPr/>
+          <a:lstStyle/>
+          <a:p>
+            <a:r>
+              <a:rPr lang="en-US" dirty="0"/>
+              <a:t>64-bit Logic Shift Left</a:t>
+            </a:r>
+          </a:p>
+        </p:txBody>
+      </p:sp>
+      <p:sp>
+        <p:nvSpPr>
+          <p:cNvPr id="3" name="Slide Number Placeholder 2"/>
+          <p:cNvSpPr>
+            <a:spLocks noGrp="1"/>
+          </p:cNvSpPr>
+          <p:nvPr>
+            <p:ph type="sldNum" sz="quarter" idx="12"/>
+          </p:nvPr>
+        </p:nvSpPr>
+        <p:spPr/>
+        <p:txBody>
+          <a:bodyPr/>
+          <a:lstStyle/>
+          <a:p>
+            <a:fld id="{EA7C8D44-3667-46F6-9772-CC52308E2A7F}" type="slidenum">
+              <a:rPr kumimoji="0" lang="en-US" smtClean="0"/>
+              <a:pPr/>
+              <a:t>12</a:t>
+            </a:fld>
+            <a:endParaRPr kumimoji="0" lang="en-US" dirty="0"/>
+          </a:p>
+        </p:txBody>
+      </p:sp>
+      <p:pic>
+        <p:nvPicPr>
+          <p:cNvPr id="4" name="Picture 3"/>
+          <p:cNvPicPr>
+            <a:picLocks noChangeAspect="1"/>
+          </p:cNvPicPr>
+          <p:nvPr/>
+        </p:nvPicPr>
+        <p:blipFill>
+          <a:blip r:embed="rId2"/>
+          <a:stretch>
+            <a:fillRect/>
+          </a:stretch>
+        </p:blipFill>
+        <p:spPr>
+          <a:xfrm>
+            <a:off x="256124" y="3086370"/>
+            <a:ext cx="8631751" cy="685260"/>
+          </a:xfrm>
+          <a:prstGeom prst="rect">
+            <a:avLst/>
+          </a:prstGeom>
+        </p:spPr>
+      </p:pic>
+    </p:spTree>
+    <p:extLst>
+      <p:ext uri="{BB962C8B-B14F-4D97-AF65-F5344CB8AC3E}">
+        <p14:creationId xmlns:p14="http://schemas.microsoft.com/office/powerpoint/2010/main" val="2714306100"/>
+      </p:ext>
+    </p:extLst>
+  </p:cSld>
+  <p:clrMapOvr>
+    <a:masterClrMapping/>
+  </p:clrMapOvr>
+</p:sld>
+</file>
+
+<file path=ppt/slides/slide13.xml><?xml version="1.0" encoding="utf-8"?>
+<p:sld xmlns:a="http://schemas.openxmlformats.org/drawingml/2006/main" xmlns:r="http://schemas.openxmlformats.org/officeDocument/2006/relationships" xmlns:p="http://schemas.openxmlformats.org/presentationml/2006/main">
+  <p:cSld>
+    <p:spTree>
+      <p:nvGrpSpPr>
+        <p:cNvPr id="1" name=""/>
+        <p:cNvGrpSpPr/>
+        <p:nvPr/>
+      </p:nvGrpSpPr>
+      <p:grpSpPr>
+        <a:xfrm>
+          <a:off x="0" y="0"/>
+          <a:ext cx="0" cy="0"/>
+          <a:chOff x="0" y="0"/>
+          <a:chExt cx="0" cy="0"/>
+        </a:xfrm>
+      </p:grpSpPr>
+      <p:sp>
+        <p:nvSpPr>
+          <p:cNvPr id="2" name="Title 1"/>
+          <p:cNvSpPr>
+            <a:spLocks noGrp="1"/>
+          </p:cNvSpPr>
+          <p:nvPr>
+            <p:ph type="title"/>
+          </p:nvPr>
+        </p:nvSpPr>
+        <p:spPr/>
+        <p:txBody>
+          <a:bodyPr/>
+          <a:lstStyle/>
+          <a:p>
+            <a:r>
+              <a:rPr lang="en-US" dirty="0"/>
+              <a:t>64-bit Logic Shift Left</a:t>
+            </a:r>
+          </a:p>
+        </p:txBody>
+      </p:sp>
+      <p:sp>
+        <p:nvSpPr>
+          <p:cNvPr id="3" name="Slide Number Placeholder 2"/>
+          <p:cNvSpPr>
+            <a:spLocks noGrp="1"/>
+          </p:cNvSpPr>
+          <p:nvPr>
+            <p:ph type="sldNum" sz="quarter" idx="12"/>
+          </p:nvPr>
+        </p:nvSpPr>
+        <p:spPr/>
+        <p:txBody>
+          <a:bodyPr/>
+          <a:lstStyle/>
+          <a:p>
+            <a:fld id="{EA7C8D44-3667-46F6-9772-CC52308E2A7F}" type="slidenum">
+              <a:rPr kumimoji="0" lang="en-US" smtClean="0"/>
+              <a:pPr/>
+              <a:t>13</a:t>
             </a:fld>
             <a:endParaRPr kumimoji="0" lang="en-US" dirty="0"/>
           </a:p>
@@ -5121,7 +6922,7 @@
 </p:sld>
 </file>
 
-<file path=ppt/slides/slide12.xml><?xml version="1.0" encoding="utf-8"?>
+<file path=ppt/slides/slide14.xml><?xml version="1.0" encoding="utf-8"?>
 <p:sld xmlns:a="http://schemas.openxmlformats.org/drawingml/2006/main" xmlns:r="http://schemas.openxmlformats.org/officeDocument/2006/relationships" xmlns:p="http://schemas.openxmlformats.org/presentationml/2006/main">
   <p:cSld>
     <p:spTree>
@@ -5178,7 +6979,7 @@
             <a:fld id="{EA7C8D44-3667-46F6-9772-CC52308E2A7F}" type="slidenum">
               <a:rPr kumimoji="0" lang="en-US" smtClean="0"/>
               <a:pPr/>
-              <a:t>12</a:t>
+              <a:t>14</a:t>
             </a:fld>
             <a:endParaRPr kumimoji="0" lang="en-US" dirty="0"/>
           </a:p>
@@ -5221,7 +7022,7 @@
 </p:sld>
 </file>
 
-<file path=ppt/slides/slide13.xml><?xml version="1.0" encoding="utf-8"?>
+<file path=ppt/slides/slide15.xml><?xml version="1.0" encoding="utf-8"?>
 <p:sld xmlns:a="http://schemas.openxmlformats.org/drawingml/2006/main" xmlns:r="http://schemas.openxmlformats.org/officeDocument/2006/relationships" xmlns:p="http://schemas.openxmlformats.org/presentationml/2006/main">
   <p:cSld>
     <p:spTree>
@@ -5278,7 +7079,7 @@
             <a:fld id="{EA7C8D44-3667-46F6-9772-CC52308E2A7F}" type="slidenum">
               <a:rPr kumimoji="0" lang="en-US" smtClean="0"/>
               <a:pPr/>
-              <a:t>13</a:t>
+              <a:t>15</a:t>
             </a:fld>
             <a:endParaRPr kumimoji="0" lang="en-US" dirty="0"/>
           </a:p>
@@ -5380,7 +7181,7 @@
 </p:sld>
 </file>
 
-<file path=ppt/slides/slide14.xml><?xml version="1.0" encoding="utf-8"?>
+<file path=ppt/slides/slide16.xml><?xml version="1.0" encoding="utf-8"?>
 <p:sld xmlns:a="http://schemas.openxmlformats.org/drawingml/2006/main" xmlns:r="http://schemas.openxmlformats.org/officeDocument/2006/relationships" xmlns:p="http://schemas.openxmlformats.org/presentationml/2006/main">
   <p:cSld>
     <p:spTree>
@@ -5456,7 +7257,7 @@
             <a:fld id="{EA7C8D44-3667-46F6-9772-CC52308E2A7F}" type="slidenum">
               <a:rPr kumimoji="0" lang="en-US" smtClean="0"/>
               <a:pPr/>
-              <a:t>14</a:t>
+              <a:t>16</a:t>
             </a:fld>
             <a:endParaRPr kumimoji="0" lang="en-US" dirty="0"/>
           </a:p>
@@ -6045,6 +7846,1779 @@
       </p:grpSpPr>
       <p:sp>
         <p:nvSpPr>
+          <p:cNvPr id="16441" name="Rectangle 57"/>
+          <p:cNvSpPr>
+            <a:spLocks noGrp="1" noChangeArrowheads="1"/>
+          </p:cNvSpPr>
+          <p:nvPr>
+            <p:ph type="title"/>
+          </p:nvPr>
+        </p:nvSpPr>
+        <p:spPr/>
+        <p:txBody>
+          <a:bodyPr>
+            <a:normAutofit/>
+          </a:bodyPr>
+          <a:lstStyle/>
+          <a:p>
+            <a:r>
+              <a:rPr lang="en-US" dirty="0"/>
+              <a:t>Example 1: Greatest Common Divider (GCD)</a:t>
+            </a:r>
+          </a:p>
+        </p:txBody>
+      </p:sp>
+      <p:sp>
+        <p:nvSpPr>
+          <p:cNvPr id="16387" name="Rectangle 3"/>
+          <p:cNvSpPr>
+            <a:spLocks noChangeArrowheads="1"/>
+          </p:cNvSpPr>
+          <p:nvPr/>
+        </p:nvSpPr>
+        <p:spPr bwMode="auto">
+          <a:xfrm>
+            <a:off x="1660922" y="5539979"/>
+            <a:ext cx="1427559" cy="341709"/>
+          </a:xfrm>
+          <a:prstGeom prst="rect">
+            <a:avLst/>
+          </a:prstGeom>
+          <a:noFill/>
+          <a:ln w="9525">
+            <a:noFill/>
+            <a:miter lim="800000"/>
+            <a:headEnd/>
+            <a:tailEnd/>
+          </a:ln>
+        </p:spPr>
+        <p:txBody>
+          <a:bodyPr wrap="none" anchor="ctr"/>
+          <a:lstStyle/>
+          <a:p>
+            <a:endParaRPr lang="en-US" sz="1350">
+              <a:solidFill>
+                <a:prstClr val="black"/>
+              </a:solidFill>
+              <a:latin typeface="Gill Sans MT"/>
+            </a:endParaRPr>
+          </a:p>
+        </p:txBody>
+      </p:sp>
+      <p:sp>
+        <p:nvSpPr>
+          <p:cNvPr id="16388" name="Rectangle 4"/>
+          <p:cNvSpPr>
+            <a:spLocks noChangeArrowheads="1"/>
+          </p:cNvSpPr>
+          <p:nvPr/>
+        </p:nvSpPr>
+        <p:spPr bwMode="auto">
+          <a:xfrm>
+            <a:off x="3487342" y="5539979"/>
+            <a:ext cx="2169319" cy="341709"/>
+          </a:xfrm>
+          <a:prstGeom prst="rect">
+            <a:avLst/>
+          </a:prstGeom>
+          <a:noFill/>
+          <a:ln w="9525">
+            <a:noFill/>
+            <a:miter lim="800000"/>
+            <a:headEnd/>
+            <a:tailEnd/>
+          </a:ln>
+        </p:spPr>
+        <p:txBody>
+          <a:bodyPr wrap="none" anchor="ctr"/>
+          <a:lstStyle/>
+          <a:p>
+            <a:endParaRPr lang="en-US" sz="1350">
+              <a:solidFill>
+                <a:prstClr val="black"/>
+              </a:solidFill>
+              <a:latin typeface="Gill Sans MT"/>
+            </a:endParaRPr>
+          </a:p>
+        </p:txBody>
+      </p:sp>
+      <p:sp>
+        <p:nvSpPr>
+          <p:cNvPr id="16389" name="Rectangle 5"/>
+          <p:cNvSpPr>
+            <a:spLocks noChangeArrowheads="1"/>
+          </p:cNvSpPr>
+          <p:nvPr/>
+        </p:nvSpPr>
+        <p:spPr bwMode="auto">
+          <a:xfrm>
+            <a:off x="1660922" y="5539979"/>
+            <a:ext cx="1427559" cy="341709"/>
+          </a:xfrm>
+          <a:prstGeom prst="rect">
+            <a:avLst/>
+          </a:prstGeom>
+          <a:noFill/>
+          <a:ln w="9525">
+            <a:noFill/>
+            <a:miter lim="800000"/>
+            <a:headEnd/>
+            <a:tailEnd/>
+          </a:ln>
+        </p:spPr>
+        <p:txBody>
+          <a:bodyPr wrap="none" anchor="ctr"/>
+          <a:lstStyle/>
+          <a:p>
+            <a:endParaRPr lang="en-US" sz="1350">
+              <a:solidFill>
+                <a:prstClr val="black"/>
+              </a:solidFill>
+              <a:latin typeface="Gill Sans MT"/>
+            </a:endParaRPr>
+          </a:p>
+        </p:txBody>
+      </p:sp>
+      <p:sp>
+        <p:nvSpPr>
+          <p:cNvPr id="16390" name="Rectangle 6"/>
+          <p:cNvSpPr>
+            <a:spLocks noChangeArrowheads="1"/>
+          </p:cNvSpPr>
+          <p:nvPr/>
+        </p:nvSpPr>
+        <p:spPr bwMode="auto">
+          <a:xfrm>
+            <a:off x="3487342" y="5539979"/>
+            <a:ext cx="2169319" cy="341709"/>
+          </a:xfrm>
+          <a:prstGeom prst="rect">
+            <a:avLst/>
+          </a:prstGeom>
+          <a:noFill/>
+          <a:ln w="9525">
+            <a:noFill/>
+            <a:miter lim="800000"/>
+            <a:headEnd/>
+            <a:tailEnd/>
+          </a:ln>
+        </p:spPr>
+        <p:txBody>
+          <a:bodyPr wrap="none" anchor="ctr"/>
+          <a:lstStyle/>
+          <a:p>
+            <a:endParaRPr lang="en-US" sz="1350">
+              <a:solidFill>
+                <a:prstClr val="black"/>
+              </a:solidFill>
+              <a:latin typeface="Gill Sans MT"/>
+            </a:endParaRPr>
+          </a:p>
+        </p:txBody>
+      </p:sp>
+      <p:sp>
+        <p:nvSpPr>
+          <p:cNvPr id="58" name="Slide Number Placeholder 57"/>
+          <p:cNvSpPr>
+            <a:spLocks noGrp="1"/>
+          </p:cNvSpPr>
+          <p:nvPr>
+            <p:ph type="sldNum" sz="quarter" idx="12"/>
+          </p:nvPr>
+        </p:nvSpPr>
+        <p:spPr/>
+        <p:txBody>
+          <a:bodyPr/>
+          <a:lstStyle/>
+          <a:p>
+            <a:fld id="{AEE14D4A-FE32-40AF-B06D-E9622816B101}" type="slidenum">
+              <a:rPr lang="en-US">
+                <a:solidFill>
+                  <a:srgbClr val="1F497D"/>
+                </a:solidFill>
+                <a:latin typeface="Gill Sans MT"/>
+              </a:rPr>
+              <a:pPr/>
+              <a:t>2</a:t>
+            </a:fld>
+            <a:endParaRPr lang="en-US">
+              <a:solidFill>
+                <a:srgbClr val="1F497D"/>
+              </a:solidFill>
+              <a:latin typeface="Gill Sans MT"/>
+            </a:endParaRPr>
+          </a:p>
+        </p:txBody>
+      </p:sp>
+      <p:sp>
+        <p:nvSpPr>
+          <p:cNvPr id="61" name="TextBox 60"/>
+          <p:cNvSpPr txBox="1"/>
+          <p:nvPr/>
+        </p:nvSpPr>
+        <p:spPr>
+          <a:xfrm>
+            <a:off x="1353699" y="3637264"/>
+            <a:ext cx="3389752" cy="1938992"/>
+          </a:xfrm>
+          <a:prstGeom prst="rect">
+            <a:avLst/>
+          </a:prstGeom>
+          <a:noFill/>
+          <a:ln>
+            <a:solidFill>
+              <a:schemeClr val="accent1"/>
+            </a:solidFill>
+          </a:ln>
+        </p:spPr>
+        <p:txBody>
+          <a:bodyPr wrap="square" rtlCol="0">
+            <a:spAutoFit/>
+          </a:bodyPr>
+          <a:lstStyle/>
+          <a:p>
+            <a:r>
+              <a:rPr lang="en-US" sz="1200" dirty="0">
+                <a:solidFill>
+                  <a:prstClr val="black"/>
+                </a:solidFill>
+                <a:latin typeface="Consolas" panose="020B0609020204030204" pitchFamily="49" charset="0"/>
+                <a:cs typeface="Consolas" panose="020B0609020204030204" pitchFamily="49" charset="0"/>
+              </a:rPr>
+              <a:t>      </a:t>
+            </a:r>
+            <a:r>
+              <a:rPr lang="en-US" sz="1200" dirty="0">
+                <a:solidFill>
+                  <a:prstClr val="white">
+                    <a:lumMod val="65000"/>
+                  </a:prstClr>
+                </a:solidFill>
+                <a:latin typeface="Consolas" panose="020B0609020204030204" pitchFamily="49" charset="0"/>
+                <a:cs typeface="Consolas" panose="020B0609020204030204" pitchFamily="49" charset="0"/>
+              </a:rPr>
+              <a:t>; suppose r0 = a and r1 = b</a:t>
+            </a:r>
+          </a:p>
+          <a:p>
+            <a:r>
+              <a:rPr lang="en-US" sz="1200" b="1" dirty="0" err="1">
+                <a:solidFill>
+                  <a:srgbClr val="FF40FF"/>
+                </a:solidFill>
+                <a:latin typeface="Consolas" panose="020B0609020204030204" pitchFamily="49" charset="0"/>
+                <a:cs typeface="Consolas" panose="020B0609020204030204" pitchFamily="49" charset="0"/>
+              </a:rPr>
+              <a:t>gcd</a:t>
+            </a:r>
+            <a:r>
+              <a:rPr lang="en-US" sz="1200" dirty="0">
+                <a:solidFill>
+                  <a:prstClr val="black"/>
+                </a:solidFill>
+                <a:latin typeface="Consolas" panose="020B0609020204030204" pitchFamily="49" charset="0"/>
+                <a:cs typeface="Consolas" panose="020B0609020204030204" pitchFamily="49" charset="0"/>
+              </a:rPr>
+              <a:t>   CMP r0, r1	      </a:t>
+            </a:r>
+            <a:r>
+              <a:rPr lang="en-US" sz="1200" dirty="0">
+                <a:solidFill>
+                  <a:prstClr val="white">
+                    <a:lumMod val="65000"/>
+                  </a:prstClr>
+                </a:solidFill>
+                <a:latin typeface="Consolas" panose="020B0609020204030204" pitchFamily="49" charset="0"/>
+                <a:cs typeface="Consolas" panose="020B0609020204030204" pitchFamily="49" charset="0"/>
+              </a:rPr>
+              <a:t>; a &gt; b?</a:t>
+            </a:r>
+          </a:p>
+          <a:p>
+            <a:r>
+              <a:rPr lang="en-US" sz="1200" b="1" dirty="0">
+                <a:solidFill>
+                  <a:srgbClr val="0000FF"/>
+                </a:solidFill>
+                <a:latin typeface="Consolas" panose="020B0609020204030204" pitchFamily="49" charset="0"/>
+                <a:cs typeface="Consolas" panose="020B0609020204030204" pitchFamily="49" charset="0"/>
+              </a:rPr>
+              <a:t>      BEQ end</a:t>
+            </a:r>
+            <a:r>
+              <a:rPr lang="en-US" sz="1200" dirty="0">
+                <a:solidFill>
+                  <a:prstClr val="black"/>
+                </a:solidFill>
+                <a:latin typeface="Consolas" panose="020B0609020204030204" pitchFamily="49" charset="0"/>
+                <a:cs typeface="Consolas" panose="020B0609020204030204" pitchFamily="49" charset="0"/>
+              </a:rPr>
+              <a:t>	      </a:t>
+            </a:r>
+            <a:r>
+              <a:rPr lang="en-US" sz="1200" dirty="0">
+                <a:solidFill>
+                  <a:prstClr val="white">
+                    <a:lumMod val="65000"/>
+                  </a:prstClr>
+                </a:solidFill>
+                <a:latin typeface="Consolas" panose="020B0609020204030204" pitchFamily="49" charset="0"/>
+                <a:cs typeface="Consolas" panose="020B0609020204030204" pitchFamily="49" charset="0"/>
+              </a:rPr>
+              <a:t>; if a = b, done</a:t>
+            </a:r>
+          </a:p>
+          <a:p>
+            <a:r>
+              <a:rPr lang="en-US" sz="1200" dirty="0">
+                <a:solidFill>
+                  <a:prstClr val="black"/>
+                </a:solidFill>
+                <a:latin typeface="Consolas" panose="020B0609020204030204" pitchFamily="49" charset="0"/>
+                <a:cs typeface="Consolas" panose="020B0609020204030204" pitchFamily="49" charset="0"/>
+              </a:rPr>
+              <a:t>      </a:t>
+            </a:r>
+            <a:r>
+              <a:rPr lang="en-US" sz="1200" b="1" dirty="0">
+                <a:solidFill>
+                  <a:srgbClr val="FF0000"/>
+                </a:solidFill>
+                <a:latin typeface="Consolas" panose="020B0609020204030204" pitchFamily="49" charset="0"/>
+                <a:cs typeface="Consolas" panose="020B0609020204030204" pitchFamily="49" charset="0"/>
+              </a:rPr>
+              <a:t>BLO less</a:t>
+            </a:r>
+            <a:r>
+              <a:rPr lang="en-US" sz="1200" dirty="0">
+                <a:solidFill>
+                  <a:srgbClr val="FF0000"/>
+                </a:solidFill>
+                <a:latin typeface="Consolas" panose="020B0609020204030204" pitchFamily="49" charset="0"/>
+                <a:cs typeface="Consolas" panose="020B0609020204030204" pitchFamily="49" charset="0"/>
+              </a:rPr>
+              <a:t>	    </a:t>
+            </a:r>
+            <a:r>
+              <a:rPr lang="en-US" sz="1200" dirty="0">
+                <a:solidFill>
+                  <a:prstClr val="black"/>
+                </a:solidFill>
+                <a:latin typeface="Consolas" panose="020B0609020204030204" pitchFamily="49" charset="0"/>
+                <a:cs typeface="Consolas" panose="020B0609020204030204" pitchFamily="49" charset="0"/>
+              </a:rPr>
+              <a:t>  </a:t>
+            </a:r>
+            <a:r>
+              <a:rPr lang="en-US" sz="1200" dirty="0">
+                <a:solidFill>
+                  <a:prstClr val="white">
+                    <a:lumMod val="65000"/>
+                  </a:prstClr>
+                </a:solidFill>
+                <a:latin typeface="Consolas" panose="020B0609020204030204" pitchFamily="49" charset="0"/>
+                <a:cs typeface="Consolas" panose="020B0609020204030204" pitchFamily="49" charset="0"/>
+              </a:rPr>
+              <a:t>; a &lt; b</a:t>
+            </a:r>
+          </a:p>
+          <a:p>
+            <a:r>
+              <a:rPr lang="en-US" sz="1200" dirty="0">
+                <a:solidFill>
+                  <a:prstClr val="black"/>
+                </a:solidFill>
+                <a:latin typeface="Consolas" panose="020B0609020204030204" pitchFamily="49" charset="0"/>
+                <a:cs typeface="Consolas" panose="020B0609020204030204" pitchFamily="49" charset="0"/>
+              </a:rPr>
+              <a:t>      SUB r0, r0, r1  </a:t>
+            </a:r>
+            <a:r>
+              <a:rPr lang="en-US" sz="1200" dirty="0">
+                <a:solidFill>
+                  <a:prstClr val="white">
+                    <a:lumMod val="65000"/>
+                  </a:prstClr>
+                </a:solidFill>
+                <a:latin typeface="Consolas" panose="020B0609020204030204" pitchFamily="49" charset="0"/>
+                <a:cs typeface="Consolas" panose="020B0609020204030204" pitchFamily="49" charset="0"/>
+              </a:rPr>
+              <a:t>; a = a – b</a:t>
+            </a:r>
+          </a:p>
+          <a:p>
+            <a:r>
+              <a:rPr lang="en-US" sz="1200" dirty="0">
+                <a:solidFill>
+                  <a:prstClr val="black"/>
+                </a:solidFill>
+                <a:latin typeface="Consolas" panose="020B0609020204030204" pitchFamily="49" charset="0"/>
+                <a:cs typeface="Consolas" panose="020B0609020204030204" pitchFamily="49" charset="0"/>
+              </a:rPr>
+              <a:t>      </a:t>
+            </a:r>
+            <a:r>
+              <a:rPr lang="en-US" sz="1200" b="1" dirty="0">
+                <a:solidFill>
+                  <a:srgbClr val="FF40FF"/>
+                </a:solidFill>
+                <a:latin typeface="Consolas" panose="020B0609020204030204" pitchFamily="49" charset="0"/>
+                <a:cs typeface="Consolas" panose="020B0609020204030204" pitchFamily="49" charset="0"/>
+              </a:rPr>
+              <a:t>B   </a:t>
+            </a:r>
+            <a:r>
+              <a:rPr lang="en-US" sz="1200" b="1" dirty="0" err="1">
+                <a:solidFill>
+                  <a:srgbClr val="FF40FF"/>
+                </a:solidFill>
+                <a:latin typeface="Consolas" panose="020B0609020204030204" pitchFamily="49" charset="0"/>
+                <a:cs typeface="Consolas" panose="020B0609020204030204" pitchFamily="49" charset="0"/>
+              </a:rPr>
+              <a:t>gcd</a:t>
+            </a:r>
+            <a:endParaRPr lang="en-US" sz="1200" b="1" dirty="0">
+              <a:solidFill>
+                <a:srgbClr val="FF40FF"/>
+              </a:solidFill>
+              <a:latin typeface="Consolas" panose="020B0609020204030204" pitchFamily="49" charset="0"/>
+              <a:cs typeface="Consolas" panose="020B0609020204030204" pitchFamily="49" charset="0"/>
+            </a:endParaRPr>
+          </a:p>
+          <a:p>
+            <a:r>
+              <a:rPr lang="en-US" sz="1200" b="1" dirty="0">
+                <a:solidFill>
+                  <a:srgbClr val="FF0000"/>
+                </a:solidFill>
+                <a:latin typeface="Consolas" panose="020B0609020204030204" pitchFamily="49" charset="0"/>
+                <a:cs typeface="Consolas" panose="020B0609020204030204" pitchFamily="49" charset="0"/>
+              </a:rPr>
+              <a:t>less  </a:t>
+            </a:r>
+            <a:r>
+              <a:rPr lang="en-US" sz="1200" dirty="0">
+                <a:solidFill>
+                  <a:prstClr val="black"/>
+                </a:solidFill>
+                <a:latin typeface="Consolas" panose="020B0609020204030204" pitchFamily="49" charset="0"/>
+                <a:cs typeface="Consolas" panose="020B0609020204030204" pitchFamily="49" charset="0"/>
+              </a:rPr>
+              <a:t>SUB r1, r1, r0  </a:t>
+            </a:r>
+            <a:r>
+              <a:rPr lang="en-US" sz="1200" dirty="0">
+                <a:solidFill>
+                  <a:prstClr val="white">
+                    <a:lumMod val="65000"/>
+                  </a:prstClr>
+                </a:solidFill>
+                <a:latin typeface="Consolas" panose="020B0609020204030204" pitchFamily="49" charset="0"/>
+                <a:cs typeface="Consolas" panose="020B0609020204030204" pitchFamily="49" charset="0"/>
+              </a:rPr>
+              <a:t>; b = b – a</a:t>
+            </a:r>
+          </a:p>
+          <a:p>
+            <a:r>
+              <a:rPr lang="en-US" sz="1200" dirty="0">
+                <a:solidFill>
+                  <a:prstClr val="black"/>
+                </a:solidFill>
+                <a:latin typeface="Consolas" panose="020B0609020204030204" pitchFamily="49" charset="0"/>
+                <a:cs typeface="Consolas" panose="020B0609020204030204" pitchFamily="49" charset="0"/>
+              </a:rPr>
+              <a:t>      </a:t>
+            </a:r>
+            <a:r>
+              <a:rPr lang="en-US" sz="1200" b="1" dirty="0">
+                <a:solidFill>
+                  <a:srgbClr val="FF40FF"/>
+                </a:solidFill>
+                <a:latin typeface="Consolas" panose="020B0609020204030204" pitchFamily="49" charset="0"/>
+                <a:cs typeface="Consolas" panose="020B0609020204030204" pitchFamily="49" charset="0"/>
+              </a:rPr>
+              <a:t>B   </a:t>
+            </a:r>
+            <a:r>
+              <a:rPr lang="en-US" sz="1200" b="1" dirty="0" err="1">
+                <a:solidFill>
+                  <a:srgbClr val="FF40FF"/>
+                </a:solidFill>
+                <a:latin typeface="Consolas" panose="020B0609020204030204" pitchFamily="49" charset="0"/>
+                <a:cs typeface="Consolas" panose="020B0609020204030204" pitchFamily="49" charset="0"/>
+              </a:rPr>
+              <a:t>gcd</a:t>
+            </a:r>
+            <a:r>
+              <a:rPr lang="en-US" sz="1200" dirty="0">
+                <a:solidFill>
+                  <a:prstClr val="black"/>
+                </a:solidFill>
+                <a:latin typeface="Consolas" panose="020B0609020204030204" pitchFamily="49" charset="0"/>
+                <a:cs typeface="Consolas" panose="020B0609020204030204" pitchFamily="49" charset="0"/>
+              </a:rPr>
+              <a:t>	</a:t>
+            </a:r>
+          </a:p>
+          <a:p>
+            <a:r>
+              <a:rPr lang="en-US" sz="1200" dirty="0">
+                <a:solidFill>
+                  <a:srgbClr val="0000FF"/>
+                </a:solidFill>
+                <a:latin typeface="Consolas" panose="020B0609020204030204" pitchFamily="49" charset="0"/>
+                <a:cs typeface="Consolas" panose="020B0609020204030204" pitchFamily="49" charset="0"/>
+              </a:rPr>
+              <a:t>end</a:t>
+            </a:r>
+          </a:p>
+        </p:txBody>
+      </p:sp>
+      <p:sp>
+        <p:nvSpPr>
+          <p:cNvPr id="62" name="Down Arrow 61"/>
+          <p:cNvSpPr/>
+          <p:nvPr/>
+        </p:nvSpPr>
+        <p:spPr>
+          <a:xfrm>
+            <a:off x="2000251" y="3371297"/>
+            <a:ext cx="124628" cy="216367"/>
+          </a:xfrm>
+          <a:prstGeom prst="downArrow">
+            <a:avLst/>
+          </a:prstGeom>
+        </p:spPr>
+        <p:style>
+          <a:lnRef idx="2">
+            <a:schemeClr val="accent1">
+              <a:shade val="50000"/>
+            </a:schemeClr>
+          </a:lnRef>
+          <a:fillRef idx="1">
+            <a:schemeClr val="accent1"/>
+          </a:fillRef>
+          <a:effectRef idx="0">
+            <a:schemeClr val="accent1"/>
+          </a:effectRef>
+          <a:fontRef idx="minor">
+            <a:schemeClr val="lt1"/>
+          </a:fontRef>
+        </p:style>
+        <p:txBody>
+          <a:bodyPr rtlCol="0" anchor="ctr"/>
+          <a:lstStyle/>
+          <a:p>
+            <a:pPr algn="ctr"/>
+            <a:endParaRPr lang="en-US" sz="1350">
+              <a:solidFill>
+                <a:prstClr val="white"/>
+              </a:solidFill>
+              <a:latin typeface="Gill Sans MT"/>
+            </a:endParaRPr>
+          </a:p>
+        </p:txBody>
+      </p:sp>
+      <p:sp>
+        <p:nvSpPr>
+          <p:cNvPr id="63" name="TextBox 62"/>
+          <p:cNvSpPr txBox="1"/>
+          <p:nvPr/>
+        </p:nvSpPr>
+        <p:spPr>
+          <a:xfrm>
+            <a:off x="1283565" y="1698012"/>
+            <a:ext cx="1287212" cy="276999"/>
+          </a:xfrm>
+          <a:prstGeom prst="rect">
+            <a:avLst/>
+          </a:prstGeom>
+          <a:noFill/>
+        </p:spPr>
+        <p:txBody>
+          <a:bodyPr wrap="none" rtlCol="0">
+            <a:spAutoFit/>
+          </a:bodyPr>
+          <a:lstStyle/>
+          <a:p>
+            <a:r>
+              <a:rPr lang="en-US" sz="1200" dirty="0">
+                <a:solidFill>
+                  <a:srgbClr val="FF0000"/>
+                </a:solidFill>
+                <a:latin typeface="Gill Sans MT"/>
+              </a:rPr>
+              <a:t>Euclid’s Algorithm</a:t>
+            </a:r>
+          </a:p>
+        </p:txBody>
+      </p:sp>
+      <p:grpSp>
+        <p:nvGrpSpPr>
+          <p:cNvPr id="66" name="Group 65"/>
+          <p:cNvGrpSpPr/>
+          <p:nvPr/>
+        </p:nvGrpSpPr>
+        <p:grpSpPr>
+          <a:xfrm>
+            <a:off x="4686301" y="1714500"/>
+            <a:ext cx="2679396" cy="830997"/>
+            <a:chOff x="4461833" y="1619479"/>
+            <a:chExt cx="3572527" cy="1107996"/>
+          </a:xfrm>
+        </p:grpSpPr>
+        <p:sp>
+          <p:nvSpPr>
+            <p:cNvPr id="64" name="Right Arrow 63"/>
+            <p:cNvSpPr/>
+            <p:nvPr/>
+          </p:nvSpPr>
+          <p:spPr>
+            <a:xfrm>
+              <a:off x="4461833" y="2027104"/>
+              <a:ext cx="716096" cy="209321"/>
+            </a:xfrm>
+            <a:prstGeom prst="rightArrow">
+              <a:avLst/>
+            </a:prstGeom>
+          </p:spPr>
+          <p:style>
+            <a:lnRef idx="2">
+              <a:schemeClr val="accent1">
+                <a:shade val="50000"/>
+              </a:schemeClr>
+            </a:lnRef>
+            <a:fillRef idx="1">
+              <a:schemeClr val="accent1"/>
+            </a:fillRef>
+            <a:effectRef idx="0">
+              <a:schemeClr val="accent1"/>
+            </a:effectRef>
+            <a:fontRef idx="minor">
+              <a:schemeClr val="lt1"/>
+            </a:fontRef>
+          </p:style>
+          <p:txBody>
+            <a:bodyPr rtlCol="0" anchor="ctr"/>
+            <a:lstStyle/>
+            <a:p>
+              <a:pPr algn="ctr"/>
+              <a:endParaRPr lang="en-US" sz="1350">
+                <a:solidFill>
+                  <a:prstClr val="white"/>
+                </a:solidFill>
+                <a:latin typeface="Gill Sans MT"/>
+              </a:endParaRPr>
+            </a:p>
+          </p:txBody>
+        </p:sp>
+        <p:sp>
+          <p:nvSpPr>
+            <p:cNvPr id="65" name="TextBox 64"/>
+            <p:cNvSpPr txBox="1"/>
+            <p:nvPr/>
+          </p:nvSpPr>
+          <p:spPr>
+            <a:xfrm>
+              <a:off x="5409282" y="1619479"/>
+              <a:ext cx="2625078" cy="1107996"/>
+            </a:xfrm>
+            <a:prstGeom prst="rect">
+              <a:avLst/>
+            </a:prstGeom>
+            <a:noFill/>
+            <a:ln>
+              <a:solidFill>
+                <a:schemeClr val="accent1"/>
+              </a:solidFill>
+            </a:ln>
+          </p:spPr>
+          <p:txBody>
+            <a:bodyPr wrap="none" rtlCol="0">
+              <a:spAutoFit/>
+            </a:bodyPr>
+            <a:lstStyle/>
+            <a:p>
+              <a:r>
+                <a:rPr lang="en-US" sz="1200" dirty="0" err="1">
+                  <a:solidFill>
+                    <a:srgbClr val="FF0000"/>
+                  </a:solidFill>
+                  <a:latin typeface="Consolas" panose="020B0609020204030204" pitchFamily="49" charset="0"/>
+                  <a:cs typeface="Consolas" panose="020B0609020204030204" pitchFamily="49" charset="0"/>
+                </a:rPr>
+                <a:t>gcd</a:t>
+              </a:r>
+              <a:r>
+                <a:rPr lang="en-US" sz="1200" dirty="0">
+                  <a:solidFill>
+                    <a:srgbClr val="FF0000"/>
+                  </a:solidFill>
+                  <a:latin typeface="Consolas" panose="020B0609020204030204" pitchFamily="49" charset="0"/>
+                  <a:cs typeface="Consolas" panose="020B0609020204030204" pitchFamily="49" charset="0"/>
+                </a:rPr>
+                <a:t>  </a:t>
+              </a:r>
+              <a:r>
+                <a:rPr lang="en-US" sz="1200" dirty="0" err="1">
+                  <a:solidFill>
+                    <a:srgbClr val="FF0000"/>
+                  </a:solidFill>
+                  <a:latin typeface="Consolas" panose="020B0609020204030204" pitchFamily="49" charset="0"/>
+                  <a:cs typeface="Consolas" panose="020B0609020204030204" pitchFamily="49" charset="0"/>
+                </a:rPr>
+                <a:t>CMP</a:t>
+              </a:r>
+              <a:r>
+                <a:rPr lang="en-US" sz="1200" dirty="0">
+                  <a:solidFill>
+                    <a:srgbClr val="FF0000"/>
+                  </a:solidFill>
+                  <a:latin typeface="Consolas" panose="020B0609020204030204" pitchFamily="49" charset="0"/>
+                  <a:cs typeface="Consolas" panose="020B0609020204030204" pitchFamily="49" charset="0"/>
+                </a:rPr>
+                <a:t> r0, r1</a:t>
+              </a:r>
+            </a:p>
+            <a:p>
+              <a:r>
+                <a:rPr lang="en-US" sz="1200" dirty="0">
+                  <a:solidFill>
+                    <a:srgbClr val="FF0000"/>
+                  </a:solidFill>
+                  <a:latin typeface="Consolas" panose="020B0609020204030204" pitchFamily="49" charset="0"/>
+                  <a:cs typeface="Consolas" panose="020B0609020204030204" pitchFamily="49" charset="0"/>
+                </a:rPr>
+                <a:t>     SUBHI r0, r0, r1</a:t>
+              </a:r>
+            </a:p>
+            <a:p>
+              <a:r>
+                <a:rPr lang="en-US" sz="1200" dirty="0">
+                  <a:solidFill>
+                    <a:srgbClr val="FF0000"/>
+                  </a:solidFill>
+                  <a:latin typeface="Consolas" panose="020B0609020204030204" pitchFamily="49" charset="0"/>
+                  <a:cs typeface="Consolas" panose="020B0609020204030204" pitchFamily="49" charset="0"/>
+                </a:rPr>
+                <a:t>     SUBLO r1, r1, r0</a:t>
+              </a:r>
+            </a:p>
+            <a:p>
+              <a:r>
+                <a:rPr lang="en-US" sz="1200" dirty="0">
+                  <a:solidFill>
+                    <a:srgbClr val="FF0000"/>
+                  </a:solidFill>
+                  <a:latin typeface="Consolas" panose="020B0609020204030204" pitchFamily="49" charset="0"/>
+                  <a:cs typeface="Consolas" panose="020B0609020204030204" pitchFamily="49" charset="0"/>
+                </a:rPr>
+                <a:t>     </a:t>
+              </a:r>
+              <a:r>
+                <a:rPr lang="en-US" sz="1200" dirty="0" err="1">
+                  <a:solidFill>
+                    <a:srgbClr val="FF0000"/>
+                  </a:solidFill>
+                  <a:latin typeface="Consolas" panose="020B0609020204030204" pitchFamily="49" charset="0"/>
+                  <a:cs typeface="Consolas" panose="020B0609020204030204" pitchFamily="49" charset="0"/>
+                </a:rPr>
+                <a:t>BNE</a:t>
+              </a:r>
+              <a:r>
+                <a:rPr lang="en-US" sz="1200" dirty="0">
+                  <a:solidFill>
+                    <a:srgbClr val="FF0000"/>
+                  </a:solidFill>
+                  <a:latin typeface="Consolas" panose="020B0609020204030204" pitchFamily="49" charset="0"/>
+                  <a:cs typeface="Consolas" panose="020B0609020204030204" pitchFamily="49" charset="0"/>
+                </a:rPr>
+                <a:t> </a:t>
+              </a:r>
+              <a:r>
+                <a:rPr lang="en-US" sz="1200" dirty="0" err="1">
+                  <a:solidFill>
+                    <a:srgbClr val="FF0000"/>
+                  </a:solidFill>
+                  <a:latin typeface="Consolas" panose="020B0609020204030204" pitchFamily="49" charset="0"/>
+                  <a:cs typeface="Consolas" panose="020B0609020204030204" pitchFamily="49" charset="0"/>
+                </a:rPr>
+                <a:t>gcd</a:t>
+              </a:r>
+              <a:endParaRPr lang="en-US" sz="1200" dirty="0">
+                <a:solidFill>
+                  <a:srgbClr val="FF0000"/>
+                </a:solidFill>
+                <a:latin typeface="Consolas" panose="020B0609020204030204" pitchFamily="49" charset="0"/>
+                <a:cs typeface="Consolas" panose="020B0609020204030204" pitchFamily="49" charset="0"/>
+              </a:endParaRPr>
+            </a:p>
+          </p:txBody>
+        </p:sp>
+      </p:grpSp>
+      <p:sp>
+        <p:nvSpPr>
+          <p:cNvPr id="60" name="TextBox 59"/>
+          <p:cNvSpPr txBox="1"/>
+          <p:nvPr/>
+        </p:nvSpPr>
+        <p:spPr>
+          <a:xfrm>
+            <a:off x="1353699" y="1959784"/>
+            <a:ext cx="2958028" cy="1384995"/>
+          </a:xfrm>
+          <a:prstGeom prst="rect">
+            <a:avLst/>
+          </a:prstGeom>
+          <a:noFill/>
+          <a:ln>
+            <a:solidFill>
+              <a:schemeClr val="accent1"/>
+            </a:solidFill>
+          </a:ln>
+        </p:spPr>
+        <p:txBody>
+          <a:bodyPr wrap="square" rtlCol="0">
+            <a:spAutoFit/>
+          </a:bodyPr>
+          <a:lstStyle/>
+          <a:p>
+            <a:r>
+              <a:rPr lang="en-US" sz="1200" dirty="0">
+                <a:solidFill>
+                  <a:prstClr val="black"/>
+                </a:solidFill>
+                <a:latin typeface="Consolas" panose="020B0609020204030204" pitchFamily="49" charset="0"/>
+                <a:cs typeface="Consolas" panose="020B0609020204030204" pitchFamily="49" charset="0"/>
+              </a:rPr>
+              <a:t>uint32_t a, b;</a:t>
+            </a:r>
+          </a:p>
+          <a:p>
+            <a:r>
+              <a:rPr lang="en-US" sz="1200" dirty="0">
+                <a:solidFill>
+                  <a:prstClr val="black"/>
+                </a:solidFill>
+                <a:latin typeface="Consolas" panose="020B0609020204030204" pitchFamily="49" charset="0"/>
+                <a:cs typeface="Consolas" panose="020B0609020204030204" pitchFamily="49" charset="0"/>
+              </a:rPr>
+              <a:t>while (a != b ) {</a:t>
+            </a:r>
+          </a:p>
+          <a:p>
+            <a:r>
+              <a:rPr lang="en-US" sz="1200" dirty="0">
+                <a:solidFill>
+                  <a:prstClr val="black"/>
+                </a:solidFill>
+                <a:latin typeface="Consolas" panose="020B0609020204030204" pitchFamily="49" charset="0"/>
+                <a:cs typeface="Consolas" panose="020B0609020204030204" pitchFamily="49" charset="0"/>
+              </a:rPr>
+              <a:t>    if (a &gt; b) </a:t>
+            </a:r>
+          </a:p>
+          <a:p>
+            <a:r>
+              <a:rPr lang="en-US" sz="1200" dirty="0">
+                <a:solidFill>
+                  <a:prstClr val="black"/>
+                </a:solidFill>
+                <a:latin typeface="Consolas" panose="020B0609020204030204" pitchFamily="49" charset="0"/>
+                <a:cs typeface="Consolas" panose="020B0609020204030204" pitchFamily="49" charset="0"/>
+              </a:rPr>
+              <a:t>       a = a – b; </a:t>
+            </a:r>
+          </a:p>
+          <a:p>
+            <a:r>
+              <a:rPr lang="en-US" sz="1200" dirty="0">
+                <a:solidFill>
+                  <a:prstClr val="black"/>
+                </a:solidFill>
+                <a:latin typeface="Consolas" panose="020B0609020204030204" pitchFamily="49" charset="0"/>
+                <a:cs typeface="Consolas" panose="020B0609020204030204" pitchFamily="49" charset="0"/>
+              </a:rPr>
+              <a:t>    else </a:t>
+            </a:r>
+          </a:p>
+          <a:p>
+            <a:r>
+              <a:rPr lang="en-US" sz="1200" dirty="0">
+                <a:solidFill>
+                  <a:prstClr val="black"/>
+                </a:solidFill>
+                <a:latin typeface="Consolas" panose="020B0609020204030204" pitchFamily="49" charset="0"/>
+                <a:cs typeface="Consolas" panose="020B0609020204030204" pitchFamily="49" charset="0"/>
+              </a:rPr>
+              <a:t>       b = b – a; </a:t>
+            </a:r>
+          </a:p>
+          <a:p>
+            <a:r>
+              <a:rPr lang="en-US" sz="1200" dirty="0">
+                <a:solidFill>
+                  <a:prstClr val="black"/>
+                </a:solidFill>
+                <a:latin typeface="Consolas" panose="020B0609020204030204" pitchFamily="49" charset="0"/>
+                <a:cs typeface="Consolas" panose="020B0609020204030204" pitchFamily="49" charset="0"/>
+              </a:rPr>
+              <a:t>}</a:t>
+            </a:r>
+          </a:p>
+        </p:txBody>
+      </p:sp>
+      <p:sp>
+        <p:nvSpPr>
+          <p:cNvPr id="2" name="Arrow: Curved Right 1">
+            <a:extLst>
+              <a:ext uri="{FF2B5EF4-FFF2-40B4-BE49-F238E27FC236}">
+                <a16:creationId xmlns:a16="http://schemas.microsoft.com/office/drawing/2014/main" id="{63AD5224-522C-18FC-A5C0-4CAEE167F4A7}"/>
+              </a:ext>
+            </a:extLst>
+          </p:cNvPr>
+          <p:cNvSpPr/>
+          <p:nvPr/>
+        </p:nvSpPr>
+        <p:spPr>
+          <a:xfrm>
+            <a:off x="1143001" y="4114800"/>
+            <a:ext cx="210698" cy="1200151"/>
+          </a:xfrm>
+          <a:prstGeom prst="curvedRightArrow">
+            <a:avLst/>
+          </a:prstGeom>
+          <a:solidFill>
+            <a:srgbClr val="FFFF00"/>
+          </a:solidFill>
+        </p:spPr>
+        <p:style>
+          <a:lnRef idx="2">
+            <a:schemeClr val="accent1">
+              <a:shade val="15000"/>
+            </a:schemeClr>
+          </a:lnRef>
+          <a:fillRef idx="1">
+            <a:schemeClr val="accent1"/>
+          </a:fillRef>
+          <a:effectRef idx="0">
+            <a:schemeClr val="accent1"/>
+          </a:effectRef>
+          <a:fontRef idx="minor">
+            <a:schemeClr val="lt1"/>
+          </a:fontRef>
+        </p:style>
+        <p:txBody>
+          <a:bodyPr rtlCol="0" anchor="ctr"/>
+          <a:lstStyle/>
+          <a:p>
+            <a:pPr algn="ctr"/>
+            <a:endParaRPr lang="en-US" sz="1350">
+              <a:solidFill>
+                <a:prstClr val="black"/>
+              </a:solidFill>
+              <a:latin typeface="Gill Sans MT"/>
+            </a:endParaRPr>
+          </a:p>
+        </p:txBody>
+      </p:sp>
+      <p:sp>
+        <p:nvSpPr>
+          <p:cNvPr id="3" name="Arrow: Curved Right 2">
+            <a:extLst>
+              <a:ext uri="{FF2B5EF4-FFF2-40B4-BE49-F238E27FC236}">
+                <a16:creationId xmlns:a16="http://schemas.microsoft.com/office/drawing/2014/main" id="{D6951C95-8873-B916-2166-BF641EF82FD2}"/>
+              </a:ext>
+            </a:extLst>
+          </p:cNvPr>
+          <p:cNvSpPr/>
+          <p:nvPr/>
+        </p:nvSpPr>
+        <p:spPr>
+          <a:xfrm>
+            <a:off x="1143000" y="4284417"/>
+            <a:ext cx="210698" cy="630484"/>
+          </a:xfrm>
+          <a:prstGeom prst="curvedRightArrow">
+            <a:avLst/>
+          </a:prstGeom>
+          <a:solidFill>
+            <a:srgbClr val="FFFF00"/>
+          </a:solidFill>
+        </p:spPr>
+        <p:style>
+          <a:lnRef idx="2">
+            <a:schemeClr val="accent1">
+              <a:shade val="15000"/>
+            </a:schemeClr>
+          </a:lnRef>
+          <a:fillRef idx="1">
+            <a:schemeClr val="accent1"/>
+          </a:fillRef>
+          <a:effectRef idx="0">
+            <a:schemeClr val="accent1"/>
+          </a:effectRef>
+          <a:fontRef idx="minor">
+            <a:schemeClr val="lt1"/>
+          </a:fontRef>
+        </p:style>
+        <p:txBody>
+          <a:bodyPr rtlCol="0" anchor="ctr"/>
+          <a:lstStyle/>
+          <a:p>
+            <a:pPr algn="ctr"/>
+            <a:endParaRPr lang="en-US" sz="1350">
+              <a:solidFill>
+                <a:prstClr val="black"/>
+              </a:solidFill>
+              <a:latin typeface="Gill Sans MT"/>
+            </a:endParaRPr>
+          </a:p>
+        </p:txBody>
+      </p:sp>
+      <p:sp>
+        <p:nvSpPr>
+          <p:cNvPr id="4" name="Arrow: Curved Right 3">
+            <a:extLst>
+              <a:ext uri="{FF2B5EF4-FFF2-40B4-BE49-F238E27FC236}">
+                <a16:creationId xmlns:a16="http://schemas.microsoft.com/office/drawing/2014/main" id="{BF8ADD12-38AC-2F78-06EF-691CD8EC6539}"/>
+              </a:ext>
+            </a:extLst>
+          </p:cNvPr>
+          <p:cNvSpPr/>
+          <p:nvPr/>
+        </p:nvSpPr>
+        <p:spPr>
+          <a:xfrm flipV="1">
+            <a:off x="1638717" y="3882854"/>
+            <a:ext cx="262820" cy="868760"/>
+          </a:xfrm>
+          <a:prstGeom prst="curvedRightArrow">
+            <a:avLst/>
+          </a:prstGeom>
+        </p:spPr>
+        <p:style>
+          <a:lnRef idx="2">
+            <a:schemeClr val="accent1">
+              <a:shade val="15000"/>
+            </a:schemeClr>
+          </a:lnRef>
+          <a:fillRef idx="1">
+            <a:schemeClr val="accent1"/>
+          </a:fillRef>
+          <a:effectRef idx="0">
+            <a:schemeClr val="accent1"/>
+          </a:effectRef>
+          <a:fontRef idx="minor">
+            <a:schemeClr val="lt1"/>
+          </a:fontRef>
+        </p:style>
+        <p:txBody>
+          <a:bodyPr rtlCol="0" anchor="ctr"/>
+          <a:lstStyle/>
+          <a:p>
+            <a:pPr algn="ctr"/>
+            <a:endParaRPr lang="en-US" sz="1350">
+              <a:solidFill>
+                <a:prstClr val="black"/>
+              </a:solidFill>
+              <a:latin typeface="Gill Sans MT"/>
+            </a:endParaRPr>
+          </a:p>
+        </p:txBody>
+      </p:sp>
+      <p:sp>
+        <p:nvSpPr>
+          <p:cNvPr id="5" name="Arrow: Curved Right 4">
+            <a:extLst>
+              <a:ext uri="{FF2B5EF4-FFF2-40B4-BE49-F238E27FC236}">
+                <a16:creationId xmlns:a16="http://schemas.microsoft.com/office/drawing/2014/main" id="{CC7A2AF8-E930-2C88-AA7D-100ACAD1C1CD}"/>
+              </a:ext>
+            </a:extLst>
+          </p:cNvPr>
+          <p:cNvSpPr/>
+          <p:nvPr/>
+        </p:nvSpPr>
+        <p:spPr>
+          <a:xfrm flipV="1">
+            <a:off x="1625960" y="3874692"/>
+            <a:ext cx="262820" cy="1203767"/>
+          </a:xfrm>
+          <a:prstGeom prst="curvedRightArrow">
+            <a:avLst/>
+          </a:prstGeom>
+        </p:spPr>
+        <p:style>
+          <a:lnRef idx="2">
+            <a:schemeClr val="accent1">
+              <a:shade val="15000"/>
+            </a:schemeClr>
+          </a:lnRef>
+          <a:fillRef idx="1">
+            <a:schemeClr val="accent1"/>
+          </a:fillRef>
+          <a:effectRef idx="0">
+            <a:schemeClr val="accent1"/>
+          </a:effectRef>
+          <a:fontRef idx="minor">
+            <a:schemeClr val="lt1"/>
+          </a:fontRef>
+        </p:style>
+        <p:txBody>
+          <a:bodyPr rtlCol="0" anchor="ctr"/>
+          <a:lstStyle/>
+          <a:p>
+            <a:pPr algn="ctr"/>
+            <a:endParaRPr lang="en-US" sz="1350">
+              <a:solidFill>
+                <a:prstClr val="black"/>
+              </a:solidFill>
+              <a:latin typeface="Gill Sans MT"/>
+            </a:endParaRPr>
+          </a:p>
+        </p:txBody>
+      </p:sp>
+      <p:sp>
+        <p:nvSpPr>
+          <p:cNvPr id="6" name="内容占位符 2">
+            <a:extLst>
+              <a:ext uri="{FF2B5EF4-FFF2-40B4-BE49-F238E27FC236}">
+                <a16:creationId xmlns:a16="http://schemas.microsoft.com/office/drawing/2014/main" id="{05A93BF7-A206-F2CA-CC13-D14DF785DD1A}"/>
+              </a:ext>
+            </a:extLst>
+          </p:cNvPr>
+          <p:cNvSpPr txBox="1">
+            <a:spLocks/>
+          </p:cNvSpPr>
+          <p:nvPr/>
+        </p:nvSpPr>
+        <p:spPr bwMode="auto">
+          <a:xfrm>
+            <a:off x="4810052" y="2546908"/>
+            <a:ext cx="3079900" cy="3395561"/>
+          </a:xfrm>
+          <a:prstGeom prst="rect">
+            <a:avLst/>
+          </a:prstGeom>
+          <a:solidFill>
+            <a:schemeClr val="bg1">
+              <a:lumMod val="85000"/>
+            </a:schemeClr>
+          </a:solidFill>
+          <a:ln/>
+          <a:extLst>
+            <a:ext uri="{FAA26D3D-D897-4be2-8F04-BA451C77F1D7}">
+              <ma14:placeholderFlag xmlns:ma14="http://schemas.microsoft.com/office/mac/drawingml/2011/main" xmlns="" val="1"/>
+            </a:ext>
+            <a:ext uri="{909E8E84-426E-40dd-AFC4-6F175D3DCCD1}">
+              <a14:hiddenFill xmlns:a14="http://schemas.microsoft.com/office/drawing/2010/main" xmlns="">
+                <a:solidFill>
+                  <a:schemeClr val="bg1"/>
+                </a:solidFill>
+              </a14:hiddenFill>
+            </a:ext>
+            <a:ext uri="{91240B29-F687-4f45-9708-019B960494DF}">
+              <a14:hiddenLine xmlns:a14="http://schemas.microsoft.com/office/drawing/2010/main" xmlns="" w="12700">
+                <a:pattFill prst="narHorz">
+                  <a:fgClr>
+                    <a:schemeClr val="tx1"/>
+                  </a:fgClr>
+                  <a:bgClr>
+                    <a:schemeClr val="bg1"/>
+                  </a:bgClr>
+                </a:pattFill>
+                <a:miter lim="800000"/>
+                <a:headEnd/>
+                <a:tailEnd/>
+              </a14:hiddenLine>
+            </a:ext>
+            <a:ext uri="{AF507438-7753-43e0-B8FC-AC1667EBCBE1}">
+              <a14:hiddenEffects xmlns:a14="http://schemas.microsoft.com/office/drawing/2010/main" xmlns="">
+                <a:effectLst>
+                  <a:outerShdw blurRad="63500" dist="38099" dir="2700000" algn="ctr" rotWithShape="0">
+                    <a:schemeClr val="bg2">
+                      <a:alpha val="74998"/>
+                    </a:schemeClr>
+                  </a:outerShdw>
+                </a:effectLst>
+              </a14:hiddenEffects>
+            </a:ext>
+          </a:extLst>
+        </p:spPr>
+        <p:style>
+          <a:lnRef idx="1">
+            <a:schemeClr val="dk1"/>
+          </a:lnRef>
+          <a:fillRef idx="2">
+            <a:schemeClr val="dk1"/>
+          </a:fillRef>
+          <a:effectRef idx="1">
+            <a:schemeClr val="dk1"/>
+          </a:effectRef>
+          <a:fontRef idx="minor">
+            <a:schemeClr val="dk1"/>
+          </a:fontRef>
+        </p:style>
+        <p:txBody>
+          <a:bodyPr vert="horz" wrap="square" lIns="67859" tIns="33334" rIns="67859" bIns="33334" numCol="1" anchor="t" anchorCtr="0" compatLnSpc="1">
+            <a:prstTxWarp prst="textNoShape">
+              <a:avLst/>
+            </a:prstTxWarp>
+          </a:bodyPr>
+          <a:lstStyle>
+            <a:lvl1pPr marL="285750" indent="-285750" algn="l" rtl="0" eaLnBrk="0" fontAlgn="base" hangingPunct="0">
+              <a:lnSpc>
+                <a:spcPct val="90000"/>
+              </a:lnSpc>
+              <a:spcBef>
+                <a:spcPct val="30000"/>
+              </a:spcBef>
+              <a:spcAft>
+                <a:spcPct val="0"/>
+              </a:spcAft>
+              <a:buSzPct val="100000"/>
+              <a:buChar char="•"/>
+              <a:defRPr sz="2400">
+                <a:solidFill>
+                  <a:schemeClr val="tx1"/>
+                </a:solidFill>
+                <a:latin typeface="Gill Sans" charset="0"/>
+                <a:ea typeface="ＭＳ Ｐゴシック" charset="0"/>
+                <a:cs typeface="Gill Sans" charset="0"/>
+              </a:defRPr>
+            </a:lvl1pPr>
+            <a:lvl2pPr marL="685800" indent="-228600" algn="l" rtl="0" eaLnBrk="0" fontAlgn="base" hangingPunct="0">
+              <a:lnSpc>
+                <a:spcPct val="90000"/>
+              </a:lnSpc>
+              <a:spcBef>
+                <a:spcPct val="30000"/>
+              </a:spcBef>
+              <a:spcAft>
+                <a:spcPct val="0"/>
+              </a:spcAft>
+              <a:buSzPct val="100000"/>
+              <a:buChar char="–"/>
+              <a:defRPr sz="2200">
+                <a:solidFill>
+                  <a:schemeClr val="tx1"/>
+                </a:solidFill>
+                <a:latin typeface="Gill Sans" charset="0"/>
+                <a:ea typeface="Gill Sans" charset="0"/>
+                <a:cs typeface="Gill Sans" charset="0"/>
+              </a:defRPr>
+            </a:lvl2pPr>
+            <a:lvl3pPr marL="1143000" indent="-228600" algn="l" rtl="0" eaLnBrk="0" fontAlgn="base" hangingPunct="0">
+              <a:lnSpc>
+                <a:spcPct val="90000"/>
+              </a:lnSpc>
+              <a:spcBef>
+                <a:spcPct val="30000"/>
+              </a:spcBef>
+              <a:spcAft>
+                <a:spcPct val="0"/>
+              </a:spcAft>
+              <a:buSzPct val="100000"/>
+              <a:buChar char="»"/>
+              <a:defRPr sz="2000">
+                <a:solidFill>
+                  <a:schemeClr val="tx1"/>
+                </a:solidFill>
+                <a:latin typeface="Gill Sans" charset="0"/>
+                <a:ea typeface="Gill Sans" charset="0"/>
+                <a:cs typeface="Gill Sans" charset="0"/>
+              </a:defRPr>
+            </a:lvl3pPr>
+            <a:lvl4pPr marL="1543050" indent="-171450" algn="l" rtl="0" eaLnBrk="0" fontAlgn="base" hangingPunct="0">
+              <a:lnSpc>
+                <a:spcPct val="90000"/>
+              </a:lnSpc>
+              <a:spcBef>
+                <a:spcPct val="30000"/>
+              </a:spcBef>
+              <a:spcAft>
+                <a:spcPct val="0"/>
+              </a:spcAft>
+              <a:buSzPct val="100000"/>
+              <a:buChar char="•"/>
+              <a:defRPr sz="2000">
+                <a:solidFill>
+                  <a:schemeClr val="tx1"/>
+                </a:solidFill>
+                <a:latin typeface="Gill Sans" charset="0"/>
+                <a:ea typeface="Gill Sans" charset="0"/>
+                <a:cs typeface="Gill Sans" charset="0"/>
+              </a:defRPr>
+            </a:lvl4pPr>
+            <a:lvl5pPr marL="2000250" indent="-171450" algn="l" rtl="0" eaLnBrk="0" fontAlgn="base" hangingPunct="0">
+              <a:lnSpc>
+                <a:spcPct val="90000"/>
+              </a:lnSpc>
+              <a:spcBef>
+                <a:spcPct val="30000"/>
+              </a:spcBef>
+              <a:spcAft>
+                <a:spcPct val="0"/>
+              </a:spcAft>
+              <a:buSzPct val="100000"/>
+              <a:buChar char="–"/>
+              <a:defRPr sz="2000">
+                <a:solidFill>
+                  <a:schemeClr val="tx1"/>
+                </a:solidFill>
+                <a:latin typeface="Gill Sans" charset="0"/>
+                <a:ea typeface="Gill Sans" charset="0"/>
+                <a:cs typeface="Gill Sans" charset="0"/>
+              </a:defRPr>
+            </a:lvl5pPr>
+            <a:lvl6pPr marL="2457450" indent="-171450" algn="l" rtl="0" eaLnBrk="0" fontAlgn="base" hangingPunct="0">
+              <a:lnSpc>
+                <a:spcPct val="90000"/>
+              </a:lnSpc>
+              <a:spcBef>
+                <a:spcPct val="30000"/>
+              </a:spcBef>
+              <a:spcAft>
+                <a:spcPct val="0"/>
+              </a:spcAft>
+              <a:buSzPct val="100000"/>
+              <a:buChar char="–"/>
+              <a:defRPr sz="2000" b="1">
+                <a:solidFill>
+                  <a:schemeClr val="tx1"/>
+                </a:solidFill>
+                <a:latin typeface="+mn-lt"/>
+              </a:defRPr>
+            </a:lvl6pPr>
+            <a:lvl7pPr marL="2914650" indent="-171450" algn="l" rtl="0" eaLnBrk="0" fontAlgn="base" hangingPunct="0">
+              <a:lnSpc>
+                <a:spcPct val="90000"/>
+              </a:lnSpc>
+              <a:spcBef>
+                <a:spcPct val="30000"/>
+              </a:spcBef>
+              <a:spcAft>
+                <a:spcPct val="0"/>
+              </a:spcAft>
+              <a:buSzPct val="100000"/>
+              <a:buChar char="–"/>
+              <a:defRPr sz="2000" b="1">
+                <a:solidFill>
+                  <a:schemeClr val="tx1"/>
+                </a:solidFill>
+                <a:latin typeface="+mn-lt"/>
+              </a:defRPr>
+            </a:lvl7pPr>
+            <a:lvl8pPr marL="3371850" indent="-171450" algn="l" rtl="0" eaLnBrk="0" fontAlgn="base" hangingPunct="0">
+              <a:lnSpc>
+                <a:spcPct val="90000"/>
+              </a:lnSpc>
+              <a:spcBef>
+                <a:spcPct val="30000"/>
+              </a:spcBef>
+              <a:spcAft>
+                <a:spcPct val="0"/>
+              </a:spcAft>
+              <a:buSzPct val="100000"/>
+              <a:buChar char="–"/>
+              <a:defRPr sz="2000" b="1">
+                <a:solidFill>
+                  <a:schemeClr val="tx1"/>
+                </a:solidFill>
+                <a:latin typeface="+mn-lt"/>
+              </a:defRPr>
+            </a:lvl8pPr>
+            <a:lvl9pPr marL="3829050" indent="-171450" algn="l" rtl="0" eaLnBrk="0" fontAlgn="base" hangingPunct="0">
+              <a:lnSpc>
+                <a:spcPct val="90000"/>
+              </a:lnSpc>
+              <a:spcBef>
+                <a:spcPct val="30000"/>
+              </a:spcBef>
+              <a:spcAft>
+                <a:spcPct val="0"/>
+              </a:spcAft>
+              <a:buSzPct val="100000"/>
+              <a:buChar char="–"/>
+              <a:defRPr sz="2000" b="1">
+                <a:solidFill>
+                  <a:schemeClr val="tx1"/>
+                </a:solidFill>
+                <a:latin typeface="+mn-lt"/>
+              </a:defRPr>
+            </a:lvl9pPr>
+          </a:lstStyle>
+          <a:p>
+            <a:pPr marL="0" indent="0">
+              <a:buNone/>
+            </a:pPr>
+            <a:r>
+              <a:rPr lang="en-US" sz="1350" kern="0" dirty="0">
+                <a:solidFill>
+                  <a:prstClr val="black"/>
+                </a:solidFill>
+              </a:rPr>
+              <a:t>CMP r0, r1 compares r0 and r1, setting Z=1 if r0 == r1, which is the termination condition when tested by BNE later.</a:t>
+            </a:r>
+          </a:p>
+          <a:p>
+            <a:pPr marL="0" indent="0">
+              <a:buNone/>
+            </a:pPr>
+            <a:r>
+              <a:rPr lang="en-US" sz="1350" kern="0" dirty="0">
+                <a:solidFill>
+                  <a:prstClr val="black"/>
+                </a:solidFill>
+              </a:rPr>
+              <a:t>SUBHI r0, r0, r1 executes only if the previous compare set HI (unsigned “higher”), i.e., r0 &gt; r1 for unsigned </a:t>
+            </a:r>
+            <a:r>
+              <a:rPr lang="en-US" sz="1350" kern="0" dirty="0" err="1">
+                <a:solidFill>
+                  <a:prstClr val="black"/>
+                </a:solidFill>
+              </a:rPr>
+              <a:t>ints</a:t>
+            </a:r>
+            <a:r>
+              <a:rPr lang="en-US" sz="1350" kern="0" dirty="0">
+                <a:solidFill>
+                  <a:prstClr val="black"/>
+                </a:solidFill>
+              </a:rPr>
+              <a:t> r0 and r1. Flags C=1 and Z=0 (“no borrow” and “not equal”).</a:t>
+            </a:r>
+          </a:p>
+          <a:p>
+            <a:pPr marL="0" indent="0">
+              <a:buNone/>
+            </a:pPr>
+            <a:r>
+              <a:rPr lang="en-US" sz="1350" kern="0" dirty="0">
+                <a:solidFill>
+                  <a:prstClr val="black"/>
+                </a:solidFill>
+              </a:rPr>
+              <a:t>SUBLO r1, r1, r0 executes only if the previous compare of unsigned </a:t>
+            </a:r>
+            <a:r>
+              <a:rPr lang="en-US" sz="1350" kern="0" dirty="0" err="1">
+                <a:solidFill>
+                  <a:prstClr val="black"/>
+                </a:solidFill>
+              </a:rPr>
+              <a:t>ints</a:t>
+            </a:r>
+            <a:r>
+              <a:rPr lang="en-US" sz="1350" kern="0" dirty="0">
+                <a:solidFill>
+                  <a:prstClr val="black"/>
+                </a:solidFill>
+              </a:rPr>
+              <a:t> set LO (unsigned “lower”), i.e., r0 &lt; r1 for unsigned </a:t>
+            </a:r>
+            <a:r>
+              <a:rPr lang="en-US" sz="1350" kern="0" dirty="0" err="1">
+                <a:solidFill>
+                  <a:prstClr val="black"/>
+                </a:solidFill>
+              </a:rPr>
+              <a:t>ints</a:t>
+            </a:r>
+            <a:r>
+              <a:rPr lang="en-US" sz="1350" kern="0" dirty="0">
+                <a:solidFill>
+                  <a:prstClr val="black"/>
+                </a:solidFill>
+              </a:rPr>
+              <a:t> r0 and r1. Flag C=0 (“borrow”).</a:t>
+            </a:r>
+          </a:p>
+          <a:p>
+            <a:pPr marL="0" indent="0">
+              <a:buNone/>
+            </a:pPr>
+            <a:r>
+              <a:rPr lang="en-US" sz="1350" kern="0" dirty="0">
+                <a:solidFill>
+                  <a:prstClr val="black"/>
+                </a:solidFill>
+              </a:rPr>
+              <a:t>BNE </a:t>
+            </a:r>
+            <a:r>
+              <a:rPr lang="en-US" sz="1350" kern="0" dirty="0" err="1">
+                <a:solidFill>
+                  <a:prstClr val="black"/>
+                </a:solidFill>
+              </a:rPr>
+              <a:t>gcd</a:t>
+            </a:r>
+            <a:r>
+              <a:rPr lang="en-US" sz="1350" kern="0" dirty="0">
+                <a:solidFill>
+                  <a:prstClr val="black"/>
+                </a:solidFill>
+              </a:rPr>
+              <a:t> branches back to the label if Z=0 from the CMP, i.e., while r0 != r1; when they become equal, Z=1 and the loop falls through, leaving r0 == r1 == </a:t>
+            </a:r>
+            <a:r>
+              <a:rPr lang="en-US" sz="1350" kern="0" dirty="0" err="1">
+                <a:solidFill>
+                  <a:prstClr val="black"/>
+                </a:solidFill>
+              </a:rPr>
+              <a:t>gcd</a:t>
+            </a:r>
+            <a:r>
+              <a:rPr lang="en-US" sz="1350" kern="0" dirty="0">
+                <a:solidFill>
+                  <a:prstClr val="black"/>
+                </a:solidFill>
+              </a:rPr>
+              <a:t>(a, b).</a:t>
+            </a:r>
+            <a:endParaRPr lang="en-GB" sz="1350" kern="0" dirty="0">
+              <a:solidFill>
+                <a:prstClr val="black"/>
+              </a:solidFill>
+            </a:endParaRPr>
+          </a:p>
+        </p:txBody>
+      </p:sp>
+    </p:spTree>
+    <p:extLst>
+      <p:ext uri="{BB962C8B-B14F-4D97-AF65-F5344CB8AC3E}">
+        <p14:creationId xmlns:p14="http://schemas.microsoft.com/office/powerpoint/2010/main" val="4015228595"/>
+      </p:ext>
+    </p:extLst>
+  </p:cSld>
+  <p:clrMapOvr>
+    <a:masterClrMapping/>
+  </p:clrMapOvr>
+  <p:transition/>
+  <p:timing>
+    <p:tnLst>
+      <p:par>
+        <p:cTn id="1" dur="indefinite" restart="never" nodeType="tmRoot">
+          <p:childTnLst>
+            <p:seq concurrent="1" nextAc="seek">
+              <p:cTn id="2" dur="indefinite" nodeType="mainSeq">
+                <p:childTnLst>
+                  <p:par>
+                    <p:cTn id="3" fill="hold">
+                      <p:stCondLst>
+                        <p:cond delay="indefinite"/>
+                      </p:stCondLst>
+                      <p:childTnLst>
+                        <p:par>
+                          <p:cTn id="4" fill="hold">
+                            <p:stCondLst>
+                              <p:cond delay="0"/>
+                            </p:stCondLst>
+                            <p:childTnLst>
+                              <p:par>
+                                <p:cTn id="5" presetID="1" presetClass="entr" presetSubtype="0" fill="hold" nodeType="clickEffect">
+                                  <p:stCondLst>
+                                    <p:cond delay="0"/>
+                                  </p:stCondLst>
+                                  <p:childTnLst>
+                                    <p:set>
+                                      <p:cBhvr>
+                                        <p:cTn id="6" dur="1" fill="hold">
+                                          <p:stCondLst>
+                                            <p:cond delay="0"/>
+                                          </p:stCondLst>
+                                        </p:cTn>
+                                        <p:tgtEl>
+                                          <p:spTgt spid="66"/>
+                                        </p:tgtEl>
+                                        <p:attrNameLst>
+                                          <p:attrName>style.visibility</p:attrName>
+                                        </p:attrNameLst>
+                                      </p:cBhvr>
+                                      <p:to>
+                                        <p:strVal val="visible"/>
+                                      </p:to>
+                                    </p:set>
+                                  </p:childTnLst>
+                                </p:cTn>
+                              </p:par>
+                            </p:childTnLst>
+                          </p:cTn>
+                        </p:par>
+                      </p:childTnLst>
+                    </p:cTn>
+                  </p:par>
+                </p:childTnLst>
+              </p:cTn>
+              <p:prevCondLst>
+                <p:cond evt="onPrev" delay="0">
+                  <p:tgtEl>
+                    <p:sldTgt/>
+                  </p:tgtEl>
+                </p:cond>
+              </p:prevCondLst>
+              <p:nextCondLst>
+                <p:cond evt="onNext" delay="0">
+                  <p:tgtEl>
+                    <p:sldTgt/>
+                  </p:tgtEl>
+                </p:cond>
+              </p:nextCondLst>
+            </p:seq>
+          </p:childTnLst>
+        </p:cTn>
+      </p:par>
+    </p:tnLst>
+  </p:timing>
+</p:sld>
+</file>
+
+<file path=ppt/slides/slide3.xml><?xml version="1.0" encoding="utf-8"?>
+<p:sld xmlns:a="http://schemas.openxmlformats.org/drawingml/2006/main" xmlns:r="http://schemas.openxmlformats.org/officeDocument/2006/relationships" xmlns:p="http://schemas.openxmlformats.org/presentationml/2006/main">
+  <p:cSld>
+    <p:spTree>
+      <p:nvGrpSpPr>
+        <p:cNvPr id="1" name=""/>
+        <p:cNvGrpSpPr/>
+        <p:nvPr/>
+      </p:nvGrpSpPr>
+      <p:grpSpPr>
+        <a:xfrm>
+          <a:off x="0" y="0"/>
+          <a:ext cx="0" cy="0"/>
+          <a:chOff x="0" y="0"/>
+          <a:chExt cx="0" cy="0"/>
+        </a:xfrm>
+      </p:grpSpPr>
+      <p:sp>
+        <p:nvSpPr>
+          <p:cNvPr id="2" name="Title 1">
+            <a:extLst>
+              <a:ext uri="{FF2B5EF4-FFF2-40B4-BE49-F238E27FC236}">
+                <a16:creationId xmlns:a16="http://schemas.microsoft.com/office/drawing/2014/main" id="{3E73DE11-4A34-23E8-64C2-213C279CC688}"/>
+              </a:ext>
+            </a:extLst>
+          </p:cNvPr>
+          <p:cNvSpPr>
+            <a:spLocks noGrp="1"/>
+          </p:cNvSpPr>
+          <p:nvPr>
+            <p:ph type="title"/>
+          </p:nvPr>
+        </p:nvSpPr>
+        <p:spPr/>
+        <p:txBody>
+          <a:bodyPr/>
+          <a:lstStyle/>
+          <a:p>
+            <a:r>
+              <a:rPr lang="en-US" dirty="0"/>
+              <a:t>GCD</a:t>
+            </a:r>
+          </a:p>
+        </p:txBody>
+      </p:sp>
+      <p:sp>
+        <p:nvSpPr>
+          <p:cNvPr id="3" name="Slide Number Placeholder 2">
+            <a:extLst>
+              <a:ext uri="{FF2B5EF4-FFF2-40B4-BE49-F238E27FC236}">
+                <a16:creationId xmlns:a16="http://schemas.microsoft.com/office/drawing/2014/main" id="{D13F6058-B736-B29C-B402-F8D3E7E96A15}"/>
+              </a:ext>
+            </a:extLst>
+          </p:cNvPr>
+          <p:cNvSpPr>
+            <a:spLocks noGrp="1"/>
+          </p:cNvSpPr>
+          <p:nvPr>
+            <p:ph type="sldNum" sz="quarter" idx="12"/>
+          </p:nvPr>
+        </p:nvSpPr>
+        <p:spPr/>
+        <p:txBody>
+          <a:bodyPr/>
+          <a:lstStyle/>
+          <a:p>
+            <a:fld id="{EA7C8D44-3667-46F6-9772-CC52308E2A7F}" type="slidenum">
+              <a:rPr kumimoji="0" lang="en-US" smtClean="0"/>
+              <a:pPr/>
+              <a:t>3</a:t>
+            </a:fld>
+            <a:endParaRPr kumimoji="0" lang="en-US" dirty="0"/>
+          </a:p>
+        </p:txBody>
+      </p:sp>
+      <p:pic>
+        <p:nvPicPr>
+          <p:cNvPr id="6" name="Content Placeholder 5" descr="A screen shot of a computer&#10;&#10;AI-generated content may be incorrect.">
+            <a:extLst>
+              <a:ext uri="{FF2B5EF4-FFF2-40B4-BE49-F238E27FC236}">
+                <a16:creationId xmlns:a16="http://schemas.microsoft.com/office/drawing/2014/main" id="{B92B2B7E-F38B-2628-EF2D-83C2D72E679F}"/>
+              </a:ext>
+            </a:extLst>
+          </p:cNvPr>
+          <p:cNvPicPr>
+            <a:picLocks noGrp="1" noChangeAspect="1"/>
+          </p:cNvPicPr>
+          <p:nvPr>
+            <p:ph sz="quarter" idx="1"/>
+          </p:nvPr>
+        </p:nvPicPr>
+        <p:blipFill>
+          <a:blip r:embed="rId2">
+            <a:extLst>
+              <a:ext uri="{28A0092B-C50C-407E-A947-70E740481C1C}">
+                <a14:useLocalDpi xmlns:a14="http://schemas.microsoft.com/office/drawing/2010/main" val="0"/>
+              </a:ext>
+            </a:extLst>
+          </a:blip>
+          <a:stretch>
+            <a:fillRect/>
+          </a:stretch>
+        </p:blipFill>
+        <p:spPr>
+          <a:xfrm>
+            <a:off x="1280584" y="1771650"/>
+            <a:ext cx="6582833" cy="3702844"/>
+          </a:xfrm>
+        </p:spPr>
+      </p:pic>
+    </p:spTree>
+    <p:extLst>
+      <p:ext uri="{BB962C8B-B14F-4D97-AF65-F5344CB8AC3E}">
+        <p14:creationId xmlns:p14="http://schemas.microsoft.com/office/powerpoint/2010/main" val="464193995"/>
+      </p:ext>
+    </p:extLst>
+  </p:cSld>
+  <p:clrMapOvr>
+    <a:masterClrMapping/>
+  </p:clrMapOvr>
+</p:sld>
+</file>
+
+<file path=ppt/slides/slide4.xml><?xml version="1.0" encoding="utf-8"?>
+<p:sld xmlns:a="http://schemas.openxmlformats.org/drawingml/2006/main" xmlns:r="http://schemas.openxmlformats.org/officeDocument/2006/relationships" xmlns:p="http://schemas.openxmlformats.org/presentationml/2006/main">
+  <p:cSld>
+    <p:spTree>
+      <p:nvGrpSpPr>
+        <p:cNvPr id="1" name=""/>
+        <p:cNvGrpSpPr/>
+        <p:nvPr/>
+      </p:nvGrpSpPr>
+      <p:grpSpPr>
+        <a:xfrm>
+          <a:off x="0" y="0"/>
+          <a:ext cx="0" cy="0"/>
+          <a:chOff x="0" y="0"/>
+          <a:chExt cx="0" cy="0"/>
+        </a:xfrm>
+      </p:grpSpPr>
+      <p:sp>
+        <p:nvSpPr>
           <p:cNvPr id="2" name="Title 1"/>
           <p:cNvSpPr>
             <a:spLocks noGrp="1"/>
@@ -6083,7 +9657,7 @@
             <a:fld id="{EA7C8D44-3667-46F6-9772-CC52308E2A7F}" type="slidenum">
               <a:rPr kumimoji="0" lang="en-US" smtClean="0"/>
               <a:pPr/>
-              <a:t>2</a:t>
+              <a:t>4</a:t>
             </a:fld>
             <a:endParaRPr kumimoji="0" lang="en-US" dirty="0"/>
           </a:p>
@@ -7909,7 +11483,7 @@
 </p:sld>
 </file>
 
-<file path=ppt/slides/slide3.xml><?xml version="1.0" encoding="utf-8"?>
+<file path=ppt/slides/slide5.xml><?xml version="1.0" encoding="utf-8"?>
 <p:sld xmlns:a="http://schemas.openxmlformats.org/drawingml/2006/main" xmlns:r="http://schemas.openxmlformats.org/officeDocument/2006/relationships" xmlns:p="http://schemas.openxmlformats.org/presentationml/2006/main">
   <p:cSld>
     <p:spTree>
@@ -7966,7 +11540,7 @@
             <a:fld id="{EA7C8D44-3667-46F6-9772-CC52308E2A7F}" type="slidenum">
               <a:rPr kumimoji="0" lang="en-US" smtClean="0"/>
               <a:pPr/>
-              <a:t>3</a:t>
+              <a:t>5</a:t>
             </a:fld>
             <a:endParaRPr kumimoji="0" lang="en-US" dirty="0"/>
           </a:p>
@@ -9754,7 +13328,7 @@
 </p:sld>
 </file>
 
-<file path=ppt/slides/slide4.xml><?xml version="1.0" encoding="utf-8"?>
+<file path=ppt/slides/slide6.xml><?xml version="1.0" encoding="utf-8"?>
 <p:sld xmlns:a="http://schemas.openxmlformats.org/drawingml/2006/main" xmlns:r="http://schemas.openxmlformats.org/officeDocument/2006/relationships" xmlns:p="http://schemas.openxmlformats.org/presentationml/2006/main">
   <p:cSld>
     <p:spTree>
@@ -9811,7 +13385,7 @@
             <a:fld id="{EA7C8D44-3667-46F6-9772-CC52308E2A7F}" type="slidenum">
               <a:rPr kumimoji="0" lang="en-US" smtClean="0"/>
               <a:pPr/>
-              <a:t>4</a:t>
+              <a:t>6</a:t>
             </a:fld>
             <a:endParaRPr kumimoji="0" lang="en-US"/>
           </a:p>
@@ -11149,7 +14723,7 @@
 </p:sld>
 </file>
 
-<file path=ppt/slides/slide5.xml><?xml version="1.0" encoding="utf-8"?>
+<file path=ppt/slides/slide7.xml><?xml version="1.0" encoding="utf-8"?>
 <p:sld xmlns:a="http://schemas.openxmlformats.org/drawingml/2006/main" xmlns:r="http://schemas.openxmlformats.org/officeDocument/2006/relationships" xmlns:p="http://schemas.openxmlformats.org/presentationml/2006/main">
   <p:cSld>
     <p:spTree>
@@ -11206,7 +14780,7 @@
             <a:fld id="{EA7C8D44-3667-46F6-9772-CC52308E2A7F}" type="slidenum">
               <a:rPr kumimoji="0" lang="en-US" smtClean="0"/>
               <a:pPr/>
-              <a:t>5</a:t>
+              <a:t>7</a:t>
             </a:fld>
             <a:endParaRPr kumimoji="0" lang="en-US"/>
           </a:p>
@@ -12642,7 +16216,7 @@
 </p:sld>
 </file>
 
-<file path=ppt/slides/slide6.xml><?xml version="1.0" encoding="utf-8"?>
+<file path=ppt/slides/slide8.xml><?xml version="1.0" encoding="utf-8"?>
 <p:sld xmlns:a="http://schemas.openxmlformats.org/drawingml/2006/main" xmlns:r="http://schemas.openxmlformats.org/officeDocument/2006/relationships" xmlns:p="http://schemas.openxmlformats.org/presentationml/2006/main">
   <p:cSld>
     <p:spTree>
@@ -12699,7 +16273,7 @@
             <a:fld id="{EA7C8D44-3667-46F6-9772-CC52308E2A7F}" type="slidenum">
               <a:rPr kumimoji="0" lang="en-US" smtClean="0"/>
               <a:pPr/>
-              <a:t>6</a:t>
+              <a:t>8</a:t>
             </a:fld>
             <a:endParaRPr kumimoji="0" lang="en-US"/>
           </a:p>
@@ -14183,7 +17757,7 @@
 </p:sld>
 </file>
 
-<file path=ppt/slides/slide7.xml><?xml version="1.0" encoding="utf-8"?>
+<file path=ppt/slides/slide9.xml><?xml version="1.0" encoding="utf-8"?>
 <p:sld xmlns:a="http://schemas.openxmlformats.org/drawingml/2006/main" xmlns:r="http://schemas.openxmlformats.org/officeDocument/2006/relationships" xmlns:p="http://schemas.openxmlformats.org/presentationml/2006/main">
   <p:cSld>
     <p:spTree>
@@ -14240,7 +17814,7 @@
             <a:fld id="{EA7C8D44-3667-46F6-9772-CC52308E2A7F}" type="slidenum">
               <a:rPr kumimoji="0" lang="en-US" smtClean="0"/>
               <a:pPr/>
-              <a:t>7</a:t>
+              <a:t>9</a:t>
             </a:fld>
             <a:endParaRPr kumimoji="0" lang="en-US"/>
           </a:p>
@@ -15667,1711 +19241,6 @@
     <p:extLst>
       <p:ext uri="{BB962C8B-B14F-4D97-AF65-F5344CB8AC3E}">
         <p14:creationId xmlns:p14="http://schemas.microsoft.com/office/powerpoint/2010/main" val="2177597633"/>
-      </p:ext>
-    </p:extLst>
-  </p:cSld>
-  <p:clrMapOvr>
-    <a:masterClrMapping/>
-  </p:clrMapOvr>
-</p:sld>
-</file>
-
-<file path=ppt/slides/slide8.xml><?xml version="1.0" encoding="utf-8"?>
-<p:sld xmlns:a="http://schemas.openxmlformats.org/drawingml/2006/main" xmlns:r="http://schemas.openxmlformats.org/officeDocument/2006/relationships" xmlns:p="http://schemas.openxmlformats.org/presentationml/2006/main">
-  <p:cSld>
-    <p:spTree>
-      <p:nvGrpSpPr>
-        <p:cNvPr id="1" name=""/>
-        <p:cNvGrpSpPr/>
-        <p:nvPr/>
-      </p:nvGrpSpPr>
-      <p:grpSpPr>
-        <a:xfrm>
-          <a:off x="0" y="0"/>
-          <a:ext cx="0" cy="0"/>
-          <a:chOff x="0" y="0"/>
-          <a:chExt cx="0" cy="0"/>
-        </a:xfrm>
-      </p:grpSpPr>
-      <p:sp>
-        <p:nvSpPr>
-          <p:cNvPr id="2" name="Title 1"/>
-          <p:cNvSpPr>
-            <a:spLocks noGrp="1"/>
-          </p:cNvSpPr>
-          <p:nvPr>
-            <p:ph type="title"/>
-          </p:nvPr>
-        </p:nvSpPr>
-        <p:spPr/>
-        <p:txBody>
-          <a:bodyPr/>
-          <a:lstStyle/>
-          <a:p>
-            <a:r>
-              <a:rPr lang="en-US" dirty="0"/>
-              <a:t>Implementation of Barrel Shifter</a:t>
-            </a:r>
-          </a:p>
-        </p:txBody>
-      </p:sp>
-      <p:sp>
-        <p:nvSpPr>
-          <p:cNvPr id="3" name="Slide Number Placeholder 2"/>
-          <p:cNvSpPr>
-            <a:spLocks noGrp="1"/>
-          </p:cNvSpPr>
-          <p:nvPr>
-            <p:ph type="sldNum" sz="quarter" idx="12"/>
-          </p:nvPr>
-        </p:nvSpPr>
-        <p:spPr/>
-        <p:txBody>
-          <a:bodyPr/>
-          <a:lstStyle/>
-          <a:p>
-            <a:fld id="{EA7C8D44-3667-46F6-9772-CC52308E2A7F}" type="slidenum">
-              <a:rPr kumimoji="0" lang="en-US" smtClean="0"/>
-              <a:pPr/>
-              <a:t>8</a:t>
-            </a:fld>
-            <a:endParaRPr kumimoji="0" lang="en-US"/>
-          </a:p>
-        </p:txBody>
-      </p:sp>
-      <p:sp>
-        <p:nvSpPr>
-          <p:cNvPr id="4" name="Rectangle 3"/>
-          <p:cNvSpPr/>
-          <p:nvPr/>
-        </p:nvSpPr>
-        <p:spPr>
-          <a:xfrm>
-            <a:off x="235826" y="5117068"/>
-            <a:ext cx="5791200" cy="369332"/>
-          </a:xfrm>
-          <a:prstGeom prst="rect">
-            <a:avLst/>
-          </a:prstGeom>
-        </p:spPr>
-        <p:txBody>
-          <a:bodyPr wrap="square">
-            <a:spAutoFit/>
-          </a:bodyPr>
-          <a:lstStyle/>
-          <a:p>
-            <a:r>
-              <a:rPr lang="en-US" dirty="0"/>
-              <a:t>Example four-bit Barrel shifter that performs </a:t>
-            </a:r>
-            <a:r>
-              <a:rPr lang="en-US" b="1" dirty="0"/>
-              <a:t>rotate right</a:t>
-            </a:r>
-          </a:p>
-        </p:txBody>
-      </p:sp>
-      <p:graphicFrame>
-        <p:nvGraphicFramePr>
-          <p:cNvPr id="5" name="Table 4"/>
-          <p:cNvGraphicFramePr>
-            <a:graphicFrameLocks noGrp="1"/>
-          </p:cNvGraphicFramePr>
-          <p:nvPr>
-            <p:extLst>
-              <p:ext uri="{D42A27DB-BD31-4B8C-83A1-F6EECF244321}">
-                <p14:modId xmlns:p14="http://schemas.microsoft.com/office/powerpoint/2010/main" val="2190145348"/>
-              </p:ext>
-            </p:extLst>
-          </p:nvPr>
-        </p:nvGraphicFramePr>
-        <p:xfrm>
-          <a:off x="6248400" y="2418965"/>
-          <a:ext cx="2590800" cy="2045730"/>
-        </p:xfrm>
-        <a:graphic>
-          <a:graphicData uri="http://schemas.openxmlformats.org/drawingml/2006/table">
-            <a:tbl>
-              <a:tblPr firstRow="1" firstCol="1" bandRow="1">
-                <a:tableStyleId>{B301B821-A1FF-4177-AEE7-76D212191A09}</a:tableStyleId>
-              </a:tblPr>
-              <a:tblGrid>
-                <a:gridCol w="417963">
-                  <a:extLst>
-                    <a:ext uri="{9D8B030D-6E8A-4147-A177-3AD203B41FA5}">
-                      <a16:colId xmlns:a16="http://schemas.microsoft.com/office/drawing/2014/main" val="20000"/>
-                    </a:ext>
-                  </a:extLst>
-                </a:gridCol>
-                <a:gridCol w="417009">
-                  <a:extLst>
-                    <a:ext uri="{9D8B030D-6E8A-4147-A177-3AD203B41FA5}">
-                      <a16:colId xmlns:a16="http://schemas.microsoft.com/office/drawing/2014/main" val="20001"/>
-                    </a:ext>
-                  </a:extLst>
-                </a:gridCol>
-                <a:gridCol w="438957">
-                  <a:extLst>
-                    <a:ext uri="{9D8B030D-6E8A-4147-A177-3AD203B41FA5}">
-                      <a16:colId xmlns:a16="http://schemas.microsoft.com/office/drawing/2014/main" val="20002"/>
-                    </a:ext>
-                  </a:extLst>
-                </a:gridCol>
-                <a:gridCol w="438957">
-                  <a:extLst>
-                    <a:ext uri="{9D8B030D-6E8A-4147-A177-3AD203B41FA5}">
-                      <a16:colId xmlns:a16="http://schemas.microsoft.com/office/drawing/2014/main" val="20003"/>
-                    </a:ext>
-                  </a:extLst>
-                </a:gridCol>
-                <a:gridCol w="438957">
-                  <a:extLst>
-                    <a:ext uri="{9D8B030D-6E8A-4147-A177-3AD203B41FA5}">
-                      <a16:colId xmlns:a16="http://schemas.microsoft.com/office/drawing/2014/main" val="20004"/>
-                    </a:ext>
-                  </a:extLst>
-                </a:gridCol>
-                <a:gridCol w="438957">
-                  <a:extLst>
-                    <a:ext uri="{9D8B030D-6E8A-4147-A177-3AD203B41FA5}">
-                      <a16:colId xmlns:a16="http://schemas.microsoft.com/office/drawing/2014/main" val="20005"/>
-                    </a:ext>
-                  </a:extLst>
-                </a:gridCol>
-              </a:tblGrid>
-              <a:tr h="409146">
-                <a:tc>
-                  <a:txBody>
-                    <a:bodyPr/>
-                    <a:lstStyle/>
-                    <a:p>
-                      <a:pPr marL="0" marR="0" algn="ctr">
-                        <a:spcBef>
-                          <a:spcPts val="0"/>
-                        </a:spcBef>
-                        <a:spcAft>
-                          <a:spcPts val="0"/>
-                        </a:spcAft>
-                      </a:pPr>
-                      <a:r>
-                        <a:rPr lang="en-US" sz="1800" dirty="0" err="1">
-                          <a:effectLst/>
-                        </a:rPr>
-                        <a:t>S</a:t>
-                      </a:r>
-                      <a:r>
-                        <a:rPr lang="en-US" sz="1800" baseline="-25000" dirty="0" err="1">
-                          <a:effectLst/>
-                        </a:rPr>
-                        <a:t>1</a:t>
-                      </a:r>
-                      <a:endParaRPr lang="en-US" sz="1800" dirty="0">
-                        <a:effectLst/>
-                        <a:latin typeface="Consolas" panose="020B0609020204030204" pitchFamily="49" charset="0"/>
-                        <a:ea typeface="宋体"/>
-                        <a:cs typeface="Consolas" panose="020B0609020204030204" pitchFamily="49" charset="0"/>
-                      </a:endParaRPr>
-                    </a:p>
-                  </a:txBody>
-                  <a:tcPr marL="68580" marR="68580" marT="0" marB="0" anchor="ctr"/>
-                </a:tc>
-                <a:tc>
-                  <a:txBody>
-                    <a:bodyPr/>
-                    <a:lstStyle/>
-                    <a:p>
-                      <a:pPr marL="0" marR="0" algn="ctr">
-                        <a:spcBef>
-                          <a:spcPts val="0"/>
-                        </a:spcBef>
-                        <a:spcAft>
-                          <a:spcPts val="0"/>
-                        </a:spcAft>
-                      </a:pPr>
-                      <a:r>
-                        <a:rPr lang="en-US" sz="1800" dirty="0" err="1">
-                          <a:effectLst/>
-                        </a:rPr>
-                        <a:t>S</a:t>
-                      </a:r>
-                      <a:r>
-                        <a:rPr lang="en-US" sz="1800" baseline="-25000" dirty="0" err="1">
-                          <a:effectLst/>
-                        </a:rPr>
-                        <a:t>0</a:t>
-                      </a:r>
-                      <a:endParaRPr lang="en-US" sz="1800" dirty="0">
-                        <a:effectLst/>
-                        <a:latin typeface="Consolas" panose="020B0609020204030204" pitchFamily="49" charset="0"/>
-                        <a:ea typeface="宋体"/>
-                        <a:cs typeface="Consolas" panose="020B0609020204030204" pitchFamily="49" charset="0"/>
-                      </a:endParaRPr>
-                    </a:p>
-                  </a:txBody>
-                  <a:tcPr marL="68580" marR="68580" marT="0" marB="0" anchor="ctr">
-                    <a:lnR w="19050" cap="flat" cmpd="sng" algn="ctr">
-                      <a:solidFill>
-                        <a:schemeClr val="tx1"/>
-                      </a:solidFill>
-                      <a:prstDash val="solid"/>
-                      <a:round/>
-                      <a:headEnd type="none" w="med" len="med"/>
-                      <a:tailEnd type="none" w="med" len="med"/>
-                    </a:lnR>
-                  </a:tcPr>
-                </a:tc>
-                <a:tc>
-                  <a:txBody>
-                    <a:bodyPr/>
-                    <a:lstStyle/>
-                    <a:p>
-                      <a:pPr marL="0" marR="0" algn="ctr">
-                        <a:spcBef>
-                          <a:spcPts val="0"/>
-                        </a:spcBef>
-                        <a:spcAft>
-                          <a:spcPts val="0"/>
-                        </a:spcAft>
-                      </a:pPr>
-                      <a:r>
-                        <a:rPr lang="en-US" sz="1800">
-                          <a:effectLst/>
-                        </a:rPr>
-                        <a:t>Y</a:t>
-                      </a:r>
-                      <a:r>
-                        <a:rPr lang="en-US" sz="1800" baseline="-25000">
-                          <a:effectLst/>
-                        </a:rPr>
-                        <a:t>3</a:t>
-                      </a:r>
-                      <a:endParaRPr lang="en-US" sz="1800">
-                        <a:effectLst/>
-                        <a:latin typeface="Consolas" panose="020B0609020204030204" pitchFamily="49" charset="0"/>
-                        <a:ea typeface="宋体"/>
-                        <a:cs typeface="Consolas" panose="020B0609020204030204" pitchFamily="49" charset="0"/>
-                      </a:endParaRPr>
-                    </a:p>
-                  </a:txBody>
-                  <a:tcPr marL="68580" marR="68580" marT="0" marB="0" anchor="ctr">
-                    <a:lnL w="19050" cap="flat" cmpd="sng" algn="ctr">
-                      <a:solidFill>
-                        <a:schemeClr val="tx1"/>
-                      </a:solidFill>
-                      <a:prstDash val="solid"/>
-                      <a:round/>
-                      <a:headEnd type="none" w="med" len="med"/>
-                      <a:tailEnd type="none" w="med" len="med"/>
-                    </a:lnL>
-                  </a:tcPr>
-                </a:tc>
-                <a:tc>
-                  <a:txBody>
-                    <a:bodyPr/>
-                    <a:lstStyle/>
-                    <a:p>
-                      <a:pPr marL="0" marR="0" algn="ctr">
-                        <a:spcBef>
-                          <a:spcPts val="0"/>
-                        </a:spcBef>
-                        <a:spcAft>
-                          <a:spcPts val="0"/>
-                        </a:spcAft>
-                      </a:pPr>
-                      <a:r>
-                        <a:rPr lang="en-US" sz="1800">
-                          <a:effectLst/>
-                        </a:rPr>
-                        <a:t>Y</a:t>
-                      </a:r>
-                      <a:r>
-                        <a:rPr lang="en-US" sz="1800" baseline="-25000">
-                          <a:effectLst/>
-                        </a:rPr>
-                        <a:t>2</a:t>
-                      </a:r>
-                      <a:endParaRPr lang="en-US" sz="1800">
-                        <a:effectLst/>
-                        <a:latin typeface="Consolas" panose="020B0609020204030204" pitchFamily="49" charset="0"/>
-                        <a:ea typeface="宋体"/>
-                        <a:cs typeface="Consolas" panose="020B0609020204030204" pitchFamily="49" charset="0"/>
-                      </a:endParaRPr>
-                    </a:p>
-                  </a:txBody>
-                  <a:tcPr marL="68580" marR="68580" marT="0" marB="0" anchor="ctr"/>
-                </a:tc>
-                <a:tc>
-                  <a:txBody>
-                    <a:bodyPr/>
-                    <a:lstStyle/>
-                    <a:p>
-                      <a:pPr marL="0" marR="0" algn="ctr">
-                        <a:spcBef>
-                          <a:spcPts val="0"/>
-                        </a:spcBef>
-                        <a:spcAft>
-                          <a:spcPts val="0"/>
-                        </a:spcAft>
-                      </a:pPr>
-                      <a:r>
-                        <a:rPr lang="en-US" sz="1800">
-                          <a:effectLst/>
-                        </a:rPr>
-                        <a:t>Y</a:t>
-                      </a:r>
-                      <a:r>
-                        <a:rPr lang="en-US" sz="1800" baseline="-25000">
-                          <a:effectLst/>
-                        </a:rPr>
-                        <a:t>1</a:t>
-                      </a:r>
-                      <a:endParaRPr lang="en-US" sz="1800">
-                        <a:effectLst/>
-                        <a:latin typeface="Consolas" panose="020B0609020204030204" pitchFamily="49" charset="0"/>
-                        <a:ea typeface="宋体"/>
-                        <a:cs typeface="Consolas" panose="020B0609020204030204" pitchFamily="49" charset="0"/>
-                      </a:endParaRPr>
-                    </a:p>
-                  </a:txBody>
-                  <a:tcPr marL="68580" marR="68580" marT="0" marB="0" anchor="ctr"/>
-                </a:tc>
-                <a:tc>
-                  <a:txBody>
-                    <a:bodyPr/>
-                    <a:lstStyle/>
-                    <a:p>
-                      <a:pPr marL="0" marR="0" algn="ctr">
-                        <a:spcBef>
-                          <a:spcPts val="0"/>
-                        </a:spcBef>
-                        <a:spcAft>
-                          <a:spcPts val="0"/>
-                        </a:spcAft>
-                      </a:pPr>
-                      <a:r>
-                        <a:rPr lang="en-US" sz="1800">
-                          <a:effectLst/>
-                        </a:rPr>
-                        <a:t>Y</a:t>
-                      </a:r>
-                      <a:r>
-                        <a:rPr lang="en-US" sz="1800" baseline="-25000">
-                          <a:effectLst/>
-                        </a:rPr>
-                        <a:t>0</a:t>
-                      </a:r>
-                      <a:endParaRPr lang="en-US" sz="1800">
-                        <a:effectLst/>
-                        <a:latin typeface="Consolas" panose="020B0609020204030204" pitchFamily="49" charset="0"/>
-                        <a:ea typeface="宋体"/>
-                        <a:cs typeface="Consolas" panose="020B0609020204030204" pitchFamily="49" charset="0"/>
-                      </a:endParaRPr>
-                    </a:p>
-                  </a:txBody>
-                  <a:tcPr marL="68580" marR="68580" marT="0" marB="0" anchor="ctr"/>
-                </a:tc>
-                <a:extLst>
-                  <a:ext uri="{0D108BD9-81ED-4DB2-BD59-A6C34878D82A}">
-                    <a16:rowId xmlns:a16="http://schemas.microsoft.com/office/drawing/2014/main" val="10000"/>
-                  </a:ext>
-                </a:extLst>
-              </a:tr>
-              <a:tr h="409146">
-                <a:tc>
-                  <a:txBody>
-                    <a:bodyPr/>
-                    <a:lstStyle/>
-                    <a:p>
-                      <a:pPr marL="0" marR="0" algn="ctr">
-                        <a:spcBef>
-                          <a:spcPts val="0"/>
-                        </a:spcBef>
-                        <a:spcAft>
-                          <a:spcPts val="0"/>
-                        </a:spcAft>
-                      </a:pPr>
-                      <a:r>
-                        <a:rPr lang="en-US" sz="1800" b="1" dirty="0">
-                          <a:effectLst/>
-                          <a:latin typeface="Consolas" panose="020B0609020204030204" pitchFamily="49" charset="0"/>
-                          <a:cs typeface="Consolas" panose="020B0609020204030204" pitchFamily="49" charset="0"/>
-                        </a:rPr>
-                        <a:t>0</a:t>
-                      </a:r>
-                      <a:endParaRPr lang="en-US" sz="1800" b="1" dirty="0">
-                        <a:effectLst/>
-                        <a:latin typeface="Consolas" panose="020B0609020204030204" pitchFamily="49" charset="0"/>
-                        <a:ea typeface="宋体"/>
-                        <a:cs typeface="Consolas" panose="020B0609020204030204" pitchFamily="49" charset="0"/>
-                      </a:endParaRPr>
-                    </a:p>
-                  </a:txBody>
-                  <a:tcPr marL="68580" marR="68580" marT="0" marB="0" anchor="ctr"/>
-                </a:tc>
-                <a:tc>
-                  <a:txBody>
-                    <a:bodyPr/>
-                    <a:lstStyle/>
-                    <a:p>
-                      <a:pPr marL="0" marR="0" algn="ctr">
-                        <a:spcBef>
-                          <a:spcPts val="0"/>
-                        </a:spcBef>
-                        <a:spcAft>
-                          <a:spcPts val="0"/>
-                        </a:spcAft>
-                      </a:pPr>
-                      <a:r>
-                        <a:rPr lang="en-US" sz="1800" b="1" dirty="0">
-                          <a:effectLst/>
-                          <a:latin typeface="Consolas" panose="020B0609020204030204" pitchFamily="49" charset="0"/>
-                          <a:cs typeface="Consolas" panose="020B0609020204030204" pitchFamily="49" charset="0"/>
-                        </a:rPr>
-                        <a:t>0</a:t>
-                      </a:r>
-                      <a:endParaRPr lang="en-US" sz="1800" b="1" dirty="0">
-                        <a:effectLst/>
-                        <a:latin typeface="Consolas" panose="020B0609020204030204" pitchFamily="49" charset="0"/>
-                        <a:ea typeface="宋体"/>
-                        <a:cs typeface="Consolas" panose="020B0609020204030204" pitchFamily="49" charset="0"/>
-                      </a:endParaRPr>
-                    </a:p>
-                  </a:txBody>
-                  <a:tcPr marL="68580" marR="68580" marT="0" marB="0" anchor="ctr">
-                    <a:lnR w="19050" cap="flat" cmpd="sng" algn="ctr">
-                      <a:solidFill>
-                        <a:schemeClr val="tx1"/>
-                      </a:solidFill>
-                      <a:prstDash val="solid"/>
-                      <a:round/>
-                      <a:headEnd type="none" w="med" len="med"/>
-                      <a:tailEnd type="none" w="med" len="med"/>
-                    </a:lnR>
-                  </a:tcPr>
-                </a:tc>
-                <a:tc>
-                  <a:txBody>
-                    <a:bodyPr/>
-                    <a:lstStyle/>
-                    <a:p>
-                      <a:pPr marL="0" marR="0" algn="ctr">
-                        <a:spcBef>
-                          <a:spcPts val="0"/>
-                        </a:spcBef>
-                        <a:spcAft>
-                          <a:spcPts val="0"/>
-                        </a:spcAft>
-                      </a:pPr>
-                      <a:r>
-                        <a:rPr lang="en-US" sz="1800" dirty="0" err="1">
-                          <a:effectLst/>
-                        </a:rPr>
-                        <a:t>D</a:t>
-                      </a:r>
-                      <a:r>
-                        <a:rPr lang="en-US" sz="1800" baseline="-25000" dirty="0" err="1">
-                          <a:effectLst/>
-                        </a:rPr>
-                        <a:t>3</a:t>
-                      </a:r>
-                      <a:endParaRPr lang="en-US" sz="1800" dirty="0">
-                        <a:effectLst/>
-                        <a:latin typeface="Consolas" panose="020B0609020204030204" pitchFamily="49" charset="0"/>
-                        <a:ea typeface="宋体"/>
-                        <a:cs typeface="Consolas" panose="020B0609020204030204" pitchFamily="49" charset="0"/>
-                      </a:endParaRPr>
-                    </a:p>
-                  </a:txBody>
-                  <a:tcPr marL="68580" marR="68580" marT="0" marB="0" anchor="ctr">
-                    <a:lnL w="19050" cap="flat" cmpd="sng" algn="ctr">
-                      <a:solidFill>
-                        <a:schemeClr val="tx1"/>
-                      </a:solidFill>
-                      <a:prstDash val="solid"/>
-                      <a:round/>
-                      <a:headEnd type="none" w="med" len="med"/>
-                      <a:tailEnd type="none" w="med" len="med"/>
-                    </a:lnL>
-                  </a:tcPr>
-                </a:tc>
-                <a:tc>
-                  <a:txBody>
-                    <a:bodyPr/>
-                    <a:lstStyle/>
-                    <a:p>
-                      <a:pPr marL="0" marR="0" algn="ctr">
-                        <a:spcBef>
-                          <a:spcPts val="0"/>
-                        </a:spcBef>
-                        <a:spcAft>
-                          <a:spcPts val="0"/>
-                        </a:spcAft>
-                      </a:pPr>
-                      <a:r>
-                        <a:rPr lang="en-US" sz="1800">
-                          <a:effectLst/>
-                        </a:rPr>
-                        <a:t>D</a:t>
-                      </a:r>
-                      <a:r>
-                        <a:rPr lang="en-US" sz="1800" baseline="-25000">
-                          <a:effectLst/>
-                        </a:rPr>
-                        <a:t>2</a:t>
-                      </a:r>
-                      <a:endParaRPr lang="en-US" sz="1800">
-                        <a:effectLst/>
-                        <a:latin typeface="Consolas" panose="020B0609020204030204" pitchFamily="49" charset="0"/>
-                        <a:ea typeface="宋体"/>
-                        <a:cs typeface="Consolas" panose="020B0609020204030204" pitchFamily="49" charset="0"/>
-                      </a:endParaRPr>
-                    </a:p>
-                  </a:txBody>
-                  <a:tcPr marL="68580" marR="68580" marT="0" marB="0" anchor="ctr"/>
-                </a:tc>
-                <a:tc>
-                  <a:txBody>
-                    <a:bodyPr/>
-                    <a:lstStyle/>
-                    <a:p>
-                      <a:pPr marL="0" marR="0" algn="ctr">
-                        <a:spcBef>
-                          <a:spcPts val="0"/>
-                        </a:spcBef>
-                        <a:spcAft>
-                          <a:spcPts val="0"/>
-                        </a:spcAft>
-                      </a:pPr>
-                      <a:r>
-                        <a:rPr lang="en-US" sz="1800">
-                          <a:effectLst/>
-                        </a:rPr>
-                        <a:t>D</a:t>
-                      </a:r>
-                      <a:r>
-                        <a:rPr lang="en-US" sz="1800" baseline="-25000">
-                          <a:effectLst/>
-                        </a:rPr>
-                        <a:t>1</a:t>
-                      </a:r>
-                      <a:endParaRPr lang="en-US" sz="1800">
-                        <a:effectLst/>
-                        <a:latin typeface="Consolas" panose="020B0609020204030204" pitchFamily="49" charset="0"/>
-                        <a:ea typeface="宋体"/>
-                        <a:cs typeface="Consolas" panose="020B0609020204030204" pitchFamily="49" charset="0"/>
-                      </a:endParaRPr>
-                    </a:p>
-                  </a:txBody>
-                  <a:tcPr marL="68580" marR="68580" marT="0" marB="0" anchor="ctr"/>
-                </a:tc>
-                <a:tc>
-                  <a:txBody>
-                    <a:bodyPr/>
-                    <a:lstStyle/>
-                    <a:p>
-                      <a:pPr marL="0" marR="0" algn="ctr">
-                        <a:spcBef>
-                          <a:spcPts val="0"/>
-                        </a:spcBef>
-                        <a:spcAft>
-                          <a:spcPts val="0"/>
-                        </a:spcAft>
-                      </a:pPr>
-                      <a:r>
-                        <a:rPr lang="en-US" sz="1800">
-                          <a:effectLst/>
-                        </a:rPr>
-                        <a:t>D</a:t>
-                      </a:r>
-                      <a:r>
-                        <a:rPr lang="en-US" sz="1800" baseline="-25000">
-                          <a:effectLst/>
-                        </a:rPr>
-                        <a:t>0</a:t>
-                      </a:r>
-                      <a:endParaRPr lang="en-US" sz="1800">
-                        <a:effectLst/>
-                        <a:latin typeface="Consolas" panose="020B0609020204030204" pitchFamily="49" charset="0"/>
-                        <a:ea typeface="宋体"/>
-                        <a:cs typeface="Consolas" panose="020B0609020204030204" pitchFamily="49" charset="0"/>
-                      </a:endParaRPr>
-                    </a:p>
-                  </a:txBody>
-                  <a:tcPr marL="68580" marR="68580" marT="0" marB="0" anchor="ctr"/>
-                </a:tc>
-                <a:extLst>
-                  <a:ext uri="{0D108BD9-81ED-4DB2-BD59-A6C34878D82A}">
-                    <a16:rowId xmlns:a16="http://schemas.microsoft.com/office/drawing/2014/main" val="10001"/>
-                  </a:ext>
-                </a:extLst>
-              </a:tr>
-              <a:tr h="409146">
-                <a:tc>
-                  <a:txBody>
-                    <a:bodyPr/>
-                    <a:lstStyle/>
-                    <a:p>
-                      <a:pPr marL="0" marR="0" algn="ctr">
-                        <a:spcBef>
-                          <a:spcPts val="0"/>
-                        </a:spcBef>
-                        <a:spcAft>
-                          <a:spcPts val="0"/>
-                        </a:spcAft>
-                      </a:pPr>
-                      <a:r>
-                        <a:rPr lang="en-US" sz="1800" b="1" dirty="0">
-                          <a:effectLst/>
-                          <a:latin typeface="Consolas" panose="020B0609020204030204" pitchFamily="49" charset="0"/>
-                          <a:cs typeface="Consolas" panose="020B0609020204030204" pitchFamily="49" charset="0"/>
-                        </a:rPr>
-                        <a:t>0</a:t>
-                      </a:r>
-                      <a:endParaRPr lang="en-US" sz="1800" b="1" dirty="0">
-                        <a:effectLst/>
-                        <a:latin typeface="Consolas" panose="020B0609020204030204" pitchFamily="49" charset="0"/>
-                        <a:ea typeface="宋体"/>
-                        <a:cs typeface="Consolas" panose="020B0609020204030204" pitchFamily="49" charset="0"/>
-                      </a:endParaRPr>
-                    </a:p>
-                  </a:txBody>
-                  <a:tcPr marL="68580" marR="68580" marT="0" marB="0" anchor="ctr"/>
-                </a:tc>
-                <a:tc>
-                  <a:txBody>
-                    <a:bodyPr/>
-                    <a:lstStyle/>
-                    <a:p>
-                      <a:pPr marL="0" marR="0" algn="ctr">
-                        <a:spcBef>
-                          <a:spcPts val="0"/>
-                        </a:spcBef>
-                        <a:spcAft>
-                          <a:spcPts val="0"/>
-                        </a:spcAft>
-                      </a:pPr>
-                      <a:r>
-                        <a:rPr lang="en-US" sz="1800" b="1" dirty="0">
-                          <a:effectLst/>
-                          <a:latin typeface="Consolas" panose="020B0609020204030204" pitchFamily="49" charset="0"/>
-                          <a:cs typeface="Consolas" panose="020B0609020204030204" pitchFamily="49" charset="0"/>
-                        </a:rPr>
-                        <a:t>1</a:t>
-                      </a:r>
-                      <a:endParaRPr lang="en-US" sz="1800" b="1" dirty="0">
-                        <a:effectLst/>
-                        <a:latin typeface="Consolas" panose="020B0609020204030204" pitchFamily="49" charset="0"/>
-                        <a:ea typeface="宋体"/>
-                        <a:cs typeface="Consolas" panose="020B0609020204030204" pitchFamily="49" charset="0"/>
-                      </a:endParaRPr>
-                    </a:p>
-                  </a:txBody>
-                  <a:tcPr marL="68580" marR="68580" marT="0" marB="0" anchor="ctr">
-                    <a:lnR w="19050" cap="flat" cmpd="sng" algn="ctr">
-                      <a:solidFill>
-                        <a:schemeClr val="tx1"/>
-                      </a:solidFill>
-                      <a:prstDash val="solid"/>
-                      <a:round/>
-                      <a:headEnd type="none" w="med" len="med"/>
-                      <a:tailEnd type="none" w="med" len="med"/>
-                    </a:lnR>
-                  </a:tcPr>
-                </a:tc>
-                <a:tc>
-                  <a:txBody>
-                    <a:bodyPr/>
-                    <a:lstStyle/>
-                    <a:p>
-                      <a:pPr marL="0" marR="0" algn="ctr">
-                        <a:spcBef>
-                          <a:spcPts val="0"/>
-                        </a:spcBef>
-                        <a:spcAft>
-                          <a:spcPts val="0"/>
-                        </a:spcAft>
-                      </a:pPr>
-                      <a:r>
-                        <a:rPr lang="en-US" sz="1800" dirty="0" err="1">
-                          <a:effectLst/>
-                        </a:rPr>
-                        <a:t>D</a:t>
-                      </a:r>
-                      <a:r>
-                        <a:rPr lang="en-US" sz="1800" baseline="-25000" dirty="0" err="1">
-                          <a:effectLst/>
-                        </a:rPr>
-                        <a:t>0</a:t>
-                      </a:r>
-                      <a:endParaRPr lang="en-US" sz="1800" dirty="0">
-                        <a:effectLst/>
-                        <a:latin typeface="Consolas" panose="020B0609020204030204" pitchFamily="49" charset="0"/>
-                        <a:ea typeface="宋体"/>
-                        <a:cs typeface="Consolas" panose="020B0609020204030204" pitchFamily="49" charset="0"/>
-                      </a:endParaRPr>
-                    </a:p>
-                  </a:txBody>
-                  <a:tcPr marL="68580" marR="68580" marT="0" marB="0" anchor="ctr">
-                    <a:lnL w="19050" cap="flat" cmpd="sng" algn="ctr">
-                      <a:solidFill>
-                        <a:schemeClr val="tx1"/>
-                      </a:solidFill>
-                      <a:prstDash val="solid"/>
-                      <a:round/>
-                      <a:headEnd type="none" w="med" len="med"/>
-                      <a:tailEnd type="none" w="med" len="med"/>
-                    </a:lnL>
-                  </a:tcPr>
-                </a:tc>
-                <a:tc>
-                  <a:txBody>
-                    <a:bodyPr/>
-                    <a:lstStyle/>
-                    <a:p>
-                      <a:pPr marL="0" marR="0" algn="ctr">
-                        <a:spcBef>
-                          <a:spcPts val="0"/>
-                        </a:spcBef>
-                        <a:spcAft>
-                          <a:spcPts val="0"/>
-                        </a:spcAft>
-                      </a:pPr>
-                      <a:r>
-                        <a:rPr lang="en-US" sz="1800" dirty="0" err="1">
-                          <a:effectLst/>
-                        </a:rPr>
-                        <a:t>D</a:t>
-                      </a:r>
-                      <a:r>
-                        <a:rPr lang="en-US" sz="1800" baseline="-25000" dirty="0" err="1">
-                          <a:effectLst/>
-                        </a:rPr>
-                        <a:t>3</a:t>
-                      </a:r>
-                      <a:endParaRPr lang="en-US" sz="1800" dirty="0">
-                        <a:effectLst/>
-                        <a:latin typeface="Consolas" panose="020B0609020204030204" pitchFamily="49" charset="0"/>
-                        <a:ea typeface="宋体"/>
-                        <a:cs typeface="Consolas" panose="020B0609020204030204" pitchFamily="49" charset="0"/>
-                      </a:endParaRPr>
-                    </a:p>
-                  </a:txBody>
-                  <a:tcPr marL="68580" marR="68580" marT="0" marB="0" anchor="ctr"/>
-                </a:tc>
-                <a:tc>
-                  <a:txBody>
-                    <a:bodyPr/>
-                    <a:lstStyle/>
-                    <a:p>
-                      <a:pPr marL="0" marR="0" algn="ctr">
-                        <a:spcBef>
-                          <a:spcPts val="0"/>
-                        </a:spcBef>
-                        <a:spcAft>
-                          <a:spcPts val="0"/>
-                        </a:spcAft>
-                      </a:pPr>
-                      <a:r>
-                        <a:rPr lang="en-US" sz="1800">
-                          <a:effectLst/>
-                        </a:rPr>
-                        <a:t>D</a:t>
-                      </a:r>
-                      <a:r>
-                        <a:rPr lang="en-US" sz="1800" baseline="-25000">
-                          <a:effectLst/>
-                        </a:rPr>
-                        <a:t>2</a:t>
-                      </a:r>
-                      <a:endParaRPr lang="en-US" sz="1800">
-                        <a:effectLst/>
-                        <a:latin typeface="Consolas" panose="020B0609020204030204" pitchFamily="49" charset="0"/>
-                        <a:ea typeface="宋体"/>
-                        <a:cs typeface="Consolas" panose="020B0609020204030204" pitchFamily="49" charset="0"/>
-                      </a:endParaRPr>
-                    </a:p>
-                  </a:txBody>
-                  <a:tcPr marL="68580" marR="68580" marT="0" marB="0" anchor="ctr"/>
-                </a:tc>
-                <a:tc>
-                  <a:txBody>
-                    <a:bodyPr/>
-                    <a:lstStyle/>
-                    <a:p>
-                      <a:pPr marL="0" marR="0" algn="ctr">
-                        <a:spcBef>
-                          <a:spcPts val="0"/>
-                        </a:spcBef>
-                        <a:spcAft>
-                          <a:spcPts val="0"/>
-                        </a:spcAft>
-                      </a:pPr>
-                      <a:r>
-                        <a:rPr lang="en-US" sz="1800">
-                          <a:effectLst/>
-                        </a:rPr>
-                        <a:t>D</a:t>
-                      </a:r>
-                      <a:r>
-                        <a:rPr lang="en-US" sz="1800" baseline="-25000">
-                          <a:effectLst/>
-                        </a:rPr>
-                        <a:t>1</a:t>
-                      </a:r>
-                      <a:endParaRPr lang="en-US" sz="1800">
-                        <a:effectLst/>
-                        <a:latin typeface="Consolas" panose="020B0609020204030204" pitchFamily="49" charset="0"/>
-                        <a:ea typeface="宋体"/>
-                        <a:cs typeface="Consolas" panose="020B0609020204030204" pitchFamily="49" charset="0"/>
-                      </a:endParaRPr>
-                    </a:p>
-                  </a:txBody>
-                  <a:tcPr marL="68580" marR="68580" marT="0" marB="0" anchor="ctr"/>
-                </a:tc>
-                <a:extLst>
-                  <a:ext uri="{0D108BD9-81ED-4DB2-BD59-A6C34878D82A}">
-                    <a16:rowId xmlns:a16="http://schemas.microsoft.com/office/drawing/2014/main" val="10002"/>
-                  </a:ext>
-                </a:extLst>
-              </a:tr>
-              <a:tr h="409146">
-                <a:tc>
-                  <a:txBody>
-                    <a:bodyPr/>
-                    <a:lstStyle/>
-                    <a:p>
-                      <a:pPr marL="0" marR="0" algn="ctr">
-                        <a:spcBef>
-                          <a:spcPts val="0"/>
-                        </a:spcBef>
-                        <a:spcAft>
-                          <a:spcPts val="0"/>
-                        </a:spcAft>
-                      </a:pPr>
-                      <a:r>
-                        <a:rPr lang="en-US" sz="1800" b="1">
-                          <a:effectLst/>
-                          <a:latin typeface="Consolas" panose="020B0609020204030204" pitchFamily="49" charset="0"/>
-                          <a:cs typeface="Consolas" panose="020B0609020204030204" pitchFamily="49" charset="0"/>
-                        </a:rPr>
-                        <a:t>1</a:t>
-                      </a:r>
-                      <a:endParaRPr lang="en-US" sz="1800" b="1">
-                        <a:effectLst/>
-                        <a:latin typeface="Consolas" panose="020B0609020204030204" pitchFamily="49" charset="0"/>
-                        <a:ea typeface="宋体"/>
-                        <a:cs typeface="Consolas" panose="020B0609020204030204" pitchFamily="49" charset="0"/>
-                      </a:endParaRPr>
-                    </a:p>
-                  </a:txBody>
-                  <a:tcPr marL="68580" marR="68580" marT="0" marB="0" anchor="ctr"/>
-                </a:tc>
-                <a:tc>
-                  <a:txBody>
-                    <a:bodyPr/>
-                    <a:lstStyle/>
-                    <a:p>
-                      <a:pPr marL="0" marR="0" algn="ctr">
-                        <a:spcBef>
-                          <a:spcPts val="0"/>
-                        </a:spcBef>
-                        <a:spcAft>
-                          <a:spcPts val="0"/>
-                        </a:spcAft>
-                      </a:pPr>
-                      <a:r>
-                        <a:rPr lang="en-US" sz="1800" b="1" dirty="0">
-                          <a:effectLst/>
-                          <a:latin typeface="Consolas" panose="020B0609020204030204" pitchFamily="49" charset="0"/>
-                          <a:cs typeface="Consolas" panose="020B0609020204030204" pitchFamily="49" charset="0"/>
-                        </a:rPr>
-                        <a:t>0</a:t>
-                      </a:r>
-                      <a:endParaRPr lang="en-US" sz="1800" b="1" dirty="0">
-                        <a:effectLst/>
-                        <a:latin typeface="Consolas" panose="020B0609020204030204" pitchFamily="49" charset="0"/>
-                        <a:ea typeface="宋体"/>
-                        <a:cs typeface="Consolas" panose="020B0609020204030204" pitchFamily="49" charset="0"/>
-                      </a:endParaRPr>
-                    </a:p>
-                  </a:txBody>
-                  <a:tcPr marL="68580" marR="68580" marT="0" marB="0" anchor="ctr">
-                    <a:lnR w="19050" cap="flat" cmpd="sng" algn="ctr">
-                      <a:solidFill>
-                        <a:schemeClr val="tx1"/>
-                      </a:solidFill>
-                      <a:prstDash val="solid"/>
-                      <a:round/>
-                      <a:headEnd type="none" w="med" len="med"/>
-                      <a:tailEnd type="none" w="med" len="med"/>
-                    </a:lnR>
-                  </a:tcPr>
-                </a:tc>
-                <a:tc>
-                  <a:txBody>
-                    <a:bodyPr/>
-                    <a:lstStyle/>
-                    <a:p>
-                      <a:pPr marL="0" marR="0" algn="ctr">
-                        <a:spcBef>
-                          <a:spcPts val="0"/>
-                        </a:spcBef>
-                        <a:spcAft>
-                          <a:spcPts val="0"/>
-                        </a:spcAft>
-                      </a:pPr>
-                      <a:r>
-                        <a:rPr lang="en-US" sz="1800">
-                          <a:effectLst/>
-                        </a:rPr>
-                        <a:t>D</a:t>
-                      </a:r>
-                      <a:r>
-                        <a:rPr lang="en-US" sz="1800" baseline="-25000">
-                          <a:effectLst/>
-                        </a:rPr>
-                        <a:t>1</a:t>
-                      </a:r>
-                      <a:endParaRPr lang="en-US" sz="1800">
-                        <a:effectLst/>
-                        <a:latin typeface="Consolas" panose="020B0609020204030204" pitchFamily="49" charset="0"/>
-                        <a:ea typeface="宋体"/>
-                        <a:cs typeface="Consolas" panose="020B0609020204030204" pitchFamily="49" charset="0"/>
-                      </a:endParaRPr>
-                    </a:p>
-                  </a:txBody>
-                  <a:tcPr marL="68580" marR="68580" marT="0" marB="0" anchor="ctr">
-                    <a:lnL w="19050" cap="flat" cmpd="sng" algn="ctr">
-                      <a:solidFill>
-                        <a:schemeClr val="tx1"/>
-                      </a:solidFill>
-                      <a:prstDash val="solid"/>
-                      <a:round/>
-                      <a:headEnd type="none" w="med" len="med"/>
-                      <a:tailEnd type="none" w="med" len="med"/>
-                    </a:lnL>
-                  </a:tcPr>
-                </a:tc>
-                <a:tc>
-                  <a:txBody>
-                    <a:bodyPr/>
-                    <a:lstStyle/>
-                    <a:p>
-                      <a:pPr marL="0" marR="0" algn="ctr">
-                        <a:spcBef>
-                          <a:spcPts val="0"/>
-                        </a:spcBef>
-                        <a:spcAft>
-                          <a:spcPts val="0"/>
-                        </a:spcAft>
-                      </a:pPr>
-                      <a:r>
-                        <a:rPr lang="en-US" sz="1800" dirty="0" err="1">
-                          <a:effectLst/>
-                        </a:rPr>
-                        <a:t>D</a:t>
-                      </a:r>
-                      <a:r>
-                        <a:rPr lang="en-US" sz="1800" baseline="-25000" dirty="0" err="1">
-                          <a:effectLst/>
-                        </a:rPr>
-                        <a:t>0</a:t>
-                      </a:r>
-                      <a:endParaRPr lang="en-US" sz="1800" dirty="0">
-                        <a:effectLst/>
-                        <a:latin typeface="Consolas" panose="020B0609020204030204" pitchFamily="49" charset="0"/>
-                        <a:ea typeface="宋体"/>
-                        <a:cs typeface="Consolas" panose="020B0609020204030204" pitchFamily="49" charset="0"/>
-                      </a:endParaRPr>
-                    </a:p>
-                  </a:txBody>
-                  <a:tcPr marL="68580" marR="68580" marT="0" marB="0" anchor="ctr"/>
-                </a:tc>
-                <a:tc>
-                  <a:txBody>
-                    <a:bodyPr/>
-                    <a:lstStyle/>
-                    <a:p>
-                      <a:pPr marL="0" marR="0" algn="ctr">
-                        <a:spcBef>
-                          <a:spcPts val="0"/>
-                        </a:spcBef>
-                        <a:spcAft>
-                          <a:spcPts val="0"/>
-                        </a:spcAft>
-                      </a:pPr>
-                      <a:r>
-                        <a:rPr lang="en-US" sz="1800" dirty="0" err="1">
-                          <a:effectLst/>
-                        </a:rPr>
-                        <a:t>D</a:t>
-                      </a:r>
-                      <a:r>
-                        <a:rPr lang="en-US" sz="1800" baseline="-25000" dirty="0" err="1">
-                          <a:effectLst/>
-                        </a:rPr>
-                        <a:t>3</a:t>
-                      </a:r>
-                      <a:endParaRPr lang="en-US" sz="1800" dirty="0">
-                        <a:effectLst/>
-                        <a:latin typeface="Consolas" panose="020B0609020204030204" pitchFamily="49" charset="0"/>
-                        <a:ea typeface="宋体"/>
-                        <a:cs typeface="Consolas" panose="020B0609020204030204" pitchFamily="49" charset="0"/>
-                      </a:endParaRPr>
-                    </a:p>
-                  </a:txBody>
-                  <a:tcPr marL="68580" marR="68580" marT="0" marB="0" anchor="ctr"/>
-                </a:tc>
-                <a:tc>
-                  <a:txBody>
-                    <a:bodyPr/>
-                    <a:lstStyle/>
-                    <a:p>
-                      <a:pPr marL="0" marR="0" algn="ctr">
-                        <a:spcBef>
-                          <a:spcPts val="0"/>
-                        </a:spcBef>
-                        <a:spcAft>
-                          <a:spcPts val="0"/>
-                        </a:spcAft>
-                      </a:pPr>
-                      <a:r>
-                        <a:rPr lang="en-US" sz="1800">
-                          <a:effectLst/>
-                        </a:rPr>
-                        <a:t>D</a:t>
-                      </a:r>
-                      <a:r>
-                        <a:rPr lang="en-US" sz="1800" baseline="-25000">
-                          <a:effectLst/>
-                        </a:rPr>
-                        <a:t>2</a:t>
-                      </a:r>
-                      <a:endParaRPr lang="en-US" sz="1800">
-                        <a:effectLst/>
-                        <a:latin typeface="Consolas" panose="020B0609020204030204" pitchFamily="49" charset="0"/>
-                        <a:ea typeface="宋体"/>
-                        <a:cs typeface="Consolas" panose="020B0609020204030204" pitchFamily="49" charset="0"/>
-                      </a:endParaRPr>
-                    </a:p>
-                  </a:txBody>
-                  <a:tcPr marL="68580" marR="68580" marT="0" marB="0" anchor="ctr"/>
-                </a:tc>
-                <a:extLst>
-                  <a:ext uri="{0D108BD9-81ED-4DB2-BD59-A6C34878D82A}">
-                    <a16:rowId xmlns:a16="http://schemas.microsoft.com/office/drawing/2014/main" val="10003"/>
-                  </a:ext>
-                </a:extLst>
-              </a:tr>
-              <a:tr h="409146">
-                <a:tc>
-                  <a:txBody>
-                    <a:bodyPr/>
-                    <a:lstStyle/>
-                    <a:p>
-                      <a:pPr marL="0" marR="0" algn="ctr">
-                        <a:spcBef>
-                          <a:spcPts val="0"/>
-                        </a:spcBef>
-                        <a:spcAft>
-                          <a:spcPts val="0"/>
-                        </a:spcAft>
-                      </a:pPr>
-                      <a:r>
-                        <a:rPr lang="en-US" sz="1800" b="1" dirty="0">
-                          <a:solidFill>
-                            <a:srgbClr val="FF0000"/>
-                          </a:solidFill>
-                          <a:effectLst/>
-                          <a:latin typeface="Consolas" panose="020B0609020204030204" pitchFamily="49" charset="0"/>
-                          <a:cs typeface="Consolas" panose="020B0609020204030204" pitchFamily="49" charset="0"/>
-                        </a:rPr>
-                        <a:t>1</a:t>
-                      </a:r>
-                      <a:endParaRPr lang="en-US" sz="1800" b="1" dirty="0">
-                        <a:solidFill>
-                          <a:srgbClr val="FF0000"/>
-                        </a:solidFill>
-                        <a:effectLst/>
-                        <a:latin typeface="Consolas" panose="020B0609020204030204" pitchFamily="49" charset="0"/>
-                        <a:ea typeface="宋体"/>
-                        <a:cs typeface="Consolas" panose="020B0609020204030204" pitchFamily="49" charset="0"/>
-                      </a:endParaRPr>
-                    </a:p>
-                  </a:txBody>
-                  <a:tcPr marL="68580" marR="68580" marT="0" marB="0" anchor="ctr"/>
-                </a:tc>
-                <a:tc>
-                  <a:txBody>
-                    <a:bodyPr/>
-                    <a:lstStyle/>
-                    <a:p>
-                      <a:pPr marL="0" marR="0" algn="ctr">
-                        <a:spcBef>
-                          <a:spcPts val="0"/>
-                        </a:spcBef>
-                        <a:spcAft>
-                          <a:spcPts val="0"/>
-                        </a:spcAft>
-                      </a:pPr>
-                      <a:r>
-                        <a:rPr lang="en-US" sz="1800" b="1" dirty="0">
-                          <a:solidFill>
-                            <a:srgbClr val="FF0000"/>
-                          </a:solidFill>
-                          <a:effectLst/>
-                          <a:latin typeface="Consolas" panose="020B0609020204030204" pitchFamily="49" charset="0"/>
-                          <a:cs typeface="Consolas" panose="020B0609020204030204" pitchFamily="49" charset="0"/>
-                        </a:rPr>
-                        <a:t>1</a:t>
-                      </a:r>
-                      <a:endParaRPr lang="en-US" sz="1800" b="1" dirty="0">
-                        <a:solidFill>
-                          <a:srgbClr val="FF0000"/>
-                        </a:solidFill>
-                        <a:effectLst/>
-                        <a:latin typeface="Consolas" panose="020B0609020204030204" pitchFamily="49" charset="0"/>
-                        <a:ea typeface="宋体"/>
-                        <a:cs typeface="Consolas" panose="020B0609020204030204" pitchFamily="49" charset="0"/>
-                      </a:endParaRPr>
-                    </a:p>
-                  </a:txBody>
-                  <a:tcPr marL="68580" marR="68580" marT="0" marB="0" anchor="ctr">
-                    <a:lnR w="19050" cap="flat" cmpd="sng" algn="ctr">
-                      <a:solidFill>
-                        <a:schemeClr val="tx1"/>
-                      </a:solidFill>
-                      <a:prstDash val="solid"/>
-                      <a:round/>
-                      <a:headEnd type="none" w="med" len="med"/>
-                      <a:tailEnd type="none" w="med" len="med"/>
-                    </a:lnR>
-                  </a:tcPr>
-                </a:tc>
-                <a:tc>
-                  <a:txBody>
-                    <a:bodyPr/>
-                    <a:lstStyle/>
-                    <a:p>
-                      <a:pPr marL="0" marR="0" algn="ctr">
-                        <a:spcBef>
-                          <a:spcPts val="0"/>
-                        </a:spcBef>
-                        <a:spcAft>
-                          <a:spcPts val="0"/>
-                        </a:spcAft>
-                      </a:pPr>
-                      <a:r>
-                        <a:rPr lang="en-US" sz="1800" dirty="0" err="1">
-                          <a:solidFill>
-                            <a:srgbClr val="FF0000"/>
-                          </a:solidFill>
-                          <a:effectLst/>
-                        </a:rPr>
-                        <a:t>D</a:t>
-                      </a:r>
-                      <a:r>
-                        <a:rPr lang="en-US" sz="1800" baseline="-25000" dirty="0" err="1">
-                          <a:solidFill>
-                            <a:srgbClr val="FF0000"/>
-                          </a:solidFill>
-                          <a:effectLst/>
-                        </a:rPr>
-                        <a:t>2</a:t>
-                      </a:r>
-                      <a:endParaRPr lang="en-US" sz="1800" dirty="0">
-                        <a:solidFill>
-                          <a:srgbClr val="FF0000"/>
-                        </a:solidFill>
-                        <a:effectLst/>
-                        <a:latin typeface="Consolas" panose="020B0609020204030204" pitchFamily="49" charset="0"/>
-                        <a:ea typeface="宋体"/>
-                        <a:cs typeface="Consolas" panose="020B0609020204030204" pitchFamily="49" charset="0"/>
-                      </a:endParaRPr>
-                    </a:p>
-                  </a:txBody>
-                  <a:tcPr marL="68580" marR="68580" marT="0" marB="0" anchor="ctr">
-                    <a:lnL w="19050" cap="flat" cmpd="sng" algn="ctr">
-                      <a:solidFill>
-                        <a:schemeClr val="tx1"/>
-                      </a:solidFill>
-                      <a:prstDash val="solid"/>
-                      <a:round/>
-                      <a:headEnd type="none" w="med" len="med"/>
-                      <a:tailEnd type="none" w="med" len="med"/>
-                    </a:lnL>
-                  </a:tcPr>
-                </a:tc>
-                <a:tc>
-                  <a:txBody>
-                    <a:bodyPr/>
-                    <a:lstStyle/>
-                    <a:p>
-                      <a:pPr marL="0" marR="0" algn="ctr">
-                        <a:spcBef>
-                          <a:spcPts val="0"/>
-                        </a:spcBef>
-                        <a:spcAft>
-                          <a:spcPts val="0"/>
-                        </a:spcAft>
-                      </a:pPr>
-                      <a:r>
-                        <a:rPr lang="en-US" sz="1800" dirty="0" err="1">
-                          <a:solidFill>
-                            <a:srgbClr val="FF0000"/>
-                          </a:solidFill>
-                          <a:effectLst/>
-                        </a:rPr>
-                        <a:t>D</a:t>
-                      </a:r>
-                      <a:r>
-                        <a:rPr lang="en-US" sz="1800" baseline="-25000" dirty="0" err="1">
-                          <a:solidFill>
-                            <a:srgbClr val="FF0000"/>
-                          </a:solidFill>
-                          <a:effectLst/>
-                        </a:rPr>
-                        <a:t>1</a:t>
-                      </a:r>
-                      <a:endParaRPr lang="en-US" sz="1800" dirty="0">
-                        <a:solidFill>
-                          <a:srgbClr val="FF0000"/>
-                        </a:solidFill>
-                        <a:effectLst/>
-                        <a:latin typeface="Consolas" panose="020B0609020204030204" pitchFamily="49" charset="0"/>
-                        <a:ea typeface="宋体"/>
-                        <a:cs typeface="Consolas" panose="020B0609020204030204" pitchFamily="49" charset="0"/>
-                      </a:endParaRPr>
-                    </a:p>
-                  </a:txBody>
-                  <a:tcPr marL="68580" marR="68580" marT="0" marB="0" anchor="ctr"/>
-                </a:tc>
-                <a:tc>
-                  <a:txBody>
-                    <a:bodyPr/>
-                    <a:lstStyle/>
-                    <a:p>
-                      <a:pPr marL="0" marR="0" algn="ctr">
-                        <a:spcBef>
-                          <a:spcPts val="0"/>
-                        </a:spcBef>
-                        <a:spcAft>
-                          <a:spcPts val="0"/>
-                        </a:spcAft>
-                      </a:pPr>
-                      <a:r>
-                        <a:rPr lang="en-US" sz="1800" dirty="0" err="1">
-                          <a:solidFill>
-                            <a:srgbClr val="FF0000"/>
-                          </a:solidFill>
-                          <a:effectLst/>
-                        </a:rPr>
-                        <a:t>D</a:t>
-                      </a:r>
-                      <a:r>
-                        <a:rPr lang="en-US" sz="1800" baseline="-25000" dirty="0" err="1">
-                          <a:solidFill>
-                            <a:srgbClr val="FF0000"/>
-                          </a:solidFill>
-                          <a:effectLst/>
-                        </a:rPr>
-                        <a:t>0</a:t>
-                      </a:r>
-                      <a:endParaRPr lang="en-US" sz="1800" dirty="0">
-                        <a:solidFill>
-                          <a:srgbClr val="FF0000"/>
-                        </a:solidFill>
-                        <a:effectLst/>
-                        <a:latin typeface="Consolas" panose="020B0609020204030204" pitchFamily="49" charset="0"/>
-                        <a:ea typeface="宋体"/>
-                        <a:cs typeface="Consolas" panose="020B0609020204030204" pitchFamily="49" charset="0"/>
-                      </a:endParaRPr>
-                    </a:p>
-                  </a:txBody>
-                  <a:tcPr marL="68580" marR="68580" marT="0" marB="0" anchor="ctr"/>
-                </a:tc>
-                <a:tc>
-                  <a:txBody>
-                    <a:bodyPr/>
-                    <a:lstStyle/>
-                    <a:p>
-                      <a:pPr marL="0" marR="0" algn="ctr">
-                        <a:spcBef>
-                          <a:spcPts val="0"/>
-                        </a:spcBef>
-                        <a:spcAft>
-                          <a:spcPts val="0"/>
-                        </a:spcAft>
-                      </a:pPr>
-                      <a:r>
-                        <a:rPr lang="en-US" sz="1800" dirty="0" err="1">
-                          <a:solidFill>
-                            <a:srgbClr val="FF0000"/>
-                          </a:solidFill>
-                          <a:effectLst/>
-                        </a:rPr>
-                        <a:t>D</a:t>
-                      </a:r>
-                      <a:r>
-                        <a:rPr lang="en-US" sz="1800" baseline="-25000" dirty="0" err="1">
-                          <a:solidFill>
-                            <a:srgbClr val="FF0000"/>
-                          </a:solidFill>
-                          <a:effectLst/>
-                        </a:rPr>
-                        <a:t>3</a:t>
-                      </a:r>
-                      <a:endParaRPr lang="en-US" sz="1800" dirty="0">
-                        <a:solidFill>
-                          <a:srgbClr val="FF0000"/>
-                        </a:solidFill>
-                        <a:effectLst/>
-                        <a:latin typeface="Consolas" panose="020B0609020204030204" pitchFamily="49" charset="0"/>
-                        <a:ea typeface="宋体"/>
-                        <a:cs typeface="Consolas" panose="020B0609020204030204" pitchFamily="49" charset="0"/>
-                      </a:endParaRPr>
-                    </a:p>
-                  </a:txBody>
-                  <a:tcPr marL="68580" marR="68580" marT="0" marB="0" anchor="ctr"/>
-                </a:tc>
-                <a:extLst>
-                  <a:ext uri="{0D108BD9-81ED-4DB2-BD59-A6C34878D82A}">
-                    <a16:rowId xmlns:a16="http://schemas.microsoft.com/office/drawing/2014/main" val="10004"/>
-                  </a:ext>
-                </a:extLst>
-              </a:tr>
-            </a:tbl>
-          </a:graphicData>
-        </a:graphic>
-      </p:graphicFrame>
-      <p:sp>
-        <p:nvSpPr>
-          <p:cNvPr id="8" name="Rectangle 7"/>
-          <p:cNvSpPr/>
-          <p:nvPr/>
-        </p:nvSpPr>
-        <p:spPr>
-          <a:xfrm>
-            <a:off x="457200" y="1371600"/>
-            <a:ext cx="8153400" cy="369332"/>
-          </a:xfrm>
-          <a:prstGeom prst="rect">
-            <a:avLst/>
-          </a:prstGeom>
-        </p:spPr>
-        <p:txBody>
-          <a:bodyPr wrap="square">
-            <a:spAutoFit/>
-          </a:bodyPr>
-          <a:lstStyle/>
-          <a:p>
-            <a:r>
-              <a:rPr lang="en-US" dirty="0">
-                <a:solidFill>
-                  <a:srgbClr val="C00000"/>
-                </a:solidFill>
-              </a:rPr>
-              <a:t>Example:  </a:t>
-            </a:r>
-            <a:r>
-              <a:rPr lang="en-US" dirty="0" err="1">
-                <a:solidFill>
-                  <a:srgbClr val="C00000"/>
-                </a:solidFill>
-                <a:latin typeface="Consolas" panose="020B0609020204030204" pitchFamily="49" charset="0"/>
-                <a:cs typeface="Consolas" panose="020B0609020204030204" pitchFamily="49" charset="0"/>
-              </a:rPr>
-              <a:t>S</a:t>
-            </a:r>
-            <a:r>
-              <a:rPr lang="en-US" baseline="-25000" dirty="0" err="1">
-                <a:solidFill>
-                  <a:srgbClr val="C00000"/>
-                </a:solidFill>
-                <a:latin typeface="Consolas" panose="020B0609020204030204" pitchFamily="49" charset="0"/>
-                <a:cs typeface="Consolas" panose="020B0609020204030204" pitchFamily="49" charset="0"/>
-              </a:rPr>
-              <a:t>1</a:t>
-            </a:r>
-            <a:r>
-              <a:rPr lang="en-US" dirty="0" err="1">
-                <a:solidFill>
-                  <a:srgbClr val="C00000"/>
-                </a:solidFill>
-                <a:latin typeface="Consolas" panose="020B0609020204030204" pitchFamily="49" charset="0"/>
-                <a:cs typeface="Consolas" panose="020B0609020204030204" pitchFamily="49" charset="0"/>
-              </a:rPr>
-              <a:t>S</a:t>
-            </a:r>
-            <a:r>
-              <a:rPr lang="en-US" baseline="-25000" dirty="0" err="1">
-                <a:solidFill>
-                  <a:srgbClr val="C00000"/>
-                </a:solidFill>
-                <a:latin typeface="Consolas" panose="020B0609020204030204" pitchFamily="49" charset="0"/>
-                <a:cs typeface="Consolas" panose="020B0609020204030204" pitchFamily="49" charset="0"/>
-              </a:rPr>
-              <a:t>0</a:t>
-            </a:r>
-            <a:r>
-              <a:rPr lang="en-US" dirty="0">
-                <a:solidFill>
-                  <a:srgbClr val="C00000"/>
-                </a:solidFill>
-                <a:latin typeface="Consolas" panose="020B0609020204030204" pitchFamily="49" charset="0"/>
-                <a:cs typeface="Consolas" panose="020B0609020204030204" pitchFamily="49" charset="0"/>
-              </a:rPr>
-              <a:t> = 11</a:t>
-            </a:r>
-          </a:p>
-        </p:txBody>
-      </p:sp>
-      <p:pic>
-        <p:nvPicPr>
-          <p:cNvPr id="7" name="Picture 6"/>
-          <p:cNvPicPr>
-            <a:picLocks noChangeAspect="1"/>
-          </p:cNvPicPr>
-          <p:nvPr/>
-        </p:nvPicPr>
-        <p:blipFill>
-          <a:blip r:embed="rId2" cstate="print">
-            <a:extLst>
-              <a:ext uri="{28A0092B-C50C-407E-A947-70E740481C1C}">
-                <a14:useLocalDpi xmlns:a14="http://schemas.microsoft.com/office/drawing/2010/main" val="0"/>
-              </a:ext>
-            </a:extLst>
-          </a:blip>
-          <a:stretch>
-            <a:fillRect/>
-          </a:stretch>
-        </p:blipFill>
-        <p:spPr>
-          <a:xfrm>
-            <a:off x="256021" y="2179314"/>
-            <a:ext cx="5611379" cy="2773686"/>
-          </a:xfrm>
-          <a:prstGeom prst="rect">
-            <a:avLst/>
-          </a:prstGeom>
-        </p:spPr>
-      </p:pic>
-    </p:spTree>
-    <p:extLst>
-      <p:ext uri="{BB962C8B-B14F-4D97-AF65-F5344CB8AC3E}">
-        <p14:creationId xmlns:p14="http://schemas.microsoft.com/office/powerpoint/2010/main" val="2177597633"/>
-      </p:ext>
-    </p:extLst>
-  </p:cSld>
-  <p:clrMapOvr>
-    <a:masterClrMapping/>
-  </p:clrMapOvr>
-</p:sld>
-</file>
-
-<file path=ppt/slides/slide9.xml><?xml version="1.0" encoding="utf-8"?>
-<p:sld xmlns:a="http://schemas.openxmlformats.org/drawingml/2006/main" xmlns:r="http://schemas.openxmlformats.org/officeDocument/2006/relationships" xmlns:p="http://schemas.openxmlformats.org/presentationml/2006/main">
-  <p:cSld>
-    <p:spTree>
-      <p:nvGrpSpPr>
-        <p:cNvPr id="1" name=""/>
-        <p:cNvGrpSpPr/>
-        <p:nvPr/>
-      </p:nvGrpSpPr>
-      <p:grpSpPr>
-        <a:xfrm>
-          <a:off x="0" y="0"/>
-          <a:ext cx="0" cy="0"/>
-          <a:chOff x="0" y="0"/>
-          <a:chExt cx="0" cy="0"/>
-        </a:xfrm>
-      </p:grpSpPr>
-      <p:sp>
-        <p:nvSpPr>
-          <p:cNvPr id="2" name="Title 1"/>
-          <p:cNvSpPr>
-            <a:spLocks noGrp="1"/>
-          </p:cNvSpPr>
-          <p:nvPr>
-            <p:ph type="title"/>
-          </p:nvPr>
-        </p:nvSpPr>
-        <p:spPr/>
-        <p:txBody>
-          <a:bodyPr/>
-          <a:lstStyle/>
-          <a:p>
-            <a:r>
-              <a:rPr lang="en-US" b="1" dirty="0">
-                <a:latin typeface="Consolas" panose="020B0609020204030204" pitchFamily="49" charset="0"/>
-              </a:rPr>
-              <a:t>ADR</a:t>
-            </a:r>
-            <a:r>
-              <a:rPr lang="en-US" dirty="0"/>
-              <a:t> Pseudo-instruction</a:t>
-            </a:r>
-          </a:p>
-        </p:txBody>
-      </p:sp>
-      <p:sp>
-        <p:nvSpPr>
-          <p:cNvPr id="3" name="Slide Number Placeholder 2"/>
-          <p:cNvSpPr>
-            <a:spLocks noGrp="1"/>
-          </p:cNvSpPr>
-          <p:nvPr>
-            <p:ph type="sldNum" sz="quarter" idx="12"/>
-          </p:nvPr>
-        </p:nvSpPr>
-        <p:spPr/>
-        <p:txBody>
-          <a:bodyPr/>
-          <a:lstStyle/>
-          <a:p>
-            <a:fld id="{EA7C8D44-3667-46F6-9772-CC52308E2A7F}" type="slidenum">
-              <a:rPr kumimoji="0" lang="en-US" smtClean="0"/>
-              <a:pPr/>
-              <a:t>9</a:t>
-            </a:fld>
-            <a:endParaRPr kumimoji="0" lang="en-US" dirty="0"/>
-          </a:p>
-        </p:txBody>
-      </p:sp>
-      <p:sp>
-        <p:nvSpPr>
-          <p:cNvPr id="4" name="Content Placeholder 3"/>
-          <p:cNvSpPr>
-            <a:spLocks noGrp="1"/>
-          </p:cNvSpPr>
-          <p:nvPr>
-            <p:ph sz="quarter" idx="1"/>
-          </p:nvPr>
-        </p:nvSpPr>
-        <p:spPr/>
-        <p:txBody>
-          <a:bodyPr/>
-          <a:lstStyle/>
-          <a:p>
-            <a:r>
-              <a:rPr lang="en-US" b="1" dirty="0">
-                <a:latin typeface="Consolas" panose="020B0609020204030204" pitchFamily="49" charset="0"/>
-              </a:rPr>
-              <a:t>ADR</a:t>
-            </a:r>
-            <a:r>
-              <a:rPr lang="en-US" dirty="0"/>
-              <a:t>: loads a program-relative or register-relative address into a register</a:t>
-            </a:r>
-          </a:p>
-        </p:txBody>
-      </p:sp>
-      <p:sp>
-        <p:nvSpPr>
-          <p:cNvPr id="5" name="Rectangle 4"/>
-          <p:cNvSpPr/>
-          <p:nvPr/>
-        </p:nvSpPr>
-        <p:spPr>
-          <a:xfrm>
-            <a:off x="1524000" y="3124200"/>
-            <a:ext cx="5715000" cy="738664"/>
-          </a:xfrm>
-          <a:prstGeom prst="rect">
-            <a:avLst/>
-          </a:prstGeom>
-        </p:spPr>
-        <p:style>
-          <a:lnRef idx="2">
-            <a:schemeClr val="accent1"/>
-          </a:lnRef>
-          <a:fillRef idx="1">
-            <a:schemeClr val="lt1"/>
-          </a:fillRef>
-          <a:effectRef idx="0">
-            <a:schemeClr val="accent1"/>
-          </a:effectRef>
-          <a:fontRef idx="minor">
-            <a:schemeClr val="dk1"/>
-          </a:fontRef>
-        </p:style>
-        <p:txBody>
-          <a:bodyPr wrap="square">
-            <a:spAutoFit/>
-          </a:bodyPr>
-          <a:lstStyle/>
-          <a:p>
-            <a:r>
-              <a:rPr lang="en-US" dirty="0">
-                <a:latin typeface="Consolas" panose="020B0609020204030204" pitchFamily="49" charset="0"/>
-              </a:rPr>
-              <a:t>start  MOV r0,#10      </a:t>
-            </a:r>
-            <a:r>
-              <a:rPr lang="en-US" dirty="0">
-                <a:solidFill>
-                  <a:schemeClr val="bg1">
-                    <a:lumMod val="50000"/>
-                  </a:schemeClr>
-                </a:solidFill>
-                <a:latin typeface="Consolas" panose="020B0609020204030204" pitchFamily="49" charset="0"/>
-              </a:rPr>
-              <a:t>; 32-bit instruction</a:t>
-            </a:r>
-          </a:p>
-          <a:p>
-            <a:r>
-              <a:rPr lang="en-US" dirty="0">
-                <a:latin typeface="Consolas" panose="020B0609020204030204" pitchFamily="49" charset="0"/>
-              </a:rPr>
-              <a:t>       ADR r4,start    </a:t>
-            </a:r>
-            <a:r>
-              <a:rPr lang="en-US" dirty="0">
-                <a:solidFill>
-                  <a:schemeClr val="bg1">
-                    <a:lumMod val="50000"/>
-                  </a:schemeClr>
-                </a:solidFill>
-                <a:latin typeface="Consolas" panose="020B0609020204030204" pitchFamily="49" charset="0"/>
-              </a:rPr>
-              <a:t>; 32-bit instruction</a:t>
-            </a:r>
-          </a:p>
-          <a:p>
-            <a:r>
-              <a:rPr lang="en-US" dirty="0">
-                <a:latin typeface="Consolas" panose="020B0609020204030204" pitchFamily="49" charset="0"/>
-              </a:rPr>
-              <a:t>                       </a:t>
-            </a:r>
-            <a:r>
-              <a:rPr lang="en-US" dirty="0">
-                <a:solidFill>
-                  <a:schemeClr val="bg1">
-                    <a:lumMod val="50000"/>
-                  </a:schemeClr>
-                </a:solidFill>
-                <a:latin typeface="Consolas" panose="020B0609020204030204" pitchFamily="49" charset="0"/>
-              </a:rPr>
-              <a:t>; =&gt; </a:t>
-            </a:r>
-            <a:r>
-              <a:rPr lang="en-US" dirty="0">
-                <a:solidFill>
-                  <a:srgbClr val="0041FF"/>
-                </a:solidFill>
-                <a:latin typeface="Consolas" panose="020B0609020204030204" pitchFamily="49" charset="0"/>
-              </a:rPr>
-              <a:t>SUB r4,pc,#0xc</a:t>
-            </a:r>
-          </a:p>
-        </p:txBody>
-      </p:sp>
-    </p:spTree>
-    <p:extLst>
-      <p:ext uri="{BB962C8B-B14F-4D97-AF65-F5344CB8AC3E}">
-        <p14:creationId xmlns:p14="http://schemas.microsoft.com/office/powerpoint/2010/main" val="3686948551"/>
       </p:ext>
     </p:extLst>
   </p:cSld>

--- a/PPTs/ZDELETED.pptx
+++ b/PPTs/ZDELETED.pptx
@@ -5,25 +5,26 @@
     <p:sldMasterId id="2147483660" r:id="rId1"/>
   </p:sldMasterIdLst>
   <p:notesMasterIdLst>
-    <p:notesMasterId r:id="rId18"/>
+    <p:notesMasterId r:id="rId19"/>
   </p:notesMasterIdLst>
   <p:sldIdLst>
     <p:sldId id="256" r:id="rId2"/>
-    <p:sldId id="335" r:id="rId3"/>
-    <p:sldId id="813" r:id="rId4"/>
-    <p:sldId id="475" r:id="rId5"/>
-    <p:sldId id="473" r:id="rId6"/>
-    <p:sldId id="306" r:id="rId7"/>
-    <p:sldId id="322" r:id="rId8"/>
-    <p:sldId id="323" r:id="rId9"/>
-    <p:sldId id="325" r:id="rId10"/>
-    <p:sldId id="324" r:id="rId11"/>
-    <p:sldId id="525" r:id="rId12"/>
-    <p:sldId id="261" r:id="rId13"/>
-    <p:sldId id="264" r:id="rId14"/>
-    <p:sldId id="262" r:id="rId15"/>
-    <p:sldId id="265" r:id="rId16"/>
-    <p:sldId id="379" r:id="rId17"/>
+    <p:sldId id="381" r:id="rId3"/>
+    <p:sldId id="335" r:id="rId4"/>
+    <p:sldId id="813" r:id="rId5"/>
+    <p:sldId id="475" r:id="rId6"/>
+    <p:sldId id="473" r:id="rId7"/>
+    <p:sldId id="306" r:id="rId8"/>
+    <p:sldId id="322" r:id="rId9"/>
+    <p:sldId id="323" r:id="rId10"/>
+    <p:sldId id="325" r:id="rId11"/>
+    <p:sldId id="324" r:id="rId12"/>
+    <p:sldId id="525" r:id="rId13"/>
+    <p:sldId id="261" r:id="rId14"/>
+    <p:sldId id="264" r:id="rId15"/>
+    <p:sldId id="262" r:id="rId16"/>
+    <p:sldId id="265" r:id="rId17"/>
+    <p:sldId id="379" r:id="rId18"/>
   </p:sldIdLst>
   <p:sldSz cx="9144000" cy="6858000" type="screen4x3"/>
   <p:notesSz cx="6858000" cy="9144000"/>
@@ -144,7 +145,7 @@
 <file path=ppt/revisionInfo.xml><?xml version="1.0" encoding="utf-8"?>
 <p1510:revInfo xmlns:a="http://schemas.openxmlformats.org/drawingml/2006/main" xmlns:r="http://schemas.openxmlformats.org/officeDocument/2006/relationships" xmlns:p1510="http://schemas.microsoft.com/office/powerpoint/2015/10/main">
   <p1510:revLst>
-    <p1510:client id="{74B15ED0-6DB4-4108-82C9-64F0E8E52BFB}" v="8" dt="2025-09-26T22:04:43.310"/>
+    <p1510:client id="{74B15ED0-6DB4-4108-82C9-64F0E8E52BFB}" v="9" dt="2025-10-02T21:43:06.408"/>
   </p1510:revLst>
 </p1510:revInfo>
 </file>
@@ -154,7 +155,7 @@
   <pc:docChgLst>
     <pc:chgData name="Zonghua Gu" userId="9a7e1853e1951ef5" providerId="LiveId" clId="{CF1FAA12-072C-4ED5-BA76-0FFFAEFDB88A}"/>
     <pc:docChg chg="custSel addSld delSld modSld">
-      <pc:chgData name="Zonghua Gu" userId="9a7e1853e1951ef5" providerId="LiveId" clId="{CF1FAA12-072C-4ED5-BA76-0FFFAEFDB88A}" dt="2025-09-26T22:04:43.298" v="20"/>
+      <pc:chgData name="Zonghua Gu" userId="9a7e1853e1951ef5" providerId="LiveId" clId="{CF1FAA12-072C-4ED5-BA76-0FFFAEFDB88A}" dt="2025-10-02T21:43:06.404" v="21"/>
       <pc:docMkLst>
         <pc:docMk/>
       </pc:docMkLst>
@@ -462,8 +463,8 @@
           <pc:sldMk cId="3816386607" sldId="335"/>
         </pc:sldMkLst>
       </pc:sldChg>
-      <pc:sldChg chg="add">
-        <pc:chgData name="Zonghua Gu" userId="9a7e1853e1951ef5" providerId="LiveId" clId="{CF1FAA12-072C-4ED5-BA76-0FFFAEFDB88A}" dt="2025-09-26T22:04:43.298" v="20"/>
+      <pc:sldChg chg="add modNotes">
+        <pc:chgData name="Zonghua Gu" userId="9a7e1853e1951ef5" providerId="LiveId" clId="{CF1FAA12-072C-4ED5-BA76-0FFFAEFDB88A}" dt="2025-10-02T21:43:06.404" v="21"/>
         <pc:sldMkLst>
           <pc:docMk/>
           <pc:sldMk cId="4015228595" sldId="335"/>
@@ -537,6 +538,13 @@
         <pc:sldMkLst>
           <pc:docMk/>
           <pc:sldMk cId="397854206" sldId="379"/>
+        </pc:sldMkLst>
+      </pc:sldChg>
+      <pc:sldChg chg="add">
+        <pc:chgData name="Zonghua Gu" userId="9a7e1853e1951ef5" providerId="LiveId" clId="{CF1FAA12-072C-4ED5-BA76-0FFFAEFDB88A}" dt="2025-10-02T21:43:06.404" v="21"/>
+        <pc:sldMkLst>
+          <pc:docMk/>
+          <pc:sldMk cId="2452138352" sldId="381"/>
         </pc:sldMkLst>
       </pc:sldChg>
       <pc:sldChg chg="add del">
@@ -655,7 +663,7 @@
             <a:fld id="{3AC3A17A-95E8-4381-B66B-5D6DE2B3048A}" type="datetimeFigureOut">
               <a:rPr lang="en-US" smtClean="0"/>
               <a:pPr/>
-              <a:t>9/26/2025</a:t>
+              <a:t>10/2/2025</a:t>
             </a:fld>
             <a:endParaRPr lang="en-US"/>
           </a:p>
@@ -942,6 +950,205 @@
       </p:grpSpPr>
       <p:sp>
         <p:nvSpPr>
+          <p:cNvPr id="2" name="Slide Image Placeholder 1"/>
+          <p:cNvSpPr>
+            <a:spLocks noGrp="1" noRot="1" noChangeAspect="1"/>
+          </p:cNvSpPr>
+          <p:nvPr>
+            <p:ph type="sldImg"/>
+          </p:nvPr>
+        </p:nvSpPr>
+        <p:spPr/>
+      </p:sp>
+      <p:sp>
+        <p:nvSpPr>
+          <p:cNvPr id="3" name="Notes Placeholder 2"/>
+          <p:cNvSpPr>
+            <a:spLocks noGrp="1"/>
+          </p:cNvSpPr>
+          <p:nvPr>
+            <p:ph type="body" idx="1"/>
+          </p:nvPr>
+        </p:nvSpPr>
+        <p:spPr/>
+        <p:txBody>
+          <a:bodyPr/>
+          <a:lstStyle/>
+          <a:p>
+            <a:r>
+              <a:rPr lang="en-US" dirty="0"/>
+              <a:t>https://eclecticlight.co/2021/06/23/code-in-arm-assembly-controlling-flow/</a:t>
+            </a:r>
+          </a:p>
+          <a:p>
+            <a:r>
+              <a:rPr lang="en-US" sz="1200" b="0" i="0" kern="1200" dirty="0">
+                <a:solidFill>
+                  <a:schemeClr val="tx1"/>
+                </a:solidFill>
+                <a:effectLst/>
+                <a:latin typeface="+mn-lt"/>
+                <a:ea typeface="+mn-ea"/>
+                <a:cs typeface="+mn-cs"/>
+              </a:rPr>
+              <a:t>N (Negative): Copies the most significant bit of the last result; 1 means the result’s sign bit is 1, which for two’s‑complement indicates a negative value in signed interpretation.</a:t>
+            </a:r>
+          </a:p>
+          <a:p>
+            <a:r>
+              <a:rPr lang="en-US" sz="1200" b="0" i="0" kern="1200" dirty="0">
+                <a:solidFill>
+                  <a:schemeClr val="tx1"/>
+                </a:solidFill>
+                <a:effectLst/>
+                <a:latin typeface="+mn-lt"/>
+                <a:ea typeface="+mn-ea"/>
+                <a:cs typeface="+mn-cs"/>
+              </a:rPr>
+              <a:t>Z (Zero): 1 if the result was exactly zero; otherwise 0.</a:t>
+            </a:r>
+          </a:p>
+          <a:p>
+            <a:r>
+              <a:rPr lang="en-US" sz="1200" b="0" i="0" kern="1200" dirty="0">
+                <a:solidFill>
+                  <a:schemeClr val="tx1"/>
+                </a:solidFill>
+                <a:effectLst/>
+                <a:latin typeface="+mn-lt"/>
+                <a:ea typeface="+mn-ea"/>
+                <a:cs typeface="+mn-cs"/>
+              </a:rPr>
+              <a:t>C (Carry): For addition, 1 means an unsigned carry out; for subtraction (a − b or CMP), 1 means “no borrow,” and 0 means a borrow occurred. For shifts/rotates, it holds the last bit shifted out.</a:t>
+            </a:r>
+          </a:p>
+          <a:p>
+            <a:r>
+              <a:rPr lang="en-US" sz="1200" b="0" i="0" kern="1200" dirty="0">
+                <a:solidFill>
+                  <a:schemeClr val="tx1"/>
+                </a:solidFill>
+                <a:effectLst/>
+                <a:latin typeface="+mn-lt"/>
+                <a:ea typeface="+mn-ea"/>
+                <a:cs typeface="+mn-cs"/>
+              </a:rPr>
+              <a:t>V (</a:t>
+            </a:r>
+            <a:r>
+              <a:rPr lang="en-US" sz="1200" b="0" i="0" kern="1200" dirty="0" err="1">
+                <a:solidFill>
+                  <a:schemeClr val="tx1"/>
+                </a:solidFill>
+                <a:effectLst/>
+                <a:latin typeface="+mn-lt"/>
+                <a:ea typeface="+mn-ea"/>
+                <a:cs typeface="+mn-cs"/>
+              </a:rPr>
+              <a:t>oVerflow</a:t>
+            </a:r>
+            <a:r>
+              <a:rPr lang="en-US" sz="1200" b="0" i="0" kern="1200" dirty="0">
+                <a:solidFill>
+                  <a:schemeClr val="tx1"/>
+                </a:solidFill>
+                <a:effectLst/>
+                <a:latin typeface="+mn-lt"/>
+                <a:ea typeface="+mn-ea"/>
+                <a:cs typeface="+mn-cs"/>
+              </a:rPr>
+              <a:t>): 1 when signed overflow occurred, i.e., the true signed result didn’t fit in the destination width (e.g., positive + positive → negative, or negative + negative → positive in 32‑bit two’s‑complement).</a:t>
+            </a:r>
+          </a:p>
+          <a:p>
+            <a:r>
+              <a:rPr lang="en-US" sz="1200" b="0" i="0" kern="1200" dirty="0">
+                <a:solidFill>
+                  <a:schemeClr val="tx1"/>
+                </a:solidFill>
+                <a:effectLst/>
+                <a:latin typeface="+mn-lt"/>
+                <a:ea typeface="+mn-ea"/>
+                <a:cs typeface="+mn-cs"/>
+              </a:rPr>
+              <a:t>Why C=1 and Z=0 corresponds to “unsigned higher” (HI):</a:t>
+            </a:r>
+          </a:p>
+          <a:p>
+            <a:r>
+              <a:rPr lang="en-US" sz="1200" b="0" i="0" kern="1200" dirty="0">
+                <a:solidFill>
+                  <a:schemeClr val="tx1"/>
+                </a:solidFill>
+                <a:effectLst/>
+                <a:latin typeface="+mn-lt"/>
+                <a:ea typeface="+mn-ea"/>
+                <a:cs typeface="+mn-cs"/>
+              </a:rPr>
+              <a:t>After a CMP a, b (which computes a − b for flags), C=1 means the subtraction needed no borrow, so a ≥ b in unsigned arithmetic; Z=0 rules out equality, leaving a &gt; b. That composite condition is named HI.</a:t>
+            </a:r>
+          </a:p>
+          <a:p>
+            <a:endParaRPr lang="en-US" dirty="0"/>
+          </a:p>
+        </p:txBody>
+      </p:sp>
+      <p:sp>
+        <p:nvSpPr>
+          <p:cNvPr id="4" name="Slide Number Placeholder 3"/>
+          <p:cNvSpPr>
+            <a:spLocks noGrp="1"/>
+          </p:cNvSpPr>
+          <p:nvPr>
+            <p:ph type="sldNum" sz="quarter" idx="5"/>
+          </p:nvPr>
+        </p:nvSpPr>
+        <p:spPr/>
+        <p:txBody>
+          <a:bodyPr/>
+          <a:lstStyle/>
+          <a:p>
+            <a:fld id="{2D71AD5F-E36F-46B9-A99B-7B025244359D}" type="slidenum">
+              <a:rPr lang="en-US" smtClean="0"/>
+              <a:pPr/>
+              <a:t>2</a:t>
+            </a:fld>
+            <a:endParaRPr lang="en-US"/>
+          </a:p>
+        </p:txBody>
+      </p:sp>
+    </p:spTree>
+    <p:extLst>
+      <p:ext uri="{BB962C8B-B14F-4D97-AF65-F5344CB8AC3E}">
+        <p14:creationId xmlns:p14="http://schemas.microsoft.com/office/powerpoint/2010/main" val="1076646287"/>
+      </p:ext>
+    </p:extLst>
+  </p:cSld>
+  <p:clrMapOvr>
+    <a:masterClrMapping/>
+  </p:clrMapOvr>
+</p:notes>
+</file>
+
+<file path=ppt/notesSlides/notesSlide2.xml><?xml version="1.0" encoding="utf-8"?>
+<p:notes xmlns:a="http://schemas.openxmlformats.org/drawingml/2006/main" xmlns:r="http://schemas.openxmlformats.org/officeDocument/2006/relationships" xmlns:p="http://schemas.openxmlformats.org/presentationml/2006/main">
+  <p:cSld>
+    <p:spTree>
+      <p:nvGrpSpPr>
+        <p:cNvPr id="1" name=""/>
+        <p:cNvGrpSpPr/>
+        <p:nvPr/>
+      </p:nvGrpSpPr>
+      <p:grpSpPr>
+        <a:xfrm>
+          <a:off x="0" y="0"/>
+          <a:ext cx="0" cy="0"/>
+          <a:chOff x="0" y="0"/>
+          <a:chExt cx="0" cy="0"/>
+        </a:xfrm>
+      </p:grpSpPr>
+      <p:sp>
+        <p:nvSpPr>
           <p:cNvPr id="47106" name="Rectangle 2"/>
           <p:cNvSpPr>
             <a:spLocks noGrp="1" noChangeArrowheads="1"/>
@@ -984,8 +1191,8 @@
         </p:nvSpPr>
         <p:spPr>
           <a:xfrm>
-            <a:off x="546100" y="863600"/>
-            <a:ext cx="5870575" cy="3303588"/>
+            <a:off x="1279525" y="863600"/>
+            <a:ext cx="4403725" cy="3303588"/>
           </a:xfrm>
           <a:ln/>
         </p:spPr>
@@ -1146,7 +1353,7 @@
             <a:fld id="{966FEA0E-C2DF-4252-97AD-54F2B7E07EAC}" type="datetime1">
               <a:rPr lang="en-US" smtClean="0"/>
               <a:pPr eaLnBrk="1" latinLnBrk="0" hangingPunct="1"/>
-              <a:t>9/26/2025</a:t>
+              <a:t>10/2/2025</a:t>
             </a:fld>
             <a:endParaRPr lang="en-US" sz="1600" dirty="0"/>
           </a:p>
@@ -1507,7 +1714,7 @@
             <a:fld id="{69EF9524-0CAA-4F98-BAC2-CE6B712F5E94}" type="datetime1">
               <a:rPr lang="en-US" smtClean="0"/>
               <a:pPr eaLnBrk="1" latinLnBrk="0" hangingPunct="1"/>
-              <a:t>9/26/2025</a:t>
+              <a:t>10/2/2025</a:t>
             </a:fld>
             <a:endParaRPr lang="en-US"/>
           </a:p>
@@ -1684,7 +1891,7 @@
             <a:fld id="{CB20516D-6F89-4C89-8307-32A716E22875}" type="datetime1">
               <a:rPr lang="en-US" smtClean="0"/>
               <a:pPr eaLnBrk="1" latinLnBrk="0" hangingPunct="1"/>
-              <a:t>9/26/2025</a:t>
+              <a:t>10/2/2025</a:t>
             </a:fld>
             <a:endParaRPr lang="en-US"/>
           </a:p>
@@ -1921,7 +2128,7 @@
             <a:fld id="{0CD88620-7329-4FC3-B65D-4EA691138F1B}" type="datetime1">
               <a:rPr lang="en-US" smtClean="0"/>
               <a:pPr eaLnBrk="1" latinLnBrk="0" hangingPunct="1"/>
-              <a:t>9/26/2025</a:t>
+              <a:t>10/2/2025</a:t>
             </a:fld>
             <a:endParaRPr lang="en-US" dirty="0"/>
           </a:p>
@@ -2192,7 +2399,7 @@
             <a:fld id="{0E46F3A1-5653-427D-9F78-56077401431A}" type="datetime1">
               <a:rPr lang="en-US" smtClean="0"/>
               <a:pPr eaLnBrk="1" latinLnBrk="0" hangingPunct="1"/>
-              <a:t>9/26/2025</a:t>
+              <a:t>10/2/2025</a:t>
             </a:fld>
             <a:endParaRPr lang="en-US" dirty="0"/>
           </a:p>
@@ -2414,7 +2621,7 @@
             <a:fld id="{CB67FC03-415A-45F0-B002-DF181377F7DC}" type="datetime1">
               <a:rPr lang="en-US" smtClean="0"/>
               <a:pPr eaLnBrk="1" latinLnBrk="0" hangingPunct="1"/>
-              <a:t>9/26/2025</a:t>
+              <a:t>10/2/2025</a:t>
             </a:fld>
             <a:endParaRPr lang="en-US"/>
           </a:p>
@@ -2768,7 +2975,7 @@
             <a:fld id="{1B6FC726-A0B4-4FC7-90F5-F17415A5C1A3}" type="datetime1">
               <a:rPr lang="en-US" smtClean="0"/>
               <a:pPr eaLnBrk="1" latinLnBrk="0" hangingPunct="1"/>
-              <a:t>9/26/2025</a:t>
+              <a:t>10/2/2025</a:t>
             </a:fld>
             <a:endParaRPr lang="en-US"/>
           </a:p>
@@ -3002,7 +3209,7 @@
             <a:fld id="{BE217211-C3F9-4892-9CC3-C7105638567D}" type="datetime1">
               <a:rPr lang="en-US" smtClean="0"/>
               <a:pPr eaLnBrk="1" latinLnBrk="0" hangingPunct="1"/>
-              <a:t>9/26/2025</a:t>
+              <a:t>10/2/2025</a:t>
             </a:fld>
             <a:endParaRPr lang="en-US"/>
           </a:p>
@@ -3145,7 +3352,7 @@
             <a:fld id="{BA713E6A-6B26-4373-A75B-EF395DC64F9E}" type="datetime1">
               <a:rPr lang="en-US" smtClean="0"/>
               <a:pPr eaLnBrk="1" latinLnBrk="0" hangingPunct="1"/>
-              <a:t>9/26/2025</a:t>
+              <a:t>10/2/2025</a:t>
             </a:fld>
             <a:endParaRPr lang="en-US"/>
           </a:p>
@@ -3424,7 +3631,7 @@
             <a:fld id="{57EB41EF-4260-415A-8DD6-FEDCC46E7EFC}" type="datetime1">
               <a:rPr lang="en-US" smtClean="0"/>
               <a:pPr eaLnBrk="1" latinLnBrk="0" hangingPunct="1"/>
-              <a:t>9/26/2025</a:t>
+              <a:t>10/2/2025</a:t>
             </a:fld>
             <a:endParaRPr lang="en-US"/>
           </a:p>
@@ -3833,7 +4040,7 @@
             <a:fld id="{6BDA80A0-06CC-4492-94A0-E8516751045E}" type="datetime1">
               <a:rPr lang="en-US" smtClean="0"/>
               <a:pPr eaLnBrk="1" latinLnBrk="0" hangingPunct="1"/>
-              <a:t>9/26/2025</a:t>
+              <a:t>10/2/2025</a:t>
             </a:fld>
             <a:endParaRPr lang="en-US"/>
           </a:p>
@@ -4172,7 +4379,7 @@
             <a:fld id="{A25B5B4B-57EE-495D-8E74-A657CFD8BB6C}" type="datetime1">
               <a:rPr lang="en-US" smtClean="0"/>
               <a:pPr eaLnBrk="1" latinLnBrk="0" hangingPunct="1"/>
-              <a:t>9/26/2025</a:t>
+              <a:t>10/2/2025</a:t>
             </a:fld>
             <a:endParaRPr lang="en-US" sz="1400" dirty="0">
               <a:solidFill>
@@ -5062,7 +5269,7 @@
           <p:nvPr>
             <p:extLst>
               <p:ext uri="{D42A27DB-BD31-4B8C-83A1-F6EECF244321}">
-                <p14:modId xmlns:p14="http://schemas.microsoft.com/office/powerpoint/2010/main" val="2190145348"/>
+                <p14:modId xmlns:p14="http://schemas.microsoft.com/office/powerpoint/2010/main" val="551700696"/>
               </p:ext>
             </p:extLst>
           </p:nvPr>
@@ -5831,235 +6038,6 @@
                         </a:spcAft>
                       </a:pPr>
                       <a:r>
-                        <a:rPr lang="en-US" sz="1800" b="1">
-                          <a:effectLst/>
-                          <a:latin typeface="Consolas" panose="020B0609020204030204" pitchFamily="49" charset="0"/>
-                          <a:cs typeface="Consolas" panose="020B0609020204030204" pitchFamily="49" charset="0"/>
-                        </a:rPr>
-                        <a:t>1</a:t>
-                      </a:r>
-                      <a:endParaRPr lang="en-US" sz="1800" b="1">
-                        <a:effectLst/>
-                        <a:latin typeface="Consolas" panose="020B0609020204030204" pitchFamily="49" charset="0"/>
-                        <a:ea typeface="宋体"/>
-                        <a:cs typeface="Consolas" panose="020B0609020204030204" pitchFamily="49" charset="0"/>
-                      </a:endParaRPr>
-                    </a:p>
-                  </a:txBody>
-                  <a:tcPr marL="68580" marR="68580" marT="0" marB="0" anchor="ctr"/>
-                </a:tc>
-                <a:tc>
-                  <a:txBody>
-                    <a:bodyPr/>
-                    <a:lstStyle/>
-                    <a:p>
-                      <a:pPr marL="0" marR="0" algn="ctr">
-                        <a:spcBef>
-                          <a:spcPts val="0"/>
-                        </a:spcBef>
-                        <a:spcAft>
-                          <a:spcPts val="0"/>
-                        </a:spcAft>
-                      </a:pPr>
-                      <a:r>
-                        <a:rPr lang="en-US" sz="1800" b="1" dirty="0">
-                          <a:effectLst/>
-                          <a:latin typeface="Consolas" panose="020B0609020204030204" pitchFamily="49" charset="0"/>
-                          <a:cs typeface="Consolas" panose="020B0609020204030204" pitchFamily="49" charset="0"/>
-                        </a:rPr>
-                        <a:t>0</a:t>
-                      </a:r>
-                      <a:endParaRPr lang="en-US" sz="1800" b="1" dirty="0">
-                        <a:effectLst/>
-                        <a:latin typeface="Consolas" panose="020B0609020204030204" pitchFamily="49" charset="0"/>
-                        <a:ea typeface="宋体"/>
-                        <a:cs typeface="Consolas" panose="020B0609020204030204" pitchFamily="49" charset="0"/>
-                      </a:endParaRPr>
-                    </a:p>
-                  </a:txBody>
-                  <a:tcPr marL="68580" marR="68580" marT="0" marB="0" anchor="ctr">
-                    <a:lnR w="19050" cap="flat" cmpd="sng" algn="ctr">
-                      <a:solidFill>
-                        <a:schemeClr val="tx1"/>
-                      </a:solidFill>
-                      <a:prstDash val="solid"/>
-                      <a:round/>
-                      <a:headEnd type="none" w="med" len="med"/>
-                      <a:tailEnd type="none" w="med" len="med"/>
-                    </a:lnR>
-                  </a:tcPr>
-                </a:tc>
-                <a:tc>
-                  <a:txBody>
-                    <a:bodyPr/>
-                    <a:lstStyle/>
-                    <a:p>
-                      <a:pPr marL="0" marR="0" algn="ctr">
-                        <a:spcBef>
-                          <a:spcPts val="0"/>
-                        </a:spcBef>
-                        <a:spcAft>
-                          <a:spcPts val="0"/>
-                        </a:spcAft>
-                      </a:pPr>
-                      <a:r>
-                        <a:rPr lang="en-US" sz="1800">
-                          <a:effectLst/>
-                        </a:rPr>
-                        <a:t>D</a:t>
-                      </a:r>
-                      <a:r>
-                        <a:rPr lang="en-US" sz="1800" baseline="-25000">
-                          <a:effectLst/>
-                        </a:rPr>
-                        <a:t>1</a:t>
-                      </a:r>
-                      <a:endParaRPr lang="en-US" sz="1800">
-                        <a:effectLst/>
-                        <a:latin typeface="Consolas" panose="020B0609020204030204" pitchFamily="49" charset="0"/>
-                        <a:ea typeface="宋体"/>
-                        <a:cs typeface="Consolas" panose="020B0609020204030204" pitchFamily="49" charset="0"/>
-                      </a:endParaRPr>
-                    </a:p>
-                  </a:txBody>
-                  <a:tcPr marL="68580" marR="68580" marT="0" marB="0" anchor="ctr">
-                    <a:lnL w="19050" cap="flat" cmpd="sng" algn="ctr">
-                      <a:solidFill>
-                        <a:schemeClr val="tx1"/>
-                      </a:solidFill>
-                      <a:prstDash val="solid"/>
-                      <a:round/>
-                      <a:headEnd type="none" w="med" len="med"/>
-                      <a:tailEnd type="none" w="med" len="med"/>
-                    </a:lnL>
-                  </a:tcPr>
-                </a:tc>
-                <a:tc>
-                  <a:txBody>
-                    <a:bodyPr/>
-                    <a:lstStyle/>
-                    <a:p>
-                      <a:pPr marL="0" marR="0" algn="ctr">
-                        <a:spcBef>
-                          <a:spcPts val="0"/>
-                        </a:spcBef>
-                        <a:spcAft>
-                          <a:spcPts val="0"/>
-                        </a:spcAft>
-                      </a:pPr>
-                      <a:r>
-                        <a:rPr lang="en-US" sz="1800" dirty="0" err="1">
-                          <a:effectLst/>
-                        </a:rPr>
-                        <a:t>D</a:t>
-                      </a:r>
-                      <a:r>
-                        <a:rPr lang="en-US" sz="1800" baseline="-25000" dirty="0" err="1">
-                          <a:effectLst/>
-                        </a:rPr>
-                        <a:t>0</a:t>
-                      </a:r>
-                      <a:endParaRPr lang="en-US" sz="1800" dirty="0">
-                        <a:effectLst/>
-                        <a:latin typeface="Consolas" panose="020B0609020204030204" pitchFamily="49" charset="0"/>
-                        <a:ea typeface="宋体"/>
-                        <a:cs typeface="Consolas" panose="020B0609020204030204" pitchFamily="49" charset="0"/>
-                      </a:endParaRPr>
-                    </a:p>
-                  </a:txBody>
-                  <a:tcPr marL="68580" marR="68580" marT="0" marB="0" anchor="ctr"/>
-                </a:tc>
-                <a:tc>
-                  <a:txBody>
-                    <a:bodyPr/>
-                    <a:lstStyle/>
-                    <a:p>
-                      <a:pPr marL="0" marR="0" algn="ctr">
-                        <a:spcBef>
-                          <a:spcPts val="0"/>
-                        </a:spcBef>
-                        <a:spcAft>
-                          <a:spcPts val="0"/>
-                        </a:spcAft>
-                      </a:pPr>
-                      <a:r>
-                        <a:rPr lang="en-US" sz="1800" dirty="0" err="1">
-                          <a:effectLst/>
-                        </a:rPr>
-                        <a:t>D</a:t>
-                      </a:r>
-                      <a:r>
-                        <a:rPr lang="en-US" sz="1800" baseline="-25000" dirty="0" err="1">
-                          <a:effectLst/>
-                        </a:rPr>
-                        <a:t>3</a:t>
-                      </a:r>
-                      <a:endParaRPr lang="en-US" sz="1800" dirty="0">
-                        <a:effectLst/>
-                        <a:latin typeface="Consolas" panose="020B0609020204030204" pitchFamily="49" charset="0"/>
-                        <a:ea typeface="宋体"/>
-                        <a:cs typeface="Consolas" panose="020B0609020204030204" pitchFamily="49" charset="0"/>
-                      </a:endParaRPr>
-                    </a:p>
-                  </a:txBody>
-                  <a:tcPr marL="68580" marR="68580" marT="0" marB="0" anchor="ctr"/>
-                </a:tc>
-                <a:tc>
-                  <a:txBody>
-                    <a:bodyPr/>
-                    <a:lstStyle/>
-                    <a:p>
-                      <a:pPr marL="0" marR="0" algn="ctr">
-                        <a:spcBef>
-                          <a:spcPts val="0"/>
-                        </a:spcBef>
-                        <a:spcAft>
-                          <a:spcPts val="0"/>
-                        </a:spcAft>
-                      </a:pPr>
-                      <a:r>
-                        <a:rPr lang="en-US" sz="1800">
-                          <a:effectLst/>
-                        </a:rPr>
-                        <a:t>D</a:t>
-                      </a:r>
-                      <a:r>
-                        <a:rPr lang="en-US" sz="1800" baseline="-25000">
-                          <a:effectLst/>
-                        </a:rPr>
-                        <a:t>2</a:t>
-                      </a:r>
-                      <a:endParaRPr lang="en-US" sz="1800">
-                        <a:effectLst/>
-                        <a:latin typeface="Consolas" panose="020B0609020204030204" pitchFamily="49" charset="0"/>
-                        <a:ea typeface="宋体"/>
-                        <a:cs typeface="Consolas" panose="020B0609020204030204" pitchFamily="49" charset="0"/>
-                      </a:endParaRPr>
-                    </a:p>
-                  </a:txBody>
-                  <a:tcPr marL="68580" marR="68580" marT="0" marB="0" anchor="ctr"/>
-                </a:tc>
-                <a:extLst>
-                  <a:ext uri="{0D108BD9-81ED-4DB2-BD59-A6C34878D82A}">
-                    <a16:rowId xmlns:a16="http://schemas.microsoft.com/office/drawing/2014/main" val="10003"/>
-                  </a:ext>
-                </a:extLst>
-              </a:tr>
-              <a:tr h="409146">
-                <a:tc>
-                  <a:txBody>
-                    <a:bodyPr/>
-                    <a:lstStyle/>
-                    <a:p>
-                      <a:pPr marL="0" marR="0" algn="ctr">
-                        <a:spcBef>
-                          <a:spcPts val="0"/>
-                        </a:spcBef>
-                        <a:spcAft>
-                          <a:spcPts val="0"/>
-                        </a:spcAft>
-                      </a:pPr>
-                      <a:r>
                         <a:rPr lang="en-US" sz="1800" b="1" dirty="0">
                           <a:solidFill>
                             <a:srgbClr val="FF0000"/>
@@ -6105,7 +6083,7 @@
                           <a:latin typeface="Consolas" panose="020B0609020204030204" pitchFamily="49" charset="0"/>
                           <a:cs typeface="Consolas" panose="020B0609020204030204" pitchFamily="49" charset="0"/>
                         </a:rPr>
-                        <a:t>1</a:t>
+                        <a:t>0</a:t>
                       </a:r>
                       <a:endParaRPr lang="en-US" sz="1800" b="1" dirty="0">
                         <a:solidFill>
@@ -6159,7 +6137,7 @@
                           </a:solidFill>
                           <a:effectLst/>
                         </a:rPr>
-                        <a:t>2</a:t>
+                        <a:t>1</a:t>
                       </a:r>
                       <a:endParaRPr lang="en-US" sz="1800" dirty="0">
                         <a:solidFill>
@@ -6213,7 +6191,7 @@
                           </a:solidFill>
                           <a:effectLst/>
                         </a:rPr>
-                        <a:t>1</a:t>
+                        <a:t>0</a:t>
                       </a:r>
                       <a:endParaRPr lang="en-US" sz="1800" dirty="0">
                         <a:solidFill>
@@ -6257,7 +6235,7 @@
                           </a:solidFill>
                           <a:effectLst/>
                         </a:rPr>
-                        <a:t>0</a:t>
+                        <a:t>3</a:t>
                       </a:r>
                       <a:endParaRPr lang="en-US" sz="1800" dirty="0">
                         <a:solidFill>
@@ -6301,12 +6279,241 @@
                           </a:solidFill>
                           <a:effectLst/>
                         </a:rPr>
-                        <a:t>3</a:t>
+                        <a:t>2</a:t>
                       </a:r>
                       <a:endParaRPr lang="en-US" sz="1800" dirty="0">
                         <a:solidFill>
                           <a:srgbClr val="FF0000"/>
                         </a:solidFill>
+                        <a:effectLst/>
+                        <a:latin typeface="Consolas" panose="020B0609020204030204" pitchFamily="49" charset="0"/>
+                        <a:ea typeface="宋体"/>
+                        <a:cs typeface="Consolas" panose="020B0609020204030204" pitchFamily="49" charset="0"/>
+                      </a:endParaRPr>
+                    </a:p>
+                  </a:txBody>
+                  <a:tcPr marL="68580" marR="68580" marT="0" marB="0" anchor="ctr"/>
+                </a:tc>
+                <a:extLst>
+                  <a:ext uri="{0D108BD9-81ED-4DB2-BD59-A6C34878D82A}">
+                    <a16:rowId xmlns:a16="http://schemas.microsoft.com/office/drawing/2014/main" val="10003"/>
+                  </a:ext>
+                </a:extLst>
+              </a:tr>
+              <a:tr h="409146">
+                <a:tc>
+                  <a:txBody>
+                    <a:bodyPr/>
+                    <a:lstStyle/>
+                    <a:p>
+                      <a:pPr marL="0" marR="0" algn="ctr">
+                        <a:spcBef>
+                          <a:spcPts val="0"/>
+                        </a:spcBef>
+                        <a:spcAft>
+                          <a:spcPts val="0"/>
+                        </a:spcAft>
+                      </a:pPr>
+                      <a:r>
+                        <a:rPr lang="en-US" sz="1800" b="1">
+                          <a:effectLst/>
+                          <a:latin typeface="Consolas" panose="020B0609020204030204" pitchFamily="49" charset="0"/>
+                          <a:cs typeface="Consolas" panose="020B0609020204030204" pitchFamily="49" charset="0"/>
+                        </a:rPr>
+                        <a:t>1</a:t>
+                      </a:r>
+                      <a:endParaRPr lang="en-US" sz="1800" b="1">
+                        <a:effectLst/>
+                        <a:latin typeface="Consolas" panose="020B0609020204030204" pitchFamily="49" charset="0"/>
+                        <a:ea typeface="宋体"/>
+                        <a:cs typeface="Consolas" panose="020B0609020204030204" pitchFamily="49" charset="0"/>
+                      </a:endParaRPr>
+                    </a:p>
+                  </a:txBody>
+                  <a:tcPr marL="68580" marR="68580" marT="0" marB="0" anchor="ctr"/>
+                </a:tc>
+                <a:tc>
+                  <a:txBody>
+                    <a:bodyPr/>
+                    <a:lstStyle/>
+                    <a:p>
+                      <a:pPr marL="0" marR="0" algn="ctr">
+                        <a:spcBef>
+                          <a:spcPts val="0"/>
+                        </a:spcBef>
+                        <a:spcAft>
+                          <a:spcPts val="0"/>
+                        </a:spcAft>
+                      </a:pPr>
+                      <a:r>
+                        <a:rPr lang="en-US" sz="1800" b="1" dirty="0">
+                          <a:effectLst/>
+                          <a:latin typeface="Consolas" panose="020B0609020204030204" pitchFamily="49" charset="0"/>
+                          <a:cs typeface="Consolas" panose="020B0609020204030204" pitchFamily="49" charset="0"/>
+                        </a:rPr>
+                        <a:t>1</a:t>
+                      </a:r>
+                      <a:endParaRPr lang="en-US" sz="1800" b="1" dirty="0">
+                        <a:effectLst/>
+                        <a:latin typeface="Consolas" panose="020B0609020204030204" pitchFamily="49" charset="0"/>
+                        <a:ea typeface="宋体"/>
+                        <a:cs typeface="Consolas" panose="020B0609020204030204" pitchFamily="49" charset="0"/>
+                      </a:endParaRPr>
+                    </a:p>
+                  </a:txBody>
+                  <a:tcPr marL="68580" marR="68580" marT="0" marB="0" anchor="ctr">
+                    <a:lnR w="19050" cap="flat" cmpd="sng" algn="ctr">
+                      <a:solidFill>
+                        <a:schemeClr val="tx1"/>
+                      </a:solidFill>
+                      <a:prstDash val="solid"/>
+                      <a:round/>
+                      <a:headEnd type="none" w="med" len="med"/>
+                      <a:tailEnd type="none" w="med" len="med"/>
+                    </a:lnR>
+                  </a:tcPr>
+                </a:tc>
+                <a:tc>
+                  <a:txBody>
+                    <a:bodyPr/>
+                    <a:lstStyle/>
+                    <a:p>
+                      <a:pPr marL="0" marR="0" algn="ctr">
+                        <a:spcBef>
+                          <a:spcPts val="0"/>
+                        </a:spcBef>
+                        <a:spcAft>
+                          <a:spcPts val="0"/>
+                        </a:spcAft>
+                      </a:pPr>
+                      <a:r>
+                        <a:rPr lang="en-US" sz="1800">
+                          <a:effectLst/>
+                        </a:rPr>
+                        <a:t>D</a:t>
+                      </a:r>
+                      <a:r>
+                        <a:rPr lang="en-US" sz="1800" baseline="-25000">
+                          <a:effectLst/>
+                        </a:rPr>
+                        <a:t>2</a:t>
+                      </a:r>
+                      <a:endParaRPr lang="en-US" sz="1800">
+                        <a:effectLst/>
+                        <a:latin typeface="Consolas" panose="020B0609020204030204" pitchFamily="49" charset="0"/>
+                        <a:ea typeface="宋体"/>
+                        <a:cs typeface="Consolas" panose="020B0609020204030204" pitchFamily="49" charset="0"/>
+                      </a:endParaRPr>
+                    </a:p>
+                  </a:txBody>
+                  <a:tcPr marL="68580" marR="68580" marT="0" marB="0" anchor="ctr">
+                    <a:lnL w="19050" cap="flat" cmpd="sng" algn="ctr">
+                      <a:solidFill>
+                        <a:schemeClr val="tx1"/>
+                      </a:solidFill>
+                      <a:prstDash val="solid"/>
+                      <a:round/>
+                      <a:headEnd type="none" w="med" len="med"/>
+                      <a:tailEnd type="none" w="med" len="med"/>
+                    </a:lnL>
+                  </a:tcPr>
+                </a:tc>
+                <a:tc>
+                  <a:txBody>
+                    <a:bodyPr/>
+                    <a:lstStyle/>
+                    <a:p>
+                      <a:pPr marL="0" marR="0" algn="ctr">
+                        <a:spcBef>
+                          <a:spcPts val="0"/>
+                        </a:spcBef>
+                        <a:spcAft>
+                          <a:spcPts val="0"/>
+                        </a:spcAft>
+                      </a:pPr>
+                      <a:r>
+                        <a:rPr lang="en-US" sz="1800">
+                          <a:effectLst/>
+                        </a:rPr>
+                        <a:t>D</a:t>
+                      </a:r>
+                      <a:r>
+                        <a:rPr lang="en-US" sz="1800" baseline="-25000">
+                          <a:effectLst/>
+                        </a:rPr>
+                        <a:t>1</a:t>
+                      </a:r>
+                      <a:endParaRPr lang="en-US" sz="1800">
+                        <a:effectLst/>
+                        <a:latin typeface="Consolas" panose="020B0609020204030204" pitchFamily="49" charset="0"/>
+                        <a:ea typeface="宋体"/>
+                        <a:cs typeface="Consolas" panose="020B0609020204030204" pitchFamily="49" charset="0"/>
+                      </a:endParaRPr>
+                    </a:p>
+                  </a:txBody>
+                  <a:tcPr marL="68580" marR="68580" marT="0" marB="0" anchor="ctr"/>
+                </a:tc>
+                <a:tc>
+                  <a:txBody>
+                    <a:bodyPr/>
+                    <a:lstStyle/>
+                    <a:p>
+                      <a:pPr marL="0" marR="0" algn="ctr">
+                        <a:spcBef>
+                          <a:spcPts val="0"/>
+                        </a:spcBef>
+                        <a:spcAft>
+                          <a:spcPts val="0"/>
+                        </a:spcAft>
+                      </a:pPr>
+                      <a:r>
+                        <a:rPr lang="en-US" sz="1800" dirty="0" err="1">
+                          <a:effectLst/>
+                        </a:rPr>
+                        <a:t>D</a:t>
+                      </a:r>
+                      <a:r>
+                        <a:rPr lang="en-US" sz="1800" baseline="-25000" dirty="0" err="1">
+                          <a:effectLst/>
+                        </a:rPr>
+                        <a:t>0</a:t>
+                      </a:r>
+                      <a:endParaRPr lang="en-US" sz="1800" dirty="0">
+                        <a:effectLst/>
+                        <a:latin typeface="Consolas" panose="020B0609020204030204" pitchFamily="49" charset="0"/>
+                        <a:ea typeface="宋体"/>
+                        <a:cs typeface="Consolas" panose="020B0609020204030204" pitchFamily="49" charset="0"/>
+                      </a:endParaRPr>
+                    </a:p>
+                  </a:txBody>
+                  <a:tcPr marL="68580" marR="68580" marT="0" marB="0" anchor="ctr"/>
+                </a:tc>
+                <a:tc>
+                  <a:txBody>
+                    <a:bodyPr/>
+                    <a:lstStyle/>
+                    <a:p>
+                      <a:pPr marL="0" marR="0" algn="ctr">
+                        <a:spcBef>
+                          <a:spcPts val="0"/>
+                        </a:spcBef>
+                        <a:spcAft>
+                          <a:spcPts val="0"/>
+                        </a:spcAft>
+                      </a:pPr>
+                      <a:r>
+                        <a:rPr lang="en-US" sz="1800" dirty="0" err="1">
+                          <a:effectLst/>
+                        </a:rPr>
+                        <a:t>D</a:t>
+                      </a:r>
+                      <a:r>
+                        <a:rPr lang="en-US" sz="1800" baseline="-25000" dirty="0" err="1">
+                          <a:effectLst/>
+                        </a:rPr>
+                        <a:t>3</a:t>
+                      </a:r>
+                      <a:endParaRPr lang="en-US" sz="1800" dirty="0">
                         <a:effectLst/>
                         <a:latin typeface="Consolas" panose="020B0609020204030204" pitchFamily="49" charset="0"/>
                         <a:ea typeface="宋体"/>
@@ -6334,7 +6541,7 @@
         </p:nvSpPr>
         <p:spPr>
           <a:xfrm>
-            <a:off x="457200" y="1371600"/>
+            <a:off x="457200" y="1295400"/>
             <a:ext cx="8153400" cy="369332"/>
           </a:xfrm>
           <a:prstGeom prst="rect">
@@ -6403,14 +6610,14 @@
                 <a:latin typeface="Consolas" panose="020B0609020204030204" pitchFamily="49" charset="0"/>
                 <a:cs typeface="Consolas" panose="020B0609020204030204" pitchFamily="49" charset="0"/>
               </a:rPr>
-              <a:t> = 11</a:t>
+              <a:t> = 10</a:t>
             </a:r>
           </a:p>
         </p:txBody>
       </p:sp>
       <p:pic>
         <p:nvPicPr>
-          <p:cNvPr id="7" name="Picture 6"/>
+          <p:cNvPr id="6" name="Picture 5"/>
           <p:cNvPicPr>
             <a:picLocks noChangeAspect="1"/>
           </p:cNvPicPr>
@@ -6484,14 +6691,8 @@
           <a:lstStyle/>
           <a:p>
             <a:r>
-              <a:rPr lang="en-US" b="1" dirty="0">
-                <a:latin typeface="Consolas" panose="020B0609020204030204" pitchFamily="49" charset="0"/>
-              </a:rPr>
-              <a:t>ADR</a:t>
-            </a:r>
-            <a:r>
               <a:rPr lang="en-US" dirty="0"/>
-              <a:t> Pseudo-instruction</a:t>
+              <a:t>Implementation of Barrel Shifter</a:t>
             </a:r>
           </a:p>
         </p:txBody>
@@ -6516,67 +6717,25 @@
               <a:pPr/>
               <a:t>11</a:t>
             </a:fld>
-            <a:endParaRPr kumimoji="0" lang="en-US" dirty="0"/>
+            <a:endParaRPr kumimoji="0" lang="en-US"/>
           </a:p>
         </p:txBody>
       </p:sp>
       <p:sp>
         <p:nvSpPr>
-          <p:cNvPr id="4" name="Content Placeholder 3"/>
-          <p:cNvSpPr>
-            <a:spLocks noGrp="1"/>
-          </p:cNvSpPr>
-          <p:nvPr>
-            <p:ph sz="quarter" idx="1"/>
-          </p:nvPr>
-        </p:nvSpPr>
-        <p:spPr/>
-        <p:txBody>
-          <a:bodyPr/>
-          <a:lstStyle/>
-          <a:p>
-            <a:r>
-              <a:rPr lang="en-US" b="1" dirty="0">
-                <a:latin typeface="Consolas" panose="020B0609020204030204" pitchFamily="49" charset="0"/>
-              </a:rPr>
-              <a:t>ADR</a:t>
-            </a:r>
-            <a:r>
-              <a:rPr lang="en-US" dirty="0"/>
-              <a:t>: loads a program-relative or register-relative address into a register</a:t>
-            </a:r>
-          </a:p>
-        </p:txBody>
-      </p:sp>
-      <p:sp>
-        <p:nvSpPr>
-          <p:cNvPr id="5" name="Rectangle 4"/>
+          <p:cNvPr id="4" name="Rectangle 3"/>
           <p:cNvSpPr/>
           <p:nvPr/>
         </p:nvSpPr>
         <p:spPr>
           <a:xfrm>
-            <a:off x="1524000" y="3124200"/>
-            <a:ext cx="5715000" cy="738664"/>
+            <a:off x="235826" y="5117068"/>
+            <a:ext cx="5791200" cy="369332"/>
           </a:xfrm>
           <a:prstGeom prst="rect">
             <a:avLst/>
           </a:prstGeom>
         </p:spPr>
-        <p:style>
-          <a:lnRef idx="2">
-            <a:schemeClr val="accent1"/>
-          </a:lnRef>
-          <a:fillRef idx="1">
-            <a:schemeClr val="lt1"/>
-          </a:fillRef>
-          <a:effectRef idx="0">
-            <a:schemeClr val="accent1"/>
-          </a:effectRef>
-          <a:fontRef idx="minor">
-            <a:schemeClr val="dk1"/>
-          </a:fontRef>
-        </p:style>
         <p:txBody>
           <a:bodyPr wrap="square">
             <a:spAutoFit/>
@@ -6584,76 +6743,1405 @@
           <a:lstStyle/>
           <a:p>
             <a:r>
-              <a:rPr lang="en-US" dirty="0">
-                <a:latin typeface="Consolas" panose="020B0609020204030204" pitchFamily="49" charset="0"/>
-              </a:rPr>
-              <a:t>start  MOV r0,#10      </a:t>
-            </a:r>
+              <a:rPr lang="en-US" dirty="0"/>
+              <a:t>Example four-bit Barrel shifter that performs </a:t>
+            </a:r>
+            <a:r>
+              <a:rPr lang="en-US" b="1" dirty="0"/>
+              <a:t>rotate right</a:t>
+            </a:r>
+          </a:p>
+        </p:txBody>
+      </p:sp>
+      <p:graphicFrame>
+        <p:nvGraphicFramePr>
+          <p:cNvPr id="5" name="Table 4"/>
+          <p:cNvGraphicFramePr>
+            <a:graphicFrameLocks noGrp="1"/>
+          </p:cNvGraphicFramePr>
+          <p:nvPr>
+            <p:extLst>
+              <p:ext uri="{D42A27DB-BD31-4B8C-83A1-F6EECF244321}">
+                <p14:modId xmlns:p14="http://schemas.microsoft.com/office/powerpoint/2010/main" val="2190145348"/>
+              </p:ext>
+            </p:extLst>
+          </p:nvPr>
+        </p:nvGraphicFramePr>
+        <p:xfrm>
+          <a:off x="6248400" y="2418965"/>
+          <a:ext cx="2590800" cy="2045730"/>
+        </p:xfrm>
+        <a:graphic>
+          <a:graphicData uri="http://schemas.openxmlformats.org/drawingml/2006/table">
+            <a:tbl>
+              <a:tblPr firstRow="1" firstCol="1" bandRow="1">
+                <a:tableStyleId>{B301B821-A1FF-4177-AEE7-76D212191A09}</a:tableStyleId>
+              </a:tblPr>
+              <a:tblGrid>
+                <a:gridCol w="417963">
+                  <a:extLst>
+                    <a:ext uri="{9D8B030D-6E8A-4147-A177-3AD203B41FA5}">
+                      <a16:colId xmlns:a16="http://schemas.microsoft.com/office/drawing/2014/main" val="20000"/>
+                    </a:ext>
+                  </a:extLst>
+                </a:gridCol>
+                <a:gridCol w="417009">
+                  <a:extLst>
+                    <a:ext uri="{9D8B030D-6E8A-4147-A177-3AD203B41FA5}">
+                      <a16:colId xmlns:a16="http://schemas.microsoft.com/office/drawing/2014/main" val="20001"/>
+                    </a:ext>
+                  </a:extLst>
+                </a:gridCol>
+                <a:gridCol w="438957">
+                  <a:extLst>
+                    <a:ext uri="{9D8B030D-6E8A-4147-A177-3AD203B41FA5}">
+                      <a16:colId xmlns:a16="http://schemas.microsoft.com/office/drawing/2014/main" val="20002"/>
+                    </a:ext>
+                  </a:extLst>
+                </a:gridCol>
+                <a:gridCol w="438957">
+                  <a:extLst>
+                    <a:ext uri="{9D8B030D-6E8A-4147-A177-3AD203B41FA5}">
+                      <a16:colId xmlns:a16="http://schemas.microsoft.com/office/drawing/2014/main" val="20003"/>
+                    </a:ext>
+                  </a:extLst>
+                </a:gridCol>
+                <a:gridCol w="438957">
+                  <a:extLst>
+                    <a:ext uri="{9D8B030D-6E8A-4147-A177-3AD203B41FA5}">
+                      <a16:colId xmlns:a16="http://schemas.microsoft.com/office/drawing/2014/main" val="20004"/>
+                    </a:ext>
+                  </a:extLst>
+                </a:gridCol>
+                <a:gridCol w="438957">
+                  <a:extLst>
+                    <a:ext uri="{9D8B030D-6E8A-4147-A177-3AD203B41FA5}">
+                      <a16:colId xmlns:a16="http://schemas.microsoft.com/office/drawing/2014/main" val="20005"/>
+                    </a:ext>
+                  </a:extLst>
+                </a:gridCol>
+              </a:tblGrid>
+              <a:tr h="409146">
+                <a:tc>
+                  <a:txBody>
+                    <a:bodyPr/>
+                    <a:lstStyle/>
+                    <a:p>
+                      <a:pPr marL="0" marR="0" algn="ctr">
+                        <a:spcBef>
+                          <a:spcPts val="0"/>
+                        </a:spcBef>
+                        <a:spcAft>
+                          <a:spcPts val="0"/>
+                        </a:spcAft>
+                      </a:pPr>
+                      <a:r>
+                        <a:rPr lang="en-US" sz="1800" dirty="0" err="1">
+                          <a:effectLst/>
+                        </a:rPr>
+                        <a:t>S</a:t>
+                      </a:r>
+                      <a:r>
+                        <a:rPr lang="en-US" sz="1800" baseline="-25000" dirty="0" err="1">
+                          <a:effectLst/>
+                        </a:rPr>
+                        <a:t>1</a:t>
+                      </a:r>
+                      <a:endParaRPr lang="en-US" sz="1800" dirty="0">
+                        <a:effectLst/>
+                        <a:latin typeface="Consolas" panose="020B0609020204030204" pitchFamily="49" charset="0"/>
+                        <a:ea typeface="宋体"/>
+                        <a:cs typeface="Consolas" panose="020B0609020204030204" pitchFamily="49" charset="0"/>
+                      </a:endParaRPr>
+                    </a:p>
+                  </a:txBody>
+                  <a:tcPr marL="68580" marR="68580" marT="0" marB="0" anchor="ctr"/>
+                </a:tc>
+                <a:tc>
+                  <a:txBody>
+                    <a:bodyPr/>
+                    <a:lstStyle/>
+                    <a:p>
+                      <a:pPr marL="0" marR="0" algn="ctr">
+                        <a:spcBef>
+                          <a:spcPts val="0"/>
+                        </a:spcBef>
+                        <a:spcAft>
+                          <a:spcPts val="0"/>
+                        </a:spcAft>
+                      </a:pPr>
+                      <a:r>
+                        <a:rPr lang="en-US" sz="1800" dirty="0" err="1">
+                          <a:effectLst/>
+                        </a:rPr>
+                        <a:t>S</a:t>
+                      </a:r>
+                      <a:r>
+                        <a:rPr lang="en-US" sz="1800" baseline="-25000" dirty="0" err="1">
+                          <a:effectLst/>
+                        </a:rPr>
+                        <a:t>0</a:t>
+                      </a:r>
+                      <a:endParaRPr lang="en-US" sz="1800" dirty="0">
+                        <a:effectLst/>
+                        <a:latin typeface="Consolas" panose="020B0609020204030204" pitchFamily="49" charset="0"/>
+                        <a:ea typeface="宋体"/>
+                        <a:cs typeface="Consolas" panose="020B0609020204030204" pitchFamily="49" charset="0"/>
+                      </a:endParaRPr>
+                    </a:p>
+                  </a:txBody>
+                  <a:tcPr marL="68580" marR="68580" marT="0" marB="0" anchor="ctr">
+                    <a:lnR w="19050" cap="flat" cmpd="sng" algn="ctr">
+                      <a:solidFill>
+                        <a:schemeClr val="tx1"/>
+                      </a:solidFill>
+                      <a:prstDash val="solid"/>
+                      <a:round/>
+                      <a:headEnd type="none" w="med" len="med"/>
+                      <a:tailEnd type="none" w="med" len="med"/>
+                    </a:lnR>
+                  </a:tcPr>
+                </a:tc>
+                <a:tc>
+                  <a:txBody>
+                    <a:bodyPr/>
+                    <a:lstStyle/>
+                    <a:p>
+                      <a:pPr marL="0" marR="0" algn="ctr">
+                        <a:spcBef>
+                          <a:spcPts val="0"/>
+                        </a:spcBef>
+                        <a:spcAft>
+                          <a:spcPts val="0"/>
+                        </a:spcAft>
+                      </a:pPr>
+                      <a:r>
+                        <a:rPr lang="en-US" sz="1800">
+                          <a:effectLst/>
+                        </a:rPr>
+                        <a:t>Y</a:t>
+                      </a:r>
+                      <a:r>
+                        <a:rPr lang="en-US" sz="1800" baseline="-25000">
+                          <a:effectLst/>
+                        </a:rPr>
+                        <a:t>3</a:t>
+                      </a:r>
+                      <a:endParaRPr lang="en-US" sz="1800">
+                        <a:effectLst/>
+                        <a:latin typeface="Consolas" panose="020B0609020204030204" pitchFamily="49" charset="0"/>
+                        <a:ea typeface="宋体"/>
+                        <a:cs typeface="Consolas" panose="020B0609020204030204" pitchFamily="49" charset="0"/>
+                      </a:endParaRPr>
+                    </a:p>
+                  </a:txBody>
+                  <a:tcPr marL="68580" marR="68580" marT="0" marB="0" anchor="ctr">
+                    <a:lnL w="19050" cap="flat" cmpd="sng" algn="ctr">
+                      <a:solidFill>
+                        <a:schemeClr val="tx1"/>
+                      </a:solidFill>
+                      <a:prstDash val="solid"/>
+                      <a:round/>
+                      <a:headEnd type="none" w="med" len="med"/>
+                      <a:tailEnd type="none" w="med" len="med"/>
+                    </a:lnL>
+                  </a:tcPr>
+                </a:tc>
+                <a:tc>
+                  <a:txBody>
+                    <a:bodyPr/>
+                    <a:lstStyle/>
+                    <a:p>
+                      <a:pPr marL="0" marR="0" algn="ctr">
+                        <a:spcBef>
+                          <a:spcPts val="0"/>
+                        </a:spcBef>
+                        <a:spcAft>
+                          <a:spcPts val="0"/>
+                        </a:spcAft>
+                      </a:pPr>
+                      <a:r>
+                        <a:rPr lang="en-US" sz="1800">
+                          <a:effectLst/>
+                        </a:rPr>
+                        <a:t>Y</a:t>
+                      </a:r>
+                      <a:r>
+                        <a:rPr lang="en-US" sz="1800" baseline="-25000">
+                          <a:effectLst/>
+                        </a:rPr>
+                        <a:t>2</a:t>
+                      </a:r>
+                      <a:endParaRPr lang="en-US" sz="1800">
+                        <a:effectLst/>
+                        <a:latin typeface="Consolas" panose="020B0609020204030204" pitchFamily="49" charset="0"/>
+                        <a:ea typeface="宋体"/>
+                        <a:cs typeface="Consolas" panose="020B0609020204030204" pitchFamily="49" charset="0"/>
+                      </a:endParaRPr>
+                    </a:p>
+                  </a:txBody>
+                  <a:tcPr marL="68580" marR="68580" marT="0" marB="0" anchor="ctr"/>
+                </a:tc>
+                <a:tc>
+                  <a:txBody>
+                    <a:bodyPr/>
+                    <a:lstStyle/>
+                    <a:p>
+                      <a:pPr marL="0" marR="0" algn="ctr">
+                        <a:spcBef>
+                          <a:spcPts val="0"/>
+                        </a:spcBef>
+                        <a:spcAft>
+                          <a:spcPts val="0"/>
+                        </a:spcAft>
+                      </a:pPr>
+                      <a:r>
+                        <a:rPr lang="en-US" sz="1800">
+                          <a:effectLst/>
+                        </a:rPr>
+                        <a:t>Y</a:t>
+                      </a:r>
+                      <a:r>
+                        <a:rPr lang="en-US" sz="1800" baseline="-25000">
+                          <a:effectLst/>
+                        </a:rPr>
+                        <a:t>1</a:t>
+                      </a:r>
+                      <a:endParaRPr lang="en-US" sz="1800">
+                        <a:effectLst/>
+                        <a:latin typeface="Consolas" panose="020B0609020204030204" pitchFamily="49" charset="0"/>
+                        <a:ea typeface="宋体"/>
+                        <a:cs typeface="Consolas" panose="020B0609020204030204" pitchFamily="49" charset="0"/>
+                      </a:endParaRPr>
+                    </a:p>
+                  </a:txBody>
+                  <a:tcPr marL="68580" marR="68580" marT="0" marB="0" anchor="ctr"/>
+                </a:tc>
+                <a:tc>
+                  <a:txBody>
+                    <a:bodyPr/>
+                    <a:lstStyle/>
+                    <a:p>
+                      <a:pPr marL="0" marR="0" algn="ctr">
+                        <a:spcBef>
+                          <a:spcPts val="0"/>
+                        </a:spcBef>
+                        <a:spcAft>
+                          <a:spcPts val="0"/>
+                        </a:spcAft>
+                      </a:pPr>
+                      <a:r>
+                        <a:rPr lang="en-US" sz="1800">
+                          <a:effectLst/>
+                        </a:rPr>
+                        <a:t>Y</a:t>
+                      </a:r>
+                      <a:r>
+                        <a:rPr lang="en-US" sz="1800" baseline="-25000">
+                          <a:effectLst/>
+                        </a:rPr>
+                        <a:t>0</a:t>
+                      </a:r>
+                      <a:endParaRPr lang="en-US" sz="1800">
+                        <a:effectLst/>
+                        <a:latin typeface="Consolas" panose="020B0609020204030204" pitchFamily="49" charset="0"/>
+                        <a:ea typeface="宋体"/>
+                        <a:cs typeface="Consolas" panose="020B0609020204030204" pitchFamily="49" charset="0"/>
+                      </a:endParaRPr>
+                    </a:p>
+                  </a:txBody>
+                  <a:tcPr marL="68580" marR="68580" marT="0" marB="0" anchor="ctr"/>
+                </a:tc>
+                <a:extLst>
+                  <a:ext uri="{0D108BD9-81ED-4DB2-BD59-A6C34878D82A}">
+                    <a16:rowId xmlns:a16="http://schemas.microsoft.com/office/drawing/2014/main" val="10000"/>
+                  </a:ext>
+                </a:extLst>
+              </a:tr>
+              <a:tr h="409146">
+                <a:tc>
+                  <a:txBody>
+                    <a:bodyPr/>
+                    <a:lstStyle/>
+                    <a:p>
+                      <a:pPr marL="0" marR="0" algn="ctr">
+                        <a:spcBef>
+                          <a:spcPts val="0"/>
+                        </a:spcBef>
+                        <a:spcAft>
+                          <a:spcPts val="0"/>
+                        </a:spcAft>
+                      </a:pPr>
+                      <a:r>
+                        <a:rPr lang="en-US" sz="1800" b="1" dirty="0">
+                          <a:effectLst/>
+                          <a:latin typeface="Consolas" panose="020B0609020204030204" pitchFamily="49" charset="0"/>
+                          <a:cs typeface="Consolas" panose="020B0609020204030204" pitchFamily="49" charset="0"/>
+                        </a:rPr>
+                        <a:t>0</a:t>
+                      </a:r>
+                      <a:endParaRPr lang="en-US" sz="1800" b="1" dirty="0">
+                        <a:effectLst/>
+                        <a:latin typeface="Consolas" panose="020B0609020204030204" pitchFamily="49" charset="0"/>
+                        <a:ea typeface="宋体"/>
+                        <a:cs typeface="Consolas" panose="020B0609020204030204" pitchFamily="49" charset="0"/>
+                      </a:endParaRPr>
+                    </a:p>
+                  </a:txBody>
+                  <a:tcPr marL="68580" marR="68580" marT="0" marB="0" anchor="ctr"/>
+                </a:tc>
+                <a:tc>
+                  <a:txBody>
+                    <a:bodyPr/>
+                    <a:lstStyle/>
+                    <a:p>
+                      <a:pPr marL="0" marR="0" algn="ctr">
+                        <a:spcBef>
+                          <a:spcPts val="0"/>
+                        </a:spcBef>
+                        <a:spcAft>
+                          <a:spcPts val="0"/>
+                        </a:spcAft>
+                      </a:pPr>
+                      <a:r>
+                        <a:rPr lang="en-US" sz="1800" b="1" dirty="0">
+                          <a:effectLst/>
+                          <a:latin typeface="Consolas" panose="020B0609020204030204" pitchFamily="49" charset="0"/>
+                          <a:cs typeface="Consolas" panose="020B0609020204030204" pitchFamily="49" charset="0"/>
+                        </a:rPr>
+                        <a:t>0</a:t>
+                      </a:r>
+                      <a:endParaRPr lang="en-US" sz="1800" b="1" dirty="0">
+                        <a:effectLst/>
+                        <a:latin typeface="Consolas" panose="020B0609020204030204" pitchFamily="49" charset="0"/>
+                        <a:ea typeface="宋体"/>
+                        <a:cs typeface="Consolas" panose="020B0609020204030204" pitchFamily="49" charset="0"/>
+                      </a:endParaRPr>
+                    </a:p>
+                  </a:txBody>
+                  <a:tcPr marL="68580" marR="68580" marT="0" marB="0" anchor="ctr">
+                    <a:lnR w="19050" cap="flat" cmpd="sng" algn="ctr">
+                      <a:solidFill>
+                        <a:schemeClr val="tx1"/>
+                      </a:solidFill>
+                      <a:prstDash val="solid"/>
+                      <a:round/>
+                      <a:headEnd type="none" w="med" len="med"/>
+                      <a:tailEnd type="none" w="med" len="med"/>
+                    </a:lnR>
+                  </a:tcPr>
+                </a:tc>
+                <a:tc>
+                  <a:txBody>
+                    <a:bodyPr/>
+                    <a:lstStyle/>
+                    <a:p>
+                      <a:pPr marL="0" marR="0" algn="ctr">
+                        <a:spcBef>
+                          <a:spcPts val="0"/>
+                        </a:spcBef>
+                        <a:spcAft>
+                          <a:spcPts val="0"/>
+                        </a:spcAft>
+                      </a:pPr>
+                      <a:r>
+                        <a:rPr lang="en-US" sz="1800" dirty="0" err="1">
+                          <a:effectLst/>
+                        </a:rPr>
+                        <a:t>D</a:t>
+                      </a:r>
+                      <a:r>
+                        <a:rPr lang="en-US" sz="1800" baseline="-25000" dirty="0" err="1">
+                          <a:effectLst/>
+                        </a:rPr>
+                        <a:t>3</a:t>
+                      </a:r>
+                      <a:endParaRPr lang="en-US" sz="1800" dirty="0">
+                        <a:effectLst/>
+                        <a:latin typeface="Consolas" panose="020B0609020204030204" pitchFamily="49" charset="0"/>
+                        <a:ea typeface="宋体"/>
+                        <a:cs typeface="Consolas" panose="020B0609020204030204" pitchFamily="49" charset="0"/>
+                      </a:endParaRPr>
+                    </a:p>
+                  </a:txBody>
+                  <a:tcPr marL="68580" marR="68580" marT="0" marB="0" anchor="ctr">
+                    <a:lnL w="19050" cap="flat" cmpd="sng" algn="ctr">
+                      <a:solidFill>
+                        <a:schemeClr val="tx1"/>
+                      </a:solidFill>
+                      <a:prstDash val="solid"/>
+                      <a:round/>
+                      <a:headEnd type="none" w="med" len="med"/>
+                      <a:tailEnd type="none" w="med" len="med"/>
+                    </a:lnL>
+                  </a:tcPr>
+                </a:tc>
+                <a:tc>
+                  <a:txBody>
+                    <a:bodyPr/>
+                    <a:lstStyle/>
+                    <a:p>
+                      <a:pPr marL="0" marR="0" algn="ctr">
+                        <a:spcBef>
+                          <a:spcPts val="0"/>
+                        </a:spcBef>
+                        <a:spcAft>
+                          <a:spcPts val="0"/>
+                        </a:spcAft>
+                      </a:pPr>
+                      <a:r>
+                        <a:rPr lang="en-US" sz="1800">
+                          <a:effectLst/>
+                        </a:rPr>
+                        <a:t>D</a:t>
+                      </a:r>
+                      <a:r>
+                        <a:rPr lang="en-US" sz="1800" baseline="-25000">
+                          <a:effectLst/>
+                        </a:rPr>
+                        <a:t>2</a:t>
+                      </a:r>
+                      <a:endParaRPr lang="en-US" sz="1800">
+                        <a:effectLst/>
+                        <a:latin typeface="Consolas" panose="020B0609020204030204" pitchFamily="49" charset="0"/>
+                        <a:ea typeface="宋体"/>
+                        <a:cs typeface="Consolas" panose="020B0609020204030204" pitchFamily="49" charset="0"/>
+                      </a:endParaRPr>
+                    </a:p>
+                  </a:txBody>
+                  <a:tcPr marL="68580" marR="68580" marT="0" marB="0" anchor="ctr"/>
+                </a:tc>
+                <a:tc>
+                  <a:txBody>
+                    <a:bodyPr/>
+                    <a:lstStyle/>
+                    <a:p>
+                      <a:pPr marL="0" marR="0" algn="ctr">
+                        <a:spcBef>
+                          <a:spcPts val="0"/>
+                        </a:spcBef>
+                        <a:spcAft>
+                          <a:spcPts val="0"/>
+                        </a:spcAft>
+                      </a:pPr>
+                      <a:r>
+                        <a:rPr lang="en-US" sz="1800">
+                          <a:effectLst/>
+                        </a:rPr>
+                        <a:t>D</a:t>
+                      </a:r>
+                      <a:r>
+                        <a:rPr lang="en-US" sz="1800" baseline="-25000">
+                          <a:effectLst/>
+                        </a:rPr>
+                        <a:t>1</a:t>
+                      </a:r>
+                      <a:endParaRPr lang="en-US" sz="1800">
+                        <a:effectLst/>
+                        <a:latin typeface="Consolas" panose="020B0609020204030204" pitchFamily="49" charset="0"/>
+                        <a:ea typeface="宋体"/>
+                        <a:cs typeface="Consolas" panose="020B0609020204030204" pitchFamily="49" charset="0"/>
+                      </a:endParaRPr>
+                    </a:p>
+                  </a:txBody>
+                  <a:tcPr marL="68580" marR="68580" marT="0" marB="0" anchor="ctr"/>
+                </a:tc>
+                <a:tc>
+                  <a:txBody>
+                    <a:bodyPr/>
+                    <a:lstStyle/>
+                    <a:p>
+                      <a:pPr marL="0" marR="0" algn="ctr">
+                        <a:spcBef>
+                          <a:spcPts val="0"/>
+                        </a:spcBef>
+                        <a:spcAft>
+                          <a:spcPts val="0"/>
+                        </a:spcAft>
+                      </a:pPr>
+                      <a:r>
+                        <a:rPr lang="en-US" sz="1800">
+                          <a:effectLst/>
+                        </a:rPr>
+                        <a:t>D</a:t>
+                      </a:r>
+                      <a:r>
+                        <a:rPr lang="en-US" sz="1800" baseline="-25000">
+                          <a:effectLst/>
+                        </a:rPr>
+                        <a:t>0</a:t>
+                      </a:r>
+                      <a:endParaRPr lang="en-US" sz="1800">
+                        <a:effectLst/>
+                        <a:latin typeface="Consolas" panose="020B0609020204030204" pitchFamily="49" charset="0"/>
+                        <a:ea typeface="宋体"/>
+                        <a:cs typeface="Consolas" panose="020B0609020204030204" pitchFamily="49" charset="0"/>
+                      </a:endParaRPr>
+                    </a:p>
+                  </a:txBody>
+                  <a:tcPr marL="68580" marR="68580" marT="0" marB="0" anchor="ctr"/>
+                </a:tc>
+                <a:extLst>
+                  <a:ext uri="{0D108BD9-81ED-4DB2-BD59-A6C34878D82A}">
+                    <a16:rowId xmlns:a16="http://schemas.microsoft.com/office/drawing/2014/main" val="10001"/>
+                  </a:ext>
+                </a:extLst>
+              </a:tr>
+              <a:tr h="409146">
+                <a:tc>
+                  <a:txBody>
+                    <a:bodyPr/>
+                    <a:lstStyle/>
+                    <a:p>
+                      <a:pPr marL="0" marR="0" algn="ctr">
+                        <a:spcBef>
+                          <a:spcPts val="0"/>
+                        </a:spcBef>
+                        <a:spcAft>
+                          <a:spcPts val="0"/>
+                        </a:spcAft>
+                      </a:pPr>
+                      <a:r>
+                        <a:rPr lang="en-US" sz="1800" b="1" dirty="0">
+                          <a:effectLst/>
+                          <a:latin typeface="Consolas" panose="020B0609020204030204" pitchFamily="49" charset="0"/>
+                          <a:cs typeface="Consolas" panose="020B0609020204030204" pitchFamily="49" charset="0"/>
+                        </a:rPr>
+                        <a:t>0</a:t>
+                      </a:r>
+                      <a:endParaRPr lang="en-US" sz="1800" b="1" dirty="0">
+                        <a:effectLst/>
+                        <a:latin typeface="Consolas" panose="020B0609020204030204" pitchFamily="49" charset="0"/>
+                        <a:ea typeface="宋体"/>
+                        <a:cs typeface="Consolas" panose="020B0609020204030204" pitchFamily="49" charset="0"/>
+                      </a:endParaRPr>
+                    </a:p>
+                  </a:txBody>
+                  <a:tcPr marL="68580" marR="68580" marT="0" marB="0" anchor="ctr"/>
+                </a:tc>
+                <a:tc>
+                  <a:txBody>
+                    <a:bodyPr/>
+                    <a:lstStyle/>
+                    <a:p>
+                      <a:pPr marL="0" marR="0" algn="ctr">
+                        <a:spcBef>
+                          <a:spcPts val="0"/>
+                        </a:spcBef>
+                        <a:spcAft>
+                          <a:spcPts val="0"/>
+                        </a:spcAft>
+                      </a:pPr>
+                      <a:r>
+                        <a:rPr lang="en-US" sz="1800" b="1" dirty="0">
+                          <a:effectLst/>
+                          <a:latin typeface="Consolas" panose="020B0609020204030204" pitchFamily="49" charset="0"/>
+                          <a:cs typeface="Consolas" panose="020B0609020204030204" pitchFamily="49" charset="0"/>
+                        </a:rPr>
+                        <a:t>1</a:t>
+                      </a:r>
+                      <a:endParaRPr lang="en-US" sz="1800" b="1" dirty="0">
+                        <a:effectLst/>
+                        <a:latin typeface="Consolas" panose="020B0609020204030204" pitchFamily="49" charset="0"/>
+                        <a:ea typeface="宋体"/>
+                        <a:cs typeface="Consolas" panose="020B0609020204030204" pitchFamily="49" charset="0"/>
+                      </a:endParaRPr>
+                    </a:p>
+                  </a:txBody>
+                  <a:tcPr marL="68580" marR="68580" marT="0" marB="0" anchor="ctr">
+                    <a:lnR w="19050" cap="flat" cmpd="sng" algn="ctr">
+                      <a:solidFill>
+                        <a:schemeClr val="tx1"/>
+                      </a:solidFill>
+                      <a:prstDash val="solid"/>
+                      <a:round/>
+                      <a:headEnd type="none" w="med" len="med"/>
+                      <a:tailEnd type="none" w="med" len="med"/>
+                    </a:lnR>
+                  </a:tcPr>
+                </a:tc>
+                <a:tc>
+                  <a:txBody>
+                    <a:bodyPr/>
+                    <a:lstStyle/>
+                    <a:p>
+                      <a:pPr marL="0" marR="0" algn="ctr">
+                        <a:spcBef>
+                          <a:spcPts val="0"/>
+                        </a:spcBef>
+                        <a:spcAft>
+                          <a:spcPts val="0"/>
+                        </a:spcAft>
+                      </a:pPr>
+                      <a:r>
+                        <a:rPr lang="en-US" sz="1800" dirty="0" err="1">
+                          <a:effectLst/>
+                        </a:rPr>
+                        <a:t>D</a:t>
+                      </a:r>
+                      <a:r>
+                        <a:rPr lang="en-US" sz="1800" baseline="-25000" dirty="0" err="1">
+                          <a:effectLst/>
+                        </a:rPr>
+                        <a:t>0</a:t>
+                      </a:r>
+                      <a:endParaRPr lang="en-US" sz="1800" dirty="0">
+                        <a:effectLst/>
+                        <a:latin typeface="Consolas" panose="020B0609020204030204" pitchFamily="49" charset="0"/>
+                        <a:ea typeface="宋体"/>
+                        <a:cs typeface="Consolas" panose="020B0609020204030204" pitchFamily="49" charset="0"/>
+                      </a:endParaRPr>
+                    </a:p>
+                  </a:txBody>
+                  <a:tcPr marL="68580" marR="68580" marT="0" marB="0" anchor="ctr">
+                    <a:lnL w="19050" cap="flat" cmpd="sng" algn="ctr">
+                      <a:solidFill>
+                        <a:schemeClr val="tx1"/>
+                      </a:solidFill>
+                      <a:prstDash val="solid"/>
+                      <a:round/>
+                      <a:headEnd type="none" w="med" len="med"/>
+                      <a:tailEnd type="none" w="med" len="med"/>
+                    </a:lnL>
+                  </a:tcPr>
+                </a:tc>
+                <a:tc>
+                  <a:txBody>
+                    <a:bodyPr/>
+                    <a:lstStyle/>
+                    <a:p>
+                      <a:pPr marL="0" marR="0" algn="ctr">
+                        <a:spcBef>
+                          <a:spcPts val="0"/>
+                        </a:spcBef>
+                        <a:spcAft>
+                          <a:spcPts val="0"/>
+                        </a:spcAft>
+                      </a:pPr>
+                      <a:r>
+                        <a:rPr lang="en-US" sz="1800" dirty="0" err="1">
+                          <a:effectLst/>
+                        </a:rPr>
+                        <a:t>D</a:t>
+                      </a:r>
+                      <a:r>
+                        <a:rPr lang="en-US" sz="1800" baseline="-25000" dirty="0" err="1">
+                          <a:effectLst/>
+                        </a:rPr>
+                        <a:t>3</a:t>
+                      </a:r>
+                      <a:endParaRPr lang="en-US" sz="1800" dirty="0">
+                        <a:effectLst/>
+                        <a:latin typeface="Consolas" panose="020B0609020204030204" pitchFamily="49" charset="0"/>
+                        <a:ea typeface="宋体"/>
+                        <a:cs typeface="Consolas" panose="020B0609020204030204" pitchFamily="49" charset="0"/>
+                      </a:endParaRPr>
+                    </a:p>
+                  </a:txBody>
+                  <a:tcPr marL="68580" marR="68580" marT="0" marB="0" anchor="ctr"/>
+                </a:tc>
+                <a:tc>
+                  <a:txBody>
+                    <a:bodyPr/>
+                    <a:lstStyle/>
+                    <a:p>
+                      <a:pPr marL="0" marR="0" algn="ctr">
+                        <a:spcBef>
+                          <a:spcPts val="0"/>
+                        </a:spcBef>
+                        <a:spcAft>
+                          <a:spcPts val="0"/>
+                        </a:spcAft>
+                      </a:pPr>
+                      <a:r>
+                        <a:rPr lang="en-US" sz="1800">
+                          <a:effectLst/>
+                        </a:rPr>
+                        <a:t>D</a:t>
+                      </a:r>
+                      <a:r>
+                        <a:rPr lang="en-US" sz="1800" baseline="-25000">
+                          <a:effectLst/>
+                        </a:rPr>
+                        <a:t>2</a:t>
+                      </a:r>
+                      <a:endParaRPr lang="en-US" sz="1800">
+                        <a:effectLst/>
+                        <a:latin typeface="Consolas" panose="020B0609020204030204" pitchFamily="49" charset="0"/>
+                        <a:ea typeface="宋体"/>
+                        <a:cs typeface="Consolas" panose="020B0609020204030204" pitchFamily="49" charset="0"/>
+                      </a:endParaRPr>
+                    </a:p>
+                  </a:txBody>
+                  <a:tcPr marL="68580" marR="68580" marT="0" marB="0" anchor="ctr"/>
+                </a:tc>
+                <a:tc>
+                  <a:txBody>
+                    <a:bodyPr/>
+                    <a:lstStyle/>
+                    <a:p>
+                      <a:pPr marL="0" marR="0" algn="ctr">
+                        <a:spcBef>
+                          <a:spcPts val="0"/>
+                        </a:spcBef>
+                        <a:spcAft>
+                          <a:spcPts val="0"/>
+                        </a:spcAft>
+                      </a:pPr>
+                      <a:r>
+                        <a:rPr lang="en-US" sz="1800">
+                          <a:effectLst/>
+                        </a:rPr>
+                        <a:t>D</a:t>
+                      </a:r>
+                      <a:r>
+                        <a:rPr lang="en-US" sz="1800" baseline="-25000">
+                          <a:effectLst/>
+                        </a:rPr>
+                        <a:t>1</a:t>
+                      </a:r>
+                      <a:endParaRPr lang="en-US" sz="1800">
+                        <a:effectLst/>
+                        <a:latin typeface="Consolas" panose="020B0609020204030204" pitchFamily="49" charset="0"/>
+                        <a:ea typeface="宋体"/>
+                        <a:cs typeface="Consolas" panose="020B0609020204030204" pitchFamily="49" charset="0"/>
+                      </a:endParaRPr>
+                    </a:p>
+                  </a:txBody>
+                  <a:tcPr marL="68580" marR="68580" marT="0" marB="0" anchor="ctr"/>
+                </a:tc>
+                <a:extLst>
+                  <a:ext uri="{0D108BD9-81ED-4DB2-BD59-A6C34878D82A}">
+                    <a16:rowId xmlns:a16="http://schemas.microsoft.com/office/drawing/2014/main" val="10002"/>
+                  </a:ext>
+                </a:extLst>
+              </a:tr>
+              <a:tr h="409146">
+                <a:tc>
+                  <a:txBody>
+                    <a:bodyPr/>
+                    <a:lstStyle/>
+                    <a:p>
+                      <a:pPr marL="0" marR="0" algn="ctr">
+                        <a:spcBef>
+                          <a:spcPts val="0"/>
+                        </a:spcBef>
+                        <a:spcAft>
+                          <a:spcPts val="0"/>
+                        </a:spcAft>
+                      </a:pPr>
+                      <a:r>
+                        <a:rPr lang="en-US" sz="1800" b="1">
+                          <a:effectLst/>
+                          <a:latin typeface="Consolas" panose="020B0609020204030204" pitchFamily="49" charset="0"/>
+                          <a:cs typeface="Consolas" panose="020B0609020204030204" pitchFamily="49" charset="0"/>
+                        </a:rPr>
+                        <a:t>1</a:t>
+                      </a:r>
+                      <a:endParaRPr lang="en-US" sz="1800" b="1">
+                        <a:effectLst/>
+                        <a:latin typeface="Consolas" panose="020B0609020204030204" pitchFamily="49" charset="0"/>
+                        <a:ea typeface="宋体"/>
+                        <a:cs typeface="Consolas" panose="020B0609020204030204" pitchFamily="49" charset="0"/>
+                      </a:endParaRPr>
+                    </a:p>
+                  </a:txBody>
+                  <a:tcPr marL="68580" marR="68580" marT="0" marB="0" anchor="ctr"/>
+                </a:tc>
+                <a:tc>
+                  <a:txBody>
+                    <a:bodyPr/>
+                    <a:lstStyle/>
+                    <a:p>
+                      <a:pPr marL="0" marR="0" algn="ctr">
+                        <a:spcBef>
+                          <a:spcPts val="0"/>
+                        </a:spcBef>
+                        <a:spcAft>
+                          <a:spcPts val="0"/>
+                        </a:spcAft>
+                      </a:pPr>
+                      <a:r>
+                        <a:rPr lang="en-US" sz="1800" b="1" dirty="0">
+                          <a:effectLst/>
+                          <a:latin typeface="Consolas" panose="020B0609020204030204" pitchFamily="49" charset="0"/>
+                          <a:cs typeface="Consolas" panose="020B0609020204030204" pitchFamily="49" charset="0"/>
+                        </a:rPr>
+                        <a:t>0</a:t>
+                      </a:r>
+                      <a:endParaRPr lang="en-US" sz="1800" b="1" dirty="0">
+                        <a:effectLst/>
+                        <a:latin typeface="Consolas" panose="020B0609020204030204" pitchFamily="49" charset="0"/>
+                        <a:ea typeface="宋体"/>
+                        <a:cs typeface="Consolas" panose="020B0609020204030204" pitchFamily="49" charset="0"/>
+                      </a:endParaRPr>
+                    </a:p>
+                  </a:txBody>
+                  <a:tcPr marL="68580" marR="68580" marT="0" marB="0" anchor="ctr">
+                    <a:lnR w="19050" cap="flat" cmpd="sng" algn="ctr">
+                      <a:solidFill>
+                        <a:schemeClr val="tx1"/>
+                      </a:solidFill>
+                      <a:prstDash val="solid"/>
+                      <a:round/>
+                      <a:headEnd type="none" w="med" len="med"/>
+                      <a:tailEnd type="none" w="med" len="med"/>
+                    </a:lnR>
+                  </a:tcPr>
+                </a:tc>
+                <a:tc>
+                  <a:txBody>
+                    <a:bodyPr/>
+                    <a:lstStyle/>
+                    <a:p>
+                      <a:pPr marL="0" marR="0" algn="ctr">
+                        <a:spcBef>
+                          <a:spcPts val="0"/>
+                        </a:spcBef>
+                        <a:spcAft>
+                          <a:spcPts val="0"/>
+                        </a:spcAft>
+                      </a:pPr>
+                      <a:r>
+                        <a:rPr lang="en-US" sz="1800">
+                          <a:effectLst/>
+                        </a:rPr>
+                        <a:t>D</a:t>
+                      </a:r>
+                      <a:r>
+                        <a:rPr lang="en-US" sz="1800" baseline="-25000">
+                          <a:effectLst/>
+                        </a:rPr>
+                        <a:t>1</a:t>
+                      </a:r>
+                      <a:endParaRPr lang="en-US" sz="1800">
+                        <a:effectLst/>
+                        <a:latin typeface="Consolas" panose="020B0609020204030204" pitchFamily="49" charset="0"/>
+                        <a:ea typeface="宋体"/>
+                        <a:cs typeface="Consolas" panose="020B0609020204030204" pitchFamily="49" charset="0"/>
+                      </a:endParaRPr>
+                    </a:p>
+                  </a:txBody>
+                  <a:tcPr marL="68580" marR="68580" marT="0" marB="0" anchor="ctr">
+                    <a:lnL w="19050" cap="flat" cmpd="sng" algn="ctr">
+                      <a:solidFill>
+                        <a:schemeClr val="tx1"/>
+                      </a:solidFill>
+                      <a:prstDash val="solid"/>
+                      <a:round/>
+                      <a:headEnd type="none" w="med" len="med"/>
+                      <a:tailEnd type="none" w="med" len="med"/>
+                    </a:lnL>
+                  </a:tcPr>
+                </a:tc>
+                <a:tc>
+                  <a:txBody>
+                    <a:bodyPr/>
+                    <a:lstStyle/>
+                    <a:p>
+                      <a:pPr marL="0" marR="0" algn="ctr">
+                        <a:spcBef>
+                          <a:spcPts val="0"/>
+                        </a:spcBef>
+                        <a:spcAft>
+                          <a:spcPts val="0"/>
+                        </a:spcAft>
+                      </a:pPr>
+                      <a:r>
+                        <a:rPr lang="en-US" sz="1800" dirty="0" err="1">
+                          <a:effectLst/>
+                        </a:rPr>
+                        <a:t>D</a:t>
+                      </a:r>
+                      <a:r>
+                        <a:rPr lang="en-US" sz="1800" baseline="-25000" dirty="0" err="1">
+                          <a:effectLst/>
+                        </a:rPr>
+                        <a:t>0</a:t>
+                      </a:r>
+                      <a:endParaRPr lang="en-US" sz="1800" dirty="0">
+                        <a:effectLst/>
+                        <a:latin typeface="Consolas" panose="020B0609020204030204" pitchFamily="49" charset="0"/>
+                        <a:ea typeface="宋体"/>
+                        <a:cs typeface="Consolas" panose="020B0609020204030204" pitchFamily="49" charset="0"/>
+                      </a:endParaRPr>
+                    </a:p>
+                  </a:txBody>
+                  <a:tcPr marL="68580" marR="68580" marT="0" marB="0" anchor="ctr"/>
+                </a:tc>
+                <a:tc>
+                  <a:txBody>
+                    <a:bodyPr/>
+                    <a:lstStyle/>
+                    <a:p>
+                      <a:pPr marL="0" marR="0" algn="ctr">
+                        <a:spcBef>
+                          <a:spcPts val="0"/>
+                        </a:spcBef>
+                        <a:spcAft>
+                          <a:spcPts val="0"/>
+                        </a:spcAft>
+                      </a:pPr>
+                      <a:r>
+                        <a:rPr lang="en-US" sz="1800" dirty="0" err="1">
+                          <a:effectLst/>
+                        </a:rPr>
+                        <a:t>D</a:t>
+                      </a:r>
+                      <a:r>
+                        <a:rPr lang="en-US" sz="1800" baseline="-25000" dirty="0" err="1">
+                          <a:effectLst/>
+                        </a:rPr>
+                        <a:t>3</a:t>
+                      </a:r>
+                      <a:endParaRPr lang="en-US" sz="1800" dirty="0">
+                        <a:effectLst/>
+                        <a:latin typeface="Consolas" panose="020B0609020204030204" pitchFamily="49" charset="0"/>
+                        <a:ea typeface="宋体"/>
+                        <a:cs typeface="Consolas" panose="020B0609020204030204" pitchFamily="49" charset="0"/>
+                      </a:endParaRPr>
+                    </a:p>
+                  </a:txBody>
+                  <a:tcPr marL="68580" marR="68580" marT="0" marB="0" anchor="ctr"/>
+                </a:tc>
+                <a:tc>
+                  <a:txBody>
+                    <a:bodyPr/>
+                    <a:lstStyle/>
+                    <a:p>
+                      <a:pPr marL="0" marR="0" algn="ctr">
+                        <a:spcBef>
+                          <a:spcPts val="0"/>
+                        </a:spcBef>
+                        <a:spcAft>
+                          <a:spcPts val="0"/>
+                        </a:spcAft>
+                      </a:pPr>
+                      <a:r>
+                        <a:rPr lang="en-US" sz="1800">
+                          <a:effectLst/>
+                        </a:rPr>
+                        <a:t>D</a:t>
+                      </a:r>
+                      <a:r>
+                        <a:rPr lang="en-US" sz="1800" baseline="-25000">
+                          <a:effectLst/>
+                        </a:rPr>
+                        <a:t>2</a:t>
+                      </a:r>
+                      <a:endParaRPr lang="en-US" sz="1800">
+                        <a:effectLst/>
+                        <a:latin typeface="Consolas" panose="020B0609020204030204" pitchFamily="49" charset="0"/>
+                        <a:ea typeface="宋体"/>
+                        <a:cs typeface="Consolas" panose="020B0609020204030204" pitchFamily="49" charset="0"/>
+                      </a:endParaRPr>
+                    </a:p>
+                  </a:txBody>
+                  <a:tcPr marL="68580" marR="68580" marT="0" marB="0" anchor="ctr"/>
+                </a:tc>
+                <a:extLst>
+                  <a:ext uri="{0D108BD9-81ED-4DB2-BD59-A6C34878D82A}">
+                    <a16:rowId xmlns:a16="http://schemas.microsoft.com/office/drawing/2014/main" val="10003"/>
+                  </a:ext>
+                </a:extLst>
+              </a:tr>
+              <a:tr h="409146">
+                <a:tc>
+                  <a:txBody>
+                    <a:bodyPr/>
+                    <a:lstStyle/>
+                    <a:p>
+                      <a:pPr marL="0" marR="0" algn="ctr">
+                        <a:spcBef>
+                          <a:spcPts val="0"/>
+                        </a:spcBef>
+                        <a:spcAft>
+                          <a:spcPts val="0"/>
+                        </a:spcAft>
+                      </a:pPr>
+                      <a:r>
+                        <a:rPr lang="en-US" sz="1800" b="1" dirty="0">
+                          <a:solidFill>
+                            <a:srgbClr val="FF0000"/>
+                          </a:solidFill>
+                          <a:effectLst/>
+                          <a:latin typeface="Consolas" panose="020B0609020204030204" pitchFamily="49" charset="0"/>
+                          <a:cs typeface="Consolas" panose="020B0609020204030204" pitchFamily="49" charset="0"/>
+                        </a:rPr>
+                        <a:t>1</a:t>
+                      </a:r>
+                      <a:endParaRPr lang="en-US" sz="1800" b="1" dirty="0">
+                        <a:solidFill>
+                          <a:srgbClr val="FF0000"/>
+                        </a:solidFill>
+                        <a:effectLst/>
+                        <a:latin typeface="Consolas" panose="020B0609020204030204" pitchFamily="49" charset="0"/>
+                        <a:ea typeface="宋体"/>
+                        <a:cs typeface="Consolas" panose="020B0609020204030204" pitchFamily="49" charset="0"/>
+                      </a:endParaRPr>
+                    </a:p>
+                  </a:txBody>
+                  <a:tcPr marL="68580" marR="68580" marT="0" marB="0" anchor="ctr"/>
+                </a:tc>
+                <a:tc>
+                  <a:txBody>
+                    <a:bodyPr/>
+                    <a:lstStyle/>
+                    <a:p>
+                      <a:pPr marL="0" marR="0" algn="ctr">
+                        <a:spcBef>
+                          <a:spcPts val="0"/>
+                        </a:spcBef>
+                        <a:spcAft>
+                          <a:spcPts val="0"/>
+                        </a:spcAft>
+                      </a:pPr>
+                      <a:r>
+                        <a:rPr lang="en-US" sz="1800" b="1" dirty="0">
+                          <a:solidFill>
+                            <a:srgbClr val="FF0000"/>
+                          </a:solidFill>
+                          <a:effectLst/>
+                          <a:latin typeface="Consolas" panose="020B0609020204030204" pitchFamily="49" charset="0"/>
+                          <a:cs typeface="Consolas" panose="020B0609020204030204" pitchFamily="49" charset="0"/>
+                        </a:rPr>
+                        <a:t>1</a:t>
+                      </a:r>
+                      <a:endParaRPr lang="en-US" sz="1800" b="1" dirty="0">
+                        <a:solidFill>
+                          <a:srgbClr val="FF0000"/>
+                        </a:solidFill>
+                        <a:effectLst/>
+                        <a:latin typeface="Consolas" panose="020B0609020204030204" pitchFamily="49" charset="0"/>
+                        <a:ea typeface="宋体"/>
+                        <a:cs typeface="Consolas" panose="020B0609020204030204" pitchFamily="49" charset="0"/>
+                      </a:endParaRPr>
+                    </a:p>
+                  </a:txBody>
+                  <a:tcPr marL="68580" marR="68580" marT="0" marB="0" anchor="ctr">
+                    <a:lnR w="19050" cap="flat" cmpd="sng" algn="ctr">
+                      <a:solidFill>
+                        <a:schemeClr val="tx1"/>
+                      </a:solidFill>
+                      <a:prstDash val="solid"/>
+                      <a:round/>
+                      <a:headEnd type="none" w="med" len="med"/>
+                      <a:tailEnd type="none" w="med" len="med"/>
+                    </a:lnR>
+                  </a:tcPr>
+                </a:tc>
+                <a:tc>
+                  <a:txBody>
+                    <a:bodyPr/>
+                    <a:lstStyle/>
+                    <a:p>
+                      <a:pPr marL="0" marR="0" algn="ctr">
+                        <a:spcBef>
+                          <a:spcPts val="0"/>
+                        </a:spcBef>
+                        <a:spcAft>
+                          <a:spcPts val="0"/>
+                        </a:spcAft>
+                      </a:pPr>
+                      <a:r>
+                        <a:rPr lang="en-US" sz="1800" dirty="0" err="1">
+                          <a:solidFill>
+                            <a:srgbClr val="FF0000"/>
+                          </a:solidFill>
+                          <a:effectLst/>
+                        </a:rPr>
+                        <a:t>D</a:t>
+                      </a:r>
+                      <a:r>
+                        <a:rPr lang="en-US" sz="1800" baseline="-25000" dirty="0" err="1">
+                          <a:solidFill>
+                            <a:srgbClr val="FF0000"/>
+                          </a:solidFill>
+                          <a:effectLst/>
+                        </a:rPr>
+                        <a:t>2</a:t>
+                      </a:r>
+                      <a:endParaRPr lang="en-US" sz="1800" dirty="0">
+                        <a:solidFill>
+                          <a:srgbClr val="FF0000"/>
+                        </a:solidFill>
+                        <a:effectLst/>
+                        <a:latin typeface="Consolas" panose="020B0609020204030204" pitchFamily="49" charset="0"/>
+                        <a:ea typeface="宋体"/>
+                        <a:cs typeface="Consolas" panose="020B0609020204030204" pitchFamily="49" charset="0"/>
+                      </a:endParaRPr>
+                    </a:p>
+                  </a:txBody>
+                  <a:tcPr marL="68580" marR="68580" marT="0" marB="0" anchor="ctr">
+                    <a:lnL w="19050" cap="flat" cmpd="sng" algn="ctr">
+                      <a:solidFill>
+                        <a:schemeClr val="tx1"/>
+                      </a:solidFill>
+                      <a:prstDash val="solid"/>
+                      <a:round/>
+                      <a:headEnd type="none" w="med" len="med"/>
+                      <a:tailEnd type="none" w="med" len="med"/>
+                    </a:lnL>
+                  </a:tcPr>
+                </a:tc>
+                <a:tc>
+                  <a:txBody>
+                    <a:bodyPr/>
+                    <a:lstStyle/>
+                    <a:p>
+                      <a:pPr marL="0" marR="0" algn="ctr">
+                        <a:spcBef>
+                          <a:spcPts val="0"/>
+                        </a:spcBef>
+                        <a:spcAft>
+                          <a:spcPts val="0"/>
+                        </a:spcAft>
+                      </a:pPr>
+                      <a:r>
+                        <a:rPr lang="en-US" sz="1800" dirty="0" err="1">
+                          <a:solidFill>
+                            <a:srgbClr val="FF0000"/>
+                          </a:solidFill>
+                          <a:effectLst/>
+                        </a:rPr>
+                        <a:t>D</a:t>
+                      </a:r>
+                      <a:r>
+                        <a:rPr lang="en-US" sz="1800" baseline="-25000" dirty="0" err="1">
+                          <a:solidFill>
+                            <a:srgbClr val="FF0000"/>
+                          </a:solidFill>
+                          <a:effectLst/>
+                        </a:rPr>
+                        <a:t>1</a:t>
+                      </a:r>
+                      <a:endParaRPr lang="en-US" sz="1800" dirty="0">
+                        <a:solidFill>
+                          <a:srgbClr val="FF0000"/>
+                        </a:solidFill>
+                        <a:effectLst/>
+                        <a:latin typeface="Consolas" panose="020B0609020204030204" pitchFamily="49" charset="0"/>
+                        <a:ea typeface="宋体"/>
+                        <a:cs typeface="Consolas" panose="020B0609020204030204" pitchFamily="49" charset="0"/>
+                      </a:endParaRPr>
+                    </a:p>
+                  </a:txBody>
+                  <a:tcPr marL="68580" marR="68580" marT="0" marB="0" anchor="ctr"/>
+                </a:tc>
+                <a:tc>
+                  <a:txBody>
+                    <a:bodyPr/>
+                    <a:lstStyle/>
+                    <a:p>
+                      <a:pPr marL="0" marR="0" algn="ctr">
+                        <a:spcBef>
+                          <a:spcPts val="0"/>
+                        </a:spcBef>
+                        <a:spcAft>
+                          <a:spcPts val="0"/>
+                        </a:spcAft>
+                      </a:pPr>
+                      <a:r>
+                        <a:rPr lang="en-US" sz="1800" dirty="0" err="1">
+                          <a:solidFill>
+                            <a:srgbClr val="FF0000"/>
+                          </a:solidFill>
+                          <a:effectLst/>
+                        </a:rPr>
+                        <a:t>D</a:t>
+                      </a:r>
+                      <a:r>
+                        <a:rPr lang="en-US" sz="1800" baseline="-25000" dirty="0" err="1">
+                          <a:solidFill>
+                            <a:srgbClr val="FF0000"/>
+                          </a:solidFill>
+                          <a:effectLst/>
+                        </a:rPr>
+                        <a:t>0</a:t>
+                      </a:r>
+                      <a:endParaRPr lang="en-US" sz="1800" dirty="0">
+                        <a:solidFill>
+                          <a:srgbClr val="FF0000"/>
+                        </a:solidFill>
+                        <a:effectLst/>
+                        <a:latin typeface="Consolas" panose="020B0609020204030204" pitchFamily="49" charset="0"/>
+                        <a:ea typeface="宋体"/>
+                        <a:cs typeface="Consolas" panose="020B0609020204030204" pitchFamily="49" charset="0"/>
+                      </a:endParaRPr>
+                    </a:p>
+                  </a:txBody>
+                  <a:tcPr marL="68580" marR="68580" marT="0" marB="0" anchor="ctr"/>
+                </a:tc>
+                <a:tc>
+                  <a:txBody>
+                    <a:bodyPr/>
+                    <a:lstStyle/>
+                    <a:p>
+                      <a:pPr marL="0" marR="0" algn="ctr">
+                        <a:spcBef>
+                          <a:spcPts val="0"/>
+                        </a:spcBef>
+                        <a:spcAft>
+                          <a:spcPts val="0"/>
+                        </a:spcAft>
+                      </a:pPr>
+                      <a:r>
+                        <a:rPr lang="en-US" sz="1800" dirty="0" err="1">
+                          <a:solidFill>
+                            <a:srgbClr val="FF0000"/>
+                          </a:solidFill>
+                          <a:effectLst/>
+                        </a:rPr>
+                        <a:t>D</a:t>
+                      </a:r>
+                      <a:r>
+                        <a:rPr lang="en-US" sz="1800" baseline="-25000" dirty="0" err="1">
+                          <a:solidFill>
+                            <a:srgbClr val="FF0000"/>
+                          </a:solidFill>
+                          <a:effectLst/>
+                        </a:rPr>
+                        <a:t>3</a:t>
+                      </a:r>
+                      <a:endParaRPr lang="en-US" sz="1800" dirty="0">
+                        <a:solidFill>
+                          <a:srgbClr val="FF0000"/>
+                        </a:solidFill>
+                        <a:effectLst/>
+                        <a:latin typeface="Consolas" panose="020B0609020204030204" pitchFamily="49" charset="0"/>
+                        <a:ea typeface="宋体"/>
+                        <a:cs typeface="Consolas" panose="020B0609020204030204" pitchFamily="49" charset="0"/>
+                      </a:endParaRPr>
+                    </a:p>
+                  </a:txBody>
+                  <a:tcPr marL="68580" marR="68580" marT="0" marB="0" anchor="ctr"/>
+                </a:tc>
+                <a:extLst>
+                  <a:ext uri="{0D108BD9-81ED-4DB2-BD59-A6C34878D82A}">
+                    <a16:rowId xmlns:a16="http://schemas.microsoft.com/office/drawing/2014/main" val="10004"/>
+                  </a:ext>
+                </a:extLst>
+              </a:tr>
+            </a:tbl>
+          </a:graphicData>
+        </a:graphic>
+      </p:graphicFrame>
+      <p:sp>
+        <p:nvSpPr>
+          <p:cNvPr id="8" name="Rectangle 7"/>
+          <p:cNvSpPr/>
+          <p:nvPr/>
+        </p:nvSpPr>
+        <p:spPr>
+          <a:xfrm>
+            <a:off x="457200" y="1371600"/>
+            <a:ext cx="8153400" cy="369332"/>
+          </a:xfrm>
+          <a:prstGeom prst="rect">
+            <a:avLst/>
+          </a:prstGeom>
+        </p:spPr>
+        <p:txBody>
+          <a:bodyPr wrap="square">
+            <a:spAutoFit/>
+          </a:bodyPr>
+          <a:lstStyle/>
+          <a:p>
             <a:r>
               <a:rPr lang="en-US" dirty="0">
                 <a:solidFill>
-                  <a:schemeClr val="bg1">
-                    <a:lumMod val="50000"/>
-                  </a:schemeClr>
+                  <a:srgbClr val="C00000"/>
+                </a:solidFill>
+              </a:rPr>
+              <a:t>Example:  </a:t>
+            </a:r>
+            <a:r>
+              <a:rPr lang="en-US" dirty="0" err="1">
+                <a:solidFill>
+                  <a:srgbClr val="C00000"/>
                 </a:solidFill>
                 <a:latin typeface="Consolas" panose="020B0609020204030204" pitchFamily="49" charset="0"/>
+                <a:cs typeface="Consolas" panose="020B0609020204030204" pitchFamily="49" charset="0"/>
               </a:rPr>
-              <a:t>; 32-bit instruction</a:t>
-            </a:r>
-          </a:p>
-          <a:p>
-            <a:r>
-              <a:rPr lang="en-US" dirty="0">
+              <a:t>S</a:t>
+            </a:r>
+            <a:r>
+              <a:rPr lang="en-US" baseline="-25000" dirty="0" err="1">
+                <a:solidFill>
+                  <a:srgbClr val="C00000"/>
+                </a:solidFill>
                 <a:latin typeface="Consolas" panose="020B0609020204030204" pitchFamily="49" charset="0"/>
+                <a:cs typeface="Consolas" panose="020B0609020204030204" pitchFamily="49" charset="0"/>
               </a:rPr>
-              <a:t>       ADR r4,start    </a:t>
+              <a:t>1</a:t>
+            </a:r>
+            <a:r>
+              <a:rPr lang="en-US" dirty="0" err="1">
+                <a:solidFill>
+                  <a:srgbClr val="C00000"/>
+                </a:solidFill>
+                <a:latin typeface="Consolas" panose="020B0609020204030204" pitchFamily="49" charset="0"/>
+                <a:cs typeface="Consolas" panose="020B0609020204030204" pitchFamily="49" charset="0"/>
+              </a:rPr>
+              <a:t>S</a:t>
+            </a:r>
+            <a:r>
+              <a:rPr lang="en-US" baseline="-25000" dirty="0" err="1">
+                <a:solidFill>
+                  <a:srgbClr val="C00000"/>
+                </a:solidFill>
+                <a:latin typeface="Consolas" panose="020B0609020204030204" pitchFamily="49" charset="0"/>
+                <a:cs typeface="Consolas" panose="020B0609020204030204" pitchFamily="49" charset="0"/>
+              </a:rPr>
+              <a:t>0</a:t>
             </a:r>
             <a:r>
               <a:rPr lang="en-US" dirty="0">
                 <a:solidFill>
-                  <a:schemeClr val="bg1">
-                    <a:lumMod val="50000"/>
-                  </a:schemeClr>
+                  <a:srgbClr val="C00000"/>
                 </a:solidFill>
                 <a:latin typeface="Consolas" panose="020B0609020204030204" pitchFamily="49" charset="0"/>
+                <a:cs typeface="Consolas" panose="020B0609020204030204" pitchFamily="49" charset="0"/>
               </a:rPr>
-              <a:t>; 32-bit instruction</a:t>
-            </a:r>
-          </a:p>
-          <a:p>
-            <a:r>
-              <a:rPr lang="en-US" dirty="0">
-                <a:latin typeface="Consolas" panose="020B0609020204030204" pitchFamily="49" charset="0"/>
-              </a:rPr>
-              <a:t>                       </a:t>
-            </a:r>
-            <a:r>
-              <a:rPr lang="en-US" dirty="0">
-                <a:solidFill>
-                  <a:schemeClr val="bg1">
-                    <a:lumMod val="50000"/>
-                  </a:schemeClr>
-                </a:solidFill>
-                <a:latin typeface="Consolas" panose="020B0609020204030204" pitchFamily="49" charset="0"/>
-              </a:rPr>
-              <a:t>; =&gt; </a:t>
-            </a:r>
-            <a:r>
-              <a:rPr lang="en-US" dirty="0">
-                <a:solidFill>
-                  <a:srgbClr val="0041FF"/>
-                </a:solidFill>
-                <a:latin typeface="Consolas" panose="020B0609020204030204" pitchFamily="49" charset="0"/>
-              </a:rPr>
-              <a:t>SUB r4,pc,#0xc</a:t>
+              <a:t> = 11</a:t>
             </a:r>
           </a:p>
         </p:txBody>
       </p:sp>
+      <p:pic>
+        <p:nvPicPr>
+          <p:cNvPr id="7" name="Picture 6"/>
+          <p:cNvPicPr>
+            <a:picLocks noChangeAspect="1"/>
+          </p:cNvPicPr>
+          <p:nvPr/>
+        </p:nvPicPr>
+        <p:blipFill>
+          <a:blip r:embed="rId2" cstate="print">
+            <a:extLst>
+              <a:ext uri="{28A0092B-C50C-407E-A947-70E740481C1C}">
+                <a14:useLocalDpi xmlns:a14="http://schemas.microsoft.com/office/drawing/2010/main" val="0"/>
+              </a:ext>
+            </a:extLst>
+          </a:blip>
+          <a:stretch>
+            <a:fillRect/>
+          </a:stretch>
+        </p:blipFill>
+        <p:spPr>
+          <a:xfrm>
+            <a:off x="256021" y="2179314"/>
+            <a:ext cx="5611379" cy="2773686"/>
+          </a:xfrm>
+          <a:prstGeom prst="rect">
+            <a:avLst/>
+          </a:prstGeom>
+        </p:spPr>
+      </p:pic>
     </p:spTree>
     <p:extLst>
       <p:ext uri="{BB962C8B-B14F-4D97-AF65-F5344CB8AC3E}">
-        <p14:creationId xmlns:p14="http://schemas.microsoft.com/office/powerpoint/2010/main" val="3686948551"/>
+        <p14:creationId xmlns:p14="http://schemas.microsoft.com/office/powerpoint/2010/main" val="2177597633"/>
       </p:ext>
     </p:extLst>
   </p:cSld>
@@ -6696,8 +8184,14 @@
           <a:lstStyle/>
           <a:p>
             <a:r>
+              <a:rPr lang="en-US" b="1" dirty="0">
+                <a:latin typeface="Consolas" panose="020B0609020204030204" pitchFamily="49" charset="0"/>
+              </a:rPr>
+              <a:t>ADR</a:t>
+            </a:r>
+            <a:r>
               <a:rPr lang="en-US" dirty="0"/>
-              <a:t>64-bit Logic Shift Left</a:t>
+              <a:t> Pseudo-instruction</a:t>
             </a:r>
           </a:p>
         </p:txBody>
@@ -6726,34 +8220,140 @@
           </a:p>
         </p:txBody>
       </p:sp>
-      <p:pic>
-        <p:nvPicPr>
-          <p:cNvPr id="4" name="Picture 3"/>
-          <p:cNvPicPr>
-            <a:picLocks noChangeAspect="1"/>
-          </p:cNvPicPr>
+      <p:sp>
+        <p:nvSpPr>
+          <p:cNvPr id="4" name="Content Placeholder 3"/>
+          <p:cNvSpPr>
+            <a:spLocks noGrp="1"/>
+          </p:cNvSpPr>
+          <p:nvPr>
+            <p:ph sz="quarter" idx="1"/>
+          </p:nvPr>
+        </p:nvSpPr>
+        <p:spPr/>
+        <p:txBody>
+          <a:bodyPr/>
+          <a:lstStyle/>
+          <a:p>
+            <a:r>
+              <a:rPr lang="en-US" b="1" dirty="0">
+                <a:latin typeface="Consolas" panose="020B0609020204030204" pitchFamily="49" charset="0"/>
+              </a:rPr>
+              <a:t>ADR</a:t>
+            </a:r>
+            <a:r>
+              <a:rPr lang="en-US" dirty="0"/>
+              <a:t>: loads a program-relative or register-relative address into a register</a:t>
+            </a:r>
+          </a:p>
+        </p:txBody>
+      </p:sp>
+      <p:sp>
+        <p:nvSpPr>
+          <p:cNvPr id="5" name="Rectangle 4"/>
+          <p:cNvSpPr/>
           <p:nvPr/>
-        </p:nvPicPr>
-        <p:blipFill>
-          <a:blip r:embed="rId2"/>
-          <a:stretch>
-            <a:fillRect/>
-          </a:stretch>
-        </p:blipFill>
+        </p:nvSpPr>
         <p:spPr>
           <a:xfrm>
-            <a:off x="256124" y="3086370"/>
-            <a:ext cx="8631751" cy="685260"/>
+            <a:off x="1524000" y="3124200"/>
+            <a:ext cx="5715000" cy="738664"/>
           </a:xfrm>
           <a:prstGeom prst="rect">
             <a:avLst/>
           </a:prstGeom>
         </p:spPr>
-      </p:pic>
+        <p:style>
+          <a:lnRef idx="2">
+            <a:schemeClr val="accent1"/>
+          </a:lnRef>
+          <a:fillRef idx="1">
+            <a:schemeClr val="lt1"/>
+          </a:fillRef>
+          <a:effectRef idx="0">
+            <a:schemeClr val="accent1"/>
+          </a:effectRef>
+          <a:fontRef idx="minor">
+            <a:schemeClr val="dk1"/>
+          </a:fontRef>
+        </p:style>
+        <p:txBody>
+          <a:bodyPr wrap="square">
+            <a:spAutoFit/>
+          </a:bodyPr>
+          <a:lstStyle/>
+          <a:p>
+            <a:r>
+              <a:rPr lang="en-US" dirty="0">
+                <a:latin typeface="Consolas" panose="020B0609020204030204" pitchFamily="49" charset="0"/>
+              </a:rPr>
+              <a:t>start  MOV r0,#10      </a:t>
+            </a:r>
+            <a:r>
+              <a:rPr lang="en-US" dirty="0">
+                <a:solidFill>
+                  <a:schemeClr val="bg1">
+                    <a:lumMod val="50000"/>
+                  </a:schemeClr>
+                </a:solidFill>
+                <a:latin typeface="Consolas" panose="020B0609020204030204" pitchFamily="49" charset="0"/>
+              </a:rPr>
+              <a:t>; 32-bit instruction</a:t>
+            </a:r>
+          </a:p>
+          <a:p>
+            <a:r>
+              <a:rPr lang="en-US" dirty="0">
+                <a:latin typeface="Consolas" panose="020B0609020204030204" pitchFamily="49" charset="0"/>
+              </a:rPr>
+              <a:t>       ADR r4,start    </a:t>
+            </a:r>
+            <a:r>
+              <a:rPr lang="en-US" dirty="0">
+                <a:solidFill>
+                  <a:schemeClr val="bg1">
+                    <a:lumMod val="50000"/>
+                  </a:schemeClr>
+                </a:solidFill>
+                <a:latin typeface="Consolas" panose="020B0609020204030204" pitchFamily="49" charset="0"/>
+              </a:rPr>
+              <a:t>; 32-bit instruction</a:t>
+            </a:r>
+          </a:p>
+          <a:p>
+            <a:r>
+              <a:rPr lang="en-US" dirty="0">
+                <a:latin typeface="Consolas" panose="020B0609020204030204" pitchFamily="49" charset="0"/>
+              </a:rPr>
+              <a:t>                       </a:t>
+            </a:r>
+            <a:r>
+              <a:rPr lang="en-US" dirty="0">
+                <a:solidFill>
+                  <a:schemeClr val="bg1">
+                    <a:lumMod val="50000"/>
+                  </a:schemeClr>
+                </a:solidFill>
+                <a:latin typeface="Consolas" panose="020B0609020204030204" pitchFamily="49" charset="0"/>
+              </a:rPr>
+              <a:t>; =&gt; </a:t>
+            </a:r>
+            <a:r>
+              <a:rPr lang="en-US" dirty="0">
+                <a:solidFill>
+                  <a:srgbClr val="0041FF"/>
+                </a:solidFill>
+                <a:latin typeface="Consolas" panose="020B0609020204030204" pitchFamily="49" charset="0"/>
+              </a:rPr>
+              <a:t>SUB r4,pc,#0xc</a:t>
+            </a:r>
+          </a:p>
+        </p:txBody>
+      </p:sp>
     </p:spTree>
     <p:extLst>
       <p:ext uri="{BB962C8B-B14F-4D97-AF65-F5344CB8AC3E}">
-        <p14:creationId xmlns:p14="http://schemas.microsoft.com/office/powerpoint/2010/main" val="2714306100"/>
+        <p14:creationId xmlns:p14="http://schemas.microsoft.com/office/powerpoint/2010/main" val="3686948551"/>
       </p:ext>
     </p:extLst>
   </p:cSld>
@@ -6821,6 +8421,106 @@
               <a:rPr kumimoji="0" lang="en-US" smtClean="0"/>
               <a:pPr/>
               <a:t>13</a:t>
+            </a:fld>
+            <a:endParaRPr kumimoji="0" lang="en-US" dirty="0"/>
+          </a:p>
+        </p:txBody>
+      </p:sp>
+      <p:pic>
+        <p:nvPicPr>
+          <p:cNvPr id="4" name="Picture 3"/>
+          <p:cNvPicPr>
+            <a:picLocks noChangeAspect="1"/>
+          </p:cNvPicPr>
+          <p:nvPr/>
+        </p:nvPicPr>
+        <p:blipFill>
+          <a:blip r:embed="rId2"/>
+          <a:stretch>
+            <a:fillRect/>
+          </a:stretch>
+        </p:blipFill>
+        <p:spPr>
+          <a:xfrm>
+            <a:off x="256124" y="3086370"/>
+            <a:ext cx="8631751" cy="685260"/>
+          </a:xfrm>
+          <a:prstGeom prst="rect">
+            <a:avLst/>
+          </a:prstGeom>
+        </p:spPr>
+      </p:pic>
+    </p:spTree>
+    <p:extLst>
+      <p:ext uri="{BB962C8B-B14F-4D97-AF65-F5344CB8AC3E}">
+        <p14:creationId xmlns:p14="http://schemas.microsoft.com/office/powerpoint/2010/main" val="2714306100"/>
+      </p:ext>
+    </p:extLst>
+  </p:cSld>
+  <p:clrMapOvr>
+    <a:masterClrMapping/>
+  </p:clrMapOvr>
+</p:sld>
+</file>
+
+<file path=ppt/slides/slide14.xml><?xml version="1.0" encoding="utf-8"?>
+<p:sld xmlns:a="http://schemas.openxmlformats.org/drawingml/2006/main" xmlns:r="http://schemas.openxmlformats.org/officeDocument/2006/relationships" xmlns:p="http://schemas.openxmlformats.org/presentationml/2006/main">
+  <p:cSld>
+    <p:spTree>
+      <p:nvGrpSpPr>
+        <p:cNvPr id="1" name=""/>
+        <p:cNvGrpSpPr/>
+        <p:nvPr/>
+      </p:nvGrpSpPr>
+      <p:grpSpPr>
+        <a:xfrm>
+          <a:off x="0" y="0"/>
+          <a:ext cx="0" cy="0"/>
+          <a:chOff x="0" y="0"/>
+          <a:chExt cx="0" cy="0"/>
+        </a:xfrm>
+      </p:grpSpPr>
+      <p:sp>
+        <p:nvSpPr>
+          <p:cNvPr id="2" name="Title 1"/>
+          <p:cNvSpPr>
+            <a:spLocks noGrp="1"/>
+          </p:cNvSpPr>
+          <p:nvPr>
+            <p:ph type="title"/>
+          </p:nvPr>
+        </p:nvSpPr>
+        <p:spPr/>
+        <p:txBody>
+          <a:bodyPr/>
+          <a:lstStyle/>
+          <a:p>
+            <a:r>
+              <a:rPr lang="en-US" dirty="0"/>
+              <a:t>64-bit Logic Shift Left</a:t>
+            </a:r>
+          </a:p>
+        </p:txBody>
+      </p:sp>
+      <p:sp>
+        <p:nvSpPr>
+          <p:cNvPr id="3" name="Slide Number Placeholder 2"/>
+          <p:cNvSpPr>
+            <a:spLocks noGrp="1"/>
+          </p:cNvSpPr>
+          <p:nvPr>
+            <p:ph type="sldNum" sz="quarter" idx="12"/>
+          </p:nvPr>
+        </p:nvSpPr>
+        <p:spPr/>
+        <p:txBody>
+          <a:bodyPr/>
+          <a:lstStyle/>
+          <a:p>
+            <a:fld id="{EA7C8D44-3667-46F6-9772-CC52308E2A7F}" type="slidenum">
+              <a:rPr kumimoji="0" lang="en-US" smtClean="0"/>
+              <a:pPr/>
+              <a:t>14</a:t>
             </a:fld>
             <a:endParaRPr kumimoji="0" lang="en-US" dirty="0"/>
           </a:p>
@@ -6922,7 +8622,7 @@
 </p:sld>
 </file>
 
-<file path=ppt/slides/slide14.xml><?xml version="1.0" encoding="utf-8"?>
+<file path=ppt/slides/slide15.xml><?xml version="1.0" encoding="utf-8"?>
 <p:sld xmlns:a="http://schemas.openxmlformats.org/drawingml/2006/main" xmlns:r="http://schemas.openxmlformats.org/officeDocument/2006/relationships" xmlns:p="http://schemas.openxmlformats.org/presentationml/2006/main">
   <p:cSld>
     <p:spTree>
@@ -6979,7 +8679,7 @@
             <a:fld id="{EA7C8D44-3667-46F6-9772-CC52308E2A7F}" type="slidenum">
               <a:rPr kumimoji="0" lang="en-US" smtClean="0"/>
               <a:pPr/>
-              <a:t>14</a:t>
+              <a:t>15</a:t>
             </a:fld>
             <a:endParaRPr kumimoji="0" lang="en-US" dirty="0"/>
           </a:p>
@@ -7022,7 +8722,7 @@
 </p:sld>
 </file>
 
-<file path=ppt/slides/slide15.xml><?xml version="1.0" encoding="utf-8"?>
+<file path=ppt/slides/slide16.xml><?xml version="1.0" encoding="utf-8"?>
 <p:sld xmlns:a="http://schemas.openxmlformats.org/drawingml/2006/main" xmlns:r="http://schemas.openxmlformats.org/officeDocument/2006/relationships" xmlns:p="http://schemas.openxmlformats.org/presentationml/2006/main">
   <p:cSld>
     <p:spTree>
@@ -7079,7 +8779,7 @@
             <a:fld id="{EA7C8D44-3667-46F6-9772-CC52308E2A7F}" type="slidenum">
               <a:rPr kumimoji="0" lang="en-US" smtClean="0"/>
               <a:pPr/>
-              <a:t>15</a:t>
+              <a:t>16</a:t>
             </a:fld>
             <a:endParaRPr kumimoji="0" lang="en-US" dirty="0"/>
           </a:p>
@@ -7181,7 +8881,7 @@
 </p:sld>
 </file>
 
-<file path=ppt/slides/slide16.xml><?xml version="1.0" encoding="utf-8"?>
+<file path=ppt/slides/slide17.xml><?xml version="1.0" encoding="utf-8"?>
 <p:sld xmlns:a="http://schemas.openxmlformats.org/drawingml/2006/main" xmlns:r="http://schemas.openxmlformats.org/officeDocument/2006/relationships" xmlns:p="http://schemas.openxmlformats.org/presentationml/2006/main">
   <p:cSld>
     <p:spTree>
@@ -7257,7 +8957,7 @@
             <a:fld id="{EA7C8D44-3667-46F6-9772-CC52308E2A7F}" type="slidenum">
               <a:rPr kumimoji="0" lang="en-US" smtClean="0"/>
               <a:pPr/>
-              <a:t>16</a:t>
+              <a:t>17</a:t>
             </a:fld>
             <a:endParaRPr kumimoji="0" lang="en-US" dirty="0"/>
           </a:p>
@@ -7846,6 +9546,302 @@
       </p:grpSpPr>
       <p:sp>
         <p:nvSpPr>
+          <p:cNvPr id="2" name="Title 1">
+            <a:extLst>
+              <a:ext uri="{FF2B5EF4-FFF2-40B4-BE49-F238E27FC236}">
+                <a16:creationId xmlns:a16="http://schemas.microsoft.com/office/drawing/2014/main" id="{B973A519-DBC1-4403-2E8B-B6BADD69B0EA}"/>
+              </a:ext>
+            </a:extLst>
+          </p:cNvPr>
+          <p:cNvSpPr>
+            <a:spLocks noGrp="1"/>
+          </p:cNvSpPr>
+          <p:nvPr>
+            <p:ph type="title"/>
+          </p:nvPr>
+        </p:nvSpPr>
+        <p:spPr/>
+        <p:txBody>
+          <a:bodyPr/>
+          <a:lstStyle/>
+          <a:p>
+            <a:r>
+              <a:rPr lang="en-US" dirty="0"/>
+              <a:t>NZCV Flags in </a:t>
+            </a:r>
+            <a:r>
+              <a:rPr lang="en-US" dirty="0" err="1"/>
+              <a:t>xPSR</a:t>
+            </a:r>
+            <a:endParaRPr lang="en-US" dirty="0"/>
+          </a:p>
+        </p:txBody>
+      </p:sp>
+      <p:sp>
+        <p:nvSpPr>
+          <p:cNvPr id="3" name="Slide Number Placeholder 2">
+            <a:extLst>
+              <a:ext uri="{FF2B5EF4-FFF2-40B4-BE49-F238E27FC236}">
+                <a16:creationId xmlns:a16="http://schemas.microsoft.com/office/drawing/2014/main" id="{9062D03D-6F8E-1055-AD43-53C02477180E}"/>
+              </a:ext>
+            </a:extLst>
+          </p:cNvPr>
+          <p:cNvSpPr>
+            <a:spLocks noGrp="1"/>
+          </p:cNvSpPr>
+          <p:nvPr>
+            <p:ph type="sldNum" sz="quarter" idx="12"/>
+          </p:nvPr>
+        </p:nvSpPr>
+        <p:spPr/>
+        <p:txBody>
+          <a:bodyPr/>
+          <a:lstStyle/>
+          <a:p>
+            <a:fld id="{EA7C8D44-3667-46F6-9772-CC52308E2A7F}" type="slidenum">
+              <a:rPr kumimoji="0" lang="en-US" smtClean="0"/>
+              <a:pPr/>
+              <a:t>2</a:t>
+            </a:fld>
+            <a:endParaRPr kumimoji="0" lang="en-US" dirty="0"/>
+          </a:p>
+        </p:txBody>
+      </p:sp>
+      <p:sp>
+        <p:nvSpPr>
+          <p:cNvPr id="4" name="Content Placeholder 3">
+            <a:extLst>
+              <a:ext uri="{FF2B5EF4-FFF2-40B4-BE49-F238E27FC236}">
+                <a16:creationId xmlns:a16="http://schemas.microsoft.com/office/drawing/2014/main" id="{4C571F98-40C3-8109-24BE-24A75ED061CF}"/>
+              </a:ext>
+            </a:extLst>
+          </p:cNvPr>
+          <p:cNvSpPr>
+            <a:spLocks noGrp="1"/>
+          </p:cNvSpPr>
+          <p:nvPr>
+            <p:ph sz="quarter" idx="1"/>
+          </p:nvPr>
+        </p:nvSpPr>
+        <p:spPr>
+          <a:xfrm>
+            <a:off x="457200" y="1219200"/>
+            <a:ext cx="8229600" cy="2910806"/>
+          </a:xfrm>
+        </p:spPr>
+        <p:txBody>
+          <a:bodyPr>
+            <a:normAutofit fontScale="77500" lnSpcReduction="20000"/>
+          </a:bodyPr>
+          <a:lstStyle/>
+          <a:p>
+            <a:r>
+              <a:rPr lang="en-US" sz="2800" b="1" dirty="0"/>
+              <a:t>N</a:t>
+            </a:r>
+            <a:r>
+              <a:rPr lang="en-US" sz="2800" dirty="0"/>
+              <a:t> (negative) – set (1) when a signed result is negative, otherwise cleared (0).</a:t>
+            </a:r>
+          </a:p>
+          <a:p>
+            <a:r>
+              <a:rPr lang="en-US" sz="2800" b="1" dirty="0"/>
+              <a:t>Z</a:t>
+            </a:r>
+            <a:r>
+              <a:rPr lang="en-US" sz="2800" dirty="0"/>
+              <a:t> (zero) – set (1) when a result is 0, otherwise cleared (0).</a:t>
+            </a:r>
+          </a:p>
+          <a:p>
+            <a:r>
+              <a:rPr lang="en-US" sz="2800" b="1" dirty="0"/>
+              <a:t>C</a:t>
+            </a:r>
+            <a:r>
+              <a:rPr lang="en-US" sz="2800" dirty="0"/>
+              <a:t> (carry) – set (1) when an add-based operation produces an overflow, when a subtract-based operation doesn’t require a borrow; when shifting, holds the last bit that’s been shifted out; otherwise cleared (0).</a:t>
+            </a:r>
+          </a:p>
+          <a:p>
+            <a:r>
+              <a:rPr lang="en-US" sz="2800" b="1" dirty="0"/>
+              <a:t>V</a:t>
+            </a:r>
+            <a:r>
+              <a:rPr lang="en-US" sz="2800" dirty="0"/>
+              <a:t> (overflow) – set (1) when an add- or subtract-based operation generates a signed overflow, otherwise cleared (0).</a:t>
+            </a:r>
+          </a:p>
+          <a:p>
+            <a:endParaRPr lang="en-US" dirty="0"/>
+          </a:p>
+        </p:txBody>
+      </p:sp>
+      <p:pic>
+        <p:nvPicPr>
+          <p:cNvPr id="6" name="Picture 5">
+            <a:extLst>
+              <a:ext uri="{FF2B5EF4-FFF2-40B4-BE49-F238E27FC236}">
+                <a16:creationId xmlns:a16="http://schemas.microsoft.com/office/drawing/2014/main" id="{80168489-8B57-7C2E-A280-C2FCA5EA7443}"/>
+              </a:ext>
+            </a:extLst>
+          </p:cNvPr>
+          <p:cNvPicPr>
+            <a:picLocks noChangeAspect="1"/>
+          </p:cNvPicPr>
+          <p:nvPr/>
+        </p:nvPicPr>
+        <p:blipFill>
+          <a:blip r:embed="rId3"/>
+          <a:stretch>
+            <a:fillRect/>
+          </a:stretch>
+        </p:blipFill>
+        <p:spPr>
+          <a:xfrm>
+            <a:off x="1447800" y="4016795"/>
+            <a:ext cx="5940553" cy="2409224"/>
+          </a:xfrm>
+          <a:prstGeom prst="rect">
+            <a:avLst/>
+          </a:prstGeom>
+        </p:spPr>
+      </p:pic>
+      <p:sp>
+        <p:nvSpPr>
+          <p:cNvPr id="5" name="Horizontal Scroll 15">
+            <a:extLst>
+              <a:ext uri="{FF2B5EF4-FFF2-40B4-BE49-F238E27FC236}">
+                <a16:creationId xmlns:a16="http://schemas.microsoft.com/office/drawing/2014/main" id="{785D1948-1665-EC1C-519D-DEF2FD52EF22}"/>
+              </a:ext>
+            </a:extLst>
+          </p:cNvPr>
+          <p:cNvSpPr/>
+          <p:nvPr/>
+        </p:nvSpPr>
+        <p:spPr>
+          <a:xfrm>
+            <a:off x="76200" y="-23210"/>
+            <a:ext cx="1265712" cy="762000"/>
+          </a:xfrm>
+          <a:prstGeom prst="horizontalScroll">
+            <a:avLst/>
+          </a:prstGeom>
+          <a:gradFill rotWithShape="1">
+            <a:gsLst>
+              <a:gs pos="0">
+                <a:srgbClr val="4F81BD">
+                  <a:tint val="50000"/>
+                  <a:satMod val="300000"/>
+                </a:srgbClr>
+              </a:gs>
+              <a:gs pos="35000">
+                <a:srgbClr val="4F81BD">
+                  <a:tint val="37000"/>
+                  <a:satMod val="300000"/>
+                </a:srgbClr>
+              </a:gs>
+              <a:gs pos="100000">
+                <a:srgbClr val="4F81BD">
+                  <a:tint val="15000"/>
+                  <a:satMod val="350000"/>
+                </a:srgbClr>
+              </a:gs>
+            </a:gsLst>
+            <a:lin ang="16200000" scaled="1"/>
+          </a:gradFill>
+          <a:ln w="9525" cap="flat" cmpd="sng" algn="ctr">
+            <a:solidFill>
+              <a:srgbClr val="4F81BD">
+                <a:shade val="95000"/>
+                <a:satMod val="105000"/>
+              </a:srgbClr>
+            </a:solidFill>
+            <a:prstDash val="solid"/>
+          </a:ln>
+          <a:effectLst>
+            <a:outerShdw blurRad="40000" dist="20000" dir="5400000" rotWithShape="0">
+              <a:srgbClr val="000000">
+                <a:alpha val="38000"/>
+              </a:srgbClr>
+            </a:outerShdw>
+          </a:effectLst>
+        </p:spPr>
+        <p:txBody>
+          <a:bodyPr rtlCol="0" anchor="ctr"/>
+          <a:lstStyle/>
+          <a:p>
+            <a:pPr marL="0" marR="0" lvl="0" indent="0" algn="ctr" defTabSz="457200" eaLnBrk="1" fontAlgn="auto" latinLnBrk="0" hangingPunct="1">
+              <a:lnSpc>
+                <a:spcPct val="100000"/>
+              </a:lnSpc>
+              <a:spcBef>
+                <a:spcPts val="0"/>
+              </a:spcBef>
+              <a:spcAft>
+                <a:spcPts val="0"/>
+              </a:spcAft>
+              <a:buClrTx/>
+              <a:buSzTx/>
+              <a:buFontTx/>
+              <a:buNone/>
+              <a:tabLst/>
+              <a:defRPr/>
+            </a:pPr>
+            <a:r>
+              <a:rPr kumimoji="0" lang="en-US" sz="2400" b="0" i="0" u="none" strike="noStrike" kern="0" cap="none" spc="0" normalizeH="0" baseline="0" noProof="0" dirty="0">
+                <a:ln>
+                  <a:noFill/>
+                </a:ln>
+                <a:solidFill>
+                  <a:prstClr val="black"/>
+                </a:solidFill>
+                <a:effectLst/>
+                <a:uLnTx/>
+                <a:uFillTx/>
+                <a:latin typeface="Calibri"/>
+                <a:ea typeface="+mn-ea"/>
+                <a:cs typeface="+mn-cs"/>
+              </a:rPr>
+              <a:t>Review</a:t>
+            </a:r>
+          </a:p>
+        </p:txBody>
+      </p:sp>
+    </p:spTree>
+    <p:extLst>
+      <p:ext uri="{BB962C8B-B14F-4D97-AF65-F5344CB8AC3E}">
+        <p14:creationId xmlns:p14="http://schemas.microsoft.com/office/powerpoint/2010/main" val="2452138352"/>
+      </p:ext>
+    </p:extLst>
+  </p:cSld>
+  <p:clrMapOvr>
+    <a:masterClrMapping/>
+  </p:clrMapOvr>
+</p:sld>
+</file>
+
+<file path=ppt/slides/slide3.xml><?xml version="1.0" encoding="utf-8"?>
+<p:sld xmlns:a="http://schemas.openxmlformats.org/drawingml/2006/main" xmlns:r="http://schemas.openxmlformats.org/officeDocument/2006/relationships" xmlns:p="http://schemas.openxmlformats.org/presentationml/2006/main">
+  <p:cSld>
+    <p:spTree>
+      <p:nvGrpSpPr>
+        <p:cNvPr id="1" name=""/>
+        <p:cNvGrpSpPr/>
+        <p:nvPr/>
+      </p:nvGrpSpPr>
+      <p:grpSpPr>
+        <a:xfrm>
+          <a:off x="0" y="0"/>
+          <a:ext cx="0" cy="0"/>
+          <a:chOff x="0" y="0"/>
+          <a:chExt cx="0" cy="0"/>
+        </a:xfrm>
+      </p:grpSpPr>
+      <p:sp>
+        <p:nvSpPr>
           <p:cNvPr id="16441" name="Rectangle 57"/>
           <p:cNvSpPr>
             <a:spLocks noGrp="1" noChangeArrowheads="1"/>
@@ -8039,7 +10035,7 @@
                 <a:latin typeface="Gill Sans MT"/>
               </a:rPr>
               <a:pPr/>
-              <a:t>2</a:t>
+              <a:t>3</a:t>
             </a:fld>
             <a:endParaRPr lang="en-US">
               <a:solidFill>
@@ -9009,17 +11005,17 @@
           <a:ln/>
           <a:extLst>
             <a:ext uri="{FAA26D3D-D897-4be2-8F04-BA451C77F1D7}">
-              <ma14:placeholderFlag xmlns:ma14="http://schemas.microsoft.com/office/mac/drawingml/2011/main" xmlns="" val="1"/>
+              <ma14:placeholderFlag xmlns="" xmlns:ma14="http://schemas.microsoft.com/office/mac/drawingml/2011/main" val="1"/>
             </a:ext>
             <a:ext uri="{909E8E84-426E-40dd-AFC4-6F175D3DCCD1}">
-              <a14:hiddenFill xmlns:a14="http://schemas.microsoft.com/office/drawing/2010/main" xmlns="">
+              <a14:hiddenFill xmlns="" xmlns:a14="http://schemas.microsoft.com/office/drawing/2010/main">
                 <a:solidFill>
                   <a:schemeClr val="bg1"/>
                 </a:solidFill>
               </a14:hiddenFill>
             </a:ext>
             <a:ext uri="{91240B29-F687-4f45-9708-019B960494DF}">
-              <a14:hiddenLine xmlns:a14="http://schemas.microsoft.com/office/drawing/2010/main" xmlns="" w="12700">
+              <a14:hiddenLine xmlns="" xmlns:a14="http://schemas.microsoft.com/office/drawing/2010/main" w="12700">
                 <a:pattFill prst="narHorz">
                   <a:fgClr>
                     <a:schemeClr val="tx1"/>
@@ -9034,7 +11030,7 @@
               </a14:hiddenLine>
             </a:ext>
             <a:ext uri="{AF507438-7753-43e0-B8FC-AC1667EBCBE1}">
-              <a14:hiddenEffects xmlns:a14="http://schemas.microsoft.com/office/drawing/2010/main" xmlns="">
+              <a14:hiddenEffects xmlns="" xmlns:a14="http://schemas.microsoft.com/office/drawing/2010/main">
                 <a:effectLst>
                   <a:outerShdw blurRad="63500" dist="38099" dir="2700000" algn="ctr" rotWithShape="0">
                     <a:schemeClr val="bg2">
@@ -9477,7 +11473,7 @@
 </p:sld>
 </file>
 
-<file path=ppt/slides/slide3.xml><?xml version="1.0" encoding="utf-8"?>
+<file path=ppt/slides/slide4.xml><?xml version="1.0" encoding="utf-8"?>
 <p:sld xmlns:a="http://schemas.openxmlformats.org/drawingml/2006/main" xmlns:r="http://schemas.openxmlformats.org/officeDocument/2006/relationships" xmlns:p="http://schemas.openxmlformats.org/presentationml/2006/main">
   <p:cSld>
     <p:spTree>
@@ -9546,7 +11542,7 @@
             <a:fld id="{EA7C8D44-3667-46F6-9772-CC52308E2A7F}" type="slidenum">
               <a:rPr kumimoji="0" lang="en-US" smtClean="0"/>
               <a:pPr/>
-              <a:t>3</a:t>
+              <a:t>4</a:t>
             </a:fld>
             <a:endParaRPr kumimoji="0" lang="en-US" dirty="0"/>
           </a:p>
@@ -9600,7 +11596,7 @@
 </p:sld>
 </file>
 
-<file path=ppt/slides/slide4.xml><?xml version="1.0" encoding="utf-8"?>
+<file path=ppt/slides/slide5.xml><?xml version="1.0" encoding="utf-8"?>
 <p:sld xmlns:a="http://schemas.openxmlformats.org/drawingml/2006/main" xmlns:r="http://schemas.openxmlformats.org/officeDocument/2006/relationships" xmlns:p="http://schemas.openxmlformats.org/presentationml/2006/main">
   <p:cSld>
     <p:spTree>
@@ -9657,7 +11653,7 @@
             <a:fld id="{EA7C8D44-3667-46F6-9772-CC52308E2A7F}" type="slidenum">
               <a:rPr kumimoji="0" lang="en-US" smtClean="0"/>
               <a:pPr/>
-              <a:t>4</a:t>
+              <a:t>5</a:t>
             </a:fld>
             <a:endParaRPr kumimoji="0" lang="en-US" dirty="0"/>
           </a:p>
@@ -11483,7 +13479,7 @@
 </p:sld>
 </file>
 
-<file path=ppt/slides/slide5.xml><?xml version="1.0" encoding="utf-8"?>
+<file path=ppt/slides/slide6.xml><?xml version="1.0" encoding="utf-8"?>
 <p:sld xmlns:a="http://schemas.openxmlformats.org/drawingml/2006/main" xmlns:r="http://schemas.openxmlformats.org/officeDocument/2006/relationships" xmlns:p="http://schemas.openxmlformats.org/presentationml/2006/main">
   <p:cSld>
     <p:spTree>
@@ -11540,7 +13536,7 @@
             <a:fld id="{EA7C8D44-3667-46F6-9772-CC52308E2A7F}" type="slidenum">
               <a:rPr kumimoji="0" lang="en-US" smtClean="0"/>
               <a:pPr/>
-              <a:t>5</a:t>
+              <a:t>6</a:t>
             </a:fld>
             <a:endParaRPr kumimoji="0" lang="en-US" dirty="0"/>
           </a:p>
@@ -13328,7 +15324,7 @@
 </p:sld>
 </file>
 
-<file path=ppt/slides/slide6.xml><?xml version="1.0" encoding="utf-8"?>
+<file path=ppt/slides/slide7.xml><?xml version="1.0" encoding="utf-8"?>
 <p:sld xmlns:a="http://schemas.openxmlformats.org/drawingml/2006/main" xmlns:r="http://schemas.openxmlformats.org/officeDocument/2006/relationships" xmlns:p="http://schemas.openxmlformats.org/presentationml/2006/main">
   <p:cSld>
     <p:spTree>
@@ -13385,7 +15381,7 @@
             <a:fld id="{EA7C8D44-3667-46F6-9772-CC52308E2A7F}" type="slidenum">
               <a:rPr kumimoji="0" lang="en-US" smtClean="0"/>
               <a:pPr/>
-              <a:t>6</a:t>
+              <a:t>7</a:t>
             </a:fld>
             <a:endParaRPr kumimoji="0" lang="en-US"/>
           </a:p>
@@ -14723,7 +16719,7 @@
 </p:sld>
 </file>
 
-<file path=ppt/slides/slide7.xml><?xml version="1.0" encoding="utf-8"?>
+<file path=ppt/slides/slide8.xml><?xml version="1.0" encoding="utf-8"?>
 <p:sld xmlns:a="http://schemas.openxmlformats.org/drawingml/2006/main" xmlns:r="http://schemas.openxmlformats.org/officeDocument/2006/relationships" xmlns:p="http://schemas.openxmlformats.org/presentationml/2006/main">
   <p:cSld>
     <p:spTree>
@@ -14780,7 +16776,7 @@
             <a:fld id="{EA7C8D44-3667-46F6-9772-CC52308E2A7F}" type="slidenum">
               <a:rPr kumimoji="0" lang="en-US" smtClean="0"/>
               <a:pPr/>
-              <a:t>7</a:t>
+              <a:t>8</a:t>
             </a:fld>
             <a:endParaRPr kumimoji="0" lang="en-US"/>
           </a:p>
@@ -16216,7 +18212,7 @@
 </p:sld>
 </file>
 
-<file path=ppt/slides/slide8.xml><?xml version="1.0" encoding="utf-8"?>
+<file path=ppt/slides/slide9.xml><?xml version="1.0" encoding="utf-8"?>
 <p:sld xmlns:a="http://schemas.openxmlformats.org/drawingml/2006/main" xmlns:r="http://schemas.openxmlformats.org/officeDocument/2006/relationships" xmlns:p="http://schemas.openxmlformats.org/presentationml/2006/main">
   <p:cSld>
     <p:spTree>
@@ -16273,7 +18269,7 @@
             <a:fld id="{EA7C8D44-3667-46F6-9772-CC52308E2A7F}" type="slidenum">
               <a:rPr kumimoji="0" lang="en-US" smtClean="0"/>
               <a:pPr/>
-              <a:t>8</a:t>
+              <a:t>9</a:t>
             </a:fld>
             <a:endParaRPr kumimoji="0" lang="en-US"/>
           </a:p>
@@ -17748,1499 +19744,6 @@
     <p:extLst>
       <p:ext uri="{BB962C8B-B14F-4D97-AF65-F5344CB8AC3E}">
         <p14:creationId xmlns:p14="http://schemas.microsoft.com/office/powerpoint/2010/main" val="4133200898"/>
-      </p:ext>
-    </p:extLst>
-  </p:cSld>
-  <p:clrMapOvr>
-    <a:masterClrMapping/>
-  </p:clrMapOvr>
-</p:sld>
-</file>
-
-<file path=ppt/slides/slide9.xml><?xml version="1.0" encoding="utf-8"?>
-<p:sld xmlns:a="http://schemas.openxmlformats.org/drawingml/2006/main" xmlns:r="http://schemas.openxmlformats.org/officeDocument/2006/relationships" xmlns:p="http://schemas.openxmlformats.org/presentationml/2006/main">
-  <p:cSld>
-    <p:spTree>
-      <p:nvGrpSpPr>
-        <p:cNvPr id="1" name=""/>
-        <p:cNvGrpSpPr/>
-        <p:nvPr/>
-      </p:nvGrpSpPr>
-      <p:grpSpPr>
-        <a:xfrm>
-          <a:off x="0" y="0"/>
-          <a:ext cx="0" cy="0"/>
-          <a:chOff x="0" y="0"/>
-          <a:chExt cx="0" cy="0"/>
-        </a:xfrm>
-      </p:grpSpPr>
-      <p:sp>
-        <p:nvSpPr>
-          <p:cNvPr id="2" name="Title 1"/>
-          <p:cNvSpPr>
-            <a:spLocks noGrp="1"/>
-          </p:cNvSpPr>
-          <p:nvPr>
-            <p:ph type="title"/>
-          </p:nvPr>
-        </p:nvSpPr>
-        <p:spPr/>
-        <p:txBody>
-          <a:bodyPr/>
-          <a:lstStyle/>
-          <a:p>
-            <a:r>
-              <a:rPr lang="en-US" dirty="0"/>
-              <a:t>Implementation of Barrel Shifter</a:t>
-            </a:r>
-          </a:p>
-        </p:txBody>
-      </p:sp>
-      <p:sp>
-        <p:nvSpPr>
-          <p:cNvPr id="3" name="Slide Number Placeholder 2"/>
-          <p:cNvSpPr>
-            <a:spLocks noGrp="1"/>
-          </p:cNvSpPr>
-          <p:nvPr>
-            <p:ph type="sldNum" sz="quarter" idx="12"/>
-          </p:nvPr>
-        </p:nvSpPr>
-        <p:spPr/>
-        <p:txBody>
-          <a:bodyPr/>
-          <a:lstStyle/>
-          <a:p>
-            <a:fld id="{EA7C8D44-3667-46F6-9772-CC52308E2A7F}" type="slidenum">
-              <a:rPr kumimoji="0" lang="en-US" smtClean="0"/>
-              <a:pPr/>
-              <a:t>9</a:t>
-            </a:fld>
-            <a:endParaRPr kumimoji="0" lang="en-US"/>
-          </a:p>
-        </p:txBody>
-      </p:sp>
-      <p:sp>
-        <p:nvSpPr>
-          <p:cNvPr id="4" name="Rectangle 3"/>
-          <p:cNvSpPr/>
-          <p:nvPr/>
-        </p:nvSpPr>
-        <p:spPr>
-          <a:xfrm>
-            <a:off x="235826" y="5117068"/>
-            <a:ext cx="5791200" cy="369332"/>
-          </a:xfrm>
-          <a:prstGeom prst="rect">
-            <a:avLst/>
-          </a:prstGeom>
-        </p:spPr>
-        <p:txBody>
-          <a:bodyPr wrap="square">
-            <a:spAutoFit/>
-          </a:bodyPr>
-          <a:lstStyle/>
-          <a:p>
-            <a:r>
-              <a:rPr lang="en-US" dirty="0"/>
-              <a:t>Example four-bit Barrel shifter that performs </a:t>
-            </a:r>
-            <a:r>
-              <a:rPr lang="en-US" b="1" dirty="0"/>
-              <a:t>rotate right</a:t>
-            </a:r>
-          </a:p>
-        </p:txBody>
-      </p:sp>
-      <p:graphicFrame>
-        <p:nvGraphicFramePr>
-          <p:cNvPr id="5" name="Table 4"/>
-          <p:cNvGraphicFramePr>
-            <a:graphicFrameLocks noGrp="1"/>
-          </p:cNvGraphicFramePr>
-          <p:nvPr>
-            <p:extLst>
-              <p:ext uri="{D42A27DB-BD31-4B8C-83A1-F6EECF244321}">
-                <p14:modId xmlns:p14="http://schemas.microsoft.com/office/powerpoint/2010/main" val="551700696"/>
-              </p:ext>
-            </p:extLst>
-          </p:nvPr>
-        </p:nvGraphicFramePr>
-        <p:xfrm>
-          <a:off x="6248400" y="2418965"/>
-          <a:ext cx="2590800" cy="2045730"/>
-        </p:xfrm>
-        <a:graphic>
-          <a:graphicData uri="http://schemas.openxmlformats.org/drawingml/2006/table">
-            <a:tbl>
-              <a:tblPr firstRow="1" firstCol="1" bandRow="1">
-                <a:tableStyleId>{B301B821-A1FF-4177-AEE7-76D212191A09}</a:tableStyleId>
-              </a:tblPr>
-              <a:tblGrid>
-                <a:gridCol w="417963">
-                  <a:extLst>
-                    <a:ext uri="{9D8B030D-6E8A-4147-A177-3AD203B41FA5}">
-                      <a16:colId xmlns:a16="http://schemas.microsoft.com/office/drawing/2014/main" val="20000"/>
-                    </a:ext>
-                  </a:extLst>
-                </a:gridCol>
-                <a:gridCol w="417009">
-                  <a:extLst>
-                    <a:ext uri="{9D8B030D-6E8A-4147-A177-3AD203B41FA5}">
-                      <a16:colId xmlns:a16="http://schemas.microsoft.com/office/drawing/2014/main" val="20001"/>
-                    </a:ext>
-                  </a:extLst>
-                </a:gridCol>
-                <a:gridCol w="438957">
-                  <a:extLst>
-                    <a:ext uri="{9D8B030D-6E8A-4147-A177-3AD203B41FA5}">
-                      <a16:colId xmlns:a16="http://schemas.microsoft.com/office/drawing/2014/main" val="20002"/>
-                    </a:ext>
-                  </a:extLst>
-                </a:gridCol>
-                <a:gridCol w="438957">
-                  <a:extLst>
-                    <a:ext uri="{9D8B030D-6E8A-4147-A177-3AD203B41FA5}">
-                      <a16:colId xmlns:a16="http://schemas.microsoft.com/office/drawing/2014/main" val="20003"/>
-                    </a:ext>
-                  </a:extLst>
-                </a:gridCol>
-                <a:gridCol w="438957">
-                  <a:extLst>
-                    <a:ext uri="{9D8B030D-6E8A-4147-A177-3AD203B41FA5}">
-                      <a16:colId xmlns:a16="http://schemas.microsoft.com/office/drawing/2014/main" val="20004"/>
-                    </a:ext>
-                  </a:extLst>
-                </a:gridCol>
-                <a:gridCol w="438957">
-                  <a:extLst>
-                    <a:ext uri="{9D8B030D-6E8A-4147-A177-3AD203B41FA5}">
-                      <a16:colId xmlns:a16="http://schemas.microsoft.com/office/drawing/2014/main" val="20005"/>
-                    </a:ext>
-                  </a:extLst>
-                </a:gridCol>
-              </a:tblGrid>
-              <a:tr h="409146">
-                <a:tc>
-                  <a:txBody>
-                    <a:bodyPr/>
-                    <a:lstStyle/>
-                    <a:p>
-                      <a:pPr marL="0" marR="0" algn="ctr">
-                        <a:spcBef>
-                          <a:spcPts val="0"/>
-                        </a:spcBef>
-                        <a:spcAft>
-                          <a:spcPts val="0"/>
-                        </a:spcAft>
-                      </a:pPr>
-                      <a:r>
-                        <a:rPr lang="en-US" sz="1800" dirty="0" err="1">
-                          <a:effectLst/>
-                        </a:rPr>
-                        <a:t>S</a:t>
-                      </a:r>
-                      <a:r>
-                        <a:rPr lang="en-US" sz="1800" baseline="-25000" dirty="0" err="1">
-                          <a:effectLst/>
-                        </a:rPr>
-                        <a:t>1</a:t>
-                      </a:r>
-                      <a:endParaRPr lang="en-US" sz="1800" dirty="0">
-                        <a:effectLst/>
-                        <a:latin typeface="Consolas" panose="020B0609020204030204" pitchFamily="49" charset="0"/>
-                        <a:ea typeface="宋体"/>
-                        <a:cs typeface="Consolas" panose="020B0609020204030204" pitchFamily="49" charset="0"/>
-                      </a:endParaRPr>
-                    </a:p>
-                  </a:txBody>
-                  <a:tcPr marL="68580" marR="68580" marT="0" marB="0" anchor="ctr"/>
-                </a:tc>
-                <a:tc>
-                  <a:txBody>
-                    <a:bodyPr/>
-                    <a:lstStyle/>
-                    <a:p>
-                      <a:pPr marL="0" marR="0" algn="ctr">
-                        <a:spcBef>
-                          <a:spcPts val="0"/>
-                        </a:spcBef>
-                        <a:spcAft>
-                          <a:spcPts val="0"/>
-                        </a:spcAft>
-                      </a:pPr>
-                      <a:r>
-                        <a:rPr lang="en-US" sz="1800" dirty="0" err="1">
-                          <a:effectLst/>
-                        </a:rPr>
-                        <a:t>S</a:t>
-                      </a:r>
-                      <a:r>
-                        <a:rPr lang="en-US" sz="1800" baseline="-25000" dirty="0" err="1">
-                          <a:effectLst/>
-                        </a:rPr>
-                        <a:t>0</a:t>
-                      </a:r>
-                      <a:endParaRPr lang="en-US" sz="1800" dirty="0">
-                        <a:effectLst/>
-                        <a:latin typeface="Consolas" panose="020B0609020204030204" pitchFamily="49" charset="0"/>
-                        <a:ea typeface="宋体"/>
-                        <a:cs typeface="Consolas" panose="020B0609020204030204" pitchFamily="49" charset="0"/>
-                      </a:endParaRPr>
-                    </a:p>
-                  </a:txBody>
-                  <a:tcPr marL="68580" marR="68580" marT="0" marB="0" anchor="ctr">
-                    <a:lnR w="19050" cap="flat" cmpd="sng" algn="ctr">
-                      <a:solidFill>
-                        <a:schemeClr val="tx1"/>
-                      </a:solidFill>
-                      <a:prstDash val="solid"/>
-                      <a:round/>
-                      <a:headEnd type="none" w="med" len="med"/>
-                      <a:tailEnd type="none" w="med" len="med"/>
-                    </a:lnR>
-                  </a:tcPr>
-                </a:tc>
-                <a:tc>
-                  <a:txBody>
-                    <a:bodyPr/>
-                    <a:lstStyle/>
-                    <a:p>
-                      <a:pPr marL="0" marR="0" algn="ctr">
-                        <a:spcBef>
-                          <a:spcPts val="0"/>
-                        </a:spcBef>
-                        <a:spcAft>
-                          <a:spcPts val="0"/>
-                        </a:spcAft>
-                      </a:pPr>
-                      <a:r>
-                        <a:rPr lang="en-US" sz="1800">
-                          <a:effectLst/>
-                        </a:rPr>
-                        <a:t>Y</a:t>
-                      </a:r>
-                      <a:r>
-                        <a:rPr lang="en-US" sz="1800" baseline="-25000">
-                          <a:effectLst/>
-                        </a:rPr>
-                        <a:t>3</a:t>
-                      </a:r>
-                      <a:endParaRPr lang="en-US" sz="1800">
-                        <a:effectLst/>
-                        <a:latin typeface="Consolas" panose="020B0609020204030204" pitchFamily="49" charset="0"/>
-                        <a:ea typeface="宋体"/>
-                        <a:cs typeface="Consolas" panose="020B0609020204030204" pitchFamily="49" charset="0"/>
-                      </a:endParaRPr>
-                    </a:p>
-                  </a:txBody>
-                  <a:tcPr marL="68580" marR="68580" marT="0" marB="0" anchor="ctr">
-                    <a:lnL w="19050" cap="flat" cmpd="sng" algn="ctr">
-                      <a:solidFill>
-                        <a:schemeClr val="tx1"/>
-                      </a:solidFill>
-                      <a:prstDash val="solid"/>
-                      <a:round/>
-                      <a:headEnd type="none" w="med" len="med"/>
-                      <a:tailEnd type="none" w="med" len="med"/>
-                    </a:lnL>
-                  </a:tcPr>
-                </a:tc>
-                <a:tc>
-                  <a:txBody>
-                    <a:bodyPr/>
-                    <a:lstStyle/>
-                    <a:p>
-                      <a:pPr marL="0" marR="0" algn="ctr">
-                        <a:spcBef>
-                          <a:spcPts val="0"/>
-                        </a:spcBef>
-                        <a:spcAft>
-                          <a:spcPts val="0"/>
-                        </a:spcAft>
-                      </a:pPr>
-                      <a:r>
-                        <a:rPr lang="en-US" sz="1800">
-                          <a:effectLst/>
-                        </a:rPr>
-                        <a:t>Y</a:t>
-                      </a:r>
-                      <a:r>
-                        <a:rPr lang="en-US" sz="1800" baseline="-25000">
-                          <a:effectLst/>
-                        </a:rPr>
-                        <a:t>2</a:t>
-                      </a:r>
-                      <a:endParaRPr lang="en-US" sz="1800">
-                        <a:effectLst/>
-                        <a:latin typeface="Consolas" panose="020B0609020204030204" pitchFamily="49" charset="0"/>
-                        <a:ea typeface="宋体"/>
-                        <a:cs typeface="Consolas" panose="020B0609020204030204" pitchFamily="49" charset="0"/>
-                      </a:endParaRPr>
-                    </a:p>
-                  </a:txBody>
-                  <a:tcPr marL="68580" marR="68580" marT="0" marB="0" anchor="ctr"/>
-                </a:tc>
-                <a:tc>
-                  <a:txBody>
-                    <a:bodyPr/>
-                    <a:lstStyle/>
-                    <a:p>
-                      <a:pPr marL="0" marR="0" algn="ctr">
-                        <a:spcBef>
-                          <a:spcPts val="0"/>
-                        </a:spcBef>
-                        <a:spcAft>
-                          <a:spcPts val="0"/>
-                        </a:spcAft>
-                      </a:pPr>
-                      <a:r>
-                        <a:rPr lang="en-US" sz="1800">
-                          <a:effectLst/>
-                        </a:rPr>
-                        <a:t>Y</a:t>
-                      </a:r>
-                      <a:r>
-                        <a:rPr lang="en-US" sz="1800" baseline="-25000">
-                          <a:effectLst/>
-                        </a:rPr>
-                        <a:t>1</a:t>
-                      </a:r>
-                      <a:endParaRPr lang="en-US" sz="1800">
-                        <a:effectLst/>
-                        <a:latin typeface="Consolas" panose="020B0609020204030204" pitchFamily="49" charset="0"/>
-                        <a:ea typeface="宋体"/>
-                        <a:cs typeface="Consolas" panose="020B0609020204030204" pitchFamily="49" charset="0"/>
-                      </a:endParaRPr>
-                    </a:p>
-                  </a:txBody>
-                  <a:tcPr marL="68580" marR="68580" marT="0" marB="0" anchor="ctr"/>
-                </a:tc>
-                <a:tc>
-                  <a:txBody>
-                    <a:bodyPr/>
-                    <a:lstStyle/>
-                    <a:p>
-                      <a:pPr marL="0" marR="0" algn="ctr">
-                        <a:spcBef>
-                          <a:spcPts val="0"/>
-                        </a:spcBef>
-                        <a:spcAft>
-                          <a:spcPts val="0"/>
-                        </a:spcAft>
-                      </a:pPr>
-                      <a:r>
-                        <a:rPr lang="en-US" sz="1800">
-                          <a:effectLst/>
-                        </a:rPr>
-                        <a:t>Y</a:t>
-                      </a:r>
-                      <a:r>
-                        <a:rPr lang="en-US" sz="1800" baseline="-25000">
-                          <a:effectLst/>
-                        </a:rPr>
-                        <a:t>0</a:t>
-                      </a:r>
-                      <a:endParaRPr lang="en-US" sz="1800">
-                        <a:effectLst/>
-                        <a:latin typeface="Consolas" panose="020B0609020204030204" pitchFamily="49" charset="0"/>
-                        <a:ea typeface="宋体"/>
-                        <a:cs typeface="Consolas" panose="020B0609020204030204" pitchFamily="49" charset="0"/>
-                      </a:endParaRPr>
-                    </a:p>
-                  </a:txBody>
-                  <a:tcPr marL="68580" marR="68580" marT="0" marB="0" anchor="ctr"/>
-                </a:tc>
-                <a:extLst>
-                  <a:ext uri="{0D108BD9-81ED-4DB2-BD59-A6C34878D82A}">
-                    <a16:rowId xmlns:a16="http://schemas.microsoft.com/office/drawing/2014/main" val="10000"/>
-                  </a:ext>
-                </a:extLst>
-              </a:tr>
-              <a:tr h="409146">
-                <a:tc>
-                  <a:txBody>
-                    <a:bodyPr/>
-                    <a:lstStyle/>
-                    <a:p>
-                      <a:pPr marL="0" marR="0" algn="ctr">
-                        <a:spcBef>
-                          <a:spcPts val="0"/>
-                        </a:spcBef>
-                        <a:spcAft>
-                          <a:spcPts val="0"/>
-                        </a:spcAft>
-                      </a:pPr>
-                      <a:r>
-                        <a:rPr lang="en-US" sz="1800" b="1" dirty="0">
-                          <a:effectLst/>
-                          <a:latin typeface="Consolas" panose="020B0609020204030204" pitchFamily="49" charset="0"/>
-                          <a:cs typeface="Consolas" panose="020B0609020204030204" pitchFamily="49" charset="0"/>
-                        </a:rPr>
-                        <a:t>0</a:t>
-                      </a:r>
-                      <a:endParaRPr lang="en-US" sz="1800" b="1" dirty="0">
-                        <a:effectLst/>
-                        <a:latin typeface="Consolas" panose="020B0609020204030204" pitchFamily="49" charset="0"/>
-                        <a:ea typeface="宋体"/>
-                        <a:cs typeface="Consolas" panose="020B0609020204030204" pitchFamily="49" charset="0"/>
-                      </a:endParaRPr>
-                    </a:p>
-                  </a:txBody>
-                  <a:tcPr marL="68580" marR="68580" marT="0" marB="0" anchor="ctr"/>
-                </a:tc>
-                <a:tc>
-                  <a:txBody>
-                    <a:bodyPr/>
-                    <a:lstStyle/>
-                    <a:p>
-                      <a:pPr marL="0" marR="0" algn="ctr">
-                        <a:spcBef>
-                          <a:spcPts val="0"/>
-                        </a:spcBef>
-                        <a:spcAft>
-                          <a:spcPts val="0"/>
-                        </a:spcAft>
-                      </a:pPr>
-                      <a:r>
-                        <a:rPr lang="en-US" sz="1800" b="1" dirty="0">
-                          <a:effectLst/>
-                          <a:latin typeface="Consolas" panose="020B0609020204030204" pitchFamily="49" charset="0"/>
-                          <a:cs typeface="Consolas" panose="020B0609020204030204" pitchFamily="49" charset="0"/>
-                        </a:rPr>
-                        <a:t>0</a:t>
-                      </a:r>
-                      <a:endParaRPr lang="en-US" sz="1800" b="1" dirty="0">
-                        <a:effectLst/>
-                        <a:latin typeface="Consolas" panose="020B0609020204030204" pitchFamily="49" charset="0"/>
-                        <a:ea typeface="宋体"/>
-                        <a:cs typeface="Consolas" panose="020B0609020204030204" pitchFamily="49" charset="0"/>
-                      </a:endParaRPr>
-                    </a:p>
-                  </a:txBody>
-                  <a:tcPr marL="68580" marR="68580" marT="0" marB="0" anchor="ctr">
-                    <a:lnR w="19050" cap="flat" cmpd="sng" algn="ctr">
-                      <a:solidFill>
-                        <a:schemeClr val="tx1"/>
-                      </a:solidFill>
-                      <a:prstDash val="solid"/>
-                      <a:round/>
-                      <a:headEnd type="none" w="med" len="med"/>
-                      <a:tailEnd type="none" w="med" len="med"/>
-                    </a:lnR>
-                  </a:tcPr>
-                </a:tc>
-                <a:tc>
-                  <a:txBody>
-                    <a:bodyPr/>
-                    <a:lstStyle/>
-                    <a:p>
-                      <a:pPr marL="0" marR="0" algn="ctr">
-                        <a:spcBef>
-                          <a:spcPts val="0"/>
-                        </a:spcBef>
-                        <a:spcAft>
-                          <a:spcPts val="0"/>
-                        </a:spcAft>
-                      </a:pPr>
-                      <a:r>
-                        <a:rPr lang="en-US" sz="1800" dirty="0" err="1">
-                          <a:effectLst/>
-                        </a:rPr>
-                        <a:t>D</a:t>
-                      </a:r>
-                      <a:r>
-                        <a:rPr lang="en-US" sz="1800" baseline="-25000" dirty="0" err="1">
-                          <a:effectLst/>
-                        </a:rPr>
-                        <a:t>3</a:t>
-                      </a:r>
-                      <a:endParaRPr lang="en-US" sz="1800" dirty="0">
-                        <a:effectLst/>
-                        <a:latin typeface="Consolas" panose="020B0609020204030204" pitchFamily="49" charset="0"/>
-                        <a:ea typeface="宋体"/>
-                        <a:cs typeface="Consolas" panose="020B0609020204030204" pitchFamily="49" charset="0"/>
-                      </a:endParaRPr>
-                    </a:p>
-                  </a:txBody>
-                  <a:tcPr marL="68580" marR="68580" marT="0" marB="0" anchor="ctr">
-                    <a:lnL w="19050" cap="flat" cmpd="sng" algn="ctr">
-                      <a:solidFill>
-                        <a:schemeClr val="tx1"/>
-                      </a:solidFill>
-                      <a:prstDash val="solid"/>
-                      <a:round/>
-                      <a:headEnd type="none" w="med" len="med"/>
-                      <a:tailEnd type="none" w="med" len="med"/>
-                    </a:lnL>
-                  </a:tcPr>
-                </a:tc>
-                <a:tc>
-                  <a:txBody>
-                    <a:bodyPr/>
-                    <a:lstStyle/>
-                    <a:p>
-                      <a:pPr marL="0" marR="0" algn="ctr">
-                        <a:spcBef>
-                          <a:spcPts val="0"/>
-                        </a:spcBef>
-                        <a:spcAft>
-                          <a:spcPts val="0"/>
-                        </a:spcAft>
-                      </a:pPr>
-                      <a:r>
-                        <a:rPr lang="en-US" sz="1800">
-                          <a:effectLst/>
-                        </a:rPr>
-                        <a:t>D</a:t>
-                      </a:r>
-                      <a:r>
-                        <a:rPr lang="en-US" sz="1800" baseline="-25000">
-                          <a:effectLst/>
-                        </a:rPr>
-                        <a:t>2</a:t>
-                      </a:r>
-                      <a:endParaRPr lang="en-US" sz="1800">
-                        <a:effectLst/>
-                        <a:latin typeface="Consolas" panose="020B0609020204030204" pitchFamily="49" charset="0"/>
-                        <a:ea typeface="宋体"/>
-                        <a:cs typeface="Consolas" panose="020B0609020204030204" pitchFamily="49" charset="0"/>
-                      </a:endParaRPr>
-                    </a:p>
-                  </a:txBody>
-                  <a:tcPr marL="68580" marR="68580" marT="0" marB="0" anchor="ctr"/>
-                </a:tc>
-                <a:tc>
-                  <a:txBody>
-                    <a:bodyPr/>
-                    <a:lstStyle/>
-                    <a:p>
-                      <a:pPr marL="0" marR="0" algn="ctr">
-                        <a:spcBef>
-                          <a:spcPts val="0"/>
-                        </a:spcBef>
-                        <a:spcAft>
-                          <a:spcPts val="0"/>
-                        </a:spcAft>
-                      </a:pPr>
-                      <a:r>
-                        <a:rPr lang="en-US" sz="1800">
-                          <a:effectLst/>
-                        </a:rPr>
-                        <a:t>D</a:t>
-                      </a:r>
-                      <a:r>
-                        <a:rPr lang="en-US" sz="1800" baseline="-25000">
-                          <a:effectLst/>
-                        </a:rPr>
-                        <a:t>1</a:t>
-                      </a:r>
-                      <a:endParaRPr lang="en-US" sz="1800">
-                        <a:effectLst/>
-                        <a:latin typeface="Consolas" panose="020B0609020204030204" pitchFamily="49" charset="0"/>
-                        <a:ea typeface="宋体"/>
-                        <a:cs typeface="Consolas" panose="020B0609020204030204" pitchFamily="49" charset="0"/>
-                      </a:endParaRPr>
-                    </a:p>
-                  </a:txBody>
-                  <a:tcPr marL="68580" marR="68580" marT="0" marB="0" anchor="ctr"/>
-                </a:tc>
-                <a:tc>
-                  <a:txBody>
-                    <a:bodyPr/>
-                    <a:lstStyle/>
-                    <a:p>
-                      <a:pPr marL="0" marR="0" algn="ctr">
-                        <a:spcBef>
-                          <a:spcPts val="0"/>
-                        </a:spcBef>
-                        <a:spcAft>
-                          <a:spcPts val="0"/>
-                        </a:spcAft>
-                      </a:pPr>
-                      <a:r>
-                        <a:rPr lang="en-US" sz="1800">
-                          <a:effectLst/>
-                        </a:rPr>
-                        <a:t>D</a:t>
-                      </a:r>
-                      <a:r>
-                        <a:rPr lang="en-US" sz="1800" baseline="-25000">
-                          <a:effectLst/>
-                        </a:rPr>
-                        <a:t>0</a:t>
-                      </a:r>
-                      <a:endParaRPr lang="en-US" sz="1800">
-                        <a:effectLst/>
-                        <a:latin typeface="Consolas" panose="020B0609020204030204" pitchFamily="49" charset="0"/>
-                        <a:ea typeface="宋体"/>
-                        <a:cs typeface="Consolas" panose="020B0609020204030204" pitchFamily="49" charset="0"/>
-                      </a:endParaRPr>
-                    </a:p>
-                  </a:txBody>
-                  <a:tcPr marL="68580" marR="68580" marT="0" marB="0" anchor="ctr"/>
-                </a:tc>
-                <a:extLst>
-                  <a:ext uri="{0D108BD9-81ED-4DB2-BD59-A6C34878D82A}">
-                    <a16:rowId xmlns:a16="http://schemas.microsoft.com/office/drawing/2014/main" val="10001"/>
-                  </a:ext>
-                </a:extLst>
-              </a:tr>
-              <a:tr h="409146">
-                <a:tc>
-                  <a:txBody>
-                    <a:bodyPr/>
-                    <a:lstStyle/>
-                    <a:p>
-                      <a:pPr marL="0" marR="0" algn="ctr">
-                        <a:spcBef>
-                          <a:spcPts val="0"/>
-                        </a:spcBef>
-                        <a:spcAft>
-                          <a:spcPts val="0"/>
-                        </a:spcAft>
-                      </a:pPr>
-                      <a:r>
-                        <a:rPr lang="en-US" sz="1800" b="1" dirty="0">
-                          <a:effectLst/>
-                          <a:latin typeface="Consolas" panose="020B0609020204030204" pitchFamily="49" charset="0"/>
-                          <a:cs typeface="Consolas" panose="020B0609020204030204" pitchFamily="49" charset="0"/>
-                        </a:rPr>
-                        <a:t>0</a:t>
-                      </a:r>
-                      <a:endParaRPr lang="en-US" sz="1800" b="1" dirty="0">
-                        <a:effectLst/>
-                        <a:latin typeface="Consolas" panose="020B0609020204030204" pitchFamily="49" charset="0"/>
-                        <a:ea typeface="宋体"/>
-                        <a:cs typeface="Consolas" panose="020B0609020204030204" pitchFamily="49" charset="0"/>
-                      </a:endParaRPr>
-                    </a:p>
-                  </a:txBody>
-                  <a:tcPr marL="68580" marR="68580" marT="0" marB="0" anchor="ctr"/>
-                </a:tc>
-                <a:tc>
-                  <a:txBody>
-                    <a:bodyPr/>
-                    <a:lstStyle/>
-                    <a:p>
-                      <a:pPr marL="0" marR="0" algn="ctr">
-                        <a:spcBef>
-                          <a:spcPts val="0"/>
-                        </a:spcBef>
-                        <a:spcAft>
-                          <a:spcPts val="0"/>
-                        </a:spcAft>
-                      </a:pPr>
-                      <a:r>
-                        <a:rPr lang="en-US" sz="1800" b="1" dirty="0">
-                          <a:effectLst/>
-                          <a:latin typeface="Consolas" panose="020B0609020204030204" pitchFamily="49" charset="0"/>
-                          <a:cs typeface="Consolas" panose="020B0609020204030204" pitchFamily="49" charset="0"/>
-                        </a:rPr>
-                        <a:t>1</a:t>
-                      </a:r>
-                      <a:endParaRPr lang="en-US" sz="1800" b="1" dirty="0">
-                        <a:effectLst/>
-                        <a:latin typeface="Consolas" panose="020B0609020204030204" pitchFamily="49" charset="0"/>
-                        <a:ea typeface="宋体"/>
-                        <a:cs typeface="Consolas" panose="020B0609020204030204" pitchFamily="49" charset="0"/>
-                      </a:endParaRPr>
-                    </a:p>
-                  </a:txBody>
-                  <a:tcPr marL="68580" marR="68580" marT="0" marB="0" anchor="ctr">
-                    <a:lnR w="19050" cap="flat" cmpd="sng" algn="ctr">
-                      <a:solidFill>
-                        <a:schemeClr val="tx1"/>
-                      </a:solidFill>
-                      <a:prstDash val="solid"/>
-                      <a:round/>
-                      <a:headEnd type="none" w="med" len="med"/>
-                      <a:tailEnd type="none" w="med" len="med"/>
-                    </a:lnR>
-                  </a:tcPr>
-                </a:tc>
-                <a:tc>
-                  <a:txBody>
-                    <a:bodyPr/>
-                    <a:lstStyle/>
-                    <a:p>
-                      <a:pPr marL="0" marR="0" algn="ctr">
-                        <a:spcBef>
-                          <a:spcPts val="0"/>
-                        </a:spcBef>
-                        <a:spcAft>
-                          <a:spcPts val="0"/>
-                        </a:spcAft>
-                      </a:pPr>
-                      <a:r>
-                        <a:rPr lang="en-US" sz="1800" dirty="0" err="1">
-                          <a:effectLst/>
-                        </a:rPr>
-                        <a:t>D</a:t>
-                      </a:r>
-                      <a:r>
-                        <a:rPr lang="en-US" sz="1800" baseline="-25000" dirty="0" err="1">
-                          <a:effectLst/>
-                        </a:rPr>
-                        <a:t>0</a:t>
-                      </a:r>
-                      <a:endParaRPr lang="en-US" sz="1800" dirty="0">
-                        <a:effectLst/>
-                        <a:latin typeface="Consolas" panose="020B0609020204030204" pitchFamily="49" charset="0"/>
-                        <a:ea typeface="宋体"/>
-                        <a:cs typeface="Consolas" panose="020B0609020204030204" pitchFamily="49" charset="0"/>
-                      </a:endParaRPr>
-                    </a:p>
-                  </a:txBody>
-                  <a:tcPr marL="68580" marR="68580" marT="0" marB="0" anchor="ctr">
-                    <a:lnL w="19050" cap="flat" cmpd="sng" algn="ctr">
-                      <a:solidFill>
-                        <a:schemeClr val="tx1"/>
-                      </a:solidFill>
-                      <a:prstDash val="solid"/>
-                      <a:round/>
-                      <a:headEnd type="none" w="med" len="med"/>
-                      <a:tailEnd type="none" w="med" len="med"/>
-                    </a:lnL>
-                  </a:tcPr>
-                </a:tc>
-                <a:tc>
-                  <a:txBody>
-                    <a:bodyPr/>
-                    <a:lstStyle/>
-                    <a:p>
-                      <a:pPr marL="0" marR="0" algn="ctr">
-                        <a:spcBef>
-                          <a:spcPts val="0"/>
-                        </a:spcBef>
-                        <a:spcAft>
-                          <a:spcPts val="0"/>
-                        </a:spcAft>
-                      </a:pPr>
-                      <a:r>
-                        <a:rPr lang="en-US" sz="1800" dirty="0" err="1">
-                          <a:effectLst/>
-                        </a:rPr>
-                        <a:t>D</a:t>
-                      </a:r>
-                      <a:r>
-                        <a:rPr lang="en-US" sz="1800" baseline="-25000" dirty="0" err="1">
-                          <a:effectLst/>
-                        </a:rPr>
-                        <a:t>3</a:t>
-                      </a:r>
-                      <a:endParaRPr lang="en-US" sz="1800" dirty="0">
-                        <a:effectLst/>
-                        <a:latin typeface="Consolas" panose="020B0609020204030204" pitchFamily="49" charset="0"/>
-                        <a:ea typeface="宋体"/>
-                        <a:cs typeface="Consolas" panose="020B0609020204030204" pitchFamily="49" charset="0"/>
-                      </a:endParaRPr>
-                    </a:p>
-                  </a:txBody>
-                  <a:tcPr marL="68580" marR="68580" marT="0" marB="0" anchor="ctr"/>
-                </a:tc>
-                <a:tc>
-                  <a:txBody>
-                    <a:bodyPr/>
-                    <a:lstStyle/>
-                    <a:p>
-                      <a:pPr marL="0" marR="0" algn="ctr">
-                        <a:spcBef>
-                          <a:spcPts val="0"/>
-                        </a:spcBef>
-                        <a:spcAft>
-                          <a:spcPts val="0"/>
-                        </a:spcAft>
-                      </a:pPr>
-                      <a:r>
-                        <a:rPr lang="en-US" sz="1800">
-                          <a:effectLst/>
-                        </a:rPr>
-                        <a:t>D</a:t>
-                      </a:r>
-                      <a:r>
-                        <a:rPr lang="en-US" sz="1800" baseline="-25000">
-                          <a:effectLst/>
-                        </a:rPr>
-                        <a:t>2</a:t>
-                      </a:r>
-                      <a:endParaRPr lang="en-US" sz="1800">
-                        <a:effectLst/>
-                        <a:latin typeface="Consolas" panose="020B0609020204030204" pitchFamily="49" charset="0"/>
-                        <a:ea typeface="宋体"/>
-                        <a:cs typeface="Consolas" panose="020B0609020204030204" pitchFamily="49" charset="0"/>
-                      </a:endParaRPr>
-                    </a:p>
-                  </a:txBody>
-                  <a:tcPr marL="68580" marR="68580" marT="0" marB="0" anchor="ctr"/>
-                </a:tc>
-                <a:tc>
-                  <a:txBody>
-                    <a:bodyPr/>
-                    <a:lstStyle/>
-                    <a:p>
-                      <a:pPr marL="0" marR="0" algn="ctr">
-                        <a:spcBef>
-                          <a:spcPts val="0"/>
-                        </a:spcBef>
-                        <a:spcAft>
-                          <a:spcPts val="0"/>
-                        </a:spcAft>
-                      </a:pPr>
-                      <a:r>
-                        <a:rPr lang="en-US" sz="1800">
-                          <a:effectLst/>
-                        </a:rPr>
-                        <a:t>D</a:t>
-                      </a:r>
-                      <a:r>
-                        <a:rPr lang="en-US" sz="1800" baseline="-25000">
-                          <a:effectLst/>
-                        </a:rPr>
-                        <a:t>1</a:t>
-                      </a:r>
-                      <a:endParaRPr lang="en-US" sz="1800">
-                        <a:effectLst/>
-                        <a:latin typeface="Consolas" panose="020B0609020204030204" pitchFamily="49" charset="0"/>
-                        <a:ea typeface="宋体"/>
-                        <a:cs typeface="Consolas" panose="020B0609020204030204" pitchFamily="49" charset="0"/>
-                      </a:endParaRPr>
-                    </a:p>
-                  </a:txBody>
-                  <a:tcPr marL="68580" marR="68580" marT="0" marB="0" anchor="ctr"/>
-                </a:tc>
-                <a:extLst>
-                  <a:ext uri="{0D108BD9-81ED-4DB2-BD59-A6C34878D82A}">
-                    <a16:rowId xmlns:a16="http://schemas.microsoft.com/office/drawing/2014/main" val="10002"/>
-                  </a:ext>
-                </a:extLst>
-              </a:tr>
-              <a:tr h="409146">
-                <a:tc>
-                  <a:txBody>
-                    <a:bodyPr/>
-                    <a:lstStyle/>
-                    <a:p>
-                      <a:pPr marL="0" marR="0" algn="ctr">
-                        <a:spcBef>
-                          <a:spcPts val="0"/>
-                        </a:spcBef>
-                        <a:spcAft>
-                          <a:spcPts val="0"/>
-                        </a:spcAft>
-                      </a:pPr>
-                      <a:r>
-                        <a:rPr lang="en-US" sz="1800" b="1" dirty="0">
-                          <a:solidFill>
-                            <a:srgbClr val="FF0000"/>
-                          </a:solidFill>
-                          <a:effectLst/>
-                          <a:latin typeface="Consolas" panose="020B0609020204030204" pitchFamily="49" charset="0"/>
-                          <a:cs typeface="Consolas" panose="020B0609020204030204" pitchFamily="49" charset="0"/>
-                        </a:rPr>
-                        <a:t>1</a:t>
-                      </a:r>
-                      <a:endParaRPr lang="en-US" sz="1800" b="1" dirty="0">
-                        <a:solidFill>
-                          <a:srgbClr val="FF0000"/>
-                        </a:solidFill>
-                        <a:effectLst/>
-                        <a:latin typeface="Consolas" panose="020B0609020204030204" pitchFamily="49" charset="0"/>
-                        <a:ea typeface="宋体"/>
-                        <a:cs typeface="Consolas" panose="020B0609020204030204" pitchFamily="49" charset="0"/>
-                      </a:endParaRPr>
-                    </a:p>
-                  </a:txBody>
-                  <a:tcPr marL="68580" marR="68580" marT="0" marB="0" anchor="ctr"/>
-                </a:tc>
-                <a:tc>
-                  <a:txBody>
-                    <a:bodyPr/>
-                    <a:lstStyle/>
-                    <a:p>
-                      <a:pPr marL="0" marR="0" algn="ctr">
-                        <a:spcBef>
-                          <a:spcPts val="0"/>
-                        </a:spcBef>
-                        <a:spcAft>
-                          <a:spcPts val="0"/>
-                        </a:spcAft>
-                      </a:pPr>
-                      <a:r>
-                        <a:rPr lang="en-US" sz="1800" b="1" dirty="0">
-                          <a:solidFill>
-                            <a:srgbClr val="FF0000"/>
-                          </a:solidFill>
-                          <a:effectLst/>
-                          <a:latin typeface="Consolas" panose="020B0609020204030204" pitchFamily="49" charset="0"/>
-                          <a:cs typeface="Consolas" panose="020B0609020204030204" pitchFamily="49" charset="0"/>
-                        </a:rPr>
-                        <a:t>0</a:t>
-                      </a:r>
-                      <a:endParaRPr lang="en-US" sz="1800" b="1" dirty="0">
-                        <a:solidFill>
-                          <a:srgbClr val="FF0000"/>
-                        </a:solidFill>
-                        <a:effectLst/>
-                        <a:latin typeface="Consolas" panose="020B0609020204030204" pitchFamily="49" charset="0"/>
-                        <a:ea typeface="宋体"/>
-                        <a:cs typeface="Consolas" panose="020B0609020204030204" pitchFamily="49" charset="0"/>
-                      </a:endParaRPr>
-                    </a:p>
-                  </a:txBody>
-                  <a:tcPr marL="68580" marR="68580" marT="0" marB="0" anchor="ctr">
-                    <a:lnR w="19050" cap="flat" cmpd="sng" algn="ctr">
-                      <a:solidFill>
-                        <a:schemeClr val="tx1"/>
-                      </a:solidFill>
-                      <a:prstDash val="solid"/>
-                      <a:round/>
-                      <a:headEnd type="none" w="med" len="med"/>
-                      <a:tailEnd type="none" w="med" len="med"/>
-                    </a:lnR>
-                  </a:tcPr>
-                </a:tc>
-                <a:tc>
-                  <a:txBody>
-                    <a:bodyPr/>
-                    <a:lstStyle/>
-                    <a:p>
-                      <a:pPr marL="0" marR="0" algn="ctr">
-                        <a:spcBef>
-                          <a:spcPts val="0"/>
-                        </a:spcBef>
-                        <a:spcAft>
-                          <a:spcPts val="0"/>
-                        </a:spcAft>
-                      </a:pPr>
-                      <a:r>
-                        <a:rPr lang="en-US" sz="1800" dirty="0" err="1">
-                          <a:solidFill>
-                            <a:srgbClr val="FF0000"/>
-                          </a:solidFill>
-                          <a:effectLst/>
-                        </a:rPr>
-                        <a:t>D</a:t>
-                      </a:r>
-                      <a:r>
-                        <a:rPr lang="en-US" sz="1800" baseline="-25000" dirty="0" err="1">
-                          <a:solidFill>
-                            <a:srgbClr val="FF0000"/>
-                          </a:solidFill>
-                          <a:effectLst/>
-                        </a:rPr>
-                        <a:t>1</a:t>
-                      </a:r>
-                      <a:endParaRPr lang="en-US" sz="1800" dirty="0">
-                        <a:solidFill>
-                          <a:srgbClr val="FF0000"/>
-                        </a:solidFill>
-                        <a:effectLst/>
-                        <a:latin typeface="Consolas" panose="020B0609020204030204" pitchFamily="49" charset="0"/>
-                        <a:ea typeface="宋体"/>
-                        <a:cs typeface="Consolas" panose="020B0609020204030204" pitchFamily="49" charset="0"/>
-                      </a:endParaRPr>
-                    </a:p>
-                  </a:txBody>
-                  <a:tcPr marL="68580" marR="68580" marT="0" marB="0" anchor="ctr">
-                    <a:lnL w="19050" cap="flat" cmpd="sng" algn="ctr">
-                      <a:solidFill>
-                        <a:schemeClr val="tx1"/>
-                      </a:solidFill>
-                      <a:prstDash val="solid"/>
-                      <a:round/>
-                      <a:headEnd type="none" w="med" len="med"/>
-                      <a:tailEnd type="none" w="med" len="med"/>
-                    </a:lnL>
-                  </a:tcPr>
-                </a:tc>
-                <a:tc>
-                  <a:txBody>
-                    <a:bodyPr/>
-                    <a:lstStyle/>
-                    <a:p>
-                      <a:pPr marL="0" marR="0" algn="ctr">
-                        <a:spcBef>
-                          <a:spcPts val="0"/>
-                        </a:spcBef>
-                        <a:spcAft>
-                          <a:spcPts val="0"/>
-                        </a:spcAft>
-                      </a:pPr>
-                      <a:r>
-                        <a:rPr lang="en-US" sz="1800" dirty="0" err="1">
-                          <a:solidFill>
-                            <a:srgbClr val="FF0000"/>
-                          </a:solidFill>
-                          <a:effectLst/>
-                        </a:rPr>
-                        <a:t>D</a:t>
-                      </a:r>
-                      <a:r>
-                        <a:rPr lang="en-US" sz="1800" baseline="-25000" dirty="0" err="1">
-                          <a:solidFill>
-                            <a:srgbClr val="FF0000"/>
-                          </a:solidFill>
-                          <a:effectLst/>
-                        </a:rPr>
-                        <a:t>0</a:t>
-                      </a:r>
-                      <a:endParaRPr lang="en-US" sz="1800" dirty="0">
-                        <a:solidFill>
-                          <a:srgbClr val="FF0000"/>
-                        </a:solidFill>
-                        <a:effectLst/>
-                        <a:latin typeface="Consolas" panose="020B0609020204030204" pitchFamily="49" charset="0"/>
-                        <a:ea typeface="宋体"/>
-                        <a:cs typeface="Consolas" panose="020B0609020204030204" pitchFamily="49" charset="0"/>
-                      </a:endParaRPr>
-                    </a:p>
-                  </a:txBody>
-                  <a:tcPr marL="68580" marR="68580" marT="0" marB="0" anchor="ctr"/>
-                </a:tc>
-                <a:tc>
-                  <a:txBody>
-                    <a:bodyPr/>
-                    <a:lstStyle/>
-                    <a:p>
-                      <a:pPr marL="0" marR="0" algn="ctr">
-                        <a:spcBef>
-                          <a:spcPts val="0"/>
-                        </a:spcBef>
-                        <a:spcAft>
-                          <a:spcPts val="0"/>
-                        </a:spcAft>
-                      </a:pPr>
-                      <a:r>
-                        <a:rPr lang="en-US" sz="1800" dirty="0" err="1">
-                          <a:solidFill>
-                            <a:srgbClr val="FF0000"/>
-                          </a:solidFill>
-                          <a:effectLst/>
-                        </a:rPr>
-                        <a:t>D</a:t>
-                      </a:r>
-                      <a:r>
-                        <a:rPr lang="en-US" sz="1800" baseline="-25000" dirty="0" err="1">
-                          <a:solidFill>
-                            <a:srgbClr val="FF0000"/>
-                          </a:solidFill>
-                          <a:effectLst/>
-                        </a:rPr>
-                        <a:t>3</a:t>
-                      </a:r>
-                      <a:endParaRPr lang="en-US" sz="1800" dirty="0">
-                        <a:solidFill>
-                          <a:srgbClr val="FF0000"/>
-                        </a:solidFill>
-                        <a:effectLst/>
-                        <a:latin typeface="Consolas" panose="020B0609020204030204" pitchFamily="49" charset="0"/>
-                        <a:ea typeface="宋体"/>
-                        <a:cs typeface="Consolas" panose="020B0609020204030204" pitchFamily="49" charset="0"/>
-                      </a:endParaRPr>
-                    </a:p>
-                  </a:txBody>
-                  <a:tcPr marL="68580" marR="68580" marT="0" marB="0" anchor="ctr"/>
-                </a:tc>
-                <a:tc>
-                  <a:txBody>
-                    <a:bodyPr/>
-                    <a:lstStyle/>
-                    <a:p>
-                      <a:pPr marL="0" marR="0" algn="ctr">
-                        <a:spcBef>
-                          <a:spcPts val="0"/>
-                        </a:spcBef>
-                        <a:spcAft>
-                          <a:spcPts val="0"/>
-                        </a:spcAft>
-                      </a:pPr>
-                      <a:r>
-                        <a:rPr lang="en-US" sz="1800" dirty="0" err="1">
-                          <a:solidFill>
-                            <a:srgbClr val="FF0000"/>
-                          </a:solidFill>
-                          <a:effectLst/>
-                        </a:rPr>
-                        <a:t>D</a:t>
-                      </a:r>
-                      <a:r>
-                        <a:rPr lang="en-US" sz="1800" baseline="-25000" dirty="0" err="1">
-                          <a:solidFill>
-                            <a:srgbClr val="FF0000"/>
-                          </a:solidFill>
-                          <a:effectLst/>
-                        </a:rPr>
-                        <a:t>2</a:t>
-                      </a:r>
-                      <a:endParaRPr lang="en-US" sz="1800" dirty="0">
-                        <a:solidFill>
-                          <a:srgbClr val="FF0000"/>
-                        </a:solidFill>
-                        <a:effectLst/>
-                        <a:latin typeface="Consolas" panose="020B0609020204030204" pitchFamily="49" charset="0"/>
-                        <a:ea typeface="宋体"/>
-                        <a:cs typeface="Consolas" panose="020B0609020204030204" pitchFamily="49" charset="0"/>
-                      </a:endParaRPr>
-                    </a:p>
-                  </a:txBody>
-                  <a:tcPr marL="68580" marR="68580" marT="0" marB="0" anchor="ctr"/>
-                </a:tc>
-                <a:extLst>
-                  <a:ext uri="{0D108BD9-81ED-4DB2-BD59-A6C34878D82A}">
-                    <a16:rowId xmlns:a16="http://schemas.microsoft.com/office/drawing/2014/main" val="10003"/>
-                  </a:ext>
-                </a:extLst>
-              </a:tr>
-              <a:tr h="409146">
-                <a:tc>
-                  <a:txBody>
-                    <a:bodyPr/>
-                    <a:lstStyle/>
-                    <a:p>
-                      <a:pPr marL="0" marR="0" algn="ctr">
-                        <a:spcBef>
-                          <a:spcPts val="0"/>
-                        </a:spcBef>
-                        <a:spcAft>
-                          <a:spcPts val="0"/>
-                        </a:spcAft>
-                      </a:pPr>
-                      <a:r>
-                        <a:rPr lang="en-US" sz="1800" b="1">
-                          <a:effectLst/>
-                          <a:latin typeface="Consolas" panose="020B0609020204030204" pitchFamily="49" charset="0"/>
-                          <a:cs typeface="Consolas" panose="020B0609020204030204" pitchFamily="49" charset="0"/>
-                        </a:rPr>
-                        <a:t>1</a:t>
-                      </a:r>
-                      <a:endParaRPr lang="en-US" sz="1800" b="1">
-                        <a:effectLst/>
-                        <a:latin typeface="Consolas" panose="020B0609020204030204" pitchFamily="49" charset="0"/>
-                        <a:ea typeface="宋体"/>
-                        <a:cs typeface="Consolas" panose="020B0609020204030204" pitchFamily="49" charset="0"/>
-                      </a:endParaRPr>
-                    </a:p>
-                  </a:txBody>
-                  <a:tcPr marL="68580" marR="68580" marT="0" marB="0" anchor="ctr"/>
-                </a:tc>
-                <a:tc>
-                  <a:txBody>
-                    <a:bodyPr/>
-                    <a:lstStyle/>
-                    <a:p>
-                      <a:pPr marL="0" marR="0" algn="ctr">
-                        <a:spcBef>
-                          <a:spcPts val="0"/>
-                        </a:spcBef>
-                        <a:spcAft>
-                          <a:spcPts val="0"/>
-                        </a:spcAft>
-                      </a:pPr>
-                      <a:r>
-                        <a:rPr lang="en-US" sz="1800" b="1" dirty="0">
-                          <a:effectLst/>
-                          <a:latin typeface="Consolas" panose="020B0609020204030204" pitchFamily="49" charset="0"/>
-                          <a:cs typeface="Consolas" panose="020B0609020204030204" pitchFamily="49" charset="0"/>
-                        </a:rPr>
-                        <a:t>1</a:t>
-                      </a:r>
-                      <a:endParaRPr lang="en-US" sz="1800" b="1" dirty="0">
-                        <a:effectLst/>
-                        <a:latin typeface="Consolas" panose="020B0609020204030204" pitchFamily="49" charset="0"/>
-                        <a:ea typeface="宋体"/>
-                        <a:cs typeface="Consolas" panose="020B0609020204030204" pitchFamily="49" charset="0"/>
-                      </a:endParaRPr>
-                    </a:p>
-                  </a:txBody>
-                  <a:tcPr marL="68580" marR="68580" marT="0" marB="0" anchor="ctr">
-                    <a:lnR w="19050" cap="flat" cmpd="sng" algn="ctr">
-                      <a:solidFill>
-                        <a:schemeClr val="tx1"/>
-                      </a:solidFill>
-                      <a:prstDash val="solid"/>
-                      <a:round/>
-                      <a:headEnd type="none" w="med" len="med"/>
-                      <a:tailEnd type="none" w="med" len="med"/>
-                    </a:lnR>
-                  </a:tcPr>
-                </a:tc>
-                <a:tc>
-                  <a:txBody>
-                    <a:bodyPr/>
-                    <a:lstStyle/>
-                    <a:p>
-                      <a:pPr marL="0" marR="0" algn="ctr">
-                        <a:spcBef>
-                          <a:spcPts val="0"/>
-                        </a:spcBef>
-                        <a:spcAft>
-                          <a:spcPts val="0"/>
-                        </a:spcAft>
-                      </a:pPr>
-                      <a:r>
-                        <a:rPr lang="en-US" sz="1800">
-                          <a:effectLst/>
-                        </a:rPr>
-                        <a:t>D</a:t>
-                      </a:r>
-                      <a:r>
-                        <a:rPr lang="en-US" sz="1800" baseline="-25000">
-                          <a:effectLst/>
-                        </a:rPr>
-                        <a:t>2</a:t>
-                      </a:r>
-                      <a:endParaRPr lang="en-US" sz="1800">
-                        <a:effectLst/>
-                        <a:latin typeface="Consolas" panose="020B0609020204030204" pitchFamily="49" charset="0"/>
-                        <a:ea typeface="宋体"/>
-                        <a:cs typeface="Consolas" panose="020B0609020204030204" pitchFamily="49" charset="0"/>
-                      </a:endParaRPr>
-                    </a:p>
-                  </a:txBody>
-                  <a:tcPr marL="68580" marR="68580" marT="0" marB="0" anchor="ctr">
-                    <a:lnL w="19050" cap="flat" cmpd="sng" algn="ctr">
-                      <a:solidFill>
-                        <a:schemeClr val="tx1"/>
-                      </a:solidFill>
-                      <a:prstDash val="solid"/>
-                      <a:round/>
-                      <a:headEnd type="none" w="med" len="med"/>
-                      <a:tailEnd type="none" w="med" len="med"/>
-                    </a:lnL>
-                  </a:tcPr>
-                </a:tc>
-                <a:tc>
-                  <a:txBody>
-                    <a:bodyPr/>
-                    <a:lstStyle/>
-                    <a:p>
-                      <a:pPr marL="0" marR="0" algn="ctr">
-                        <a:spcBef>
-                          <a:spcPts val="0"/>
-                        </a:spcBef>
-                        <a:spcAft>
-                          <a:spcPts val="0"/>
-                        </a:spcAft>
-                      </a:pPr>
-                      <a:r>
-                        <a:rPr lang="en-US" sz="1800">
-                          <a:effectLst/>
-                        </a:rPr>
-                        <a:t>D</a:t>
-                      </a:r>
-                      <a:r>
-                        <a:rPr lang="en-US" sz="1800" baseline="-25000">
-                          <a:effectLst/>
-                        </a:rPr>
-                        <a:t>1</a:t>
-                      </a:r>
-                      <a:endParaRPr lang="en-US" sz="1800">
-                        <a:effectLst/>
-                        <a:latin typeface="Consolas" panose="020B0609020204030204" pitchFamily="49" charset="0"/>
-                        <a:ea typeface="宋体"/>
-                        <a:cs typeface="Consolas" panose="020B0609020204030204" pitchFamily="49" charset="0"/>
-                      </a:endParaRPr>
-                    </a:p>
-                  </a:txBody>
-                  <a:tcPr marL="68580" marR="68580" marT="0" marB="0" anchor="ctr"/>
-                </a:tc>
-                <a:tc>
-                  <a:txBody>
-                    <a:bodyPr/>
-                    <a:lstStyle/>
-                    <a:p>
-                      <a:pPr marL="0" marR="0" algn="ctr">
-                        <a:spcBef>
-                          <a:spcPts val="0"/>
-                        </a:spcBef>
-                        <a:spcAft>
-                          <a:spcPts val="0"/>
-                        </a:spcAft>
-                      </a:pPr>
-                      <a:r>
-                        <a:rPr lang="en-US" sz="1800" dirty="0" err="1">
-                          <a:effectLst/>
-                        </a:rPr>
-                        <a:t>D</a:t>
-                      </a:r>
-                      <a:r>
-                        <a:rPr lang="en-US" sz="1800" baseline="-25000" dirty="0" err="1">
-                          <a:effectLst/>
-                        </a:rPr>
-                        <a:t>0</a:t>
-                      </a:r>
-                      <a:endParaRPr lang="en-US" sz="1800" dirty="0">
-                        <a:effectLst/>
-                        <a:latin typeface="Consolas" panose="020B0609020204030204" pitchFamily="49" charset="0"/>
-                        <a:ea typeface="宋体"/>
-                        <a:cs typeface="Consolas" panose="020B0609020204030204" pitchFamily="49" charset="0"/>
-                      </a:endParaRPr>
-                    </a:p>
-                  </a:txBody>
-                  <a:tcPr marL="68580" marR="68580" marT="0" marB="0" anchor="ctr"/>
-                </a:tc>
-                <a:tc>
-                  <a:txBody>
-                    <a:bodyPr/>
-                    <a:lstStyle/>
-                    <a:p>
-                      <a:pPr marL="0" marR="0" algn="ctr">
-                        <a:spcBef>
-                          <a:spcPts val="0"/>
-                        </a:spcBef>
-                        <a:spcAft>
-                          <a:spcPts val="0"/>
-                        </a:spcAft>
-                      </a:pPr>
-                      <a:r>
-                        <a:rPr lang="en-US" sz="1800" dirty="0" err="1">
-                          <a:effectLst/>
-                        </a:rPr>
-                        <a:t>D</a:t>
-                      </a:r>
-                      <a:r>
-                        <a:rPr lang="en-US" sz="1800" baseline="-25000" dirty="0" err="1">
-                          <a:effectLst/>
-                        </a:rPr>
-                        <a:t>3</a:t>
-                      </a:r>
-                      <a:endParaRPr lang="en-US" sz="1800" dirty="0">
-                        <a:effectLst/>
-                        <a:latin typeface="Consolas" panose="020B0609020204030204" pitchFamily="49" charset="0"/>
-                        <a:ea typeface="宋体"/>
-                        <a:cs typeface="Consolas" panose="020B0609020204030204" pitchFamily="49" charset="0"/>
-                      </a:endParaRPr>
-                    </a:p>
-                  </a:txBody>
-                  <a:tcPr marL="68580" marR="68580" marT="0" marB="0" anchor="ctr"/>
-                </a:tc>
-                <a:extLst>
-                  <a:ext uri="{0D108BD9-81ED-4DB2-BD59-A6C34878D82A}">
-                    <a16:rowId xmlns:a16="http://schemas.microsoft.com/office/drawing/2014/main" val="10004"/>
-                  </a:ext>
-                </a:extLst>
-              </a:tr>
-            </a:tbl>
-          </a:graphicData>
-        </a:graphic>
-      </p:graphicFrame>
-      <p:sp>
-        <p:nvSpPr>
-          <p:cNvPr id="8" name="Rectangle 7"/>
-          <p:cNvSpPr/>
-          <p:nvPr/>
-        </p:nvSpPr>
-        <p:spPr>
-          <a:xfrm>
-            <a:off x="457200" y="1295400"/>
-            <a:ext cx="8153400" cy="369332"/>
-          </a:xfrm>
-          <a:prstGeom prst="rect">
-            <a:avLst/>
-          </a:prstGeom>
-        </p:spPr>
-        <p:txBody>
-          <a:bodyPr wrap="square">
-            <a:spAutoFit/>
-          </a:bodyPr>
-          <a:lstStyle/>
-          <a:p>
-            <a:r>
-              <a:rPr lang="en-US" dirty="0">
-                <a:solidFill>
-                  <a:srgbClr val="C00000"/>
-                </a:solidFill>
-              </a:rPr>
-              <a:t>Example:  </a:t>
-            </a:r>
-            <a:r>
-              <a:rPr lang="en-US" dirty="0" err="1">
-                <a:solidFill>
-                  <a:srgbClr val="C00000"/>
-                </a:solidFill>
-                <a:latin typeface="Consolas" panose="020B0609020204030204" pitchFamily="49" charset="0"/>
-                <a:cs typeface="Consolas" panose="020B0609020204030204" pitchFamily="49" charset="0"/>
-              </a:rPr>
-              <a:t>S</a:t>
-            </a:r>
-            <a:r>
-              <a:rPr lang="en-US" baseline="-25000" dirty="0" err="1">
-                <a:solidFill>
-                  <a:srgbClr val="C00000"/>
-                </a:solidFill>
-                <a:latin typeface="Consolas" panose="020B0609020204030204" pitchFamily="49" charset="0"/>
-                <a:cs typeface="Consolas" panose="020B0609020204030204" pitchFamily="49" charset="0"/>
-              </a:rPr>
-              <a:t>1</a:t>
-            </a:r>
-            <a:r>
-              <a:rPr lang="en-US" dirty="0" err="1">
-                <a:solidFill>
-                  <a:srgbClr val="C00000"/>
-                </a:solidFill>
-                <a:latin typeface="Consolas" panose="020B0609020204030204" pitchFamily="49" charset="0"/>
-                <a:cs typeface="Consolas" panose="020B0609020204030204" pitchFamily="49" charset="0"/>
-              </a:rPr>
-              <a:t>S</a:t>
-            </a:r>
-            <a:r>
-              <a:rPr lang="en-US" baseline="-25000" dirty="0" err="1">
-                <a:solidFill>
-                  <a:srgbClr val="C00000"/>
-                </a:solidFill>
-                <a:latin typeface="Consolas" panose="020B0609020204030204" pitchFamily="49" charset="0"/>
-                <a:cs typeface="Consolas" panose="020B0609020204030204" pitchFamily="49" charset="0"/>
-              </a:rPr>
-              <a:t>0</a:t>
-            </a:r>
-            <a:r>
-              <a:rPr lang="en-US" dirty="0">
-                <a:solidFill>
-                  <a:srgbClr val="C00000"/>
-                </a:solidFill>
-                <a:latin typeface="Consolas" panose="020B0609020204030204" pitchFamily="49" charset="0"/>
-                <a:cs typeface="Consolas" panose="020B0609020204030204" pitchFamily="49" charset="0"/>
-              </a:rPr>
-              <a:t> = 10</a:t>
-            </a:r>
-          </a:p>
-        </p:txBody>
-      </p:sp>
-      <p:pic>
-        <p:nvPicPr>
-          <p:cNvPr id="6" name="Picture 5"/>
-          <p:cNvPicPr>
-            <a:picLocks noChangeAspect="1"/>
-          </p:cNvPicPr>
-          <p:nvPr/>
-        </p:nvPicPr>
-        <p:blipFill>
-          <a:blip r:embed="rId2" cstate="print">
-            <a:extLst>
-              <a:ext uri="{28A0092B-C50C-407E-A947-70E740481C1C}">
-                <a14:useLocalDpi xmlns:a14="http://schemas.microsoft.com/office/drawing/2010/main" val="0"/>
-              </a:ext>
-            </a:extLst>
-          </a:blip>
-          <a:stretch>
-            <a:fillRect/>
-          </a:stretch>
-        </p:blipFill>
-        <p:spPr>
-          <a:xfrm>
-            <a:off x="256021" y="2179314"/>
-            <a:ext cx="5611379" cy="2773686"/>
-          </a:xfrm>
-          <a:prstGeom prst="rect">
-            <a:avLst/>
-          </a:prstGeom>
-        </p:spPr>
-      </p:pic>
-    </p:spTree>
-    <p:extLst>
-      <p:ext uri="{BB962C8B-B14F-4D97-AF65-F5344CB8AC3E}">
-        <p14:creationId xmlns:p14="http://schemas.microsoft.com/office/powerpoint/2010/main" val="2177597633"/>
       </p:ext>
     </p:extLst>
   </p:cSld>

--- a/PPTs/ZDELETED.pptx
+++ b/PPTs/ZDELETED.pptx
@@ -5,26 +5,27 @@
     <p:sldMasterId id="2147483660" r:id="rId1"/>
   </p:sldMasterIdLst>
   <p:notesMasterIdLst>
-    <p:notesMasterId r:id="rId19"/>
+    <p:notesMasterId r:id="rId20"/>
   </p:notesMasterIdLst>
   <p:sldIdLst>
     <p:sldId id="256" r:id="rId2"/>
-    <p:sldId id="381" r:id="rId3"/>
-    <p:sldId id="335" r:id="rId4"/>
-    <p:sldId id="813" r:id="rId5"/>
-    <p:sldId id="475" r:id="rId6"/>
-    <p:sldId id="473" r:id="rId7"/>
-    <p:sldId id="306" r:id="rId8"/>
-    <p:sldId id="322" r:id="rId9"/>
-    <p:sldId id="323" r:id="rId10"/>
-    <p:sldId id="325" r:id="rId11"/>
-    <p:sldId id="324" r:id="rId12"/>
-    <p:sldId id="525" r:id="rId13"/>
-    <p:sldId id="261" r:id="rId14"/>
-    <p:sldId id="264" r:id="rId15"/>
-    <p:sldId id="262" r:id="rId16"/>
-    <p:sldId id="265" r:id="rId17"/>
-    <p:sldId id="379" r:id="rId18"/>
+    <p:sldId id="383" r:id="rId3"/>
+    <p:sldId id="381" r:id="rId4"/>
+    <p:sldId id="335" r:id="rId5"/>
+    <p:sldId id="813" r:id="rId6"/>
+    <p:sldId id="475" r:id="rId7"/>
+    <p:sldId id="473" r:id="rId8"/>
+    <p:sldId id="306" r:id="rId9"/>
+    <p:sldId id="322" r:id="rId10"/>
+    <p:sldId id="323" r:id="rId11"/>
+    <p:sldId id="325" r:id="rId12"/>
+    <p:sldId id="324" r:id="rId13"/>
+    <p:sldId id="525" r:id="rId14"/>
+    <p:sldId id="261" r:id="rId15"/>
+    <p:sldId id="264" r:id="rId16"/>
+    <p:sldId id="262" r:id="rId17"/>
+    <p:sldId id="265" r:id="rId18"/>
+    <p:sldId id="379" r:id="rId19"/>
   </p:sldIdLst>
   <p:sldSz cx="9144000" cy="6858000" type="screen4x3"/>
   <p:notesSz cx="6858000" cy="9144000"/>
@@ -145,7 +146,7 @@
 <file path=ppt/revisionInfo.xml><?xml version="1.0" encoding="utf-8"?>
 <p1510:revInfo xmlns:a="http://schemas.openxmlformats.org/drawingml/2006/main" xmlns:r="http://schemas.openxmlformats.org/officeDocument/2006/relationships" xmlns:p1510="http://schemas.microsoft.com/office/powerpoint/2015/10/main">
   <p1510:revLst>
-    <p1510:client id="{74B15ED0-6DB4-4108-82C9-64F0E8E52BFB}" v="9" dt="2025-10-02T21:43:06.408"/>
+    <p1510:client id="{74B15ED0-6DB4-4108-82C9-64F0E8E52BFB}" v="10" dt="2025-10-02T23:51:49.405"/>
   </p1510:revLst>
 </p1510:revInfo>
 </file>
@@ -155,7 +156,7 @@
   <pc:docChgLst>
     <pc:chgData name="Zonghua Gu" userId="9a7e1853e1951ef5" providerId="LiveId" clId="{CF1FAA12-072C-4ED5-BA76-0FFFAEFDB88A}"/>
     <pc:docChg chg="custSel addSld delSld modSld">
-      <pc:chgData name="Zonghua Gu" userId="9a7e1853e1951ef5" providerId="LiveId" clId="{CF1FAA12-072C-4ED5-BA76-0FFFAEFDB88A}" dt="2025-10-02T21:43:06.404" v="21"/>
+      <pc:chgData name="Zonghua Gu" userId="9a7e1853e1951ef5" providerId="LiveId" clId="{CF1FAA12-072C-4ED5-BA76-0FFFAEFDB88A}" dt="2025-10-02T23:51:49.400" v="22"/>
       <pc:docMkLst>
         <pc:docMk/>
       </pc:docMkLst>
@@ -547,6 +548,13 @@
           <pc:sldMk cId="2452138352" sldId="381"/>
         </pc:sldMkLst>
       </pc:sldChg>
+      <pc:sldChg chg="add">
+        <pc:chgData name="Zonghua Gu" userId="9a7e1853e1951ef5" providerId="LiveId" clId="{CF1FAA12-072C-4ED5-BA76-0FFFAEFDB88A}" dt="2025-10-02T23:51:49.400" v="22"/>
+        <pc:sldMkLst>
+          <pc:docMk/>
+          <pc:sldMk cId="2623990252" sldId="383"/>
+        </pc:sldMkLst>
+      </pc:sldChg>
       <pc:sldChg chg="add del">
         <pc:chgData name="Zonghua Gu" userId="9a7e1853e1951ef5" providerId="LiveId" clId="{CF1FAA12-072C-4ED5-BA76-0FFFAEFDB88A}" dt="2025-09-18T02:55:09.669" v="16"/>
         <pc:sldMkLst>
@@ -950,6 +958,187 @@
       </p:grpSpPr>
       <p:sp>
         <p:nvSpPr>
+          <p:cNvPr id="324610" name="Rectangle 2"/>
+          <p:cNvSpPr>
+            <a:spLocks noGrp="1" noRot="1" noChangeAspect="1" noChangeArrowheads="1" noTextEdit="1"/>
+          </p:cNvSpPr>
+          <p:nvPr>
+            <p:ph type="sldImg"/>
+          </p:nvPr>
+        </p:nvSpPr>
+        <p:spPr>
+          <a:ln/>
+        </p:spPr>
+      </p:sp>
+      <p:sp>
+        <p:nvSpPr>
+          <p:cNvPr id="324611" name="Rectangle 3"/>
+          <p:cNvSpPr>
+            <a:spLocks noGrp="1" noChangeArrowheads="1"/>
+          </p:cNvSpPr>
+          <p:nvPr>
+            <p:ph type="body" idx="1"/>
+          </p:nvPr>
+        </p:nvSpPr>
+        <p:spPr/>
+        <p:txBody>
+          <a:bodyPr/>
+          <a:lstStyle/>
+          <a:p>
+            <a:pPr marL="0" marR="0" lvl="0" indent="0" algn="l" defTabSz="914400" rtl="0" eaLnBrk="1" fontAlgn="auto" latinLnBrk="0" hangingPunct="1">
+              <a:lnSpc>
+                <a:spcPct val="100000"/>
+              </a:lnSpc>
+              <a:spcBef>
+                <a:spcPts val="0"/>
+              </a:spcBef>
+              <a:spcAft>
+                <a:spcPts val="0"/>
+              </a:spcAft>
+              <a:buClrTx/>
+              <a:buSzTx/>
+              <a:buFontTx/>
+              <a:buNone/>
+              <a:tabLst/>
+              <a:defRPr/>
+            </a:pPr>
+            <a:r>
+              <a:rPr kumimoji="0" lang="en-US" sz="1200" b="0" i="0" u="none" strike="noStrike" kern="1200" cap="none" spc="0" normalizeH="0" baseline="0" noProof="0" dirty="0">
+                <a:ln>
+                  <a:noFill/>
+                </a:ln>
+                <a:solidFill>
+                  <a:prstClr val="black"/>
+                </a:solidFill>
+                <a:effectLst/>
+                <a:uLnTx/>
+                <a:uFillTx/>
+                <a:latin typeface="Gill Sans MT"/>
+                <a:ea typeface="+mn-ea"/>
+                <a:cs typeface="+mn-cs"/>
+              </a:rPr>
+              <a:t>C is cleared </a:t>
+            </a:r>
+            <a:r>
+              <a:rPr kumimoji="0" lang="en-US" sz="1200" b="0" i="0" u="none" strike="noStrike" kern="1200" cap="none" spc="0" normalizeH="0" baseline="0" noProof="0" dirty="0">
+                <a:ln>
+                  <a:noFill/>
+                </a:ln>
+                <a:solidFill>
+                  <a:prstClr val="black"/>
+                </a:solidFill>
+                <a:effectLst/>
+                <a:uLnTx/>
+                <a:uFillTx/>
+                <a:latin typeface="Gill Sans MT"/>
+                <a:ea typeface="+mn-ea"/>
+                <a:cs typeface="Times New Roman" pitchFamily="18" charset="0"/>
+              </a:rPr>
+              <a:t>upon </a:t>
+            </a:r>
+            <a:r>
+              <a:rPr kumimoji="0" lang="en-US" sz="1200" b="0" i="0" u="none" strike="noStrike" kern="1200" cap="none" spc="0" normalizeH="0" baseline="0" noProof="0" dirty="0">
+                <a:ln>
+                  <a:noFill/>
+                </a:ln>
+                <a:solidFill>
+                  <a:prstClr val="black"/>
+                </a:solidFill>
+                <a:effectLst/>
+                <a:uLnTx/>
+                <a:uFillTx/>
+                <a:latin typeface="Gill Sans MT"/>
+                <a:ea typeface="+mn-ea"/>
+                <a:cs typeface="+mn-cs"/>
+              </a:rPr>
+              <a:t>an </a:t>
+            </a:r>
+            <a:r>
+              <a:rPr kumimoji="0" lang="en-US" sz="1200" b="1" i="0" u="sng" strike="noStrike" kern="1200" cap="none" spc="0" normalizeH="0" baseline="0" noProof="0" dirty="0">
+                <a:ln>
+                  <a:noFill/>
+                </a:ln>
+                <a:solidFill>
+                  <a:srgbClr val="800000"/>
+                </a:solidFill>
+                <a:effectLst/>
+                <a:uLnTx/>
+                <a:uFillTx/>
+                <a:latin typeface="Gill Sans MT"/>
+                <a:ea typeface="+mn-ea"/>
+                <a:cs typeface="+mn-cs"/>
+              </a:rPr>
+              <a:t>unsigned</a:t>
+            </a:r>
+            <a:r>
+              <a:rPr kumimoji="0" lang="en-US" sz="1200" b="0" i="0" u="none" strike="noStrike" kern="1200" cap="none" spc="0" normalizeH="0" baseline="0" noProof="0" dirty="0">
+                <a:ln>
+                  <a:noFill/>
+                </a:ln>
+                <a:solidFill>
+                  <a:prstClr val="black"/>
+                </a:solidFill>
+                <a:effectLst/>
+                <a:uLnTx/>
+                <a:uFillTx/>
+                <a:latin typeface="Gill Sans MT"/>
+                <a:ea typeface="+mn-ea"/>
+                <a:cs typeface="+mn-cs"/>
+              </a:rPr>
+              <a:t> subtract if the answer is wrong</a:t>
+            </a:r>
+            <a:endParaRPr kumimoji="0" lang="en-US" sz="300" b="0" i="0" u="none" strike="noStrike" kern="1200" cap="none" spc="0" normalizeH="0" baseline="0" noProof="0" dirty="0">
+              <a:ln>
+                <a:noFill/>
+              </a:ln>
+              <a:solidFill>
+                <a:prstClr val="black"/>
+              </a:solidFill>
+              <a:effectLst/>
+              <a:uLnTx/>
+              <a:uFillTx/>
+              <a:latin typeface="Gill Sans MT"/>
+              <a:ea typeface="+mn-ea"/>
+              <a:cs typeface="+mn-cs"/>
+            </a:endParaRPr>
+          </a:p>
+          <a:p>
+            <a:endParaRPr lang="en-US" dirty="0"/>
+          </a:p>
+        </p:txBody>
+      </p:sp>
+    </p:spTree>
+    <p:extLst>
+      <p:ext uri="{BB962C8B-B14F-4D97-AF65-F5344CB8AC3E}">
+        <p14:creationId xmlns:p14="http://schemas.microsoft.com/office/powerpoint/2010/main" val="2841450837"/>
+      </p:ext>
+    </p:extLst>
+  </p:cSld>
+  <p:clrMapOvr>
+    <a:masterClrMapping/>
+  </p:clrMapOvr>
+</p:notes>
+</file>
+
+<file path=ppt/notesSlides/notesSlide2.xml><?xml version="1.0" encoding="utf-8"?>
+<p:notes xmlns:a="http://schemas.openxmlformats.org/drawingml/2006/main" xmlns:r="http://schemas.openxmlformats.org/officeDocument/2006/relationships" xmlns:p="http://schemas.openxmlformats.org/presentationml/2006/main">
+  <p:cSld>
+    <p:spTree>
+      <p:nvGrpSpPr>
+        <p:cNvPr id="1" name=""/>
+        <p:cNvGrpSpPr/>
+        <p:nvPr/>
+      </p:nvGrpSpPr>
+      <p:grpSpPr>
+        <a:xfrm>
+          <a:off x="0" y="0"/>
+          <a:ext cx="0" cy="0"/>
+          <a:chOff x="0" y="0"/>
+          <a:chExt cx="0" cy="0"/>
+        </a:xfrm>
+      </p:grpSpPr>
+      <p:sp>
+        <p:nvSpPr>
           <p:cNvPr id="2" name="Slide Image Placeholder 1"/>
           <p:cNvSpPr>
             <a:spLocks noGrp="1" noRot="1" noChangeAspect="1"/>
@@ -1111,7 +1300,7 @@
             <a:fld id="{2D71AD5F-E36F-46B9-A99B-7B025244359D}" type="slidenum">
               <a:rPr lang="en-US" smtClean="0"/>
               <a:pPr/>
-              <a:t>2</a:t>
+              <a:t>3</a:t>
             </a:fld>
             <a:endParaRPr lang="en-US"/>
           </a:p>
@@ -1130,7 +1319,7 @@
 </p:notes>
 </file>
 
-<file path=ppt/notesSlides/notesSlide2.xml><?xml version="1.0" encoding="utf-8"?>
+<file path=ppt/notesSlides/notesSlide3.xml><?xml version="1.0" encoding="utf-8"?>
 <p:notes xmlns:a="http://schemas.openxmlformats.org/drawingml/2006/main" xmlns:r="http://schemas.openxmlformats.org/officeDocument/2006/relationships" xmlns:p="http://schemas.openxmlformats.org/presentationml/2006/main">
   <p:cSld>
     <p:spTree>
@@ -5260,6 +5449,1547 @@
           </a:p>
         </p:txBody>
       </p:sp>
+      <p:sp>
+        <p:nvSpPr>
+          <p:cNvPr id="6" name="Rectangle 5"/>
+          <p:cNvSpPr/>
+          <p:nvPr/>
+        </p:nvSpPr>
+        <p:spPr>
+          <a:xfrm>
+            <a:off x="457200" y="1371600"/>
+            <a:ext cx="8153400" cy="369332"/>
+          </a:xfrm>
+          <a:prstGeom prst="rect">
+            <a:avLst/>
+          </a:prstGeom>
+        </p:spPr>
+        <p:txBody>
+          <a:bodyPr wrap="square">
+            <a:spAutoFit/>
+          </a:bodyPr>
+          <a:lstStyle/>
+          <a:p>
+            <a:r>
+              <a:rPr lang="en-US" dirty="0">
+                <a:solidFill>
+                  <a:srgbClr val="C00000"/>
+                </a:solidFill>
+              </a:rPr>
+              <a:t>Example:  </a:t>
+            </a:r>
+            <a:r>
+              <a:rPr lang="en-US" dirty="0" err="1">
+                <a:solidFill>
+                  <a:srgbClr val="C00000"/>
+                </a:solidFill>
+                <a:latin typeface="Consolas" panose="020B0609020204030204" pitchFamily="49" charset="0"/>
+                <a:cs typeface="Consolas" panose="020B0609020204030204" pitchFamily="49" charset="0"/>
+              </a:rPr>
+              <a:t>S</a:t>
+            </a:r>
+            <a:r>
+              <a:rPr lang="en-US" baseline="-25000" dirty="0" err="1">
+                <a:solidFill>
+                  <a:srgbClr val="C00000"/>
+                </a:solidFill>
+                <a:latin typeface="Consolas" panose="020B0609020204030204" pitchFamily="49" charset="0"/>
+                <a:cs typeface="Consolas" panose="020B0609020204030204" pitchFamily="49" charset="0"/>
+              </a:rPr>
+              <a:t>1</a:t>
+            </a:r>
+            <a:r>
+              <a:rPr lang="en-US" dirty="0" err="1">
+                <a:solidFill>
+                  <a:srgbClr val="C00000"/>
+                </a:solidFill>
+                <a:latin typeface="Consolas" panose="020B0609020204030204" pitchFamily="49" charset="0"/>
+                <a:cs typeface="Consolas" panose="020B0609020204030204" pitchFamily="49" charset="0"/>
+              </a:rPr>
+              <a:t>S</a:t>
+            </a:r>
+            <a:r>
+              <a:rPr lang="en-US" baseline="-25000" dirty="0" err="1">
+                <a:solidFill>
+                  <a:srgbClr val="C00000"/>
+                </a:solidFill>
+                <a:latin typeface="Consolas" panose="020B0609020204030204" pitchFamily="49" charset="0"/>
+                <a:cs typeface="Consolas" panose="020B0609020204030204" pitchFamily="49" charset="0"/>
+              </a:rPr>
+              <a:t>0</a:t>
+            </a:r>
+            <a:r>
+              <a:rPr lang="en-US" dirty="0">
+                <a:solidFill>
+                  <a:srgbClr val="C00000"/>
+                </a:solidFill>
+                <a:latin typeface="Consolas" panose="020B0609020204030204" pitchFamily="49" charset="0"/>
+                <a:cs typeface="Consolas" panose="020B0609020204030204" pitchFamily="49" charset="0"/>
+              </a:rPr>
+              <a:t> = 01</a:t>
+            </a:r>
+          </a:p>
+        </p:txBody>
+      </p:sp>
+      <p:graphicFrame>
+        <p:nvGraphicFramePr>
+          <p:cNvPr id="8" name="Table 7"/>
+          <p:cNvGraphicFramePr>
+            <a:graphicFrameLocks noGrp="1"/>
+          </p:cNvGraphicFramePr>
+          <p:nvPr>
+            <p:extLst>
+              <p:ext uri="{D42A27DB-BD31-4B8C-83A1-F6EECF244321}">
+                <p14:modId xmlns:p14="http://schemas.microsoft.com/office/powerpoint/2010/main" val="3756434776"/>
+              </p:ext>
+            </p:extLst>
+          </p:nvPr>
+        </p:nvGraphicFramePr>
+        <p:xfrm>
+          <a:off x="6248400" y="2418965"/>
+          <a:ext cx="2590800" cy="2045730"/>
+        </p:xfrm>
+        <a:graphic>
+          <a:graphicData uri="http://schemas.openxmlformats.org/drawingml/2006/table">
+            <a:tbl>
+              <a:tblPr firstRow="1" firstCol="1" bandRow="1">
+                <a:tableStyleId>{B301B821-A1FF-4177-AEE7-76D212191A09}</a:tableStyleId>
+              </a:tblPr>
+              <a:tblGrid>
+                <a:gridCol w="417963">
+                  <a:extLst>
+                    <a:ext uri="{9D8B030D-6E8A-4147-A177-3AD203B41FA5}">
+                      <a16:colId xmlns:a16="http://schemas.microsoft.com/office/drawing/2014/main" val="20000"/>
+                    </a:ext>
+                  </a:extLst>
+                </a:gridCol>
+                <a:gridCol w="417009">
+                  <a:extLst>
+                    <a:ext uri="{9D8B030D-6E8A-4147-A177-3AD203B41FA5}">
+                      <a16:colId xmlns:a16="http://schemas.microsoft.com/office/drawing/2014/main" val="20001"/>
+                    </a:ext>
+                  </a:extLst>
+                </a:gridCol>
+                <a:gridCol w="438957">
+                  <a:extLst>
+                    <a:ext uri="{9D8B030D-6E8A-4147-A177-3AD203B41FA5}">
+                      <a16:colId xmlns:a16="http://schemas.microsoft.com/office/drawing/2014/main" val="20002"/>
+                    </a:ext>
+                  </a:extLst>
+                </a:gridCol>
+                <a:gridCol w="438957">
+                  <a:extLst>
+                    <a:ext uri="{9D8B030D-6E8A-4147-A177-3AD203B41FA5}">
+                      <a16:colId xmlns:a16="http://schemas.microsoft.com/office/drawing/2014/main" val="20003"/>
+                    </a:ext>
+                  </a:extLst>
+                </a:gridCol>
+                <a:gridCol w="438957">
+                  <a:extLst>
+                    <a:ext uri="{9D8B030D-6E8A-4147-A177-3AD203B41FA5}">
+                      <a16:colId xmlns:a16="http://schemas.microsoft.com/office/drawing/2014/main" val="20004"/>
+                    </a:ext>
+                  </a:extLst>
+                </a:gridCol>
+                <a:gridCol w="438957">
+                  <a:extLst>
+                    <a:ext uri="{9D8B030D-6E8A-4147-A177-3AD203B41FA5}">
+                      <a16:colId xmlns:a16="http://schemas.microsoft.com/office/drawing/2014/main" val="20005"/>
+                    </a:ext>
+                  </a:extLst>
+                </a:gridCol>
+              </a:tblGrid>
+              <a:tr h="409146">
+                <a:tc>
+                  <a:txBody>
+                    <a:bodyPr/>
+                    <a:lstStyle/>
+                    <a:p>
+                      <a:pPr marL="0" marR="0" algn="ctr">
+                        <a:spcBef>
+                          <a:spcPts val="0"/>
+                        </a:spcBef>
+                        <a:spcAft>
+                          <a:spcPts val="0"/>
+                        </a:spcAft>
+                      </a:pPr>
+                      <a:r>
+                        <a:rPr lang="en-US" sz="1800" dirty="0" err="1">
+                          <a:effectLst/>
+                        </a:rPr>
+                        <a:t>S</a:t>
+                      </a:r>
+                      <a:r>
+                        <a:rPr lang="en-US" sz="1800" baseline="-25000" dirty="0" err="1">
+                          <a:effectLst/>
+                        </a:rPr>
+                        <a:t>1</a:t>
+                      </a:r>
+                      <a:endParaRPr lang="en-US" sz="1800" dirty="0">
+                        <a:effectLst/>
+                        <a:latin typeface="Consolas" panose="020B0609020204030204" pitchFamily="49" charset="0"/>
+                        <a:ea typeface="宋体"/>
+                        <a:cs typeface="Consolas" panose="020B0609020204030204" pitchFamily="49" charset="0"/>
+                      </a:endParaRPr>
+                    </a:p>
+                  </a:txBody>
+                  <a:tcPr marL="68580" marR="68580" marT="0" marB="0" anchor="ctr"/>
+                </a:tc>
+                <a:tc>
+                  <a:txBody>
+                    <a:bodyPr/>
+                    <a:lstStyle/>
+                    <a:p>
+                      <a:pPr marL="0" marR="0" algn="ctr">
+                        <a:spcBef>
+                          <a:spcPts val="0"/>
+                        </a:spcBef>
+                        <a:spcAft>
+                          <a:spcPts val="0"/>
+                        </a:spcAft>
+                      </a:pPr>
+                      <a:r>
+                        <a:rPr lang="en-US" sz="1800" dirty="0" err="1">
+                          <a:effectLst/>
+                        </a:rPr>
+                        <a:t>S</a:t>
+                      </a:r>
+                      <a:r>
+                        <a:rPr lang="en-US" sz="1800" baseline="-25000" dirty="0" err="1">
+                          <a:effectLst/>
+                        </a:rPr>
+                        <a:t>0</a:t>
+                      </a:r>
+                      <a:endParaRPr lang="en-US" sz="1800" dirty="0">
+                        <a:effectLst/>
+                        <a:latin typeface="Consolas" panose="020B0609020204030204" pitchFamily="49" charset="0"/>
+                        <a:ea typeface="宋体"/>
+                        <a:cs typeface="Consolas" panose="020B0609020204030204" pitchFamily="49" charset="0"/>
+                      </a:endParaRPr>
+                    </a:p>
+                  </a:txBody>
+                  <a:tcPr marL="68580" marR="68580" marT="0" marB="0" anchor="ctr">
+                    <a:lnR w="19050" cap="flat" cmpd="sng" algn="ctr">
+                      <a:solidFill>
+                        <a:schemeClr val="tx1"/>
+                      </a:solidFill>
+                      <a:prstDash val="solid"/>
+                      <a:round/>
+                      <a:headEnd type="none" w="med" len="med"/>
+                      <a:tailEnd type="none" w="med" len="med"/>
+                    </a:lnR>
+                  </a:tcPr>
+                </a:tc>
+                <a:tc>
+                  <a:txBody>
+                    <a:bodyPr/>
+                    <a:lstStyle/>
+                    <a:p>
+                      <a:pPr marL="0" marR="0" algn="ctr">
+                        <a:spcBef>
+                          <a:spcPts val="0"/>
+                        </a:spcBef>
+                        <a:spcAft>
+                          <a:spcPts val="0"/>
+                        </a:spcAft>
+                      </a:pPr>
+                      <a:r>
+                        <a:rPr lang="en-US" sz="1800">
+                          <a:effectLst/>
+                        </a:rPr>
+                        <a:t>Y</a:t>
+                      </a:r>
+                      <a:r>
+                        <a:rPr lang="en-US" sz="1800" baseline="-25000">
+                          <a:effectLst/>
+                        </a:rPr>
+                        <a:t>3</a:t>
+                      </a:r>
+                      <a:endParaRPr lang="en-US" sz="1800">
+                        <a:effectLst/>
+                        <a:latin typeface="Consolas" panose="020B0609020204030204" pitchFamily="49" charset="0"/>
+                        <a:ea typeface="宋体"/>
+                        <a:cs typeface="Consolas" panose="020B0609020204030204" pitchFamily="49" charset="0"/>
+                      </a:endParaRPr>
+                    </a:p>
+                  </a:txBody>
+                  <a:tcPr marL="68580" marR="68580" marT="0" marB="0" anchor="ctr">
+                    <a:lnL w="19050" cap="flat" cmpd="sng" algn="ctr">
+                      <a:solidFill>
+                        <a:schemeClr val="tx1"/>
+                      </a:solidFill>
+                      <a:prstDash val="solid"/>
+                      <a:round/>
+                      <a:headEnd type="none" w="med" len="med"/>
+                      <a:tailEnd type="none" w="med" len="med"/>
+                    </a:lnL>
+                  </a:tcPr>
+                </a:tc>
+                <a:tc>
+                  <a:txBody>
+                    <a:bodyPr/>
+                    <a:lstStyle/>
+                    <a:p>
+                      <a:pPr marL="0" marR="0" algn="ctr">
+                        <a:spcBef>
+                          <a:spcPts val="0"/>
+                        </a:spcBef>
+                        <a:spcAft>
+                          <a:spcPts val="0"/>
+                        </a:spcAft>
+                      </a:pPr>
+                      <a:r>
+                        <a:rPr lang="en-US" sz="1800">
+                          <a:effectLst/>
+                        </a:rPr>
+                        <a:t>Y</a:t>
+                      </a:r>
+                      <a:r>
+                        <a:rPr lang="en-US" sz="1800" baseline="-25000">
+                          <a:effectLst/>
+                        </a:rPr>
+                        <a:t>2</a:t>
+                      </a:r>
+                      <a:endParaRPr lang="en-US" sz="1800">
+                        <a:effectLst/>
+                        <a:latin typeface="Consolas" panose="020B0609020204030204" pitchFamily="49" charset="0"/>
+                        <a:ea typeface="宋体"/>
+                        <a:cs typeface="Consolas" panose="020B0609020204030204" pitchFamily="49" charset="0"/>
+                      </a:endParaRPr>
+                    </a:p>
+                  </a:txBody>
+                  <a:tcPr marL="68580" marR="68580" marT="0" marB="0" anchor="ctr"/>
+                </a:tc>
+                <a:tc>
+                  <a:txBody>
+                    <a:bodyPr/>
+                    <a:lstStyle/>
+                    <a:p>
+                      <a:pPr marL="0" marR="0" algn="ctr">
+                        <a:spcBef>
+                          <a:spcPts val="0"/>
+                        </a:spcBef>
+                        <a:spcAft>
+                          <a:spcPts val="0"/>
+                        </a:spcAft>
+                      </a:pPr>
+                      <a:r>
+                        <a:rPr lang="en-US" sz="1800">
+                          <a:effectLst/>
+                        </a:rPr>
+                        <a:t>Y</a:t>
+                      </a:r>
+                      <a:r>
+                        <a:rPr lang="en-US" sz="1800" baseline="-25000">
+                          <a:effectLst/>
+                        </a:rPr>
+                        <a:t>1</a:t>
+                      </a:r>
+                      <a:endParaRPr lang="en-US" sz="1800">
+                        <a:effectLst/>
+                        <a:latin typeface="Consolas" panose="020B0609020204030204" pitchFamily="49" charset="0"/>
+                        <a:ea typeface="宋体"/>
+                        <a:cs typeface="Consolas" panose="020B0609020204030204" pitchFamily="49" charset="0"/>
+                      </a:endParaRPr>
+                    </a:p>
+                  </a:txBody>
+                  <a:tcPr marL="68580" marR="68580" marT="0" marB="0" anchor="ctr"/>
+                </a:tc>
+                <a:tc>
+                  <a:txBody>
+                    <a:bodyPr/>
+                    <a:lstStyle/>
+                    <a:p>
+                      <a:pPr marL="0" marR="0" algn="ctr">
+                        <a:spcBef>
+                          <a:spcPts val="0"/>
+                        </a:spcBef>
+                        <a:spcAft>
+                          <a:spcPts val="0"/>
+                        </a:spcAft>
+                      </a:pPr>
+                      <a:r>
+                        <a:rPr lang="en-US" sz="1800">
+                          <a:effectLst/>
+                        </a:rPr>
+                        <a:t>Y</a:t>
+                      </a:r>
+                      <a:r>
+                        <a:rPr lang="en-US" sz="1800" baseline="-25000">
+                          <a:effectLst/>
+                        </a:rPr>
+                        <a:t>0</a:t>
+                      </a:r>
+                      <a:endParaRPr lang="en-US" sz="1800">
+                        <a:effectLst/>
+                        <a:latin typeface="Consolas" panose="020B0609020204030204" pitchFamily="49" charset="0"/>
+                        <a:ea typeface="宋体"/>
+                        <a:cs typeface="Consolas" panose="020B0609020204030204" pitchFamily="49" charset="0"/>
+                      </a:endParaRPr>
+                    </a:p>
+                  </a:txBody>
+                  <a:tcPr marL="68580" marR="68580" marT="0" marB="0" anchor="ctr"/>
+                </a:tc>
+                <a:extLst>
+                  <a:ext uri="{0D108BD9-81ED-4DB2-BD59-A6C34878D82A}">
+                    <a16:rowId xmlns:a16="http://schemas.microsoft.com/office/drawing/2014/main" val="10000"/>
+                  </a:ext>
+                </a:extLst>
+              </a:tr>
+              <a:tr h="409146">
+                <a:tc>
+                  <a:txBody>
+                    <a:bodyPr/>
+                    <a:lstStyle/>
+                    <a:p>
+                      <a:pPr marL="0" marR="0" algn="ctr">
+                        <a:spcBef>
+                          <a:spcPts val="0"/>
+                        </a:spcBef>
+                        <a:spcAft>
+                          <a:spcPts val="0"/>
+                        </a:spcAft>
+                      </a:pPr>
+                      <a:r>
+                        <a:rPr lang="en-US" sz="1800" b="1" dirty="0">
+                          <a:solidFill>
+                            <a:schemeClr val="tx1"/>
+                          </a:solidFill>
+                          <a:effectLst/>
+                          <a:latin typeface="Consolas" panose="020B0609020204030204" pitchFamily="49" charset="0"/>
+                          <a:cs typeface="Consolas" panose="020B0609020204030204" pitchFamily="49" charset="0"/>
+                        </a:rPr>
+                        <a:t>0</a:t>
+                      </a:r>
+                      <a:endParaRPr lang="en-US" sz="1800" b="1" dirty="0">
+                        <a:solidFill>
+                          <a:schemeClr val="tx1"/>
+                        </a:solidFill>
+                        <a:effectLst/>
+                        <a:latin typeface="Consolas" panose="020B0609020204030204" pitchFamily="49" charset="0"/>
+                        <a:ea typeface="宋体"/>
+                        <a:cs typeface="Consolas" panose="020B0609020204030204" pitchFamily="49" charset="0"/>
+                      </a:endParaRPr>
+                    </a:p>
+                  </a:txBody>
+                  <a:tcPr marL="68580" marR="68580" marT="0" marB="0" anchor="ctr"/>
+                </a:tc>
+                <a:tc>
+                  <a:txBody>
+                    <a:bodyPr/>
+                    <a:lstStyle/>
+                    <a:p>
+                      <a:pPr marL="0" marR="0" algn="ctr">
+                        <a:spcBef>
+                          <a:spcPts val="0"/>
+                        </a:spcBef>
+                        <a:spcAft>
+                          <a:spcPts val="0"/>
+                        </a:spcAft>
+                      </a:pPr>
+                      <a:r>
+                        <a:rPr lang="en-US" sz="1800" b="1" dirty="0">
+                          <a:solidFill>
+                            <a:schemeClr val="tx1"/>
+                          </a:solidFill>
+                          <a:effectLst/>
+                          <a:latin typeface="Consolas" panose="020B0609020204030204" pitchFamily="49" charset="0"/>
+                          <a:cs typeface="Consolas" panose="020B0609020204030204" pitchFamily="49" charset="0"/>
+                        </a:rPr>
+                        <a:t>0</a:t>
+                      </a:r>
+                      <a:endParaRPr lang="en-US" sz="1800" b="1" dirty="0">
+                        <a:solidFill>
+                          <a:schemeClr val="tx1"/>
+                        </a:solidFill>
+                        <a:effectLst/>
+                        <a:latin typeface="Consolas" panose="020B0609020204030204" pitchFamily="49" charset="0"/>
+                        <a:ea typeface="宋体"/>
+                        <a:cs typeface="Consolas" panose="020B0609020204030204" pitchFamily="49" charset="0"/>
+                      </a:endParaRPr>
+                    </a:p>
+                  </a:txBody>
+                  <a:tcPr marL="68580" marR="68580" marT="0" marB="0" anchor="ctr">
+                    <a:lnR w="19050" cap="flat" cmpd="sng" algn="ctr">
+                      <a:solidFill>
+                        <a:schemeClr val="tx1"/>
+                      </a:solidFill>
+                      <a:prstDash val="solid"/>
+                      <a:round/>
+                      <a:headEnd type="none" w="med" len="med"/>
+                      <a:tailEnd type="none" w="med" len="med"/>
+                    </a:lnR>
+                  </a:tcPr>
+                </a:tc>
+                <a:tc>
+                  <a:txBody>
+                    <a:bodyPr/>
+                    <a:lstStyle/>
+                    <a:p>
+                      <a:pPr marL="0" marR="0" algn="ctr">
+                        <a:spcBef>
+                          <a:spcPts val="0"/>
+                        </a:spcBef>
+                        <a:spcAft>
+                          <a:spcPts val="0"/>
+                        </a:spcAft>
+                      </a:pPr>
+                      <a:r>
+                        <a:rPr lang="en-US" sz="1800" dirty="0" err="1">
+                          <a:solidFill>
+                            <a:schemeClr val="tx1"/>
+                          </a:solidFill>
+                          <a:effectLst/>
+                        </a:rPr>
+                        <a:t>D</a:t>
+                      </a:r>
+                      <a:r>
+                        <a:rPr lang="en-US" sz="1800" baseline="-25000" dirty="0" err="1">
+                          <a:solidFill>
+                            <a:schemeClr val="tx1"/>
+                          </a:solidFill>
+                          <a:effectLst/>
+                        </a:rPr>
+                        <a:t>3</a:t>
+                      </a:r>
+                      <a:endParaRPr lang="en-US" sz="1800" dirty="0">
+                        <a:solidFill>
+                          <a:schemeClr val="tx1"/>
+                        </a:solidFill>
+                        <a:effectLst/>
+                        <a:latin typeface="Consolas" panose="020B0609020204030204" pitchFamily="49" charset="0"/>
+                        <a:ea typeface="宋体"/>
+                        <a:cs typeface="Consolas" panose="020B0609020204030204" pitchFamily="49" charset="0"/>
+                      </a:endParaRPr>
+                    </a:p>
+                  </a:txBody>
+                  <a:tcPr marL="68580" marR="68580" marT="0" marB="0" anchor="ctr">
+                    <a:lnL w="19050" cap="flat" cmpd="sng" algn="ctr">
+                      <a:solidFill>
+                        <a:schemeClr val="tx1"/>
+                      </a:solidFill>
+                      <a:prstDash val="solid"/>
+                      <a:round/>
+                      <a:headEnd type="none" w="med" len="med"/>
+                      <a:tailEnd type="none" w="med" len="med"/>
+                    </a:lnL>
+                  </a:tcPr>
+                </a:tc>
+                <a:tc>
+                  <a:txBody>
+                    <a:bodyPr/>
+                    <a:lstStyle/>
+                    <a:p>
+                      <a:pPr marL="0" marR="0" algn="ctr">
+                        <a:spcBef>
+                          <a:spcPts val="0"/>
+                        </a:spcBef>
+                        <a:spcAft>
+                          <a:spcPts val="0"/>
+                        </a:spcAft>
+                      </a:pPr>
+                      <a:r>
+                        <a:rPr lang="en-US" sz="1800" dirty="0" err="1">
+                          <a:solidFill>
+                            <a:schemeClr val="tx1"/>
+                          </a:solidFill>
+                          <a:effectLst/>
+                        </a:rPr>
+                        <a:t>D</a:t>
+                      </a:r>
+                      <a:r>
+                        <a:rPr lang="en-US" sz="1800" baseline="-25000" dirty="0" err="1">
+                          <a:solidFill>
+                            <a:schemeClr val="tx1"/>
+                          </a:solidFill>
+                          <a:effectLst/>
+                        </a:rPr>
+                        <a:t>2</a:t>
+                      </a:r>
+                      <a:endParaRPr lang="en-US" sz="1800" dirty="0">
+                        <a:solidFill>
+                          <a:schemeClr val="tx1"/>
+                        </a:solidFill>
+                        <a:effectLst/>
+                        <a:latin typeface="Consolas" panose="020B0609020204030204" pitchFamily="49" charset="0"/>
+                        <a:ea typeface="宋体"/>
+                        <a:cs typeface="Consolas" panose="020B0609020204030204" pitchFamily="49" charset="0"/>
+                      </a:endParaRPr>
+                    </a:p>
+                  </a:txBody>
+                  <a:tcPr marL="68580" marR="68580" marT="0" marB="0" anchor="ctr"/>
+                </a:tc>
+                <a:tc>
+                  <a:txBody>
+                    <a:bodyPr/>
+                    <a:lstStyle/>
+                    <a:p>
+                      <a:pPr marL="0" marR="0" algn="ctr">
+                        <a:spcBef>
+                          <a:spcPts val="0"/>
+                        </a:spcBef>
+                        <a:spcAft>
+                          <a:spcPts val="0"/>
+                        </a:spcAft>
+                      </a:pPr>
+                      <a:r>
+                        <a:rPr lang="en-US" sz="1800">
+                          <a:solidFill>
+                            <a:schemeClr val="tx1"/>
+                          </a:solidFill>
+                          <a:effectLst/>
+                        </a:rPr>
+                        <a:t>D</a:t>
+                      </a:r>
+                      <a:r>
+                        <a:rPr lang="en-US" sz="1800" baseline="-25000">
+                          <a:solidFill>
+                            <a:schemeClr val="tx1"/>
+                          </a:solidFill>
+                          <a:effectLst/>
+                        </a:rPr>
+                        <a:t>1</a:t>
+                      </a:r>
+                      <a:endParaRPr lang="en-US" sz="1800">
+                        <a:solidFill>
+                          <a:schemeClr val="tx1"/>
+                        </a:solidFill>
+                        <a:effectLst/>
+                        <a:latin typeface="Consolas" panose="020B0609020204030204" pitchFamily="49" charset="0"/>
+                        <a:ea typeface="宋体"/>
+                        <a:cs typeface="Consolas" panose="020B0609020204030204" pitchFamily="49" charset="0"/>
+                      </a:endParaRPr>
+                    </a:p>
+                  </a:txBody>
+                  <a:tcPr marL="68580" marR="68580" marT="0" marB="0" anchor="ctr"/>
+                </a:tc>
+                <a:tc>
+                  <a:txBody>
+                    <a:bodyPr/>
+                    <a:lstStyle/>
+                    <a:p>
+                      <a:pPr marL="0" marR="0" algn="ctr">
+                        <a:spcBef>
+                          <a:spcPts val="0"/>
+                        </a:spcBef>
+                        <a:spcAft>
+                          <a:spcPts val="0"/>
+                        </a:spcAft>
+                      </a:pPr>
+                      <a:r>
+                        <a:rPr lang="en-US" sz="1800" dirty="0" err="1">
+                          <a:solidFill>
+                            <a:schemeClr val="tx1"/>
+                          </a:solidFill>
+                          <a:effectLst/>
+                        </a:rPr>
+                        <a:t>D</a:t>
+                      </a:r>
+                      <a:r>
+                        <a:rPr lang="en-US" sz="1800" baseline="-25000" dirty="0" err="1">
+                          <a:solidFill>
+                            <a:schemeClr val="tx1"/>
+                          </a:solidFill>
+                          <a:effectLst/>
+                        </a:rPr>
+                        <a:t>0</a:t>
+                      </a:r>
+                      <a:endParaRPr lang="en-US" sz="1800" dirty="0">
+                        <a:solidFill>
+                          <a:schemeClr val="tx1"/>
+                        </a:solidFill>
+                        <a:effectLst/>
+                        <a:latin typeface="Consolas" panose="020B0609020204030204" pitchFamily="49" charset="0"/>
+                        <a:ea typeface="宋体"/>
+                        <a:cs typeface="Consolas" panose="020B0609020204030204" pitchFamily="49" charset="0"/>
+                      </a:endParaRPr>
+                    </a:p>
+                  </a:txBody>
+                  <a:tcPr marL="68580" marR="68580" marT="0" marB="0" anchor="ctr"/>
+                </a:tc>
+                <a:extLst>
+                  <a:ext uri="{0D108BD9-81ED-4DB2-BD59-A6C34878D82A}">
+                    <a16:rowId xmlns:a16="http://schemas.microsoft.com/office/drawing/2014/main" val="10001"/>
+                  </a:ext>
+                </a:extLst>
+              </a:tr>
+              <a:tr h="409146">
+                <a:tc>
+                  <a:txBody>
+                    <a:bodyPr/>
+                    <a:lstStyle/>
+                    <a:p>
+                      <a:pPr marL="0" marR="0" algn="ctr">
+                        <a:spcBef>
+                          <a:spcPts val="0"/>
+                        </a:spcBef>
+                        <a:spcAft>
+                          <a:spcPts val="0"/>
+                        </a:spcAft>
+                      </a:pPr>
+                      <a:r>
+                        <a:rPr lang="en-US" sz="1800" b="1" dirty="0">
+                          <a:solidFill>
+                            <a:srgbClr val="FF0000"/>
+                          </a:solidFill>
+                          <a:effectLst/>
+                          <a:latin typeface="Consolas" panose="020B0609020204030204" pitchFamily="49" charset="0"/>
+                          <a:cs typeface="Consolas" panose="020B0609020204030204" pitchFamily="49" charset="0"/>
+                        </a:rPr>
+                        <a:t>0</a:t>
+                      </a:r>
+                      <a:endParaRPr lang="en-US" sz="1800" b="1" dirty="0">
+                        <a:solidFill>
+                          <a:srgbClr val="FF0000"/>
+                        </a:solidFill>
+                        <a:effectLst/>
+                        <a:latin typeface="Consolas" panose="020B0609020204030204" pitchFamily="49" charset="0"/>
+                        <a:ea typeface="宋体"/>
+                        <a:cs typeface="Consolas" panose="020B0609020204030204" pitchFamily="49" charset="0"/>
+                      </a:endParaRPr>
+                    </a:p>
+                  </a:txBody>
+                  <a:tcPr marL="68580" marR="68580" marT="0" marB="0" anchor="ctr"/>
+                </a:tc>
+                <a:tc>
+                  <a:txBody>
+                    <a:bodyPr/>
+                    <a:lstStyle/>
+                    <a:p>
+                      <a:pPr marL="0" marR="0" algn="ctr">
+                        <a:spcBef>
+                          <a:spcPts val="0"/>
+                        </a:spcBef>
+                        <a:spcAft>
+                          <a:spcPts val="0"/>
+                        </a:spcAft>
+                      </a:pPr>
+                      <a:r>
+                        <a:rPr lang="en-US" sz="1800" b="1" dirty="0">
+                          <a:solidFill>
+                            <a:srgbClr val="FF0000"/>
+                          </a:solidFill>
+                          <a:effectLst/>
+                          <a:latin typeface="Consolas" panose="020B0609020204030204" pitchFamily="49" charset="0"/>
+                          <a:cs typeface="Consolas" panose="020B0609020204030204" pitchFamily="49" charset="0"/>
+                        </a:rPr>
+                        <a:t>1</a:t>
+                      </a:r>
+                      <a:endParaRPr lang="en-US" sz="1800" b="1" dirty="0">
+                        <a:solidFill>
+                          <a:srgbClr val="FF0000"/>
+                        </a:solidFill>
+                        <a:effectLst/>
+                        <a:latin typeface="Consolas" panose="020B0609020204030204" pitchFamily="49" charset="0"/>
+                        <a:ea typeface="宋体"/>
+                        <a:cs typeface="Consolas" panose="020B0609020204030204" pitchFamily="49" charset="0"/>
+                      </a:endParaRPr>
+                    </a:p>
+                  </a:txBody>
+                  <a:tcPr marL="68580" marR="68580" marT="0" marB="0" anchor="ctr">
+                    <a:lnR w="19050" cap="flat" cmpd="sng" algn="ctr">
+                      <a:solidFill>
+                        <a:schemeClr val="tx1"/>
+                      </a:solidFill>
+                      <a:prstDash val="solid"/>
+                      <a:round/>
+                      <a:headEnd type="none" w="med" len="med"/>
+                      <a:tailEnd type="none" w="med" len="med"/>
+                    </a:lnR>
+                  </a:tcPr>
+                </a:tc>
+                <a:tc>
+                  <a:txBody>
+                    <a:bodyPr/>
+                    <a:lstStyle/>
+                    <a:p>
+                      <a:pPr marL="0" marR="0" algn="ctr">
+                        <a:spcBef>
+                          <a:spcPts val="0"/>
+                        </a:spcBef>
+                        <a:spcAft>
+                          <a:spcPts val="0"/>
+                        </a:spcAft>
+                      </a:pPr>
+                      <a:r>
+                        <a:rPr lang="en-US" sz="1800" dirty="0" err="1">
+                          <a:solidFill>
+                            <a:srgbClr val="FF0000"/>
+                          </a:solidFill>
+                          <a:effectLst/>
+                        </a:rPr>
+                        <a:t>D</a:t>
+                      </a:r>
+                      <a:r>
+                        <a:rPr lang="en-US" sz="1800" baseline="-25000" dirty="0" err="1">
+                          <a:solidFill>
+                            <a:srgbClr val="FF0000"/>
+                          </a:solidFill>
+                          <a:effectLst/>
+                        </a:rPr>
+                        <a:t>0</a:t>
+                      </a:r>
+                      <a:endParaRPr lang="en-US" sz="1800" dirty="0">
+                        <a:solidFill>
+                          <a:srgbClr val="FF0000"/>
+                        </a:solidFill>
+                        <a:effectLst/>
+                        <a:latin typeface="Consolas" panose="020B0609020204030204" pitchFamily="49" charset="0"/>
+                        <a:ea typeface="宋体"/>
+                        <a:cs typeface="Consolas" panose="020B0609020204030204" pitchFamily="49" charset="0"/>
+                      </a:endParaRPr>
+                    </a:p>
+                  </a:txBody>
+                  <a:tcPr marL="68580" marR="68580" marT="0" marB="0" anchor="ctr">
+                    <a:lnL w="19050" cap="flat" cmpd="sng" algn="ctr">
+                      <a:solidFill>
+                        <a:schemeClr val="tx1"/>
+                      </a:solidFill>
+                      <a:prstDash val="solid"/>
+                      <a:round/>
+                      <a:headEnd type="none" w="med" len="med"/>
+                      <a:tailEnd type="none" w="med" len="med"/>
+                    </a:lnL>
+                  </a:tcPr>
+                </a:tc>
+                <a:tc>
+                  <a:txBody>
+                    <a:bodyPr/>
+                    <a:lstStyle/>
+                    <a:p>
+                      <a:pPr marL="0" marR="0" algn="ctr">
+                        <a:spcBef>
+                          <a:spcPts val="0"/>
+                        </a:spcBef>
+                        <a:spcAft>
+                          <a:spcPts val="0"/>
+                        </a:spcAft>
+                      </a:pPr>
+                      <a:r>
+                        <a:rPr lang="en-US" sz="1800" dirty="0" err="1">
+                          <a:solidFill>
+                            <a:srgbClr val="FF0000"/>
+                          </a:solidFill>
+                          <a:effectLst/>
+                        </a:rPr>
+                        <a:t>D</a:t>
+                      </a:r>
+                      <a:r>
+                        <a:rPr lang="en-US" sz="1800" baseline="-25000" dirty="0" err="1">
+                          <a:solidFill>
+                            <a:srgbClr val="FF0000"/>
+                          </a:solidFill>
+                          <a:effectLst/>
+                        </a:rPr>
+                        <a:t>3</a:t>
+                      </a:r>
+                      <a:endParaRPr lang="en-US" sz="1800" dirty="0">
+                        <a:solidFill>
+                          <a:srgbClr val="FF0000"/>
+                        </a:solidFill>
+                        <a:effectLst/>
+                        <a:latin typeface="Consolas" panose="020B0609020204030204" pitchFamily="49" charset="0"/>
+                        <a:ea typeface="宋体"/>
+                        <a:cs typeface="Consolas" panose="020B0609020204030204" pitchFamily="49" charset="0"/>
+                      </a:endParaRPr>
+                    </a:p>
+                  </a:txBody>
+                  <a:tcPr marL="68580" marR="68580" marT="0" marB="0" anchor="ctr"/>
+                </a:tc>
+                <a:tc>
+                  <a:txBody>
+                    <a:bodyPr/>
+                    <a:lstStyle/>
+                    <a:p>
+                      <a:pPr marL="0" marR="0" algn="ctr">
+                        <a:spcBef>
+                          <a:spcPts val="0"/>
+                        </a:spcBef>
+                        <a:spcAft>
+                          <a:spcPts val="0"/>
+                        </a:spcAft>
+                      </a:pPr>
+                      <a:r>
+                        <a:rPr lang="en-US" sz="1800" dirty="0" err="1">
+                          <a:solidFill>
+                            <a:srgbClr val="FF0000"/>
+                          </a:solidFill>
+                          <a:effectLst/>
+                        </a:rPr>
+                        <a:t>D</a:t>
+                      </a:r>
+                      <a:r>
+                        <a:rPr lang="en-US" sz="1800" baseline="-25000" dirty="0" err="1">
+                          <a:solidFill>
+                            <a:srgbClr val="FF0000"/>
+                          </a:solidFill>
+                          <a:effectLst/>
+                        </a:rPr>
+                        <a:t>2</a:t>
+                      </a:r>
+                      <a:endParaRPr lang="en-US" sz="1800" dirty="0">
+                        <a:solidFill>
+                          <a:srgbClr val="FF0000"/>
+                        </a:solidFill>
+                        <a:effectLst/>
+                        <a:latin typeface="Consolas" panose="020B0609020204030204" pitchFamily="49" charset="0"/>
+                        <a:ea typeface="宋体"/>
+                        <a:cs typeface="Consolas" panose="020B0609020204030204" pitchFamily="49" charset="0"/>
+                      </a:endParaRPr>
+                    </a:p>
+                  </a:txBody>
+                  <a:tcPr marL="68580" marR="68580" marT="0" marB="0" anchor="ctr"/>
+                </a:tc>
+                <a:tc>
+                  <a:txBody>
+                    <a:bodyPr/>
+                    <a:lstStyle/>
+                    <a:p>
+                      <a:pPr marL="0" marR="0" algn="ctr">
+                        <a:spcBef>
+                          <a:spcPts val="0"/>
+                        </a:spcBef>
+                        <a:spcAft>
+                          <a:spcPts val="0"/>
+                        </a:spcAft>
+                      </a:pPr>
+                      <a:r>
+                        <a:rPr lang="en-US" sz="1800" dirty="0" err="1">
+                          <a:solidFill>
+                            <a:srgbClr val="FF0000"/>
+                          </a:solidFill>
+                          <a:effectLst/>
+                        </a:rPr>
+                        <a:t>D</a:t>
+                      </a:r>
+                      <a:r>
+                        <a:rPr lang="en-US" sz="1800" baseline="-25000" dirty="0" err="1">
+                          <a:solidFill>
+                            <a:srgbClr val="FF0000"/>
+                          </a:solidFill>
+                          <a:effectLst/>
+                        </a:rPr>
+                        <a:t>1</a:t>
+                      </a:r>
+                      <a:endParaRPr lang="en-US" sz="1800" dirty="0">
+                        <a:solidFill>
+                          <a:srgbClr val="FF0000"/>
+                        </a:solidFill>
+                        <a:effectLst/>
+                        <a:latin typeface="Consolas" panose="020B0609020204030204" pitchFamily="49" charset="0"/>
+                        <a:ea typeface="宋体"/>
+                        <a:cs typeface="Consolas" panose="020B0609020204030204" pitchFamily="49" charset="0"/>
+                      </a:endParaRPr>
+                    </a:p>
+                  </a:txBody>
+                  <a:tcPr marL="68580" marR="68580" marT="0" marB="0" anchor="ctr"/>
+                </a:tc>
+                <a:extLst>
+                  <a:ext uri="{0D108BD9-81ED-4DB2-BD59-A6C34878D82A}">
+                    <a16:rowId xmlns:a16="http://schemas.microsoft.com/office/drawing/2014/main" val="10002"/>
+                  </a:ext>
+                </a:extLst>
+              </a:tr>
+              <a:tr h="409146">
+                <a:tc>
+                  <a:txBody>
+                    <a:bodyPr/>
+                    <a:lstStyle/>
+                    <a:p>
+                      <a:pPr marL="0" marR="0" algn="ctr">
+                        <a:spcBef>
+                          <a:spcPts val="0"/>
+                        </a:spcBef>
+                        <a:spcAft>
+                          <a:spcPts val="0"/>
+                        </a:spcAft>
+                      </a:pPr>
+                      <a:r>
+                        <a:rPr lang="en-US" sz="1800" b="1">
+                          <a:effectLst/>
+                          <a:latin typeface="Consolas" panose="020B0609020204030204" pitchFamily="49" charset="0"/>
+                          <a:cs typeface="Consolas" panose="020B0609020204030204" pitchFamily="49" charset="0"/>
+                        </a:rPr>
+                        <a:t>1</a:t>
+                      </a:r>
+                      <a:endParaRPr lang="en-US" sz="1800" b="1">
+                        <a:effectLst/>
+                        <a:latin typeface="Consolas" panose="020B0609020204030204" pitchFamily="49" charset="0"/>
+                        <a:ea typeface="宋体"/>
+                        <a:cs typeface="Consolas" panose="020B0609020204030204" pitchFamily="49" charset="0"/>
+                      </a:endParaRPr>
+                    </a:p>
+                  </a:txBody>
+                  <a:tcPr marL="68580" marR="68580" marT="0" marB="0" anchor="ctr"/>
+                </a:tc>
+                <a:tc>
+                  <a:txBody>
+                    <a:bodyPr/>
+                    <a:lstStyle/>
+                    <a:p>
+                      <a:pPr marL="0" marR="0" algn="ctr">
+                        <a:spcBef>
+                          <a:spcPts val="0"/>
+                        </a:spcBef>
+                        <a:spcAft>
+                          <a:spcPts val="0"/>
+                        </a:spcAft>
+                      </a:pPr>
+                      <a:r>
+                        <a:rPr lang="en-US" sz="1800" b="1" dirty="0">
+                          <a:effectLst/>
+                          <a:latin typeface="Consolas" panose="020B0609020204030204" pitchFamily="49" charset="0"/>
+                          <a:cs typeface="Consolas" panose="020B0609020204030204" pitchFamily="49" charset="0"/>
+                        </a:rPr>
+                        <a:t>0</a:t>
+                      </a:r>
+                      <a:endParaRPr lang="en-US" sz="1800" b="1" dirty="0">
+                        <a:effectLst/>
+                        <a:latin typeface="Consolas" panose="020B0609020204030204" pitchFamily="49" charset="0"/>
+                        <a:ea typeface="宋体"/>
+                        <a:cs typeface="Consolas" panose="020B0609020204030204" pitchFamily="49" charset="0"/>
+                      </a:endParaRPr>
+                    </a:p>
+                  </a:txBody>
+                  <a:tcPr marL="68580" marR="68580" marT="0" marB="0" anchor="ctr">
+                    <a:lnR w="19050" cap="flat" cmpd="sng" algn="ctr">
+                      <a:solidFill>
+                        <a:schemeClr val="tx1"/>
+                      </a:solidFill>
+                      <a:prstDash val="solid"/>
+                      <a:round/>
+                      <a:headEnd type="none" w="med" len="med"/>
+                      <a:tailEnd type="none" w="med" len="med"/>
+                    </a:lnR>
+                  </a:tcPr>
+                </a:tc>
+                <a:tc>
+                  <a:txBody>
+                    <a:bodyPr/>
+                    <a:lstStyle/>
+                    <a:p>
+                      <a:pPr marL="0" marR="0" algn="ctr">
+                        <a:spcBef>
+                          <a:spcPts val="0"/>
+                        </a:spcBef>
+                        <a:spcAft>
+                          <a:spcPts val="0"/>
+                        </a:spcAft>
+                      </a:pPr>
+                      <a:r>
+                        <a:rPr lang="en-US" sz="1800">
+                          <a:effectLst/>
+                        </a:rPr>
+                        <a:t>D</a:t>
+                      </a:r>
+                      <a:r>
+                        <a:rPr lang="en-US" sz="1800" baseline="-25000">
+                          <a:effectLst/>
+                        </a:rPr>
+                        <a:t>1</a:t>
+                      </a:r>
+                      <a:endParaRPr lang="en-US" sz="1800">
+                        <a:effectLst/>
+                        <a:latin typeface="Consolas" panose="020B0609020204030204" pitchFamily="49" charset="0"/>
+                        <a:ea typeface="宋体"/>
+                        <a:cs typeface="Consolas" panose="020B0609020204030204" pitchFamily="49" charset="0"/>
+                      </a:endParaRPr>
+                    </a:p>
+                  </a:txBody>
+                  <a:tcPr marL="68580" marR="68580" marT="0" marB="0" anchor="ctr">
+                    <a:lnL w="19050" cap="flat" cmpd="sng" algn="ctr">
+                      <a:solidFill>
+                        <a:schemeClr val="tx1"/>
+                      </a:solidFill>
+                      <a:prstDash val="solid"/>
+                      <a:round/>
+                      <a:headEnd type="none" w="med" len="med"/>
+                      <a:tailEnd type="none" w="med" len="med"/>
+                    </a:lnL>
+                  </a:tcPr>
+                </a:tc>
+                <a:tc>
+                  <a:txBody>
+                    <a:bodyPr/>
+                    <a:lstStyle/>
+                    <a:p>
+                      <a:pPr marL="0" marR="0" algn="ctr">
+                        <a:spcBef>
+                          <a:spcPts val="0"/>
+                        </a:spcBef>
+                        <a:spcAft>
+                          <a:spcPts val="0"/>
+                        </a:spcAft>
+                      </a:pPr>
+                      <a:r>
+                        <a:rPr lang="en-US" sz="1800" dirty="0" err="1">
+                          <a:effectLst/>
+                        </a:rPr>
+                        <a:t>D</a:t>
+                      </a:r>
+                      <a:r>
+                        <a:rPr lang="en-US" sz="1800" baseline="-25000" dirty="0" err="1">
+                          <a:effectLst/>
+                        </a:rPr>
+                        <a:t>0</a:t>
+                      </a:r>
+                      <a:endParaRPr lang="en-US" sz="1800" dirty="0">
+                        <a:effectLst/>
+                        <a:latin typeface="Consolas" panose="020B0609020204030204" pitchFamily="49" charset="0"/>
+                        <a:ea typeface="宋体"/>
+                        <a:cs typeface="Consolas" panose="020B0609020204030204" pitchFamily="49" charset="0"/>
+                      </a:endParaRPr>
+                    </a:p>
+                  </a:txBody>
+                  <a:tcPr marL="68580" marR="68580" marT="0" marB="0" anchor="ctr"/>
+                </a:tc>
+                <a:tc>
+                  <a:txBody>
+                    <a:bodyPr/>
+                    <a:lstStyle/>
+                    <a:p>
+                      <a:pPr marL="0" marR="0" algn="ctr">
+                        <a:spcBef>
+                          <a:spcPts val="0"/>
+                        </a:spcBef>
+                        <a:spcAft>
+                          <a:spcPts val="0"/>
+                        </a:spcAft>
+                      </a:pPr>
+                      <a:r>
+                        <a:rPr lang="en-US" sz="1800" dirty="0" err="1">
+                          <a:effectLst/>
+                        </a:rPr>
+                        <a:t>D</a:t>
+                      </a:r>
+                      <a:r>
+                        <a:rPr lang="en-US" sz="1800" baseline="-25000" dirty="0" err="1">
+                          <a:effectLst/>
+                        </a:rPr>
+                        <a:t>3</a:t>
+                      </a:r>
+                      <a:endParaRPr lang="en-US" sz="1800" dirty="0">
+                        <a:effectLst/>
+                        <a:latin typeface="Consolas" panose="020B0609020204030204" pitchFamily="49" charset="0"/>
+                        <a:ea typeface="宋体"/>
+                        <a:cs typeface="Consolas" panose="020B0609020204030204" pitchFamily="49" charset="0"/>
+                      </a:endParaRPr>
+                    </a:p>
+                  </a:txBody>
+                  <a:tcPr marL="68580" marR="68580" marT="0" marB="0" anchor="ctr"/>
+                </a:tc>
+                <a:tc>
+                  <a:txBody>
+                    <a:bodyPr/>
+                    <a:lstStyle/>
+                    <a:p>
+                      <a:pPr marL="0" marR="0" algn="ctr">
+                        <a:spcBef>
+                          <a:spcPts val="0"/>
+                        </a:spcBef>
+                        <a:spcAft>
+                          <a:spcPts val="0"/>
+                        </a:spcAft>
+                      </a:pPr>
+                      <a:r>
+                        <a:rPr lang="en-US" sz="1800">
+                          <a:effectLst/>
+                        </a:rPr>
+                        <a:t>D</a:t>
+                      </a:r>
+                      <a:r>
+                        <a:rPr lang="en-US" sz="1800" baseline="-25000">
+                          <a:effectLst/>
+                        </a:rPr>
+                        <a:t>2</a:t>
+                      </a:r>
+                      <a:endParaRPr lang="en-US" sz="1800">
+                        <a:effectLst/>
+                        <a:latin typeface="Consolas" panose="020B0609020204030204" pitchFamily="49" charset="0"/>
+                        <a:ea typeface="宋体"/>
+                        <a:cs typeface="Consolas" panose="020B0609020204030204" pitchFamily="49" charset="0"/>
+                      </a:endParaRPr>
+                    </a:p>
+                  </a:txBody>
+                  <a:tcPr marL="68580" marR="68580" marT="0" marB="0" anchor="ctr"/>
+                </a:tc>
+                <a:extLst>
+                  <a:ext uri="{0D108BD9-81ED-4DB2-BD59-A6C34878D82A}">
+                    <a16:rowId xmlns:a16="http://schemas.microsoft.com/office/drawing/2014/main" val="10003"/>
+                  </a:ext>
+                </a:extLst>
+              </a:tr>
+              <a:tr h="409146">
+                <a:tc>
+                  <a:txBody>
+                    <a:bodyPr/>
+                    <a:lstStyle/>
+                    <a:p>
+                      <a:pPr marL="0" marR="0" algn="ctr">
+                        <a:spcBef>
+                          <a:spcPts val="0"/>
+                        </a:spcBef>
+                        <a:spcAft>
+                          <a:spcPts val="0"/>
+                        </a:spcAft>
+                      </a:pPr>
+                      <a:r>
+                        <a:rPr lang="en-US" sz="1800" b="1">
+                          <a:effectLst/>
+                          <a:latin typeface="Consolas" panose="020B0609020204030204" pitchFamily="49" charset="0"/>
+                          <a:cs typeface="Consolas" panose="020B0609020204030204" pitchFamily="49" charset="0"/>
+                        </a:rPr>
+                        <a:t>1</a:t>
+                      </a:r>
+                      <a:endParaRPr lang="en-US" sz="1800" b="1">
+                        <a:effectLst/>
+                        <a:latin typeface="Consolas" panose="020B0609020204030204" pitchFamily="49" charset="0"/>
+                        <a:ea typeface="宋体"/>
+                        <a:cs typeface="Consolas" panose="020B0609020204030204" pitchFamily="49" charset="0"/>
+                      </a:endParaRPr>
+                    </a:p>
+                  </a:txBody>
+                  <a:tcPr marL="68580" marR="68580" marT="0" marB="0" anchor="ctr"/>
+                </a:tc>
+                <a:tc>
+                  <a:txBody>
+                    <a:bodyPr/>
+                    <a:lstStyle/>
+                    <a:p>
+                      <a:pPr marL="0" marR="0" algn="ctr">
+                        <a:spcBef>
+                          <a:spcPts val="0"/>
+                        </a:spcBef>
+                        <a:spcAft>
+                          <a:spcPts val="0"/>
+                        </a:spcAft>
+                      </a:pPr>
+                      <a:r>
+                        <a:rPr lang="en-US" sz="1800" b="1" dirty="0">
+                          <a:effectLst/>
+                          <a:latin typeface="Consolas" panose="020B0609020204030204" pitchFamily="49" charset="0"/>
+                          <a:cs typeface="Consolas" panose="020B0609020204030204" pitchFamily="49" charset="0"/>
+                        </a:rPr>
+                        <a:t>1</a:t>
+                      </a:r>
+                      <a:endParaRPr lang="en-US" sz="1800" b="1" dirty="0">
+                        <a:effectLst/>
+                        <a:latin typeface="Consolas" panose="020B0609020204030204" pitchFamily="49" charset="0"/>
+                        <a:ea typeface="宋体"/>
+                        <a:cs typeface="Consolas" panose="020B0609020204030204" pitchFamily="49" charset="0"/>
+                      </a:endParaRPr>
+                    </a:p>
+                  </a:txBody>
+                  <a:tcPr marL="68580" marR="68580" marT="0" marB="0" anchor="ctr">
+                    <a:lnR w="19050" cap="flat" cmpd="sng" algn="ctr">
+                      <a:solidFill>
+                        <a:schemeClr val="tx1"/>
+                      </a:solidFill>
+                      <a:prstDash val="solid"/>
+                      <a:round/>
+                      <a:headEnd type="none" w="med" len="med"/>
+                      <a:tailEnd type="none" w="med" len="med"/>
+                    </a:lnR>
+                  </a:tcPr>
+                </a:tc>
+                <a:tc>
+                  <a:txBody>
+                    <a:bodyPr/>
+                    <a:lstStyle/>
+                    <a:p>
+                      <a:pPr marL="0" marR="0" algn="ctr">
+                        <a:spcBef>
+                          <a:spcPts val="0"/>
+                        </a:spcBef>
+                        <a:spcAft>
+                          <a:spcPts val="0"/>
+                        </a:spcAft>
+                      </a:pPr>
+                      <a:r>
+                        <a:rPr lang="en-US" sz="1800">
+                          <a:effectLst/>
+                        </a:rPr>
+                        <a:t>D</a:t>
+                      </a:r>
+                      <a:r>
+                        <a:rPr lang="en-US" sz="1800" baseline="-25000">
+                          <a:effectLst/>
+                        </a:rPr>
+                        <a:t>2</a:t>
+                      </a:r>
+                      <a:endParaRPr lang="en-US" sz="1800">
+                        <a:effectLst/>
+                        <a:latin typeface="Consolas" panose="020B0609020204030204" pitchFamily="49" charset="0"/>
+                        <a:ea typeface="宋体"/>
+                        <a:cs typeface="Consolas" panose="020B0609020204030204" pitchFamily="49" charset="0"/>
+                      </a:endParaRPr>
+                    </a:p>
+                  </a:txBody>
+                  <a:tcPr marL="68580" marR="68580" marT="0" marB="0" anchor="ctr">
+                    <a:lnL w="19050" cap="flat" cmpd="sng" algn="ctr">
+                      <a:solidFill>
+                        <a:schemeClr val="tx1"/>
+                      </a:solidFill>
+                      <a:prstDash val="solid"/>
+                      <a:round/>
+                      <a:headEnd type="none" w="med" len="med"/>
+                      <a:tailEnd type="none" w="med" len="med"/>
+                    </a:lnL>
+                  </a:tcPr>
+                </a:tc>
+                <a:tc>
+                  <a:txBody>
+                    <a:bodyPr/>
+                    <a:lstStyle/>
+                    <a:p>
+                      <a:pPr marL="0" marR="0" algn="ctr">
+                        <a:spcBef>
+                          <a:spcPts val="0"/>
+                        </a:spcBef>
+                        <a:spcAft>
+                          <a:spcPts val="0"/>
+                        </a:spcAft>
+                      </a:pPr>
+                      <a:r>
+                        <a:rPr lang="en-US" sz="1800">
+                          <a:effectLst/>
+                        </a:rPr>
+                        <a:t>D</a:t>
+                      </a:r>
+                      <a:r>
+                        <a:rPr lang="en-US" sz="1800" baseline="-25000">
+                          <a:effectLst/>
+                        </a:rPr>
+                        <a:t>1</a:t>
+                      </a:r>
+                      <a:endParaRPr lang="en-US" sz="1800">
+                        <a:effectLst/>
+                        <a:latin typeface="Consolas" panose="020B0609020204030204" pitchFamily="49" charset="0"/>
+                        <a:ea typeface="宋体"/>
+                        <a:cs typeface="Consolas" panose="020B0609020204030204" pitchFamily="49" charset="0"/>
+                      </a:endParaRPr>
+                    </a:p>
+                  </a:txBody>
+                  <a:tcPr marL="68580" marR="68580" marT="0" marB="0" anchor="ctr"/>
+                </a:tc>
+                <a:tc>
+                  <a:txBody>
+                    <a:bodyPr/>
+                    <a:lstStyle/>
+                    <a:p>
+                      <a:pPr marL="0" marR="0" algn="ctr">
+                        <a:spcBef>
+                          <a:spcPts val="0"/>
+                        </a:spcBef>
+                        <a:spcAft>
+                          <a:spcPts val="0"/>
+                        </a:spcAft>
+                      </a:pPr>
+                      <a:r>
+                        <a:rPr lang="en-US" sz="1800" dirty="0" err="1">
+                          <a:effectLst/>
+                        </a:rPr>
+                        <a:t>D</a:t>
+                      </a:r>
+                      <a:r>
+                        <a:rPr lang="en-US" sz="1800" baseline="-25000" dirty="0" err="1">
+                          <a:effectLst/>
+                        </a:rPr>
+                        <a:t>0</a:t>
+                      </a:r>
+                      <a:endParaRPr lang="en-US" sz="1800" dirty="0">
+                        <a:effectLst/>
+                        <a:latin typeface="Consolas" panose="020B0609020204030204" pitchFamily="49" charset="0"/>
+                        <a:ea typeface="宋体"/>
+                        <a:cs typeface="Consolas" panose="020B0609020204030204" pitchFamily="49" charset="0"/>
+                      </a:endParaRPr>
+                    </a:p>
+                  </a:txBody>
+                  <a:tcPr marL="68580" marR="68580" marT="0" marB="0" anchor="ctr"/>
+                </a:tc>
+                <a:tc>
+                  <a:txBody>
+                    <a:bodyPr/>
+                    <a:lstStyle/>
+                    <a:p>
+                      <a:pPr marL="0" marR="0" algn="ctr">
+                        <a:spcBef>
+                          <a:spcPts val="0"/>
+                        </a:spcBef>
+                        <a:spcAft>
+                          <a:spcPts val="0"/>
+                        </a:spcAft>
+                      </a:pPr>
+                      <a:r>
+                        <a:rPr lang="en-US" sz="1800" dirty="0" err="1">
+                          <a:effectLst/>
+                        </a:rPr>
+                        <a:t>D</a:t>
+                      </a:r>
+                      <a:r>
+                        <a:rPr lang="en-US" sz="1800" baseline="-25000" dirty="0" err="1">
+                          <a:effectLst/>
+                        </a:rPr>
+                        <a:t>3</a:t>
+                      </a:r>
+                      <a:endParaRPr lang="en-US" sz="1800" dirty="0">
+                        <a:effectLst/>
+                        <a:latin typeface="Consolas" panose="020B0609020204030204" pitchFamily="49" charset="0"/>
+                        <a:ea typeface="宋体"/>
+                        <a:cs typeface="Consolas" panose="020B0609020204030204" pitchFamily="49" charset="0"/>
+                      </a:endParaRPr>
+                    </a:p>
+                  </a:txBody>
+                  <a:tcPr marL="68580" marR="68580" marT="0" marB="0" anchor="ctr"/>
+                </a:tc>
+                <a:extLst>
+                  <a:ext uri="{0D108BD9-81ED-4DB2-BD59-A6C34878D82A}">
+                    <a16:rowId xmlns:a16="http://schemas.microsoft.com/office/drawing/2014/main" val="10004"/>
+                  </a:ext>
+                </a:extLst>
+              </a:tr>
+            </a:tbl>
+          </a:graphicData>
+        </a:graphic>
+      </p:graphicFrame>
+      <p:pic>
+        <p:nvPicPr>
+          <p:cNvPr id="5" name="Picture 4"/>
+          <p:cNvPicPr>
+            <a:picLocks noChangeAspect="1"/>
+          </p:cNvPicPr>
+          <p:nvPr/>
+        </p:nvPicPr>
+        <p:blipFill>
+          <a:blip r:embed="rId2" cstate="print">
+            <a:extLst>
+              <a:ext uri="{28A0092B-C50C-407E-A947-70E740481C1C}">
+                <a14:useLocalDpi xmlns:a14="http://schemas.microsoft.com/office/drawing/2010/main" val="0"/>
+              </a:ext>
+            </a:extLst>
+          </a:blip>
+          <a:stretch>
+            <a:fillRect/>
+          </a:stretch>
+        </p:blipFill>
+        <p:spPr>
+          <a:xfrm>
+            <a:off x="256021" y="2179314"/>
+            <a:ext cx="5611379" cy="2773686"/>
+          </a:xfrm>
+          <a:prstGeom prst="rect">
+            <a:avLst/>
+          </a:prstGeom>
+        </p:spPr>
+      </p:pic>
+    </p:spTree>
+    <p:extLst>
+      <p:ext uri="{BB962C8B-B14F-4D97-AF65-F5344CB8AC3E}">
+        <p14:creationId xmlns:p14="http://schemas.microsoft.com/office/powerpoint/2010/main" val="4133200898"/>
+      </p:ext>
+    </p:extLst>
+  </p:cSld>
+  <p:clrMapOvr>
+    <a:masterClrMapping/>
+  </p:clrMapOvr>
+</p:sld>
+</file>
+
+<file path=ppt/slides/slide11.xml><?xml version="1.0" encoding="utf-8"?>
+<p:sld xmlns:a="http://schemas.openxmlformats.org/drawingml/2006/main" xmlns:r="http://schemas.openxmlformats.org/officeDocument/2006/relationships" xmlns:p="http://schemas.openxmlformats.org/presentationml/2006/main">
+  <p:cSld>
+    <p:spTree>
+      <p:nvGrpSpPr>
+        <p:cNvPr id="1" name=""/>
+        <p:cNvGrpSpPr/>
+        <p:nvPr/>
+      </p:nvGrpSpPr>
+      <p:grpSpPr>
+        <a:xfrm>
+          <a:off x="0" y="0"/>
+          <a:ext cx="0" cy="0"/>
+          <a:chOff x="0" y="0"/>
+          <a:chExt cx="0" cy="0"/>
+        </a:xfrm>
+      </p:grpSpPr>
+      <p:sp>
+        <p:nvSpPr>
+          <p:cNvPr id="2" name="Title 1"/>
+          <p:cNvSpPr>
+            <a:spLocks noGrp="1"/>
+          </p:cNvSpPr>
+          <p:nvPr>
+            <p:ph type="title"/>
+          </p:nvPr>
+        </p:nvSpPr>
+        <p:spPr/>
+        <p:txBody>
+          <a:bodyPr/>
+          <a:lstStyle/>
+          <a:p>
+            <a:r>
+              <a:rPr lang="en-US" dirty="0"/>
+              <a:t>Implementation of Barrel Shifter</a:t>
+            </a:r>
+          </a:p>
+        </p:txBody>
+      </p:sp>
+      <p:sp>
+        <p:nvSpPr>
+          <p:cNvPr id="3" name="Slide Number Placeholder 2"/>
+          <p:cNvSpPr>
+            <a:spLocks noGrp="1"/>
+          </p:cNvSpPr>
+          <p:nvPr>
+            <p:ph type="sldNum" sz="quarter" idx="12"/>
+          </p:nvPr>
+        </p:nvSpPr>
+        <p:spPr/>
+        <p:txBody>
+          <a:bodyPr/>
+          <a:lstStyle/>
+          <a:p>
+            <a:fld id="{EA7C8D44-3667-46F6-9772-CC52308E2A7F}" type="slidenum">
+              <a:rPr kumimoji="0" lang="en-US" smtClean="0"/>
+              <a:pPr/>
+              <a:t>11</a:t>
+            </a:fld>
+            <a:endParaRPr kumimoji="0" lang="en-US"/>
+          </a:p>
+        </p:txBody>
+      </p:sp>
+      <p:sp>
+        <p:nvSpPr>
+          <p:cNvPr id="4" name="Rectangle 3"/>
+          <p:cNvSpPr/>
+          <p:nvPr/>
+        </p:nvSpPr>
+        <p:spPr>
+          <a:xfrm>
+            <a:off x="235826" y="5117068"/>
+            <a:ext cx="5791200" cy="369332"/>
+          </a:xfrm>
+          <a:prstGeom prst="rect">
+            <a:avLst/>
+          </a:prstGeom>
+        </p:spPr>
+        <p:txBody>
+          <a:bodyPr wrap="square">
+            <a:spAutoFit/>
+          </a:bodyPr>
+          <a:lstStyle/>
+          <a:p>
+            <a:r>
+              <a:rPr lang="en-US" dirty="0"/>
+              <a:t>Example four-bit Barrel shifter that performs </a:t>
+            </a:r>
+            <a:r>
+              <a:rPr lang="en-US" b="1" dirty="0"/>
+              <a:t>rotate right</a:t>
+            </a:r>
+          </a:p>
+        </p:txBody>
+      </p:sp>
       <p:graphicFrame>
         <p:nvGraphicFramePr>
           <p:cNvPr id="5" name="Table 4"/>
@@ -6658,7 +8388,7 @@
 </p:sld>
 </file>
 
-<file path=ppt/slides/slide11.xml><?xml version="1.0" encoding="utf-8"?>
+<file path=ppt/slides/slide12.xml><?xml version="1.0" encoding="utf-8"?>
 <p:sld xmlns:a="http://schemas.openxmlformats.org/drawingml/2006/main" xmlns:r="http://schemas.openxmlformats.org/officeDocument/2006/relationships" xmlns:p="http://schemas.openxmlformats.org/presentationml/2006/main">
   <p:cSld>
     <p:spTree>
@@ -6715,7 +8445,7 @@
             <a:fld id="{EA7C8D44-3667-46F6-9772-CC52308E2A7F}" type="slidenum">
               <a:rPr kumimoji="0" lang="en-US" smtClean="0"/>
               <a:pPr/>
-              <a:t>11</a:t>
+              <a:t>12</a:t>
             </a:fld>
             <a:endParaRPr kumimoji="0" lang="en-US"/>
           </a:p>
@@ -8151,7 +9881,7 @@
 </p:sld>
 </file>
 
-<file path=ppt/slides/slide12.xml><?xml version="1.0" encoding="utf-8"?>
+<file path=ppt/slides/slide13.xml><?xml version="1.0" encoding="utf-8"?>
 <p:sld xmlns:a="http://schemas.openxmlformats.org/drawingml/2006/main" xmlns:r="http://schemas.openxmlformats.org/officeDocument/2006/relationships" xmlns:p="http://schemas.openxmlformats.org/presentationml/2006/main">
   <p:cSld>
     <p:spTree>
@@ -8214,7 +9944,7 @@
             <a:fld id="{EA7C8D44-3667-46F6-9772-CC52308E2A7F}" type="slidenum">
               <a:rPr kumimoji="0" lang="en-US" smtClean="0"/>
               <a:pPr/>
-              <a:t>12</a:t>
+              <a:t>13</a:t>
             </a:fld>
             <a:endParaRPr kumimoji="0" lang="en-US" dirty="0"/>
           </a:p>
@@ -8354,106 +10084,6 @@
     <p:extLst>
       <p:ext uri="{BB962C8B-B14F-4D97-AF65-F5344CB8AC3E}">
         <p14:creationId xmlns:p14="http://schemas.microsoft.com/office/powerpoint/2010/main" val="3686948551"/>
-      </p:ext>
-    </p:extLst>
-  </p:cSld>
-  <p:clrMapOvr>
-    <a:masterClrMapping/>
-  </p:clrMapOvr>
-</p:sld>
-</file>
-
-<file path=ppt/slides/slide13.xml><?xml version="1.0" encoding="utf-8"?>
-<p:sld xmlns:a="http://schemas.openxmlformats.org/drawingml/2006/main" xmlns:r="http://schemas.openxmlformats.org/officeDocument/2006/relationships" xmlns:p="http://schemas.openxmlformats.org/presentationml/2006/main">
-  <p:cSld>
-    <p:spTree>
-      <p:nvGrpSpPr>
-        <p:cNvPr id="1" name=""/>
-        <p:cNvGrpSpPr/>
-        <p:nvPr/>
-      </p:nvGrpSpPr>
-      <p:grpSpPr>
-        <a:xfrm>
-          <a:off x="0" y="0"/>
-          <a:ext cx="0" cy="0"/>
-          <a:chOff x="0" y="0"/>
-          <a:chExt cx="0" cy="0"/>
-        </a:xfrm>
-      </p:grpSpPr>
-      <p:sp>
-        <p:nvSpPr>
-          <p:cNvPr id="2" name="Title 1"/>
-          <p:cNvSpPr>
-            <a:spLocks noGrp="1"/>
-          </p:cNvSpPr>
-          <p:nvPr>
-            <p:ph type="title"/>
-          </p:nvPr>
-        </p:nvSpPr>
-        <p:spPr/>
-        <p:txBody>
-          <a:bodyPr/>
-          <a:lstStyle/>
-          <a:p>
-            <a:r>
-              <a:rPr lang="en-US" dirty="0"/>
-              <a:t>64-bit Logic Shift Left</a:t>
-            </a:r>
-          </a:p>
-        </p:txBody>
-      </p:sp>
-      <p:sp>
-        <p:nvSpPr>
-          <p:cNvPr id="3" name="Slide Number Placeholder 2"/>
-          <p:cNvSpPr>
-            <a:spLocks noGrp="1"/>
-          </p:cNvSpPr>
-          <p:nvPr>
-            <p:ph type="sldNum" sz="quarter" idx="12"/>
-          </p:nvPr>
-        </p:nvSpPr>
-        <p:spPr/>
-        <p:txBody>
-          <a:bodyPr/>
-          <a:lstStyle/>
-          <a:p>
-            <a:fld id="{EA7C8D44-3667-46F6-9772-CC52308E2A7F}" type="slidenum">
-              <a:rPr kumimoji="0" lang="en-US" smtClean="0"/>
-              <a:pPr/>
-              <a:t>13</a:t>
-            </a:fld>
-            <a:endParaRPr kumimoji="0" lang="en-US" dirty="0"/>
-          </a:p>
-        </p:txBody>
-      </p:sp>
-      <p:pic>
-        <p:nvPicPr>
-          <p:cNvPr id="4" name="Picture 3"/>
-          <p:cNvPicPr>
-            <a:picLocks noChangeAspect="1"/>
-          </p:cNvPicPr>
-          <p:nvPr/>
-        </p:nvPicPr>
-        <p:blipFill>
-          <a:blip r:embed="rId2"/>
-          <a:stretch>
-            <a:fillRect/>
-          </a:stretch>
-        </p:blipFill>
-        <p:spPr>
-          <a:xfrm>
-            <a:off x="256124" y="3086370"/>
-            <a:ext cx="8631751" cy="685260"/>
-          </a:xfrm>
-          <a:prstGeom prst="rect">
-            <a:avLst/>
-          </a:prstGeom>
-        </p:spPr>
-      </p:pic>
-    </p:spTree>
-    <p:extLst>
-      <p:ext uri="{BB962C8B-B14F-4D97-AF65-F5344CB8AC3E}">
-        <p14:creationId xmlns:p14="http://schemas.microsoft.com/office/powerpoint/2010/main" val="2714306100"/>
       </p:ext>
     </p:extLst>
   </p:cSld>
@@ -8521,6 +10151,106 @@
               <a:rPr kumimoji="0" lang="en-US" smtClean="0"/>
               <a:pPr/>
               <a:t>14</a:t>
+            </a:fld>
+            <a:endParaRPr kumimoji="0" lang="en-US" dirty="0"/>
+          </a:p>
+        </p:txBody>
+      </p:sp>
+      <p:pic>
+        <p:nvPicPr>
+          <p:cNvPr id="4" name="Picture 3"/>
+          <p:cNvPicPr>
+            <a:picLocks noChangeAspect="1"/>
+          </p:cNvPicPr>
+          <p:nvPr/>
+        </p:nvPicPr>
+        <p:blipFill>
+          <a:blip r:embed="rId2"/>
+          <a:stretch>
+            <a:fillRect/>
+          </a:stretch>
+        </p:blipFill>
+        <p:spPr>
+          <a:xfrm>
+            <a:off x="256124" y="3086370"/>
+            <a:ext cx="8631751" cy="685260"/>
+          </a:xfrm>
+          <a:prstGeom prst="rect">
+            <a:avLst/>
+          </a:prstGeom>
+        </p:spPr>
+      </p:pic>
+    </p:spTree>
+    <p:extLst>
+      <p:ext uri="{BB962C8B-B14F-4D97-AF65-F5344CB8AC3E}">
+        <p14:creationId xmlns:p14="http://schemas.microsoft.com/office/powerpoint/2010/main" val="2714306100"/>
+      </p:ext>
+    </p:extLst>
+  </p:cSld>
+  <p:clrMapOvr>
+    <a:masterClrMapping/>
+  </p:clrMapOvr>
+</p:sld>
+</file>
+
+<file path=ppt/slides/slide15.xml><?xml version="1.0" encoding="utf-8"?>
+<p:sld xmlns:a="http://schemas.openxmlformats.org/drawingml/2006/main" xmlns:r="http://schemas.openxmlformats.org/officeDocument/2006/relationships" xmlns:p="http://schemas.openxmlformats.org/presentationml/2006/main">
+  <p:cSld>
+    <p:spTree>
+      <p:nvGrpSpPr>
+        <p:cNvPr id="1" name=""/>
+        <p:cNvGrpSpPr/>
+        <p:nvPr/>
+      </p:nvGrpSpPr>
+      <p:grpSpPr>
+        <a:xfrm>
+          <a:off x="0" y="0"/>
+          <a:ext cx="0" cy="0"/>
+          <a:chOff x="0" y="0"/>
+          <a:chExt cx="0" cy="0"/>
+        </a:xfrm>
+      </p:grpSpPr>
+      <p:sp>
+        <p:nvSpPr>
+          <p:cNvPr id="2" name="Title 1"/>
+          <p:cNvSpPr>
+            <a:spLocks noGrp="1"/>
+          </p:cNvSpPr>
+          <p:nvPr>
+            <p:ph type="title"/>
+          </p:nvPr>
+        </p:nvSpPr>
+        <p:spPr/>
+        <p:txBody>
+          <a:bodyPr/>
+          <a:lstStyle/>
+          <a:p>
+            <a:r>
+              <a:rPr lang="en-US" dirty="0"/>
+              <a:t>64-bit Logic Shift Left</a:t>
+            </a:r>
+          </a:p>
+        </p:txBody>
+      </p:sp>
+      <p:sp>
+        <p:nvSpPr>
+          <p:cNvPr id="3" name="Slide Number Placeholder 2"/>
+          <p:cNvSpPr>
+            <a:spLocks noGrp="1"/>
+          </p:cNvSpPr>
+          <p:nvPr>
+            <p:ph type="sldNum" sz="quarter" idx="12"/>
+          </p:nvPr>
+        </p:nvSpPr>
+        <p:spPr/>
+        <p:txBody>
+          <a:bodyPr/>
+          <a:lstStyle/>
+          <a:p>
+            <a:fld id="{EA7C8D44-3667-46F6-9772-CC52308E2A7F}" type="slidenum">
+              <a:rPr kumimoji="0" lang="en-US" smtClean="0"/>
+              <a:pPr/>
+              <a:t>15</a:t>
             </a:fld>
             <a:endParaRPr kumimoji="0" lang="en-US" dirty="0"/>
           </a:p>
@@ -8622,7 +10352,7 @@
 </p:sld>
 </file>
 
-<file path=ppt/slides/slide15.xml><?xml version="1.0" encoding="utf-8"?>
+<file path=ppt/slides/slide16.xml><?xml version="1.0" encoding="utf-8"?>
 <p:sld xmlns:a="http://schemas.openxmlformats.org/drawingml/2006/main" xmlns:r="http://schemas.openxmlformats.org/officeDocument/2006/relationships" xmlns:p="http://schemas.openxmlformats.org/presentationml/2006/main">
   <p:cSld>
     <p:spTree>
@@ -8679,7 +10409,7 @@
             <a:fld id="{EA7C8D44-3667-46F6-9772-CC52308E2A7F}" type="slidenum">
               <a:rPr kumimoji="0" lang="en-US" smtClean="0"/>
               <a:pPr/>
-              <a:t>15</a:t>
+              <a:t>16</a:t>
             </a:fld>
             <a:endParaRPr kumimoji="0" lang="en-US" dirty="0"/>
           </a:p>
@@ -8722,7 +10452,7 @@
 </p:sld>
 </file>
 
-<file path=ppt/slides/slide16.xml><?xml version="1.0" encoding="utf-8"?>
+<file path=ppt/slides/slide17.xml><?xml version="1.0" encoding="utf-8"?>
 <p:sld xmlns:a="http://schemas.openxmlformats.org/drawingml/2006/main" xmlns:r="http://schemas.openxmlformats.org/officeDocument/2006/relationships" xmlns:p="http://schemas.openxmlformats.org/presentationml/2006/main">
   <p:cSld>
     <p:spTree>
@@ -8779,7 +10509,7 @@
             <a:fld id="{EA7C8D44-3667-46F6-9772-CC52308E2A7F}" type="slidenum">
               <a:rPr kumimoji="0" lang="en-US" smtClean="0"/>
               <a:pPr/>
-              <a:t>16</a:t>
+              <a:t>17</a:t>
             </a:fld>
             <a:endParaRPr kumimoji="0" lang="en-US" dirty="0"/>
           </a:p>
@@ -8881,7 +10611,7 @@
 </p:sld>
 </file>
 
-<file path=ppt/slides/slide17.xml><?xml version="1.0" encoding="utf-8"?>
+<file path=ppt/slides/slide18.xml><?xml version="1.0" encoding="utf-8"?>
 <p:sld xmlns:a="http://schemas.openxmlformats.org/drawingml/2006/main" xmlns:r="http://schemas.openxmlformats.org/officeDocument/2006/relationships" xmlns:p="http://schemas.openxmlformats.org/presentationml/2006/main">
   <p:cSld>
     <p:spTree>
@@ -8957,7 +10687,7 @@
             <a:fld id="{EA7C8D44-3667-46F6-9772-CC52308E2A7F}" type="slidenum">
               <a:rPr kumimoji="0" lang="en-US" smtClean="0"/>
               <a:pPr/>
-              <a:t>17</a:t>
+              <a:t>18</a:t>
             </a:fld>
             <a:endParaRPr kumimoji="0" lang="en-US" dirty="0"/>
           </a:p>
@@ -9546,6 +11276,2375 @@
       </p:grpSpPr>
       <p:sp>
         <p:nvSpPr>
+          <p:cNvPr id="38914" name="Rectangle 2"/>
+          <p:cNvSpPr>
+            <a:spLocks noGrp="1" noChangeArrowheads="1"/>
+          </p:cNvSpPr>
+          <p:nvPr>
+            <p:ph type="title"/>
+          </p:nvPr>
+        </p:nvSpPr>
+        <p:spPr>
+          <a:xfrm>
+            <a:off x="1024745" y="39747"/>
+            <a:ext cx="8229600" cy="990600"/>
+          </a:xfrm>
+          <a:ln>
+            <a:miter lim="800000"/>
+            <a:headEnd/>
+            <a:tailEnd/>
+          </a:ln>
+        </p:spPr>
+        <p:txBody>
+          <a:bodyPr/>
+          <a:lstStyle/>
+          <a:p>
+            <a:r>
+              <a:rPr lang="en-US" sz="3600" dirty="0">
+                <a:solidFill>
+                  <a:srgbClr val="FF0000"/>
+                </a:solidFill>
+                <a:latin typeface="Gill Sans MT"/>
+                <a:cs typeface="Times New Roman" pitchFamily="18" charset="0"/>
+              </a:rPr>
+              <a:t>Summary of Carry and Overflow Flags</a:t>
+            </a:r>
+            <a:endParaRPr lang="en-US" sz="3600" dirty="0">
+              <a:solidFill>
+                <a:srgbClr val="FF0000"/>
+              </a:solidFill>
+            </a:endParaRPr>
+          </a:p>
+        </p:txBody>
+      </p:sp>
+      <p:sp>
+        <p:nvSpPr>
+          <p:cNvPr id="8" name="Slide Number Placeholder 3"/>
+          <p:cNvSpPr>
+            <a:spLocks noGrp="1"/>
+          </p:cNvSpPr>
+          <p:nvPr>
+            <p:ph type="sldNum" sz="quarter" idx="4294967295"/>
+          </p:nvPr>
+        </p:nvSpPr>
+        <p:spPr>
+          <a:xfrm>
+            <a:off x="612648" y="6356350"/>
+            <a:ext cx="1981200" cy="365760"/>
+          </a:xfrm>
+          <a:prstGeom prst="rect">
+            <a:avLst/>
+          </a:prstGeom>
+        </p:spPr>
+        <p:txBody>
+          <a:bodyPr/>
+          <a:lstStyle/>
+          <a:p>
+            <a:pPr marL="0" marR="0" lvl="0" indent="0" algn="l" defTabSz="914400" rtl="0" eaLnBrk="1" fontAlgn="auto" latinLnBrk="0" hangingPunct="1">
+              <a:lnSpc>
+                <a:spcPct val="100000"/>
+              </a:lnSpc>
+              <a:spcBef>
+                <a:spcPts val="0"/>
+              </a:spcBef>
+              <a:spcAft>
+                <a:spcPts val="0"/>
+              </a:spcAft>
+              <a:buClrTx/>
+              <a:buSzTx/>
+              <a:buFontTx/>
+              <a:buNone/>
+              <a:tabLst/>
+              <a:defRPr/>
+            </a:pPr>
+            <a:fld id="{3D56C4D0-D1DD-434F-9E39-17578F101405}" type="slidenum">
+              <a:rPr kumimoji="0" lang="en-US" sz="1400" b="0" i="0" u="none" strike="noStrike" kern="1200" cap="none" spc="0" normalizeH="0" baseline="0" noProof="0">
+                <a:ln>
+                  <a:noFill/>
+                </a:ln>
+                <a:solidFill>
+                  <a:srgbClr val="1F497D"/>
+                </a:solidFill>
+                <a:effectLst/>
+                <a:uLnTx/>
+                <a:uFillTx/>
+                <a:latin typeface="Gill Sans MT"/>
+                <a:ea typeface="+mn-ea"/>
+                <a:cs typeface="+mn-cs"/>
+              </a:rPr>
+              <a:pPr marL="0" marR="0" lvl="0" indent="0" algn="l" defTabSz="914400" rtl="0" eaLnBrk="1" fontAlgn="auto" latinLnBrk="0" hangingPunct="1">
+                <a:lnSpc>
+                  <a:spcPct val="100000"/>
+                </a:lnSpc>
+                <a:spcBef>
+                  <a:spcPts val="0"/>
+                </a:spcBef>
+                <a:spcAft>
+                  <a:spcPts val="0"/>
+                </a:spcAft>
+                <a:buClrTx/>
+                <a:buSzTx/>
+                <a:buFontTx/>
+                <a:buNone/>
+                <a:tabLst/>
+                <a:defRPr/>
+              </a:pPr>
+              <a:t>2</a:t>
+            </a:fld>
+            <a:endParaRPr kumimoji="0" lang="en-US" sz="1400" b="0" i="0" u="none" strike="noStrike" kern="1200" cap="none" spc="0" normalizeH="0" baseline="0" noProof="0">
+              <a:ln>
+                <a:noFill/>
+              </a:ln>
+              <a:solidFill>
+                <a:srgbClr val="1F497D"/>
+              </a:solidFill>
+              <a:effectLst/>
+              <a:uLnTx/>
+              <a:uFillTx/>
+              <a:latin typeface="Gill Sans MT"/>
+              <a:ea typeface="+mn-ea"/>
+              <a:cs typeface="+mn-cs"/>
+            </a:endParaRPr>
+          </a:p>
+        </p:txBody>
+      </p:sp>
+      <p:sp>
+        <p:nvSpPr>
+          <p:cNvPr id="323586" name="Date Placeholder 3"/>
+          <p:cNvSpPr txBox="1">
+            <a:spLocks noGrp="1"/>
+          </p:cNvSpPr>
+          <p:nvPr/>
+        </p:nvSpPr>
+        <p:spPr bwMode="auto">
+          <a:xfrm>
+            <a:off x="457200" y="6245225"/>
+            <a:ext cx="2133600" cy="476250"/>
+          </a:xfrm>
+          <a:prstGeom prst="rect">
+            <a:avLst/>
+          </a:prstGeom>
+          <a:noFill/>
+          <a:ln>
+            <a:noFill/>
+          </a:ln>
+          <a:extLst>
+            <a:ext uri="{909E8E84-426E-40DD-AFC4-6F175D3DCCD1}">
+              <a14:hiddenFill xmlns:a14="http://schemas.microsoft.com/office/drawing/2010/main">
+                <a:solidFill>
+                  <a:srgbClr val="FFFFFF"/>
+                </a:solidFill>
+              </a14:hiddenFill>
+            </a:ext>
+            <a:ext uri="{91240B29-F687-4F45-9708-019B960494DF}">
+              <a14:hiddenLine xmlns:a14="http://schemas.microsoft.com/office/drawing/2010/main" w="9525">
+                <a:solidFill>
+                  <a:srgbClr val="000000"/>
+                </a:solidFill>
+                <a:miter lim="800000"/>
+                <a:headEnd/>
+                <a:tailEnd/>
+              </a14:hiddenLine>
+            </a:ext>
+          </a:extLst>
+        </p:spPr>
+        <p:txBody>
+          <a:bodyPr/>
+          <a:lstStyle>
+            <a:lvl1pPr>
+              <a:defRPr>
+                <a:solidFill>
+                  <a:schemeClr val="tx1"/>
+                </a:solidFill>
+                <a:latin typeface="Arial" pitchFamily="34" charset="0"/>
+              </a:defRPr>
+            </a:lvl1pPr>
+            <a:lvl2pPr marL="742950" indent="-285750">
+              <a:defRPr>
+                <a:solidFill>
+                  <a:schemeClr val="tx1"/>
+                </a:solidFill>
+                <a:latin typeface="Arial" pitchFamily="34" charset="0"/>
+              </a:defRPr>
+            </a:lvl2pPr>
+            <a:lvl3pPr marL="1143000" indent="-228600">
+              <a:defRPr>
+                <a:solidFill>
+                  <a:schemeClr val="tx1"/>
+                </a:solidFill>
+                <a:latin typeface="Arial" pitchFamily="34" charset="0"/>
+              </a:defRPr>
+            </a:lvl3pPr>
+            <a:lvl4pPr marL="1600200" indent="-228600">
+              <a:defRPr>
+                <a:solidFill>
+                  <a:schemeClr val="tx1"/>
+                </a:solidFill>
+                <a:latin typeface="Arial" pitchFamily="34" charset="0"/>
+              </a:defRPr>
+            </a:lvl4pPr>
+            <a:lvl5pPr marL="2057400" indent="-228600">
+              <a:defRPr>
+                <a:solidFill>
+                  <a:schemeClr val="tx1"/>
+                </a:solidFill>
+                <a:latin typeface="Arial" pitchFamily="34" charset="0"/>
+              </a:defRPr>
+            </a:lvl5pPr>
+            <a:lvl6pPr marL="2514600" indent="-228600" fontAlgn="base">
+              <a:spcBef>
+                <a:spcPct val="0"/>
+              </a:spcBef>
+              <a:spcAft>
+                <a:spcPct val="0"/>
+              </a:spcAft>
+              <a:defRPr>
+                <a:solidFill>
+                  <a:schemeClr val="tx1"/>
+                </a:solidFill>
+                <a:latin typeface="Arial" pitchFamily="34" charset="0"/>
+              </a:defRPr>
+            </a:lvl6pPr>
+            <a:lvl7pPr marL="2971800" indent="-228600" fontAlgn="base">
+              <a:spcBef>
+                <a:spcPct val="0"/>
+              </a:spcBef>
+              <a:spcAft>
+                <a:spcPct val="0"/>
+              </a:spcAft>
+              <a:defRPr>
+                <a:solidFill>
+                  <a:schemeClr val="tx1"/>
+                </a:solidFill>
+                <a:latin typeface="Arial" pitchFamily="34" charset="0"/>
+              </a:defRPr>
+            </a:lvl7pPr>
+            <a:lvl8pPr marL="3429000" indent="-228600" fontAlgn="base">
+              <a:spcBef>
+                <a:spcPct val="0"/>
+              </a:spcBef>
+              <a:spcAft>
+                <a:spcPct val="0"/>
+              </a:spcAft>
+              <a:defRPr>
+                <a:solidFill>
+                  <a:schemeClr val="tx1"/>
+                </a:solidFill>
+                <a:latin typeface="Arial" pitchFamily="34" charset="0"/>
+              </a:defRPr>
+            </a:lvl8pPr>
+            <a:lvl9pPr marL="3886200" indent="-228600" fontAlgn="base">
+              <a:spcBef>
+                <a:spcPct val="0"/>
+              </a:spcBef>
+              <a:spcAft>
+                <a:spcPct val="0"/>
+              </a:spcAft>
+              <a:defRPr>
+                <a:solidFill>
+                  <a:schemeClr val="tx1"/>
+                </a:solidFill>
+                <a:latin typeface="Arial" pitchFamily="34" charset="0"/>
+              </a:defRPr>
+            </a:lvl9pPr>
+          </a:lstStyle>
+          <a:p>
+            <a:pPr marL="0" marR="0" lvl="0" indent="0" algn="l" defTabSz="914400" rtl="0" eaLnBrk="1" fontAlgn="auto" latinLnBrk="0" hangingPunct="1">
+              <a:lnSpc>
+                <a:spcPct val="100000"/>
+              </a:lnSpc>
+              <a:spcBef>
+                <a:spcPts val="0"/>
+              </a:spcBef>
+              <a:spcAft>
+                <a:spcPts val="0"/>
+              </a:spcAft>
+              <a:buClrTx/>
+              <a:buSzTx/>
+              <a:buFontTx/>
+              <a:buNone/>
+              <a:tabLst/>
+              <a:defRPr/>
+            </a:pPr>
+            <a:endParaRPr kumimoji="0" lang="en-US" sz="1400" b="0" i="0" u="none" strike="noStrike" kern="1200" cap="none" spc="0" normalizeH="0" baseline="0" noProof="0">
+              <a:ln>
+                <a:noFill/>
+              </a:ln>
+              <a:solidFill>
+                <a:srgbClr val="EEECE1"/>
+              </a:solidFill>
+              <a:effectLst/>
+              <a:uLnTx/>
+              <a:uFillTx/>
+              <a:latin typeface="Arial" pitchFamily="34" charset="0"/>
+              <a:ea typeface="+mn-ea"/>
+              <a:cs typeface="+mn-cs"/>
+            </a:endParaRPr>
+          </a:p>
+        </p:txBody>
+      </p:sp>
+      <p:sp>
+        <p:nvSpPr>
+          <p:cNvPr id="323587" name="Slide Number Placeholder 5"/>
+          <p:cNvSpPr txBox="1">
+            <a:spLocks noGrp="1"/>
+          </p:cNvSpPr>
+          <p:nvPr/>
+        </p:nvSpPr>
+        <p:spPr bwMode="auto">
+          <a:xfrm>
+            <a:off x="6553200" y="5864225"/>
+            <a:ext cx="2133600" cy="476250"/>
+          </a:xfrm>
+          <a:prstGeom prst="rect">
+            <a:avLst/>
+          </a:prstGeom>
+          <a:noFill/>
+          <a:ln>
+            <a:noFill/>
+          </a:ln>
+          <a:extLst>
+            <a:ext uri="{909E8E84-426E-40DD-AFC4-6F175D3DCCD1}">
+              <a14:hiddenFill xmlns:a14="http://schemas.microsoft.com/office/drawing/2010/main">
+                <a:solidFill>
+                  <a:srgbClr val="FFFFFF"/>
+                </a:solidFill>
+              </a14:hiddenFill>
+            </a:ext>
+            <a:ext uri="{91240B29-F687-4F45-9708-019B960494DF}">
+              <a14:hiddenLine xmlns:a14="http://schemas.microsoft.com/office/drawing/2010/main" w="9525">
+                <a:solidFill>
+                  <a:srgbClr val="000000"/>
+                </a:solidFill>
+                <a:miter lim="800000"/>
+                <a:headEnd/>
+                <a:tailEnd/>
+              </a14:hiddenLine>
+            </a:ext>
+          </a:extLst>
+        </p:spPr>
+        <p:txBody>
+          <a:bodyPr/>
+          <a:lstStyle>
+            <a:lvl1pPr>
+              <a:defRPr>
+                <a:solidFill>
+                  <a:schemeClr val="tx1"/>
+                </a:solidFill>
+                <a:latin typeface="Arial" pitchFamily="34" charset="0"/>
+              </a:defRPr>
+            </a:lvl1pPr>
+            <a:lvl2pPr marL="742950" indent="-285750">
+              <a:defRPr>
+                <a:solidFill>
+                  <a:schemeClr val="tx1"/>
+                </a:solidFill>
+                <a:latin typeface="Arial" pitchFamily="34" charset="0"/>
+              </a:defRPr>
+            </a:lvl2pPr>
+            <a:lvl3pPr marL="1143000" indent="-228600">
+              <a:defRPr>
+                <a:solidFill>
+                  <a:schemeClr val="tx1"/>
+                </a:solidFill>
+                <a:latin typeface="Arial" pitchFamily="34" charset="0"/>
+              </a:defRPr>
+            </a:lvl3pPr>
+            <a:lvl4pPr marL="1600200" indent="-228600">
+              <a:defRPr>
+                <a:solidFill>
+                  <a:schemeClr val="tx1"/>
+                </a:solidFill>
+                <a:latin typeface="Arial" pitchFamily="34" charset="0"/>
+              </a:defRPr>
+            </a:lvl4pPr>
+            <a:lvl5pPr marL="2057400" indent="-228600">
+              <a:defRPr>
+                <a:solidFill>
+                  <a:schemeClr val="tx1"/>
+                </a:solidFill>
+                <a:latin typeface="Arial" pitchFamily="34" charset="0"/>
+              </a:defRPr>
+            </a:lvl5pPr>
+            <a:lvl6pPr marL="2514600" indent="-228600" fontAlgn="base">
+              <a:spcBef>
+                <a:spcPct val="0"/>
+              </a:spcBef>
+              <a:spcAft>
+                <a:spcPct val="0"/>
+              </a:spcAft>
+              <a:defRPr>
+                <a:solidFill>
+                  <a:schemeClr val="tx1"/>
+                </a:solidFill>
+                <a:latin typeface="Arial" pitchFamily="34" charset="0"/>
+              </a:defRPr>
+            </a:lvl6pPr>
+            <a:lvl7pPr marL="2971800" indent="-228600" fontAlgn="base">
+              <a:spcBef>
+                <a:spcPct val="0"/>
+              </a:spcBef>
+              <a:spcAft>
+                <a:spcPct val="0"/>
+              </a:spcAft>
+              <a:defRPr>
+                <a:solidFill>
+                  <a:schemeClr val="tx1"/>
+                </a:solidFill>
+                <a:latin typeface="Arial" pitchFamily="34" charset="0"/>
+              </a:defRPr>
+            </a:lvl7pPr>
+            <a:lvl8pPr marL="3429000" indent="-228600" fontAlgn="base">
+              <a:spcBef>
+                <a:spcPct val="0"/>
+              </a:spcBef>
+              <a:spcAft>
+                <a:spcPct val="0"/>
+              </a:spcAft>
+              <a:defRPr>
+                <a:solidFill>
+                  <a:schemeClr val="tx1"/>
+                </a:solidFill>
+                <a:latin typeface="Arial" pitchFamily="34" charset="0"/>
+              </a:defRPr>
+            </a:lvl8pPr>
+            <a:lvl9pPr marL="3886200" indent="-228600" fontAlgn="base">
+              <a:spcBef>
+                <a:spcPct val="0"/>
+              </a:spcBef>
+              <a:spcAft>
+                <a:spcPct val="0"/>
+              </a:spcAft>
+              <a:defRPr>
+                <a:solidFill>
+                  <a:schemeClr val="tx1"/>
+                </a:solidFill>
+                <a:latin typeface="Arial" pitchFamily="34" charset="0"/>
+              </a:defRPr>
+            </a:lvl9pPr>
+          </a:lstStyle>
+          <a:p>
+            <a:pPr marL="0" marR="0" lvl="0" indent="0" algn="r" defTabSz="914400" rtl="0" eaLnBrk="1" fontAlgn="auto" latinLnBrk="0" hangingPunct="1">
+              <a:lnSpc>
+                <a:spcPct val="100000"/>
+              </a:lnSpc>
+              <a:spcBef>
+                <a:spcPts val="0"/>
+              </a:spcBef>
+              <a:spcAft>
+                <a:spcPts val="0"/>
+              </a:spcAft>
+              <a:buClrTx/>
+              <a:buSzTx/>
+              <a:buFontTx/>
+              <a:buNone/>
+              <a:tabLst/>
+              <a:defRPr/>
+            </a:pPr>
+            <a:fld id="{433D14BE-FE52-4332-969F-3696FB65ED39}" type="slidenum">
+              <a:rPr kumimoji="0" lang="en-US" sz="1400" b="0" i="0" u="none" strike="noStrike" kern="1200" cap="none" spc="0" normalizeH="0" baseline="0" noProof="0">
+                <a:ln>
+                  <a:noFill/>
+                </a:ln>
+                <a:solidFill>
+                  <a:srgbClr val="EEECE1"/>
+                </a:solidFill>
+                <a:effectLst/>
+                <a:uLnTx/>
+                <a:uFillTx/>
+                <a:latin typeface="Arial" pitchFamily="34" charset="0"/>
+                <a:ea typeface="+mn-ea"/>
+                <a:cs typeface="+mn-cs"/>
+              </a:rPr>
+              <a:pPr marL="0" marR="0" lvl="0" indent="0" algn="r" defTabSz="914400" rtl="0" eaLnBrk="1" fontAlgn="auto" latinLnBrk="0" hangingPunct="1">
+                <a:lnSpc>
+                  <a:spcPct val="100000"/>
+                </a:lnSpc>
+                <a:spcBef>
+                  <a:spcPts val="0"/>
+                </a:spcBef>
+                <a:spcAft>
+                  <a:spcPts val="0"/>
+                </a:spcAft>
+                <a:buClrTx/>
+                <a:buSzTx/>
+                <a:buFontTx/>
+                <a:buNone/>
+                <a:tabLst/>
+                <a:defRPr/>
+              </a:pPr>
+              <a:t>2</a:t>
+            </a:fld>
+            <a:endParaRPr kumimoji="0" lang="en-US" sz="1400" b="0" i="0" u="none" strike="noStrike" kern="1200" cap="none" spc="0" normalizeH="0" baseline="0" noProof="0">
+              <a:ln>
+                <a:noFill/>
+              </a:ln>
+              <a:solidFill>
+                <a:srgbClr val="EEECE1"/>
+              </a:solidFill>
+              <a:effectLst/>
+              <a:uLnTx/>
+              <a:uFillTx/>
+              <a:latin typeface="Arial" pitchFamily="34" charset="0"/>
+              <a:ea typeface="+mn-ea"/>
+              <a:cs typeface="+mn-cs"/>
+            </a:endParaRPr>
+          </a:p>
+        </p:txBody>
+      </p:sp>
+      <p:sp>
+        <p:nvSpPr>
+          <p:cNvPr id="38917" name="Rectangle 5"/>
+          <p:cNvSpPr>
+            <a:spLocks noChangeArrowheads="1"/>
+          </p:cNvSpPr>
+          <p:nvPr/>
+        </p:nvSpPr>
+        <p:spPr bwMode="auto">
+          <a:xfrm>
+            <a:off x="609600" y="3370151"/>
+            <a:ext cx="8083550" cy="2354491"/>
+          </a:xfrm>
+          <a:prstGeom prst="rect">
+            <a:avLst/>
+          </a:prstGeom>
+          <a:noFill/>
+          <a:ln>
+            <a:noFill/>
+          </a:ln>
+          <a:extLst>
+            <a:ext uri="{909E8E84-426E-40DD-AFC4-6F175D3DCCD1}">
+              <a14:hiddenFill xmlns:a14="http://schemas.microsoft.com/office/drawing/2010/main">
+                <a:solidFill>
+                  <a:srgbClr val="FFFFFF"/>
+                </a:solidFill>
+              </a14:hiddenFill>
+            </a:ext>
+            <a:ext uri="{91240B29-F687-4F45-9708-019B960494DF}">
+              <a14:hiddenLine xmlns:a14="http://schemas.microsoft.com/office/drawing/2010/main" w="9525">
+                <a:solidFill>
+                  <a:srgbClr val="000000"/>
+                </a:solidFill>
+                <a:miter lim="800000"/>
+                <a:headEnd/>
+                <a:tailEnd/>
+              </a14:hiddenLine>
+            </a:ext>
+          </a:extLst>
+        </p:spPr>
+        <p:txBody>
+          <a:bodyPr anchor="ctr">
+            <a:spAutoFit/>
+          </a:bodyPr>
+          <a:lstStyle/>
+          <a:p>
+            <a:pPr marL="0" marR="0" lvl="0" indent="0" algn="l" defTabSz="914400" rtl="0" eaLnBrk="1" fontAlgn="auto" latinLnBrk="0" hangingPunct="1">
+              <a:lnSpc>
+                <a:spcPct val="100000"/>
+              </a:lnSpc>
+              <a:spcBef>
+                <a:spcPts val="0"/>
+              </a:spcBef>
+              <a:spcAft>
+                <a:spcPts val="0"/>
+              </a:spcAft>
+              <a:buClrTx/>
+              <a:buSzTx/>
+              <a:buFontTx/>
+              <a:buNone/>
+              <a:tabLst/>
+              <a:defRPr/>
+            </a:pPr>
+            <a:endParaRPr kumimoji="0" lang="en-US" sz="700" b="0" i="0" u="none" strike="noStrike" kern="1200" cap="none" spc="0" normalizeH="0" baseline="0" noProof="0" dirty="0">
+              <a:ln>
+                <a:noFill/>
+              </a:ln>
+              <a:solidFill>
+                <a:prstClr val="black"/>
+              </a:solidFill>
+              <a:effectLst/>
+              <a:uLnTx/>
+              <a:uFillTx/>
+              <a:latin typeface="Gill Sans MT"/>
+              <a:ea typeface="+mn-ea"/>
+              <a:cs typeface="+mn-cs"/>
+            </a:endParaRPr>
+          </a:p>
+          <a:p>
+            <a:pPr marL="0" marR="0" lvl="0" indent="0" algn="l" defTabSz="914400" rtl="0" eaLnBrk="0" fontAlgn="auto" latinLnBrk="0" hangingPunct="0">
+              <a:lnSpc>
+                <a:spcPct val="100000"/>
+              </a:lnSpc>
+              <a:spcBef>
+                <a:spcPts val="0"/>
+              </a:spcBef>
+              <a:spcAft>
+                <a:spcPts val="0"/>
+              </a:spcAft>
+              <a:buClrTx/>
+              <a:buSzTx/>
+              <a:buFontTx/>
+              <a:buNone/>
+              <a:tabLst/>
+              <a:defRPr/>
+            </a:pPr>
+            <a:r>
+              <a:rPr kumimoji="0" lang="en-US" b="0" i="0" u="none" strike="noStrike" kern="1200" cap="none" spc="0" normalizeH="0" baseline="0" noProof="0" dirty="0">
+                <a:ln>
+                  <a:noFill/>
+                </a:ln>
+                <a:solidFill>
+                  <a:prstClr val="black"/>
+                </a:solidFill>
+                <a:effectLst/>
+                <a:uLnTx/>
+                <a:uFillTx/>
+                <a:latin typeface="Gill Sans MT"/>
+                <a:cs typeface="Times New Roman" pitchFamily="18" charset="0"/>
+              </a:rPr>
+              <a:t>Carry flag C = 1 upon an </a:t>
+            </a:r>
+            <a:r>
+              <a:rPr kumimoji="0" lang="en-US" b="1" i="0" u="sng" strike="noStrike" kern="1200" cap="none" spc="0" normalizeH="0" baseline="0" noProof="0" dirty="0">
+                <a:ln>
+                  <a:noFill/>
+                </a:ln>
+                <a:solidFill>
+                  <a:srgbClr val="800000"/>
+                </a:solidFill>
+                <a:effectLst/>
+                <a:uLnTx/>
+                <a:uFillTx/>
+                <a:latin typeface="Gill Sans MT"/>
+                <a:cs typeface="Times New Roman" pitchFamily="18" charset="0"/>
+              </a:rPr>
+              <a:t>unsigned</a:t>
+            </a:r>
+            <a:r>
+              <a:rPr kumimoji="0" lang="en-US" b="0" i="0" u="none" strike="noStrike" kern="1200" cap="none" spc="0" normalizeH="0" baseline="0" noProof="0" dirty="0">
+                <a:ln>
+                  <a:noFill/>
+                </a:ln>
+                <a:solidFill>
+                  <a:prstClr val="black"/>
+                </a:solidFill>
+                <a:effectLst/>
+                <a:uLnTx/>
+                <a:uFillTx/>
+                <a:latin typeface="Gill Sans MT"/>
+                <a:cs typeface="Times New Roman" pitchFamily="18" charset="0"/>
+              </a:rPr>
+              <a:t> addition if the answer is wrong (true result &gt; 2</a:t>
+            </a:r>
+            <a:r>
+              <a:rPr kumimoji="0" lang="en-US" b="0" i="0" u="none" strike="noStrike" kern="1200" cap="none" spc="0" normalizeH="0" baseline="30000" noProof="0" dirty="0">
+                <a:ln>
+                  <a:noFill/>
+                </a:ln>
+                <a:solidFill>
+                  <a:prstClr val="black"/>
+                </a:solidFill>
+                <a:effectLst/>
+                <a:uLnTx/>
+                <a:uFillTx/>
+                <a:latin typeface="Gill Sans MT"/>
+                <a:cs typeface="Times New Roman" pitchFamily="18" charset="0"/>
+              </a:rPr>
+              <a:t>n</a:t>
+            </a:r>
+            <a:r>
+              <a:rPr kumimoji="0" lang="en-US" b="0" i="0" u="none" strike="noStrike" kern="1200" cap="none" spc="0" normalizeH="0" baseline="0" noProof="0" dirty="0">
+                <a:ln>
+                  <a:noFill/>
+                </a:ln>
+                <a:solidFill>
+                  <a:prstClr val="black"/>
+                </a:solidFill>
+                <a:effectLst/>
+                <a:uLnTx/>
+                <a:uFillTx/>
+                <a:latin typeface="Gill Sans MT"/>
+                <a:cs typeface="Times New Roman" pitchFamily="18" charset="0"/>
+              </a:rPr>
+              <a:t>-1)</a:t>
+            </a:r>
+          </a:p>
+          <a:p>
+            <a:pPr lvl="0" fontAlgn="auto">
+              <a:spcBef>
+                <a:spcPts val="0"/>
+              </a:spcBef>
+              <a:spcAft>
+                <a:spcPts val="0"/>
+              </a:spcAft>
+            </a:pPr>
+            <a:r>
+              <a:rPr lang="en-US" b="0" dirty="0">
+                <a:solidFill>
+                  <a:prstClr val="black"/>
+                </a:solidFill>
+                <a:latin typeface="Gill Sans MT"/>
+                <a:cs typeface="Times New Roman" pitchFamily="18" charset="0"/>
+              </a:rPr>
+              <a:t>Carry flag </a:t>
+            </a:r>
+            <a:r>
+              <a:rPr lang="en-US" b="0" dirty="0">
+                <a:solidFill>
+                  <a:prstClr val="black"/>
+                </a:solidFill>
+                <a:latin typeface="Gill Sans MT"/>
+              </a:rPr>
+              <a:t>C = 0 (Borrow flag = 1) </a:t>
+            </a:r>
+            <a:r>
+              <a:rPr lang="en-US" b="0" dirty="0">
+                <a:solidFill>
+                  <a:prstClr val="black"/>
+                </a:solidFill>
+                <a:latin typeface="Gill Sans MT"/>
+                <a:cs typeface="Times New Roman" pitchFamily="18" charset="0"/>
+              </a:rPr>
+              <a:t>upon </a:t>
+            </a:r>
+            <a:r>
+              <a:rPr lang="en-US" b="0" dirty="0">
+                <a:solidFill>
+                  <a:prstClr val="black"/>
+                </a:solidFill>
+                <a:latin typeface="Gill Sans MT"/>
+              </a:rPr>
+              <a:t>an </a:t>
+            </a:r>
+            <a:r>
+              <a:rPr lang="en-US" u="sng" dirty="0">
+                <a:solidFill>
+                  <a:srgbClr val="800000"/>
+                </a:solidFill>
+                <a:latin typeface="Gill Sans MT"/>
+              </a:rPr>
+              <a:t>unsigned</a:t>
+            </a:r>
+            <a:r>
+              <a:rPr lang="en-US" b="0" dirty="0">
+                <a:solidFill>
+                  <a:prstClr val="black"/>
+                </a:solidFill>
+                <a:latin typeface="Gill Sans MT"/>
+              </a:rPr>
+              <a:t> subtraction </a:t>
+            </a:r>
+            <a:r>
+              <a:rPr lang="en-US" b="0" dirty="0">
+                <a:solidFill>
+                  <a:prstClr val="black"/>
+                </a:solidFill>
+                <a:latin typeface="Gill Sans MT"/>
+                <a:cs typeface="Times New Roman" pitchFamily="18" charset="0"/>
+              </a:rPr>
+              <a:t>if the answer is wrong </a:t>
+            </a:r>
+            <a:r>
+              <a:rPr lang="en-US" b="0" dirty="0">
+                <a:solidFill>
+                  <a:prstClr val="black"/>
+                </a:solidFill>
+                <a:latin typeface="Gill Sans MT"/>
+              </a:rPr>
+              <a:t> (</a:t>
+            </a:r>
+            <a:r>
+              <a:rPr lang="en-US" b="0" dirty="0">
+                <a:solidFill>
+                  <a:prstClr val="black"/>
+                </a:solidFill>
+                <a:latin typeface="Gill Sans MT"/>
+                <a:cs typeface="Times New Roman" pitchFamily="18" charset="0"/>
+              </a:rPr>
+              <a:t>true result &lt; 0)</a:t>
+            </a:r>
+            <a:endParaRPr lang="en-US" sz="700" b="0" dirty="0">
+              <a:solidFill>
+                <a:prstClr val="black"/>
+              </a:solidFill>
+              <a:latin typeface="Gill Sans MT"/>
+            </a:endParaRPr>
+          </a:p>
+          <a:p>
+            <a:pPr lvl="0" fontAlgn="auto">
+              <a:spcBef>
+                <a:spcPts val="0"/>
+              </a:spcBef>
+              <a:spcAft>
+                <a:spcPts val="0"/>
+              </a:spcAft>
+              <a:defRPr/>
+            </a:pPr>
+            <a:r>
+              <a:rPr kumimoji="0" lang="en-US" b="0" i="0" u="none" strike="noStrike" kern="1200" cap="none" spc="0" normalizeH="0" baseline="0" noProof="0" dirty="0">
+                <a:ln>
+                  <a:noFill/>
+                </a:ln>
+                <a:solidFill>
+                  <a:prstClr val="black"/>
+                </a:solidFill>
+                <a:effectLst/>
+                <a:uLnTx/>
+                <a:uFillTx/>
+                <a:latin typeface="Gill Sans MT"/>
+                <a:cs typeface="Times New Roman" pitchFamily="18" charset="0"/>
+              </a:rPr>
+              <a:t>Overflow</a:t>
+            </a:r>
+            <a:r>
+              <a:rPr kumimoji="0" lang="en-US" b="0" i="0" u="none" strike="noStrike" kern="1200" cap="none" spc="0" normalizeH="0" noProof="0" dirty="0">
+                <a:ln>
+                  <a:noFill/>
+                </a:ln>
+                <a:solidFill>
+                  <a:prstClr val="black"/>
+                </a:solidFill>
+                <a:effectLst/>
+                <a:uLnTx/>
+                <a:uFillTx/>
+                <a:latin typeface="Gill Sans MT"/>
+                <a:cs typeface="Times New Roman" pitchFamily="18" charset="0"/>
+              </a:rPr>
+              <a:t> flag </a:t>
+            </a:r>
+            <a:r>
+              <a:rPr kumimoji="0" lang="en-US" b="0" i="0" u="none" strike="noStrike" kern="1200" cap="none" spc="0" normalizeH="0" baseline="0" noProof="0" dirty="0">
+                <a:ln>
+                  <a:noFill/>
+                </a:ln>
+                <a:solidFill>
+                  <a:prstClr val="black"/>
+                </a:solidFill>
+                <a:effectLst/>
+                <a:uLnTx/>
+                <a:uFillTx/>
+                <a:latin typeface="Gill Sans MT"/>
+                <a:cs typeface="Times New Roman" pitchFamily="18" charset="0"/>
+              </a:rPr>
+              <a:t>V =1 upon a </a:t>
+            </a:r>
+            <a:r>
+              <a:rPr kumimoji="0" lang="en-US" b="1" i="0" u="sng" strike="noStrike" kern="1200" cap="none" spc="0" normalizeH="0" baseline="0" noProof="0" dirty="0">
+                <a:ln>
+                  <a:noFill/>
+                </a:ln>
+                <a:solidFill>
+                  <a:srgbClr val="800000"/>
+                </a:solidFill>
+                <a:effectLst/>
+                <a:uLnTx/>
+                <a:uFillTx/>
+                <a:latin typeface="Gill Sans MT"/>
+                <a:cs typeface="Times New Roman" pitchFamily="18" charset="0"/>
+              </a:rPr>
+              <a:t>signed</a:t>
+            </a:r>
+            <a:r>
+              <a:rPr kumimoji="0" lang="en-US" b="0" i="0" u="none" strike="noStrike" kern="1200" cap="none" spc="0" normalizeH="0" baseline="0" noProof="0" dirty="0">
+                <a:ln>
+                  <a:noFill/>
+                </a:ln>
+                <a:solidFill>
+                  <a:prstClr val="black"/>
+                </a:solidFill>
+                <a:effectLst/>
+                <a:uLnTx/>
+                <a:uFillTx/>
+                <a:latin typeface="Gill Sans MT"/>
+                <a:cs typeface="Times New Roman" pitchFamily="18" charset="0"/>
+              </a:rPr>
+              <a:t> addition </a:t>
+            </a:r>
+            <a:r>
+              <a:rPr lang="en-US" b="0" dirty="0">
+                <a:solidFill>
+                  <a:prstClr val="black"/>
+                </a:solidFill>
+                <a:latin typeface="Gill Sans MT"/>
+                <a:cs typeface="Times New Roman" pitchFamily="18" charset="0"/>
+              </a:rPr>
+              <a:t>if the answer is wrong (true result &gt; 2</a:t>
+            </a:r>
+            <a:r>
+              <a:rPr lang="en-US" b="0" baseline="30000" dirty="0">
+                <a:solidFill>
+                  <a:prstClr val="black"/>
+                </a:solidFill>
+                <a:latin typeface="Gill Sans MT"/>
+                <a:cs typeface="Times New Roman" pitchFamily="18" charset="0"/>
+              </a:rPr>
+              <a:t>n</a:t>
+            </a:r>
+            <a:r>
+              <a:rPr lang="en-US" altLang="zh-CN" b="0" baseline="30000" dirty="0">
+                <a:solidFill>
+                  <a:prstClr val="black"/>
+                </a:solidFill>
+                <a:latin typeface="Gill Sans MT"/>
+                <a:cs typeface="Times New Roman" pitchFamily="18" charset="0"/>
+              </a:rPr>
+              <a:t>-1</a:t>
+            </a:r>
+            <a:r>
+              <a:rPr lang="en-US" b="0" dirty="0">
+                <a:solidFill>
+                  <a:prstClr val="black"/>
+                </a:solidFill>
+                <a:latin typeface="Gill Sans MT"/>
+                <a:cs typeface="Times New Roman" pitchFamily="18" charset="0"/>
+              </a:rPr>
+              <a:t>-1 </a:t>
+            </a:r>
+            <a:r>
+              <a:rPr lang="en-US" altLang="zh-CN" b="0" dirty="0">
+                <a:solidFill>
+                  <a:prstClr val="black"/>
+                </a:solidFill>
+                <a:latin typeface="Gill Sans MT"/>
+                <a:cs typeface="Times New Roman" pitchFamily="18" charset="0"/>
+              </a:rPr>
+              <a:t>or true result &lt; -</a:t>
+            </a:r>
+            <a:r>
+              <a:rPr lang="en-US" b="0" dirty="0">
+                <a:solidFill>
+                  <a:prstClr val="black"/>
+                </a:solidFill>
+                <a:latin typeface="Gill Sans MT"/>
+                <a:cs typeface="Times New Roman" pitchFamily="18" charset="0"/>
+              </a:rPr>
+              <a:t>2</a:t>
+            </a:r>
+            <a:r>
+              <a:rPr lang="en-US" b="0" baseline="30000" dirty="0">
+                <a:solidFill>
+                  <a:prstClr val="black"/>
+                </a:solidFill>
+                <a:latin typeface="Gill Sans MT"/>
+                <a:cs typeface="Times New Roman" pitchFamily="18" charset="0"/>
+              </a:rPr>
+              <a:t>n</a:t>
+            </a:r>
+            <a:r>
+              <a:rPr lang="en-US" altLang="zh-CN" b="0" baseline="30000" dirty="0">
+                <a:solidFill>
+                  <a:prstClr val="black"/>
+                </a:solidFill>
+                <a:latin typeface="Gill Sans MT"/>
+                <a:cs typeface="Times New Roman" pitchFamily="18" charset="0"/>
+              </a:rPr>
+              <a:t>-1</a:t>
+            </a:r>
+            <a:r>
+              <a:rPr lang="en-US" altLang="zh-CN" b="0" dirty="0">
+                <a:solidFill>
+                  <a:prstClr val="black"/>
+                </a:solidFill>
+                <a:latin typeface="Gill Sans MT"/>
+                <a:cs typeface="Times New Roman" pitchFamily="18" charset="0"/>
+              </a:rPr>
+              <a:t>)</a:t>
+            </a:r>
+            <a:endParaRPr kumimoji="0" lang="en-US" b="0" i="0" u="none" strike="noStrike" kern="1200" cap="none" spc="0" normalizeH="0" noProof="0" dirty="0">
+              <a:ln>
+                <a:noFill/>
+              </a:ln>
+              <a:solidFill>
+                <a:prstClr val="black"/>
+              </a:solidFill>
+              <a:effectLst/>
+              <a:uLnTx/>
+              <a:uFillTx/>
+              <a:latin typeface="Gill Sans MT"/>
+              <a:cs typeface="Times New Roman" pitchFamily="18" charset="0"/>
+            </a:endParaRPr>
+          </a:p>
+          <a:p>
+            <a:pPr marL="0" marR="0" lvl="0" indent="0" algn="l" defTabSz="914400" rtl="0" eaLnBrk="0" fontAlgn="auto" latinLnBrk="0" hangingPunct="0">
+              <a:lnSpc>
+                <a:spcPct val="100000"/>
+              </a:lnSpc>
+              <a:spcBef>
+                <a:spcPts val="0"/>
+              </a:spcBef>
+              <a:spcAft>
+                <a:spcPts val="0"/>
+              </a:spcAft>
+              <a:buClrTx/>
+              <a:buSzTx/>
+              <a:buFontTx/>
+              <a:buNone/>
+              <a:tabLst/>
+              <a:defRPr/>
+            </a:pPr>
+            <a:endParaRPr kumimoji="0" lang="en-US" b="0" i="0" u="none" strike="noStrike" kern="1200" cap="none" spc="0" normalizeH="0" baseline="0" noProof="0" dirty="0">
+              <a:ln>
+                <a:noFill/>
+              </a:ln>
+              <a:solidFill>
+                <a:prstClr val="black"/>
+              </a:solidFill>
+              <a:effectLst/>
+              <a:uLnTx/>
+              <a:uFillTx/>
+              <a:latin typeface="Gill Sans MT"/>
+              <a:cs typeface="Times New Roman" pitchFamily="18" charset="0"/>
+            </a:endParaRPr>
+          </a:p>
+        </p:txBody>
+      </p:sp>
+      <p:graphicFrame>
+        <p:nvGraphicFramePr>
+          <p:cNvPr id="39012" name="Group 100"/>
+          <p:cNvGraphicFramePr>
+            <a:graphicFrameLocks noGrp="1"/>
+          </p:cNvGraphicFramePr>
+          <p:nvPr/>
+        </p:nvGraphicFramePr>
+        <p:xfrm>
+          <a:off x="1447800" y="1143000"/>
+          <a:ext cx="5715000" cy="2362201"/>
+        </p:xfrm>
+        <a:graphic>
+          <a:graphicData uri="http://schemas.openxmlformats.org/drawingml/2006/table">
+            <a:tbl>
+              <a:tblPr>
+                <a:tableStyleId>{BC89EF96-8CEA-46FF-86C4-4CE0E7609802}</a:tableStyleId>
+              </a:tblPr>
+              <a:tblGrid>
+                <a:gridCol w="585788">
+                  <a:extLst>
+                    <a:ext uri="{9D8B030D-6E8A-4147-A177-3AD203B41FA5}">
+                      <a16:colId xmlns:a16="http://schemas.microsoft.com/office/drawing/2014/main" val="20000"/>
+                    </a:ext>
+                  </a:extLst>
+                </a:gridCol>
+                <a:gridCol w="1279525">
+                  <a:extLst>
+                    <a:ext uri="{9D8B030D-6E8A-4147-A177-3AD203B41FA5}">
+                      <a16:colId xmlns:a16="http://schemas.microsoft.com/office/drawing/2014/main" val="20001"/>
+                    </a:ext>
+                  </a:extLst>
+                </a:gridCol>
+                <a:gridCol w="3849687">
+                  <a:extLst>
+                    <a:ext uri="{9D8B030D-6E8A-4147-A177-3AD203B41FA5}">
+                      <a16:colId xmlns:a16="http://schemas.microsoft.com/office/drawing/2014/main" val="20002"/>
+                    </a:ext>
+                  </a:extLst>
+                </a:gridCol>
+              </a:tblGrid>
+              <a:tr h="473075">
+                <a:tc>
+                  <a:txBody>
+                    <a:bodyPr/>
+                    <a:lstStyle/>
+                    <a:p>
+                      <a:pPr marL="0" marR="0" lvl="0" indent="0" algn="just" defTabSz="914400" rtl="0" eaLnBrk="1" fontAlgn="base" latinLnBrk="0" hangingPunct="1">
+                        <a:lnSpc>
+                          <a:spcPct val="100000"/>
+                        </a:lnSpc>
+                        <a:spcBef>
+                          <a:spcPct val="0"/>
+                        </a:spcBef>
+                        <a:spcAft>
+                          <a:spcPct val="0"/>
+                        </a:spcAft>
+                        <a:buClrTx/>
+                        <a:buSzTx/>
+                        <a:buFontTx/>
+                        <a:buNone/>
+                        <a:tabLst/>
+                      </a:pPr>
+                      <a:r>
+                        <a:rPr kumimoji="0" lang="en-US" sz="2000" u="none" strike="noStrike" cap="none" normalizeH="0" baseline="0" dirty="0">
+                          <a:ln>
+                            <a:noFill/>
+                          </a:ln>
+                          <a:effectLst/>
+                        </a:rPr>
+                        <a:t>Bit</a:t>
+                      </a:r>
+                      <a:endParaRPr kumimoji="0" lang="en-US" sz="2000" b="1" i="0" u="none" strike="noStrike" cap="none" normalizeH="0" baseline="0" dirty="0">
+                        <a:ln>
+                          <a:noFill/>
+                        </a:ln>
+                        <a:solidFill>
+                          <a:schemeClr val="tx1"/>
+                        </a:solidFill>
+                        <a:effectLst/>
+                        <a:latin typeface="+mn-lt"/>
+                      </a:endParaRPr>
+                    </a:p>
+                  </a:txBody>
+                  <a:tcPr horzOverflow="overflow"/>
+                </a:tc>
+                <a:tc>
+                  <a:txBody>
+                    <a:bodyPr/>
+                    <a:lstStyle/>
+                    <a:p>
+                      <a:pPr marL="0" marR="0" lvl="0" indent="0" algn="just" defTabSz="914400" rtl="0" eaLnBrk="1" fontAlgn="base" latinLnBrk="0" hangingPunct="1">
+                        <a:lnSpc>
+                          <a:spcPct val="100000"/>
+                        </a:lnSpc>
+                        <a:spcBef>
+                          <a:spcPct val="0"/>
+                        </a:spcBef>
+                        <a:spcAft>
+                          <a:spcPct val="0"/>
+                        </a:spcAft>
+                        <a:buClrTx/>
+                        <a:buSzTx/>
+                        <a:buFontTx/>
+                        <a:buNone/>
+                        <a:tabLst/>
+                      </a:pPr>
+                      <a:r>
+                        <a:rPr kumimoji="0" lang="en-US" sz="2000" u="none" strike="noStrike" cap="none" normalizeH="0" baseline="0" dirty="0">
+                          <a:ln>
+                            <a:noFill/>
+                          </a:ln>
+                          <a:effectLst/>
+                        </a:rPr>
+                        <a:t>Name</a:t>
+                      </a:r>
+                      <a:endParaRPr kumimoji="0" lang="en-US" sz="2000" b="1" i="0" u="none" strike="noStrike" cap="none" normalizeH="0" baseline="0" dirty="0">
+                        <a:ln>
+                          <a:noFill/>
+                        </a:ln>
+                        <a:solidFill>
+                          <a:schemeClr val="tx1"/>
+                        </a:solidFill>
+                        <a:effectLst/>
+                        <a:latin typeface="+mn-lt"/>
+                      </a:endParaRPr>
+                    </a:p>
+                  </a:txBody>
+                  <a:tcPr horzOverflow="overflow"/>
+                </a:tc>
+                <a:tc>
+                  <a:txBody>
+                    <a:bodyPr/>
+                    <a:lstStyle/>
+                    <a:p>
+                      <a:pPr marL="0" marR="0" lvl="0" indent="0" algn="just" defTabSz="914400" rtl="0" eaLnBrk="1" fontAlgn="base" latinLnBrk="0" hangingPunct="1">
+                        <a:lnSpc>
+                          <a:spcPct val="100000"/>
+                        </a:lnSpc>
+                        <a:spcBef>
+                          <a:spcPct val="0"/>
+                        </a:spcBef>
+                        <a:spcAft>
+                          <a:spcPct val="0"/>
+                        </a:spcAft>
+                        <a:buClrTx/>
+                        <a:buSzTx/>
+                        <a:buFontTx/>
+                        <a:buNone/>
+                        <a:tabLst/>
+                      </a:pPr>
+                      <a:r>
+                        <a:rPr kumimoji="0" lang="en-US" sz="2000" u="none" strike="noStrike" cap="none" normalizeH="0" baseline="0">
+                          <a:ln>
+                            <a:noFill/>
+                          </a:ln>
+                          <a:effectLst/>
+                        </a:rPr>
+                        <a:t>Meaning after add or sub</a:t>
+                      </a:r>
+                      <a:endParaRPr kumimoji="0" lang="en-US" sz="2000" b="1" i="0" u="none" strike="noStrike" cap="none" normalizeH="0" baseline="0">
+                        <a:ln>
+                          <a:noFill/>
+                        </a:ln>
+                        <a:solidFill>
+                          <a:schemeClr val="tx1"/>
+                        </a:solidFill>
+                        <a:effectLst/>
+                        <a:latin typeface="+mn-lt"/>
+                      </a:endParaRPr>
+                    </a:p>
+                  </a:txBody>
+                  <a:tcPr horzOverflow="overflow"/>
+                </a:tc>
+                <a:extLst>
+                  <a:ext uri="{0D108BD9-81ED-4DB2-BD59-A6C34878D82A}">
+                    <a16:rowId xmlns:a16="http://schemas.microsoft.com/office/drawing/2014/main" val="10000"/>
+                  </a:ext>
+                </a:extLst>
+              </a:tr>
+              <a:tr h="471488">
+                <a:tc>
+                  <a:txBody>
+                    <a:bodyPr/>
+                    <a:lstStyle/>
+                    <a:p>
+                      <a:pPr marL="0" marR="0" lvl="0" indent="0" algn="just" defTabSz="914400" rtl="0" eaLnBrk="1" fontAlgn="base" latinLnBrk="0" hangingPunct="1">
+                        <a:lnSpc>
+                          <a:spcPct val="100000"/>
+                        </a:lnSpc>
+                        <a:spcBef>
+                          <a:spcPct val="0"/>
+                        </a:spcBef>
+                        <a:spcAft>
+                          <a:spcPct val="0"/>
+                        </a:spcAft>
+                        <a:buClrTx/>
+                        <a:buSzTx/>
+                        <a:buFontTx/>
+                        <a:buNone/>
+                        <a:tabLst/>
+                      </a:pPr>
+                      <a:r>
+                        <a:rPr kumimoji="0" lang="en-US" sz="2000" u="none" strike="noStrike" cap="none" normalizeH="0" baseline="0">
+                          <a:ln>
+                            <a:noFill/>
+                          </a:ln>
+                          <a:effectLst/>
+                        </a:rPr>
+                        <a:t>N</a:t>
+                      </a:r>
+                      <a:endParaRPr kumimoji="0" lang="en-US" sz="2000" b="0" i="0" u="none" strike="noStrike" cap="none" normalizeH="0" baseline="0">
+                        <a:ln>
+                          <a:noFill/>
+                        </a:ln>
+                        <a:solidFill>
+                          <a:schemeClr val="tx1"/>
+                        </a:solidFill>
+                        <a:effectLst/>
+                        <a:latin typeface="+mn-lt"/>
+                      </a:endParaRPr>
+                    </a:p>
+                  </a:txBody>
+                  <a:tcPr horzOverflow="overflow"/>
+                </a:tc>
+                <a:tc>
+                  <a:txBody>
+                    <a:bodyPr/>
+                    <a:lstStyle/>
+                    <a:p>
+                      <a:pPr marL="0" marR="0" lvl="0" indent="0" algn="just" defTabSz="914400" rtl="0" eaLnBrk="1" fontAlgn="base" latinLnBrk="0" hangingPunct="1">
+                        <a:lnSpc>
+                          <a:spcPct val="100000"/>
+                        </a:lnSpc>
+                        <a:spcBef>
+                          <a:spcPct val="0"/>
+                        </a:spcBef>
+                        <a:spcAft>
+                          <a:spcPct val="0"/>
+                        </a:spcAft>
+                        <a:buClrTx/>
+                        <a:buSzTx/>
+                        <a:buFontTx/>
+                        <a:buNone/>
+                        <a:tabLst/>
+                      </a:pPr>
+                      <a:r>
+                        <a:rPr kumimoji="0" lang="en-US" sz="2000" u="none" strike="noStrike" cap="none" normalizeH="0" baseline="0" dirty="0">
+                          <a:ln>
+                            <a:noFill/>
+                          </a:ln>
+                          <a:effectLst/>
+                        </a:rPr>
+                        <a:t>negative</a:t>
+                      </a:r>
+                      <a:endParaRPr kumimoji="0" lang="en-US" sz="2000" b="0" i="0" u="none" strike="noStrike" cap="none" normalizeH="0" baseline="0" dirty="0">
+                        <a:ln>
+                          <a:noFill/>
+                        </a:ln>
+                        <a:solidFill>
+                          <a:schemeClr val="tx1"/>
+                        </a:solidFill>
+                        <a:effectLst/>
+                        <a:latin typeface="+mn-lt"/>
+                      </a:endParaRPr>
+                    </a:p>
+                  </a:txBody>
+                  <a:tcPr horzOverflow="overflow"/>
+                </a:tc>
+                <a:tc>
+                  <a:txBody>
+                    <a:bodyPr/>
+                    <a:lstStyle/>
+                    <a:p>
+                      <a:pPr marL="0" marR="0" lvl="0" indent="0" algn="just" defTabSz="914400" rtl="0" eaLnBrk="1" fontAlgn="base" latinLnBrk="0" hangingPunct="1">
+                        <a:lnSpc>
+                          <a:spcPct val="100000"/>
+                        </a:lnSpc>
+                        <a:spcBef>
+                          <a:spcPct val="0"/>
+                        </a:spcBef>
+                        <a:spcAft>
+                          <a:spcPct val="0"/>
+                        </a:spcAft>
+                        <a:buClrTx/>
+                        <a:buSzTx/>
+                        <a:buFontTx/>
+                        <a:buNone/>
+                        <a:tabLst/>
+                      </a:pPr>
+                      <a:r>
+                        <a:rPr kumimoji="0" lang="en-US" sz="2000" u="none" strike="noStrike" cap="none" normalizeH="0" baseline="0">
+                          <a:ln>
+                            <a:noFill/>
+                          </a:ln>
+                          <a:effectLst/>
+                        </a:rPr>
+                        <a:t>result is negative</a:t>
+                      </a:r>
+                      <a:endParaRPr kumimoji="0" lang="en-US" sz="2000" b="0" i="0" u="none" strike="noStrike" cap="none" normalizeH="0" baseline="0">
+                        <a:ln>
+                          <a:noFill/>
+                        </a:ln>
+                        <a:solidFill>
+                          <a:schemeClr val="tx1"/>
+                        </a:solidFill>
+                        <a:effectLst/>
+                        <a:latin typeface="+mn-lt"/>
+                      </a:endParaRPr>
+                    </a:p>
+                  </a:txBody>
+                  <a:tcPr horzOverflow="overflow"/>
+                </a:tc>
+                <a:extLst>
+                  <a:ext uri="{0D108BD9-81ED-4DB2-BD59-A6C34878D82A}">
+                    <a16:rowId xmlns:a16="http://schemas.microsoft.com/office/drawing/2014/main" val="10001"/>
+                  </a:ext>
+                </a:extLst>
+              </a:tr>
+              <a:tr h="473075">
+                <a:tc>
+                  <a:txBody>
+                    <a:bodyPr/>
+                    <a:lstStyle/>
+                    <a:p>
+                      <a:pPr marL="0" marR="0" lvl="0" indent="0" algn="just" defTabSz="914400" rtl="0" eaLnBrk="1" fontAlgn="base" latinLnBrk="0" hangingPunct="1">
+                        <a:lnSpc>
+                          <a:spcPct val="100000"/>
+                        </a:lnSpc>
+                        <a:spcBef>
+                          <a:spcPct val="0"/>
+                        </a:spcBef>
+                        <a:spcAft>
+                          <a:spcPct val="0"/>
+                        </a:spcAft>
+                        <a:buClrTx/>
+                        <a:buSzTx/>
+                        <a:buFontTx/>
+                        <a:buNone/>
+                        <a:tabLst/>
+                      </a:pPr>
+                      <a:r>
+                        <a:rPr kumimoji="0" lang="en-US" sz="2000" u="none" strike="noStrike" cap="none" normalizeH="0" baseline="0">
+                          <a:ln>
+                            <a:noFill/>
+                          </a:ln>
+                          <a:effectLst/>
+                        </a:rPr>
+                        <a:t>Z</a:t>
+                      </a:r>
+                      <a:endParaRPr kumimoji="0" lang="en-US" sz="2000" b="0" i="0" u="none" strike="noStrike" cap="none" normalizeH="0" baseline="0">
+                        <a:ln>
+                          <a:noFill/>
+                        </a:ln>
+                        <a:solidFill>
+                          <a:schemeClr val="tx1"/>
+                        </a:solidFill>
+                        <a:effectLst/>
+                        <a:latin typeface="+mn-lt"/>
+                      </a:endParaRPr>
+                    </a:p>
+                  </a:txBody>
+                  <a:tcPr horzOverflow="overflow"/>
+                </a:tc>
+                <a:tc>
+                  <a:txBody>
+                    <a:bodyPr/>
+                    <a:lstStyle/>
+                    <a:p>
+                      <a:pPr marL="0" marR="0" lvl="0" indent="0" algn="just" defTabSz="914400" rtl="0" eaLnBrk="1" fontAlgn="base" latinLnBrk="0" hangingPunct="1">
+                        <a:lnSpc>
+                          <a:spcPct val="100000"/>
+                        </a:lnSpc>
+                        <a:spcBef>
+                          <a:spcPct val="0"/>
+                        </a:spcBef>
+                        <a:spcAft>
+                          <a:spcPct val="0"/>
+                        </a:spcAft>
+                        <a:buClrTx/>
+                        <a:buSzTx/>
+                        <a:buFontTx/>
+                        <a:buNone/>
+                        <a:tabLst/>
+                      </a:pPr>
+                      <a:r>
+                        <a:rPr kumimoji="0" lang="en-US" sz="2000" u="none" strike="noStrike" cap="none" normalizeH="0" baseline="0" dirty="0">
+                          <a:ln>
+                            <a:noFill/>
+                          </a:ln>
+                          <a:effectLst/>
+                        </a:rPr>
+                        <a:t>zero</a:t>
+                      </a:r>
+                      <a:endParaRPr kumimoji="0" lang="en-US" sz="2000" b="0" i="0" u="none" strike="noStrike" cap="none" normalizeH="0" baseline="0" dirty="0">
+                        <a:ln>
+                          <a:noFill/>
+                        </a:ln>
+                        <a:solidFill>
+                          <a:schemeClr val="tx1"/>
+                        </a:solidFill>
+                        <a:effectLst/>
+                        <a:latin typeface="+mn-lt"/>
+                      </a:endParaRPr>
+                    </a:p>
+                  </a:txBody>
+                  <a:tcPr horzOverflow="overflow"/>
+                </a:tc>
+                <a:tc>
+                  <a:txBody>
+                    <a:bodyPr/>
+                    <a:lstStyle/>
+                    <a:p>
+                      <a:pPr marL="0" marR="0" lvl="0" indent="0" algn="just" defTabSz="914400" rtl="0" eaLnBrk="1" fontAlgn="base" latinLnBrk="0" hangingPunct="1">
+                        <a:lnSpc>
+                          <a:spcPct val="100000"/>
+                        </a:lnSpc>
+                        <a:spcBef>
+                          <a:spcPct val="0"/>
+                        </a:spcBef>
+                        <a:spcAft>
+                          <a:spcPct val="0"/>
+                        </a:spcAft>
+                        <a:buClrTx/>
+                        <a:buSzTx/>
+                        <a:buFontTx/>
+                        <a:buNone/>
+                        <a:tabLst/>
+                      </a:pPr>
+                      <a:r>
+                        <a:rPr kumimoji="0" lang="en-US" sz="2000" u="none" strike="noStrike" cap="none" normalizeH="0" baseline="0">
+                          <a:ln>
+                            <a:noFill/>
+                          </a:ln>
+                          <a:effectLst/>
+                        </a:rPr>
+                        <a:t>result is zero</a:t>
+                      </a:r>
+                      <a:endParaRPr kumimoji="0" lang="en-US" sz="2000" b="0" i="0" u="none" strike="noStrike" cap="none" normalizeH="0" baseline="0">
+                        <a:ln>
+                          <a:noFill/>
+                        </a:ln>
+                        <a:solidFill>
+                          <a:schemeClr val="tx1"/>
+                        </a:solidFill>
+                        <a:effectLst/>
+                        <a:latin typeface="+mn-lt"/>
+                      </a:endParaRPr>
+                    </a:p>
+                  </a:txBody>
+                  <a:tcPr horzOverflow="overflow"/>
+                </a:tc>
+                <a:extLst>
+                  <a:ext uri="{0D108BD9-81ED-4DB2-BD59-A6C34878D82A}">
+                    <a16:rowId xmlns:a16="http://schemas.microsoft.com/office/drawing/2014/main" val="10002"/>
+                  </a:ext>
+                </a:extLst>
+              </a:tr>
+              <a:tr h="471488">
+                <a:tc>
+                  <a:txBody>
+                    <a:bodyPr/>
+                    <a:lstStyle/>
+                    <a:p>
+                      <a:pPr marL="0" marR="0" lvl="0" indent="0" algn="just" defTabSz="914400" rtl="0" eaLnBrk="1" fontAlgn="base" latinLnBrk="0" hangingPunct="1">
+                        <a:lnSpc>
+                          <a:spcPct val="100000"/>
+                        </a:lnSpc>
+                        <a:spcBef>
+                          <a:spcPct val="0"/>
+                        </a:spcBef>
+                        <a:spcAft>
+                          <a:spcPct val="0"/>
+                        </a:spcAft>
+                        <a:buClrTx/>
+                        <a:buSzTx/>
+                        <a:buFontTx/>
+                        <a:buNone/>
+                        <a:tabLst/>
+                      </a:pPr>
+                      <a:r>
+                        <a:rPr kumimoji="0" lang="en-US" sz="2000" u="none" strike="noStrike" cap="none" normalizeH="0" baseline="0">
+                          <a:ln>
+                            <a:noFill/>
+                          </a:ln>
+                          <a:effectLst/>
+                        </a:rPr>
+                        <a:t>V</a:t>
+                      </a:r>
+                      <a:endParaRPr kumimoji="0" lang="en-US" sz="2000" b="0" i="0" u="none" strike="noStrike" cap="none" normalizeH="0" baseline="0">
+                        <a:ln>
+                          <a:noFill/>
+                        </a:ln>
+                        <a:solidFill>
+                          <a:schemeClr val="tx1"/>
+                        </a:solidFill>
+                        <a:effectLst/>
+                        <a:latin typeface="+mn-lt"/>
+                      </a:endParaRPr>
+                    </a:p>
+                  </a:txBody>
+                  <a:tcPr horzOverflow="overflow"/>
+                </a:tc>
+                <a:tc>
+                  <a:txBody>
+                    <a:bodyPr/>
+                    <a:lstStyle/>
+                    <a:p>
+                      <a:pPr marL="0" marR="0" lvl="0" indent="0" algn="just" defTabSz="914400" rtl="0" eaLnBrk="1" fontAlgn="base" latinLnBrk="0" hangingPunct="1">
+                        <a:lnSpc>
+                          <a:spcPct val="100000"/>
+                        </a:lnSpc>
+                        <a:spcBef>
+                          <a:spcPct val="0"/>
+                        </a:spcBef>
+                        <a:spcAft>
+                          <a:spcPct val="0"/>
+                        </a:spcAft>
+                        <a:buClrTx/>
+                        <a:buSzTx/>
+                        <a:buFontTx/>
+                        <a:buNone/>
+                        <a:tabLst/>
+                      </a:pPr>
+                      <a:r>
+                        <a:rPr kumimoji="0" lang="en-US" sz="2000" u="none" strike="noStrike" cap="none" normalizeH="0" baseline="0">
+                          <a:ln>
+                            <a:noFill/>
+                          </a:ln>
+                          <a:effectLst/>
+                        </a:rPr>
+                        <a:t>overflow</a:t>
+                      </a:r>
+                      <a:endParaRPr kumimoji="0" lang="en-US" sz="2000" b="0" i="0" u="none" strike="noStrike" cap="none" normalizeH="0" baseline="0">
+                        <a:ln>
+                          <a:noFill/>
+                        </a:ln>
+                        <a:solidFill>
+                          <a:schemeClr val="tx1"/>
+                        </a:solidFill>
+                        <a:effectLst/>
+                        <a:latin typeface="+mn-lt"/>
+                      </a:endParaRPr>
+                    </a:p>
+                  </a:txBody>
+                  <a:tcPr horzOverflow="overflow"/>
+                </a:tc>
+                <a:tc>
+                  <a:txBody>
+                    <a:bodyPr/>
+                    <a:lstStyle/>
+                    <a:p>
+                      <a:pPr marL="0" marR="0" lvl="0" indent="0" algn="just" defTabSz="914400" rtl="0" eaLnBrk="1" fontAlgn="base" latinLnBrk="0" hangingPunct="1">
+                        <a:lnSpc>
+                          <a:spcPct val="100000"/>
+                        </a:lnSpc>
+                        <a:spcBef>
+                          <a:spcPct val="0"/>
+                        </a:spcBef>
+                        <a:spcAft>
+                          <a:spcPct val="0"/>
+                        </a:spcAft>
+                        <a:buClrTx/>
+                        <a:buSzTx/>
+                        <a:buFontTx/>
+                        <a:buNone/>
+                        <a:tabLst/>
+                      </a:pPr>
+                      <a:r>
+                        <a:rPr kumimoji="0" lang="en-US" sz="2000" u="none" strike="noStrike" cap="none" normalizeH="0" baseline="0" dirty="0">
+                          <a:ln>
+                            <a:noFill/>
+                          </a:ln>
+                          <a:effectLst/>
+                        </a:rPr>
+                        <a:t>signed overflow</a:t>
+                      </a:r>
+                      <a:endParaRPr kumimoji="0" lang="en-US" sz="2000" b="0" i="0" u="none" strike="noStrike" cap="none" normalizeH="0" baseline="0" dirty="0">
+                        <a:ln>
+                          <a:noFill/>
+                        </a:ln>
+                        <a:solidFill>
+                          <a:schemeClr val="tx1"/>
+                        </a:solidFill>
+                        <a:effectLst/>
+                        <a:latin typeface="+mn-lt"/>
+                      </a:endParaRPr>
+                    </a:p>
+                  </a:txBody>
+                  <a:tcPr horzOverflow="overflow"/>
+                </a:tc>
+                <a:extLst>
+                  <a:ext uri="{0D108BD9-81ED-4DB2-BD59-A6C34878D82A}">
+                    <a16:rowId xmlns:a16="http://schemas.microsoft.com/office/drawing/2014/main" val="10003"/>
+                  </a:ext>
+                </a:extLst>
+              </a:tr>
+              <a:tr h="473075">
+                <a:tc>
+                  <a:txBody>
+                    <a:bodyPr/>
+                    <a:lstStyle/>
+                    <a:p>
+                      <a:pPr marL="0" marR="0" lvl="0" indent="0" algn="just" defTabSz="914400" rtl="0" eaLnBrk="1" fontAlgn="base" latinLnBrk="0" hangingPunct="1">
+                        <a:lnSpc>
+                          <a:spcPct val="100000"/>
+                        </a:lnSpc>
+                        <a:spcBef>
+                          <a:spcPct val="0"/>
+                        </a:spcBef>
+                        <a:spcAft>
+                          <a:spcPct val="0"/>
+                        </a:spcAft>
+                        <a:buClrTx/>
+                        <a:buSzTx/>
+                        <a:buFontTx/>
+                        <a:buNone/>
+                        <a:tabLst/>
+                      </a:pPr>
+                      <a:r>
+                        <a:rPr kumimoji="0" lang="en-US" sz="2000" u="none" strike="noStrike" cap="none" normalizeH="0" baseline="0">
+                          <a:ln>
+                            <a:noFill/>
+                          </a:ln>
+                          <a:effectLst/>
+                        </a:rPr>
+                        <a:t>C</a:t>
+                      </a:r>
+                      <a:endParaRPr kumimoji="0" lang="en-US" sz="2000" b="0" i="0" u="none" strike="noStrike" cap="none" normalizeH="0" baseline="0">
+                        <a:ln>
+                          <a:noFill/>
+                        </a:ln>
+                        <a:solidFill>
+                          <a:schemeClr val="tx1"/>
+                        </a:solidFill>
+                        <a:effectLst/>
+                        <a:latin typeface="+mn-lt"/>
+                      </a:endParaRPr>
+                    </a:p>
+                  </a:txBody>
+                  <a:tcPr horzOverflow="overflow"/>
+                </a:tc>
+                <a:tc>
+                  <a:txBody>
+                    <a:bodyPr/>
+                    <a:lstStyle/>
+                    <a:p>
+                      <a:pPr marL="0" marR="0" lvl="0" indent="0" algn="just" defTabSz="914400" rtl="0" eaLnBrk="1" fontAlgn="base" latinLnBrk="0" hangingPunct="1">
+                        <a:lnSpc>
+                          <a:spcPct val="100000"/>
+                        </a:lnSpc>
+                        <a:spcBef>
+                          <a:spcPct val="0"/>
+                        </a:spcBef>
+                        <a:spcAft>
+                          <a:spcPct val="0"/>
+                        </a:spcAft>
+                        <a:buClrTx/>
+                        <a:buSzTx/>
+                        <a:buFontTx/>
+                        <a:buNone/>
+                        <a:tabLst/>
+                      </a:pPr>
+                      <a:r>
+                        <a:rPr kumimoji="0" lang="en-US" sz="2000" u="none" strike="noStrike" cap="none" normalizeH="0" baseline="0">
+                          <a:ln>
+                            <a:noFill/>
+                          </a:ln>
+                          <a:effectLst/>
+                        </a:rPr>
+                        <a:t>carry</a:t>
+                      </a:r>
+                      <a:endParaRPr kumimoji="0" lang="en-US" sz="2000" b="0" i="0" u="none" strike="noStrike" cap="none" normalizeH="0" baseline="0">
+                        <a:ln>
+                          <a:noFill/>
+                        </a:ln>
+                        <a:solidFill>
+                          <a:schemeClr val="tx1"/>
+                        </a:solidFill>
+                        <a:effectLst/>
+                        <a:latin typeface="+mn-lt"/>
+                      </a:endParaRPr>
+                    </a:p>
+                  </a:txBody>
+                  <a:tcPr horzOverflow="overflow"/>
+                </a:tc>
+                <a:tc>
+                  <a:txBody>
+                    <a:bodyPr/>
+                    <a:lstStyle/>
+                    <a:p>
+                      <a:pPr marL="0" marR="0" lvl="0" indent="0" algn="just" defTabSz="914400" rtl="0" eaLnBrk="1" fontAlgn="base" latinLnBrk="0" hangingPunct="1">
+                        <a:lnSpc>
+                          <a:spcPct val="100000"/>
+                        </a:lnSpc>
+                        <a:spcBef>
+                          <a:spcPct val="0"/>
+                        </a:spcBef>
+                        <a:spcAft>
+                          <a:spcPct val="0"/>
+                        </a:spcAft>
+                        <a:buClrTx/>
+                        <a:buSzTx/>
+                        <a:buFontTx/>
+                        <a:buNone/>
+                        <a:tabLst/>
+                      </a:pPr>
+                      <a:r>
+                        <a:rPr kumimoji="0" lang="en-US" sz="2000" u="none" strike="noStrike" cap="none" normalizeH="0" baseline="0" dirty="0">
+                          <a:ln>
+                            <a:noFill/>
+                          </a:ln>
+                          <a:effectLst/>
+                        </a:rPr>
+                        <a:t>unsigned overflow</a:t>
+                      </a:r>
+                      <a:endParaRPr kumimoji="0" lang="en-US" sz="2000" b="0" i="0" u="none" strike="noStrike" cap="none" normalizeH="0" baseline="0" dirty="0">
+                        <a:ln>
+                          <a:noFill/>
+                        </a:ln>
+                        <a:solidFill>
+                          <a:schemeClr val="tx1"/>
+                        </a:solidFill>
+                        <a:effectLst/>
+                        <a:latin typeface="+mn-lt"/>
+                      </a:endParaRPr>
+                    </a:p>
+                  </a:txBody>
+                  <a:tcPr horzOverflow="overflow"/>
+                </a:tc>
+                <a:extLst>
+                  <a:ext uri="{0D108BD9-81ED-4DB2-BD59-A6C34878D82A}">
+                    <a16:rowId xmlns:a16="http://schemas.microsoft.com/office/drawing/2014/main" val="10004"/>
+                  </a:ext>
+                </a:extLst>
+              </a:tr>
+            </a:tbl>
+          </a:graphicData>
+        </a:graphic>
+      </p:graphicFrame>
+      <p:sp>
+        <p:nvSpPr>
+          <p:cNvPr id="17" name="Rectangle 20"/>
+          <p:cNvSpPr>
+            <a:spLocks noChangeArrowheads="1"/>
+          </p:cNvSpPr>
+          <p:nvPr/>
+        </p:nvSpPr>
+        <p:spPr bwMode="auto">
+          <a:xfrm>
+            <a:off x="3340970" y="5575300"/>
+            <a:ext cx="1943100" cy="400050"/>
+          </a:xfrm>
+          <a:prstGeom prst="rect">
+            <a:avLst/>
+          </a:prstGeom>
+          <a:solidFill>
+            <a:srgbClr val="FFFF00"/>
+          </a:solidFill>
+          <a:ln w="12700">
+            <a:solidFill>
+              <a:schemeClr val="tx1"/>
+            </a:solidFill>
+            <a:miter lim="800000"/>
+            <a:headEnd type="none" w="sm" len="sm"/>
+            <a:tailEnd type="none" w="sm" len="sm"/>
+          </a:ln>
+        </p:spPr>
+        <p:txBody>
+          <a:bodyPr wrap="none" anchor="ctr"/>
+          <a:lstStyle/>
+          <a:p>
+            <a:pPr algn="ctr" defTabSz="342900" eaLnBrk="1" fontAlgn="auto" hangingPunct="1">
+              <a:spcBef>
+                <a:spcPts val="0"/>
+              </a:spcBef>
+              <a:spcAft>
+                <a:spcPts val="0"/>
+              </a:spcAft>
+            </a:pPr>
+            <a:endParaRPr lang="en-US" sz="1350" b="0" dirty="0">
+              <a:solidFill>
+                <a:prstClr val="black"/>
+              </a:solidFill>
+              <a:latin typeface="Calibri"/>
+            </a:endParaRPr>
+          </a:p>
+        </p:txBody>
+      </p:sp>
+      <p:sp>
+        <p:nvSpPr>
+          <p:cNvPr id="18" name="Text Box 21"/>
+          <p:cNvSpPr txBox="1">
+            <a:spLocks noChangeArrowheads="1"/>
+          </p:cNvSpPr>
+          <p:nvPr/>
+        </p:nvSpPr>
+        <p:spPr bwMode="auto">
+          <a:xfrm>
+            <a:off x="3271914" y="5336505"/>
+            <a:ext cx="380232" cy="323165"/>
+          </a:xfrm>
+          <a:prstGeom prst="rect">
+            <a:avLst/>
+          </a:prstGeom>
+          <a:noFill/>
+          <a:ln w="12700">
+            <a:noFill/>
+            <a:miter lim="800000"/>
+            <a:headEnd type="none" w="sm" len="sm"/>
+            <a:tailEnd type="none" w="sm" len="sm"/>
+          </a:ln>
+        </p:spPr>
+        <p:txBody>
+          <a:bodyPr wrap="none">
+            <a:spAutoFit/>
+          </a:bodyPr>
+          <a:lstStyle/>
+          <a:p>
+            <a:pPr defTabSz="342900" eaLnBrk="1" fontAlgn="auto" hangingPunct="1">
+              <a:spcBef>
+                <a:spcPts val="0"/>
+              </a:spcBef>
+              <a:spcAft>
+                <a:spcPts val="0"/>
+              </a:spcAft>
+            </a:pPr>
+            <a:r>
+              <a:rPr lang="en-US" sz="1500" b="0">
+                <a:solidFill>
+                  <a:prstClr val="black"/>
+                </a:solidFill>
+                <a:latin typeface="Calibri"/>
+              </a:rPr>
+              <a:t>31</a:t>
+            </a:r>
+          </a:p>
+        </p:txBody>
+      </p:sp>
+      <p:sp>
+        <p:nvSpPr>
+          <p:cNvPr id="19" name="Text Box 22"/>
+          <p:cNvSpPr txBox="1">
+            <a:spLocks noChangeArrowheads="1"/>
+          </p:cNvSpPr>
+          <p:nvPr/>
+        </p:nvSpPr>
+        <p:spPr bwMode="auto">
+          <a:xfrm>
+            <a:off x="4998320" y="5325789"/>
+            <a:ext cx="282450" cy="323165"/>
+          </a:xfrm>
+          <a:prstGeom prst="rect">
+            <a:avLst/>
+          </a:prstGeom>
+          <a:noFill/>
+          <a:ln w="12700">
+            <a:noFill/>
+            <a:miter lim="800000"/>
+            <a:headEnd type="none" w="sm" len="sm"/>
+            <a:tailEnd type="none" w="sm" len="sm"/>
+          </a:ln>
+        </p:spPr>
+        <p:txBody>
+          <a:bodyPr wrap="none">
+            <a:spAutoFit/>
+          </a:bodyPr>
+          <a:lstStyle/>
+          <a:p>
+            <a:pPr defTabSz="342900" eaLnBrk="1" fontAlgn="auto" hangingPunct="1">
+              <a:spcBef>
+                <a:spcPts val="0"/>
+              </a:spcBef>
+              <a:spcAft>
+                <a:spcPts val="0"/>
+              </a:spcAft>
+            </a:pPr>
+            <a:r>
+              <a:rPr lang="en-US" sz="1500" b="0" dirty="0">
+                <a:solidFill>
+                  <a:prstClr val="black"/>
+                </a:solidFill>
+                <a:latin typeface="Calibri"/>
+              </a:rPr>
+              <a:t>0</a:t>
+            </a:r>
+          </a:p>
+        </p:txBody>
+      </p:sp>
+      <p:sp>
+        <p:nvSpPr>
+          <p:cNvPr id="20" name="Rectangle 19"/>
+          <p:cNvSpPr/>
+          <p:nvPr/>
+        </p:nvSpPr>
+        <p:spPr>
+          <a:xfrm>
+            <a:off x="3340970" y="5575300"/>
+            <a:ext cx="159741" cy="399772"/>
+          </a:xfrm>
+          <a:prstGeom prst="rect">
+            <a:avLst/>
+          </a:prstGeom>
+        </p:spPr>
+        <p:style>
+          <a:lnRef idx="1">
+            <a:schemeClr val="accent1"/>
+          </a:lnRef>
+          <a:fillRef idx="2">
+            <a:schemeClr val="accent1"/>
+          </a:fillRef>
+          <a:effectRef idx="1">
+            <a:schemeClr val="accent1"/>
+          </a:effectRef>
+          <a:fontRef idx="minor">
+            <a:schemeClr val="dk1"/>
+          </a:fontRef>
+        </p:style>
+        <p:txBody>
+          <a:bodyPr rtlCol="0" anchor="ctr"/>
+          <a:lstStyle/>
+          <a:p>
+            <a:pPr algn="ctr" defTabSz="342900" eaLnBrk="1" fontAlgn="auto" hangingPunct="1">
+              <a:spcBef>
+                <a:spcPts val="0"/>
+              </a:spcBef>
+              <a:spcAft>
+                <a:spcPts val="0"/>
+              </a:spcAft>
+            </a:pPr>
+            <a:r>
+              <a:rPr lang="en-US" sz="1350" b="0" dirty="0">
+                <a:solidFill>
+                  <a:prstClr val="black"/>
+                </a:solidFill>
+                <a:latin typeface="Calibri"/>
+              </a:rPr>
+              <a:t>N</a:t>
+            </a:r>
+          </a:p>
+        </p:txBody>
+      </p:sp>
+      <p:sp>
+        <p:nvSpPr>
+          <p:cNvPr id="21" name="Rectangle 20"/>
+          <p:cNvSpPr/>
+          <p:nvPr/>
+        </p:nvSpPr>
+        <p:spPr>
+          <a:xfrm>
+            <a:off x="3503092" y="5575022"/>
+            <a:ext cx="159741" cy="399772"/>
+          </a:xfrm>
+          <a:prstGeom prst="rect">
+            <a:avLst/>
+          </a:prstGeom>
+        </p:spPr>
+        <p:style>
+          <a:lnRef idx="1">
+            <a:schemeClr val="accent1"/>
+          </a:lnRef>
+          <a:fillRef idx="2">
+            <a:schemeClr val="accent1"/>
+          </a:fillRef>
+          <a:effectRef idx="1">
+            <a:schemeClr val="accent1"/>
+          </a:effectRef>
+          <a:fontRef idx="minor">
+            <a:schemeClr val="dk1"/>
+          </a:fontRef>
+        </p:style>
+        <p:txBody>
+          <a:bodyPr rtlCol="0" anchor="ctr"/>
+          <a:lstStyle/>
+          <a:p>
+            <a:pPr algn="ctr" defTabSz="342900" eaLnBrk="1" fontAlgn="auto" hangingPunct="1">
+              <a:spcBef>
+                <a:spcPts val="0"/>
+              </a:spcBef>
+              <a:spcAft>
+                <a:spcPts val="0"/>
+              </a:spcAft>
+            </a:pPr>
+            <a:r>
+              <a:rPr lang="en-US" sz="1350" b="0" dirty="0">
+                <a:solidFill>
+                  <a:prstClr val="black"/>
+                </a:solidFill>
+                <a:latin typeface="Calibri"/>
+              </a:rPr>
+              <a:t>Z</a:t>
+            </a:r>
+          </a:p>
+        </p:txBody>
+      </p:sp>
+      <p:sp>
+        <p:nvSpPr>
+          <p:cNvPr id="22" name="Rectangle 21"/>
+          <p:cNvSpPr/>
+          <p:nvPr/>
+        </p:nvSpPr>
+        <p:spPr>
+          <a:xfrm>
+            <a:off x="3665215" y="5574465"/>
+            <a:ext cx="159741" cy="399772"/>
+          </a:xfrm>
+          <a:prstGeom prst="rect">
+            <a:avLst/>
+          </a:prstGeom>
+        </p:spPr>
+        <p:style>
+          <a:lnRef idx="1">
+            <a:schemeClr val="accent1"/>
+          </a:lnRef>
+          <a:fillRef idx="2">
+            <a:schemeClr val="accent1"/>
+          </a:fillRef>
+          <a:effectRef idx="1">
+            <a:schemeClr val="accent1"/>
+          </a:effectRef>
+          <a:fontRef idx="minor">
+            <a:schemeClr val="dk1"/>
+          </a:fontRef>
+        </p:style>
+        <p:txBody>
+          <a:bodyPr rtlCol="0" anchor="ctr"/>
+          <a:lstStyle/>
+          <a:p>
+            <a:pPr algn="ctr" defTabSz="342900" eaLnBrk="1" fontAlgn="auto" hangingPunct="1">
+              <a:spcBef>
+                <a:spcPts val="0"/>
+              </a:spcBef>
+              <a:spcAft>
+                <a:spcPts val="0"/>
+              </a:spcAft>
+            </a:pPr>
+            <a:r>
+              <a:rPr lang="en-US" sz="1350" b="0" dirty="0">
+                <a:solidFill>
+                  <a:prstClr val="black"/>
+                </a:solidFill>
+                <a:latin typeface="Calibri"/>
+              </a:rPr>
+              <a:t>C</a:t>
+            </a:r>
+          </a:p>
+        </p:txBody>
+      </p:sp>
+      <p:sp>
+        <p:nvSpPr>
+          <p:cNvPr id="23" name="Rectangle 22"/>
+          <p:cNvSpPr/>
+          <p:nvPr/>
+        </p:nvSpPr>
+        <p:spPr>
+          <a:xfrm>
+            <a:off x="3824956" y="5574464"/>
+            <a:ext cx="159741" cy="399772"/>
+          </a:xfrm>
+          <a:prstGeom prst="rect">
+            <a:avLst/>
+          </a:prstGeom>
+        </p:spPr>
+        <p:style>
+          <a:lnRef idx="1">
+            <a:schemeClr val="accent1"/>
+          </a:lnRef>
+          <a:fillRef idx="2">
+            <a:schemeClr val="accent1"/>
+          </a:fillRef>
+          <a:effectRef idx="1">
+            <a:schemeClr val="accent1"/>
+          </a:effectRef>
+          <a:fontRef idx="minor">
+            <a:schemeClr val="dk1"/>
+          </a:fontRef>
+        </p:style>
+        <p:txBody>
+          <a:bodyPr rtlCol="0" anchor="ctr"/>
+          <a:lstStyle/>
+          <a:p>
+            <a:pPr algn="ctr" defTabSz="342900" eaLnBrk="1" fontAlgn="auto" hangingPunct="1">
+              <a:spcBef>
+                <a:spcPts val="0"/>
+              </a:spcBef>
+              <a:spcAft>
+                <a:spcPts val="0"/>
+              </a:spcAft>
+            </a:pPr>
+            <a:r>
+              <a:rPr lang="en-US" sz="1350" b="0" dirty="0">
+                <a:solidFill>
+                  <a:prstClr val="black"/>
+                </a:solidFill>
+                <a:latin typeface="Calibri"/>
+              </a:rPr>
+              <a:t>V</a:t>
+            </a:r>
+          </a:p>
+        </p:txBody>
+      </p:sp>
+      <p:sp>
+        <p:nvSpPr>
+          <p:cNvPr id="24" name="Rectangle 23"/>
+          <p:cNvSpPr/>
+          <p:nvPr/>
+        </p:nvSpPr>
+        <p:spPr>
+          <a:xfrm>
+            <a:off x="2878666" y="6009879"/>
+            <a:ext cx="2941896" cy="300082"/>
+          </a:xfrm>
+          <a:prstGeom prst="rect">
+            <a:avLst/>
+          </a:prstGeom>
+        </p:spPr>
+        <p:txBody>
+          <a:bodyPr wrap="none">
+            <a:spAutoFit/>
+          </a:bodyPr>
+          <a:lstStyle/>
+          <a:p>
+            <a:pPr defTabSz="342900" eaLnBrk="1" fontAlgn="auto" hangingPunct="1">
+              <a:spcBef>
+                <a:spcPts val="0"/>
+              </a:spcBef>
+              <a:spcAft>
+                <a:spcPts val="0"/>
+              </a:spcAft>
+            </a:pPr>
+            <a:r>
+              <a:rPr lang="en-US" sz="1350" b="0" dirty="0">
+                <a:solidFill>
+                  <a:prstClr val="black"/>
+                </a:solidFill>
+                <a:latin typeface="Calibri"/>
+              </a:rPr>
+              <a:t>CPSR (Current Program Status Register)</a:t>
+            </a:r>
+          </a:p>
+        </p:txBody>
+      </p:sp>
+      <p:sp>
+        <p:nvSpPr>
+          <p:cNvPr id="16" name="Horizontal Scroll 15"/>
+          <p:cNvSpPr/>
+          <p:nvPr/>
+        </p:nvSpPr>
+        <p:spPr>
+          <a:xfrm>
+            <a:off x="76200" y="-23210"/>
+            <a:ext cx="1265712" cy="762000"/>
+          </a:xfrm>
+          <a:prstGeom prst="horizontalScroll">
+            <a:avLst/>
+          </a:prstGeom>
+          <a:gradFill rotWithShape="1">
+            <a:gsLst>
+              <a:gs pos="0">
+                <a:srgbClr val="4F81BD">
+                  <a:tint val="50000"/>
+                  <a:satMod val="300000"/>
+                </a:srgbClr>
+              </a:gs>
+              <a:gs pos="35000">
+                <a:srgbClr val="4F81BD">
+                  <a:tint val="37000"/>
+                  <a:satMod val="300000"/>
+                </a:srgbClr>
+              </a:gs>
+              <a:gs pos="100000">
+                <a:srgbClr val="4F81BD">
+                  <a:tint val="15000"/>
+                  <a:satMod val="350000"/>
+                </a:srgbClr>
+              </a:gs>
+            </a:gsLst>
+            <a:lin ang="16200000" scaled="1"/>
+          </a:gradFill>
+          <a:ln w="9525" cap="flat" cmpd="sng" algn="ctr">
+            <a:solidFill>
+              <a:srgbClr val="4F81BD">
+                <a:shade val="95000"/>
+                <a:satMod val="105000"/>
+              </a:srgbClr>
+            </a:solidFill>
+            <a:prstDash val="solid"/>
+          </a:ln>
+          <a:effectLst>
+            <a:outerShdw blurRad="40000" dist="20000" dir="5400000" rotWithShape="0">
+              <a:srgbClr val="000000">
+                <a:alpha val="38000"/>
+              </a:srgbClr>
+            </a:outerShdw>
+          </a:effectLst>
+        </p:spPr>
+        <p:txBody>
+          <a:bodyPr rtlCol="0" anchor="ctr"/>
+          <a:lstStyle/>
+          <a:p>
+            <a:pPr marL="0" marR="0" lvl="0" indent="0" algn="ctr" defTabSz="457200" eaLnBrk="1" fontAlgn="auto" latinLnBrk="0" hangingPunct="1">
+              <a:lnSpc>
+                <a:spcPct val="100000"/>
+              </a:lnSpc>
+              <a:spcBef>
+                <a:spcPts val="0"/>
+              </a:spcBef>
+              <a:spcAft>
+                <a:spcPts val="0"/>
+              </a:spcAft>
+              <a:buClrTx/>
+              <a:buSzTx/>
+              <a:buFontTx/>
+              <a:buNone/>
+              <a:tabLst/>
+              <a:defRPr/>
+            </a:pPr>
+            <a:r>
+              <a:rPr kumimoji="0" lang="en-US" sz="2400" b="0" i="0" u="none" strike="noStrike" kern="0" cap="none" spc="0" normalizeH="0" baseline="0" noProof="0" dirty="0">
+                <a:ln>
+                  <a:noFill/>
+                </a:ln>
+                <a:solidFill>
+                  <a:prstClr val="black"/>
+                </a:solidFill>
+                <a:effectLst/>
+                <a:uLnTx/>
+                <a:uFillTx/>
+                <a:latin typeface="Calibri"/>
+                <a:ea typeface="+mn-ea"/>
+                <a:cs typeface="+mn-cs"/>
+              </a:rPr>
+              <a:t>Review</a:t>
+            </a:r>
+          </a:p>
+        </p:txBody>
+      </p:sp>
+    </p:spTree>
+    <p:extLst>
+      <p:ext uri="{BB962C8B-B14F-4D97-AF65-F5344CB8AC3E}">
+        <p14:creationId xmlns:p14="http://schemas.microsoft.com/office/powerpoint/2010/main" val="2623990252"/>
+      </p:ext>
+    </p:extLst>
+  </p:cSld>
+  <p:clrMapOvr>
+    <a:masterClrMapping/>
+  </p:clrMapOvr>
+  <p:timing>
+    <p:tnLst>
+      <p:par>
+        <p:cTn id="1" dur="indefinite" restart="never" nodeType="tmRoot">
+          <p:childTnLst>
+            <p:seq concurrent="1" nextAc="seek">
+              <p:cTn id="2" dur="indefinite" nodeType="mainSeq">
+                <p:childTnLst>
+                  <p:par>
+                    <p:cTn id="3" fill="hold" nodeType="clickPar">
+                      <p:stCondLst>
+                        <p:cond delay="indefinite"/>
+                      </p:stCondLst>
+                      <p:childTnLst>
+                        <p:par>
+                          <p:cTn id="4" fill="hold" nodeType="withGroup">
+                            <p:stCondLst>
+                              <p:cond delay="0"/>
+                            </p:stCondLst>
+                            <p:childTnLst>
+                              <p:par>
+                                <p:cTn id="5" presetID="1" presetClass="entr" presetSubtype="0" fill="hold" grpId="0" nodeType="clickEffect">
+                                  <p:stCondLst>
+                                    <p:cond delay="0"/>
+                                  </p:stCondLst>
+                                  <p:childTnLst>
+                                    <p:set>
+                                      <p:cBhvr>
+                                        <p:cTn id="6" dur="1" fill="hold">
+                                          <p:stCondLst>
+                                            <p:cond delay="499"/>
+                                          </p:stCondLst>
+                                        </p:cTn>
+                                        <p:tgtEl>
+                                          <p:spTgt spid="38917"/>
+                                        </p:tgtEl>
+                                        <p:attrNameLst>
+                                          <p:attrName>style.visibility</p:attrName>
+                                        </p:attrNameLst>
+                                      </p:cBhvr>
+                                      <p:to>
+                                        <p:strVal val="visible"/>
+                                      </p:to>
+                                    </p:set>
+                                  </p:childTnLst>
+                                </p:cTn>
+                              </p:par>
+                            </p:childTnLst>
+                          </p:cTn>
+                        </p:par>
+                      </p:childTnLst>
+                    </p:cTn>
+                  </p:par>
+                </p:childTnLst>
+              </p:cTn>
+              <p:prevCondLst>
+                <p:cond evt="onPrev" delay="0">
+                  <p:tgtEl>
+                    <p:sldTgt/>
+                  </p:tgtEl>
+                </p:cond>
+              </p:prevCondLst>
+              <p:nextCondLst>
+                <p:cond evt="onNext" delay="0">
+                  <p:tgtEl>
+                    <p:sldTgt/>
+                  </p:tgtEl>
+                </p:cond>
+              </p:nextCondLst>
+            </p:seq>
+          </p:childTnLst>
+        </p:cTn>
+      </p:par>
+    </p:tnLst>
+    <p:bldLst>
+      <p:bldP spid="38917" grpId="0" autoUpdateAnimBg="0"/>
+    </p:bldLst>
+  </p:timing>
+</p:sld>
+</file>
+
+<file path=ppt/slides/slide3.xml><?xml version="1.0" encoding="utf-8"?>
+<p:sld xmlns:a="http://schemas.openxmlformats.org/drawingml/2006/main" xmlns:r="http://schemas.openxmlformats.org/officeDocument/2006/relationships" xmlns:p="http://schemas.openxmlformats.org/presentationml/2006/main">
+  <p:cSld>
+    <p:spTree>
+      <p:nvGrpSpPr>
+        <p:cNvPr id="1" name=""/>
+        <p:cNvGrpSpPr/>
+        <p:nvPr/>
+      </p:nvGrpSpPr>
+      <p:grpSpPr>
+        <a:xfrm>
+          <a:off x="0" y="0"/>
+          <a:ext cx="0" cy="0"/>
+          <a:chOff x="0" y="0"/>
+          <a:chExt cx="0" cy="0"/>
+        </a:xfrm>
+      </p:grpSpPr>
+      <p:sp>
+        <p:nvSpPr>
           <p:cNvPr id="2" name="Title 1">
             <a:extLst>
               <a:ext uri="{FF2B5EF4-FFF2-40B4-BE49-F238E27FC236}">
@@ -9601,7 +13700,7 @@
             <a:fld id="{EA7C8D44-3667-46F6-9772-CC52308E2A7F}" type="slidenum">
               <a:rPr kumimoji="0" lang="en-US" smtClean="0"/>
               <a:pPr/>
-              <a:t>2</a:t>
+              <a:t>3</a:t>
             </a:fld>
             <a:endParaRPr kumimoji="0" lang="en-US" dirty="0"/>
           </a:p>
@@ -9823,7 +13922,7 @@
 </p:sld>
 </file>
 
-<file path=ppt/slides/slide3.xml><?xml version="1.0" encoding="utf-8"?>
+<file path=ppt/slides/slide4.xml><?xml version="1.0" encoding="utf-8"?>
 <p:sld xmlns:a="http://schemas.openxmlformats.org/drawingml/2006/main" xmlns:r="http://schemas.openxmlformats.org/officeDocument/2006/relationships" xmlns:p="http://schemas.openxmlformats.org/presentationml/2006/main">
   <p:cSld>
     <p:spTree>
@@ -10035,7 +14134,7 @@
                 <a:latin typeface="Gill Sans MT"/>
               </a:rPr>
               <a:pPr/>
-              <a:t>3</a:t>
+              <a:t>4</a:t>
             </a:fld>
             <a:endParaRPr lang="en-US">
               <a:solidFill>
@@ -11005,17 +15104,17 @@
           <a:ln/>
           <a:extLst>
             <a:ext uri="{FAA26D3D-D897-4be2-8F04-BA451C77F1D7}">
-              <ma14:placeholderFlag xmlns="" xmlns:ma14="http://schemas.microsoft.com/office/mac/drawingml/2011/main" val="1"/>
+              <ma14:placeholderFlag xmlns:ma14="http://schemas.microsoft.com/office/mac/drawingml/2011/main" xmlns="" val="1"/>
             </a:ext>
             <a:ext uri="{909E8E84-426E-40dd-AFC4-6F175D3DCCD1}">
-              <a14:hiddenFill xmlns="" xmlns:a14="http://schemas.microsoft.com/office/drawing/2010/main">
+              <a14:hiddenFill xmlns:a14="http://schemas.microsoft.com/office/drawing/2010/main" xmlns="">
                 <a:solidFill>
                   <a:schemeClr val="bg1"/>
                 </a:solidFill>
               </a14:hiddenFill>
             </a:ext>
             <a:ext uri="{91240B29-F687-4f45-9708-019B960494DF}">
-              <a14:hiddenLine xmlns="" xmlns:a14="http://schemas.microsoft.com/office/drawing/2010/main" w="12700">
+              <a14:hiddenLine xmlns:a14="http://schemas.microsoft.com/office/drawing/2010/main" xmlns="" w="12700">
                 <a:pattFill prst="narHorz">
                   <a:fgClr>
                     <a:schemeClr val="tx1"/>
@@ -11030,7 +15129,7 @@
               </a14:hiddenLine>
             </a:ext>
             <a:ext uri="{AF507438-7753-43e0-B8FC-AC1667EBCBE1}">
-              <a14:hiddenEffects xmlns="" xmlns:a14="http://schemas.microsoft.com/office/drawing/2010/main">
+              <a14:hiddenEffects xmlns:a14="http://schemas.microsoft.com/office/drawing/2010/main" xmlns="">
                 <a:effectLst>
                   <a:outerShdw blurRad="63500" dist="38099" dir="2700000" algn="ctr" rotWithShape="0">
                     <a:schemeClr val="bg2">
@@ -11473,7 +15572,7 @@
 </p:sld>
 </file>
 
-<file path=ppt/slides/slide4.xml><?xml version="1.0" encoding="utf-8"?>
+<file path=ppt/slides/slide5.xml><?xml version="1.0" encoding="utf-8"?>
 <p:sld xmlns:a="http://schemas.openxmlformats.org/drawingml/2006/main" xmlns:r="http://schemas.openxmlformats.org/officeDocument/2006/relationships" xmlns:p="http://schemas.openxmlformats.org/presentationml/2006/main">
   <p:cSld>
     <p:spTree>
@@ -11542,7 +15641,7 @@
             <a:fld id="{EA7C8D44-3667-46F6-9772-CC52308E2A7F}" type="slidenum">
               <a:rPr kumimoji="0" lang="en-US" smtClean="0"/>
               <a:pPr/>
-              <a:t>4</a:t>
+              <a:t>5</a:t>
             </a:fld>
             <a:endParaRPr kumimoji="0" lang="en-US" dirty="0"/>
           </a:p>
@@ -11596,7 +15695,7 @@
 </p:sld>
 </file>
 
-<file path=ppt/slides/slide5.xml><?xml version="1.0" encoding="utf-8"?>
+<file path=ppt/slides/slide6.xml><?xml version="1.0" encoding="utf-8"?>
 <p:sld xmlns:a="http://schemas.openxmlformats.org/drawingml/2006/main" xmlns:r="http://schemas.openxmlformats.org/officeDocument/2006/relationships" xmlns:p="http://schemas.openxmlformats.org/presentationml/2006/main">
   <p:cSld>
     <p:spTree>
@@ -11653,7 +15752,7 @@
             <a:fld id="{EA7C8D44-3667-46F6-9772-CC52308E2A7F}" type="slidenum">
               <a:rPr kumimoji="0" lang="en-US" smtClean="0"/>
               <a:pPr/>
-              <a:t>5</a:t>
+              <a:t>6</a:t>
             </a:fld>
             <a:endParaRPr kumimoji="0" lang="en-US" dirty="0"/>
           </a:p>
@@ -13479,7 +17578,7 @@
 </p:sld>
 </file>
 
-<file path=ppt/slides/slide6.xml><?xml version="1.0" encoding="utf-8"?>
+<file path=ppt/slides/slide7.xml><?xml version="1.0" encoding="utf-8"?>
 <p:sld xmlns:a="http://schemas.openxmlformats.org/drawingml/2006/main" xmlns:r="http://schemas.openxmlformats.org/officeDocument/2006/relationships" xmlns:p="http://schemas.openxmlformats.org/presentationml/2006/main">
   <p:cSld>
     <p:spTree>
@@ -13536,7 +17635,7 @@
             <a:fld id="{EA7C8D44-3667-46F6-9772-CC52308E2A7F}" type="slidenum">
               <a:rPr kumimoji="0" lang="en-US" smtClean="0"/>
               <a:pPr/>
-              <a:t>6</a:t>
+              <a:t>7</a:t>
             </a:fld>
             <a:endParaRPr kumimoji="0" lang="en-US" dirty="0"/>
           </a:p>
@@ -15324,7 +19423,7 @@
 </p:sld>
 </file>
 
-<file path=ppt/slides/slide7.xml><?xml version="1.0" encoding="utf-8"?>
+<file path=ppt/slides/slide8.xml><?xml version="1.0" encoding="utf-8"?>
 <p:sld xmlns:a="http://schemas.openxmlformats.org/drawingml/2006/main" xmlns:r="http://schemas.openxmlformats.org/officeDocument/2006/relationships" xmlns:p="http://schemas.openxmlformats.org/presentationml/2006/main">
   <p:cSld>
     <p:spTree>
@@ -15381,7 +19480,7 @@
             <a:fld id="{EA7C8D44-3667-46F6-9772-CC52308E2A7F}" type="slidenum">
               <a:rPr kumimoji="0" lang="en-US" smtClean="0"/>
               <a:pPr/>
-              <a:t>7</a:t>
+              <a:t>8</a:t>
             </a:fld>
             <a:endParaRPr kumimoji="0" lang="en-US"/>
           </a:p>
@@ -16719,7 +20818,7 @@
 </p:sld>
 </file>
 
-<file path=ppt/slides/slide8.xml><?xml version="1.0" encoding="utf-8"?>
+<file path=ppt/slides/slide9.xml><?xml version="1.0" encoding="utf-8"?>
 <p:sld xmlns:a="http://schemas.openxmlformats.org/drawingml/2006/main" xmlns:r="http://schemas.openxmlformats.org/officeDocument/2006/relationships" xmlns:p="http://schemas.openxmlformats.org/presentationml/2006/main">
   <p:cSld>
     <p:spTree>
@@ -16776,7 +20875,7 @@
             <a:fld id="{EA7C8D44-3667-46F6-9772-CC52308E2A7F}" type="slidenum">
               <a:rPr kumimoji="0" lang="en-US" smtClean="0"/>
               <a:pPr/>
-              <a:t>8</a:t>
+              <a:t>9</a:t>
             </a:fld>
             <a:endParaRPr kumimoji="0" lang="en-US"/>
           </a:p>
@@ -18203,1547 +22302,6 @@
     <p:extLst>
       <p:ext uri="{BB962C8B-B14F-4D97-AF65-F5344CB8AC3E}">
         <p14:creationId xmlns:p14="http://schemas.microsoft.com/office/powerpoint/2010/main" val="1720761071"/>
-      </p:ext>
-    </p:extLst>
-  </p:cSld>
-  <p:clrMapOvr>
-    <a:masterClrMapping/>
-  </p:clrMapOvr>
-</p:sld>
-</file>
-
-<file path=ppt/slides/slide9.xml><?xml version="1.0" encoding="utf-8"?>
-<p:sld xmlns:a="http://schemas.openxmlformats.org/drawingml/2006/main" xmlns:r="http://schemas.openxmlformats.org/officeDocument/2006/relationships" xmlns:p="http://schemas.openxmlformats.org/presentationml/2006/main">
-  <p:cSld>
-    <p:spTree>
-      <p:nvGrpSpPr>
-        <p:cNvPr id="1" name=""/>
-        <p:cNvGrpSpPr/>
-        <p:nvPr/>
-      </p:nvGrpSpPr>
-      <p:grpSpPr>
-        <a:xfrm>
-          <a:off x="0" y="0"/>
-          <a:ext cx="0" cy="0"/>
-          <a:chOff x="0" y="0"/>
-          <a:chExt cx="0" cy="0"/>
-        </a:xfrm>
-      </p:grpSpPr>
-      <p:sp>
-        <p:nvSpPr>
-          <p:cNvPr id="2" name="Title 1"/>
-          <p:cNvSpPr>
-            <a:spLocks noGrp="1"/>
-          </p:cNvSpPr>
-          <p:nvPr>
-            <p:ph type="title"/>
-          </p:nvPr>
-        </p:nvSpPr>
-        <p:spPr/>
-        <p:txBody>
-          <a:bodyPr/>
-          <a:lstStyle/>
-          <a:p>
-            <a:r>
-              <a:rPr lang="en-US" dirty="0"/>
-              <a:t>Implementation of Barrel Shifter</a:t>
-            </a:r>
-          </a:p>
-        </p:txBody>
-      </p:sp>
-      <p:sp>
-        <p:nvSpPr>
-          <p:cNvPr id="3" name="Slide Number Placeholder 2"/>
-          <p:cNvSpPr>
-            <a:spLocks noGrp="1"/>
-          </p:cNvSpPr>
-          <p:nvPr>
-            <p:ph type="sldNum" sz="quarter" idx="12"/>
-          </p:nvPr>
-        </p:nvSpPr>
-        <p:spPr/>
-        <p:txBody>
-          <a:bodyPr/>
-          <a:lstStyle/>
-          <a:p>
-            <a:fld id="{EA7C8D44-3667-46F6-9772-CC52308E2A7F}" type="slidenum">
-              <a:rPr kumimoji="0" lang="en-US" smtClean="0"/>
-              <a:pPr/>
-              <a:t>9</a:t>
-            </a:fld>
-            <a:endParaRPr kumimoji="0" lang="en-US"/>
-          </a:p>
-        </p:txBody>
-      </p:sp>
-      <p:sp>
-        <p:nvSpPr>
-          <p:cNvPr id="4" name="Rectangle 3"/>
-          <p:cNvSpPr/>
-          <p:nvPr/>
-        </p:nvSpPr>
-        <p:spPr>
-          <a:xfrm>
-            <a:off x="235826" y="5117068"/>
-            <a:ext cx="5791200" cy="369332"/>
-          </a:xfrm>
-          <a:prstGeom prst="rect">
-            <a:avLst/>
-          </a:prstGeom>
-        </p:spPr>
-        <p:txBody>
-          <a:bodyPr wrap="square">
-            <a:spAutoFit/>
-          </a:bodyPr>
-          <a:lstStyle/>
-          <a:p>
-            <a:r>
-              <a:rPr lang="en-US" dirty="0"/>
-              <a:t>Example four-bit Barrel shifter that performs </a:t>
-            </a:r>
-            <a:r>
-              <a:rPr lang="en-US" b="1" dirty="0"/>
-              <a:t>rotate right</a:t>
-            </a:r>
-          </a:p>
-        </p:txBody>
-      </p:sp>
-      <p:sp>
-        <p:nvSpPr>
-          <p:cNvPr id="6" name="Rectangle 5"/>
-          <p:cNvSpPr/>
-          <p:nvPr/>
-        </p:nvSpPr>
-        <p:spPr>
-          <a:xfrm>
-            <a:off x="457200" y="1371600"/>
-            <a:ext cx="8153400" cy="369332"/>
-          </a:xfrm>
-          <a:prstGeom prst="rect">
-            <a:avLst/>
-          </a:prstGeom>
-        </p:spPr>
-        <p:txBody>
-          <a:bodyPr wrap="square">
-            <a:spAutoFit/>
-          </a:bodyPr>
-          <a:lstStyle/>
-          <a:p>
-            <a:r>
-              <a:rPr lang="en-US" dirty="0">
-                <a:solidFill>
-                  <a:srgbClr val="C00000"/>
-                </a:solidFill>
-              </a:rPr>
-              <a:t>Example:  </a:t>
-            </a:r>
-            <a:r>
-              <a:rPr lang="en-US" dirty="0" err="1">
-                <a:solidFill>
-                  <a:srgbClr val="C00000"/>
-                </a:solidFill>
-                <a:latin typeface="Consolas" panose="020B0609020204030204" pitchFamily="49" charset="0"/>
-                <a:cs typeface="Consolas" panose="020B0609020204030204" pitchFamily="49" charset="0"/>
-              </a:rPr>
-              <a:t>S</a:t>
-            </a:r>
-            <a:r>
-              <a:rPr lang="en-US" baseline="-25000" dirty="0" err="1">
-                <a:solidFill>
-                  <a:srgbClr val="C00000"/>
-                </a:solidFill>
-                <a:latin typeface="Consolas" panose="020B0609020204030204" pitchFamily="49" charset="0"/>
-                <a:cs typeface="Consolas" panose="020B0609020204030204" pitchFamily="49" charset="0"/>
-              </a:rPr>
-              <a:t>1</a:t>
-            </a:r>
-            <a:r>
-              <a:rPr lang="en-US" dirty="0" err="1">
-                <a:solidFill>
-                  <a:srgbClr val="C00000"/>
-                </a:solidFill>
-                <a:latin typeface="Consolas" panose="020B0609020204030204" pitchFamily="49" charset="0"/>
-                <a:cs typeface="Consolas" panose="020B0609020204030204" pitchFamily="49" charset="0"/>
-              </a:rPr>
-              <a:t>S</a:t>
-            </a:r>
-            <a:r>
-              <a:rPr lang="en-US" baseline="-25000" dirty="0" err="1">
-                <a:solidFill>
-                  <a:srgbClr val="C00000"/>
-                </a:solidFill>
-                <a:latin typeface="Consolas" panose="020B0609020204030204" pitchFamily="49" charset="0"/>
-                <a:cs typeface="Consolas" panose="020B0609020204030204" pitchFamily="49" charset="0"/>
-              </a:rPr>
-              <a:t>0</a:t>
-            </a:r>
-            <a:r>
-              <a:rPr lang="en-US" dirty="0">
-                <a:solidFill>
-                  <a:srgbClr val="C00000"/>
-                </a:solidFill>
-                <a:latin typeface="Consolas" panose="020B0609020204030204" pitchFamily="49" charset="0"/>
-                <a:cs typeface="Consolas" panose="020B0609020204030204" pitchFamily="49" charset="0"/>
-              </a:rPr>
-              <a:t> = 01</a:t>
-            </a:r>
-          </a:p>
-        </p:txBody>
-      </p:sp>
-      <p:graphicFrame>
-        <p:nvGraphicFramePr>
-          <p:cNvPr id="8" name="Table 7"/>
-          <p:cNvGraphicFramePr>
-            <a:graphicFrameLocks noGrp="1"/>
-          </p:cNvGraphicFramePr>
-          <p:nvPr>
-            <p:extLst>
-              <p:ext uri="{D42A27DB-BD31-4B8C-83A1-F6EECF244321}">
-                <p14:modId xmlns:p14="http://schemas.microsoft.com/office/powerpoint/2010/main" val="3756434776"/>
-              </p:ext>
-            </p:extLst>
-          </p:nvPr>
-        </p:nvGraphicFramePr>
-        <p:xfrm>
-          <a:off x="6248400" y="2418965"/>
-          <a:ext cx="2590800" cy="2045730"/>
-        </p:xfrm>
-        <a:graphic>
-          <a:graphicData uri="http://schemas.openxmlformats.org/drawingml/2006/table">
-            <a:tbl>
-              <a:tblPr firstRow="1" firstCol="1" bandRow="1">
-                <a:tableStyleId>{B301B821-A1FF-4177-AEE7-76D212191A09}</a:tableStyleId>
-              </a:tblPr>
-              <a:tblGrid>
-                <a:gridCol w="417963">
-                  <a:extLst>
-                    <a:ext uri="{9D8B030D-6E8A-4147-A177-3AD203B41FA5}">
-                      <a16:colId xmlns:a16="http://schemas.microsoft.com/office/drawing/2014/main" val="20000"/>
-                    </a:ext>
-                  </a:extLst>
-                </a:gridCol>
-                <a:gridCol w="417009">
-                  <a:extLst>
-                    <a:ext uri="{9D8B030D-6E8A-4147-A177-3AD203B41FA5}">
-                      <a16:colId xmlns:a16="http://schemas.microsoft.com/office/drawing/2014/main" val="20001"/>
-                    </a:ext>
-                  </a:extLst>
-                </a:gridCol>
-                <a:gridCol w="438957">
-                  <a:extLst>
-                    <a:ext uri="{9D8B030D-6E8A-4147-A177-3AD203B41FA5}">
-                      <a16:colId xmlns:a16="http://schemas.microsoft.com/office/drawing/2014/main" val="20002"/>
-                    </a:ext>
-                  </a:extLst>
-                </a:gridCol>
-                <a:gridCol w="438957">
-                  <a:extLst>
-                    <a:ext uri="{9D8B030D-6E8A-4147-A177-3AD203B41FA5}">
-                      <a16:colId xmlns:a16="http://schemas.microsoft.com/office/drawing/2014/main" val="20003"/>
-                    </a:ext>
-                  </a:extLst>
-                </a:gridCol>
-                <a:gridCol w="438957">
-                  <a:extLst>
-                    <a:ext uri="{9D8B030D-6E8A-4147-A177-3AD203B41FA5}">
-                      <a16:colId xmlns:a16="http://schemas.microsoft.com/office/drawing/2014/main" val="20004"/>
-                    </a:ext>
-                  </a:extLst>
-                </a:gridCol>
-                <a:gridCol w="438957">
-                  <a:extLst>
-                    <a:ext uri="{9D8B030D-6E8A-4147-A177-3AD203B41FA5}">
-                      <a16:colId xmlns:a16="http://schemas.microsoft.com/office/drawing/2014/main" val="20005"/>
-                    </a:ext>
-                  </a:extLst>
-                </a:gridCol>
-              </a:tblGrid>
-              <a:tr h="409146">
-                <a:tc>
-                  <a:txBody>
-                    <a:bodyPr/>
-                    <a:lstStyle/>
-                    <a:p>
-                      <a:pPr marL="0" marR="0" algn="ctr">
-                        <a:spcBef>
-                          <a:spcPts val="0"/>
-                        </a:spcBef>
-                        <a:spcAft>
-                          <a:spcPts val="0"/>
-                        </a:spcAft>
-                      </a:pPr>
-                      <a:r>
-                        <a:rPr lang="en-US" sz="1800" dirty="0" err="1">
-                          <a:effectLst/>
-                        </a:rPr>
-                        <a:t>S</a:t>
-                      </a:r>
-                      <a:r>
-                        <a:rPr lang="en-US" sz="1800" baseline="-25000" dirty="0" err="1">
-                          <a:effectLst/>
-                        </a:rPr>
-                        <a:t>1</a:t>
-                      </a:r>
-                      <a:endParaRPr lang="en-US" sz="1800" dirty="0">
-                        <a:effectLst/>
-                        <a:latin typeface="Consolas" panose="020B0609020204030204" pitchFamily="49" charset="0"/>
-                        <a:ea typeface="宋体"/>
-                        <a:cs typeface="Consolas" panose="020B0609020204030204" pitchFamily="49" charset="0"/>
-                      </a:endParaRPr>
-                    </a:p>
-                  </a:txBody>
-                  <a:tcPr marL="68580" marR="68580" marT="0" marB="0" anchor="ctr"/>
-                </a:tc>
-                <a:tc>
-                  <a:txBody>
-                    <a:bodyPr/>
-                    <a:lstStyle/>
-                    <a:p>
-                      <a:pPr marL="0" marR="0" algn="ctr">
-                        <a:spcBef>
-                          <a:spcPts val="0"/>
-                        </a:spcBef>
-                        <a:spcAft>
-                          <a:spcPts val="0"/>
-                        </a:spcAft>
-                      </a:pPr>
-                      <a:r>
-                        <a:rPr lang="en-US" sz="1800" dirty="0" err="1">
-                          <a:effectLst/>
-                        </a:rPr>
-                        <a:t>S</a:t>
-                      </a:r>
-                      <a:r>
-                        <a:rPr lang="en-US" sz="1800" baseline="-25000" dirty="0" err="1">
-                          <a:effectLst/>
-                        </a:rPr>
-                        <a:t>0</a:t>
-                      </a:r>
-                      <a:endParaRPr lang="en-US" sz="1800" dirty="0">
-                        <a:effectLst/>
-                        <a:latin typeface="Consolas" panose="020B0609020204030204" pitchFamily="49" charset="0"/>
-                        <a:ea typeface="宋体"/>
-                        <a:cs typeface="Consolas" panose="020B0609020204030204" pitchFamily="49" charset="0"/>
-                      </a:endParaRPr>
-                    </a:p>
-                  </a:txBody>
-                  <a:tcPr marL="68580" marR="68580" marT="0" marB="0" anchor="ctr">
-                    <a:lnR w="19050" cap="flat" cmpd="sng" algn="ctr">
-                      <a:solidFill>
-                        <a:schemeClr val="tx1"/>
-                      </a:solidFill>
-                      <a:prstDash val="solid"/>
-                      <a:round/>
-                      <a:headEnd type="none" w="med" len="med"/>
-                      <a:tailEnd type="none" w="med" len="med"/>
-                    </a:lnR>
-                  </a:tcPr>
-                </a:tc>
-                <a:tc>
-                  <a:txBody>
-                    <a:bodyPr/>
-                    <a:lstStyle/>
-                    <a:p>
-                      <a:pPr marL="0" marR="0" algn="ctr">
-                        <a:spcBef>
-                          <a:spcPts val="0"/>
-                        </a:spcBef>
-                        <a:spcAft>
-                          <a:spcPts val="0"/>
-                        </a:spcAft>
-                      </a:pPr>
-                      <a:r>
-                        <a:rPr lang="en-US" sz="1800">
-                          <a:effectLst/>
-                        </a:rPr>
-                        <a:t>Y</a:t>
-                      </a:r>
-                      <a:r>
-                        <a:rPr lang="en-US" sz="1800" baseline="-25000">
-                          <a:effectLst/>
-                        </a:rPr>
-                        <a:t>3</a:t>
-                      </a:r>
-                      <a:endParaRPr lang="en-US" sz="1800">
-                        <a:effectLst/>
-                        <a:latin typeface="Consolas" panose="020B0609020204030204" pitchFamily="49" charset="0"/>
-                        <a:ea typeface="宋体"/>
-                        <a:cs typeface="Consolas" panose="020B0609020204030204" pitchFamily="49" charset="0"/>
-                      </a:endParaRPr>
-                    </a:p>
-                  </a:txBody>
-                  <a:tcPr marL="68580" marR="68580" marT="0" marB="0" anchor="ctr">
-                    <a:lnL w="19050" cap="flat" cmpd="sng" algn="ctr">
-                      <a:solidFill>
-                        <a:schemeClr val="tx1"/>
-                      </a:solidFill>
-                      <a:prstDash val="solid"/>
-                      <a:round/>
-                      <a:headEnd type="none" w="med" len="med"/>
-                      <a:tailEnd type="none" w="med" len="med"/>
-                    </a:lnL>
-                  </a:tcPr>
-                </a:tc>
-                <a:tc>
-                  <a:txBody>
-                    <a:bodyPr/>
-                    <a:lstStyle/>
-                    <a:p>
-                      <a:pPr marL="0" marR="0" algn="ctr">
-                        <a:spcBef>
-                          <a:spcPts val="0"/>
-                        </a:spcBef>
-                        <a:spcAft>
-                          <a:spcPts val="0"/>
-                        </a:spcAft>
-                      </a:pPr>
-                      <a:r>
-                        <a:rPr lang="en-US" sz="1800">
-                          <a:effectLst/>
-                        </a:rPr>
-                        <a:t>Y</a:t>
-                      </a:r>
-                      <a:r>
-                        <a:rPr lang="en-US" sz="1800" baseline="-25000">
-                          <a:effectLst/>
-                        </a:rPr>
-                        <a:t>2</a:t>
-                      </a:r>
-                      <a:endParaRPr lang="en-US" sz="1800">
-                        <a:effectLst/>
-                        <a:latin typeface="Consolas" panose="020B0609020204030204" pitchFamily="49" charset="0"/>
-                        <a:ea typeface="宋体"/>
-                        <a:cs typeface="Consolas" panose="020B0609020204030204" pitchFamily="49" charset="0"/>
-                      </a:endParaRPr>
-                    </a:p>
-                  </a:txBody>
-                  <a:tcPr marL="68580" marR="68580" marT="0" marB="0" anchor="ctr"/>
-                </a:tc>
-                <a:tc>
-                  <a:txBody>
-                    <a:bodyPr/>
-                    <a:lstStyle/>
-                    <a:p>
-                      <a:pPr marL="0" marR="0" algn="ctr">
-                        <a:spcBef>
-                          <a:spcPts val="0"/>
-                        </a:spcBef>
-                        <a:spcAft>
-                          <a:spcPts val="0"/>
-                        </a:spcAft>
-                      </a:pPr>
-                      <a:r>
-                        <a:rPr lang="en-US" sz="1800">
-                          <a:effectLst/>
-                        </a:rPr>
-                        <a:t>Y</a:t>
-                      </a:r>
-                      <a:r>
-                        <a:rPr lang="en-US" sz="1800" baseline="-25000">
-                          <a:effectLst/>
-                        </a:rPr>
-                        <a:t>1</a:t>
-                      </a:r>
-                      <a:endParaRPr lang="en-US" sz="1800">
-                        <a:effectLst/>
-                        <a:latin typeface="Consolas" panose="020B0609020204030204" pitchFamily="49" charset="0"/>
-                        <a:ea typeface="宋体"/>
-                        <a:cs typeface="Consolas" panose="020B0609020204030204" pitchFamily="49" charset="0"/>
-                      </a:endParaRPr>
-                    </a:p>
-                  </a:txBody>
-                  <a:tcPr marL="68580" marR="68580" marT="0" marB="0" anchor="ctr"/>
-                </a:tc>
-                <a:tc>
-                  <a:txBody>
-                    <a:bodyPr/>
-                    <a:lstStyle/>
-                    <a:p>
-                      <a:pPr marL="0" marR="0" algn="ctr">
-                        <a:spcBef>
-                          <a:spcPts val="0"/>
-                        </a:spcBef>
-                        <a:spcAft>
-                          <a:spcPts val="0"/>
-                        </a:spcAft>
-                      </a:pPr>
-                      <a:r>
-                        <a:rPr lang="en-US" sz="1800">
-                          <a:effectLst/>
-                        </a:rPr>
-                        <a:t>Y</a:t>
-                      </a:r>
-                      <a:r>
-                        <a:rPr lang="en-US" sz="1800" baseline="-25000">
-                          <a:effectLst/>
-                        </a:rPr>
-                        <a:t>0</a:t>
-                      </a:r>
-                      <a:endParaRPr lang="en-US" sz="1800">
-                        <a:effectLst/>
-                        <a:latin typeface="Consolas" panose="020B0609020204030204" pitchFamily="49" charset="0"/>
-                        <a:ea typeface="宋体"/>
-                        <a:cs typeface="Consolas" panose="020B0609020204030204" pitchFamily="49" charset="0"/>
-                      </a:endParaRPr>
-                    </a:p>
-                  </a:txBody>
-                  <a:tcPr marL="68580" marR="68580" marT="0" marB="0" anchor="ctr"/>
-                </a:tc>
-                <a:extLst>
-                  <a:ext uri="{0D108BD9-81ED-4DB2-BD59-A6C34878D82A}">
-                    <a16:rowId xmlns:a16="http://schemas.microsoft.com/office/drawing/2014/main" val="10000"/>
-                  </a:ext>
-                </a:extLst>
-              </a:tr>
-              <a:tr h="409146">
-                <a:tc>
-                  <a:txBody>
-                    <a:bodyPr/>
-                    <a:lstStyle/>
-                    <a:p>
-                      <a:pPr marL="0" marR="0" algn="ctr">
-                        <a:spcBef>
-                          <a:spcPts val="0"/>
-                        </a:spcBef>
-                        <a:spcAft>
-                          <a:spcPts val="0"/>
-                        </a:spcAft>
-                      </a:pPr>
-                      <a:r>
-                        <a:rPr lang="en-US" sz="1800" b="1" dirty="0">
-                          <a:solidFill>
-                            <a:schemeClr val="tx1"/>
-                          </a:solidFill>
-                          <a:effectLst/>
-                          <a:latin typeface="Consolas" panose="020B0609020204030204" pitchFamily="49" charset="0"/>
-                          <a:cs typeface="Consolas" panose="020B0609020204030204" pitchFamily="49" charset="0"/>
-                        </a:rPr>
-                        <a:t>0</a:t>
-                      </a:r>
-                      <a:endParaRPr lang="en-US" sz="1800" b="1" dirty="0">
-                        <a:solidFill>
-                          <a:schemeClr val="tx1"/>
-                        </a:solidFill>
-                        <a:effectLst/>
-                        <a:latin typeface="Consolas" panose="020B0609020204030204" pitchFamily="49" charset="0"/>
-                        <a:ea typeface="宋体"/>
-                        <a:cs typeface="Consolas" panose="020B0609020204030204" pitchFamily="49" charset="0"/>
-                      </a:endParaRPr>
-                    </a:p>
-                  </a:txBody>
-                  <a:tcPr marL="68580" marR="68580" marT="0" marB="0" anchor="ctr"/>
-                </a:tc>
-                <a:tc>
-                  <a:txBody>
-                    <a:bodyPr/>
-                    <a:lstStyle/>
-                    <a:p>
-                      <a:pPr marL="0" marR="0" algn="ctr">
-                        <a:spcBef>
-                          <a:spcPts val="0"/>
-                        </a:spcBef>
-                        <a:spcAft>
-                          <a:spcPts val="0"/>
-                        </a:spcAft>
-                      </a:pPr>
-                      <a:r>
-                        <a:rPr lang="en-US" sz="1800" b="1" dirty="0">
-                          <a:solidFill>
-                            <a:schemeClr val="tx1"/>
-                          </a:solidFill>
-                          <a:effectLst/>
-                          <a:latin typeface="Consolas" panose="020B0609020204030204" pitchFamily="49" charset="0"/>
-                          <a:cs typeface="Consolas" panose="020B0609020204030204" pitchFamily="49" charset="0"/>
-                        </a:rPr>
-                        <a:t>0</a:t>
-                      </a:r>
-                      <a:endParaRPr lang="en-US" sz="1800" b="1" dirty="0">
-                        <a:solidFill>
-                          <a:schemeClr val="tx1"/>
-                        </a:solidFill>
-                        <a:effectLst/>
-                        <a:latin typeface="Consolas" panose="020B0609020204030204" pitchFamily="49" charset="0"/>
-                        <a:ea typeface="宋体"/>
-                        <a:cs typeface="Consolas" panose="020B0609020204030204" pitchFamily="49" charset="0"/>
-                      </a:endParaRPr>
-                    </a:p>
-                  </a:txBody>
-                  <a:tcPr marL="68580" marR="68580" marT="0" marB="0" anchor="ctr">
-                    <a:lnR w="19050" cap="flat" cmpd="sng" algn="ctr">
-                      <a:solidFill>
-                        <a:schemeClr val="tx1"/>
-                      </a:solidFill>
-                      <a:prstDash val="solid"/>
-                      <a:round/>
-                      <a:headEnd type="none" w="med" len="med"/>
-                      <a:tailEnd type="none" w="med" len="med"/>
-                    </a:lnR>
-                  </a:tcPr>
-                </a:tc>
-                <a:tc>
-                  <a:txBody>
-                    <a:bodyPr/>
-                    <a:lstStyle/>
-                    <a:p>
-                      <a:pPr marL="0" marR="0" algn="ctr">
-                        <a:spcBef>
-                          <a:spcPts val="0"/>
-                        </a:spcBef>
-                        <a:spcAft>
-                          <a:spcPts val="0"/>
-                        </a:spcAft>
-                      </a:pPr>
-                      <a:r>
-                        <a:rPr lang="en-US" sz="1800" dirty="0" err="1">
-                          <a:solidFill>
-                            <a:schemeClr val="tx1"/>
-                          </a:solidFill>
-                          <a:effectLst/>
-                        </a:rPr>
-                        <a:t>D</a:t>
-                      </a:r>
-                      <a:r>
-                        <a:rPr lang="en-US" sz="1800" baseline="-25000" dirty="0" err="1">
-                          <a:solidFill>
-                            <a:schemeClr val="tx1"/>
-                          </a:solidFill>
-                          <a:effectLst/>
-                        </a:rPr>
-                        <a:t>3</a:t>
-                      </a:r>
-                      <a:endParaRPr lang="en-US" sz="1800" dirty="0">
-                        <a:solidFill>
-                          <a:schemeClr val="tx1"/>
-                        </a:solidFill>
-                        <a:effectLst/>
-                        <a:latin typeface="Consolas" panose="020B0609020204030204" pitchFamily="49" charset="0"/>
-                        <a:ea typeface="宋体"/>
-                        <a:cs typeface="Consolas" panose="020B0609020204030204" pitchFamily="49" charset="0"/>
-                      </a:endParaRPr>
-                    </a:p>
-                  </a:txBody>
-                  <a:tcPr marL="68580" marR="68580" marT="0" marB="0" anchor="ctr">
-                    <a:lnL w="19050" cap="flat" cmpd="sng" algn="ctr">
-                      <a:solidFill>
-                        <a:schemeClr val="tx1"/>
-                      </a:solidFill>
-                      <a:prstDash val="solid"/>
-                      <a:round/>
-                      <a:headEnd type="none" w="med" len="med"/>
-                      <a:tailEnd type="none" w="med" len="med"/>
-                    </a:lnL>
-                  </a:tcPr>
-                </a:tc>
-                <a:tc>
-                  <a:txBody>
-                    <a:bodyPr/>
-                    <a:lstStyle/>
-                    <a:p>
-                      <a:pPr marL="0" marR="0" algn="ctr">
-                        <a:spcBef>
-                          <a:spcPts val="0"/>
-                        </a:spcBef>
-                        <a:spcAft>
-                          <a:spcPts val="0"/>
-                        </a:spcAft>
-                      </a:pPr>
-                      <a:r>
-                        <a:rPr lang="en-US" sz="1800" dirty="0" err="1">
-                          <a:solidFill>
-                            <a:schemeClr val="tx1"/>
-                          </a:solidFill>
-                          <a:effectLst/>
-                        </a:rPr>
-                        <a:t>D</a:t>
-                      </a:r>
-                      <a:r>
-                        <a:rPr lang="en-US" sz="1800" baseline="-25000" dirty="0" err="1">
-                          <a:solidFill>
-                            <a:schemeClr val="tx1"/>
-                          </a:solidFill>
-                          <a:effectLst/>
-                        </a:rPr>
-                        <a:t>2</a:t>
-                      </a:r>
-                      <a:endParaRPr lang="en-US" sz="1800" dirty="0">
-                        <a:solidFill>
-                          <a:schemeClr val="tx1"/>
-                        </a:solidFill>
-                        <a:effectLst/>
-                        <a:latin typeface="Consolas" panose="020B0609020204030204" pitchFamily="49" charset="0"/>
-                        <a:ea typeface="宋体"/>
-                        <a:cs typeface="Consolas" panose="020B0609020204030204" pitchFamily="49" charset="0"/>
-                      </a:endParaRPr>
-                    </a:p>
-                  </a:txBody>
-                  <a:tcPr marL="68580" marR="68580" marT="0" marB="0" anchor="ctr"/>
-                </a:tc>
-                <a:tc>
-                  <a:txBody>
-                    <a:bodyPr/>
-                    <a:lstStyle/>
-                    <a:p>
-                      <a:pPr marL="0" marR="0" algn="ctr">
-                        <a:spcBef>
-                          <a:spcPts val="0"/>
-                        </a:spcBef>
-                        <a:spcAft>
-                          <a:spcPts val="0"/>
-                        </a:spcAft>
-                      </a:pPr>
-                      <a:r>
-                        <a:rPr lang="en-US" sz="1800">
-                          <a:solidFill>
-                            <a:schemeClr val="tx1"/>
-                          </a:solidFill>
-                          <a:effectLst/>
-                        </a:rPr>
-                        <a:t>D</a:t>
-                      </a:r>
-                      <a:r>
-                        <a:rPr lang="en-US" sz="1800" baseline="-25000">
-                          <a:solidFill>
-                            <a:schemeClr val="tx1"/>
-                          </a:solidFill>
-                          <a:effectLst/>
-                        </a:rPr>
-                        <a:t>1</a:t>
-                      </a:r>
-                      <a:endParaRPr lang="en-US" sz="1800">
-                        <a:solidFill>
-                          <a:schemeClr val="tx1"/>
-                        </a:solidFill>
-                        <a:effectLst/>
-                        <a:latin typeface="Consolas" panose="020B0609020204030204" pitchFamily="49" charset="0"/>
-                        <a:ea typeface="宋体"/>
-                        <a:cs typeface="Consolas" panose="020B0609020204030204" pitchFamily="49" charset="0"/>
-                      </a:endParaRPr>
-                    </a:p>
-                  </a:txBody>
-                  <a:tcPr marL="68580" marR="68580" marT="0" marB="0" anchor="ctr"/>
-                </a:tc>
-                <a:tc>
-                  <a:txBody>
-                    <a:bodyPr/>
-                    <a:lstStyle/>
-                    <a:p>
-                      <a:pPr marL="0" marR="0" algn="ctr">
-                        <a:spcBef>
-                          <a:spcPts val="0"/>
-                        </a:spcBef>
-                        <a:spcAft>
-                          <a:spcPts val="0"/>
-                        </a:spcAft>
-                      </a:pPr>
-                      <a:r>
-                        <a:rPr lang="en-US" sz="1800" dirty="0" err="1">
-                          <a:solidFill>
-                            <a:schemeClr val="tx1"/>
-                          </a:solidFill>
-                          <a:effectLst/>
-                        </a:rPr>
-                        <a:t>D</a:t>
-                      </a:r>
-                      <a:r>
-                        <a:rPr lang="en-US" sz="1800" baseline="-25000" dirty="0" err="1">
-                          <a:solidFill>
-                            <a:schemeClr val="tx1"/>
-                          </a:solidFill>
-                          <a:effectLst/>
-                        </a:rPr>
-                        <a:t>0</a:t>
-                      </a:r>
-                      <a:endParaRPr lang="en-US" sz="1800" dirty="0">
-                        <a:solidFill>
-                          <a:schemeClr val="tx1"/>
-                        </a:solidFill>
-                        <a:effectLst/>
-                        <a:latin typeface="Consolas" panose="020B0609020204030204" pitchFamily="49" charset="0"/>
-                        <a:ea typeface="宋体"/>
-                        <a:cs typeface="Consolas" panose="020B0609020204030204" pitchFamily="49" charset="0"/>
-                      </a:endParaRPr>
-                    </a:p>
-                  </a:txBody>
-                  <a:tcPr marL="68580" marR="68580" marT="0" marB="0" anchor="ctr"/>
-                </a:tc>
-                <a:extLst>
-                  <a:ext uri="{0D108BD9-81ED-4DB2-BD59-A6C34878D82A}">
-                    <a16:rowId xmlns:a16="http://schemas.microsoft.com/office/drawing/2014/main" val="10001"/>
-                  </a:ext>
-                </a:extLst>
-              </a:tr>
-              <a:tr h="409146">
-                <a:tc>
-                  <a:txBody>
-                    <a:bodyPr/>
-                    <a:lstStyle/>
-                    <a:p>
-                      <a:pPr marL="0" marR="0" algn="ctr">
-                        <a:spcBef>
-                          <a:spcPts val="0"/>
-                        </a:spcBef>
-                        <a:spcAft>
-                          <a:spcPts val="0"/>
-                        </a:spcAft>
-                      </a:pPr>
-                      <a:r>
-                        <a:rPr lang="en-US" sz="1800" b="1" dirty="0">
-                          <a:solidFill>
-                            <a:srgbClr val="FF0000"/>
-                          </a:solidFill>
-                          <a:effectLst/>
-                          <a:latin typeface="Consolas" panose="020B0609020204030204" pitchFamily="49" charset="0"/>
-                          <a:cs typeface="Consolas" panose="020B0609020204030204" pitchFamily="49" charset="0"/>
-                        </a:rPr>
-                        <a:t>0</a:t>
-                      </a:r>
-                      <a:endParaRPr lang="en-US" sz="1800" b="1" dirty="0">
-                        <a:solidFill>
-                          <a:srgbClr val="FF0000"/>
-                        </a:solidFill>
-                        <a:effectLst/>
-                        <a:latin typeface="Consolas" panose="020B0609020204030204" pitchFamily="49" charset="0"/>
-                        <a:ea typeface="宋体"/>
-                        <a:cs typeface="Consolas" panose="020B0609020204030204" pitchFamily="49" charset="0"/>
-                      </a:endParaRPr>
-                    </a:p>
-                  </a:txBody>
-                  <a:tcPr marL="68580" marR="68580" marT="0" marB="0" anchor="ctr"/>
-                </a:tc>
-                <a:tc>
-                  <a:txBody>
-                    <a:bodyPr/>
-                    <a:lstStyle/>
-                    <a:p>
-                      <a:pPr marL="0" marR="0" algn="ctr">
-                        <a:spcBef>
-                          <a:spcPts val="0"/>
-                        </a:spcBef>
-                        <a:spcAft>
-                          <a:spcPts val="0"/>
-                        </a:spcAft>
-                      </a:pPr>
-                      <a:r>
-                        <a:rPr lang="en-US" sz="1800" b="1" dirty="0">
-                          <a:solidFill>
-                            <a:srgbClr val="FF0000"/>
-                          </a:solidFill>
-                          <a:effectLst/>
-                          <a:latin typeface="Consolas" panose="020B0609020204030204" pitchFamily="49" charset="0"/>
-                          <a:cs typeface="Consolas" panose="020B0609020204030204" pitchFamily="49" charset="0"/>
-                        </a:rPr>
-                        <a:t>1</a:t>
-                      </a:r>
-                      <a:endParaRPr lang="en-US" sz="1800" b="1" dirty="0">
-                        <a:solidFill>
-                          <a:srgbClr val="FF0000"/>
-                        </a:solidFill>
-                        <a:effectLst/>
-                        <a:latin typeface="Consolas" panose="020B0609020204030204" pitchFamily="49" charset="0"/>
-                        <a:ea typeface="宋体"/>
-                        <a:cs typeface="Consolas" panose="020B0609020204030204" pitchFamily="49" charset="0"/>
-                      </a:endParaRPr>
-                    </a:p>
-                  </a:txBody>
-                  <a:tcPr marL="68580" marR="68580" marT="0" marB="0" anchor="ctr">
-                    <a:lnR w="19050" cap="flat" cmpd="sng" algn="ctr">
-                      <a:solidFill>
-                        <a:schemeClr val="tx1"/>
-                      </a:solidFill>
-                      <a:prstDash val="solid"/>
-                      <a:round/>
-                      <a:headEnd type="none" w="med" len="med"/>
-                      <a:tailEnd type="none" w="med" len="med"/>
-                    </a:lnR>
-                  </a:tcPr>
-                </a:tc>
-                <a:tc>
-                  <a:txBody>
-                    <a:bodyPr/>
-                    <a:lstStyle/>
-                    <a:p>
-                      <a:pPr marL="0" marR="0" algn="ctr">
-                        <a:spcBef>
-                          <a:spcPts val="0"/>
-                        </a:spcBef>
-                        <a:spcAft>
-                          <a:spcPts val="0"/>
-                        </a:spcAft>
-                      </a:pPr>
-                      <a:r>
-                        <a:rPr lang="en-US" sz="1800" dirty="0" err="1">
-                          <a:solidFill>
-                            <a:srgbClr val="FF0000"/>
-                          </a:solidFill>
-                          <a:effectLst/>
-                        </a:rPr>
-                        <a:t>D</a:t>
-                      </a:r>
-                      <a:r>
-                        <a:rPr lang="en-US" sz="1800" baseline="-25000" dirty="0" err="1">
-                          <a:solidFill>
-                            <a:srgbClr val="FF0000"/>
-                          </a:solidFill>
-                          <a:effectLst/>
-                        </a:rPr>
-                        <a:t>0</a:t>
-                      </a:r>
-                      <a:endParaRPr lang="en-US" sz="1800" dirty="0">
-                        <a:solidFill>
-                          <a:srgbClr val="FF0000"/>
-                        </a:solidFill>
-                        <a:effectLst/>
-                        <a:latin typeface="Consolas" panose="020B0609020204030204" pitchFamily="49" charset="0"/>
-                        <a:ea typeface="宋体"/>
-                        <a:cs typeface="Consolas" panose="020B0609020204030204" pitchFamily="49" charset="0"/>
-                      </a:endParaRPr>
-                    </a:p>
-                  </a:txBody>
-                  <a:tcPr marL="68580" marR="68580" marT="0" marB="0" anchor="ctr">
-                    <a:lnL w="19050" cap="flat" cmpd="sng" algn="ctr">
-                      <a:solidFill>
-                        <a:schemeClr val="tx1"/>
-                      </a:solidFill>
-                      <a:prstDash val="solid"/>
-                      <a:round/>
-                      <a:headEnd type="none" w="med" len="med"/>
-                      <a:tailEnd type="none" w="med" len="med"/>
-                    </a:lnL>
-                  </a:tcPr>
-                </a:tc>
-                <a:tc>
-                  <a:txBody>
-                    <a:bodyPr/>
-                    <a:lstStyle/>
-                    <a:p>
-                      <a:pPr marL="0" marR="0" algn="ctr">
-                        <a:spcBef>
-                          <a:spcPts val="0"/>
-                        </a:spcBef>
-                        <a:spcAft>
-                          <a:spcPts val="0"/>
-                        </a:spcAft>
-                      </a:pPr>
-                      <a:r>
-                        <a:rPr lang="en-US" sz="1800" dirty="0" err="1">
-                          <a:solidFill>
-                            <a:srgbClr val="FF0000"/>
-                          </a:solidFill>
-                          <a:effectLst/>
-                        </a:rPr>
-                        <a:t>D</a:t>
-                      </a:r>
-                      <a:r>
-                        <a:rPr lang="en-US" sz="1800" baseline="-25000" dirty="0" err="1">
-                          <a:solidFill>
-                            <a:srgbClr val="FF0000"/>
-                          </a:solidFill>
-                          <a:effectLst/>
-                        </a:rPr>
-                        <a:t>3</a:t>
-                      </a:r>
-                      <a:endParaRPr lang="en-US" sz="1800" dirty="0">
-                        <a:solidFill>
-                          <a:srgbClr val="FF0000"/>
-                        </a:solidFill>
-                        <a:effectLst/>
-                        <a:latin typeface="Consolas" panose="020B0609020204030204" pitchFamily="49" charset="0"/>
-                        <a:ea typeface="宋体"/>
-                        <a:cs typeface="Consolas" panose="020B0609020204030204" pitchFamily="49" charset="0"/>
-                      </a:endParaRPr>
-                    </a:p>
-                  </a:txBody>
-                  <a:tcPr marL="68580" marR="68580" marT="0" marB="0" anchor="ctr"/>
-                </a:tc>
-                <a:tc>
-                  <a:txBody>
-                    <a:bodyPr/>
-                    <a:lstStyle/>
-                    <a:p>
-                      <a:pPr marL="0" marR="0" algn="ctr">
-                        <a:spcBef>
-                          <a:spcPts val="0"/>
-                        </a:spcBef>
-                        <a:spcAft>
-                          <a:spcPts val="0"/>
-                        </a:spcAft>
-                      </a:pPr>
-                      <a:r>
-                        <a:rPr lang="en-US" sz="1800" dirty="0" err="1">
-                          <a:solidFill>
-                            <a:srgbClr val="FF0000"/>
-                          </a:solidFill>
-                          <a:effectLst/>
-                        </a:rPr>
-                        <a:t>D</a:t>
-                      </a:r>
-                      <a:r>
-                        <a:rPr lang="en-US" sz="1800" baseline="-25000" dirty="0" err="1">
-                          <a:solidFill>
-                            <a:srgbClr val="FF0000"/>
-                          </a:solidFill>
-                          <a:effectLst/>
-                        </a:rPr>
-                        <a:t>2</a:t>
-                      </a:r>
-                      <a:endParaRPr lang="en-US" sz="1800" dirty="0">
-                        <a:solidFill>
-                          <a:srgbClr val="FF0000"/>
-                        </a:solidFill>
-                        <a:effectLst/>
-                        <a:latin typeface="Consolas" panose="020B0609020204030204" pitchFamily="49" charset="0"/>
-                        <a:ea typeface="宋体"/>
-                        <a:cs typeface="Consolas" panose="020B0609020204030204" pitchFamily="49" charset="0"/>
-                      </a:endParaRPr>
-                    </a:p>
-                  </a:txBody>
-                  <a:tcPr marL="68580" marR="68580" marT="0" marB="0" anchor="ctr"/>
-                </a:tc>
-                <a:tc>
-                  <a:txBody>
-                    <a:bodyPr/>
-                    <a:lstStyle/>
-                    <a:p>
-                      <a:pPr marL="0" marR="0" algn="ctr">
-                        <a:spcBef>
-                          <a:spcPts val="0"/>
-                        </a:spcBef>
-                        <a:spcAft>
-                          <a:spcPts val="0"/>
-                        </a:spcAft>
-                      </a:pPr>
-                      <a:r>
-                        <a:rPr lang="en-US" sz="1800" dirty="0" err="1">
-                          <a:solidFill>
-                            <a:srgbClr val="FF0000"/>
-                          </a:solidFill>
-                          <a:effectLst/>
-                        </a:rPr>
-                        <a:t>D</a:t>
-                      </a:r>
-                      <a:r>
-                        <a:rPr lang="en-US" sz="1800" baseline="-25000" dirty="0" err="1">
-                          <a:solidFill>
-                            <a:srgbClr val="FF0000"/>
-                          </a:solidFill>
-                          <a:effectLst/>
-                        </a:rPr>
-                        <a:t>1</a:t>
-                      </a:r>
-                      <a:endParaRPr lang="en-US" sz="1800" dirty="0">
-                        <a:solidFill>
-                          <a:srgbClr val="FF0000"/>
-                        </a:solidFill>
-                        <a:effectLst/>
-                        <a:latin typeface="Consolas" panose="020B0609020204030204" pitchFamily="49" charset="0"/>
-                        <a:ea typeface="宋体"/>
-                        <a:cs typeface="Consolas" panose="020B0609020204030204" pitchFamily="49" charset="0"/>
-                      </a:endParaRPr>
-                    </a:p>
-                  </a:txBody>
-                  <a:tcPr marL="68580" marR="68580" marT="0" marB="0" anchor="ctr"/>
-                </a:tc>
-                <a:extLst>
-                  <a:ext uri="{0D108BD9-81ED-4DB2-BD59-A6C34878D82A}">
-                    <a16:rowId xmlns:a16="http://schemas.microsoft.com/office/drawing/2014/main" val="10002"/>
-                  </a:ext>
-                </a:extLst>
-              </a:tr>
-              <a:tr h="409146">
-                <a:tc>
-                  <a:txBody>
-                    <a:bodyPr/>
-                    <a:lstStyle/>
-                    <a:p>
-                      <a:pPr marL="0" marR="0" algn="ctr">
-                        <a:spcBef>
-                          <a:spcPts val="0"/>
-                        </a:spcBef>
-                        <a:spcAft>
-                          <a:spcPts val="0"/>
-                        </a:spcAft>
-                      </a:pPr>
-                      <a:r>
-                        <a:rPr lang="en-US" sz="1800" b="1">
-                          <a:effectLst/>
-                          <a:latin typeface="Consolas" panose="020B0609020204030204" pitchFamily="49" charset="0"/>
-                          <a:cs typeface="Consolas" panose="020B0609020204030204" pitchFamily="49" charset="0"/>
-                        </a:rPr>
-                        <a:t>1</a:t>
-                      </a:r>
-                      <a:endParaRPr lang="en-US" sz="1800" b="1">
-                        <a:effectLst/>
-                        <a:latin typeface="Consolas" panose="020B0609020204030204" pitchFamily="49" charset="0"/>
-                        <a:ea typeface="宋体"/>
-                        <a:cs typeface="Consolas" panose="020B0609020204030204" pitchFamily="49" charset="0"/>
-                      </a:endParaRPr>
-                    </a:p>
-                  </a:txBody>
-                  <a:tcPr marL="68580" marR="68580" marT="0" marB="0" anchor="ctr"/>
-                </a:tc>
-                <a:tc>
-                  <a:txBody>
-                    <a:bodyPr/>
-                    <a:lstStyle/>
-                    <a:p>
-                      <a:pPr marL="0" marR="0" algn="ctr">
-                        <a:spcBef>
-                          <a:spcPts val="0"/>
-                        </a:spcBef>
-                        <a:spcAft>
-                          <a:spcPts val="0"/>
-                        </a:spcAft>
-                      </a:pPr>
-                      <a:r>
-                        <a:rPr lang="en-US" sz="1800" b="1" dirty="0">
-                          <a:effectLst/>
-                          <a:latin typeface="Consolas" panose="020B0609020204030204" pitchFamily="49" charset="0"/>
-                          <a:cs typeface="Consolas" panose="020B0609020204030204" pitchFamily="49" charset="0"/>
-                        </a:rPr>
-                        <a:t>0</a:t>
-                      </a:r>
-                      <a:endParaRPr lang="en-US" sz="1800" b="1" dirty="0">
-                        <a:effectLst/>
-                        <a:latin typeface="Consolas" panose="020B0609020204030204" pitchFamily="49" charset="0"/>
-                        <a:ea typeface="宋体"/>
-                        <a:cs typeface="Consolas" panose="020B0609020204030204" pitchFamily="49" charset="0"/>
-                      </a:endParaRPr>
-                    </a:p>
-                  </a:txBody>
-                  <a:tcPr marL="68580" marR="68580" marT="0" marB="0" anchor="ctr">
-                    <a:lnR w="19050" cap="flat" cmpd="sng" algn="ctr">
-                      <a:solidFill>
-                        <a:schemeClr val="tx1"/>
-                      </a:solidFill>
-                      <a:prstDash val="solid"/>
-                      <a:round/>
-                      <a:headEnd type="none" w="med" len="med"/>
-                      <a:tailEnd type="none" w="med" len="med"/>
-                    </a:lnR>
-                  </a:tcPr>
-                </a:tc>
-                <a:tc>
-                  <a:txBody>
-                    <a:bodyPr/>
-                    <a:lstStyle/>
-                    <a:p>
-                      <a:pPr marL="0" marR="0" algn="ctr">
-                        <a:spcBef>
-                          <a:spcPts val="0"/>
-                        </a:spcBef>
-                        <a:spcAft>
-                          <a:spcPts val="0"/>
-                        </a:spcAft>
-                      </a:pPr>
-                      <a:r>
-                        <a:rPr lang="en-US" sz="1800">
-                          <a:effectLst/>
-                        </a:rPr>
-                        <a:t>D</a:t>
-                      </a:r>
-                      <a:r>
-                        <a:rPr lang="en-US" sz="1800" baseline="-25000">
-                          <a:effectLst/>
-                        </a:rPr>
-                        <a:t>1</a:t>
-                      </a:r>
-                      <a:endParaRPr lang="en-US" sz="1800">
-                        <a:effectLst/>
-                        <a:latin typeface="Consolas" panose="020B0609020204030204" pitchFamily="49" charset="0"/>
-                        <a:ea typeface="宋体"/>
-                        <a:cs typeface="Consolas" panose="020B0609020204030204" pitchFamily="49" charset="0"/>
-                      </a:endParaRPr>
-                    </a:p>
-                  </a:txBody>
-                  <a:tcPr marL="68580" marR="68580" marT="0" marB="0" anchor="ctr">
-                    <a:lnL w="19050" cap="flat" cmpd="sng" algn="ctr">
-                      <a:solidFill>
-                        <a:schemeClr val="tx1"/>
-                      </a:solidFill>
-                      <a:prstDash val="solid"/>
-                      <a:round/>
-                      <a:headEnd type="none" w="med" len="med"/>
-                      <a:tailEnd type="none" w="med" len="med"/>
-                    </a:lnL>
-                  </a:tcPr>
-                </a:tc>
-                <a:tc>
-                  <a:txBody>
-                    <a:bodyPr/>
-                    <a:lstStyle/>
-                    <a:p>
-                      <a:pPr marL="0" marR="0" algn="ctr">
-                        <a:spcBef>
-                          <a:spcPts val="0"/>
-                        </a:spcBef>
-                        <a:spcAft>
-                          <a:spcPts val="0"/>
-                        </a:spcAft>
-                      </a:pPr>
-                      <a:r>
-                        <a:rPr lang="en-US" sz="1800" dirty="0" err="1">
-                          <a:effectLst/>
-                        </a:rPr>
-                        <a:t>D</a:t>
-                      </a:r>
-                      <a:r>
-                        <a:rPr lang="en-US" sz="1800" baseline="-25000" dirty="0" err="1">
-                          <a:effectLst/>
-                        </a:rPr>
-                        <a:t>0</a:t>
-                      </a:r>
-                      <a:endParaRPr lang="en-US" sz="1800" dirty="0">
-                        <a:effectLst/>
-                        <a:latin typeface="Consolas" panose="020B0609020204030204" pitchFamily="49" charset="0"/>
-                        <a:ea typeface="宋体"/>
-                        <a:cs typeface="Consolas" panose="020B0609020204030204" pitchFamily="49" charset="0"/>
-                      </a:endParaRPr>
-                    </a:p>
-                  </a:txBody>
-                  <a:tcPr marL="68580" marR="68580" marT="0" marB="0" anchor="ctr"/>
-                </a:tc>
-                <a:tc>
-                  <a:txBody>
-                    <a:bodyPr/>
-                    <a:lstStyle/>
-                    <a:p>
-                      <a:pPr marL="0" marR="0" algn="ctr">
-                        <a:spcBef>
-                          <a:spcPts val="0"/>
-                        </a:spcBef>
-                        <a:spcAft>
-                          <a:spcPts val="0"/>
-                        </a:spcAft>
-                      </a:pPr>
-                      <a:r>
-                        <a:rPr lang="en-US" sz="1800" dirty="0" err="1">
-                          <a:effectLst/>
-                        </a:rPr>
-                        <a:t>D</a:t>
-                      </a:r>
-                      <a:r>
-                        <a:rPr lang="en-US" sz="1800" baseline="-25000" dirty="0" err="1">
-                          <a:effectLst/>
-                        </a:rPr>
-                        <a:t>3</a:t>
-                      </a:r>
-                      <a:endParaRPr lang="en-US" sz="1800" dirty="0">
-                        <a:effectLst/>
-                        <a:latin typeface="Consolas" panose="020B0609020204030204" pitchFamily="49" charset="0"/>
-                        <a:ea typeface="宋体"/>
-                        <a:cs typeface="Consolas" panose="020B0609020204030204" pitchFamily="49" charset="0"/>
-                      </a:endParaRPr>
-                    </a:p>
-                  </a:txBody>
-                  <a:tcPr marL="68580" marR="68580" marT="0" marB="0" anchor="ctr"/>
-                </a:tc>
-                <a:tc>
-                  <a:txBody>
-                    <a:bodyPr/>
-                    <a:lstStyle/>
-                    <a:p>
-                      <a:pPr marL="0" marR="0" algn="ctr">
-                        <a:spcBef>
-                          <a:spcPts val="0"/>
-                        </a:spcBef>
-                        <a:spcAft>
-                          <a:spcPts val="0"/>
-                        </a:spcAft>
-                      </a:pPr>
-                      <a:r>
-                        <a:rPr lang="en-US" sz="1800">
-                          <a:effectLst/>
-                        </a:rPr>
-                        <a:t>D</a:t>
-                      </a:r>
-                      <a:r>
-                        <a:rPr lang="en-US" sz="1800" baseline="-25000">
-                          <a:effectLst/>
-                        </a:rPr>
-                        <a:t>2</a:t>
-                      </a:r>
-                      <a:endParaRPr lang="en-US" sz="1800">
-                        <a:effectLst/>
-                        <a:latin typeface="Consolas" panose="020B0609020204030204" pitchFamily="49" charset="0"/>
-                        <a:ea typeface="宋体"/>
-                        <a:cs typeface="Consolas" panose="020B0609020204030204" pitchFamily="49" charset="0"/>
-                      </a:endParaRPr>
-                    </a:p>
-                  </a:txBody>
-                  <a:tcPr marL="68580" marR="68580" marT="0" marB="0" anchor="ctr"/>
-                </a:tc>
-                <a:extLst>
-                  <a:ext uri="{0D108BD9-81ED-4DB2-BD59-A6C34878D82A}">
-                    <a16:rowId xmlns:a16="http://schemas.microsoft.com/office/drawing/2014/main" val="10003"/>
-                  </a:ext>
-                </a:extLst>
-              </a:tr>
-              <a:tr h="409146">
-                <a:tc>
-                  <a:txBody>
-                    <a:bodyPr/>
-                    <a:lstStyle/>
-                    <a:p>
-                      <a:pPr marL="0" marR="0" algn="ctr">
-                        <a:spcBef>
-                          <a:spcPts val="0"/>
-                        </a:spcBef>
-                        <a:spcAft>
-                          <a:spcPts val="0"/>
-                        </a:spcAft>
-                      </a:pPr>
-                      <a:r>
-                        <a:rPr lang="en-US" sz="1800" b="1">
-                          <a:effectLst/>
-                          <a:latin typeface="Consolas" panose="020B0609020204030204" pitchFamily="49" charset="0"/>
-                          <a:cs typeface="Consolas" panose="020B0609020204030204" pitchFamily="49" charset="0"/>
-                        </a:rPr>
-                        <a:t>1</a:t>
-                      </a:r>
-                      <a:endParaRPr lang="en-US" sz="1800" b="1">
-                        <a:effectLst/>
-                        <a:latin typeface="Consolas" panose="020B0609020204030204" pitchFamily="49" charset="0"/>
-                        <a:ea typeface="宋体"/>
-                        <a:cs typeface="Consolas" panose="020B0609020204030204" pitchFamily="49" charset="0"/>
-                      </a:endParaRPr>
-                    </a:p>
-                  </a:txBody>
-                  <a:tcPr marL="68580" marR="68580" marT="0" marB="0" anchor="ctr"/>
-                </a:tc>
-                <a:tc>
-                  <a:txBody>
-                    <a:bodyPr/>
-                    <a:lstStyle/>
-                    <a:p>
-                      <a:pPr marL="0" marR="0" algn="ctr">
-                        <a:spcBef>
-                          <a:spcPts val="0"/>
-                        </a:spcBef>
-                        <a:spcAft>
-                          <a:spcPts val="0"/>
-                        </a:spcAft>
-                      </a:pPr>
-                      <a:r>
-                        <a:rPr lang="en-US" sz="1800" b="1" dirty="0">
-                          <a:effectLst/>
-                          <a:latin typeface="Consolas" panose="020B0609020204030204" pitchFamily="49" charset="0"/>
-                          <a:cs typeface="Consolas" panose="020B0609020204030204" pitchFamily="49" charset="0"/>
-                        </a:rPr>
-                        <a:t>1</a:t>
-                      </a:r>
-                      <a:endParaRPr lang="en-US" sz="1800" b="1" dirty="0">
-                        <a:effectLst/>
-                        <a:latin typeface="Consolas" panose="020B0609020204030204" pitchFamily="49" charset="0"/>
-                        <a:ea typeface="宋体"/>
-                        <a:cs typeface="Consolas" panose="020B0609020204030204" pitchFamily="49" charset="0"/>
-                      </a:endParaRPr>
-                    </a:p>
-                  </a:txBody>
-                  <a:tcPr marL="68580" marR="68580" marT="0" marB="0" anchor="ctr">
-                    <a:lnR w="19050" cap="flat" cmpd="sng" algn="ctr">
-                      <a:solidFill>
-                        <a:schemeClr val="tx1"/>
-                      </a:solidFill>
-                      <a:prstDash val="solid"/>
-                      <a:round/>
-                      <a:headEnd type="none" w="med" len="med"/>
-                      <a:tailEnd type="none" w="med" len="med"/>
-                    </a:lnR>
-                  </a:tcPr>
-                </a:tc>
-                <a:tc>
-                  <a:txBody>
-                    <a:bodyPr/>
-                    <a:lstStyle/>
-                    <a:p>
-                      <a:pPr marL="0" marR="0" algn="ctr">
-                        <a:spcBef>
-                          <a:spcPts val="0"/>
-                        </a:spcBef>
-                        <a:spcAft>
-                          <a:spcPts val="0"/>
-                        </a:spcAft>
-                      </a:pPr>
-                      <a:r>
-                        <a:rPr lang="en-US" sz="1800">
-                          <a:effectLst/>
-                        </a:rPr>
-                        <a:t>D</a:t>
-                      </a:r>
-                      <a:r>
-                        <a:rPr lang="en-US" sz="1800" baseline="-25000">
-                          <a:effectLst/>
-                        </a:rPr>
-                        <a:t>2</a:t>
-                      </a:r>
-                      <a:endParaRPr lang="en-US" sz="1800">
-                        <a:effectLst/>
-                        <a:latin typeface="Consolas" panose="020B0609020204030204" pitchFamily="49" charset="0"/>
-                        <a:ea typeface="宋体"/>
-                        <a:cs typeface="Consolas" panose="020B0609020204030204" pitchFamily="49" charset="0"/>
-                      </a:endParaRPr>
-                    </a:p>
-                  </a:txBody>
-                  <a:tcPr marL="68580" marR="68580" marT="0" marB="0" anchor="ctr">
-                    <a:lnL w="19050" cap="flat" cmpd="sng" algn="ctr">
-                      <a:solidFill>
-                        <a:schemeClr val="tx1"/>
-                      </a:solidFill>
-                      <a:prstDash val="solid"/>
-                      <a:round/>
-                      <a:headEnd type="none" w="med" len="med"/>
-                      <a:tailEnd type="none" w="med" len="med"/>
-                    </a:lnL>
-                  </a:tcPr>
-                </a:tc>
-                <a:tc>
-                  <a:txBody>
-                    <a:bodyPr/>
-                    <a:lstStyle/>
-                    <a:p>
-                      <a:pPr marL="0" marR="0" algn="ctr">
-                        <a:spcBef>
-                          <a:spcPts val="0"/>
-                        </a:spcBef>
-                        <a:spcAft>
-                          <a:spcPts val="0"/>
-                        </a:spcAft>
-                      </a:pPr>
-                      <a:r>
-                        <a:rPr lang="en-US" sz="1800">
-                          <a:effectLst/>
-                        </a:rPr>
-                        <a:t>D</a:t>
-                      </a:r>
-                      <a:r>
-                        <a:rPr lang="en-US" sz="1800" baseline="-25000">
-                          <a:effectLst/>
-                        </a:rPr>
-                        <a:t>1</a:t>
-                      </a:r>
-                      <a:endParaRPr lang="en-US" sz="1800">
-                        <a:effectLst/>
-                        <a:latin typeface="Consolas" panose="020B0609020204030204" pitchFamily="49" charset="0"/>
-                        <a:ea typeface="宋体"/>
-                        <a:cs typeface="Consolas" panose="020B0609020204030204" pitchFamily="49" charset="0"/>
-                      </a:endParaRPr>
-                    </a:p>
-                  </a:txBody>
-                  <a:tcPr marL="68580" marR="68580" marT="0" marB="0" anchor="ctr"/>
-                </a:tc>
-                <a:tc>
-                  <a:txBody>
-                    <a:bodyPr/>
-                    <a:lstStyle/>
-                    <a:p>
-                      <a:pPr marL="0" marR="0" algn="ctr">
-                        <a:spcBef>
-                          <a:spcPts val="0"/>
-                        </a:spcBef>
-                        <a:spcAft>
-                          <a:spcPts val="0"/>
-                        </a:spcAft>
-                      </a:pPr>
-                      <a:r>
-                        <a:rPr lang="en-US" sz="1800" dirty="0" err="1">
-                          <a:effectLst/>
-                        </a:rPr>
-                        <a:t>D</a:t>
-                      </a:r>
-                      <a:r>
-                        <a:rPr lang="en-US" sz="1800" baseline="-25000" dirty="0" err="1">
-                          <a:effectLst/>
-                        </a:rPr>
-                        <a:t>0</a:t>
-                      </a:r>
-                      <a:endParaRPr lang="en-US" sz="1800" dirty="0">
-                        <a:effectLst/>
-                        <a:latin typeface="Consolas" panose="020B0609020204030204" pitchFamily="49" charset="0"/>
-                        <a:ea typeface="宋体"/>
-                        <a:cs typeface="Consolas" panose="020B0609020204030204" pitchFamily="49" charset="0"/>
-                      </a:endParaRPr>
-                    </a:p>
-                  </a:txBody>
-                  <a:tcPr marL="68580" marR="68580" marT="0" marB="0" anchor="ctr"/>
-                </a:tc>
-                <a:tc>
-                  <a:txBody>
-                    <a:bodyPr/>
-                    <a:lstStyle/>
-                    <a:p>
-                      <a:pPr marL="0" marR="0" algn="ctr">
-                        <a:spcBef>
-                          <a:spcPts val="0"/>
-                        </a:spcBef>
-                        <a:spcAft>
-                          <a:spcPts val="0"/>
-                        </a:spcAft>
-                      </a:pPr>
-                      <a:r>
-                        <a:rPr lang="en-US" sz="1800" dirty="0" err="1">
-                          <a:effectLst/>
-                        </a:rPr>
-                        <a:t>D</a:t>
-                      </a:r>
-                      <a:r>
-                        <a:rPr lang="en-US" sz="1800" baseline="-25000" dirty="0" err="1">
-                          <a:effectLst/>
-                        </a:rPr>
-                        <a:t>3</a:t>
-                      </a:r>
-                      <a:endParaRPr lang="en-US" sz="1800" dirty="0">
-                        <a:effectLst/>
-                        <a:latin typeface="Consolas" panose="020B0609020204030204" pitchFamily="49" charset="0"/>
-                        <a:ea typeface="宋体"/>
-                        <a:cs typeface="Consolas" panose="020B0609020204030204" pitchFamily="49" charset="0"/>
-                      </a:endParaRPr>
-                    </a:p>
-                  </a:txBody>
-                  <a:tcPr marL="68580" marR="68580" marT="0" marB="0" anchor="ctr"/>
-                </a:tc>
-                <a:extLst>
-                  <a:ext uri="{0D108BD9-81ED-4DB2-BD59-A6C34878D82A}">
-                    <a16:rowId xmlns:a16="http://schemas.microsoft.com/office/drawing/2014/main" val="10004"/>
-                  </a:ext>
-                </a:extLst>
-              </a:tr>
-            </a:tbl>
-          </a:graphicData>
-        </a:graphic>
-      </p:graphicFrame>
-      <p:pic>
-        <p:nvPicPr>
-          <p:cNvPr id="5" name="Picture 4"/>
-          <p:cNvPicPr>
-            <a:picLocks noChangeAspect="1"/>
-          </p:cNvPicPr>
-          <p:nvPr/>
-        </p:nvPicPr>
-        <p:blipFill>
-          <a:blip r:embed="rId2" cstate="print">
-            <a:extLst>
-              <a:ext uri="{28A0092B-C50C-407E-A947-70E740481C1C}">
-                <a14:useLocalDpi xmlns:a14="http://schemas.microsoft.com/office/drawing/2010/main" val="0"/>
-              </a:ext>
-            </a:extLst>
-          </a:blip>
-          <a:stretch>
-            <a:fillRect/>
-          </a:stretch>
-        </p:blipFill>
-        <p:spPr>
-          <a:xfrm>
-            <a:off x="256021" y="2179314"/>
-            <a:ext cx="5611379" cy="2773686"/>
-          </a:xfrm>
-          <a:prstGeom prst="rect">
-            <a:avLst/>
-          </a:prstGeom>
-        </p:spPr>
-      </p:pic>
-    </p:spTree>
-    <p:extLst>
-      <p:ext uri="{BB962C8B-B14F-4D97-AF65-F5344CB8AC3E}">
-        <p14:creationId xmlns:p14="http://schemas.microsoft.com/office/powerpoint/2010/main" val="4133200898"/>
       </p:ext>
     </p:extLst>
   </p:cSld>

--- a/PPTs/ZDELETED.pptx
+++ b/PPTs/ZDELETED.pptx
@@ -5,7 +5,7 @@
     <p:sldMasterId id="2147483660" r:id="rId1"/>
   </p:sldMasterIdLst>
   <p:notesMasterIdLst>
-    <p:notesMasterId r:id="rId20"/>
+    <p:notesMasterId r:id="rId22"/>
   </p:notesMasterIdLst>
   <p:sldIdLst>
     <p:sldId id="256" r:id="rId2"/>
@@ -26,6 +26,8 @@
     <p:sldId id="262" r:id="rId17"/>
     <p:sldId id="265" r:id="rId18"/>
     <p:sldId id="379" r:id="rId19"/>
+    <p:sldId id="320" r:id="rId20"/>
+    <p:sldId id="319" r:id="rId21"/>
   </p:sldIdLst>
   <p:sldSz cx="9144000" cy="6858000" type="screen4x3"/>
   <p:notesSz cx="6858000" cy="9144000"/>
@@ -146,7 +148,7 @@
 <file path=ppt/revisionInfo.xml><?xml version="1.0" encoding="utf-8"?>
 <p1510:revInfo xmlns:a="http://schemas.openxmlformats.org/drawingml/2006/main" xmlns:r="http://schemas.openxmlformats.org/officeDocument/2006/relationships" xmlns:p1510="http://schemas.microsoft.com/office/powerpoint/2015/10/main">
   <p1510:revLst>
-    <p1510:client id="{74B15ED0-6DB4-4108-82C9-64F0E8E52BFB}" v="10" dt="2025-10-02T23:51:49.405"/>
+    <p1510:client id="{74B15ED0-6DB4-4108-82C9-64F0E8E52BFB}" v="11" dt="2025-10-05T19:51:37.130"/>
   </p1510:revLst>
 </p1510:revInfo>
 </file>
@@ -156,7 +158,7 @@
   <pc:docChgLst>
     <pc:chgData name="Zonghua Gu" userId="9a7e1853e1951ef5" providerId="LiveId" clId="{CF1FAA12-072C-4ED5-BA76-0FFFAEFDB88A}"/>
     <pc:docChg chg="custSel addSld delSld modSld">
-      <pc:chgData name="Zonghua Gu" userId="9a7e1853e1951ef5" providerId="LiveId" clId="{CF1FAA12-072C-4ED5-BA76-0FFFAEFDB88A}" dt="2025-10-02T23:51:49.400" v="22"/>
+      <pc:chgData name="Zonghua Gu" userId="9a7e1853e1951ef5" providerId="LiveId" clId="{CF1FAA12-072C-4ED5-BA76-0FFFAEFDB88A}" dt="2025-10-05T19:51:37.123" v="23"/>
       <pc:docMkLst>
         <pc:docMk/>
       </pc:docMkLst>
@@ -385,6 +387,20 @@
         <pc:sldMkLst>
           <pc:docMk/>
           <pc:sldMk cId="2321944581" sldId="318"/>
+        </pc:sldMkLst>
+      </pc:sldChg>
+      <pc:sldChg chg="add">
+        <pc:chgData name="Zonghua Gu" userId="9a7e1853e1951ef5" providerId="LiveId" clId="{CF1FAA12-072C-4ED5-BA76-0FFFAEFDB88A}" dt="2025-10-05T19:51:37.123" v="23"/>
+        <pc:sldMkLst>
+          <pc:docMk/>
+          <pc:sldMk cId="96042344" sldId="319"/>
+        </pc:sldMkLst>
+      </pc:sldChg>
+      <pc:sldChg chg="add">
+        <pc:chgData name="Zonghua Gu" userId="9a7e1853e1951ef5" providerId="LiveId" clId="{CF1FAA12-072C-4ED5-BA76-0FFFAEFDB88A}" dt="2025-10-05T19:51:37.123" v="23"/>
+        <pc:sldMkLst>
+          <pc:docMk/>
+          <pc:sldMk cId="2289735267" sldId="320"/>
         </pc:sldMkLst>
       </pc:sldChg>
       <pc:sldChg chg="del">
@@ -671,7 +687,7 @@
             <a:fld id="{3AC3A17A-95E8-4381-B66B-5D6DE2B3048A}" type="datetimeFigureOut">
               <a:rPr lang="en-US" smtClean="0"/>
               <a:pPr/>
-              <a:t>10/2/2025</a:t>
+              <a:t>10/5/2025</a:t>
             </a:fld>
             <a:endParaRPr lang="en-US"/>
           </a:p>
@@ -1399,6 +1415,96 @@
 </p:notes>
 </file>
 
+<file path=ppt/notesSlides/notesSlide4.xml><?xml version="1.0" encoding="utf-8"?>
+<p:notes xmlns:a="http://schemas.openxmlformats.org/drawingml/2006/main" xmlns:r="http://schemas.openxmlformats.org/officeDocument/2006/relationships" xmlns:p="http://schemas.openxmlformats.org/presentationml/2006/main">
+  <p:cSld>
+    <p:spTree>
+      <p:nvGrpSpPr>
+        <p:cNvPr id="1" name=""/>
+        <p:cNvGrpSpPr/>
+        <p:nvPr/>
+      </p:nvGrpSpPr>
+      <p:grpSpPr>
+        <a:xfrm>
+          <a:off x="0" y="0"/>
+          <a:ext cx="0" cy="0"/>
+          <a:chOff x="0" y="0"/>
+          <a:chExt cx="0" cy="0"/>
+        </a:xfrm>
+      </p:grpSpPr>
+      <p:sp>
+        <p:nvSpPr>
+          <p:cNvPr id="2" name="Slide Image Placeholder 1"/>
+          <p:cNvSpPr>
+            <a:spLocks noGrp="1" noRot="1" noChangeAspect="1"/>
+          </p:cNvSpPr>
+          <p:nvPr>
+            <p:ph type="sldImg"/>
+          </p:nvPr>
+        </p:nvSpPr>
+        <p:spPr>
+          <a:xfrm>
+            <a:off x="381000" y="685800"/>
+            <a:ext cx="6096000" cy="3429000"/>
+          </a:xfrm>
+        </p:spPr>
+      </p:sp>
+      <p:sp>
+        <p:nvSpPr>
+          <p:cNvPr id="3" name="Notes Placeholder 2"/>
+          <p:cNvSpPr>
+            <a:spLocks noGrp="1"/>
+          </p:cNvSpPr>
+          <p:nvPr>
+            <p:ph type="body" idx="1"/>
+          </p:nvPr>
+        </p:nvSpPr>
+        <p:spPr/>
+        <p:txBody>
+          <a:bodyPr/>
+          <a:lstStyle/>
+          <a:p>
+            <a:endParaRPr lang="en-US" dirty="0"/>
+          </a:p>
+        </p:txBody>
+      </p:sp>
+      <p:sp>
+        <p:nvSpPr>
+          <p:cNvPr id="4" name="Slide Number Placeholder 3"/>
+          <p:cNvSpPr>
+            <a:spLocks noGrp="1"/>
+          </p:cNvSpPr>
+          <p:nvPr>
+            <p:ph type="sldNum" sz="quarter" idx="5"/>
+          </p:nvPr>
+        </p:nvSpPr>
+        <p:spPr/>
+        <p:txBody>
+          <a:bodyPr/>
+          <a:lstStyle/>
+          <a:p>
+            <a:fld id="{61B2AF1D-1787-4F45-8D94-E7435950448C}" type="slidenum">
+              <a:rPr lang="en-US" smtClean="0"/>
+              <a:pPr/>
+              <a:t>20</a:t>
+            </a:fld>
+            <a:endParaRPr lang="en-US"/>
+          </a:p>
+        </p:txBody>
+      </p:sp>
+    </p:spTree>
+    <p:extLst>
+      <p:ext uri="{BB962C8B-B14F-4D97-AF65-F5344CB8AC3E}">
+        <p14:creationId xmlns:p14="http://schemas.microsoft.com/office/powerpoint/2010/main" val="3451858259"/>
+      </p:ext>
+    </p:extLst>
+  </p:cSld>
+  <p:clrMapOvr>
+    <a:masterClrMapping/>
+  </p:clrMapOvr>
+</p:notes>
+</file>
+
 <file path=ppt/slideLayouts/slideLayout1.xml><?xml version="1.0" encoding="utf-8"?>
 <p:sldLayout xmlns:a="http://schemas.openxmlformats.org/drawingml/2006/main" xmlns:r="http://schemas.openxmlformats.org/officeDocument/2006/relationships" xmlns:p="http://schemas.openxmlformats.org/presentationml/2006/main" showMasterSp="0" type="title" preserve="1">
   <p:cSld name="Title Slide">
@@ -1542,7 +1648,7 @@
             <a:fld id="{966FEA0E-C2DF-4252-97AD-54F2B7E07EAC}" type="datetime1">
               <a:rPr lang="en-US" smtClean="0"/>
               <a:pPr eaLnBrk="1" latinLnBrk="0" hangingPunct="1"/>
-              <a:t>10/2/2025</a:t>
+              <a:t>10/5/2025</a:t>
             </a:fld>
             <a:endParaRPr lang="en-US" sz="1600" dirty="0"/>
           </a:p>
@@ -1903,7 +2009,7 @@
             <a:fld id="{69EF9524-0CAA-4F98-BAC2-CE6B712F5E94}" type="datetime1">
               <a:rPr lang="en-US" smtClean="0"/>
               <a:pPr eaLnBrk="1" latinLnBrk="0" hangingPunct="1"/>
-              <a:t>10/2/2025</a:t>
+              <a:t>10/5/2025</a:t>
             </a:fld>
             <a:endParaRPr lang="en-US"/>
           </a:p>
@@ -2080,7 +2186,7 @@
             <a:fld id="{CB20516D-6F89-4C89-8307-32A716E22875}" type="datetime1">
               <a:rPr lang="en-US" smtClean="0"/>
               <a:pPr eaLnBrk="1" latinLnBrk="0" hangingPunct="1"/>
-              <a:t>10/2/2025</a:t>
+              <a:t>10/5/2025</a:t>
             </a:fld>
             <a:endParaRPr lang="en-US"/>
           </a:p>
@@ -2317,7 +2423,7 @@
             <a:fld id="{0CD88620-7329-4FC3-B65D-4EA691138F1B}" type="datetime1">
               <a:rPr lang="en-US" smtClean="0"/>
               <a:pPr eaLnBrk="1" latinLnBrk="0" hangingPunct="1"/>
-              <a:t>10/2/2025</a:t>
+              <a:t>10/5/2025</a:t>
             </a:fld>
             <a:endParaRPr lang="en-US" dirty="0"/>
           </a:p>
@@ -2588,7 +2694,7 @@
             <a:fld id="{0E46F3A1-5653-427D-9F78-56077401431A}" type="datetime1">
               <a:rPr lang="en-US" smtClean="0"/>
               <a:pPr eaLnBrk="1" latinLnBrk="0" hangingPunct="1"/>
-              <a:t>10/2/2025</a:t>
+              <a:t>10/5/2025</a:t>
             </a:fld>
             <a:endParaRPr lang="en-US" dirty="0"/>
           </a:p>
@@ -2810,7 +2916,7 @@
             <a:fld id="{CB67FC03-415A-45F0-B002-DF181377F7DC}" type="datetime1">
               <a:rPr lang="en-US" smtClean="0"/>
               <a:pPr eaLnBrk="1" latinLnBrk="0" hangingPunct="1"/>
-              <a:t>10/2/2025</a:t>
+              <a:t>10/5/2025</a:t>
             </a:fld>
             <a:endParaRPr lang="en-US"/>
           </a:p>
@@ -3164,7 +3270,7 @@
             <a:fld id="{1B6FC726-A0B4-4FC7-90F5-F17415A5C1A3}" type="datetime1">
               <a:rPr lang="en-US" smtClean="0"/>
               <a:pPr eaLnBrk="1" latinLnBrk="0" hangingPunct="1"/>
-              <a:t>10/2/2025</a:t>
+              <a:t>10/5/2025</a:t>
             </a:fld>
             <a:endParaRPr lang="en-US"/>
           </a:p>
@@ -3398,7 +3504,7 @@
             <a:fld id="{BE217211-C3F9-4892-9CC3-C7105638567D}" type="datetime1">
               <a:rPr lang="en-US" smtClean="0"/>
               <a:pPr eaLnBrk="1" latinLnBrk="0" hangingPunct="1"/>
-              <a:t>10/2/2025</a:t>
+              <a:t>10/5/2025</a:t>
             </a:fld>
             <a:endParaRPr lang="en-US"/>
           </a:p>
@@ -3541,7 +3647,7 @@
             <a:fld id="{BA713E6A-6B26-4373-A75B-EF395DC64F9E}" type="datetime1">
               <a:rPr lang="en-US" smtClean="0"/>
               <a:pPr eaLnBrk="1" latinLnBrk="0" hangingPunct="1"/>
-              <a:t>10/2/2025</a:t>
+              <a:t>10/5/2025</a:t>
             </a:fld>
             <a:endParaRPr lang="en-US"/>
           </a:p>
@@ -3820,7 +3926,7 @@
             <a:fld id="{57EB41EF-4260-415A-8DD6-FEDCC46E7EFC}" type="datetime1">
               <a:rPr lang="en-US" smtClean="0"/>
               <a:pPr eaLnBrk="1" latinLnBrk="0" hangingPunct="1"/>
-              <a:t>10/2/2025</a:t>
+              <a:t>10/5/2025</a:t>
             </a:fld>
             <a:endParaRPr lang="en-US"/>
           </a:p>
@@ -4229,7 +4335,7 @@
             <a:fld id="{6BDA80A0-06CC-4492-94A0-E8516751045E}" type="datetime1">
               <a:rPr lang="en-US" smtClean="0"/>
               <a:pPr eaLnBrk="1" latinLnBrk="0" hangingPunct="1"/>
-              <a:t>10/2/2025</a:t>
+              <a:t>10/5/2025</a:t>
             </a:fld>
             <a:endParaRPr lang="en-US"/>
           </a:p>
@@ -4568,7 +4674,7 @@
             <a:fld id="{A25B5B4B-57EE-495D-8E74-A657CFD8BB6C}" type="datetime1">
               <a:rPr lang="en-US" smtClean="0"/>
               <a:pPr eaLnBrk="1" latinLnBrk="0" hangingPunct="1"/>
-              <a:t>10/2/2025</a:t>
+              <a:t>10/5/2025</a:t>
             </a:fld>
             <a:endParaRPr lang="en-US" sz="1400" dirty="0">
               <a:solidFill>
@@ -11257,6 +11363,1347 @@
 </p:sld>
 </file>
 
+<file path=ppt/slides/slide19.xml><?xml version="1.0" encoding="utf-8"?>
+<p:sld xmlns:a="http://schemas.openxmlformats.org/drawingml/2006/main" xmlns:r="http://schemas.openxmlformats.org/officeDocument/2006/relationships" xmlns:p="http://schemas.openxmlformats.org/presentationml/2006/main">
+  <p:cSld>
+    <p:spTree>
+      <p:nvGrpSpPr>
+        <p:cNvPr id="1" name=""/>
+        <p:cNvGrpSpPr/>
+        <p:nvPr/>
+      </p:nvGrpSpPr>
+      <p:grpSpPr>
+        <a:xfrm>
+          <a:off x="0" y="0"/>
+          <a:ext cx="0" cy="0"/>
+          <a:chOff x="0" y="0"/>
+          <a:chExt cx="0" cy="0"/>
+        </a:xfrm>
+      </p:grpSpPr>
+      <p:sp>
+        <p:nvSpPr>
+          <p:cNvPr id="2" name="Title 1"/>
+          <p:cNvSpPr>
+            <a:spLocks noGrp="1"/>
+          </p:cNvSpPr>
+          <p:nvPr>
+            <p:ph type="title"/>
+          </p:nvPr>
+        </p:nvSpPr>
+        <p:spPr/>
+        <p:txBody>
+          <a:bodyPr/>
+          <a:lstStyle/>
+          <a:p>
+            <a:r>
+              <a:rPr lang="en-US" dirty="0"/>
+              <a:t>Passing Extra Arguments via Stack</a:t>
+            </a:r>
+          </a:p>
+        </p:txBody>
+      </p:sp>
+      <p:sp>
+        <p:nvSpPr>
+          <p:cNvPr id="3" name="Slide Number Placeholder 2"/>
+          <p:cNvSpPr>
+            <a:spLocks noGrp="1"/>
+          </p:cNvSpPr>
+          <p:nvPr>
+            <p:ph type="sldNum" sz="quarter" idx="12"/>
+          </p:nvPr>
+        </p:nvSpPr>
+        <p:spPr/>
+        <p:txBody>
+          <a:bodyPr/>
+          <a:lstStyle/>
+          <a:p>
+            <a:fld id="{EA7C8D44-3667-46F6-9772-CC52308E2A7F}" type="slidenum">
+              <a:rPr kumimoji="0" lang="en-US" smtClean="0"/>
+              <a:pPr/>
+              <a:t>19</a:t>
+            </a:fld>
+            <a:endParaRPr kumimoji="0" lang="en-US" dirty="0"/>
+          </a:p>
+        </p:txBody>
+      </p:sp>
+      <p:sp>
+        <p:nvSpPr>
+          <p:cNvPr id="5" name="Rectangle 4"/>
+          <p:cNvSpPr/>
+          <p:nvPr/>
+        </p:nvSpPr>
+        <p:spPr>
+          <a:xfrm>
+            <a:off x="1428750" y="1828801"/>
+            <a:ext cx="5600700" cy="507831"/>
+          </a:xfrm>
+          <a:prstGeom prst="rect">
+            <a:avLst/>
+          </a:prstGeom>
+        </p:spPr>
+        <p:txBody>
+          <a:bodyPr wrap="square">
+            <a:spAutoFit/>
+          </a:bodyPr>
+          <a:lstStyle/>
+          <a:p>
+            <a:r>
+              <a:rPr lang="en-US" sz="1350" b="1" dirty="0">
+                <a:latin typeface="Consolas" panose="020B0609020204030204" pitchFamily="49" charset="0"/>
+              </a:rPr>
+              <a:t>int32_t sum(int32_t a, int32_t b, int32_t c, int32_t d,</a:t>
+            </a:r>
+          </a:p>
+          <a:p>
+            <a:r>
+              <a:rPr lang="en-US" sz="1350" b="1" dirty="0">
+                <a:latin typeface="Consolas" panose="020B0609020204030204" pitchFamily="49" charset="0"/>
+              </a:rPr>
+              <a:t>            int32_t h, int32_t </a:t>
+            </a:r>
+            <a:r>
+              <a:rPr lang="en-US" sz="1350" b="1" dirty="0" err="1">
+                <a:latin typeface="Consolas" panose="020B0609020204030204" pitchFamily="49" charset="0"/>
+              </a:rPr>
+              <a:t>i</a:t>
+            </a:r>
+            <a:r>
+              <a:rPr lang="en-US" sz="1350" b="1" dirty="0">
+                <a:latin typeface="Consolas" panose="020B0609020204030204" pitchFamily="49" charset="0"/>
+              </a:rPr>
+              <a:t>, int32_t j, int32_t k);</a:t>
+            </a:r>
+          </a:p>
+        </p:txBody>
+      </p:sp>
+      <p:sp>
+        <p:nvSpPr>
+          <p:cNvPr id="6" name="Rectangle 5"/>
+          <p:cNvSpPr/>
+          <p:nvPr/>
+        </p:nvSpPr>
+        <p:spPr>
+          <a:xfrm>
+            <a:off x="1428750" y="2324526"/>
+            <a:ext cx="3829050" cy="300082"/>
+          </a:xfrm>
+          <a:prstGeom prst="rect">
+            <a:avLst/>
+          </a:prstGeom>
+        </p:spPr>
+        <p:txBody>
+          <a:bodyPr wrap="square">
+            <a:spAutoFit/>
+          </a:bodyPr>
+          <a:lstStyle/>
+          <a:p>
+            <a:r>
+              <a:rPr lang="en-US" sz="1350" b="1" dirty="0">
+                <a:solidFill>
+                  <a:srgbClr val="FF0000"/>
+                </a:solidFill>
+                <a:latin typeface="Consolas" panose="020B0609020204030204" pitchFamily="49" charset="0"/>
+              </a:rPr>
+              <a:t>s = sum(1, 2, 3, 4, 5, 6, 7, 8);</a:t>
+            </a:r>
+          </a:p>
+        </p:txBody>
+      </p:sp>
+      <p:sp>
+        <p:nvSpPr>
+          <p:cNvPr id="7" name="TextBox 6"/>
+          <p:cNvSpPr txBox="1"/>
+          <p:nvPr/>
+        </p:nvSpPr>
+        <p:spPr>
+          <a:xfrm>
+            <a:off x="11430" y="2597038"/>
+            <a:ext cx="609462" cy="300082"/>
+          </a:xfrm>
+          <a:prstGeom prst="rect">
+            <a:avLst/>
+          </a:prstGeom>
+          <a:noFill/>
+        </p:spPr>
+        <p:txBody>
+          <a:bodyPr wrap="none" rtlCol="0">
+            <a:spAutoFit/>
+          </a:bodyPr>
+          <a:lstStyle/>
+          <a:p>
+            <a:r>
+              <a:rPr lang="en-US" sz="1350" dirty="0"/>
+              <a:t>Caller</a:t>
+            </a:r>
+          </a:p>
+        </p:txBody>
+      </p:sp>
+      <p:sp>
+        <p:nvSpPr>
+          <p:cNvPr id="8" name="TextBox 7"/>
+          <p:cNvSpPr txBox="1"/>
+          <p:nvPr/>
+        </p:nvSpPr>
+        <p:spPr>
+          <a:xfrm>
+            <a:off x="64279" y="2886716"/>
+            <a:ext cx="2138727" cy="2308324"/>
+          </a:xfrm>
+          <a:prstGeom prst="rect">
+            <a:avLst/>
+          </a:prstGeom>
+        </p:spPr>
+        <p:style>
+          <a:lnRef idx="2">
+            <a:schemeClr val="accent1"/>
+          </a:lnRef>
+          <a:fillRef idx="1">
+            <a:schemeClr val="lt1"/>
+          </a:fillRef>
+          <a:effectRef idx="0">
+            <a:schemeClr val="accent1"/>
+          </a:effectRef>
+          <a:fontRef idx="minor">
+            <a:schemeClr val="dk1"/>
+          </a:fontRef>
+        </p:style>
+        <p:txBody>
+          <a:bodyPr wrap="none" rtlCol="0">
+            <a:spAutoFit/>
+          </a:bodyPr>
+          <a:lstStyle/>
+          <a:p>
+            <a:r>
+              <a:rPr lang="en-US" sz="1200" dirty="0">
+                <a:latin typeface="Consolas" panose="020B0609020204030204" pitchFamily="49" charset="0"/>
+              </a:rPr>
+              <a:t>  MOVS r0, #5</a:t>
+            </a:r>
+          </a:p>
+          <a:p>
+            <a:r>
+              <a:rPr lang="en-US" sz="1200" dirty="0">
+                <a:latin typeface="Consolas" panose="020B0609020204030204" pitchFamily="49" charset="0"/>
+              </a:rPr>
+              <a:t>  MOVS r1, #6</a:t>
+            </a:r>
+          </a:p>
+          <a:p>
+            <a:r>
+              <a:rPr lang="en-US" sz="1200" dirty="0">
+                <a:latin typeface="Consolas" panose="020B0609020204030204" pitchFamily="49" charset="0"/>
+              </a:rPr>
+              <a:t>  MOVS r2, #7</a:t>
+            </a:r>
+          </a:p>
+          <a:p>
+            <a:r>
+              <a:rPr lang="en-US" sz="1200" dirty="0">
+                <a:latin typeface="Consolas" panose="020B0609020204030204" pitchFamily="49" charset="0"/>
+              </a:rPr>
+              <a:t>  MOVS r3, #8</a:t>
+            </a:r>
+          </a:p>
+          <a:p>
+            <a:r>
+              <a:rPr lang="en-US" sz="1200" dirty="0">
+                <a:latin typeface="Consolas" panose="020B0609020204030204" pitchFamily="49" charset="0"/>
+              </a:rPr>
+              <a:t>  </a:t>
+            </a:r>
+            <a:r>
+              <a:rPr lang="en-US" sz="1200" dirty="0">
+                <a:solidFill>
+                  <a:srgbClr val="FF0000"/>
+                </a:solidFill>
+                <a:latin typeface="Consolas" panose="020B0609020204030204" pitchFamily="49" charset="0"/>
+              </a:rPr>
+              <a:t>PUSH {r0, r1, r2, r3}</a:t>
+            </a:r>
+          </a:p>
+          <a:p>
+            <a:r>
+              <a:rPr lang="en-US" sz="1200" dirty="0">
+                <a:latin typeface="Consolas" panose="020B0609020204030204" pitchFamily="49" charset="0"/>
+              </a:rPr>
+              <a:t>  MOVS r0, #1</a:t>
+            </a:r>
+          </a:p>
+          <a:p>
+            <a:r>
+              <a:rPr lang="en-US" sz="1200" dirty="0">
+                <a:latin typeface="Consolas" panose="020B0609020204030204" pitchFamily="49" charset="0"/>
+              </a:rPr>
+              <a:t>  MOVS r1, #2</a:t>
+            </a:r>
+          </a:p>
+          <a:p>
+            <a:r>
+              <a:rPr lang="en-US" sz="1200" dirty="0">
+                <a:latin typeface="Consolas" panose="020B0609020204030204" pitchFamily="49" charset="0"/>
+              </a:rPr>
+              <a:t>  MOVS r2, #3</a:t>
+            </a:r>
+          </a:p>
+          <a:p>
+            <a:r>
+              <a:rPr lang="en-US" sz="1200" dirty="0">
+                <a:latin typeface="Consolas" panose="020B0609020204030204" pitchFamily="49" charset="0"/>
+              </a:rPr>
+              <a:t>  MOVS r3, #4</a:t>
+            </a:r>
+          </a:p>
+          <a:p>
+            <a:r>
+              <a:rPr lang="en-US" sz="1200" dirty="0">
+                <a:latin typeface="Consolas" panose="020B0609020204030204" pitchFamily="49" charset="0"/>
+              </a:rPr>
+              <a:t>  BL   sum</a:t>
+            </a:r>
+          </a:p>
+          <a:p>
+            <a:r>
+              <a:rPr lang="en-US" sz="1200" dirty="0">
+                <a:latin typeface="Consolas" panose="020B0609020204030204" pitchFamily="49" charset="0"/>
+              </a:rPr>
+              <a:t>  ...</a:t>
+            </a:r>
+          </a:p>
+          <a:p>
+            <a:r>
+              <a:rPr lang="en-US" sz="1200" dirty="0">
+                <a:latin typeface="Consolas" panose="020B0609020204030204" pitchFamily="49" charset="0"/>
+              </a:rPr>
+              <a:t>  </a:t>
+            </a:r>
+            <a:r>
+              <a:rPr lang="en-US" sz="1200" dirty="0">
+                <a:solidFill>
+                  <a:srgbClr val="FF0000"/>
+                </a:solidFill>
+                <a:latin typeface="Consolas" panose="020B0609020204030204" pitchFamily="49" charset="0"/>
+              </a:rPr>
+              <a:t>POP {r0, r1, r2, r3}</a:t>
+            </a:r>
+          </a:p>
+        </p:txBody>
+      </p:sp>
+      <p:graphicFrame>
+        <p:nvGraphicFramePr>
+          <p:cNvPr id="11" name="Table 10"/>
+          <p:cNvGraphicFramePr>
+            <a:graphicFrameLocks noGrp="1"/>
+          </p:cNvGraphicFramePr>
+          <p:nvPr/>
+        </p:nvGraphicFramePr>
+        <p:xfrm>
+          <a:off x="2693177" y="2874037"/>
+          <a:ext cx="2059115" cy="2491740"/>
+        </p:xfrm>
+        <a:graphic>
+          <a:graphicData uri="http://schemas.openxmlformats.org/drawingml/2006/table">
+            <a:tbl>
+              <a:tblPr firstRow="1" bandRow="1">
+                <a:tableStyleId>{5940675A-B579-460E-94D1-54222C63F5DA}</a:tableStyleId>
+              </a:tblPr>
+              <a:tblGrid>
+                <a:gridCol w="916115">
+                  <a:extLst>
+                    <a:ext uri="{9D8B030D-6E8A-4147-A177-3AD203B41FA5}">
+                      <a16:colId xmlns:a16="http://schemas.microsoft.com/office/drawing/2014/main" val="3247157364"/>
+                    </a:ext>
+                  </a:extLst>
+                </a:gridCol>
+                <a:gridCol w="1143000">
+                  <a:extLst>
+                    <a:ext uri="{9D8B030D-6E8A-4147-A177-3AD203B41FA5}">
+                      <a16:colId xmlns:a16="http://schemas.microsoft.com/office/drawing/2014/main" val="603072553"/>
+                    </a:ext>
+                  </a:extLst>
+                </a:gridCol>
+              </a:tblGrid>
+              <a:tr h="278130">
+                <a:tc>
+                  <a:txBody>
+                    <a:bodyPr/>
+                    <a:lstStyle/>
+                    <a:p>
+                      <a:pPr algn="r"/>
+                      <a:r>
+                        <a:rPr lang="en-US" sz="1400" dirty="0">
+                          <a:latin typeface="Consolas" panose="020B0609020204030204" pitchFamily="49" charset="0"/>
+                        </a:rPr>
+                        <a:t>Old</a:t>
+                      </a:r>
+                      <a:r>
+                        <a:rPr lang="en-US" sz="1400" baseline="0" dirty="0">
+                          <a:latin typeface="Consolas" panose="020B0609020204030204" pitchFamily="49" charset="0"/>
+                        </a:rPr>
+                        <a:t> SP</a:t>
+                      </a:r>
+                      <a:endParaRPr lang="en-US" sz="1400" dirty="0">
+                        <a:latin typeface="Consolas" panose="020B0609020204030204" pitchFamily="49" charset="0"/>
+                      </a:endParaRPr>
+                    </a:p>
+                  </a:txBody>
+                  <a:tcPr marL="68580" marR="68580" marT="34290" marB="34290">
+                    <a:lnL w="12700" cmpd="sng">
+                      <a:noFill/>
+                    </a:lnL>
+                    <a:lnR w="12700" cap="flat" cmpd="sng" algn="ctr">
+                      <a:solidFill>
+                        <a:schemeClr val="tx1"/>
+                      </a:solidFill>
+                      <a:prstDash val="solid"/>
+                      <a:round/>
+                      <a:headEnd type="none" w="med" len="med"/>
+                      <a:tailEnd type="none" w="med" len="med"/>
+                    </a:lnR>
+                    <a:lnT w="12700" cmpd="sng">
+                      <a:noFill/>
+                    </a:lnT>
+                    <a:lnB w="12700" cmpd="sng">
+                      <a:noFill/>
+                    </a:lnB>
+                    <a:lnTlToBr w="12700" cmpd="sng">
+                      <a:noFill/>
+                      <a:prstDash val="solid"/>
+                    </a:lnTlToBr>
+                    <a:lnBlToTr w="12700" cmpd="sng">
+                      <a:noFill/>
+                      <a:prstDash val="solid"/>
+                    </a:lnBlToTr>
+                  </a:tcPr>
+                </a:tc>
+                <a:tc>
+                  <a:txBody>
+                    <a:bodyPr/>
+                    <a:lstStyle/>
+                    <a:p>
+                      <a:r>
+                        <a:rPr lang="en-US" sz="1400" dirty="0">
+                          <a:latin typeface="Consolas" panose="020B0609020204030204" pitchFamily="49" charset="0"/>
+                        </a:rPr>
+                        <a:t>&lt;</a:t>
+                      </a:r>
+                      <a:r>
+                        <a:rPr lang="en-US" sz="1400" dirty="0" err="1">
+                          <a:latin typeface="Consolas" panose="020B0609020204030204" pitchFamily="49" charset="0"/>
+                        </a:rPr>
+                        <a:t>xxxxxxxx</a:t>
+                      </a:r>
+                      <a:r>
+                        <a:rPr lang="en-US" sz="1400" dirty="0">
+                          <a:latin typeface="Consolas" panose="020B0609020204030204" pitchFamily="49" charset="0"/>
+                        </a:rPr>
+                        <a:t>&gt;</a:t>
+                      </a:r>
+                    </a:p>
+                  </a:txBody>
+                  <a:tcPr marL="68580" marR="68580" marT="34290" marB="34290">
+                    <a:lnL w="12700" cap="flat" cmpd="sng" algn="ctr">
+                      <a:solidFill>
+                        <a:schemeClr val="tx1"/>
+                      </a:solidFill>
+                      <a:prstDash val="solid"/>
+                      <a:round/>
+                      <a:headEnd type="none" w="med" len="med"/>
+                      <a:tailEnd type="none" w="med" len="med"/>
+                    </a:lnL>
+                    <a:lnR w="12700" cap="flat" cmpd="sng" algn="ctr">
+                      <a:solidFill>
+                        <a:schemeClr val="tx1"/>
+                      </a:solidFill>
+                      <a:prstDash val="solid"/>
+                      <a:round/>
+                      <a:headEnd type="none" w="med" len="med"/>
+                      <a:tailEnd type="none" w="med" len="med"/>
+                    </a:lnR>
+                    <a:lnT w="12700" cap="flat" cmpd="sng" algn="ctr">
+                      <a:solidFill>
+                        <a:schemeClr val="tx1"/>
+                      </a:solidFill>
+                      <a:prstDash val="solid"/>
+                      <a:round/>
+                      <a:headEnd type="none" w="med" len="med"/>
+                      <a:tailEnd type="none" w="med" len="med"/>
+                    </a:lnT>
+                    <a:lnB w="12700" cap="flat" cmpd="sng" algn="ctr">
+                      <a:solidFill>
+                        <a:schemeClr val="tx1"/>
+                      </a:solidFill>
+                      <a:prstDash val="solid"/>
+                      <a:round/>
+                      <a:headEnd type="none" w="med" len="med"/>
+                      <a:tailEnd type="none" w="med" len="med"/>
+                    </a:lnB>
+                  </a:tcPr>
+                </a:tc>
+                <a:extLst>
+                  <a:ext uri="{0D108BD9-81ED-4DB2-BD59-A6C34878D82A}">
+                    <a16:rowId xmlns:a16="http://schemas.microsoft.com/office/drawing/2014/main" val="2605228926"/>
+                  </a:ext>
+                </a:extLst>
+              </a:tr>
+              <a:tr h="278130">
+                <a:tc>
+                  <a:txBody>
+                    <a:bodyPr/>
+                    <a:lstStyle/>
+                    <a:p>
+                      <a:pPr algn="r"/>
+                      <a:r>
+                        <a:rPr lang="en-US" sz="1400" dirty="0">
+                          <a:latin typeface="Consolas" panose="020B0609020204030204" pitchFamily="49" charset="0"/>
+                        </a:rPr>
+                        <a:t>SP+12</a:t>
+                      </a:r>
+                    </a:p>
+                  </a:txBody>
+                  <a:tcPr marL="68580" marR="68580" marT="34290" marB="34290">
+                    <a:lnL w="12700" cmpd="sng">
+                      <a:noFill/>
+                    </a:lnL>
+                    <a:lnR w="12700" cap="flat" cmpd="sng" algn="ctr">
+                      <a:solidFill>
+                        <a:schemeClr val="tx1"/>
+                      </a:solidFill>
+                      <a:prstDash val="solid"/>
+                      <a:round/>
+                      <a:headEnd type="none" w="med" len="med"/>
+                      <a:tailEnd type="none" w="med" len="med"/>
+                    </a:lnR>
+                    <a:lnT w="12700" cmpd="sng">
+                      <a:noFill/>
+                    </a:lnT>
+                    <a:lnB w="12700" cmpd="sng">
+                      <a:noFill/>
+                    </a:lnB>
+                    <a:lnTlToBr w="12700" cmpd="sng">
+                      <a:noFill/>
+                      <a:prstDash val="solid"/>
+                    </a:lnTlToBr>
+                    <a:lnBlToTr w="12700" cmpd="sng">
+                      <a:noFill/>
+                      <a:prstDash val="solid"/>
+                    </a:lnBlToTr>
+                  </a:tcPr>
+                </a:tc>
+                <a:tc>
+                  <a:txBody>
+                    <a:bodyPr/>
+                    <a:lstStyle/>
+                    <a:p>
+                      <a:r>
+                        <a:rPr lang="en-US" sz="1400" dirty="0">
+                          <a:solidFill>
+                            <a:srgbClr val="FF0000"/>
+                          </a:solidFill>
+                          <a:latin typeface="Consolas" panose="020B0609020204030204" pitchFamily="49" charset="0"/>
+                        </a:rPr>
+                        <a:t>0x00000008</a:t>
+                      </a:r>
+                    </a:p>
+                  </a:txBody>
+                  <a:tcPr marL="68580" marR="68580" marT="34290" marB="34290">
+                    <a:lnL w="12700" cap="flat" cmpd="sng" algn="ctr">
+                      <a:solidFill>
+                        <a:schemeClr val="tx1"/>
+                      </a:solidFill>
+                      <a:prstDash val="solid"/>
+                      <a:round/>
+                      <a:headEnd type="none" w="med" len="med"/>
+                      <a:tailEnd type="none" w="med" len="med"/>
+                    </a:lnL>
+                    <a:lnR w="12700" cap="flat" cmpd="sng" algn="ctr">
+                      <a:solidFill>
+                        <a:schemeClr val="tx1"/>
+                      </a:solidFill>
+                      <a:prstDash val="solid"/>
+                      <a:round/>
+                      <a:headEnd type="none" w="med" len="med"/>
+                      <a:tailEnd type="none" w="med" len="med"/>
+                    </a:lnR>
+                    <a:lnT w="12700" cap="flat" cmpd="sng" algn="ctr">
+                      <a:solidFill>
+                        <a:schemeClr val="tx1"/>
+                      </a:solidFill>
+                      <a:prstDash val="solid"/>
+                      <a:round/>
+                      <a:headEnd type="none" w="med" len="med"/>
+                      <a:tailEnd type="none" w="med" len="med"/>
+                    </a:lnT>
+                    <a:lnB w="12700" cap="flat" cmpd="sng" algn="ctr">
+                      <a:solidFill>
+                        <a:schemeClr val="tx1"/>
+                      </a:solidFill>
+                      <a:prstDash val="solid"/>
+                      <a:round/>
+                      <a:headEnd type="none" w="med" len="med"/>
+                      <a:tailEnd type="none" w="med" len="med"/>
+                    </a:lnB>
+                  </a:tcPr>
+                </a:tc>
+                <a:extLst>
+                  <a:ext uri="{0D108BD9-81ED-4DB2-BD59-A6C34878D82A}">
+                    <a16:rowId xmlns:a16="http://schemas.microsoft.com/office/drawing/2014/main" val="1838424931"/>
+                  </a:ext>
+                </a:extLst>
+              </a:tr>
+              <a:tr h="278130">
+                <a:tc>
+                  <a:txBody>
+                    <a:bodyPr/>
+                    <a:lstStyle/>
+                    <a:p>
+                      <a:pPr algn="r"/>
+                      <a:r>
+                        <a:rPr lang="en-US" sz="1400" dirty="0">
+                          <a:latin typeface="Consolas" panose="020B0609020204030204" pitchFamily="49" charset="0"/>
+                        </a:rPr>
+                        <a:t>SP+8</a:t>
+                      </a:r>
+                    </a:p>
+                  </a:txBody>
+                  <a:tcPr marL="68580" marR="68580" marT="34290" marB="34290">
+                    <a:lnL w="12700" cmpd="sng">
+                      <a:noFill/>
+                    </a:lnL>
+                    <a:lnR w="12700" cap="flat" cmpd="sng" algn="ctr">
+                      <a:solidFill>
+                        <a:schemeClr val="tx1"/>
+                      </a:solidFill>
+                      <a:prstDash val="solid"/>
+                      <a:round/>
+                      <a:headEnd type="none" w="med" len="med"/>
+                      <a:tailEnd type="none" w="med" len="med"/>
+                    </a:lnR>
+                    <a:lnT w="12700" cmpd="sng">
+                      <a:noFill/>
+                    </a:lnT>
+                    <a:lnB w="12700" cmpd="sng">
+                      <a:noFill/>
+                    </a:lnB>
+                    <a:lnTlToBr w="12700" cmpd="sng">
+                      <a:noFill/>
+                      <a:prstDash val="solid"/>
+                    </a:lnTlToBr>
+                    <a:lnBlToTr w="12700" cmpd="sng">
+                      <a:noFill/>
+                      <a:prstDash val="solid"/>
+                    </a:lnBlToTr>
+                  </a:tcPr>
+                </a:tc>
+                <a:tc>
+                  <a:txBody>
+                    <a:bodyPr/>
+                    <a:lstStyle/>
+                    <a:p>
+                      <a:r>
+                        <a:rPr lang="en-US" sz="1400" dirty="0">
+                          <a:solidFill>
+                            <a:srgbClr val="FF0000"/>
+                          </a:solidFill>
+                          <a:latin typeface="Consolas" panose="020B0609020204030204" pitchFamily="49" charset="0"/>
+                        </a:rPr>
+                        <a:t>0x00000007</a:t>
+                      </a:r>
+                    </a:p>
+                  </a:txBody>
+                  <a:tcPr marL="68580" marR="68580" marT="34290" marB="34290">
+                    <a:lnL w="12700" cap="flat" cmpd="sng" algn="ctr">
+                      <a:solidFill>
+                        <a:schemeClr val="tx1"/>
+                      </a:solidFill>
+                      <a:prstDash val="solid"/>
+                      <a:round/>
+                      <a:headEnd type="none" w="med" len="med"/>
+                      <a:tailEnd type="none" w="med" len="med"/>
+                    </a:lnL>
+                    <a:lnR w="12700" cap="flat" cmpd="sng" algn="ctr">
+                      <a:solidFill>
+                        <a:schemeClr val="tx1"/>
+                      </a:solidFill>
+                      <a:prstDash val="solid"/>
+                      <a:round/>
+                      <a:headEnd type="none" w="med" len="med"/>
+                      <a:tailEnd type="none" w="med" len="med"/>
+                    </a:lnR>
+                    <a:lnT w="12700" cap="flat" cmpd="sng" algn="ctr">
+                      <a:solidFill>
+                        <a:schemeClr val="tx1"/>
+                      </a:solidFill>
+                      <a:prstDash val="solid"/>
+                      <a:round/>
+                      <a:headEnd type="none" w="med" len="med"/>
+                      <a:tailEnd type="none" w="med" len="med"/>
+                    </a:lnT>
+                    <a:lnB w="12700" cap="flat" cmpd="sng" algn="ctr">
+                      <a:solidFill>
+                        <a:schemeClr val="tx1"/>
+                      </a:solidFill>
+                      <a:prstDash val="solid"/>
+                      <a:round/>
+                      <a:headEnd type="none" w="med" len="med"/>
+                      <a:tailEnd type="none" w="med" len="med"/>
+                    </a:lnB>
+                  </a:tcPr>
+                </a:tc>
+                <a:extLst>
+                  <a:ext uri="{0D108BD9-81ED-4DB2-BD59-A6C34878D82A}">
+                    <a16:rowId xmlns:a16="http://schemas.microsoft.com/office/drawing/2014/main" val="2129554528"/>
+                  </a:ext>
+                </a:extLst>
+              </a:tr>
+              <a:tr h="278130">
+                <a:tc>
+                  <a:txBody>
+                    <a:bodyPr/>
+                    <a:lstStyle/>
+                    <a:p>
+                      <a:pPr marL="0" marR="0" indent="0" algn="r" defTabSz="914400" rtl="0" eaLnBrk="1" fontAlgn="auto" latinLnBrk="0" hangingPunct="1">
+                        <a:lnSpc>
+                          <a:spcPct val="100000"/>
+                        </a:lnSpc>
+                        <a:spcBef>
+                          <a:spcPts val="0"/>
+                        </a:spcBef>
+                        <a:spcAft>
+                          <a:spcPts val="0"/>
+                        </a:spcAft>
+                        <a:buClrTx/>
+                        <a:buSzTx/>
+                        <a:buFontTx/>
+                        <a:buNone/>
+                        <a:tabLst/>
+                        <a:defRPr/>
+                      </a:pPr>
+                      <a:r>
+                        <a:rPr lang="en-US" sz="1400" dirty="0">
+                          <a:latin typeface="Consolas" panose="020B0609020204030204" pitchFamily="49" charset="0"/>
+                        </a:rPr>
+                        <a:t>SP+4</a:t>
+                      </a:r>
+                    </a:p>
+                  </a:txBody>
+                  <a:tcPr marL="68580" marR="68580" marT="34290" marB="34290">
+                    <a:lnL w="12700" cmpd="sng">
+                      <a:noFill/>
+                    </a:lnL>
+                    <a:lnR w="12700" cap="flat" cmpd="sng" algn="ctr">
+                      <a:solidFill>
+                        <a:schemeClr val="tx1"/>
+                      </a:solidFill>
+                      <a:prstDash val="solid"/>
+                      <a:round/>
+                      <a:headEnd type="none" w="med" len="med"/>
+                      <a:tailEnd type="none" w="med" len="med"/>
+                    </a:lnR>
+                    <a:lnT w="12700" cmpd="sng">
+                      <a:noFill/>
+                    </a:lnT>
+                    <a:lnB w="12700" cmpd="sng">
+                      <a:noFill/>
+                    </a:lnB>
+                    <a:lnTlToBr w="12700" cmpd="sng">
+                      <a:noFill/>
+                      <a:prstDash val="solid"/>
+                    </a:lnTlToBr>
+                    <a:lnBlToTr w="12700" cmpd="sng">
+                      <a:noFill/>
+                      <a:prstDash val="solid"/>
+                    </a:lnBlToTr>
+                  </a:tcPr>
+                </a:tc>
+                <a:tc>
+                  <a:txBody>
+                    <a:bodyPr/>
+                    <a:lstStyle/>
+                    <a:p>
+                      <a:r>
+                        <a:rPr lang="en-US" sz="1400" dirty="0">
+                          <a:solidFill>
+                            <a:srgbClr val="FF0000"/>
+                          </a:solidFill>
+                          <a:latin typeface="Consolas" panose="020B0609020204030204" pitchFamily="49" charset="0"/>
+                        </a:rPr>
+                        <a:t>0x00000006</a:t>
+                      </a:r>
+                    </a:p>
+                  </a:txBody>
+                  <a:tcPr marL="68580" marR="68580" marT="34290" marB="34290">
+                    <a:lnL w="12700" cap="flat" cmpd="sng" algn="ctr">
+                      <a:solidFill>
+                        <a:schemeClr val="tx1"/>
+                      </a:solidFill>
+                      <a:prstDash val="solid"/>
+                      <a:round/>
+                      <a:headEnd type="none" w="med" len="med"/>
+                      <a:tailEnd type="none" w="med" len="med"/>
+                    </a:lnL>
+                    <a:lnR w="12700" cap="flat" cmpd="sng" algn="ctr">
+                      <a:solidFill>
+                        <a:schemeClr val="tx1"/>
+                      </a:solidFill>
+                      <a:prstDash val="solid"/>
+                      <a:round/>
+                      <a:headEnd type="none" w="med" len="med"/>
+                      <a:tailEnd type="none" w="med" len="med"/>
+                    </a:lnR>
+                    <a:lnT w="12700" cap="flat" cmpd="sng" algn="ctr">
+                      <a:solidFill>
+                        <a:schemeClr val="tx1"/>
+                      </a:solidFill>
+                      <a:prstDash val="solid"/>
+                      <a:round/>
+                      <a:headEnd type="none" w="med" len="med"/>
+                      <a:tailEnd type="none" w="med" len="med"/>
+                    </a:lnT>
+                    <a:lnB w="12700" cap="flat" cmpd="sng" algn="ctr">
+                      <a:solidFill>
+                        <a:schemeClr val="tx1"/>
+                      </a:solidFill>
+                      <a:prstDash val="solid"/>
+                      <a:round/>
+                      <a:headEnd type="none" w="med" len="med"/>
+                      <a:tailEnd type="none" w="med" len="med"/>
+                    </a:lnB>
+                  </a:tcPr>
+                </a:tc>
+                <a:extLst>
+                  <a:ext uri="{0D108BD9-81ED-4DB2-BD59-A6C34878D82A}">
+                    <a16:rowId xmlns:a16="http://schemas.microsoft.com/office/drawing/2014/main" val="1388151533"/>
+                  </a:ext>
+                </a:extLst>
+              </a:tr>
+              <a:tr h="278130">
+                <a:tc>
+                  <a:txBody>
+                    <a:bodyPr/>
+                    <a:lstStyle/>
+                    <a:p>
+                      <a:pPr algn="r"/>
+                      <a:r>
+                        <a:rPr lang="en-US" sz="1400" dirty="0">
+                          <a:latin typeface="Consolas" panose="020B0609020204030204" pitchFamily="49" charset="0"/>
+                        </a:rPr>
+                        <a:t>SP</a:t>
+                      </a:r>
+                    </a:p>
+                  </a:txBody>
+                  <a:tcPr marL="68580" marR="68580" marT="34290" marB="34290">
+                    <a:lnL w="12700" cmpd="sng">
+                      <a:noFill/>
+                    </a:lnL>
+                    <a:lnR w="12700" cap="flat" cmpd="sng" algn="ctr">
+                      <a:solidFill>
+                        <a:schemeClr val="tx1"/>
+                      </a:solidFill>
+                      <a:prstDash val="solid"/>
+                      <a:round/>
+                      <a:headEnd type="none" w="med" len="med"/>
+                      <a:tailEnd type="none" w="med" len="med"/>
+                    </a:lnR>
+                    <a:lnT w="12700" cmpd="sng">
+                      <a:noFill/>
+                    </a:lnT>
+                    <a:lnB w="12700" cmpd="sng">
+                      <a:noFill/>
+                    </a:lnB>
+                    <a:lnTlToBr w="12700" cmpd="sng">
+                      <a:noFill/>
+                      <a:prstDash val="solid"/>
+                    </a:lnTlToBr>
+                    <a:lnBlToTr w="12700" cmpd="sng">
+                      <a:noFill/>
+                      <a:prstDash val="solid"/>
+                    </a:lnBlToTr>
+                  </a:tcPr>
+                </a:tc>
+                <a:tc>
+                  <a:txBody>
+                    <a:bodyPr/>
+                    <a:lstStyle/>
+                    <a:p>
+                      <a:r>
+                        <a:rPr lang="en-US" sz="1400" dirty="0">
+                          <a:solidFill>
+                            <a:srgbClr val="FF0000"/>
+                          </a:solidFill>
+                          <a:latin typeface="Consolas" panose="020B0609020204030204" pitchFamily="49" charset="0"/>
+                        </a:rPr>
+                        <a:t>0x00000005</a:t>
+                      </a:r>
+                    </a:p>
+                  </a:txBody>
+                  <a:tcPr marL="68580" marR="68580" marT="34290" marB="34290">
+                    <a:lnL w="12700" cap="flat" cmpd="sng" algn="ctr">
+                      <a:solidFill>
+                        <a:schemeClr val="tx1"/>
+                      </a:solidFill>
+                      <a:prstDash val="solid"/>
+                      <a:round/>
+                      <a:headEnd type="none" w="med" len="med"/>
+                      <a:tailEnd type="none" w="med" len="med"/>
+                    </a:lnL>
+                    <a:lnR w="12700" cap="flat" cmpd="sng" algn="ctr">
+                      <a:solidFill>
+                        <a:schemeClr val="tx1"/>
+                      </a:solidFill>
+                      <a:prstDash val="solid"/>
+                      <a:round/>
+                      <a:headEnd type="none" w="med" len="med"/>
+                      <a:tailEnd type="none" w="med" len="med"/>
+                    </a:lnR>
+                    <a:lnT w="12700" cap="flat" cmpd="sng" algn="ctr">
+                      <a:solidFill>
+                        <a:schemeClr val="tx1"/>
+                      </a:solidFill>
+                      <a:prstDash val="solid"/>
+                      <a:round/>
+                      <a:headEnd type="none" w="med" len="med"/>
+                      <a:tailEnd type="none" w="med" len="med"/>
+                    </a:lnT>
+                    <a:lnB w="12700" cap="flat" cmpd="sng" algn="ctr">
+                      <a:solidFill>
+                        <a:schemeClr val="tx1"/>
+                      </a:solidFill>
+                      <a:prstDash val="solid"/>
+                      <a:round/>
+                      <a:headEnd type="none" w="med" len="med"/>
+                      <a:tailEnd type="none" w="med" len="med"/>
+                    </a:lnB>
+                  </a:tcPr>
+                </a:tc>
+                <a:extLst>
+                  <a:ext uri="{0D108BD9-81ED-4DB2-BD59-A6C34878D82A}">
+                    <a16:rowId xmlns:a16="http://schemas.microsoft.com/office/drawing/2014/main" val="1795449420"/>
+                  </a:ext>
+                </a:extLst>
+              </a:tr>
+              <a:tr h="278130">
+                <a:tc>
+                  <a:txBody>
+                    <a:bodyPr/>
+                    <a:lstStyle/>
+                    <a:p>
+                      <a:endParaRPr lang="en-US" sz="1400" dirty="0"/>
+                    </a:p>
+                  </a:txBody>
+                  <a:tcPr marL="68580" marR="68580" marT="34290" marB="34290">
+                    <a:lnL w="12700" cmpd="sng">
+                      <a:noFill/>
+                    </a:lnL>
+                    <a:lnR w="12700" cap="flat" cmpd="sng" algn="ctr">
+                      <a:solidFill>
+                        <a:schemeClr val="tx1"/>
+                      </a:solidFill>
+                      <a:prstDash val="solid"/>
+                      <a:round/>
+                      <a:headEnd type="none" w="med" len="med"/>
+                      <a:tailEnd type="none" w="med" len="med"/>
+                    </a:lnR>
+                    <a:lnT w="12700" cmpd="sng">
+                      <a:noFill/>
+                    </a:lnT>
+                    <a:lnB w="12700" cmpd="sng">
+                      <a:noFill/>
+                    </a:lnB>
+                    <a:lnTlToBr w="12700" cmpd="sng">
+                      <a:noFill/>
+                      <a:prstDash val="solid"/>
+                    </a:lnTlToBr>
+                    <a:lnBlToTr w="12700" cmpd="sng">
+                      <a:noFill/>
+                      <a:prstDash val="solid"/>
+                    </a:lnBlToTr>
+                  </a:tcPr>
+                </a:tc>
+                <a:tc>
+                  <a:txBody>
+                    <a:bodyPr/>
+                    <a:lstStyle/>
+                    <a:p>
+                      <a:endParaRPr lang="en-US" sz="1400" dirty="0"/>
+                    </a:p>
+                  </a:txBody>
+                  <a:tcPr marL="68580" marR="68580" marT="34290" marB="34290">
+                    <a:lnL w="12700" cap="flat" cmpd="sng" algn="ctr">
+                      <a:solidFill>
+                        <a:schemeClr val="tx1"/>
+                      </a:solidFill>
+                      <a:prstDash val="solid"/>
+                      <a:round/>
+                      <a:headEnd type="none" w="med" len="med"/>
+                      <a:tailEnd type="none" w="med" len="med"/>
+                    </a:lnL>
+                    <a:lnR w="12700" cap="flat" cmpd="sng" algn="ctr">
+                      <a:solidFill>
+                        <a:schemeClr val="tx1"/>
+                      </a:solidFill>
+                      <a:prstDash val="solid"/>
+                      <a:round/>
+                      <a:headEnd type="none" w="med" len="med"/>
+                      <a:tailEnd type="none" w="med" len="med"/>
+                    </a:lnR>
+                    <a:lnT w="12700" cap="flat" cmpd="sng" algn="ctr">
+                      <a:solidFill>
+                        <a:schemeClr val="tx1"/>
+                      </a:solidFill>
+                      <a:prstDash val="solid"/>
+                      <a:round/>
+                      <a:headEnd type="none" w="med" len="med"/>
+                      <a:tailEnd type="none" w="med" len="med"/>
+                    </a:lnT>
+                    <a:lnB w="12700" cap="flat" cmpd="sng" algn="ctr">
+                      <a:solidFill>
+                        <a:schemeClr val="tx1"/>
+                      </a:solidFill>
+                      <a:prstDash val="solid"/>
+                      <a:round/>
+                      <a:headEnd type="none" w="med" len="med"/>
+                      <a:tailEnd type="none" w="med" len="med"/>
+                    </a:lnB>
+                  </a:tcPr>
+                </a:tc>
+                <a:extLst>
+                  <a:ext uri="{0D108BD9-81ED-4DB2-BD59-A6C34878D82A}">
+                    <a16:rowId xmlns:a16="http://schemas.microsoft.com/office/drawing/2014/main" val="1761571247"/>
+                  </a:ext>
+                </a:extLst>
+              </a:tr>
+              <a:tr h="274320">
+                <a:tc>
+                  <a:txBody>
+                    <a:bodyPr/>
+                    <a:lstStyle/>
+                    <a:p>
+                      <a:endParaRPr lang="en-US" sz="1400"/>
+                    </a:p>
+                  </a:txBody>
+                  <a:tcPr marL="68580" marR="68580" marT="34290" marB="34290">
+                    <a:lnL w="12700" cmpd="sng">
+                      <a:noFill/>
+                    </a:lnL>
+                    <a:lnR w="12700" cap="flat" cmpd="sng" algn="ctr">
+                      <a:solidFill>
+                        <a:schemeClr val="tx1"/>
+                      </a:solidFill>
+                      <a:prstDash val="solid"/>
+                      <a:round/>
+                      <a:headEnd type="none" w="med" len="med"/>
+                      <a:tailEnd type="none" w="med" len="med"/>
+                    </a:lnR>
+                    <a:lnT w="12700" cmpd="sng">
+                      <a:noFill/>
+                    </a:lnT>
+                    <a:lnB w="12700" cmpd="sng">
+                      <a:noFill/>
+                    </a:lnB>
+                    <a:lnTlToBr w="12700" cmpd="sng">
+                      <a:noFill/>
+                      <a:prstDash val="solid"/>
+                    </a:lnTlToBr>
+                    <a:lnBlToTr w="12700" cmpd="sng">
+                      <a:noFill/>
+                      <a:prstDash val="solid"/>
+                    </a:lnBlToTr>
+                  </a:tcPr>
+                </a:tc>
+                <a:tc>
+                  <a:txBody>
+                    <a:bodyPr/>
+                    <a:lstStyle/>
+                    <a:p>
+                      <a:endParaRPr lang="en-US" sz="1400"/>
+                    </a:p>
+                  </a:txBody>
+                  <a:tcPr marL="68580" marR="68580" marT="34290" marB="34290">
+                    <a:lnL w="12700" cap="flat" cmpd="sng" algn="ctr">
+                      <a:solidFill>
+                        <a:schemeClr val="tx1"/>
+                      </a:solidFill>
+                      <a:prstDash val="solid"/>
+                      <a:round/>
+                      <a:headEnd type="none" w="med" len="med"/>
+                      <a:tailEnd type="none" w="med" len="med"/>
+                    </a:lnL>
+                    <a:lnR w="12700" cap="flat" cmpd="sng" algn="ctr">
+                      <a:solidFill>
+                        <a:schemeClr val="tx1"/>
+                      </a:solidFill>
+                      <a:prstDash val="solid"/>
+                      <a:round/>
+                      <a:headEnd type="none" w="med" len="med"/>
+                      <a:tailEnd type="none" w="med" len="med"/>
+                    </a:lnR>
+                    <a:lnT w="12700" cap="flat" cmpd="sng" algn="ctr">
+                      <a:solidFill>
+                        <a:schemeClr val="tx1"/>
+                      </a:solidFill>
+                      <a:prstDash val="solid"/>
+                      <a:round/>
+                      <a:headEnd type="none" w="med" len="med"/>
+                      <a:tailEnd type="none" w="med" len="med"/>
+                    </a:lnT>
+                    <a:lnB w="12700" cap="flat" cmpd="sng" algn="ctr">
+                      <a:solidFill>
+                        <a:schemeClr val="tx1"/>
+                      </a:solidFill>
+                      <a:prstDash val="solid"/>
+                      <a:round/>
+                      <a:headEnd type="none" w="med" len="med"/>
+                      <a:tailEnd type="none" w="med" len="med"/>
+                    </a:lnB>
+                  </a:tcPr>
+                </a:tc>
+                <a:extLst>
+                  <a:ext uri="{0D108BD9-81ED-4DB2-BD59-A6C34878D82A}">
+                    <a16:rowId xmlns:a16="http://schemas.microsoft.com/office/drawing/2014/main" val="1492653976"/>
+                  </a:ext>
+                </a:extLst>
+              </a:tr>
+              <a:tr h="274320">
+                <a:tc>
+                  <a:txBody>
+                    <a:bodyPr/>
+                    <a:lstStyle/>
+                    <a:p>
+                      <a:endParaRPr lang="en-US" sz="1400" dirty="0"/>
+                    </a:p>
+                  </a:txBody>
+                  <a:tcPr marL="68580" marR="68580" marT="34290" marB="34290">
+                    <a:lnL w="12700" cmpd="sng">
+                      <a:noFill/>
+                    </a:lnL>
+                    <a:lnR w="12700" cap="flat" cmpd="sng" algn="ctr">
+                      <a:solidFill>
+                        <a:schemeClr val="tx1"/>
+                      </a:solidFill>
+                      <a:prstDash val="solid"/>
+                      <a:round/>
+                      <a:headEnd type="none" w="med" len="med"/>
+                      <a:tailEnd type="none" w="med" len="med"/>
+                    </a:lnR>
+                    <a:lnT w="12700" cmpd="sng">
+                      <a:noFill/>
+                    </a:lnT>
+                    <a:lnB w="12700" cmpd="sng">
+                      <a:noFill/>
+                    </a:lnB>
+                    <a:lnTlToBr w="12700" cmpd="sng">
+                      <a:noFill/>
+                      <a:prstDash val="solid"/>
+                    </a:lnTlToBr>
+                    <a:lnBlToTr w="12700" cmpd="sng">
+                      <a:noFill/>
+                      <a:prstDash val="solid"/>
+                    </a:lnBlToTr>
+                  </a:tcPr>
+                </a:tc>
+                <a:tc>
+                  <a:txBody>
+                    <a:bodyPr/>
+                    <a:lstStyle/>
+                    <a:p>
+                      <a:endParaRPr lang="en-US" sz="1400" dirty="0"/>
+                    </a:p>
+                  </a:txBody>
+                  <a:tcPr marL="68580" marR="68580" marT="34290" marB="34290">
+                    <a:lnL w="12700" cap="flat" cmpd="sng" algn="ctr">
+                      <a:solidFill>
+                        <a:schemeClr val="tx1"/>
+                      </a:solidFill>
+                      <a:prstDash val="solid"/>
+                      <a:round/>
+                      <a:headEnd type="none" w="med" len="med"/>
+                      <a:tailEnd type="none" w="med" len="med"/>
+                    </a:lnL>
+                    <a:lnR w="12700" cap="flat" cmpd="sng" algn="ctr">
+                      <a:solidFill>
+                        <a:schemeClr val="tx1"/>
+                      </a:solidFill>
+                      <a:prstDash val="solid"/>
+                      <a:round/>
+                      <a:headEnd type="none" w="med" len="med"/>
+                      <a:tailEnd type="none" w="med" len="med"/>
+                    </a:lnR>
+                    <a:lnT w="12700" cap="flat" cmpd="sng" algn="ctr">
+                      <a:solidFill>
+                        <a:schemeClr val="tx1"/>
+                      </a:solidFill>
+                      <a:prstDash val="solid"/>
+                      <a:round/>
+                      <a:headEnd type="none" w="med" len="med"/>
+                      <a:tailEnd type="none" w="med" len="med"/>
+                    </a:lnT>
+                    <a:lnB w="12700" cap="flat" cmpd="sng" algn="ctr">
+                      <a:solidFill>
+                        <a:schemeClr val="tx1"/>
+                      </a:solidFill>
+                      <a:prstDash val="solid"/>
+                      <a:round/>
+                      <a:headEnd type="none" w="med" len="med"/>
+                      <a:tailEnd type="none" w="med" len="med"/>
+                    </a:lnB>
+                  </a:tcPr>
+                </a:tc>
+                <a:extLst>
+                  <a:ext uri="{0D108BD9-81ED-4DB2-BD59-A6C34878D82A}">
+                    <a16:rowId xmlns:a16="http://schemas.microsoft.com/office/drawing/2014/main" val="1160991303"/>
+                  </a:ext>
+                </a:extLst>
+              </a:tr>
+              <a:tr h="274320">
+                <a:tc>
+                  <a:txBody>
+                    <a:bodyPr/>
+                    <a:lstStyle/>
+                    <a:p>
+                      <a:pPr algn="r"/>
+                      <a:endParaRPr lang="en-US" sz="1400" dirty="0">
+                        <a:latin typeface="Consolas" panose="020B0609020204030204" pitchFamily="49" charset="0"/>
+                      </a:endParaRPr>
+                    </a:p>
+                  </a:txBody>
+                  <a:tcPr marL="68580" marR="68580" marT="34290" marB="34290">
+                    <a:lnL w="12700" cmpd="sng">
+                      <a:noFill/>
+                    </a:lnL>
+                    <a:lnR w="12700" cap="flat" cmpd="sng" algn="ctr">
+                      <a:solidFill>
+                        <a:schemeClr val="tx1"/>
+                      </a:solidFill>
+                      <a:prstDash val="solid"/>
+                      <a:round/>
+                      <a:headEnd type="none" w="med" len="med"/>
+                      <a:tailEnd type="none" w="med" len="med"/>
+                    </a:lnR>
+                    <a:lnT w="12700" cmpd="sng">
+                      <a:noFill/>
+                    </a:lnT>
+                    <a:lnB w="12700" cmpd="sng">
+                      <a:noFill/>
+                    </a:lnB>
+                    <a:lnTlToBr w="12700" cmpd="sng">
+                      <a:noFill/>
+                      <a:prstDash val="solid"/>
+                    </a:lnTlToBr>
+                    <a:lnBlToTr w="12700" cmpd="sng">
+                      <a:noFill/>
+                      <a:prstDash val="solid"/>
+                    </a:lnBlToTr>
+                  </a:tcPr>
+                </a:tc>
+                <a:tc>
+                  <a:txBody>
+                    <a:bodyPr/>
+                    <a:lstStyle/>
+                    <a:p>
+                      <a:pPr algn="ctr"/>
+                      <a:endParaRPr lang="en-US" sz="1400" dirty="0">
+                        <a:latin typeface="Consolas" panose="020B0609020204030204" pitchFamily="49" charset="0"/>
+                      </a:endParaRPr>
+                    </a:p>
+                  </a:txBody>
+                  <a:tcPr marL="68580" marR="68580" marT="34290" marB="34290">
+                    <a:lnL w="12700" cap="flat" cmpd="sng" algn="ctr">
+                      <a:solidFill>
+                        <a:schemeClr val="tx1"/>
+                      </a:solidFill>
+                      <a:prstDash val="solid"/>
+                      <a:round/>
+                      <a:headEnd type="none" w="med" len="med"/>
+                      <a:tailEnd type="none" w="med" len="med"/>
+                    </a:lnL>
+                    <a:lnR w="12700" cap="flat" cmpd="sng" algn="ctr">
+                      <a:solidFill>
+                        <a:schemeClr val="tx1"/>
+                      </a:solidFill>
+                      <a:prstDash val="solid"/>
+                      <a:round/>
+                      <a:headEnd type="none" w="med" len="med"/>
+                      <a:tailEnd type="none" w="med" len="med"/>
+                    </a:lnR>
+                    <a:lnT w="12700" cap="flat" cmpd="sng" algn="ctr">
+                      <a:solidFill>
+                        <a:schemeClr val="tx1"/>
+                      </a:solidFill>
+                      <a:prstDash val="solid"/>
+                      <a:round/>
+                      <a:headEnd type="none" w="med" len="med"/>
+                      <a:tailEnd type="none" w="med" len="med"/>
+                    </a:lnT>
+                    <a:lnB w="12700" cap="flat" cmpd="sng" algn="ctr">
+                      <a:solidFill>
+                        <a:schemeClr val="tx1"/>
+                      </a:solidFill>
+                      <a:prstDash val="solid"/>
+                      <a:round/>
+                      <a:headEnd type="none" w="med" len="med"/>
+                      <a:tailEnd type="none" w="med" len="med"/>
+                    </a:lnB>
+                  </a:tcPr>
+                </a:tc>
+                <a:extLst>
+                  <a:ext uri="{0D108BD9-81ED-4DB2-BD59-A6C34878D82A}">
+                    <a16:rowId xmlns:a16="http://schemas.microsoft.com/office/drawing/2014/main" val="4101925191"/>
+                  </a:ext>
+                </a:extLst>
+              </a:tr>
+            </a:tbl>
+          </a:graphicData>
+        </a:graphic>
+      </p:graphicFrame>
+      <p:sp>
+        <p:nvSpPr>
+          <p:cNvPr id="9" name="TextBox 8">
+            <a:extLst>
+              <a:ext uri="{FF2B5EF4-FFF2-40B4-BE49-F238E27FC236}">
+                <a16:creationId xmlns:a16="http://schemas.microsoft.com/office/drawing/2014/main" id="{998320B7-1673-A249-985B-309333E06F0F}"/>
+              </a:ext>
+            </a:extLst>
+          </p:cNvPr>
+          <p:cNvSpPr txBox="1"/>
+          <p:nvPr/>
+        </p:nvSpPr>
+        <p:spPr>
+          <a:xfrm>
+            <a:off x="3607577" y="2597038"/>
+            <a:ext cx="1144715" cy="300082"/>
+          </a:xfrm>
+          <a:prstGeom prst="rect">
+            <a:avLst/>
+          </a:prstGeom>
+          <a:noFill/>
+        </p:spPr>
+        <p:txBody>
+          <a:bodyPr wrap="square" rtlCol="0">
+            <a:spAutoFit/>
+          </a:bodyPr>
+          <a:lstStyle/>
+          <a:p>
+            <a:pPr algn="ctr"/>
+            <a:r>
+              <a:rPr lang="en-US" sz="1350" dirty="0"/>
+              <a:t>Stack</a:t>
+            </a:r>
+          </a:p>
+        </p:txBody>
+      </p:sp>
+    </p:spTree>
+    <p:extLst>
+      <p:ext uri="{BB962C8B-B14F-4D97-AF65-F5344CB8AC3E}">
+        <p14:creationId xmlns:p14="http://schemas.microsoft.com/office/powerpoint/2010/main" val="2289735267"/>
+      </p:ext>
+    </p:extLst>
+  </p:cSld>
+  <p:clrMapOvr>
+    <a:masterClrMapping/>
+  </p:clrMapOvr>
+</p:sld>
+</file>
+
 <file path=ppt/slides/slide2.xml><?xml version="1.0" encoding="utf-8"?>
 <p:sld xmlns:a="http://schemas.openxmlformats.org/drawingml/2006/main" xmlns:r="http://schemas.openxmlformats.org/officeDocument/2006/relationships" xmlns:p="http://schemas.openxmlformats.org/presentationml/2006/main">
   <p:cSld>
@@ -13623,6 +15070,1638 @@
       <p:bldP spid="38917" grpId="0" autoUpdateAnimBg="0"/>
     </p:bldLst>
   </p:timing>
+</p:sld>
+</file>
+
+<file path=ppt/slides/slide20.xml><?xml version="1.0" encoding="utf-8"?>
+<p:sld xmlns:a="http://schemas.openxmlformats.org/drawingml/2006/main" xmlns:r="http://schemas.openxmlformats.org/officeDocument/2006/relationships" xmlns:p="http://schemas.openxmlformats.org/presentationml/2006/main">
+  <p:cSld>
+    <p:spTree>
+      <p:nvGrpSpPr>
+        <p:cNvPr id="1" name=""/>
+        <p:cNvGrpSpPr/>
+        <p:nvPr/>
+      </p:nvGrpSpPr>
+      <p:grpSpPr>
+        <a:xfrm>
+          <a:off x="0" y="0"/>
+          <a:ext cx="0" cy="0"/>
+          <a:chOff x="0" y="0"/>
+          <a:chExt cx="0" cy="0"/>
+        </a:xfrm>
+      </p:grpSpPr>
+      <p:sp>
+        <p:nvSpPr>
+          <p:cNvPr id="2" name="Title 1"/>
+          <p:cNvSpPr>
+            <a:spLocks noGrp="1"/>
+          </p:cNvSpPr>
+          <p:nvPr>
+            <p:ph type="title"/>
+          </p:nvPr>
+        </p:nvSpPr>
+        <p:spPr/>
+        <p:txBody>
+          <a:bodyPr/>
+          <a:lstStyle/>
+          <a:p>
+            <a:r>
+              <a:rPr lang="en-US" dirty="0"/>
+              <a:t>Passing Extra Arguments via Stack</a:t>
+            </a:r>
+          </a:p>
+        </p:txBody>
+      </p:sp>
+      <p:sp>
+        <p:nvSpPr>
+          <p:cNvPr id="3" name="Slide Number Placeholder 2"/>
+          <p:cNvSpPr>
+            <a:spLocks noGrp="1"/>
+          </p:cNvSpPr>
+          <p:nvPr>
+            <p:ph type="sldNum" sz="quarter" idx="12"/>
+          </p:nvPr>
+        </p:nvSpPr>
+        <p:spPr/>
+        <p:txBody>
+          <a:bodyPr/>
+          <a:lstStyle/>
+          <a:p>
+            <a:fld id="{EA7C8D44-3667-46F6-9772-CC52308E2A7F}" type="slidenum">
+              <a:rPr kumimoji="0" lang="en-US" smtClean="0"/>
+              <a:pPr/>
+              <a:t>20</a:t>
+            </a:fld>
+            <a:endParaRPr kumimoji="0" lang="en-US" dirty="0"/>
+          </a:p>
+        </p:txBody>
+      </p:sp>
+      <p:sp>
+        <p:nvSpPr>
+          <p:cNvPr id="5" name="Rectangle 4"/>
+          <p:cNvSpPr/>
+          <p:nvPr/>
+        </p:nvSpPr>
+        <p:spPr>
+          <a:xfrm>
+            <a:off x="1428750" y="1828801"/>
+            <a:ext cx="5600700" cy="507831"/>
+          </a:xfrm>
+          <a:prstGeom prst="rect">
+            <a:avLst/>
+          </a:prstGeom>
+        </p:spPr>
+        <p:txBody>
+          <a:bodyPr wrap="square">
+            <a:spAutoFit/>
+          </a:bodyPr>
+          <a:lstStyle/>
+          <a:p>
+            <a:r>
+              <a:rPr lang="en-US" sz="1350" b="1" dirty="0">
+                <a:latin typeface="Consolas" panose="020B0609020204030204" pitchFamily="49" charset="0"/>
+              </a:rPr>
+              <a:t>int32_t sum(int32_t a, int32_t b, int32_t c, int32_t d,</a:t>
+            </a:r>
+          </a:p>
+          <a:p>
+            <a:r>
+              <a:rPr lang="en-US" sz="1350" b="1" dirty="0">
+                <a:latin typeface="Consolas" panose="020B0609020204030204" pitchFamily="49" charset="0"/>
+              </a:rPr>
+              <a:t>            int32_t h, int32_t </a:t>
+            </a:r>
+            <a:r>
+              <a:rPr lang="en-US" sz="1350" b="1" dirty="0" err="1">
+                <a:latin typeface="Consolas" panose="020B0609020204030204" pitchFamily="49" charset="0"/>
+              </a:rPr>
+              <a:t>i</a:t>
+            </a:r>
+            <a:r>
+              <a:rPr lang="en-US" sz="1350" b="1" dirty="0">
+                <a:latin typeface="Consolas" panose="020B0609020204030204" pitchFamily="49" charset="0"/>
+              </a:rPr>
+              <a:t>, int32_t j, int32_t k);</a:t>
+            </a:r>
+          </a:p>
+        </p:txBody>
+      </p:sp>
+      <p:sp>
+        <p:nvSpPr>
+          <p:cNvPr id="6" name="Rectangle 5"/>
+          <p:cNvSpPr/>
+          <p:nvPr/>
+        </p:nvSpPr>
+        <p:spPr>
+          <a:xfrm>
+            <a:off x="1428750" y="2324526"/>
+            <a:ext cx="3829050" cy="300082"/>
+          </a:xfrm>
+          <a:prstGeom prst="rect">
+            <a:avLst/>
+          </a:prstGeom>
+        </p:spPr>
+        <p:txBody>
+          <a:bodyPr wrap="square">
+            <a:spAutoFit/>
+          </a:bodyPr>
+          <a:lstStyle/>
+          <a:p>
+            <a:r>
+              <a:rPr lang="en-US" sz="1350" b="1" dirty="0">
+                <a:solidFill>
+                  <a:srgbClr val="FF0000"/>
+                </a:solidFill>
+                <a:latin typeface="Consolas" panose="020B0609020204030204" pitchFamily="49" charset="0"/>
+              </a:rPr>
+              <a:t>s = sum(1, 2, 3, 4, 5, 6, 7, 8);</a:t>
+            </a:r>
+          </a:p>
+        </p:txBody>
+      </p:sp>
+      <p:sp>
+        <p:nvSpPr>
+          <p:cNvPr id="9" name="TextBox 8"/>
+          <p:cNvSpPr txBox="1"/>
+          <p:nvPr/>
+        </p:nvSpPr>
+        <p:spPr>
+          <a:xfrm>
+            <a:off x="3186685" y="2625589"/>
+            <a:ext cx="623889" cy="300082"/>
+          </a:xfrm>
+          <a:prstGeom prst="rect">
+            <a:avLst/>
+          </a:prstGeom>
+          <a:noFill/>
+        </p:spPr>
+        <p:txBody>
+          <a:bodyPr wrap="none" rtlCol="0">
+            <a:spAutoFit/>
+          </a:bodyPr>
+          <a:lstStyle/>
+          <a:p>
+            <a:r>
+              <a:rPr lang="en-US" sz="1350" dirty="0" err="1"/>
+              <a:t>Callee</a:t>
+            </a:r>
+            <a:endParaRPr lang="en-US" sz="1350" dirty="0"/>
+          </a:p>
+        </p:txBody>
+      </p:sp>
+      <p:sp>
+        <p:nvSpPr>
+          <p:cNvPr id="10" name="TextBox 9"/>
+          <p:cNvSpPr txBox="1"/>
+          <p:nvPr/>
+        </p:nvSpPr>
+        <p:spPr>
+          <a:xfrm>
+            <a:off x="3186684" y="2975172"/>
+            <a:ext cx="4757166" cy="2677656"/>
+          </a:xfrm>
+          <a:prstGeom prst="rect">
+            <a:avLst/>
+          </a:prstGeom>
+        </p:spPr>
+        <p:style>
+          <a:lnRef idx="2">
+            <a:schemeClr val="accent1"/>
+          </a:lnRef>
+          <a:fillRef idx="1">
+            <a:schemeClr val="lt1"/>
+          </a:fillRef>
+          <a:effectRef idx="0">
+            <a:schemeClr val="accent1"/>
+          </a:effectRef>
+          <a:fontRef idx="minor">
+            <a:schemeClr val="dk1"/>
+          </a:fontRef>
+        </p:style>
+        <p:txBody>
+          <a:bodyPr wrap="square" rtlCol="0">
+            <a:spAutoFit/>
+          </a:bodyPr>
+          <a:lstStyle/>
+          <a:p>
+            <a:r>
+              <a:rPr lang="en-US" sz="1200" b="1" dirty="0">
+                <a:solidFill>
+                  <a:srgbClr val="3333FF"/>
+                </a:solidFill>
+                <a:latin typeface="Consolas" panose="020B0609020204030204" pitchFamily="49" charset="0"/>
+              </a:rPr>
+              <a:t>sum</a:t>
+            </a:r>
+            <a:r>
+              <a:rPr lang="en-US" sz="1200" dirty="0">
+                <a:latin typeface="Consolas" panose="020B0609020204030204" pitchFamily="49" charset="0"/>
+              </a:rPr>
+              <a:t> PROC </a:t>
+            </a:r>
+          </a:p>
+          <a:p>
+            <a:r>
+              <a:rPr lang="en-US" sz="1200" dirty="0">
+                <a:latin typeface="Consolas" panose="020B0609020204030204" pitchFamily="49" charset="0"/>
+              </a:rPr>
+              <a:t>  EXPORT sum </a:t>
+            </a:r>
+          </a:p>
+          <a:p>
+            <a:r>
+              <a:rPr lang="en-US" sz="1200" dirty="0">
+                <a:latin typeface="Consolas" panose="020B0609020204030204" pitchFamily="49" charset="0"/>
+              </a:rPr>
+              <a:t>  </a:t>
+            </a:r>
+            <a:r>
+              <a:rPr lang="en-US" sz="1200" b="1" dirty="0">
+                <a:solidFill>
+                  <a:srgbClr val="3333FF"/>
+                </a:solidFill>
+                <a:latin typeface="Consolas" panose="020B0609020204030204" pitchFamily="49" charset="0"/>
+              </a:rPr>
+              <a:t>PUSH {r5, r6, </a:t>
+            </a:r>
+            <a:r>
+              <a:rPr lang="en-US" sz="1200" b="1" dirty="0" err="1">
+                <a:solidFill>
+                  <a:srgbClr val="3333FF"/>
+                </a:solidFill>
+                <a:latin typeface="Consolas" panose="020B0609020204030204" pitchFamily="49" charset="0"/>
+              </a:rPr>
+              <a:t>lr</a:t>
+            </a:r>
+            <a:r>
+              <a:rPr lang="en-US" sz="1200" b="1" dirty="0">
+                <a:solidFill>
+                  <a:srgbClr val="3333FF"/>
+                </a:solidFill>
+                <a:latin typeface="Consolas" panose="020B0609020204030204" pitchFamily="49" charset="0"/>
+              </a:rPr>
+              <a:t>}</a:t>
+            </a:r>
+          </a:p>
+          <a:p>
+            <a:r>
+              <a:rPr lang="en-US" sz="1200" dirty="0">
+                <a:latin typeface="Consolas" panose="020B0609020204030204" pitchFamily="49" charset="0"/>
+              </a:rPr>
+              <a:t>  ADD r0, r0, r1   </a:t>
+            </a:r>
+            <a:r>
+              <a:rPr lang="en-US" sz="1200" dirty="0">
+                <a:solidFill>
+                  <a:schemeClr val="bg1">
+                    <a:lumMod val="50000"/>
+                  </a:schemeClr>
+                </a:solidFill>
+                <a:latin typeface="Consolas" panose="020B0609020204030204" pitchFamily="49" charset="0"/>
+              </a:rPr>
+              <a:t>; add a + b</a:t>
+            </a:r>
+          </a:p>
+          <a:p>
+            <a:r>
+              <a:rPr lang="en-US" sz="1200" dirty="0">
+                <a:latin typeface="Consolas" panose="020B0609020204030204" pitchFamily="49" charset="0"/>
+              </a:rPr>
+              <a:t>  ADD r0, r0, r2   </a:t>
+            </a:r>
+            <a:r>
+              <a:rPr lang="en-US" sz="1200" dirty="0">
+                <a:solidFill>
+                  <a:schemeClr val="bg1">
+                    <a:lumMod val="50000"/>
+                  </a:schemeClr>
+                </a:solidFill>
+                <a:latin typeface="Consolas" panose="020B0609020204030204" pitchFamily="49" charset="0"/>
+              </a:rPr>
+              <a:t>; add c</a:t>
+            </a:r>
+            <a:endParaRPr lang="en-US" sz="1200" dirty="0">
+              <a:latin typeface="Consolas" panose="020B0609020204030204" pitchFamily="49" charset="0"/>
+            </a:endParaRPr>
+          </a:p>
+          <a:p>
+            <a:r>
+              <a:rPr lang="en-US" sz="1200" dirty="0">
+                <a:latin typeface="Consolas" panose="020B0609020204030204" pitchFamily="49" charset="0"/>
+              </a:rPr>
+              <a:t>  ADD r0, r0, r3   </a:t>
+            </a:r>
+            <a:r>
+              <a:rPr lang="en-US" sz="1200" dirty="0">
+                <a:solidFill>
+                  <a:schemeClr val="bg1">
+                    <a:lumMod val="50000"/>
+                  </a:schemeClr>
+                </a:solidFill>
+                <a:latin typeface="Consolas" panose="020B0609020204030204" pitchFamily="49" charset="0"/>
+              </a:rPr>
+              <a:t>; add d</a:t>
+            </a:r>
+          </a:p>
+          <a:p>
+            <a:r>
+              <a:rPr lang="en-US" sz="1200" dirty="0">
+                <a:solidFill>
+                  <a:srgbClr val="FF0000"/>
+                </a:solidFill>
+                <a:latin typeface="Consolas" panose="020B0609020204030204" pitchFamily="49" charset="0"/>
+              </a:rPr>
+              <a:t>  </a:t>
+            </a:r>
+            <a:r>
+              <a:rPr lang="en-US" sz="1200" b="1" dirty="0">
+                <a:solidFill>
+                  <a:srgbClr val="FF0000"/>
+                </a:solidFill>
+                <a:latin typeface="Consolas" panose="020B0609020204030204" pitchFamily="49" charset="0"/>
+              </a:rPr>
+              <a:t>LDRD r5,r6, [</a:t>
+            </a:r>
+            <a:r>
+              <a:rPr lang="en-US" sz="1200" b="1" dirty="0" err="1">
+                <a:solidFill>
+                  <a:srgbClr val="FF0000"/>
+                </a:solidFill>
+                <a:latin typeface="Consolas" panose="020B0609020204030204" pitchFamily="49" charset="0"/>
+              </a:rPr>
+              <a:t>sp</a:t>
+            </a:r>
+            <a:r>
+              <a:rPr lang="en-US" sz="1200" b="1" dirty="0">
+                <a:solidFill>
+                  <a:srgbClr val="FF0000"/>
+                </a:solidFill>
+                <a:latin typeface="Consolas" panose="020B0609020204030204" pitchFamily="49" charset="0"/>
+              </a:rPr>
+              <a:t>, #12] </a:t>
+            </a:r>
+            <a:r>
+              <a:rPr lang="en-US" sz="1200" dirty="0">
+                <a:solidFill>
+                  <a:schemeClr val="bg1">
+                    <a:lumMod val="50000"/>
+                  </a:schemeClr>
+                </a:solidFill>
+                <a:latin typeface="Consolas" panose="020B0609020204030204" pitchFamily="49" charset="0"/>
+              </a:rPr>
+              <a:t>;</a:t>
+            </a:r>
+            <a:r>
+              <a:rPr lang="en-US" sz="1200" dirty="0">
+                <a:solidFill>
+                  <a:srgbClr val="FF0000"/>
+                </a:solidFill>
+                <a:latin typeface="Consolas" panose="020B0609020204030204" pitchFamily="49" charset="0"/>
+              </a:rPr>
+              <a:t> </a:t>
+            </a:r>
+            <a:r>
+              <a:rPr lang="en-US" sz="1200" dirty="0">
+                <a:solidFill>
+                  <a:schemeClr val="bg1">
+                    <a:lumMod val="50000"/>
+                  </a:schemeClr>
+                </a:solidFill>
+                <a:latin typeface="Consolas" panose="020B0609020204030204" pitchFamily="49" charset="0"/>
+              </a:rPr>
+              <a:t>r5=mem[sp+12],r6=mem[sp+16]</a:t>
+            </a:r>
+          </a:p>
+          <a:p>
+            <a:r>
+              <a:rPr lang="en-US" sz="1200" dirty="0">
+                <a:latin typeface="Consolas" panose="020B0609020204030204" pitchFamily="49" charset="0"/>
+              </a:rPr>
+              <a:t>  ADD r0, r0, r5   </a:t>
+            </a:r>
+            <a:r>
+              <a:rPr lang="en-US" sz="1200" dirty="0">
+                <a:solidFill>
+                  <a:schemeClr val="bg1">
+                    <a:lumMod val="50000"/>
+                  </a:schemeClr>
+                </a:solidFill>
+                <a:latin typeface="Consolas" panose="020B0609020204030204" pitchFamily="49" charset="0"/>
+              </a:rPr>
+              <a:t>; add h</a:t>
+            </a:r>
+          </a:p>
+          <a:p>
+            <a:r>
+              <a:rPr lang="en-US" sz="1200" dirty="0">
+                <a:latin typeface="Consolas" panose="020B0609020204030204" pitchFamily="49" charset="0"/>
+              </a:rPr>
+              <a:t>  ADD r0, r0, r6   </a:t>
+            </a:r>
+            <a:r>
+              <a:rPr lang="en-US" sz="1200" dirty="0">
+                <a:solidFill>
+                  <a:schemeClr val="bg1">
+                    <a:lumMod val="50000"/>
+                  </a:schemeClr>
+                </a:solidFill>
+                <a:latin typeface="Consolas" panose="020B0609020204030204" pitchFamily="49" charset="0"/>
+              </a:rPr>
+              <a:t>; add i</a:t>
+            </a:r>
+          </a:p>
+          <a:p>
+            <a:r>
+              <a:rPr lang="en-US" sz="1200" dirty="0">
+                <a:solidFill>
+                  <a:srgbClr val="FF0000"/>
+                </a:solidFill>
+                <a:latin typeface="Consolas" panose="020B0609020204030204" pitchFamily="49" charset="0"/>
+              </a:rPr>
+              <a:t>  </a:t>
+            </a:r>
+            <a:r>
+              <a:rPr lang="en-US" sz="1200" b="1" dirty="0">
+                <a:solidFill>
+                  <a:srgbClr val="FF0000"/>
+                </a:solidFill>
+                <a:latin typeface="Consolas" panose="020B0609020204030204" pitchFamily="49" charset="0"/>
+              </a:rPr>
+              <a:t>LDRD r5,r6, [</a:t>
+            </a:r>
+            <a:r>
+              <a:rPr lang="en-US" sz="1200" b="1" dirty="0" err="1">
+                <a:solidFill>
+                  <a:srgbClr val="FF0000"/>
+                </a:solidFill>
+                <a:latin typeface="Consolas" panose="020B0609020204030204" pitchFamily="49" charset="0"/>
+              </a:rPr>
+              <a:t>sp</a:t>
+            </a:r>
+            <a:r>
+              <a:rPr lang="en-US" sz="1200" b="1" dirty="0">
+                <a:solidFill>
+                  <a:srgbClr val="FF0000"/>
+                </a:solidFill>
+                <a:latin typeface="Consolas" panose="020B0609020204030204" pitchFamily="49" charset="0"/>
+              </a:rPr>
+              <a:t>, #20] </a:t>
+            </a:r>
+            <a:r>
+              <a:rPr lang="en-US" sz="1200" dirty="0">
+                <a:solidFill>
+                  <a:schemeClr val="bg1">
+                    <a:lumMod val="50000"/>
+                  </a:schemeClr>
+                </a:solidFill>
+                <a:latin typeface="Consolas" panose="020B0609020204030204" pitchFamily="49" charset="0"/>
+              </a:rPr>
+              <a:t>;</a:t>
+            </a:r>
+            <a:r>
+              <a:rPr lang="en-US" sz="1200" dirty="0">
+                <a:solidFill>
+                  <a:srgbClr val="FF0000"/>
+                </a:solidFill>
+                <a:latin typeface="Consolas" panose="020B0609020204030204" pitchFamily="49" charset="0"/>
+              </a:rPr>
+              <a:t> </a:t>
+            </a:r>
+            <a:r>
+              <a:rPr lang="en-US" sz="1200" dirty="0">
+                <a:solidFill>
+                  <a:schemeClr val="bg1">
+                    <a:lumMod val="50000"/>
+                  </a:schemeClr>
+                </a:solidFill>
+                <a:latin typeface="Consolas" panose="020B0609020204030204" pitchFamily="49" charset="0"/>
+              </a:rPr>
+              <a:t>r5=mem[sp+20],r6=mem[sp+24]</a:t>
+            </a:r>
+          </a:p>
+          <a:p>
+            <a:r>
+              <a:rPr lang="en-US" sz="1200" dirty="0">
+                <a:latin typeface="Consolas" panose="020B0609020204030204" pitchFamily="49" charset="0"/>
+              </a:rPr>
+              <a:t>  ADD r0, r0, r5   </a:t>
+            </a:r>
+            <a:r>
+              <a:rPr lang="en-US" sz="1200" dirty="0">
+                <a:solidFill>
+                  <a:schemeClr val="bg1">
+                    <a:lumMod val="50000"/>
+                  </a:schemeClr>
+                </a:solidFill>
+                <a:latin typeface="Consolas" panose="020B0609020204030204" pitchFamily="49" charset="0"/>
+              </a:rPr>
+              <a:t>; add j</a:t>
+            </a:r>
+          </a:p>
+          <a:p>
+            <a:r>
+              <a:rPr lang="en-US" sz="1200" dirty="0">
+                <a:latin typeface="Consolas" panose="020B0609020204030204" pitchFamily="49" charset="0"/>
+              </a:rPr>
+              <a:t>  ADD r0, r0, r6   </a:t>
+            </a:r>
+            <a:r>
+              <a:rPr lang="en-US" sz="1200" dirty="0">
+                <a:solidFill>
+                  <a:schemeClr val="bg1">
+                    <a:lumMod val="50000"/>
+                  </a:schemeClr>
+                </a:solidFill>
+                <a:latin typeface="Consolas" panose="020B0609020204030204" pitchFamily="49" charset="0"/>
+              </a:rPr>
+              <a:t>; add k</a:t>
+            </a:r>
+          </a:p>
+          <a:p>
+            <a:r>
+              <a:rPr lang="en-US" sz="1200" b="1" dirty="0">
+                <a:solidFill>
+                  <a:srgbClr val="3333FF"/>
+                </a:solidFill>
+                <a:latin typeface="Consolas" panose="020B0609020204030204" pitchFamily="49" charset="0"/>
+              </a:rPr>
+              <a:t>  POP {r5, r6, pc}</a:t>
+            </a:r>
+          </a:p>
+          <a:p>
+            <a:r>
+              <a:rPr lang="en-US" sz="1200" dirty="0">
+                <a:latin typeface="Consolas" panose="020B0609020204030204" pitchFamily="49" charset="0"/>
+              </a:rPr>
+              <a:t>  ENDP</a:t>
+            </a:r>
+          </a:p>
+        </p:txBody>
+      </p:sp>
+      <p:graphicFrame>
+        <p:nvGraphicFramePr>
+          <p:cNvPr id="4" name="Table 3"/>
+          <p:cNvGraphicFramePr>
+            <a:graphicFrameLocks noGrp="1"/>
+          </p:cNvGraphicFramePr>
+          <p:nvPr/>
+        </p:nvGraphicFramePr>
+        <p:xfrm>
+          <a:off x="971550" y="2996768"/>
+          <a:ext cx="2059115" cy="2491740"/>
+        </p:xfrm>
+        <a:graphic>
+          <a:graphicData uri="http://schemas.openxmlformats.org/drawingml/2006/table">
+            <a:tbl>
+              <a:tblPr firstRow="1" bandRow="1">
+                <a:tableStyleId>{5940675A-B579-460E-94D1-54222C63F5DA}</a:tableStyleId>
+              </a:tblPr>
+              <a:tblGrid>
+                <a:gridCol w="916115">
+                  <a:extLst>
+                    <a:ext uri="{9D8B030D-6E8A-4147-A177-3AD203B41FA5}">
+                      <a16:colId xmlns:a16="http://schemas.microsoft.com/office/drawing/2014/main" val="3247157364"/>
+                    </a:ext>
+                  </a:extLst>
+                </a:gridCol>
+                <a:gridCol w="1143000">
+                  <a:extLst>
+                    <a:ext uri="{9D8B030D-6E8A-4147-A177-3AD203B41FA5}">
+                      <a16:colId xmlns:a16="http://schemas.microsoft.com/office/drawing/2014/main" val="603072553"/>
+                    </a:ext>
+                  </a:extLst>
+                </a:gridCol>
+              </a:tblGrid>
+              <a:tr h="278130">
+                <a:tc>
+                  <a:txBody>
+                    <a:bodyPr/>
+                    <a:lstStyle/>
+                    <a:p>
+                      <a:pPr algn="r"/>
+                      <a:r>
+                        <a:rPr lang="en-US" sz="1400" dirty="0">
+                          <a:latin typeface="Consolas" panose="020B0609020204030204" pitchFamily="49" charset="0"/>
+                        </a:rPr>
+                        <a:t>Old</a:t>
+                      </a:r>
+                      <a:r>
+                        <a:rPr lang="en-US" sz="1400" baseline="0" dirty="0">
+                          <a:latin typeface="Consolas" panose="020B0609020204030204" pitchFamily="49" charset="0"/>
+                        </a:rPr>
+                        <a:t> SP</a:t>
+                      </a:r>
+                      <a:endParaRPr lang="en-US" sz="1400" dirty="0">
+                        <a:latin typeface="Consolas" panose="020B0609020204030204" pitchFamily="49" charset="0"/>
+                      </a:endParaRPr>
+                    </a:p>
+                  </a:txBody>
+                  <a:tcPr marL="68580" marR="68580" marT="34290" marB="34290">
+                    <a:lnL w="12700" cmpd="sng">
+                      <a:noFill/>
+                    </a:lnL>
+                    <a:lnR w="12700" cap="flat" cmpd="sng" algn="ctr">
+                      <a:solidFill>
+                        <a:schemeClr val="tx1"/>
+                      </a:solidFill>
+                      <a:prstDash val="solid"/>
+                      <a:round/>
+                      <a:headEnd type="none" w="med" len="med"/>
+                      <a:tailEnd type="none" w="med" len="med"/>
+                    </a:lnR>
+                    <a:lnT w="12700" cmpd="sng">
+                      <a:noFill/>
+                    </a:lnT>
+                    <a:lnB w="12700" cmpd="sng">
+                      <a:noFill/>
+                    </a:lnB>
+                    <a:lnTlToBr w="12700" cmpd="sng">
+                      <a:noFill/>
+                      <a:prstDash val="solid"/>
+                    </a:lnTlToBr>
+                    <a:lnBlToTr w="12700" cmpd="sng">
+                      <a:noFill/>
+                      <a:prstDash val="solid"/>
+                    </a:lnBlToTr>
+                  </a:tcPr>
+                </a:tc>
+                <a:tc>
+                  <a:txBody>
+                    <a:bodyPr/>
+                    <a:lstStyle/>
+                    <a:p>
+                      <a:r>
+                        <a:rPr lang="en-US" sz="1400" dirty="0">
+                          <a:latin typeface="Consolas" panose="020B0609020204030204" pitchFamily="49" charset="0"/>
+                        </a:rPr>
+                        <a:t>&lt;</a:t>
+                      </a:r>
+                      <a:r>
+                        <a:rPr lang="en-US" sz="1400" dirty="0" err="1">
+                          <a:latin typeface="Consolas" panose="020B0609020204030204" pitchFamily="49" charset="0"/>
+                        </a:rPr>
+                        <a:t>xxxxxxxx</a:t>
+                      </a:r>
+                      <a:r>
+                        <a:rPr lang="en-US" sz="1400" dirty="0">
+                          <a:latin typeface="Consolas" panose="020B0609020204030204" pitchFamily="49" charset="0"/>
+                        </a:rPr>
+                        <a:t>&gt;</a:t>
+                      </a:r>
+                    </a:p>
+                  </a:txBody>
+                  <a:tcPr marL="68580" marR="68580" marT="34290" marB="34290">
+                    <a:lnL w="12700" cap="flat" cmpd="sng" algn="ctr">
+                      <a:solidFill>
+                        <a:schemeClr val="tx1"/>
+                      </a:solidFill>
+                      <a:prstDash val="solid"/>
+                      <a:round/>
+                      <a:headEnd type="none" w="med" len="med"/>
+                      <a:tailEnd type="none" w="med" len="med"/>
+                    </a:lnL>
+                    <a:lnR w="12700" cap="flat" cmpd="sng" algn="ctr">
+                      <a:solidFill>
+                        <a:schemeClr val="tx1"/>
+                      </a:solidFill>
+                      <a:prstDash val="solid"/>
+                      <a:round/>
+                      <a:headEnd type="none" w="med" len="med"/>
+                      <a:tailEnd type="none" w="med" len="med"/>
+                    </a:lnR>
+                    <a:lnT w="12700" cap="flat" cmpd="sng" algn="ctr">
+                      <a:solidFill>
+                        <a:schemeClr val="tx1"/>
+                      </a:solidFill>
+                      <a:prstDash val="solid"/>
+                      <a:round/>
+                      <a:headEnd type="none" w="med" len="med"/>
+                      <a:tailEnd type="none" w="med" len="med"/>
+                    </a:lnT>
+                    <a:lnB w="12700" cap="flat" cmpd="sng" algn="ctr">
+                      <a:solidFill>
+                        <a:schemeClr val="tx1"/>
+                      </a:solidFill>
+                      <a:prstDash val="solid"/>
+                      <a:round/>
+                      <a:headEnd type="none" w="med" len="med"/>
+                      <a:tailEnd type="none" w="med" len="med"/>
+                    </a:lnB>
+                  </a:tcPr>
+                </a:tc>
+                <a:extLst>
+                  <a:ext uri="{0D108BD9-81ED-4DB2-BD59-A6C34878D82A}">
+                    <a16:rowId xmlns:a16="http://schemas.microsoft.com/office/drawing/2014/main" val="2605228926"/>
+                  </a:ext>
+                </a:extLst>
+              </a:tr>
+              <a:tr h="278130">
+                <a:tc>
+                  <a:txBody>
+                    <a:bodyPr/>
+                    <a:lstStyle/>
+                    <a:p>
+                      <a:pPr algn="r"/>
+                      <a:r>
+                        <a:rPr lang="en-US" sz="1400" dirty="0">
+                          <a:latin typeface="Consolas" panose="020B0609020204030204" pitchFamily="49" charset="0"/>
+                        </a:rPr>
+                        <a:t>SP+24</a:t>
+                      </a:r>
+                    </a:p>
+                  </a:txBody>
+                  <a:tcPr marL="68580" marR="68580" marT="34290" marB="34290">
+                    <a:lnL w="12700" cmpd="sng">
+                      <a:noFill/>
+                    </a:lnL>
+                    <a:lnR w="12700" cap="flat" cmpd="sng" algn="ctr">
+                      <a:solidFill>
+                        <a:schemeClr val="tx1"/>
+                      </a:solidFill>
+                      <a:prstDash val="solid"/>
+                      <a:round/>
+                      <a:headEnd type="none" w="med" len="med"/>
+                      <a:tailEnd type="none" w="med" len="med"/>
+                    </a:lnR>
+                    <a:lnT w="12700" cmpd="sng">
+                      <a:noFill/>
+                    </a:lnT>
+                    <a:lnB w="12700" cmpd="sng">
+                      <a:noFill/>
+                    </a:lnB>
+                    <a:lnTlToBr w="12700" cmpd="sng">
+                      <a:noFill/>
+                      <a:prstDash val="solid"/>
+                    </a:lnTlToBr>
+                    <a:lnBlToTr w="12700" cmpd="sng">
+                      <a:noFill/>
+                      <a:prstDash val="solid"/>
+                    </a:lnBlToTr>
+                  </a:tcPr>
+                </a:tc>
+                <a:tc>
+                  <a:txBody>
+                    <a:bodyPr/>
+                    <a:lstStyle/>
+                    <a:p>
+                      <a:r>
+                        <a:rPr lang="en-US" sz="1400" dirty="0">
+                          <a:solidFill>
+                            <a:srgbClr val="FF0000"/>
+                          </a:solidFill>
+                          <a:latin typeface="Consolas" panose="020B0609020204030204" pitchFamily="49" charset="0"/>
+                        </a:rPr>
+                        <a:t>0x00000008</a:t>
+                      </a:r>
+                    </a:p>
+                  </a:txBody>
+                  <a:tcPr marL="68580" marR="68580" marT="34290" marB="34290">
+                    <a:lnL w="12700" cap="flat" cmpd="sng" algn="ctr">
+                      <a:solidFill>
+                        <a:schemeClr val="tx1"/>
+                      </a:solidFill>
+                      <a:prstDash val="solid"/>
+                      <a:round/>
+                      <a:headEnd type="none" w="med" len="med"/>
+                      <a:tailEnd type="none" w="med" len="med"/>
+                    </a:lnL>
+                    <a:lnR w="12700" cap="flat" cmpd="sng" algn="ctr">
+                      <a:solidFill>
+                        <a:schemeClr val="tx1"/>
+                      </a:solidFill>
+                      <a:prstDash val="solid"/>
+                      <a:round/>
+                      <a:headEnd type="none" w="med" len="med"/>
+                      <a:tailEnd type="none" w="med" len="med"/>
+                    </a:lnR>
+                    <a:lnT w="12700" cap="flat" cmpd="sng" algn="ctr">
+                      <a:solidFill>
+                        <a:schemeClr val="tx1"/>
+                      </a:solidFill>
+                      <a:prstDash val="solid"/>
+                      <a:round/>
+                      <a:headEnd type="none" w="med" len="med"/>
+                      <a:tailEnd type="none" w="med" len="med"/>
+                    </a:lnT>
+                    <a:lnB w="12700" cap="flat" cmpd="sng" algn="ctr">
+                      <a:solidFill>
+                        <a:schemeClr val="tx1"/>
+                      </a:solidFill>
+                      <a:prstDash val="solid"/>
+                      <a:round/>
+                      <a:headEnd type="none" w="med" len="med"/>
+                      <a:tailEnd type="none" w="med" len="med"/>
+                    </a:lnB>
+                  </a:tcPr>
+                </a:tc>
+                <a:extLst>
+                  <a:ext uri="{0D108BD9-81ED-4DB2-BD59-A6C34878D82A}">
+                    <a16:rowId xmlns:a16="http://schemas.microsoft.com/office/drawing/2014/main" val="1838424931"/>
+                  </a:ext>
+                </a:extLst>
+              </a:tr>
+              <a:tr h="278130">
+                <a:tc>
+                  <a:txBody>
+                    <a:bodyPr/>
+                    <a:lstStyle/>
+                    <a:p>
+                      <a:pPr algn="r"/>
+                      <a:r>
+                        <a:rPr lang="en-US" sz="1400" dirty="0">
+                          <a:latin typeface="Consolas" panose="020B0609020204030204" pitchFamily="49" charset="0"/>
+                        </a:rPr>
+                        <a:t>SP+20</a:t>
+                      </a:r>
+                    </a:p>
+                  </a:txBody>
+                  <a:tcPr marL="68580" marR="68580" marT="34290" marB="34290">
+                    <a:lnL w="12700" cmpd="sng">
+                      <a:noFill/>
+                    </a:lnL>
+                    <a:lnR w="12700" cap="flat" cmpd="sng" algn="ctr">
+                      <a:solidFill>
+                        <a:schemeClr val="tx1"/>
+                      </a:solidFill>
+                      <a:prstDash val="solid"/>
+                      <a:round/>
+                      <a:headEnd type="none" w="med" len="med"/>
+                      <a:tailEnd type="none" w="med" len="med"/>
+                    </a:lnR>
+                    <a:lnT w="12700" cmpd="sng">
+                      <a:noFill/>
+                    </a:lnT>
+                    <a:lnB w="12700" cmpd="sng">
+                      <a:noFill/>
+                    </a:lnB>
+                    <a:lnTlToBr w="12700" cmpd="sng">
+                      <a:noFill/>
+                      <a:prstDash val="solid"/>
+                    </a:lnTlToBr>
+                    <a:lnBlToTr w="12700" cmpd="sng">
+                      <a:noFill/>
+                      <a:prstDash val="solid"/>
+                    </a:lnBlToTr>
+                  </a:tcPr>
+                </a:tc>
+                <a:tc>
+                  <a:txBody>
+                    <a:bodyPr/>
+                    <a:lstStyle/>
+                    <a:p>
+                      <a:r>
+                        <a:rPr lang="en-US" sz="1400" dirty="0">
+                          <a:solidFill>
+                            <a:srgbClr val="FF0000"/>
+                          </a:solidFill>
+                          <a:latin typeface="Consolas" panose="020B0609020204030204" pitchFamily="49" charset="0"/>
+                        </a:rPr>
+                        <a:t>0x00000007</a:t>
+                      </a:r>
+                    </a:p>
+                  </a:txBody>
+                  <a:tcPr marL="68580" marR="68580" marT="34290" marB="34290">
+                    <a:lnL w="12700" cap="flat" cmpd="sng" algn="ctr">
+                      <a:solidFill>
+                        <a:schemeClr val="tx1"/>
+                      </a:solidFill>
+                      <a:prstDash val="solid"/>
+                      <a:round/>
+                      <a:headEnd type="none" w="med" len="med"/>
+                      <a:tailEnd type="none" w="med" len="med"/>
+                    </a:lnL>
+                    <a:lnR w="12700" cap="flat" cmpd="sng" algn="ctr">
+                      <a:solidFill>
+                        <a:schemeClr val="tx1"/>
+                      </a:solidFill>
+                      <a:prstDash val="solid"/>
+                      <a:round/>
+                      <a:headEnd type="none" w="med" len="med"/>
+                      <a:tailEnd type="none" w="med" len="med"/>
+                    </a:lnR>
+                    <a:lnT w="12700" cap="flat" cmpd="sng" algn="ctr">
+                      <a:solidFill>
+                        <a:schemeClr val="tx1"/>
+                      </a:solidFill>
+                      <a:prstDash val="solid"/>
+                      <a:round/>
+                      <a:headEnd type="none" w="med" len="med"/>
+                      <a:tailEnd type="none" w="med" len="med"/>
+                    </a:lnT>
+                    <a:lnB w="12700" cap="flat" cmpd="sng" algn="ctr">
+                      <a:solidFill>
+                        <a:schemeClr val="tx1"/>
+                      </a:solidFill>
+                      <a:prstDash val="solid"/>
+                      <a:round/>
+                      <a:headEnd type="none" w="med" len="med"/>
+                      <a:tailEnd type="none" w="med" len="med"/>
+                    </a:lnB>
+                  </a:tcPr>
+                </a:tc>
+                <a:extLst>
+                  <a:ext uri="{0D108BD9-81ED-4DB2-BD59-A6C34878D82A}">
+                    <a16:rowId xmlns:a16="http://schemas.microsoft.com/office/drawing/2014/main" val="2129554528"/>
+                  </a:ext>
+                </a:extLst>
+              </a:tr>
+              <a:tr h="278130">
+                <a:tc>
+                  <a:txBody>
+                    <a:bodyPr/>
+                    <a:lstStyle/>
+                    <a:p>
+                      <a:pPr marL="0" marR="0" indent="0" algn="r" defTabSz="914400" rtl="0" eaLnBrk="1" fontAlgn="auto" latinLnBrk="0" hangingPunct="1">
+                        <a:lnSpc>
+                          <a:spcPct val="100000"/>
+                        </a:lnSpc>
+                        <a:spcBef>
+                          <a:spcPts val="0"/>
+                        </a:spcBef>
+                        <a:spcAft>
+                          <a:spcPts val="0"/>
+                        </a:spcAft>
+                        <a:buClrTx/>
+                        <a:buSzTx/>
+                        <a:buFontTx/>
+                        <a:buNone/>
+                        <a:tabLst/>
+                        <a:defRPr/>
+                      </a:pPr>
+                      <a:r>
+                        <a:rPr lang="en-US" sz="1400" dirty="0">
+                          <a:latin typeface="Consolas" panose="020B0609020204030204" pitchFamily="49" charset="0"/>
+                        </a:rPr>
+                        <a:t>SP+16</a:t>
+                      </a:r>
+                    </a:p>
+                  </a:txBody>
+                  <a:tcPr marL="68580" marR="68580" marT="34290" marB="34290">
+                    <a:lnL w="12700" cmpd="sng">
+                      <a:noFill/>
+                    </a:lnL>
+                    <a:lnR w="12700" cap="flat" cmpd="sng" algn="ctr">
+                      <a:solidFill>
+                        <a:schemeClr val="tx1"/>
+                      </a:solidFill>
+                      <a:prstDash val="solid"/>
+                      <a:round/>
+                      <a:headEnd type="none" w="med" len="med"/>
+                      <a:tailEnd type="none" w="med" len="med"/>
+                    </a:lnR>
+                    <a:lnT w="12700" cmpd="sng">
+                      <a:noFill/>
+                    </a:lnT>
+                    <a:lnB w="12700" cmpd="sng">
+                      <a:noFill/>
+                    </a:lnB>
+                    <a:lnTlToBr w="12700" cmpd="sng">
+                      <a:noFill/>
+                      <a:prstDash val="solid"/>
+                    </a:lnTlToBr>
+                    <a:lnBlToTr w="12700" cmpd="sng">
+                      <a:noFill/>
+                      <a:prstDash val="solid"/>
+                    </a:lnBlToTr>
+                  </a:tcPr>
+                </a:tc>
+                <a:tc>
+                  <a:txBody>
+                    <a:bodyPr/>
+                    <a:lstStyle/>
+                    <a:p>
+                      <a:r>
+                        <a:rPr lang="en-US" sz="1400" dirty="0">
+                          <a:solidFill>
+                            <a:srgbClr val="FF0000"/>
+                          </a:solidFill>
+                          <a:latin typeface="Consolas" panose="020B0609020204030204" pitchFamily="49" charset="0"/>
+                        </a:rPr>
+                        <a:t>0x00000006</a:t>
+                      </a:r>
+                    </a:p>
+                  </a:txBody>
+                  <a:tcPr marL="68580" marR="68580" marT="34290" marB="34290">
+                    <a:lnL w="12700" cap="flat" cmpd="sng" algn="ctr">
+                      <a:solidFill>
+                        <a:schemeClr val="tx1"/>
+                      </a:solidFill>
+                      <a:prstDash val="solid"/>
+                      <a:round/>
+                      <a:headEnd type="none" w="med" len="med"/>
+                      <a:tailEnd type="none" w="med" len="med"/>
+                    </a:lnL>
+                    <a:lnR w="12700" cap="flat" cmpd="sng" algn="ctr">
+                      <a:solidFill>
+                        <a:schemeClr val="tx1"/>
+                      </a:solidFill>
+                      <a:prstDash val="solid"/>
+                      <a:round/>
+                      <a:headEnd type="none" w="med" len="med"/>
+                      <a:tailEnd type="none" w="med" len="med"/>
+                    </a:lnR>
+                    <a:lnT w="12700" cap="flat" cmpd="sng" algn="ctr">
+                      <a:solidFill>
+                        <a:schemeClr val="tx1"/>
+                      </a:solidFill>
+                      <a:prstDash val="solid"/>
+                      <a:round/>
+                      <a:headEnd type="none" w="med" len="med"/>
+                      <a:tailEnd type="none" w="med" len="med"/>
+                    </a:lnT>
+                    <a:lnB w="12700" cap="flat" cmpd="sng" algn="ctr">
+                      <a:solidFill>
+                        <a:schemeClr val="tx1"/>
+                      </a:solidFill>
+                      <a:prstDash val="solid"/>
+                      <a:round/>
+                      <a:headEnd type="none" w="med" len="med"/>
+                      <a:tailEnd type="none" w="med" len="med"/>
+                    </a:lnB>
+                  </a:tcPr>
+                </a:tc>
+                <a:extLst>
+                  <a:ext uri="{0D108BD9-81ED-4DB2-BD59-A6C34878D82A}">
+                    <a16:rowId xmlns:a16="http://schemas.microsoft.com/office/drawing/2014/main" val="1388151533"/>
+                  </a:ext>
+                </a:extLst>
+              </a:tr>
+              <a:tr h="278130">
+                <a:tc>
+                  <a:txBody>
+                    <a:bodyPr/>
+                    <a:lstStyle/>
+                    <a:p>
+                      <a:pPr algn="r"/>
+                      <a:r>
+                        <a:rPr lang="en-US" sz="1400" dirty="0">
+                          <a:latin typeface="Consolas" panose="020B0609020204030204" pitchFamily="49" charset="0"/>
+                        </a:rPr>
+                        <a:t>SP+12</a:t>
+                      </a:r>
+                    </a:p>
+                  </a:txBody>
+                  <a:tcPr marL="68580" marR="68580" marT="34290" marB="34290">
+                    <a:lnL w="12700" cmpd="sng">
+                      <a:noFill/>
+                    </a:lnL>
+                    <a:lnR w="12700" cap="flat" cmpd="sng" algn="ctr">
+                      <a:solidFill>
+                        <a:schemeClr val="tx1"/>
+                      </a:solidFill>
+                      <a:prstDash val="solid"/>
+                      <a:round/>
+                      <a:headEnd type="none" w="med" len="med"/>
+                      <a:tailEnd type="none" w="med" len="med"/>
+                    </a:lnR>
+                    <a:lnT w="12700" cmpd="sng">
+                      <a:noFill/>
+                    </a:lnT>
+                    <a:lnB w="12700" cmpd="sng">
+                      <a:noFill/>
+                    </a:lnB>
+                    <a:lnTlToBr w="12700" cmpd="sng">
+                      <a:noFill/>
+                      <a:prstDash val="solid"/>
+                    </a:lnTlToBr>
+                    <a:lnBlToTr w="12700" cmpd="sng">
+                      <a:noFill/>
+                      <a:prstDash val="solid"/>
+                    </a:lnBlToTr>
+                  </a:tcPr>
+                </a:tc>
+                <a:tc>
+                  <a:txBody>
+                    <a:bodyPr/>
+                    <a:lstStyle/>
+                    <a:p>
+                      <a:r>
+                        <a:rPr lang="en-US" sz="1400" dirty="0">
+                          <a:solidFill>
+                            <a:srgbClr val="FF0000"/>
+                          </a:solidFill>
+                          <a:latin typeface="Consolas" panose="020B0609020204030204" pitchFamily="49" charset="0"/>
+                        </a:rPr>
+                        <a:t>0x00000005</a:t>
+                      </a:r>
+                    </a:p>
+                  </a:txBody>
+                  <a:tcPr marL="68580" marR="68580" marT="34290" marB="34290">
+                    <a:lnL w="12700" cap="flat" cmpd="sng" algn="ctr">
+                      <a:solidFill>
+                        <a:schemeClr val="tx1"/>
+                      </a:solidFill>
+                      <a:prstDash val="solid"/>
+                      <a:round/>
+                      <a:headEnd type="none" w="med" len="med"/>
+                      <a:tailEnd type="none" w="med" len="med"/>
+                    </a:lnL>
+                    <a:lnR w="12700" cap="flat" cmpd="sng" algn="ctr">
+                      <a:solidFill>
+                        <a:schemeClr val="tx1"/>
+                      </a:solidFill>
+                      <a:prstDash val="solid"/>
+                      <a:round/>
+                      <a:headEnd type="none" w="med" len="med"/>
+                      <a:tailEnd type="none" w="med" len="med"/>
+                    </a:lnR>
+                    <a:lnT w="12700" cap="flat" cmpd="sng" algn="ctr">
+                      <a:solidFill>
+                        <a:schemeClr val="tx1"/>
+                      </a:solidFill>
+                      <a:prstDash val="solid"/>
+                      <a:round/>
+                      <a:headEnd type="none" w="med" len="med"/>
+                      <a:tailEnd type="none" w="med" len="med"/>
+                    </a:lnT>
+                    <a:lnB w="12700" cap="flat" cmpd="sng" algn="ctr">
+                      <a:solidFill>
+                        <a:schemeClr val="tx1"/>
+                      </a:solidFill>
+                      <a:prstDash val="solid"/>
+                      <a:round/>
+                      <a:headEnd type="none" w="med" len="med"/>
+                      <a:tailEnd type="none" w="med" len="med"/>
+                    </a:lnB>
+                  </a:tcPr>
+                </a:tc>
+                <a:extLst>
+                  <a:ext uri="{0D108BD9-81ED-4DB2-BD59-A6C34878D82A}">
+                    <a16:rowId xmlns:a16="http://schemas.microsoft.com/office/drawing/2014/main" val="1795449420"/>
+                  </a:ext>
+                </a:extLst>
+              </a:tr>
+              <a:tr h="278130">
+                <a:tc>
+                  <a:txBody>
+                    <a:bodyPr/>
+                    <a:lstStyle/>
+                    <a:p>
+                      <a:pPr algn="r"/>
+                      <a:r>
+                        <a:rPr lang="en-US" sz="1400" dirty="0">
+                          <a:latin typeface="Consolas" panose="020B0609020204030204" pitchFamily="49" charset="0"/>
+                        </a:rPr>
+                        <a:t>SP+8</a:t>
+                      </a:r>
+                    </a:p>
+                  </a:txBody>
+                  <a:tcPr marL="68580" marR="68580" marT="34290" marB="34290">
+                    <a:lnL w="12700" cmpd="sng">
+                      <a:noFill/>
+                    </a:lnL>
+                    <a:lnR w="12700" cap="flat" cmpd="sng" algn="ctr">
+                      <a:solidFill>
+                        <a:schemeClr val="tx1"/>
+                      </a:solidFill>
+                      <a:prstDash val="solid"/>
+                      <a:round/>
+                      <a:headEnd type="none" w="med" len="med"/>
+                      <a:tailEnd type="none" w="med" len="med"/>
+                    </a:lnR>
+                    <a:lnT w="12700" cmpd="sng">
+                      <a:noFill/>
+                    </a:lnT>
+                    <a:lnB w="12700" cmpd="sng">
+                      <a:noFill/>
+                    </a:lnB>
+                    <a:lnTlToBr w="12700" cmpd="sng">
+                      <a:noFill/>
+                      <a:prstDash val="solid"/>
+                    </a:lnTlToBr>
+                    <a:lnBlToTr w="12700" cmpd="sng">
+                      <a:noFill/>
+                      <a:prstDash val="solid"/>
+                    </a:lnBlToTr>
+                  </a:tcPr>
+                </a:tc>
+                <a:tc>
+                  <a:txBody>
+                    <a:bodyPr/>
+                    <a:lstStyle/>
+                    <a:p>
+                      <a:pPr algn="ctr"/>
+                      <a:r>
+                        <a:rPr lang="en-US" sz="1400" b="1" dirty="0" err="1">
+                          <a:solidFill>
+                            <a:srgbClr val="3333FF"/>
+                          </a:solidFill>
+                          <a:latin typeface="Consolas" panose="020B0609020204030204" pitchFamily="49" charset="0"/>
+                        </a:rPr>
+                        <a:t>lr</a:t>
+                      </a:r>
+                      <a:endParaRPr lang="en-US" sz="1400" b="1" dirty="0">
+                        <a:solidFill>
+                          <a:srgbClr val="3333FF"/>
+                        </a:solidFill>
+                        <a:latin typeface="Consolas" panose="020B0609020204030204" pitchFamily="49" charset="0"/>
+                      </a:endParaRPr>
+                    </a:p>
+                  </a:txBody>
+                  <a:tcPr marL="68580" marR="68580" marT="34290" marB="34290">
+                    <a:lnL w="12700" cap="flat" cmpd="sng" algn="ctr">
+                      <a:solidFill>
+                        <a:schemeClr val="tx1"/>
+                      </a:solidFill>
+                      <a:prstDash val="solid"/>
+                      <a:round/>
+                      <a:headEnd type="none" w="med" len="med"/>
+                      <a:tailEnd type="none" w="med" len="med"/>
+                    </a:lnL>
+                    <a:lnR w="12700" cap="flat" cmpd="sng" algn="ctr">
+                      <a:solidFill>
+                        <a:schemeClr val="tx1"/>
+                      </a:solidFill>
+                      <a:prstDash val="solid"/>
+                      <a:round/>
+                      <a:headEnd type="none" w="med" len="med"/>
+                      <a:tailEnd type="none" w="med" len="med"/>
+                    </a:lnR>
+                    <a:lnT w="12700" cap="flat" cmpd="sng" algn="ctr">
+                      <a:solidFill>
+                        <a:schemeClr val="tx1"/>
+                      </a:solidFill>
+                      <a:prstDash val="solid"/>
+                      <a:round/>
+                      <a:headEnd type="none" w="med" len="med"/>
+                      <a:tailEnd type="none" w="med" len="med"/>
+                    </a:lnT>
+                    <a:lnB w="12700" cap="flat" cmpd="sng" algn="ctr">
+                      <a:solidFill>
+                        <a:schemeClr val="tx1"/>
+                      </a:solidFill>
+                      <a:prstDash val="solid"/>
+                      <a:round/>
+                      <a:headEnd type="none" w="med" len="med"/>
+                      <a:tailEnd type="none" w="med" len="med"/>
+                    </a:lnB>
+                  </a:tcPr>
+                </a:tc>
+                <a:extLst>
+                  <a:ext uri="{0D108BD9-81ED-4DB2-BD59-A6C34878D82A}">
+                    <a16:rowId xmlns:a16="http://schemas.microsoft.com/office/drawing/2014/main" val="1761571247"/>
+                  </a:ext>
+                </a:extLst>
+              </a:tr>
+              <a:tr h="274320">
+                <a:tc>
+                  <a:txBody>
+                    <a:bodyPr/>
+                    <a:lstStyle/>
+                    <a:p>
+                      <a:pPr algn="r"/>
+                      <a:r>
+                        <a:rPr lang="en-US" sz="1400" dirty="0">
+                          <a:latin typeface="Consolas" panose="020B0609020204030204" pitchFamily="49" charset="0"/>
+                        </a:rPr>
+                        <a:t>SP+4</a:t>
+                      </a:r>
+                    </a:p>
+                  </a:txBody>
+                  <a:tcPr marL="68580" marR="68580" marT="34290" marB="34290">
+                    <a:lnL w="12700" cmpd="sng">
+                      <a:noFill/>
+                    </a:lnL>
+                    <a:lnR w="12700" cap="flat" cmpd="sng" algn="ctr">
+                      <a:solidFill>
+                        <a:schemeClr val="tx1"/>
+                      </a:solidFill>
+                      <a:prstDash val="solid"/>
+                      <a:round/>
+                      <a:headEnd type="none" w="med" len="med"/>
+                      <a:tailEnd type="none" w="med" len="med"/>
+                    </a:lnR>
+                    <a:lnT w="12700" cmpd="sng">
+                      <a:noFill/>
+                    </a:lnT>
+                    <a:lnB w="12700" cmpd="sng">
+                      <a:noFill/>
+                    </a:lnB>
+                    <a:lnTlToBr w="12700" cmpd="sng">
+                      <a:noFill/>
+                      <a:prstDash val="solid"/>
+                    </a:lnTlToBr>
+                    <a:lnBlToTr w="12700" cmpd="sng">
+                      <a:noFill/>
+                      <a:prstDash val="solid"/>
+                    </a:lnBlToTr>
+                  </a:tcPr>
+                </a:tc>
+                <a:tc>
+                  <a:txBody>
+                    <a:bodyPr/>
+                    <a:lstStyle/>
+                    <a:p>
+                      <a:pPr algn="ctr"/>
+                      <a:r>
+                        <a:rPr lang="en-US" sz="1400" b="1" dirty="0">
+                          <a:solidFill>
+                            <a:srgbClr val="3333FF"/>
+                          </a:solidFill>
+                          <a:latin typeface="Consolas" panose="020B0609020204030204" pitchFamily="49" charset="0"/>
+                        </a:rPr>
+                        <a:t>r6</a:t>
+                      </a:r>
+                    </a:p>
+                  </a:txBody>
+                  <a:tcPr marL="68580" marR="68580" marT="34290" marB="34290">
+                    <a:lnL w="12700" cap="flat" cmpd="sng" algn="ctr">
+                      <a:solidFill>
+                        <a:schemeClr val="tx1"/>
+                      </a:solidFill>
+                      <a:prstDash val="solid"/>
+                      <a:round/>
+                      <a:headEnd type="none" w="med" len="med"/>
+                      <a:tailEnd type="none" w="med" len="med"/>
+                    </a:lnL>
+                    <a:lnR w="12700" cap="flat" cmpd="sng" algn="ctr">
+                      <a:solidFill>
+                        <a:schemeClr val="tx1"/>
+                      </a:solidFill>
+                      <a:prstDash val="solid"/>
+                      <a:round/>
+                      <a:headEnd type="none" w="med" len="med"/>
+                      <a:tailEnd type="none" w="med" len="med"/>
+                    </a:lnR>
+                    <a:lnT w="12700" cap="flat" cmpd="sng" algn="ctr">
+                      <a:solidFill>
+                        <a:schemeClr val="tx1"/>
+                      </a:solidFill>
+                      <a:prstDash val="solid"/>
+                      <a:round/>
+                      <a:headEnd type="none" w="med" len="med"/>
+                      <a:tailEnd type="none" w="med" len="med"/>
+                    </a:lnT>
+                    <a:lnB w="12700" cap="flat" cmpd="sng" algn="ctr">
+                      <a:solidFill>
+                        <a:schemeClr val="tx1"/>
+                      </a:solidFill>
+                      <a:prstDash val="solid"/>
+                      <a:round/>
+                      <a:headEnd type="none" w="med" len="med"/>
+                      <a:tailEnd type="none" w="med" len="med"/>
+                    </a:lnB>
+                  </a:tcPr>
+                </a:tc>
+                <a:extLst>
+                  <a:ext uri="{0D108BD9-81ED-4DB2-BD59-A6C34878D82A}">
+                    <a16:rowId xmlns:a16="http://schemas.microsoft.com/office/drawing/2014/main" val="1492653976"/>
+                  </a:ext>
+                </a:extLst>
+              </a:tr>
+              <a:tr h="274320">
+                <a:tc>
+                  <a:txBody>
+                    <a:bodyPr/>
+                    <a:lstStyle/>
+                    <a:p>
+                      <a:pPr algn="r"/>
+                      <a:r>
+                        <a:rPr lang="en-US" sz="1400" dirty="0">
+                          <a:latin typeface="Consolas" panose="020B0609020204030204" pitchFamily="49" charset="0"/>
+                        </a:rPr>
+                        <a:t>SP</a:t>
+                      </a:r>
+                    </a:p>
+                  </a:txBody>
+                  <a:tcPr marL="68580" marR="68580" marT="34290" marB="34290">
+                    <a:lnL w="12700" cmpd="sng">
+                      <a:noFill/>
+                    </a:lnL>
+                    <a:lnR w="12700" cap="flat" cmpd="sng" algn="ctr">
+                      <a:solidFill>
+                        <a:schemeClr val="tx1"/>
+                      </a:solidFill>
+                      <a:prstDash val="solid"/>
+                      <a:round/>
+                      <a:headEnd type="none" w="med" len="med"/>
+                      <a:tailEnd type="none" w="med" len="med"/>
+                    </a:lnR>
+                    <a:lnT w="12700" cmpd="sng">
+                      <a:noFill/>
+                    </a:lnT>
+                    <a:lnB w="12700" cmpd="sng">
+                      <a:noFill/>
+                    </a:lnB>
+                    <a:lnTlToBr w="12700" cmpd="sng">
+                      <a:noFill/>
+                      <a:prstDash val="solid"/>
+                    </a:lnTlToBr>
+                    <a:lnBlToTr w="12700" cmpd="sng">
+                      <a:noFill/>
+                      <a:prstDash val="solid"/>
+                    </a:lnBlToTr>
+                  </a:tcPr>
+                </a:tc>
+                <a:tc>
+                  <a:txBody>
+                    <a:bodyPr/>
+                    <a:lstStyle/>
+                    <a:p>
+                      <a:pPr algn="ctr"/>
+                      <a:r>
+                        <a:rPr lang="en-US" sz="1400" b="1" dirty="0">
+                          <a:solidFill>
+                            <a:srgbClr val="3333FF"/>
+                          </a:solidFill>
+                          <a:latin typeface="Consolas" panose="020B0609020204030204" pitchFamily="49" charset="0"/>
+                        </a:rPr>
+                        <a:t>r5</a:t>
+                      </a:r>
+                    </a:p>
+                  </a:txBody>
+                  <a:tcPr marL="68580" marR="68580" marT="34290" marB="34290">
+                    <a:lnL w="12700" cap="flat" cmpd="sng" algn="ctr">
+                      <a:solidFill>
+                        <a:schemeClr val="tx1"/>
+                      </a:solidFill>
+                      <a:prstDash val="solid"/>
+                      <a:round/>
+                      <a:headEnd type="none" w="med" len="med"/>
+                      <a:tailEnd type="none" w="med" len="med"/>
+                    </a:lnL>
+                    <a:lnR w="12700" cap="flat" cmpd="sng" algn="ctr">
+                      <a:solidFill>
+                        <a:schemeClr val="tx1"/>
+                      </a:solidFill>
+                      <a:prstDash val="solid"/>
+                      <a:round/>
+                      <a:headEnd type="none" w="med" len="med"/>
+                      <a:tailEnd type="none" w="med" len="med"/>
+                    </a:lnR>
+                    <a:lnT w="12700" cap="flat" cmpd="sng" algn="ctr">
+                      <a:solidFill>
+                        <a:schemeClr val="tx1"/>
+                      </a:solidFill>
+                      <a:prstDash val="solid"/>
+                      <a:round/>
+                      <a:headEnd type="none" w="med" len="med"/>
+                      <a:tailEnd type="none" w="med" len="med"/>
+                    </a:lnT>
+                    <a:lnB w="12700" cap="flat" cmpd="sng" algn="ctr">
+                      <a:solidFill>
+                        <a:schemeClr val="tx1"/>
+                      </a:solidFill>
+                      <a:prstDash val="solid"/>
+                      <a:round/>
+                      <a:headEnd type="none" w="med" len="med"/>
+                      <a:tailEnd type="none" w="med" len="med"/>
+                    </a:lnB>
+                  </a:tcPr>
+                </a:tc>
+                <a:extLst>
+                  <a:ext uri="{0D108BD9-81ED-4DB2-BD59-A6C34878D82A}">
+                    <a16:rowId xmlns:a16="http://schemas.microsoft.com/office/drawing/2014/main" val="1160991303"/>
+                  </a:ext>
+                </a:extLst>
+              </a:tr>
+              <a:tr h="274320">
+                <a:tc>
+                  <a:txBody>
+                    <a:bodyPr/>
+                    <a:lstStyle/>
+                    <a:p>
+                      <a:pPr algn="r"/>
+                      <a:endParaRPr lang="en-US" sz="1400" dirty="0">
+                        <a:latin typeface="Consolas" panose="020B0609020204030204" pitchFamily="49" charset="0"/>
+                      </a:endParaRPr>
+                    </a:p>
+                  </a:txBody>
+                  <a:tcPr marL="68580" marR="68580" marT="34290" marB="34290">
+                    <a:lnL w="12700" cmpd="sng">
+                      <a:noFill/>
+                    </a:lnL>
+                    <a:lnR w="12700" cap="flat" cmpd="sng" algn="ctr">
+                      <a:solidFill>
+                        <a:schemeClr val="tx1"/>
+                      </a:solidFill>
+                      <a:prstDash val="solid"/>
+                      <a:round/>
+                      <a:headEnd type="none" w="med" len="med"/>
+                      <a:tailEnd type="none" w="med" len="med"/>
+                    </a:lnR>
+                    <a:lnT w="12700" cmpd="sng">
+                      <a:noFill/>
+                    </a:lnT>
+                    <a:lnB w="12700" cmpd="sng">
+                      <a:noFill/>
+                    </a:lnB>
+                    <a:lnTlToBr w="12700" cmpd="sng">
+                      <a:noFill/>
+                      <a:prstDash val="solid"/>
+                    </a:lnTlToBr>
+                    <a:lnBlToTr w="12700" cmpd="sng">
+                      <a:noFill/>
+                      <a:prstDash val="solid"/>
+                    </a:lnBlToTr>
+                  </a:tcPr>
+                </a:tc>
+                <a:tc>
+                  <a:txBody>
+                    <a:bodyPr/>
+                    <a:lstStyle/>
+                    <a:p>
+                      <a:pPr algn="ctr"/>
+                      <a:endParaRPr lang="en-US" sz="1400" dirty="0">
+                        <a:latin typeface="Consolas" panose="020B0609020204030204" pitchFamily="49" charset="0"/>
+                      </a:endParaRPr>
+                    </a:p>
+                  </a:txBody>
+                  <a:tcPr marL="68580" marR="68580" marT="34290" marB="34290">
+                    <a:lnL w="12700" cap="flat" cmpd="sng" algn="ctr">
+                      <a:solidFill>
+                        <a:schemeClr val="tx1"/>
+                      </a:solidFill>
+                      <a:prstDash val="solid"/>
+                      <a:round/>
+                      <a:headEnd type="none" w="med" len="med"/>
+                      <a:tailEnd type="none" w="med" len="med"/>
+                    </a:lnL>
+                    <a:lnR w="12700" cap="flat" cmpd="sng" algn="ctr">
+                      <a:solidFill>
+                        <a:schemeClr val="tx1"/>
+                      </a:solidFill>
+                      <a:prstDash val="solid"/>
+                      <a:round/>
+                      <a:headEnd type="none" w="med" len="med"/>
+                      <a:tailEnd type="none" w="med" len="med"/>
+                    </a:lnR>
+                    <a:lnT w="12700" cap="flat" cmpd="sng" algn="ctr">
+                      <a:solidFill>
+                        <a:schemeClr val="tx1"/>
+                      </a:solidFill>
+                      <a:prstDash val="solid"/>
+                      <a:round/>
+                      <a:headEnd type="none" w="med" len="med"/>
+                      <a:tailEnd type="none" w="med" len="med"/>
+                    </a:lnT>
+                    <a:lnB w="12700" cap="flat" cmpd="sng" algn="ctr">
+                      <a:solidFill>
+                        <a:schemeClr val="tx1"/>
+                      </a:solidFill>
+                      <a:prstDash val="solid"/>
+                      <a:round/>
+                      <a:headEnd type="none" w="med" len="med"/>
+                      <a:tailEnd type="none" w="med" len="med"/>
+                    </a:lnB>
+                  </a:tcPr>
+                </a:tc>
+                <a:extLst>
+                  <a:ext uri="{0D108BD9-81ED-4DB2-BD59-A6C34878D82A}">
+                    <a16:rowId xmlns:a16="http://schemas.microsoft.com/office/drawing/2014/main" val="4101925191"/>
+                  </a:ext>
+                </a:extLst>
+              </a:tr>
+            </a:tbl>
+          </a:graphicData>
+        </a:graphic>
+      </p:graphicFrame>
+      <p:sp>
+        <p:nvSpPr>
+          <p:cNvPr id="11" name="TextBox 10">
+            <a:extLst>
+              <a:ext uri="{FF2B5EF4-FFF2-40B4-BE49-F238E27FC236}">
+                <a16:creationId xmlns:a16="http://schemas.microsoft.com/office/drawing/2014/main" id="{0F3E23F3-7B52-2544-AFFF-69221F0A193A}"/>
+              </a:ext>
+            </a:extLst>
+          </p:cNvPr>
+          <p:cNvSpPr txBox="1"/>
+          <p:nvPr/>
+        </p:nvSpPr>
+        <p:spPr>
+          <a:xfrm>
+            <a:off x="1889380" y="2719769"/>
+            <a:ext cx="1141285" cy="300082"/>
+          </a:xfrm>
+          <a:prstGeom prst="rect">
+            <a:avLst/>
+          </a:prstGeom>
+          <a:noFill/>
+        </p:spPr>
+        <p:txBody>
+          <a:bodyPr wrap="square" rtlCol="0">
+            <a:spAutoFit/>
+          </a:bodyPr>
+          <a:lstStyle/>
+          <a:p>
+            <a:pPr algn="ctr"/>
+            <a:r>
+              <a:rPr lang="en-US" sz="1350" dirty="0"/>
+              <a:t>Stack</a:t>
+            </a:r>
+          </a:p>
+        </p:txBody>
+      </p:sp>
+    </p:spTree>
+    <p:extLst>
+      <p:ext uri="{BB962C8B-B14F-4D97-AF65-F5344CB8AC3E}">
+        <p14:creationId xmlns:p14="http://schemas.microsoft.com/office/powerpoint/2010/main" val="96042344"/>
+      </p:ext>
+    </p:extLst>
+  </p:cSld>
+  <p:clrMapOvr>
+    <a:masterClrMapping/>
+  </p:clrMapOvr>
 </p:sld>
 </file>
 
@@ -15104,17 +18183,17 @@
           <a:ln/>
           <a:extLst>
             <a:ext uri="{FAA26D3D-D897-4be2-8F04-BA451C77F1D7}">
-              <ma14:placeholderFlag xmlns:ma14="http://schemas.microsoft.com/office/mac/drawingml/2011/main" xmlns="" val="1"/>
+              <ma14:placeholderFlag xmlns="" xmlns:ma14="http://schemas.microsoft.com/office/mac/drawingml/2011/main" val="1"/>
             </a:ext>
             <a:ext uri="{909E8E84-426E-40dd-AFC4-6F175D3DCCD1}">
-              <a14:hiddenFill xmlns:a14="http://schemas.microsoft.com/office/drawing/2010/main" xmlns="">
+              <a14:hiddenFill xmlns="" xmlns:a14="http://schemas.microsoft.com/office/drawing/2010/main">
                 <a:solidFill>
                   <a:schemeClr val="bg1"/>
                 </a:solidFill>
               </a14:hiddenFill>
             </a:ext>
             <a:ext uri="{91240B29-F687-4f45-9708-019B960494DF}">
-              <a14:hiddenLine xmlns:a14="http://schemas.microsoft.com/office/drawing/2010/main" xmlns="" w="12700">
+              <a14:hiddenLine xmlns="" xmlns:a14="http://schemas.microsoft.com/office/drawing/2010/main" w="12700">
                 <a:pattFill prst="narHorz">
                   <a:fgClr>
                     <a:schemeClr val="tx1"/>
@@ -15129,7 +18208,7 @@
               </a14:hiddenLine>
             </a:ext>
             <a:ext uri="{AF507438-7753-43e0-B8FC-AC1667EBCBE1}">
-              <a14:hiddenEffects xmlns:a14="http://schemas.microsoft.com/office/drawing/2010/main" xmlns="">
+              <a14:hiddenEffects xmlns="" xmlns:a14="http://schemas.microsoft.com/office/drawing/2010/main">
                 <a:effectLst>
                   <a:outerShdw blurRad="63500" dist="38099" dir="2700000" algn="ctr" rotWithShape="0">
                     <a:schemeClr val="bg2">

--- a/PPTs/ZDELETED.pptx
+++ b/PPTs/ZDELETED.pptx
@@ -6,31 +6,32 @@
     <p:sldMasterId id="2147483672" r:id="rId2"/>
   </p:sldMasterIdLst>
   <p:notesMasterIdLst>
-    <p:notesMasterId r:id="rId25"/>
+    <p:notesMasterId r:id="rId26"/>
   </p:notesMasterIdLst>
   <p:sldIdLst>
     <p:sldId id="256" r:id="rId3"/>
-    <p:sldId id="300" r:id="rId4"/>
-    <p:sldId id="344" r:id="rId5"/>
-    <p:sldId id="383" r:id="rId6"/>
-    <p:sldId id="381" r:id="rId7"/>
-    <p:sldId id="335" r:id="rId8"/>
-    <p:sldId id="813" r:id="rId9"/>
-    <p:sldId id="475" r:id="rId10"/>
-    <p:sldId id="473" r:id="rId11"/>
-    <p:sldId id="306" r:id="rId12"/>
-    <p:sldId id="322" r:id="rId13"/>
-    <p:sldId id="323" r:id="rId14"/>
-    <p:sldId id="325" r:id="rId15"/>
-    <p:sldId id="324" r:id="rId16"/>
-    <p:sldId id="525" r:id="rId17"/>
-    <p:sldId id="261" r:id="rId18"/>
-    <p:sldId id="264" r:id="rId19"/>
-    <p:sldId id="262" r:id="rId20"/>
-    <p:sldId id="265" r:id="rId21"/>
-    <p:sldId id="379" r:id="rId22"/>
-    <p:sldId id="320" r:id="rId23"/>
-    <p:sldId id="319" r:id="rId24"/>
+    <p:sldId id="352" r:id="rId4"/>
+    <p:sldId id="300" r:id="rId5"/>
+    <p:sldId id="344" r:id="rId6"/>
+    <p:sldId id="383" r:id="rId7"/>
+    <p:sldId id="381" r:id="rId8"/>
+    <p:sldId id="335" r:id="rId9"/>
+    <p:sldId id="813" r:id="rId10"/>
+    <p:sldId id="475" r:id="rId11"/>
+    <p:sldId id="473" r:id="rId12"/>
+    <p:sldId id="306" r:id="rId13"/>
+    <p:sldId id="322" r:id="rId14"/>
+    <p:sldId id="323" r:id="rId15"/>
+    <p:sldId id="325" r:id="rId16"/>
+    <p:sldId id="324" r:id="rId17"/>
+    <p:sldId id="525" r:id="rId18"/>
+    <p:sldId id="261" r:id="rId19"/>
+    <p:sldId id="264" r:id="rId20"/>
+    <p:sldId id="262" r:id="rId21"/>
+    <p:sldId id="265" r:id="rId22"/>
+    <p:sldId id="379" r:id="rId23"/>
+    <p:sldId id="320" r:id="rId24"/>
+    <p:sldId id="319" r:id="rId25"/>
   </p:sldIdLst>
   <p:sldSz cx="9144000" cy="6858000" type="screen4x3"/>
   <p:notesSz cx="6858000" cy="9144000"/>
@@ -151,7 +152,7 @@
 <file path=ppt/revisionInfo.xml><?xml version="1.0" encoding="utf-8"?>
 <p1510:revInfo xmlns:a="http://schemas.openxmlformats.org/drawingml/2006/main" xmlns:r="http://schemas.openxmlformats.org/officeDocument/2006/relationships" xmlns:p1510="http://schemas.microsoft.com/office/powerpoint/2015/10/main">
   <p1510:revLst>
-    <p1510:client id="{74B15ED0-6DB4-4108-82C9-64F0E8E52BFB}" v="16" dt="2025-10-10T11:27:54.480"/>
+    <p1510:client id="{74B15ED0-6DB4-4108-82C9-64F0E8E52BFB}" v="17" dt="2025-10-21T20:14:50.832"/>
   </p1510:revLst>
 </p1510:revInfo>
 </file>
@@ -161,41 +162,10 @@
   <pc:docChgLst>
     <pc:chgData name="Zonghua Gu" userId="9a7e1853e1951ef5" providerId="LiveId" clId="{CF1FAA12-072C-4ED5-BA76-0FFFAEFDB88A}"/>
     <pc:docChg chg="custSel addSld delSld modSld">
-      <pc:chgData name="Zonghua Gu" userId="9a7e1853e1951ef5" providerId="LiveId" clId="{CF1FAA12-072C-4ED5-BA76-0FFFAEFDB88A}" dt="2025-10-10T11:27:54.468" v="32"/>
+      <pc:chgData name="Zonghua Gu" userId="9a7e1853e1951ef5" providerId="LiveId" clId="{CF1FAA12-072C-4ED5-BA76-0FFFAEFDB88A}" dt="2025-10-21T20:14:50.830" v="33"/>
       <pc:docMkLst>
         <pc:docMk/>
       </pc:docMkLst>
-      <pc:sldChg chg="addSp modSp mod">
-        <pc:chgData name="Zonghua Gu" userId="9a7e1853e1951ef5" providerId="LiveId" clId="{CF1FAA12-072C-4ED5-BA76-0FFFAEFDB88A}" dt="2025-09-16T21:27:48.835" v="8" actId="20577"/>
-        <pc:sldMkLst>
-          <pc:docMk/>
-          <pc:sldMk cId="1227639730" sldId="256"/>
-        </pc:sldMkLst>
-        <pc:spChg chg="mod">
-          <ac:chgData name="Zonghua Gu" userId="9a7e1853e1951ef5" providerId="LiveId" clId="{CF1FAA12-072C-4ED5-BA76-0FFFAEFDB88A}" dt="2025-09-16T21:27:44.448" v="3"/>
-          <ac:spMkLst>
-            <pc:docMk/>
-            <pc:sldMk cId="1227639730" sldId="256"/>
-            <ac:spMk id="2" creationId="{00000000-0000-0000-0000-000000000000}"/>
-          </ac:spMkLst>
-        </pc:spChg>
-        <pc:spChg chg="mod">
-          <ac:chgData name="Zonghua Gu" userId="9a7e1853e1951ef5" providerId="LiveId" clId="{CF1FAA12-072C-4ED5-BA76-0FFFAEFDB88A}" dt="2025-09-16T21:27:48.835" v="8" actId="20577"/>
-          <ac:spMkLst>
-            <pc:docMk/>
-            <pc:sldMk cId="1227639730" sldId="256"/>
-            <ac:spMk id="3" creationId="{00000000-0000-0000-0000-000000000000}"/>
-          </ac:spMkLst>
-        </pc:spChg>
-        <pc:spChg chg="add mod">
-          <ac:chgData name="Zonghua Gu" userId="9a7e1853e1951ef5" providerId="LiveId" clId="{CF1FAA12-072C-4ED5-BA76-0FFFAEFDB88A}" dt="2025-09-16T21:27:38.538" v="2" actId="1076"/>
-          <ac:spMkLst>
-            <pc:docMk/>
-            <pc:sldMk cId="1227639730" sldId="256"/>
-            <ac:spMk id="7" creationId="{04F69590-944C-2F0D-5FE5-A89C06E0D2BF}"/>
-          </ac:spMkLst>
-        </pc:spChg>
-      </pc:sldChg>
       <pc:sldChg chg="add">
         <pc:chgData name="Zonghua Gu" userId="9a7e1853e1951ef5" providerId="LiveId" clId="{CF1FAA12-072C-4ED5-BA76-0FFFAEFDB88A}" dt="2025-09-21T23:03:14.599" v="18"/>
         <pc:sldMkLst>
@@ -224,179 +194,11 @@
           <pc:sldMk cId="712390701" sldId="265"/>
         </pc:sldMkLst>
       </pc:sldChg>
-      <pc:sldChg chg="del">
-        <pc:chgData name="Zonghua Gu" userId="9a7e1853e1951ef5" providerId="LiveId" clId="{CF1FAA12-072C-4ED5-BA76-0FFFAEFDB88A}" dt="2025-09-18T02:54:06.006" v="9" actId="47"/>
-        <pc:sldMkLst>
-          <pc:docMk/>
-          <pc:sldMk cId="3420550765" sldId="272"/>
-        </pc:sldMkLst>
-      </pc:sldChg>
-      <pc:sldChg chg="del">
-        <pc:chgData name="Zonghua Gu" userId="9a7e1853e1951ef5" providerId="LiveId" clId="{CF1FAA12-072C-4ED5-BA76-0FFFAEFDB88A}" dt="2025-09-18T02:54:06.006" v="9" actId="47"/>
-        <pc:sldMkLst>
-          <pc:docMk/>
-          <pc:sldMk cId="2059043100" sldId="277"/>
-        </pc:sldMkLst>
-      </pc:sldChg>
-      <pc:sldChg chg="del">
-        <pc:chgData name="Zonghua Gu" userId="9a7e1853e1951ef5" providerId="LiveId" clId="{CF1FAA12-072C-4ED5-BA76-0FFFAEFDB88A}" dt="2025-09-18T02:54:06.006" v="9" actId="47"/>
-        <pc:sldMkLst>
-          <pc:docMk/>
-          <pc:sldMk cId="2290796456" sldId="279"/>
-        </pc:sldMkLst>
-      </pc:sldChg>
-      <pc:sldChg chg="del">
-        <pc:chgData name="Zonghua Gu" userId="9a7e1853e1951ef5" providerId="LiveId" clId="{CF1FAA12-072C-4ED5-BA76-0FFFAEFDB88A}" dt="2025-09-18T02:54:06.006" v="9" actId="47"/>
-        <pc:sldMkLst>
-          <pc:docMk/>
-          <pc:sldMk cId="3012842885" sldId="281"/>
-        </pc:sldMkLst>
-      </pc:sldChg>
-      <pc:sldChg chg="del">
-        <pc:chgData name="Zonghua Gu" userId="9a7e1853e1951ef5" providerId="LiveId" clId="{CF1FAA12-072C-4ED5-BA76-0FFFAEFDB88A}" dt="2025-09-18T02:54:06.006" v="9" actId="47"/>
-        <pc:sldMkLst>
-          <pc:docMk/>
-          <pc:sldMk cId="2511335096" sldId="282"/>
-        </pc:sldMkLst>
-      </pc:sldChg>
-      <pc:sldChg chg="del">
-        <pc:chgData name="Zonghua Gu" userId="9a7e1853e1951ef5" providerId="LiveId" clId="{CF1FAA12-072C-4ED5-BA76-0FFFAEFDB88A}" dt="2025-09-18T02:54:06.006" v="9" actId="47"/>
-        <pc:sldMkLst>
-          <pc:docMk/>
-          <pc:sldMk cId="3668909280" sldId="283"/>
-        </pc:sldMkLst>
-      </pc:sldChg>
-      <pc:sldChg chg="del">
-        <pc:chgData name="Zonghua Gu" userId="9a7e1853e1951ef5" providerId="LiveId" clId="{CF1FAA12-072C-4ED5-BA76-0FFFAEFDB88A}" dt="2025-09-18T02:54:06.006" v="9" actId="47"/>
-        <pc:sldMkLst>
-          <pc:docMk/>
-          <pc:sldMk cId="271435320" sldId="284"/>
-        </pc:sldMkLst>
-      </pc:sldChg>
-      <pc:sldChg chg="del">
-        <pc:chgData name="Zonghua Gu" userId="9a7e1853e1951ef5" providerId="LiveId" clId="{CF1FAA12-072C-4ED5-BA76-0FFFAEFDB88A}" dt="2025-09-18T02:54:06.006" v="9" actId="47"/>
-        <pc:sldMkLst>
-          <pc:docMk/>
-          <pc:sldMk cId="3704552365" sldId="285"/>
-        </pc:sldMkLst>
-      </pc:sldChg>
-      <pc:sldChg chg="del">
-        <pc:chgData name="Zonghua Gu" userId="9a7e1853e1951ef5" providerId="LiveId" clId="{CF1FAA12-072C-4ED5-BA76-0FFFAEFDB88A}" dt="2025-09-18T02:54:06.006" v="9" actId="47"/>
-        <pc:sldMkLst>
-          <pc:docMk/>
-          <pc:sldMk cId="3106604463" sldId="286"/>
-        </pc:sldMkLst>
-      </pc:sldChg>
-      <pc:sldChg chg="del">
-        <pc:chgData name="Zonghua Gu" userId="9a7e1853e1951ef5" providerId="LiveId" clId="{CF1FAA12-072C-4ED5-BA76-0FFFAEFDB88A}" dt="2025-09-18T02:54:06.006" v="9" actId="47"/>
-        <pc:sldMkLst>
-          <pc:docMk/>
-          <pc:sldMk cId="3646693943" sldId="287"/>
-        </pc:sldMkLst>
-      </pc:sldChg>
-      <pc:sldChg chg="del">
-        <pc:chgData name="Zonghua Gu" userId="9a7e1853e1951ef5" providerId="LiveId" clId="{CF1FAA12-072C-4ED5-BA76-0FFFAEFDB88A}" dt="2025-09-18T02:54:06.006" v="9" actId="47"/>
-        <pc:sldMkLst>
-          <pc:docMk/>
-          <pc:sldMk cId="2844324683" sldId="288"/>
-        </pc:sldMkLst>
-      </pc:sldChg>
-      <pc:sldChg chg="del">
-        <pc:chgData name="Zonghua Gu" userId="9a7e1853e1951ef5" providerId="LiveId" clId="{CF1FAA12-072C-4ED5-BA76-0FFFAEFDB88A}" dt="2025-09-18T02:54:06.006" v="9" actId="47"/>
-        <pc:sldMkLst>
-          <pc:docMk/>
-          <pc:sldMk cId="1884958220" sldId="289"/>
-        </pc:sldMkLst>
-      </pc:sldChg>
-      <pc:sldChg chg="del">
-        <pc:chgData name="Zonghua Gu" userId="9a7e1853e1951ef5" providerId="LiveId" clId="{CF1FAA12-072C-4ED5-BA76-0FFFAEFDB88A}" dt="2025-09-18T02:54:06.006" v="9" actId="47"/>
-        <pc:sldMkLst>
-          <pc:docMk/>
-          <pc:sldMk cId="29255324" sldId="291"/>
-        </pc:sldMkLst>
-      </pc:sldChg>
-      <pc:sldChg chg="del">
-        <pc:chgData name="Zonghua Gu" userId="9a7e1853e1951ef5" providerId="LiveId" clId="{CF1FAA12-072C-4ED5-BA76-0FFFAEFDB88A}" dt="2025-09-18T02:54:06.006" v="9" actId="47"/>
-        <pc:sldMkLst>
-          <pc:docMk/>
-          <pc:sldMk cId="1771709229" sldId="292"/>
-        </pc:sldMkLst>
-      </pc:sldChg>
-      <pc:sldChg chg="modSp del mod">
-        <pc:chgData name="Zonghua Gu" userId="9a7e1853e1951ef5" providerId="LiveId" clId="{CF1FAA12-072C-4ED5-BA76-0FFFAEFDB88A}" dt="2025-09-18T02:54:06.006" v="9" actId="47"/>
-        <pc:sldMkLst>
-          <pc:docMk/>
-          <pc:sldMk cId="1337576135" sldId="293"/>
-        </pc:sldMkLst>
-      </pc:sldChg>
-      <pc:sldChg chg="del">
-        <pc:chgData name="Zonghua Gu" userId="9a7e1853e1951ef5" providerId="LiveId" clId="{CF1FAA12-072C-4ED5-BA76-0FFFAEFDB88A}" dt="2025-09-18T02:54:06.006" v="9" actId="47"/>
-        <pc:sldMkLst>
-          <pc:docMk/>
-          <pc:sldMk cId="1459654649" sldId="295"/>
-        </pc:sldMkLst>
-      </pc:sldChg>
       <pc:sldChg chg="add del">
         <pc:chgData name="Zonghua Gu" userId="9a7e1853e1951ef5" providerId="LiveId" clId="{CF1FAA12-072C-4ED5-BA76-0FFFAEFDB88A}" dt="2025-10-10T11:27:54.468" v="32"/>
         <pc:sldMkLst>
           <pc:docMk/>
           <pc:sldMk cId="203524775" sldId="300"/>
-        </pc:sldMkLst>
-      </pc:sldChg>
-      <pc:sldChg chg="del">
-        <pc:chgData name="Zonghua Gu" userId="9a7e1853e1951ef5" providerId="LiveId" clId="{CF1FAA12-072C-4ED5-BA76-0FFFAEFDB88A}" dt="2025-09-18T02:54:06.006" v="9" actId="47"/>
-        <pc:sldMkLst>
-          <pc:docMk/>
-          <pc:sldMk cId="2785807384" sldId="307"/>
-        </pc:sldMkLst>
-      </pc:sldChg>
-      <pc:sldChg chg="del">
-        <pc:chgData name="Zonghua Gu" userId="9a7e1853e1951ef5" providerId="LiveId" clId="{CF1FAA12-072C-4ED5-BA76-0FFFAEFDB88A}" dt="2025-09-18T02:54:06.006" v="9" actId="47"/>
-        <pc:sldMkLst>
-          <pc:docMk/>
-          <pc:sldMk cId="2644265921" sldId="312"/>
-        </pc:sldMkLst>
-      </pc:sldChg>
-      <pc:sldChg chg="del">
-        <pc:chgData name="Zonghua Gu" userId="9a7e1853e1951ef5" providerId="LiveId" clId="{CF1FAA12-072C-4ED5-BA76-0FFFAEFDB88A}" dt="2025-09-18T02:54:06.006" v="9" actId="47"/>
-        <pc:sldMkLst>
-          <pc:docMk/>
-          <pc:sldMk cId="1277304446" sldId="313"/>
-        </pc:sldMkLst>
-      </pc:sldChg>
-      <pc:sldChg chg="del">
-        <pc:chgData name="Zonghua Gu" userId="9a7e1853e1951ef5" providerId="LiveId" clId="{CF1FAA12-072C-4ED5-BA76-0FFFAEFDB88A}" dt="2025-09-18T02:54:06.006" v="9" actId="47"/>
-        <pc:sldMkLst>
-          <pc:docMk/>
-          <pc:sldMk cId="2099586659" sldId="314"/>
-        </pc:sldMkLst>
-      </pc:sldChg>
-      <pc:sldChg chg="del">
-        <pc:chgData name="Zonghua Gu" userId="9a7e1853e1951ef5" providerId="LiveId" clId="{CF1FAA12-072C-4ED5-BA76-0FFFAEFDB88A}" dt="2025-09-18T02:54:06.006" v="9" actId="47"/>
-        <pc:sldMkLst>
-          <pc:docMk/>
-          <pc:sldMk cId="430688265" sldId="315"/>
-        </pc:sldMkLst>
-      </pc:sldChg>
-      <pc:sldChg chg="del">
-        <pc:chgData name="Zonghua Gu" userId="9a7e1853e1951ef5" providerId="LiveId" clId="{CF1FAA12-072C-4ED5-BA76-0FFFAEFDB88A}" dt="2025-09-18T02:54:06.006" v="9" actId="47"/>
-        <pc:sldMkLst>
-          <pc:docMk/>
-          <pc:sldMk cId="2128225317" sldId="316"/>
-        </pc:sldMkLst>
-      </pc:sldChg>
-      <pc:sldChg chg="del">
-        <pc:chgData name="Zonghua Gu" userId="9a7e1853e1951ef5" providerId="LiveId" clId="{CF1FAA12-072C-4ED5-BA76-0FFFAEFDB88A}" dt="2025-09-18T02:54:06.006" v="9" actId="47"/>
-        <pc:sldMkLst>
-          <pc:docMk/>
-          <pc:sldMk cId="1703302262" sldId="317"/>
-        </pc:sldMkLst>
-      </pc:sldChg>
-      <pc:sldChg chg="del">
-        <pc:chgData name="Zonghua Gu" userId="9a7e1853e1951ef5" providerId="LiveId" clId="{CF1FAA12-072C-4ED5-BA76-0FFFAEFDB88A}" dt="2025-09-18T02:54:06.006" v="9" actId="47"/>
-        <pc:sldMkLst>
-          <pc:docMk/>
-          <pc:sldMk cId="2321944581" sldId="318"/>
         </pc:sldMkLst>
       </pc:sldChg>
       <pc:sldChg chg="add">
@@ -411,83 +213,6 @@
         <pc:sldMkLst>
           <pc:docMk/>
           <pc:sldMk cId="2289735267" sldId="320"/>
-        </pc:sldMkLst>
-      </pc:sldChg>
-      <pc:sldChg chg="del">
-        <pc:chgData name="Zonghua Gu" userId="9a7e1853e1951ef5" providerId="LiveId" clId="{CF1FAA12-072C-4ED5-BA76-0FFFAEFDB88A}" dt="2025-09-18T02:54:06.006" v="9" actId="47"/>
-        <pc:sldMkLst>
-          <pc:docMk/>
-          <pc:sldMk cId="3152283833" sldId="320"/>
-        </pc:sldMkLst>
-      </pc:sldChg>
-      <pc:sldChg chg="del">
-        <pc:chgData name="Zonghua Gu" userId="9a7e1853e1951ef5" providerId="LiveId" clId="{CF1FAA12-072C-4ED5-BA76-0FFFAEFDB88A}" dt="2025-09-18T02:54:06.006" v="9" actId="47"/>
-        <pc:sldMkLst>
-          <pc:docMk/>
-          <pc:sldMk cId="975851832" sldId="326"/>
-        </pc:sldMkLst>
-      </pc:sldChg>
-      <pc:sldChg chg="new del">
-        <pc:chgData name="Zonghua Gu" userId="9a7e1853e1951ef5" providerId="LiveId" clId="{CF1FAA12-072C-4ED5-BA76-0FFFAEFDB88A}" dt="2025-09-18T02:54:14.576" v="13" actId="47"/>
-        <pc:sldMkLst>
-          <pc:docMk/>
-          <pc:sldMk cId="3087616913" sldId="326"/>
-        </pc:sldMkLst>
-      </pc:sldChg>
-      <pc:sldChg chg="del">
-        <pc:chgData name="Zonghua Gu" userId="9a7e1853e1951ef5" providerId="LiveId" clId="{CF1FAA12-072C-4ED5-BA76-0FFFAEFDB88A}" dt="2025-09-18T02:54:06.006" v="9" actId="47"/>
-        <pc:sldMkLst>
-          <pc:docMk/>
-          <pc:sldMk cId="342584573" sldId="328"/>
-        </pc:sldMkLst>
-      </pc:sldChg>
-      <pc:sldChg chg="del">
-        <pc:chgData name="Zonghua Gu" userId="9a7e1853e1951ef5" providerId="LiveId" clId="{CF1FAA12-072C-4ED5-BA76-0FFFAEFDB88A}" dt="2025-09-18T02:54:06.006" v="9" actId="47"/>
-        <pc:sldMkLst>
-          <pc:docMk/>
-          <pc:sldMk cId="2148212839" sldId="329"/>
-        </pc:sldMkLst>
-      </pc:sldChg>
-      <pc:sldChg chg="del">
-        <pc:chgData name="Zonghua Gu" userId="9a7e1853e1951ef5" providerId="LiveId" clId="{CF1FAA12-072C-4ED5-BA76-0FFFAEFDB88A}" dt="2025-09-18T02:54:06.006" v="9" actId="47"/>
-        <pc:sldMkLst>
-          <pc:docMk/>
-          <pc:sldMk cId="1380735846" sldId="330"/>
-        </pc:sldMkLst>
-      </pc:sldChg>
-      <pc:sldChg chg="del">
-        <pc:chgData name="Zonghua Gu" userId="9a7e1853e1951ef5" providerId="LiveId" clId="{CF1FAA12-072C-4ED5-BA76-0FFFAEFDB88A}" dt="2025-09-18T02:54:06.006" v="9" actId="47"/>
-        <pc:sldMkLst>
-          <pc:docMk/>
-          <pc:sldMk cId="1640407279" sldId="331"/>
-        </pc:sldMkLst>
-      </pc:sldChg>
-      <pc:sldChg chg="del">
-        <pc:chgData name="Zonghua Gu" userId="9a7e1853e1951ef5" providerId="LiveId" clId="{CF1FAA12-072C-4ED5-BA76-0FFFAEFDB88A}" dt="2025-09-18T02:54:06.006" v="9" actId="47"/>
-        <pc:sldMkLst>
-          <pc:docMk/>
-          <pc:sldMk cId="4134758979" sldId="332"/>
-        </pc:sldMkLst>
-      </pc:sldChg>
-      <pc:sldChg chg="del">
-        <pc:chgData name="Zonghua Gu" userId="9a7e1853e1951ef5" providerId="LiveId" clId="{CF1FAA12-072C-4ED5-BA76-0FFFAEFDB88A}" dt="2025-09-18T02:54:06.006" v="9" actId="47"/>
-        <pc:sldMkLst>
-          <pc:docMk/>
-          <pc:sldMk cId="45956393" sldId="333"/>
-        </pc:sldMkLst>
-      </pc:sldChg>
-      <pc:sldChg chg="del">
-        <pc:chgData name="Zonghua Gu" userId="9a7e1853e1951ef5" providerId="LiveId" clId="{CF1FAA12-072C-4ED5-BA76-0FFFAEFDB88A}" dt="2025-09-18T02:54:06.006" v="9" actId="47"/>
-        <pc:sldMkLst>
-          <pc:docMk/>
-          <pc:sldMk cId="1913135421" sldId="334"/>
-        </pc:sldMkLst>
-      </pc:sldChg>
-      <pc:sldChg chg="del">
-        <pc:chgData name="Zonghua Gu" userId="9a7e1853e1951ef5" providerId="LiveId" clId="{CF1FAA12-072C-4ED5-BA76-0FFFAEFDB88A}" dt="2025-09-18T02:54:06.006" v="9" actId="47"/>
-        <pc:sldMkLst>
-          <pc:docMk/>
-          <pc:sldMk cId="3816386607" sldId="335"/>
         </pc:sldMkLst>
       </pc:sldChg>
       <pc:sldChg chg="modSp add mod modNotes">
@@ -505,55 +230,6 @@
           </ac:spMkLst>
         </pc:spChg>
       </pc:sldChg>
-      <pc:sldChg chg="del">
-        <pc:chgData name="Zonghua Gu" userId="9a7e1853e1951ef5" providerId="LiveId" clId="{CF1FAA12-072C-4ED5-BA76-0FFFAEFDB88A}" dt="2025-09-18T02:54:06.006" v="9" actId="47"/>
-        <pc:sldMkLst>
-          <pc:docMk/>
-          <pc:sldMk cId="3525808290" sldId="336"/>
-        </pc:sldMkLst>
-      </pc:sldChg>
-      <pc:sldChg chg="del">
-        <pc:chgData name="Zonghua Gu" userId="9a7e1853e1951ef5" providerId="LiveId" clId="{CF1FAA12-072C-4ED5-BA76-0FFFAEFDB88A}" dt="2025-09-18T02:54:06.006" v="9" actId="47"/>
-        <pc:sldMkLst>
-          <pc:docMk/>
-          <pc:sldMk cId="1861246248" sldId="337"/>
-        </pc:sldMkLst>
-      </pc:sldChg>
-      <pc:sldChg chg="del">
-        <pc:chgData name="Zonghua Gu" userId="9a7e1853e1951ef5" providerId="LiveId" clId="{CF1FAA12-072C-4ED5-BA76-0FFFAEFDB88A}" dt="2025-09-18T02:54:06.006" v="9" actId="47"/>
-        <pc:sldMkLst>
-          <pc:docMk/>
-          <pc:sldMk cId="2476710942" sldId="338"/>
-        </pc:sldMkLst>
-      </pc:sldChg>
-      <pc:sldChg chg="del">
-        <pc:chgData name="Zonghua Gu" userId="9a7e1853e1951ef5" providerId="LiveId" clId="{CF1FAA12-072C-4ED5-BA76-0FFFAEFDB88A}" dt="2025-09-18T02:54:09.106" v="10" actId="47"/>
-        <pc:sldMkLst>
-          <pc:docMk/>
-          <pc:sldMk cId="4270472410" sldId="341"/>
-        </pc:sldMkLst>
-      </pc:sldChg>
-      <pc:sldChg chg="del">
-        <pc:chgData name="Zonghua Gu" userId="9a7e1853e1951ef5" providerId="LiveId" clId="{CF1FAA12-072C-4ED5-BA76-0FFFAEFDB88A}" dt="2025-09-18T02:54:09.106" v="10" actId="47"/>
-        <pc:sldMkLst>
-          <pc:docMk/>
-          <pc:sldMk cId="3897190462" sldId="342"/>
-        </pc:sldMkLst>
-      </pc:sldChg>
-      <pc:sldChg chg="del">
-        <pc:chgData name="Zonghua Gu" userId="9a7e1853e1951ef5" providerId="LiveId" clId="{CF1FAA12-072C-4ED5-BA76-0FFFAEFDB88A}" dt="2025-09-18T02:54:09.106" v="10" actId="47"/>
-        <pc:sldMkLst>
-          <pc:docMk/>
-          <pc:sldMk cId="3398840445" sldId="343"/>
-        </pc:sldMkLst>
-      </pc:sldChg>
-      <pc:sldChg chg="del">
-        <pc:chgData name="Zonghua Gu" userId="9a7e1853e1951ef5" providerId="LiveId" clId="{CF1FAA12-072C-4ED5-BA76-0FFFAEFDB88A}" dt="2025-09-18T02:54:09.106" v="10" actId="47"/>
-        <pc:sldMkLst>
-          <pc:docMk/>
-          <pc:sldMk cId="1330855799" sldId="344"/>
-        </pc:sldMkLst>
-      </pc:sldChg>
       <pc:sldChg chg="add">
         <pc:chgData name="Zonghua Gu" userId="9a7e1853e1951ef5" providerId="LiveId" clId="{CF1FAA12-072C-4ED5-BA76-0FFFAEFDB88A}" dt="2025-10-10T11:25:43.432" v="28"/>
         <pc:sldMkLst>
@@ -561,18 +237,11 @@
           <pc:sldMk cId="2051571543" sldId="344"/>
         </pc:sldMkLst>
       </pc:sldChg>
-      <pc:sldChg chg="del">
-        <pc:chgData name="Zonghua Gu" userId="9a7e1853e1951ef5" providerId="LiveId" clId="{CF1FAA12-072C-4ED5-BA76-0FFFAEFDB88A}" dt="2025-09-18T02:54:09.106" v="10" actId="47"/>
+      <pc:sldChg chg="add">
+        <pc:chgData name="Zonghua Gu" userId="9a7e1853e1951ef5" providerId="LiveId" clId="{CF1FAA12-072C-4ED5-BA76-0FFFAEFDB88A}" dt="2025-10-21T20:14:50.830" v="33"/>
         <pc:sldMkLst>
           <pc:docMk/>
-          <pc:sldMk cId="3251034726" sldId="345"/>
-        </pc:sldMkLst>
-      </pc:sldChg>
-      <pc:sldChg chg="del">
-        <pc:chgData name="Zonghua Gu" userId="9a7e1853e1951ef5" providerId="LiveId" clId="{CF1FAA12-072C-4ED5-BA76-0FFFAEFDB88A}" dt="2025-09-18T02:54:09.106" v="10" actId="47"/>
-        <pc:sldMkLst>
-          <pc:docMk/>
-          <pc:sldMk cId="3132066556" sldId="346"/>
+          <pc:sldMk cId="2083494270" sldId="352"/>
         </pc:sldMkLst>
       </pc:sldChg>
       <pc:sldChg chg="add">
@@ -596,46 +265,11 @@
           <pc:sldMk cId="2623990252" sldId="383"/>
         </pc:sldMkLst>
       </pc:sldChg>
-      <pc:sldChg chg="add del">
-        <pc:chgData name="Zonghua Gu" userId="9a7e1853e1951ef5" providerId="LiveId" clId="{CF1FAA12-072C-4ED5-BA76-0FFFAEFDB88A}" dt="2025-09-18T02:55:09.669" v="16"/>
-        <pc:sldMkLst>
-          <pc:docMk/>
-          <pc:sldMk cId="2963767799" sldId="473"/>
-        </pc:sldMkLst>
-      </pc:sldChg>
-      <pc:sldChg chg="add">
-        <pc:chgData name="Zonghua Gu" userId="9a7e1853e1951ef5" providerId="LiveId" clId="{CF1FAA12-072C-4ED5-BA76-0FFFAEFDB88A}" dt="2025-09-18T02:54:13.121" v="12"/>
-        <pc:sldMkLst>
-          <pc:docMk/>
-          <pc:sldMk cId="2700446461" sldId="475"/>
-        </pc:sldMkLst>
-      </pc:sldChg>
-      <pc:sldChg chg="add">
-        <pc:chgData name="Zonghua Gu" userId="9a7e1853e1951ef5" providerId="LiveId" clId="{CF1FAA12-072C-4ED5-BA76-0FFFAEFDB88A}" dt="2025-09-18T21:31:24.471" v="17"/>
-        <pc:sldMkLst>
-          <pc:docMk/>
-          <pc:sldMk cId="3686948551" sldId="525"/>
-        </pc:sldMkLst>
-      </pc:sldChg>
-      <pc:sldChg chg="add del">
-        <pc:chgData name="Zonghua Gu" userId="9a7e1853e1951ef5" providerId="LiveId" clId="{CF1FAA12-072C-4ED5-BA76-0FFFAEFDB88A}" dt="2025-10-10T11:25:42.244" v="27" actId="47"/>
-        <pc:sldMkLst>
-          <pc:docMk/>
-          <pc:sldMk cId="4142840565" sldId="570"/>
-        </pc:sldMkLst>
-      </pc:sldChg>
       <pc:sldChg chg="add">
         <pc:chgData name="Zonghua Gu" userId="9a7e1853e1951ef5" providerId="LiveId" clId="{CF1FAA12-072C-4ED5-BA76-0FFFAEFDB88A}" dt="2025-09-26T22:04:43.298" v="20"/>
         <pc:sldMkLst>
           <pc:docMk/>
           <pc:sldMk cId="464193995" sldId="813"/>
-        </pc:sldMkLst>
-      </pc:sldChg>
-      <pc:sldChg chg="new del">
-        <pc:chgData name="Zonghua Gu" userId="9a7e1853e1951ef5" providerId="LiveId" clId="{CF1FAA12-072C-4ED5-BA76-0FFFAEFDB88A}" dt="2025-10-10T03:17:51.378" v="26" actId="47"/>
-        <pc:sldMkLst>
-          <pc:docMk/>
-          <pc:sldMk cId="242439082" sldId="814"/>
         </pc:sldMkLst>
       </pc:sldChg>
       <pc:sldMasterChg chg="delSldLayout">
@@ -644,14 +278,6 @@
           <pc:docMk/>
           <pc:sldMasterMk cId="0" sldId="2147483660"/>
         </pc:sldMasterMkLst>
-        <pc:sldLayoutChg chg="del">
-          <pc:chgData name="Zonghua Gu" userId="9a7e1853e1951ef5" providerId="LiveId" clId="{CF1FAA12-072C-4ED5-BA76-0FFFAEFDB88A}" dt="2025-10-10T11:25:42.244" v="27" actId="47"/>
-          <pc:sldLayoutMkLst>
-            <pc:docMk/>
-            <pc:sldMasterMk cId="0" sldId="2147483660"/>
-            <pc:sldLayoutMk cId="2809585536" sldId="2147483672"/>
-          </pc:sldLayoutMkLst>
-        </pc:sldLayoutChg>
       </pc:sldMasterChg>
     </pc:docChg>
   </pc:docChgLst>
@@ -741,7 +367,7 @@
             <a:fld id="{3AC3A17A-95E8-4381-B66B-5D6DE2B3048A}" type="datetimeFigureOut">
               <a:rPr lang="en-US" smtClean="0"/>
               <a:pPr/>
-              <a:t>10/10/2025</a:t>
+              <a:t>10/21/2025</a:t>
             </a:fld>
             <a:endParaRPr lang="en-US"/>
           </a:p>
@@ -1028,6 +654,105 @@
       </p:grpSpPr>
       <p:sp>
         <p:nvSpPr>
+          <p:cNvPr id="45058" name="Rectangle 2"/>
+          <p:cNvSpPr>
+            <a:spLocks noGrp="1" noChangeArrowheads="1"/>
+          </p:cNvSpPr>
+          <p:nvPr>
+            <p:ph type="body" idx="1"/>
+          </p:nvPr>
+        </p:nvSpPr>
+        <p:spPr>
+          <a:xfrm>
+            <a:off x="924810" y="4404346"/>
+            <a:ext cx="5100458" cy="4170576"/>
+          </a:xfrm>
+          <a:solidFill>
+            <a:srgbClr val="FFFFFF"/>
+          </a:solidFill>
+          <a:ln>
+            <a:solidFill>
+              <a:srgbClr val="000000"/>
+            </a:solidFill>
+          </a:ln>
+        </p:spPr>
+        <p:txBody>
+          <a:bodyPr lIns="95780" tIns="47890" rIns="95780" bIns="47890"/>
+          <a:lstStyle/>
+          <a:p>
+            <a:pPr marL="0" lvl="2" defTabSz="924879">
+              <a:defRPr/>
+            </a:pPr>
+            <a:r>
+              <a:rPr lang="en-US" dirty="0"/>
+              <a:t>Condition codes are simply a way of testing the ALU status flags. </a:t>
+            </a:r>
+          </a:p>
+          <a:p>
+            <a:pPr marL="0" lvl="2" defTabSz="924879">
+              <a:defRPr/>
+            </a:pPr>
+            <a:r>
+              <a:rPr lang="en-US" dirty="0"/>
+              <a:t>Note AL is the default and does not need to be specified </a:t>
+            </a:r>
+            <a:endParaRPr lang="en-GB" dirty="0"/>
+          </a:p>
+          <a:p>
+            <a:endParaRPr lang="en-US" dirty="0"/>
+          </a:p>
+        </p:txBody>
+      </p:sp>
+      <p:sp>
+        <p:nvSpPr>
+          <p:cNvPr id="45059" name="Rectangle 3"/>
+          <p:cNvSpPr>
+            <a:spLocks noGrp="1" noRot="1" noChangeAspect="1" noChangeArrowheads="1" noTextEdit="1"/>
+          </p:cNvSpPr>
+          <p:nvPr>
+            <p:ph type="sldImg"/>
+          </p:nvPr>
+        </p:nvSpPr>
+        <p:spPr>
+          <a:xfrm>
+            <a:off x="1279525" y="863600"/>
+            <a:ext cx="4403725" cy="3303588"/>
+          </a:xfrm>
+          <a:ln/>
+        </p:spPr>
+      </p:sp>
+    </p:spTree>
+    <p:extLst>
+      <p:ext uri="{BB962C8B-B14F-4D97-AF65-F5344CB8AC3E}">
+        <p14:creationId xmlns:p14="http://schemas.microsoft.com/office/powerpoint/2010/main" val="542877082"/>
+      </p:ext>
+    </p:extLst>
+  </p:cSld>
+  <p:clrMapOvr>
+    <a:masterClrMapping/>
+  </p:clrMapOvr>
+</p:notes>
+</file>
+
+<file path=ppt/notesSlides/notesSlide2.xml><?xml version="1.0" encoding="utf-8"?>
+<p:notes xmlns:a="http://schemas.openxmlformats.org/drawingml/2006/main" xmlns:r="http://schemas.openxmlformats.org/officeDocument/2006/relationships" xmlns:p="http://schemas.openxmlformats.org/presentationml/2006/main">
+  <p:cSld>
+    <p:spTree>
+      <p:nvGrpSpPr>
+        <p:cNvPr id="1" name=""/>
+        <p:cNvGrpSpPr/>
+        <p:nvPr/>
+      </p:nvGrpSpPr>
+      <p:grpSpPr>
+        <a:xfrm>
+          <a:off x="0" y="0"/>
+          <a:ext cx="0" cy="0"/>
+          <a:chOff x="0" y="0"/>
+          <a:chExt cx="0" cy="0"/>
+        </a:xfrm>
+      </p:grpSpPr>
+      <p:sp>
+        <p:nvSpPr>
           <p:cNvPr id="2" name="Slide Image Placeholder 1"/>
           <p:cNvSpPr>
             <a:spLocks noGrp="1" noRot="1" noChangeAspect="1"/>
@@ -1198,7 +923,7 @@
                 <a:tabLst/>
                 <a:defRPr/>
               </a:pPr>
-              <a:t>2</a:t>
+              <a:t>3</a:t>
             </a:fld>
             <a:endParaRPr kumimoji="0" lang="en-US" sz="1200" b="0" i="0" u="none" strike="noStrike" kern="1200" cap="none" spc="0" normalizeH="0" baseline="0" noProof="0">
               <a:ln>
@@ -1230,7 +955,7 @@
 </p:notes>
 </file>
 
-<file path=ppt/notesSlides/notesSlide2.xml><?xml version="1.0" encoding="utf-8"?>
+<file path=ppt/notesSlides/notesSlide3.xml><?xml version="1.0" encoding="utf-8"?>
 <p:notes xmlns:a="http://schemas.openxmlformats.org/drawingml/2006/main" xmlns:r="http://schemas.openxmlformats.org/officeDocument/2006/relationships" xmlns:p="http://schemas.openxmlformats.org/presentationml/2006/main">
   <p:cSld>
     <p:spTree>
@@ -1411,7 +1136,7 @@
 </p:notes>
 </file>
 
-<file path=ppt/notesSlides/notesSlide3.xml><?xml version="1.0" encoding="utf-8"?>
+<file path=ppt/notesSlides/notesSlide4.xml><?xml version="1.0" encoding="utf-8"?>
 <p:notes xmlns:a="http://schemas.openxmlformats.org/drawingml/2006/main" xmlns:r="http://schemas.openxmlformats.org/officeDocument/2006/relationships" xmlns:p="http://schemas.openxmlformats.org/presentationml/2006/main">
   <p:cSld>
     <p:spTree>
@@ -1591,7 +1316,7 @@
             <a:fld id="{2D71AD5F-E36F-46B9-A99B-7B025244359D}" type="slidenum">
               <a:rPr lang="en-US" smtClean="0"/>
               <a:pPr/>
-              <a:t>5</a:t>
+              <a:t>6</a:t>
             </a:fld>
             <a:endParaRPr lang="en-US"/>
           </a:p>
@@ -1610,7 +1335,7 @@
 </p:notes>
 </file>
 
-<file path=ppt/notesSlides/notesSlide4.xml><?xml version="1.0" encoding="utf-8"?>
+<file path=ppt/notesSlides/notesSlide5.xml><?xml version="1.0" encoding="utf-8"?>
 <p:notes xmlns:a="http://schemas.openxmlformats.org/drawingml/2006/main" xmlns:r="http://schemas.openxmlformats.org/officeDocument/2006/relationships" xmlns:p="http://schemas.openxmlformats.org/presentationml/2006/main">
   <p:cSld>
     <p:spTree>
@@ -1690,7 +1415,7 @@
 </p:notes>
 </file>
 
-<file path=ppt/notesSlides/notesSlide5.xml><?xml version="1.0" encoding="utf-8"?>
+<file path=ppt/notesSlides/notesSlide6.xml><?xml version="1.0" encoding="utf-8"?>
 <p:notes xmlns:a="http://schemas.openxmlformats.org/drawingml/2006/main" xmlns:r="http://schemas.openxmlformats.org/officeDocument/2006/relationships" xmlns:p="http://schemas.openxmlformats.org/presentationml/2006/main">
   <p:cSld>
     <p:spTree>
@@ -1761,7 +1486,7 @@
             <a:fld id="{61B2AF1D-1787-4F45-8D94-E7435950448C}" type="slidenum">
               <a:rPr lang="en-US" smtClean="0"/>
               <a:pPr/>
-              <a:t>22</a:t>
+              <a:t>23</a:t>
             </a:fld>
             <a:endParaRPr lang="en-US"/>
           </a:p>
@@ -1923,7 +1648,7 @@
             <a:fld id="{966FEA0E-C2DF-4252-97AD-54F2B7E07EAC}" type="datetime1">
               <a:rPr lang="en-US" smtClean="0"/>
               <a:pPr eaLnBrk="1" latinLnBrk="0" hangingPunct="1"/>
-              <a:t>10/10/2025</a:t>
+              <a:t>10/21/2025</a:t>
             </a:fld>
             <a:endParaRPr lang="en-US" sz="1600" dirty="0"/>
           </a:p>
@@ -2284,7 +2009,7 @@
             <a:fld id="{69EF9524-0CAA-4F98-BAC2-CE6B712F5E94}" type="datetime1">
               <a:rPr lang="en-US" smtClean="0"/>
               <a:pPr eaLnBrk="1" latinLnBrk="0" hangingPunct="1"/>
-              <a:t>10/10/2025</a:t>
+              <a:t>10/21/2025</a:t>
             </a:fld>
             <a:endParaRPr lang="en-US"/>
           </a:p>
@@ -2461,7 +2186,7 @@
             <a:fld id="{CB20516D-6F89-4C89-8307-32A716E22875}" type="datetime1">
               <a:rPr lang="en-US" smtClean="0"/>
               <a:pPr eaLnBrk="1" latinLnBrk="0" hangingPunct="1"/>
-              <a:t>10/10/2025</a:t>
+              <a:t>10/21/2025</a:t>
             </a:fld>
             <a:endParaRPr lang="en-US"/>
           </a:p>
@@ -2783,7 +2508,7 @@
             <a:fld id="{2E26774B-6488-4259-9342-6CBDB2BFD4E4}" type="datetime1">
               <a:rPr lang="en-US" smtClean="0"/>
               <a:pPr eaLnBrk="1" latinLnBrk="0" hangingPunct="1"/>
-              <a:t>10/10/2025</a:t>
+              <a:t>10/21/2025</a:t>
             </a:fld>
             <a:endParaRPr lang="en-US" sz="1200" dirty="0"/>
           </a:p>
@@ -3097,7 +2822,7 @@
             <a:fld id="{B0F52420-10F8-488E-969A-A9BE388BE9C4}" type="datetime1">
               <a:rPr lang="en-US" smtClean="0"/>
               <a:pPr eaLnBrk="1" latinLnBrk="0" hangingPunct="1"/>
-              <a:t>10/10/2025</a:t>
+              <a:t>10/21/2025</a:t>
             </a:fld>
             <a:endParaRPr lang="en-US" dirty="0"/>
           </a:p>
@@ -3373,7 +3098,7 @@
             <a:fld id="{96E96F24-58CF-47DA-907C-A9CD6353E425}" type="datetime1">
               <a:rPr lang="en-US" smtClean="0"/>
               <a:pPr eaLnBrk="1" latinLnBrk="0" hangingPunct="1"/>
-              <a:t>10/10/2025</a:t>
+              <a:t>10/21/2025</a:t>
             </a:fld>
             <a:endParaRPr lang="en-US" dirty="0"/>
           </a:p>
@@ -3600,7 +3325,7 @@
             <a:fld id="{53AE4463-726A-4A35-9F46-98893432A3F9}" type="datetime1">
               <a:rPr lang="en-US" smtClean="0"/>
               <a:pPr eaLnBrk="1" latinLnBrk="0" hangingPunct="1"/>
-              <a:t>10/10/2025</a:t>
+              <a:t>10/21/2025</a:t>
             </a:fld>
             <a:endParaRPr lang="en-US"/>
           </a:p>
@@ -3959,7 +3684,7 @@
             <a:fld id="{FDF404D0-E306-4E90-90E3-E44D26246FFC}" type="datetime1">
               <a:rPr lang="en-US" smtClean="0"/>
               <a:pPr eaLnBrk="1" latinLnBrk="0" hangingPunct="1"/>
-              <a:t>10/10/2025</a:t>
+              <a:t>10/21/2025</a:t>
             </a:fld>
             <a:endParaRPr lang="en-US"/>
           </a:p>
@@ -4198,7 +3923,7 @@
             <a:fld id="{1485DA14-76F0-4D93-83FB-7878C79A1986}" type="datetime1">
               <a:rPr lang="en-US" smtClean="0"/>
               <a:pPr eaLnBrk="1" latinLnBrk="0" hangingPunct="1"/>
-              <a:t>10/10/2025</a:t>
+              <a:t>10/21/2025</a:t>
             </a:fld>
             <a:endParaRPr lang="en-US"/>
           </a:p>
@@ -4346,7 +4071,7 @@
             <a:fld id="{A15E552D-49E1-496B-B79C-E100986B8B5F}" type="datetime1">
               <a:rPr lang="en-US" smtClean="0"/>
               <a:pPr eaLnBrk="1" latinLnBrk="0" hangingPunct="1"/>
-              <a:t>10/10/2025</a:t>
+              <a:t>10/21/2025</a:t>
             </a:fld>
             <a:endParaRPr lang="en-US"/>
           </a:p>
@@ -4630,7 +4355,7 @@
             <a:fld id="{CEC72505-1551-4A98-97CD-F520B07184AD}" type="datetime1">
               <a:rPr lang="en-US" smtClean="0"/>
               <a:pPr eaLnBrk="1" latinLnBrk="0" hangingPunct="1"/>
-              <a:t>10/10/2025</a:t>
+              <a:t>10/21/2025</a:t>
             </a:fld>
             <a:endParaRPr lang="en-US"/>
           </a:p>
@@ -4929,7 +4654,7 @@
             <a:fld id="{0CD88620-7329-4FC3-B65D-4EA691138F1B}" type="datetime1">
               <a:rPr lang="en-US" smtClean="0"/>
               <a:pPr eaLnBrk="1" latinLnBrk="0" hangingPunct="1"/>
-              <a:t>10/10/2025</a:t>
+              <a:t>10/21/2025</a:t>
             </a:fld>
             <a:endParaRPr lang="en-US" dirty="0"/>
           </a:p>
@@ -5216,7 +4941,7 @@
             <a:fld id="{7218F47B-BA16-4F20-B5BA-73F598D94B51}" type="datetime1">
               <a:rPr lang="en-US" smtClean="0"/>
               <a:pPr eaLnBrk="1" latinLnBrk="0" hangingPunct="1"/>
-              <a:t>10/10/2025</a:t>
+              <a:t>10/21/2025</a:t>
             </a:fld>
             <a:endParaRPr lang="en-US"/>
           </a:p>
@@ -5520,7 +5245,7 @@
             <a:fld id="{9B2E7711-0BE3-4AFC-959B-CB5C31A7AE48}" type="datetime1">
               <a:rPr lang="en-US" smtClean="0"/>
               <a:pPr eaLnBrk="1" latinLnBrk="0" hangingPunct="1"/>
-              <a:t>10/10/2025</a:t>
+              <a:t>10/21/2025</a:t>
             </a:fld>
             <a:endParaRPr lang="en-US"/>
           </a:p>
@@ -5702,7 +5427,7 @@
             <a:fld id="{825AAB62-A572-4E37-B772-B4A75ADE0B18}" type="datetime1">
               <a:rPr lang="en-US" smtClean="0"/>
               <a:pPr eaLnBrk="1" latinLnBrk="0" hangingPunct="1"/>
-              <a:t>10/10/2025</a:t>
+              <a:t>10/21/2025</a:t>
             </a:fld>
             <a:endParaRPr lang="en-US"/>
           </a:p>
@@ -5984,7 +5709,7 @@
               <a:pPr>
                 <a:defRPr/>
               </a:pPr>
-              <a:t>10/10/2025</a:t>
+              <a:t>10/21/2025</a:t>
             </a:fld>
             <a:endParaRPr lang="en-US"/>
           </a:p>
@@ -6195,7 +5920,7 @@
             <a:fld id="{0E46F3A1-5653-427D-9F78-56077401431A}" type="datetime1">
               <a:rPr lang="en-US" smtClean="0"/>
               <a:pPr eaLnBrk="1" latinLnBrk="0" hangingPunct="1"/>
-              <a:t>10/10/2025</a:t>
+              <a:t>10/21/2025</a:t>
             </a:fld>
             <a:endParaRPr lang="en-US" dirty="0"/>
           </a:p>
@@ -6417,7 +6142,7 @@
             <a:fld id="{CB67FC03-415A-45F0-B002-DF181377F7DC}" type="datetime1">
               <a:rPr lang="en-US" smtClean="0"/>
               <a:pPr eaLnBrk="1" latinLnBrk="0" hangingPunct="1"/>
-              <a:t>10/10/2025</a:t>
+              <a:t>10/21/2025</a:t>
             </a:fld>
             <a:endParaRPr lang="en-US"/>
           </a:p>
@@ -6771,7 +6496,7 @@
             <a:fld id="{1B6FC726-A0B4-4FC7-90F5-F17415A5C1A3}" type="datetime1">
               <a:rPr lang="en-US" smtClean="0"/>
               <a:pPr eaLnBrk="1" latinLnBrk="0" hangingPunct="1"/>
-              <a:t>10/10/2025</a:t>
+              <a:t>10/21/2025</a:t>
             </a:fld>
             <a:endParaRPr lang="en-US"/>
           </a:p>
@@ -7005,7 +6730,7 @@
             <a:fld id="{BE217211-C3F9-4892-9CC3-C7105638567D}" type="datetime1">
               <a:rPr lang="en-US" smtClean="0"/>
               <a:pPr eaLnBrk="1" latinLnBrk="0" hangingPunct="1"/>
-              <a:t>10/10/2025</a:t>
+              <a:t>10/21/2025</a:t>
             </a:fld>
             <a:endParaRPr lang="en-US"/>
           </a:p>
@@ -7148,7 +6873,7 @@
             <a:fld id="{BA713E6A-6B26-4373-A75B-EF395DC64F9E}" type="datetime1">
               <a:rPr lang="en-US" smtClean="0"/>
               <a:pPr eaLnBrk="1" latinLnBrk="0" hangingPunct="1"/>
-              <a:t>10/10/2025</a:t>
+              <a:t>10/21/2025</a:t>
             </a:fld>
             <a:endParaRPr lang="en-US"/>
           </a:p>
@@ -7427,7 +7152,7 @@
             <a:fld id="{57EB41EF-4260-415A-8DD6-FEDCC46E7EFC}" type="datetime1">
               <a:rPr lang="en-US" smtClean="0"/>
               <a:pPr eaLnBrk="1" latinLnBrk="0" hangingPunct="1"/>
-              <a:t>10/10/2025</a:t>
+              <a:t>10/21/2025</a:t>
             </a:fld>
             <a:endParaRPr lang="en-US"/>
           </a:p>
@@ -7836,7 +7561,7 @@
             <a:fld id="{6BDA80A0-06CC-4492-94A0-E8516751045E}" type="datetime1">
               <a:rPr lang="en-US" smtClean="0"/>
               <a:pPr eaLnBrk="1" latinLnBrk="0" hangingPunct="1"/>
-              <a:t>10/10/2025</a:t>
+              <a:t>10/21/2025</a:t>
             </a:fld>
             <a:endParaRPr lang="en-US"/>
           </a:p>
@@ -8175,7 +7900,7 @@
             <a:fld id="{A25B5B4B-57EE-495D-8E74-A657CFD8BB6C}" type="datetime1">
               <a:rPr lang="en-US" smtClean="0"/>
               <a:pPr eaLnBrk="1" latinLnBrk="0" hangingPunct="1"/>
-              <a:t>10/10/2025</a:t>
+              <a:t>10/21/2025</a:t>
             </a:fld>
             <a:endParaRPr lang="en-US" sz="1400" dirty="0">
               <a:solidFill>
@@ -8855,7 +8580,7 @@
             <a:fld id="{4F3CB514-9CA6-4E48-9463-A430D31CFDE3}" type="datetime1">
               <a:rPr lang="en-US" smtClean="0"/>
               <a:pPr eaLnBrk="1" latinLnBrk="0" hangingPunct="1"/>
-              <a:t>10/10/2025</a:t>
+              <a:t>10/21/2025</a:t>
             </a:fld>
             <a:endParaRPr lang="en-US" sz="1050" dirty="0">
               <a:solidFill>
@@ -9681,6 +9406,1851 @@
           <a:p>
             <a:r>
               <a:rPr lang="en-US" dirty="0"/>
+              <a:t>Logic View of Memory</a:t>
+            </a:r>
+          </a:p>
+        </p:txBody>
+      </p:sp>
+      <p:sp>
+        <p:nvSpPr>
+          <p:cNvPr id="4" name="Slide Number Placeholder 3"/>
+          <p:cNvSpPr>
+            <a:spLocks noGrp="1"/>
+          </p:cNvSpPr>
+          <p:nvPr>
+            <p:ph type="sldNum" sz="quarter" idx="12"/>
+          </p:nvPr>
+        </p:nvSpPr>
+        <p:spPr/>
+        <p:txBody>
+          <a:bodyPr/>
+          <a:lstStyle/>
+          <a:p>
+            <a:fld id="{EA7C8D44-3667-46F6-9772-CC52308E2A7F}" type="slidenum">
+              <a:rPr kumimoji="0" lang="en-US" smtClean="0"/>
+              <a:pPr/>
+              <a:t>10</a:t>
+            </a:fld>
+            <a:endParaRPr kumimoji="0" lang="en-US" dirty="0"/>
+          </a:p>
+        </p:txBody>
+      </p:sp>
+      <p:grpSp>
+        <p:nvGrpSpPr>
+          <p:cNvPr id="13" name="Group 42"/>
+          <p:cNvGrpSpPr/>
+          <p:nvPr/>
+        </p:nvGrpSpPr>
+        <p:grpSpPr>
+          <a:xfrm>
+            <a:off x="5943600" y="1307068"/>
+            <a:ext cx="2690286" cy="4803577"/>
+            <a:chOff x="5943600" y="1307068"/>
+            <a:chExt cx="2690286" cy="4803577"/>
+          </a:xfrm>
+        </p:grpSpPr>
+        <p:sp>
+          <p:nvSpPr>
+            <p:cNvPr id="5" name="Rectangle 4"/>
+            <p:cNvSpPr/>
+            <p:nvPr/>
+          </p:nvSpPr>
+          <p:spPr>
+            <a:xfrm>
+              <a:off x="7342456" y="2690336"/>
+              <a:ext cx="1289400" cy="307777"/>
+            </a:xfrm>
+            <a:prstGeom prst="rect">
+              <a:avLst/>
+            </a:prstGeom>
+            <a:ln>
+              <a:solidFill>
+                <a:schemeClr val="tx2"/>
+              </a:solidFill>
+            </a:ln>
+          </p:spPr>
+          <p:style>
+            <a:lnRef idx="2">
+              <a:schemeClr val="accent1"/>
+            </a:lnRef>
+            <a:fillRef idx="1">
+              <a:schemeClr val="lt1"/>
+            </a:fillRef>
+            <a:effectRef idx="0">
+              <a:schemeClr val="accent1"/>
+            </a:effectRef>
+            <a:fontRef idx="minor">
+              <a:schemeClr val="dk1"/>
+            </a:fontRef>
+          </p:style>
+          <p:txBody>
+            <a:bodyPr wrap="square">
+              <a:spAutoFit/>
+            </a:bodyPr>
+            <a:lstStyle/>
+            <a:p>
+              <a:pPr algn="ctr"/>
+              <a:r>
+                <a:rPr lang="en-US" dirty="0">
+                  <a:latin typeface="Consolas" panose="020B0609020204030204" pitchFamily="49" charset="0"/>
+                  <a:cs typeface="Consolas" panose="020B0609020204030204" pitchFamily="49" charset="0"/>
+                </a:rPr>
+                <a:t>01110010</a:t>
+              </a:r>
+              <a:endParaRPr lang="pl-PL" dirty="0">
+                <a:latin typeface="Consolas" panose="020B0609020204030204" pitchFamily="49" charset="0"/>
+                <a:cs typeface="Consolas" panose="020B0609020204030204" pitchFamily="49" charset="0"/>
+              </a:endParaRPr>
+            </a:p>
+          </p:txBody>
+        </p:sp>
+        <p:sp>
+          <p:nvSpPr>
+            <p:cNvPr id="6" name="Rectangle 5"/>
+            <p:cNvSpPr/>
+            <p:nvPr/>
+          </p:nvSpPr>
+          <p:spPr>
+            <a:xfrm>
+              <a:off x="7344136" y="3059222"/>
+              <a:ext cx="1289400" cy="307777"/>
+            </a:xfrm>
+            <a:prstGeom prst="rect">
+              <a:avLst/>
+            </a:prstGeom>
+            <a:ln>
+              <a:solidFill>
+                <a:schemeClr val="tx2"/>
+              </a:solidFill>
+            </a:ln>
+          </p:spPr>
+          <p:style>
+            <a:lnRef idx="2">
+              <a:schemeClr val="accent1"/>
+            </a:lnRef>
+            <a:fillRef idx="1">
+              <a:schemeClr val="lt1"/>
+            </a:fillRef>
+            <a:effectRef idx="0">
+              <a:schemeClr val="accent1"/>
+            </a:effectRef>
+            <a:fontRef idx="minor">
+              <a:schemeClr val="dk1"/>
+            </a:fontRef>
+          </p:style>
+          <p:txBody>
+            <a:bodyPr wrap="square">
+              <a:spAutoFit/>
+            </a:bodyPr>
+            <a:lstStyle/>
+            <a:p>
+              <a:pPr algn="ctr"/>
+              <a:r>
+                <a:rPr lang="en-US" dirty="0">
+                  <a:latin typeface="Consolas" panose="020B0609020204030204" pitchFamily="49" charset="0"/>
+                  <a:cs typeface="Consolas" panose="020B0609020204030204" pitchFamily="49" charset="0"/>
+                </a:rPr>
+                <a:t>00100101</a:t>
+              </a:r>
+              <a:endParaRPr lang="pl-PL" dirty="0">
+                <a:latin typeface="Consolas" panose="020B0609020204030204" pitchFamily="49" charset="0"/>
+                <a:cs typeface="Consolas" panose="020B0609020204030204" pitchFamily="49" charset="0"/>
+              </a:endParaRPr>
+            </a:p>
+          </p:txBody>
+        </p:sp>
+        <p:sp>
+          <p:nvSpPr>
+            <p:cNvPr id="7" name="Rectangle 6"/>
+            <p:cNvSpPr/>
+            <p:nvPr/>
+          </p:nvSpPr>
+          <p:spPr>
+            <a:xfrm>
+              <a:off x="7343951" y="3426936"/>
+              <a:ext cx="1289400" cy="307777"/>
+            </a:xfrm>
+            <a:prstGeom prst="rect">
+              <a:avLst/>
+            </a:prstGeom>
+            <a:ln>
+              <a:solidFill>
+                <a:schemeClr val="tx2"/>
+              </a:solidFill>
+            </a:ln>
+          </p:spPr>
+          <p:style>
+            <a:lnRef idx="2">
+              <a:schemeClr val="accent1"/>
+            </a:lnRef>
+            <a:fillRef idx="1">
+              <a:schemeClr val="lt1"/>
+            </a:fillRef>
+            <a:effectRef idx="0">
+              <a:schemeClr val="accent1"/>
+            </a:effectRef>
+            <a:fontRef idx="minor">
+              <a:schemeClr val="dk1"/>
+            </a:fontRef>
+          </p:style>
+          <p:txBody>
+            <a:bodyPr wrap="square">
+              <a:spAutoFit/>
+            </a:bodyPr>
+            <a:lstStyle/>
+            <a:p>
+              <a:pPr algn="ctr"/>
+              <a:r>
+                <a:rPr lang="en-US" dirty="0">
+                  <a:latin typeface="Consolas" panose="020B0609020204030204" pitchFamily="49" charset="0"/>
+                  <a:cs typeface="Consolas" panose="020B0609020204030204" pitchFamily="49" charset="0"/>
+                </a:rPr>
+                <a:t>11100010</a:t>
+              </a:r>
+              <a:endParaRPr lang="pl-PL" dirty="0">
+                <a:latin typeface="Consolas" panose="020B0609020204030204" pitchFamily="49" charset="0"/>
+                <a:cs typeface="Consolas" panose="020B0609020204030204" pitchFamily="49" charset="0"/>
+              </a:endParaRPr>
+            </a:p>
+          </p:txBody>
+        </p:sp>
+        <p:sp>
+          <p:nvSpPr>
+            <p:cNvPr id="8" name="Rectangle 7"/>
+            <p:cNvSpPr/>
+            <p:nvPr/>
+          </p:nvSpPr>
+          <p:spPr>
+            <a:xfrm>
+              <a:off x="7342456" y="3795822"/>
+              <a:ext cx="1289400" cy="307777"/>
+            </a:xfrm>
+            <a:prstGeom prst="rect">
+              <a:avLst/>
+            </a:prstGeom>
+            <a:ln>
+              <a:solidFill>
+                <a:schemeClr val="tx2"/>
+              </a:solidFill>
+            </a:ln>
+          </p:spPr>
+          <p:style>
+            <a:lnRef idx="2">
+              <a:schemeClr val="accent1"/>
+            </a:lnRef>
+            <a:fillRef idx="1">
+              <a:schemeClr val="lt1"/>
+            </a:fillRef>
+            <a:effectRef idx="0">
+              <a:schemeClr val="accent1"/>
+            </a:effectRef>
+            <a:fontRef idx="minor">
+              <a:schemeClr val="dk1"/>
+            </a:fontRef>
+          </p:style>
+          <p:txBody>
+            <a:bodyPr wrap="square">
+              <a:spAutoFit/>
+            </a:bodyPr>
+            <a:lstStyle/>
+            <a:p>
+              <a:pPr algn="ctr"/>
+              <a:r>
+                <a:rPr lang="en-US" dirty="0">
+                  <a:solidFill>
+                    <a:srgbClr val="000000"/>
+                  </a:solidFill>
+                  <a:latin typeface="Consolas" panose="020B0609020204030204" pitchFamily="49" charset="0"/>
+                  <a:cs typeface="Consolas" panose="020B0609020204030204" pitchFamily="49" charset="0"/>
+                </a:rPr>
+                <a:t>10000100</a:t>
+              </a:r>
+              <a:endParaRPr lang="pl-PL" dirty="0">
+                <a:solidFill>
+                  <a:srgbClr val="000000"/>
+                </a:solidFill>
+                <a:latin typeface="Consolas" panose="020B0609020204030204" pitchFamily="49" charset="0"/>
+                <a:cs typeface="Consolas" panose="020B0609020204030204" pitchFamily="49" charset="0"/>
+              </a:endParaRPr>
+            </a:p>
+          </p:txBody>
+        </p:sp>
+        <p:sp>
+          <p:nvSpPr>
+            <p:cNvPr id="9" name="Rectangle 8"/>
+            <p:cNvSpPr/>
+            <p:nvPr/>
+          </p:nvSpPr>
+          <p:spPr>
+            <a:xfrm>
+              <a:off x="7342806" y="4163536"/>
+              <a:ext cx="1289400" cy="307777"/>
+            </a:xfrm>
+            <a:prstGeom prst="rect">
+              <a:avLst/>
+            </a:prstGeom>
+            <a:ln>
+              <a:solidFill>
+                <a:schemeClr val="tx2"/>
+              </a:solidFill>
+            </a:ln>
+          </p:spPr>
+          <p:style>
+            <a:lnRef idx="2">
+              <a:schemeClr val="accent1"/>
+            </a:lnRef>
+            <a:fillRef idx="1">
+              <a:schemeClr val="lt1"/>
+            </a:fillRef>
+            <a:effectRef idx="0">
+              <a:schemeClr val="accent1"/>
+            </a:effectRef>
+            <a:fontRef idx="minor">
+              <a:schemeClr val="dk1"/>
+            </a:fontRef>
+          </p:style>
+          <p:txBody>
+            <a:bodyPr wrap="square">
+              <a:spAutoFit/>
+            </a:bodyPr>
+            <a:lstStyle/>
+            <a:p>
+              <a:pPr algn="ctr"/>
+              <a:r>
+                <a:rPr lang="en-US" dirty="0">
+                  <a:latin typeface="Consolas" panose="020B0609020204030204" pitchFamily="49" charset="0"/>
+                  <a:cs typeface="Consolas" panose="020B0609020204030204" pitchFamily="49" charset="0"/>
+                </a:rPr>
+                <a:t>01100001</a:t>
+              </a:r>
+              <a:endParaRPr lang="pl-PL" dirty="0">
+                <a:latin typeface="Consolas" panose="020B0609020204030204" pitchFamily="49" charset="0"/>
+                <a:cs typeface="Consolas" panose="020B0609020204030204" pitchFamily="49" charset="0"/>
+              </a:endParaRPr>
+            </a:p>
+          </p:txBody>
+        </p:sp>
+        <p:sp>
+          <p:nvSpPr>
+            <p:cNvPr id="10" name="Rectangle 9"/>
+            <p:cNvSpPr/>
+            <p:nvPr/>
+          </p:nvSpPr>
+          <p:spPr>
+            <a:xfrm>
+              <a:off x="7344486" y="4532422"/>
+              <a:ext cx="1289400" cy="307777"/>
+            </a:xfrm>
+            <a:prstGeom prst="rect">
+              <a:avLst/>
+            </a:prstGeom>
+            <a:ln>
+              <a:solidFill>
+                <a:schemeClr val="tx2"/>
+              </a:solidFill>
+            </a:ln>
+          </p:spPr>
+          <p:style>
+            <a:lnRef idx="2">
+              <a:schemeClr val="accent1"/>
+            </a:lnRef>
+            <a:fillRef idx="1">
+              <a:schemeClr val="lt1"/>
+            </a:fillRef>
+            <a:effectRef idx="0">
+              <a:schemeClr val="accent1"/>
+            </a:effectRef>
+            <a:fontRef idx="minor">
+              <a:schemeClr val="dk1"/>
+            </a:fontRef>
+          </p:style>
+          <p:txBody>
+            <a:bodyPr wrap="square">
+              <a:spAutoFit/>
+            </a:bodyPr>
+            <a:lstStyle/>
+            <a:p>
+              <a:pPr algn="ctr"/>
+              <a:r>
+                <a:rPr lang="en-US" dirty="0">
+                  <a:latin typeface="Consolas" panose="020B0609020204030204" pitchFamily="49" charset="0"/>
+                  <a:cs typeface="Consolas" panose="020B0609020204030204" pitchFamily="49" charset="0"/>
+                </a:rPr>
+                <a:t>10001111</a:t>
+              </a:r>
+              <a:endParaRPr lang="pl-PL" dirty="0">
+                <a:latin typeface="Consolas" panose="020B0609020204030204" pitchFamily="49" charset="0"/>
+                <a:cs typeface="Consolas" panose="020B0609020204030204" pitchFamily="49" charset="0"/>
+              </a:endParaRPr>
+            </a:p>
+          </p:txBody>
+        </p:sp>
+        <p:sp>
+          <p:nvSpPr>
+            <p:cNvPr id="11" name="Rectangle 10"/>
+            <p:cNvSpPr/>
+            <p:nvPr/>
+          </p:nvSpPr>
+          <p:spPr>
+            <a:xfrm>
+              <a:off x="7344301" y="4900136"/>
+              <a:ext cx="1289400" cy="307777"/>
+            </a:xfrm>
+            <a:prstGeom prst="rect">
+              <a:avLst/>
+            </a:prstGeom>
+            <a:ln>
+              <a:solidFill>
+                <a:schemeClr val="tx2"/>
+              </a:solidFill>
+            </a:ln>
+          </p:spPr>
+          <p:style>
+            <a:lnRef idx="2">
+              <a:schemeClr val="accent1"/>
+            </a:lnRef>
+            <a:fillRef idx="1">
+              <a:schemeClr val="lt1"/>
+            </a:fillRef>
+            <a:effectRef idx="0">
+              <a:schemeClr val="accent1"/>
+            </a:effectRef>
+            <a:fontRef idx="minor">
+              <a:schemeClr val="dk1"/>
+            </a:fontRef>
+          </p:style>
+          <p:txBody>
+            <a:bodyPr wrap="square">
+              <a:spAutoFit/>
+            </a:bodyPr>
+            <a:lstStyle/>
+            <a:p>
+              <a:pPr algn="ctr"/>
+              <a:r>
+                <a:rPr lang="en-US" dirty="0">
+                  <a:latin typeface="Consolas" panose="020B0609020204030204" pitchFamily="49" charset="0"/>
+                  <a:cs typeface="Consolas" panose="020B0609020204030204" pitchFamily="49" charset="0"/>
+                </a:rPr>
+                <a:t>00010010</a:t>
+              </a:r>
+              <a:endParaRPr lang="pl-PL" dirty="0">
+                <a:latin typeface="Consolas" panose="020B0609020204030204" pitchFamily="49" charset="0"/>
+                <a:cs typeface="Consolas" panose="020B0609020204030204" pitchFamily="49" charset="0"/>
+              </a:endParaRPr>
+            </a:p>
+          </p:txBody>
+        </p:sp>
+        <p:sp>
+          <p:nvSpPr>
+            <p:cNvPr id="12" name="Rectangle 11"/>
+            <p:cNvSpPr/>
+            <p:nvPr/>
+          </p:nvSpPr>
+          <p:spPr>
+            <a:xfrm>
+              <a:off x="7342806" y="5269022"/>
+              <a:ext cx="1289400" cy="307777"/>
+            </a:xfrm>
+            <a:prstGeom prst="rect">
+              <a:avLst/>
+            </a:prstGeom>
+            <a:ln>
+              <a:solidFill>
+                <a:schemeClr val="tx2"/>
+              </a:solidFill>
+            </a:ln>
+          </p:spPr>
+          <p:style>
+            <a:lnRef idx="2">
+              <a:schemeClr val="accent1"/>
+            </a:lnRef>
+            <a:fillRef idx="1">
+              <a:schemeClr val="lt1"/>
+            </a:fillRef>
+            <a:effectRef idx="0">
+              <a:schemeClr val="accent1"/>
+            </a:effectRef>
+            <a:fontRef idx="minor">
+              <a:schemeClr val="dk1"/>
+            </a:fontRef>
+          </p:style>
+          <p:txBody>
+            <a:bodyPr wrap="square">
+              <a:spAutoFit/>
+            </a:bodyPr>
+            <a:lstStyle/>
+            <a:p>
+              <a:pPr algn="ctr"/>
+              <a:r>
+                <a:rPr lang="en-US" dirty="0">
+                  <a:latin typeface="Consolas" panose="020B0609020204030204" pitchFamily="49" charset="0"/>
+                  <a:cs typeface="Consolas" panose="020B0609020204030204" pitchFamily="49" charset="0"/>
+                </a:rPr>
+                <a:t>10010100</a:t>
+              </a:r>
+              <a:endParaRPr lang="pl-PL" dirty="0">
+                <a:latin typeface="Consolas" panose="020B0609020204030204" pitchFamily="49" charset="0"/>
+                <a:cs typeface="Consolas" panose="020B0609020204030204" pitchFamily="49" charset="0"/>
+              </a:endParaRPr>
+            </a:p>
+          </p:txBody>
+        </p:sp>
+        <p:cxnSp>
+          <p:nvCxnSpPr>
+            <p:cNvPr id="14" name="Straight Connector 13"/>
+            <p:cNvCxnSpPr>
+              <a:stCxn id="31" idx="0"/>
+              <a:endCxn id="5" idx="1"/>
+            </p:cNvCxnSpPr>
+            <p:nvPr/>
+          </p:nvCxnSpPr>
+          <p:spPr>
+            <a:xfrm>
+              <a:off x="7342456" y="2434633"/>
+              <a:ext cx="0" cy="409592"/>
+            </a:xfrm>
+            <a:prstGeom prst="line">
+              <a:avLst/>
+            </a:prstGeom>
+            <a:ln>
+              <a:solidFill>
+                <a:schemeClr val="tx2">
+                  <a:lumMod val="75000"/>
+                </a:schemeClr>
+              </a:solidFill>
+            </a:ln>
+            <a:effectLst/>
+          </p:spPr>
+          <p:style>
+            <a:lnRef idx="2">
+              <a:schemeClr val="accent1"/>
+            </a:lnRef>
+            <a:fillRef idx="0">
+              <a:schemeClr val="accent1"/>
+            </a:fillRef>
+            <a:effectRef idx="1">
+              <a:schemeClr val="accent1"/>
+            </a:effectRef>
+            <a:fontRef idx="minor">
+              <a:schemeClr val="tx1"/>
+            </a:fontRef>
+          </p:style>
+        </p:cxnSp>
+        <p:cxnSp>
+          <p:nvCxnSpPr>
+            <p:cNvPr id="15" name="Straight Connector 14"/>
+            <p:cNvCxnSpPr>
+              <a:stCxn id="31" idx="3"/>
+              <a:endCxn id="5" idx="3"/>
+            </p:cNvCxnSpPr>
+            <p:nvPr/>
+          </p:nvCxnSpPr>
+          <p:spPr>
+            <a:xfrm>
+              <a:off x="8628331" y="2225175"/>
+              <a:ext cx="3525" cy="619050"/>
+            </a:xfrm>
+            <a:prstGeom prst="line">
+              <a:avLst/>
+            </a:prstGeom>
+            <a:ln>
+              <a:solidFill>
+                <a:schemeClr val="tx2">
+                  <a:lumMod val="75000"/>
+                </a:schemeClr>
+              </a:solidFill>
+            </a:ln>
+            <a:effectLst/>
+          </p:spPr>
+          <p:style>
+            <a:lnRef idx="2">
+              <a:schemeClr val="accent1"/>
+            </a:lnRef>
+            <a:fillRef idx="0">
+              <a:schemeClr val="accent1"/>
+            </a:fillRef>
+            <a:effectRef idx="1">
+              <a:schemeClr val="accent1"/>
+            </a:effectRef>
+            <a:fontRef idx="minor">
+              <a:schemeClr val="tx1"/>
+            </a:fontRef>
+          </p:style>
+        </p:cxnSp>
+        <p:cxnSp>
+          <p:nvCxnSpPr>
+            <p:cNvPr id="16" name="Straight Connector 15"/>
+            <p:cNvCxnSpPr>
+              <a:stCxn id="12" idx="1"/>
+              <a:endCxn id="34" idx="0"/>
+            </p:cNvCxnSpPr>
+            <p:nvPr/>
+          </p:nvCxnSpPr>
+          <p:spPr>
+            <a:xfrm flipH="1">
+              <a:off x="7342456" y="5422911"/>
+              <a:ext cx="350" cy="604790"/>
+            </a:xfrm>
+            <a:prstGeom prst="line">
+              <a:avLst/>
+            </a:prstGeom>
+            <a:ln>
+              <a:solidFill>
+                <a:schemeClr val="tx2">
+                  <a:lumMod val="75000"/>
+                </a:schemeClr>
+              </a:solidFill>
+            </a:ln>
+            <a:effectLst/>
+          </p:spPr>
+          <p:style>
+            <a:lnRef idx="2">
+              <a:schemeClr val="accent1"/>
+            </a:lnRef>
+            <a:fillRef idx="0">
+              <a:schemeClr val="accent1"/>
+            </a:fillRef>
+            <a:effectRef idx="1">
+              <a:schemeClr val="accent1"/>
+            </a:effectRef>
+            <a:fontRef idx="minor">
+              <a:schemeClr val="tx1"/>
+            </a:fontRef>
+          </p:style>
+        </p:cxnSp>
+        <p:cxnSp>
+          <p:nvCxnSpPr>
+            <p:cNvPr id="17" name="Straight Connector 16"/>
+            <p:cNvCxnSpPr>
+              <a:stCxn id="12" idx="3"/>
+              <a:endCxn id="34" idx="3"/>
+            </p:cNvCxnSpPr>
+            <p:nvPr/>
+          </p:nvCxnSpPr>
+          <p:spPr>
+            <a:xfrm flipH="1">
+              <a:off x="8628331" y="5422911"/>
+              <a:ext cx="3875" cy="395332"/>
+            </a:xfrm>
+            <a:prstGeom prst="line">
+              <a:avLst/>
+            </a:prstGeom>
+            <a:ln>
+              <a:solidFill>
+                <a:schemeClr val="tx2">
+                  <a:lumMod val="75000"/>
+                </a:schemeClr>
+              </a:solidFill>
+            </a:ln>
+            <a:effectLst/>
+          </p:spPr>
+          <p:style>
+            <a:lnRef idx="2">
+              <a:schemeClr val="accent1"/>
+            </a:lnRef>
+            <a:fillRef idx="0">
+              <a:schemeClr val="accent1"/>
+            </a:fillRef>
+            <a:effectRef idx="1">
+              <a:schemeClr val="accent1"/>
+            </a:effectRef>
+            <a:fontRef idx="minor">
+              <a:schemeClr val="tx1"/>
+            </a:fontRef>
+          </p:style>
+        </p:cxnSp>
+        <p:sp>
+          <p:nvSpPr>
+            <p:cNvPr id="31" name="Freeform 30"/>
+            <p:cNvSpPr/>
+            <p:nvPr/>
+          </p:nvSpPr>
+          <p:spPr>
+            <a:xfrm>
+              <a:off x="7342456" y="2221468"/>
+              <a:ext cx="1285875" cy="213783"/>
+            </a:xfrm>
+            <a:custGeom>
+              <a:avLst/>
+              <a:gdLst>
+                <a:gd name="connsiteX0" fmla="*/ 0 w 1285875"/>
+                <a:gd name="connsiteY0" fmla="*/ 365125 h 366183"/>
+                <a:gd name="connsiteX1" fmla="*/ 428625 w 1285875"/>
+                <a:gd name="connsiteY1" fmla="*/ 0 h 366183"/>
+                <a:gd name="connsiteX2" fmla="*/ 885825 w 1285875"/>
+                <a:gd name="connsiteY2" fmla="*/ 365125 h 366183"/>
+                <a:gd name="connsiteX3" fmla="*/ 1285875 w 1285875"/>
+                <a:gd name="connsiteY3" fmla="*/ 6350 h 366183"/>
+              </a:gdLst>
+              <a:ahLst/>
+              <a:cxnLst>
+                <a:cxn ang="0">
+                  <a:pos x="connsiteX0" y="connsiteY0"/>
+                </a:cxn>
+                <a:cxn ang="0">
+                  <a:pos x="connsiteX1" y="connsiteY1"/>
+                </a:cxn>
+                <a:cxn ang="0">
+                  <a:pos x="connsiteX2" y="connsiteY2"/>
+                </a:cxn>
+                <a:cxn ang="0">
+                  <a:pos x="connsiteX3" y="connsiteY3"/>
+                </a:cxn>
+              </a:cxnLst>
+              <a:rect l="l" t="t" r="r" b="b"/>
+              <a:pathLst>
+                <a:path w="1285875" h="366183">
+                  <a:moveTo>
+                    <a:pt x="0" y="365125"/>
+                  </a:moveTo>
+                  <a:cubicBezTo>
+                    <a:pt x="140494" y="182562"/>
+                    <a:pt x="280988" y="0"/>
+                    <a:pt x="428625" y="0"/>
+                  </a:cubicBezTo>
+                  <a:cubicBezTo>
+                    <a:pt x="576262" y="0"/>
+                    <a:pt x="742950" y="364067"/>
+                    <a:pt x="885825" y="365125"/>
+                  </a:cubicBezTo>
+                  <a:cubicBezTo>
+                    <a:pt x="1028700" y="366183"/>
+                    <a:pt x="1233488" y="58737"/>
+                    <a:pt x="1285875" y="6350"/>
+                  </a:cubicBezTo>
+                </a:path>
+              </a:pathLst>
+            </a:custGeom>
+            <a:ln>
+              <a:solidFill>
+                <a:schemeClr val="tx2">
+                  <a:lumMod val="75000"/>
+                </a:schemeClr>
+              </a:solidFill>
+            </a:ln>
+            <a:effectLst/>
+          </p:spPr>
+          <p:style>
+            <a:lnRef idx="2">
+              <a:schemeClr val="accent1"/>
+            </a:lnRef>
+            <a:fillRef idx="0">
+              <a:schemeClr val="accent1"/>
+            </a:fillRef>
+            <a:effectRef idx="1">
+              <a:schemeClr val="accent1"/>
+            </a:effectRef>
+            <a:fontRef idx="minor">
+              <a:schemeClr val="tx1"/>
+            </a:fontRef>
+          </p:style>
+          <p:txBody>
+            <a:bodyPr rtlCol="0" anchor="ctr"/>
+            <a:lstStyle/>
+            <a:p>
+              <a:pPr algn="ctr"/>
+              <a:endParaRPr lang="en-US">
+                <a:latin typeface="Consolas" panose="020B0609020204030204" pitchFamily="49" charset="0"/>
+                <a:cs typeface="Consolas" panose="020B0609020204030204" pitchFamily="49" charset="0"/>
+              </a:endParaRPr>
+            </a:p>
+          </p:txBody>
+        </p:sp>
+        <p:sp>
+          <p:nvSpPr>
+            <p:cNvPr id="34" name="Freeform 33"/>
+            <p:cNvSpPr/>
+            <p:nvPr/>
+          </p:nvSpPr>
+          <p:spPr>
+            <a:xfrm>
+              <a:off x="7342456" y="5814536"/>
+              <a:ext cx="1285875" cy="213783"/>
+            </a:xfrm>
+            <a:custGeom>
+              <a:avLst/>
+              <a:gdLst>
+                <a:gd name="connsiteX0" fmla="*/ 0 w 1285875"/>
+                <a:gd name="connsiteY0" fmla="*/ 365125 h 366183"/>
+                <a:gd name="connsiteX1" fmla="*/ 428625 w 1285875"/>
+                <a:gd name="connsiteY1" fmla="*/ 0 h 366183"/>
+                <a:gd name="connsiteX2" fmla="*/ 885825 w 1285875"/>
+                <a:gd name="connsiteY2" fmla="*/ 365125 h 366183"/>
+                <a:gd name="connsiteX3" fmla="*/ 1285875 w 1285875"/>
+                <a:gd name="connsiteY3" fmla="*/ 6350 h 366183"/>
+              </a:gdLst>
+              <a:ahLst/>
+              <a:cxnLst>
+                <a:cxn ang="0">
+                  <a:pos x="connsiteX0" y="connsiteY0"/>
+                </a:cxn>
+                <a:cxn ang="0">
+                  <a:pos x="connsiteX1" y="connsiteY1"/>
+                </a:cxn>
+                <a:cxn ang="0">
+                  <a:pos x="connsiteX2" y="connsiteY2"/>
+                </a:cxn>
+                <a:cxn ang="0">
+                  <a:pos x="connsiteX3" y="connsiteY3"/>
+                </a:cxn>
+              </a:cxnLst>
+              <a:rect l="l" t="t" r="r" b="b"/>
+              <a:pathLst>
+                <a:path w="1285875" h="366183">
+                  <a:moveTo>
+                    <a:pt x="0" y="365125"/>
+                  </a:moveTo>
+                  <a:cubicBezTo>
+                    <a:pt x="140494" y="182562"/>
+                    <a:pt x="280988" y="0"/>
+                    <a:pt x="428625" y="0"/>
+                  </a:cubicBezTo>
+                  <a:cubicBezTo>
+                    <a:pt x="576262" y="0"/>
+                    <a:pt x="742950" y="364067"/>
+                    <a:pt x="885825" y="365125"/>
+                  </a:cubicBezTo>
+                  <a:cubicBezTo>
+                    <a:pt x="1028700" y="366183"/>
+                    <a:pt x="1233488" y="58737"/>
+                    <a:pt x="1285875" y="6350"/>
+                  </a:cubicBezTo>
+                </a:path>
+              </a:pathLst>
+            </a:custGeom>
+            <a:ln>
+              <a:solidFill>
+                <a:schemeClr val="tx2">
+                  <a:lumMod val="75000"/>
+                </a:schemeClr>
+              </a:solidFill>
+            </a:ln>
+            <a:effectLst/>
+          </p:spPr>
+          <p:style>
+            <a:lnRef idx="2">
+              <a:schemeClr val="accent1"/>
+            </a:lnRef>
+            <a:fillRef idx="0">
+              <a:schemeClr val="accent1"/>
+            </a:fillRef>
+            <a:effectRef idx="1">
+              <a:schemeClr val="accent1"/>
+            </a:effectRef>
+            <a:fontRef idx="minor">
+              <a:schemeClr val="tx1"/>
+            </a:fontRef>
+          </p:style>
+          <p:txBody>
+            <a:bodyPr rtlCol="0" anchor="ctr"/>
+            <a:lstStyle/>
+            <a:p>
+              <a:pPr algn="ctr"/>
+              <a:endParaRPr lang="en-US">
+                <a:latin typeface="Consolas" panose="020B0609020204030204" pitchFamily="49" charset="0"/>
+                <a:cs typeface="Consolas" panose="020B0609020204030204" pitchFamily="49" charset="0"/>
+              </a:endParaRPr>
+            </a:p>
+          </p:txBody>
+        </p:sp>
+        <p:sp>
+          <p:nvSpPr>
+            <p:cNvPr id="41" name="TextBox 40"/>
+            <p:cNvSpPr txBox="1"/>
+            <p:nvPr/>
+          </p:nvSpPr>
+          <p:spPr>
+            <a:xfrm>
+              <a:off x="5943600" y="5802868"/>
+              <a:ext cx="1277914" cy="307777"/>
+            </a:xfrm>
+            <a:prstGeom prst="rect">
+              <a:avLst/>
+            </a:prstGeom>
+            <a:noFill/>
+          </p:spPr>
+          <p:txBody>
+            <a:bodyPr wrap="none" rtlCol="0">
+              <a:spAutoFit/>
+            </a:bodyPr>
+            <a:lstStyle/>
+            <a:p>
+              <a:r>
+                <a:rPr lang="en-US" dirty="0">
+                  <a:latin typeface="Consolas" panose="020B0609020204030204" pitchFamily="49" charset="0"/>
+                  <a:cs typeface="Consolas" panose="020B0609020204030204" pitchFamily="49" charset="0"/>
+                </a:rPr>
+                <a:t>Low Address</a:t>
+              </a:r>
+            </a:p>
+          </p:txBody>
+        </p:sp>
+        <p:sp>
+          <p:nvSpPr>
+            <p:cNvPr id="42" name="TextBox 41"/>
+            <p:cNvSpPr txBox="1"/>
+            <p:nvPr/>
+          </p:nvSpPr>
+          <p:spPr>
+            <a:xfrm>
+              <a:off x="5943600" y="2145268"/>
+              <a:ext cx="1377300" cy="307777"/>
+            </a:xfrm>
+            <a:prstGeom prst="rect">
+              <a:avLst/>
+            </a:prstGeom>
+            <a:noFill/>
+          </p:spPr>
+          <p:txBody>
+            <a:bodyPr wrap="none" rtlCol="0">
+              <a:spAutoFit/>
+            </a:bodyPr>
+            <a:lstStyle/>
+            <a:p>
+              <a:r>
+                <a:rPr lang="en-US" dirty="0">
+                  <a:latin typeface="Consolas" panose="020B0609020204030204" pitchFamily="49" charset="0"/>
+                  <a:cs typeface="Consolas" panose="020B0609020204030204" pitchFamily="49" charset="0"/>
+                </a:rPr>
+                <a:t>High Address</a:t>
+              </a:r>
+            </a:p>
+          </p:txBody>
+        </p:sp>
+        <p:sp>
+          <p:nvSpPr>
+            <p:cNvPr id="45" name="Rectangle 44"/>
+            <p:cNvSpPr/>
+            <p:nvPr/>
+          </p:nvSpPr>
+          <p:spPr>
+            <a:xfrm>
+              <a:off x="5943600" y="2690336"/>
+              <a:ext cx="1365600" cy="307777"/>
+            </a:xfrm>
+            <a:prstGeom prst="rect">
+              <a:avLst/>
+            </a:prstGeom>
+            <a:ln>
+              <a:noFill/>
+            </a:ln>
+          </p:spPr>
+          <p:style>
+            <a:lnRef idx="2">
+              <a:schemeClr val="accent1"/>
+            </a:lnRef>
+            <a:fillRef idx="1">
+              <a:schemeClr val="lt1"/>
+            </a:fillRef>
+            <a:effectRef idx="0">
+              <a:schemeClr val="accent1"/>
+            </a:effectRef>
+            <a:fontRef idx="minor">
+              <a:schemeClr val="dk1"/>
+            </a:fontRef>
+          </p:style>
+          <p:txBody>
+            <a:bodyPr wrap="square">
+              <a:spAutoFit/>
+            </a:bodyPr>
+            <a:lstStyle/>
+            <a:p>
+              <a:pPr algn="ctr"/>
+              <a:r>
+                <a:rPr lang="en-US" dirty="0" err="1">
+                  <a:latin typeface="Consolas" panose="020B0609020204030204" pitchFamily="49" charset="0"/>
+                  <a:cs typeface="Consolas" panose="020B0609020204030204" pitchFamily="49" charset="0"/>
+                </a:rPr>
+                <a:t>0x20000007</a:t>
+              </a:r>
+              <a:endParaRPr lang="pl-PL" dirty="0">
+                <a:latin typeface="Consolas" panose="020B0609020204030204" pitchFamily="49" charset="0"/>
+                <a:cs typeface="Consolas" panose="020B0609020204030204" pitchFamily="49" charset="0"/>
+              </a:endParaRPr>
+            </a:p>
+          </p:txBody>
+        </p:sp>
+        <p:sp>
+          <p:nvSpPr>
+            <p:cNvPr id="46" name="Rectangle 45"/>
+            <p:cNvSpPr/>
+            <p:nvPr/>
+          </p:nvSpPr>
+          <p:spPr>
+            <a:xfrm>
+              <a:off x="5945280" y="3059222"/>
+              <a:ext cx="1365600" cy="307777"/>
+            </a:xfrm>
+            <a:prstGeom prst="rect">
+              <a:avLst/>
+            </a:prstGeom>
+            <a:ln>
+              <a:noFill/>
+            </a:ln>
+          </p:spPr>
+          <p:style>
+            <a:lnRef idx="2">
+              <a:schemeClr val="accent1"/>
+            </a:lnRef>
+            <a:fillRef idx="1">
+              <a:schemeClr val="lt1"/>
+            </a:fillRef>
+            <a:effectRef idx="0">
+              <a:schemeClr val="accent1"/>
+            </a:effectRef>
+            <a:fontRef idx="minor">
+              <a:schemeClr val="dk1"/>
+            </a:fontRef>
+          </p:style>
+          <p:txBody>
+            <a:bodyPr wrap="square">
+              <a:spAutoFit/>
+            </a:bodyPr>
+            <a:lstStyle/>
+            <a:p>
+              <a:pPr algn="ctr"/>
+              <a:r>
+                <a:rPr lang="en-US" dirty="0" err="1">
+                  <a:latin typeface="Consolas" panose="020B0609020204030204" pitchFamily="49" charset="0"/>
+                  <a:cs typeface="Consolas" panose="020B0609020204030204" pitchFamily="49" charset="0"/>
+                </a:rPr>
+                <a:t>0x20000006</a:t>
+              </a:r>
+              <a:endParaRPr lang="pl-PL" dirty="0">
+                <a:latin typeface="Consolas" panose="020B0609020204030204" pitchFamily="49" charset="0"/>
+                <a:cs typeface="Consolas" panose="020B0609020204030204" pitchFamily="49" charset="0"/>
+              </a:endParaRPr>
+            </a:p>
+          </p:txBody>
+        </p:sp>
+        <p:sp>
+          <p:nvSpPr>
+            <p:cNvPr id="47" name="Rectangle 46"/>
+            <p:cNvSpPr/>
+            <p:nvPr/>
+          </p:nvSpPr>
+          <p:spPr>
+            <a:xfrm>
+              <a:off x="5945095" y="3426936"/>
+              <a:ext cx="1365600" cy="307777"/>
+            </a:xfrm>
+            <a:prstGeom prst="rect">
+              <a:avLst/>
+            </a:prstGeom>
+            <a:ln>
+              <a:noFill/>
+            </a:ln>
+          </p:spPr>
+          <p:style>
+            <a:lnRef idx="2">
+              <a:schemeClr val="accent1"/>
+            </a:lnRef>
+            <a:fillRef idx="1">
+              <a:schemeClr val="lt1"/>
+            </a:fillRef>
+            <a:effectRef idx="0">
+              <a:schemeClr val="accent1"/>
+            </a:effectRef>
+            <a:fontRef idx="minor">
+              <a:schemeClr val="dk1"/>
+            </a:fontRef>
+          </p:style>
+          <p:txBody>
+            <a:bodyPr wrap="square">
+              <a:spAutoFit/>
+            </a:bodyPr>
+            <a:lstStyle/>
+            <a:p>
+              <a:pPr algn="ctr"/>
+              <a:r>
+                <a:rPr lang="en-US" dirty="0" err="1">
+                  <a:latin typeface="Consolas" panose="020B0609020204030204" pitchFamily="49" charset="0"/>
+                  <a:cs typeface="Consolas" panose="020B0609020204030204" pitchFamily="49" charset="0"/>
+                </a:rPr>
+                <a:t>0x20000005</a:t>
+              </a:r>
+              <a:endParaRPr lang="pl-PL" dirty="0">
+                <a:latin typeface="Consolas" panose="020B0609020204030204" pitchFamily="49" charset="0"/>
+                <a:cs typeface="Consolas" panose="020B0609020204030204" pitchFamily="49" charset="0"/>
+              </a:endParaRPr>
+            </a:p>
+          </p:txBody>
+        </p:sp>
+        <p:sp>
+          <p:nvSpPr>
+            <p:cNvPr id="48" name="Rectangle 47"/>
+            <p:cNvSpPr/>
+            <p:nvPr/>
+          </p:nvSpPr>
+          <p:spPr>
+            <a:xfrm>
+              <a:off x="5943600" y="3795822"/>
+              <a:ext cx="1365600" cy="307777"/>
+            </a:xfrm>
+            <a:prstGeom prst="rect">
+              <a:avLst/>
+            </a:prstGeom>
+            <a:ln>
+              <a:noFill/>
+            </a:ln>
+          </p:spPr>
+          <p:style>
+            <a:lnRef idx="2">
+              <a:schemeClr val="accent1"/>
+            </a:lnRef>
+            <a:fillRef idx="1">
+              <a:schemeClr val="lt1"/>
+            </a:fillRef>
+            <a:effectRef idx="0">
+              <a:schemeClr val="accent1"/>
+            </a:effectRef>
+            <a:fontRef idx="minor">
+              <a:schemeClr val="dk1"/>
+            </a:fontRef>
+          </p:style>
+          <p:txBody>
+            <a:bodyPr wrap="square">
+              <a:spAutoFit/>
+            </a:bodyPr>
+            <a:lstStyle/>
+            <a:p>
+              <a:pPr algn="ctr"/>
+              <a:r>
+                <a:rPr lang="en-US" dirty="0" err="1">
+                  <a:solidFill>
+                    <a:schemeClr val="tx1"/>
+                  </a:solidFill>
+                  <a:latin typeface="Consolas" panose="020B0609020204030204" pitchFamily="49" charset="0"/>
+                  <a:cs typeface="Consolas" panose="020B0609020204030204" pitchFamily="49" charset="0"/>
+                </a:rPr>
+                <a:t>0x20000004</a:t>
+              </a:r>
+              <a:endParaRPr lang="pl-PL" dirty="0">
+                <a:solidFill>
+                  <a:schemeClr val="tx1"/>
+                </a:solidFill>
+                <a:latin typeface="Consolas" panose="020B0609020204030204" pitchFamily="49" charset="0"/>
+                <a:cs typeface="Consolas" panose="020B0609020204030204" pitchFamily="49" charset="0"/>
+              </a:endParaRPr>
+            </a:p>
+          </p:txBody>
+        </p:sp>
+        <p:sp>
+          <p:nvSpPr>
+            <p:cNvPr id="49" name="Rectangle 48"/>
+            <p:cNvSpPr/>
+            <p:nvPr/>
+          </p:nvSpPr>
+          <p:spPr>
+            <a:xfrm>
+              <a:off x="5943950" y="4163536"/>
+              <a:ext cx="1365600" cy="307777"/>
+            </a:xfrm>
+            <a:prstGeom prst="rect">
+              <a:avLst/>
+            </a:prstGeom>
+            <a:ln>
+              <a:noFill/>
+            </a:ln>
+          </p:spPr>
+          <p:style>
+            <a:lnRef idx="2">
+              <a:schemeClr val="accent1"/>
+            </a:lnRef>
+            <a:fillRef idx="1">
+              <a:schemeClr val="lt1"/>
+            </a:fillRef>
+            <a:effectRef idx="0">
+              <a:schemeClr val="accent1"/>
+            </a:effectRef>
+            <a:fontRef idx="minor">
+              <a:schemeClr val="dk1"/>
+            </a:fontRef>
+          </p:style>
+          <p:txBody>
+            <a:bodyPr wrap="square">
+              <a:spAutoFit/>
+            </a:bodyPr>
+            <a:lstStyle/>
+            <a:p>
+              <a:pPr algn="ctr"/>
+              <a:r>
+                <a:rPr lang="en-US" dirty="0" err="1">
+                  <a:latin typeface="Consolas" panose="020B0609020204030204" pitchFamily="49" charset="0"/>
+                  <a:cs typeface="Consolas" panose="020B0609020204030204" pitchFamily="49" charset="0"/>
+                </a:rPr>
+                <a:t>0x20000003</a:t>
+              </a:r>
+              <a:endParaRPr lang="pl-PL" dirty="0">
+                <a:latin typeface="Consolas" panose="020B0609020204030204" pitchFamily="49" charset="0"/>
+                <a:cs typeface="Consolas" panose="020B0609020204030204" pitchFamily="49" charset="0"/>
+              </a:endParaRPr>
+            </a:p>
+          </p:txBody>
+        </p:sp>
+        <p:sp>
+          <p:nvSpPr>
+            <p:cNvPr id="50" name="Rectangle 49"/>
+            <p:cNvSpPr/>
+            <p:nvPr/>
+          </p:nvSpPr>
+          <p:spPr>
+            <a:xfrm>
+              <a:off x="5945630" y="4532422"/>
+              <a:ext cx="1365600" cy="307777"/>
+            </a:xfrm>
+            <a:prstGeom prst="rect">
+              <a:avLst/>
+            </a:prstGeom>
+            <a:ln>
+              <a:noFill/>
+            </a:ln>
+          </p:spPr>
+          <p:style>
+            <a:lnRef idx="2">
+              <a:schemeClr val="accent1"/>
+            </a:lnRef>
+            <a:fillRef idx="1">
+              <a:schemeClr val="lt1"/>
+            </a:fillRef>
+            <a:effectRef idx="0">
+              <a:schemeClr val="accent1"/>
+            </a:effectRef>
+            <a:fontRef idx="minor">
+              <a:schemeClr val="dk1"/>
+            </a:fontRef>
+          </p:style>
+          <p:txBody>
+            <a:bodyPr wrap="square">
+              <a:spAutoFit/>
+            </a:bodyPr>
+            <a:lstStyle/>
+            <a:p>
+              <a:pPr algn="ctr"/>
+              <a:r>
+                <a:rPr lang="en-US" dirty="0" err="1">
+                  <a:latin typeface="Consolas" panose="020B0609020204030204" pitchFamily="49" charset="0"/>
+                  <a:cs typeface="Consolas" panose="020B0609020204030204" pitchFamily="49" charset="0"/>
+                </a:rPr>
+                <a:t>0x20000002</a:t>
+              </a:r>
+              <a:endParaRPr lang="pl-PL" dirty="0">
+                <a:latin typeface="Consolas" panose="020B0609020204030204" pitchFamily="49" charset="0"/>
+                <a:cs typeface="Consolas" panose="020B0609020204030204" pitchFamily="49" charset="0"/>
+              </a:endParaRPr>
+            </a:p>
+          </p:txBody>
+        </p:sp>
+        <p:sp>
+          <p:nvSpPr>
+            <p:cNvPr id="51" name="Rectangle 50"/>
+            <p:cNvSpPr/>
+            <p:nvPr/>
+          </p:nvSpPr>
+          <p:spPr>
+            <a:xfrm>
+              <a:off x="5945445" y="4900136"/>
+              <a:ext cx="1365600" cy="307777"/>
+            </a:xfrm>
+            <a:prstGeom prst="rect">
+              <a:avLst/>
+            </a:prstGeom>
+            <a:ln>
+              <a:noFill/>
+            </a:ln>
+          </p:spPr>
+          <p:style>
+            <a:lnRef idx="2">
+              <a:schemeClr val="accent1"/>
+            </a:lnRef>
+            <a:fillRef idx="1">
+              <a:schemeClr val="lt1"/>
+            </a:fillRef>
+            <a:effectRef idx="0">
+              <a:schemeClr val="accent1"/>
+            </a:effectRef>
+            <a:fontRef idx="minor">
+              <a:schemeClr val="dk1"/>
+            </a:fontRef>
+          </p:style>
+          <p:txBody>
+            <a:bodyPr wrap="square">
+              <a:spAutoFit/>
+            </a:bodyPr>
+            <a:lstStyle/>
+            <a:p>
+              <a:pPr algn="ctr"/>
+              <a:r>
+                <a:rPr lang="en-US" dirty="0" err="1">
+                  <a:solidFill>
+                    <a:srgbClr val="C00000"/>
+                  </a:solidFill>
+                  <a:latin typeface="Consolas" panose="020B0609020204030204" pitchFamily="49" charset="0"/>
+                  <a:cs typeface="Consolas" panose="020B0609020204030204" pitchFamily="49" charset="0"/>
+                </a:rPr>
+                <a:t>0x20000001</a:t>
+              </a:r>
+              <a:endParaRPr lang="pl-PL" dirty="0">
+                <a:solidFill>
+                  <a:srgbClr val="C00000"/>
+                </a:solidFill>
+                <a:latin typeface="Consolas" panose="020B0609020204030204" pitchFamily="49" charset="0"/>
+                <a:cs typeface="Consolas" panose="020B0609020204030204" pitchFamily="49" charset="0"/>
+              </a:endParaRPr>
+            </a:p>
+          </p:txBody>
+        </p:sp>
+        <p:sp>
+          <p:nvSpPr>
+            <p:cNvPr id="52" name="Rectangle 51"/>
+            <p:cNvSpPr/>
+            <p:nvPr/>
+          </p:nvSpPr>
+          <p:spPr>
+            <a:xfrm>
+              <a:off x="5943950" y="5269022"/>
+              <a:ext cx="1365600" cy="307777"/>
+            </a:xfrm>
+            <a:prstGeom prst="rect">
+              <a:avLst/>
+            </a:prstGeom>
+            <a:ln>
+              <a:noFill/>
+            </a:ln>
+          </p:spPr>
+          <p:style>
+            <a:lnRef idx="2">
+              <a:schemeClr val="accent1"/>
+            </a:lnRef>
+            <a:fillRef idx="1">
+              <a:schemeClr val="lt1"/>
+            </a:fillRef>
+            <a:effectRef idx="0">
+              <a:schemeClr val="accent1"/>
+            </a:effectRef>
+            <a:fontRef idx="minor">
+              <a:schemeClr val="dk1"/>
+            </a:fontRef>
+          </p:style>
+          <p:txBody>
+            <a:bodyPr wrap="square">
+              <a:spAutoFit/>
+            </a:bodyPr>
+            <a:lstStyle/>
+            <a:p>
+              <a:pPr algn="ctr"/>
+              <a:r>
+                <a:rPr lang="en-US" dirty="0" err="1">
+                  <a:latin typeface="Consolas" panose="020B0609020204030204" pitchFamily="49" charset="0"/>
+                  <a:cs typeface="Consolas" panose="020B0609020204030204" pitchFamily="49" charset="0"/>
+                </a:rPr>
+                <a:t>0x20000000</a:t>
+              </a:r>
+              <a:endParaRPr lang="pl-PL" dirty="0">
+                <a:latin typeface="Consolas" panose="020B0609020204030204" pitchFamily="49" charset="0"/>
+                <a:cs typeface="Consolas" panose="020B0609020204030204" pitchFamily="49" charset="0"/>
+              </a:endParaRPr>
+            </a:p>
+          </p:txBody>
+        </p:sp>
+        <p:grpSp>
+          <p:nvGrpSpPr>
+            <p:cNvPr id="18" name="Group 63"/>
+            <p:cNvGrpSpPr/>
+            <p:nvPr/>
+          </p:nvGrpSpPr>
+          <p:grpSpPr>
+            <a:xfrm>
+              <a:off x="7327900" y="1307068"/>
+              <a:ext cx="1295400" cy="794266"/>
+              <a:chOff x="3124200" y="4191000"/>
+              <a:chExt cx="1295400" cy="794266"/>
+            </a:xfrm>
+          </p:grpSpPr>
+          <p:sp>
+            <p:nvSpPr>
+              <p:cNvPr id="53" name="Rectangle 52"/>
+              <p:cNvSpPr/>
+              <p:nvPr/>
+            </p:nvSpPr>
+            <p:spPr>
+              <a:xfrm>
+                <a:off x="3124200" y="4191000"/>
+                <a:ext cx="1289400" cy="307777"/>
+              </a:xfrm>
+              <a:prstGeom prst="rect">
+                <a:avLst/>
+              </a:prstGeom>
+              <a:noFill/>
+              <a:ln>
+                <a:noFill/>
+              </a:ln>
+            </p:spPr>
+            <p:style>
+              <a:lnRef idx="2">
+                <a:schemeClr val="accent1"/>
+              </a:lnRef>
+              <a:fillRef idx="1">
+                <a:schemeClr val="lt1"/>
+              </a:fillRef>
+              <a:effectRef idx="0">
+                <a:schemeClr val="accent1"/>
+              </a:effectRef>
+              <a:fontRef idx="minor">
+                <a:schemeClr val="dk1"/>
+              </a:fontRef>
+            </p:style>
+            <p:txBody>
+              <a:bodyPr wrap="square">
+                <a:spAutoFit/>
+              </a:bodyPr>
+              <a:lstStyle/>
+              <a:p>
+                <a:pPr algn="ctr"/>
+                <a:r>
+                  <a:rPr lang="en-US" dirty="0">
+                    <a:latin typeface="Consolas" panose="020B0609020204030204" pitchFamily="49" charset="0"/>
+                    <a:cs typeface="Consolas" panose="020B0609020204030204" pitchFamily="49" charset="0"/>
+                  </a:rPr>
+                  <a:t>8 bits</a:t>
+                </a:r>
+                <a:endParaRPr lang="pl-PL" dirty="0">
+                  <a:latin typeface="Consolas" panose="020B0609020204030204" pitchFamily="49" charset="0"/>
+                  <a:cs typeface="Consolas" panose="020B0609020204030204" pitchFamily="49" charset="0"/>
+                </a:endParaRPr>
+              </a:p>
+            </p:txBody>
+          </p:sp>
+          <p:cxnSp>
+            <p:nvCxnSpPr>
+              <p:cNvPr id="55" name="Straight Connector 54"/>
+              <p:cNvCxnSpPr>
+                <a:stCxn id="53" idx="1"/>
+              </p:cNvCxnSpPr>
+              <p:nvPr/>
+            </p:nvCxnSpPr>
+            <p:spPr>
+              <a:xfrm>
+                <a:off x="3124200" y="4344889"/>
+                <a:ext cx="0" cy="640377"/>
+              </a:xfrm>
+              <a:prstGeom prst="line">
+                <a:avLst/>
+              </a:prstGeom>
+              <a:ln>
+                <a:solidFill>
+                  <a:schemeClr val="tx2">
+                    <a:lumMod val="75000"/>
+                  </a:schemeClr>
+                </a:solidFill>
+              </a:ln>
+              <a:effectLst/>
+            </p:spPr>
+            <p:style>
+              <a:lnRef idx="2">
+                <a:schemeClr val="accent1"/>
+              </a:lnRef>
+              <a:fillRef idx="0">
+                <a:schemeClr val="accent1"/>
+              </a:fillRef>
+              <a:effectRef idx="1">
+                <a:schemeClr val="accent1"/>
+              </a:effectRef>
+              <a:fontRef idx="minor">
+                <a:schemeClr val="tx1"/>
+              </a:fontRef>
+            </p:style>
+          </p:cxnSp>
+          <p:cxnSp>
+            <p:nvCxnSpPr>
+              <p:cNvPr id="58" name="Straight Connector 57"/>
+              <p:cNvCxnSpPr>
+                <a:stCxn id="53" idx="3"/>
+              </p:cNvCxnSpPr>
+              <p:nvPr/>
+            </p:nvCxnSpPr>
+            <p:spPr>
+              <a:xfrm>
+                <a:off x="4413600" y="4344889"/>
+                <a:ext cx="1588" cy="640377"/>
+              </a:xfrm>
+              <a:prstGeom prst="line">
+                <a:avLst/>
+              </a:prstGeom>
+              <a:ln>
+                <a:solidFill>
+                  <a:schemeClr val="tx2">
+                    <a:lumMod val="75000"/>
+                  </a:schemeClr>
+                </a:solidFill>
+              </a:ln>
+              <a:effectLst/>
+            </p:spPr>
+            <p:style>
+              <a:lnRef idx="2">
+                <a:schemeClr val="accent1"/>
+              </a:lnRef>
+              <a:fillRef idx="0">
+                <a:schemeClr val="accent1"/>
+              </a:fillRef>
+              <a:effectRef idx="1">
+                <a:schemeClr val="accent1"/>
+              </a:effectRef>
+              <a:fontRef idx="minor">
+                <a:schemeClr val="tx1"/>
+              </a:fontRef>
+            </p:style>
+          </p:cxnSp>
+          <p:cxnSp>
+            <p:nvCxnSpPr>
+              <p:cNvPr id="61" name="Straight Connector 60"/>
+              <p:cNvCxnSpPr/>
+              <p:nvPr/>
+            </p:nvCxnSpPr>
+            <p:spPr>
+              <a:xfrm>
+                <a:off x="3124200" y="4648200"/>
+                <a:ext cx="1295400" cy="1588"/>
+              </a:xfrm>
+              <a:prstGeom prst="line">
+                <a:avLst/>
+              </a:prstGeom>
+              <a:ln>
+                <a:solidFill>
+                  <a:schemeClr val="tx2">
+                    <a:lumMod val="75000"/>
+                  </a:schemeClr>
+                </a:solidFill>
+                <a:headEnd type="arrow" w="lg" len="med"/>
+                <a:tailEnd type="arrow" w="lg" len="med"/>
+              </a:ln>
+              <a:effectLst/>
+            </p:spPr>
+            <p:style>
+              <a:lnRef idx="2">
+                <a:schemeClr val="accent1"/>
+              </a:lnRef>
+              <a:fillRef idx="0">
+                <a:schemeClr val="accent1"/>
+              </a:fillRef>
+              <a:effectRef idx="1">
+                <a:schemeClr val="accent1"/>
+              </a:effectRef>
+              <a:fontRef idx="minor">
+                <a:schemeClr val="tx1"/>
+              </a:fontRef>
+            </p:style>
+          </p:cxnSp>
+        </p:grpSp>
+      </p:grpSp>
+      <p:sp>
+        <p:nvSpPr>
+          <p:cNvPr id="44" name="Rectangle 43"/>
+          <p:cNvSpPr/>
+          <p:nvPr/>
+        </p:nvSpPr>
+        <p:spPr>
+          <a:xfrm>
+            <a:off x="7270750" y="4518210"/>
+            <a:ext cx="1447800" cy="685800"/>
+          </a:xfrm>
+          <a:prstGeom prst="rect">
+            <a:avLst/>
+          </a:prstGeom>
+          <a:noFill/>
+          <a:ln w="28575" cmpd="sng">
+            <a:solidFill>
+              <a:srgbClr val="FF0000"/>
+            </a:solidFill>
+          </a:ln>
+          <a:effectLst/>
+        </p:spPr>
+        <p:style>
+          <a:lnRef idx="1">
+            <a:schemeClr val="accent1"/>
+          </a:lnRef>
+          <a:fillRef idx="3">
+            <a:schemeClr val="accent1"/>
+          </a:fillRef>
+          <a:effectRef idx="2">
+            <a:schemeClr val="accent1"/>
+          </a:effectRef>
+          <a:fontRef idx="minor">
+            <a:schemeClr val="lt1"/>
+          </a:fontRef>
+        </p:style>
+        <p:txBody>
+          <a:bodyPr rtlCol="0" anchor="ctr"/>
+          <a:lstStyle/>
+          <a:p>
+            <a:pPr algn="ctr"/>
+            <a:endParaRPr lang="en-US">
+              <a:latin typeface="Consolas" panose="020B0609020204030204" pitchFamily="49" charset="0"/>
+              <a:cs typeface="Consolas" panose="020B0609020204030204" pitchFamily="49" charset="0"/>
+            </a:endParaRPr>
+          </a:p>
+        </p:txBody>
+      </p:sp>
+      <p:cxnSp>
+        <p:nvCxnSpPr>
+          <p:cNvPr id="43" name="Straight Connector 42"/>
+          <p:cNvCxnSpPr/>
+          <p:nvPr/>
+        </p:nvCxnSpPr>
+        <p:spPr>
+          <a:xfrm flipH="1" flipV="1">
+            <a:off x="7086600" y="4442010"/>
+            <a:ext cx="1828800" cy="838200"/>
+          </a:xfrm>
+          <a:prstGeom prst="line">
+            <a:avLst/>
+          </a:prstGeom>
+          <a:ln w="38100" cmpd="sng">
+            <a:solidFill>
+              <a:srgbClr val="FF0000"/>
+            </a:solidFill>
+          </a:ln>
+          <a:effectLst/>
+        </p:spPr>
+        <p:style>
+          <a:lnRef idx="2">
+            <a:schemeClr val="accent1"/>
+          </a:lnRef>
+          <a:fillRef idx="0">
+            <a:schemeClr val="accent1"/>
+          </a:fillRef>
+          <a:effectRef idx="1">
+            <a:schemeClr val="accent1"/>
+          </a:effectRef>
+          <a:fontRef idx="minor">
+            <a:schemeClr val="tx1"/>
+          </a:fontRef>
+        </p:style>
+      </p:cxnSp>
+      <p:cxnSp>
+        <p:nvCxnSpPr>
+          <p:cNvPr id="63" name="Straight Connector 62"/>
+          <p:cNvCxnSpPr/>
+          <p:nvPr/>
+        </p:nvCxnSpPr>
+        <p:spPr>
+          <a:xfrm rot="10800000" flipV="1">
+            <a:off x="7086600" y="4442010"/>
+            <a:ext cx="1828800" cy="838200"/>
+          </a:xfrm>
+          <a:prstGeom prst="line">
+            <a:avLst/>
+          </a:prstGeom>
+          <a:ln w="38100" cmpd="sng">
+            <a:solidFill>
+              <a:srgbClr val="FF0000"/>
+            </a:solidFill>
+          </a:ln>
+          <a:effectLst/>
+        </p:spPr>
+        <p:style>
+          <a:lnRef idx="2">
+            <a:schemeClr val="accent1"/>
+          </a:lnRef>
+          <a:fillRef idx="0">
+            <a:schemeClr val="accent1"/>
+          </a:fillRef>
+          <a:effectRef idx="1">
+            <a:schemeClr val="accent1"/>
+          </a:effectRef>
+          <a:fontRef idx="minor">
+            <a:schemeClr val="tx1"/>
+          </a:fontRef>
+        </p:style>
+      </p:cxnSp>
+      <p:sp>
+        <p:nvSpPr>
+          <p:cNvPr id="66" name="TextBox 65"/>
+          <p:cNvSpPr txBox="1"/>
+          <p:nvPr/>
+        </p:nvSpPr>
+        <p:spPr>
+          <a:xfrm>
+            <a:off x="2769481" y="4465346"/>
+            <a:ext cx="2685177" cy="830997"/>
+          </a:xfrm>
+          <a:prstGeom prst="rect">
+            <a:avLst/>
+          </a:prstGeom>
+          <a:solidFill>
+            <a:schemeClr val="bg2"/>
+          </a:solidFill>
+        </p:spPr>
+        <p:txBody>
+          <a:bodyPr wrap="square" rtlCol="0">
+            <a:spAutoFit/>
+          </a:bodyPr>
+          <a:lstStyle/>
+          <a:p>
+            <a:pPr algn="ctr"/>
+            <a:r>
+              <a:rPr lang="en-US" sz="1600" dirty="0">
+                <a:solidFill>
+                  <a:schemeClr val="bg1"/>
+                </a:solidFill>
+              </a:rPr>
+              <a:t>We c</a:t>
+            </a:r>
+            <a:r>
+              <a:rPr lang="en-US" sz="1600" b="1" dirty="0">
+                <a:solidFill>
+                  <a:schemeClr val="bg1"/>
+                </a:solidFill>
+              </a:rPr>
+              <a:t>annot store a halfword at address 0x20000001.</a:t>
+            </a:r>
+          </a:p>
+        </p:txBody>
+      </p:sp>
+      <p:sp>
+        <p:nvSpPr>
+          <p:cNvPr id="54" name="Content Placeholder 2"/>
+          <p:cNvSpPr>
+            <a:spLocks noGrp="1"/>
+          </p:cNvSpPr>
+          <p:nvPr>
+            <p:ph sz="quarter" idx="1"/>
+          </p:nvPr>
+        </p:nvSpPr>
+        <p:spPr>
+          <a:xfrm>
+            <a:off x="142043" y="1219200"/>
+            <a:ext cx="5768301" cy="4937760"/>
+          </a:xfrm>
+        </p:spPr>
+        <p:txBody>
+          <a:bodyPr>
+            <a:normAutofit/>
+          </a:bodyPr>
+          <a:lstStyle/>
+          <a:p>
+            <a:pPr lvl="1"/>
+            <a:r>
+              <a:rPr lang="en-US" sz="2000" dirty="0"/>
+              <a:t>Can you store a halfword anywhere?  </a:t>
+            </a:r>
+            <a:r>
+              <a:rPr lang="en-US" sz="2000" b="1" dirty="0">
+                <a:solidFill>
+                  <a:schemeClr val="accent2"/>
+                </a:solidFill>
+              </a:rPr>
+              <a:t>NO.</a:t>
+            </a:r>
+          </a:p>
+          <a:p>
+            <a:pPr lvl="1"/>
+            <a:r>
+              <a:rPr lang="en-US" sz="2000" dirty="0"/>
+              <a:t>A halfword can only be stored at an address that's divisible by 2.</a:t>
+            </a:r>
+          </a:p>
+          <a:p>
+            <a:pPr lvl="1"/>
+            <a:r>
+              <a:rPr lang="en-US" sz="2000" dirty="0"/>
+              <a:t>Memory address of a halfword is the lowest address of its two bytes.</a:t>
+            </a:r>
+          </a:p>
+          <a:p>
+            <a:pPr lvl="1"/>
+            <a:endParaRPr lang="en-US" sz="2000" dirty="0"/>
+          </a:p>
+          <a:p>
+            <a:pPr lvl="1"/>
+            <a:endParaRPr lang="en-US" sz="2000" b="1" dirty="0">
+              <a:solidFill>
+                <a:schemeClr val="accent2"/>
+              </a:solidFill>
+            </a:endParaRPr>
+          </a:p>
+        </p:txBody>
+      </p:sp>
+      <p:sp>
+        <p:nvSpPr>
+          <p:cNvPr id="56" name="Rectangle 55"/>
+          <p:cNvSpPr/>
+          <p:nvPr/>
+        </p:nvSpPr>
+        <p:spPr>
+          <a:xfrm>
+            <a:off x="290989" y="3025517"/>
+            <a:ext cx="5163669" cy="415498"/>
+          </a:xfrm>
+          <a:prstGeom prst="rect">
+            <a:avLst/>
+          </a:prstGeom>
+        </p:spPr>
+        <p:txBody>
+          <a:bodyPr wrap="square">
+            <a:spAutoFit/>
+          </a:bodyPr>
+          <a:lstStyle/>
+          <a:p>
+            <a:pPr lvl="1" algn="ctr"/>
+            <a:r>
+              <a:rPr lang="en-US" sz="2100" dirty="0" err="1"/>
+              <a:t>Halfword</a:t>
+            </a:r>
+            <a:r>
+              <a:rPr lang="en-US" sz="2100" dirty="0"/>
+              <a:t>-address mod 2 = 0</a:t>
+            </a:r>
+          </a:p>
+        </p:txBody>
+      </p:sp>
+    </p:spTree>
+    <p:extLst>
+      <p:ext uri="{BB962C8B-B14F-4D97-AF65-F5344CB8AC3E}">
+        <p14:creationId xmlns:p14="http://schemas.microsoft.com/office/powerpoint/2010/main" val="2963767799"/>
+      </p:ext>
+    </p:extLst>
+  </p:cSld>
+  <p:clrMapOvr>
+    <a:masterClrMapping/>
+  </p:clrMapOvr>
+</p:sld>
+</file>
+
+<file path=ppt/slides/slide11.xml><?xml version="1.0" encoding="utf-8"?>
+<p:sld xmlns:a="http://schemas.openxmlformats.org/drawingml/2006/main" xmlns:r="http://schemas.openxmlformats.org/officeDocument/2006/relationships" xmlns:p="http://schemas.openxmlformats.org/presentationml/2006/main">
+  <p:cSld>
+    <p:spTree>
+      <p:nvGrpSpPr>
+        <p:cNvPr id="1" name=""/>
+        <p:cNvGrpSpPr/>
+        <p:nvPr/>
+      </p:nvGrpSpPr>
+      <p:grpSpPr>
+        <a:xfrm>
+          <a:off x="0" y="0"/>
+          <a:ext cx="0" cy="0"/>
+          <a:chOff x="0" y="0"/>
+          <a:chExt cx="0" cy="0"/>
+        </a:xfrm>
+      </p:grpSpPr>
+      <p:sp>
+        <p:nvSpPr>
+          <p:cNvPr id="2" name="Title 1"/>
+          <p:cNvSpPr>
+            <a:spLocks noGrp="1"/>
+          </p:cNvSpPr>
+          <p:nvPr>
+            <p:ph type="title"/>
+          </p:nvPr>
+        </p:nvSpPr>
+        <p:spPr/>
+        <p:txBody>
+          <a:bodyPr/>
+          <a:lstStyle/>
+          <a:p>
+            <a:r>
+              <a:rPr lang="en-US" dirty="0"/>
               <a:t>Implementation of Barrel Shifter</a:t>
             </a:r>
           </a:p>
@@ -9704,7 +11274,7 @@
             <a:fld id="{EA7C8D44-3667-46F6-9772-CC52308E2A7F}" type="slidenum">
               <a:rPr kumimoji="0" lang="en-US" smtClean="0"/>
               <a:pPr/>
-              <a:t>10</a:t>
+              <a:t>11</a:t>
             </a:fld>
             <a:endParaRPr kumimoji="0" lang="en-US"/>
           </a:p>
@@ -11042,7 +12612,7 @@
 </p:sld>
 </file>
 
-<file path=ppt/slides/slide11.xml><?xml version="1.0" encoding="utf-8"?>
+<file path=ppt/slides/slide12.xml><?xml version="1.0" encoding="utf-8"?>
 <p:sld xmlns:a="http://schemas.openxmlformats.org/drawingml/2006/main" xmlns:r="http://schemas.openxmlformats.org/officeDocument/2006/relationships" xmlns:p="http://schemas.openxmlformats.org/presentationml/2006/main">
   <p:cSld>
     <p:spTree>
@@ -11099,7 +12669,7 @@
             <a:fld id="{EA7C8D44-3667-46F6-9772-CC52308E2A7F}" type="slidenum">
               <a:rPr kumimoji="0" lang="en-US" smtClean="0"/>
               <a:pPr/>
-              <a:t>11</a:t>
+              <a:t>12</a:t>
             </a:fld>
             <a:endParaRPr kumimoji="0" lang="en-US"/>
           </a:p>
@@ -12535,7 +14105,7 @@
 </p:sld>
 </file>
 
-<file path=ppt/slides/slide12.xml><?xml version="1.0" encoding="utf-8"?>
+<file path=ppt/slides/slide13.xml><?xml version="1.0" encoding="utf-8"?>
 <p:sld xmlns:a="http://schemas.openxmlformats.org/drawingml/2006/main" xmlns:r="http://schemas.openxmlformats.org/officeDocument/2006/relationships" xmlns:p="http://schemas.openxmlformats.org/presentationml/2006/main">
   <p:cSld>
     <p:spTree>
@@ -12592,7 +14162,7 @@
             <a:fld id="{EA7C8D44-3667-46F6-9772-CC52308E2A7F}" type="slidenum">
               <a:rPr kumimoji="0" lang="en-US" smtClean="0"/>
               <a:pPr/>
-              <a:t>12</a:t>
+              <a:t>13</a:t>
             </a:fld>
             <a:endParaRPr kumimoji="0" lang="en-US"/>
           </a:p>
@@ -14076,7 +15646,7 @@
 </p:sld>
 </file>
 
-<file path=ppt/slides/slide13.xml><?xml version="1.0" encoding="utf-8"?>
+<file path=ppt/slides/slide14.xml><?xml version="1.0" encoding="utf-8"?>
 <p:sld xmlns:a="http://schemas.openxmlformats.org/drawingml/2006/main" xmlns:r="http://schemas.openxmlformats.org/officeDocument/2006/relationships" xmlns:p="http://schemas.openxmlformats.org/presentationml/2006/main">
   <p:cSld>
     <p:spTree>
@@ -14133,7 +15703,7 @@
             <a:fld id="{EA7C8D44-3667-46F6-9772-CC52308E2A7F}" type="slidenum">
               <a:rPr kumimoji="0" lang="en-US" smtClean="0"/>
               <a:pPr/>
-              <a:t>13</a:t>
+              <a:t>14</a:t>
             </a:fld>
             <a:endParaRPr kumimoji="0" lang="en-US"/>
           </a:p>
@@ -15569,7 +17139,7 @@
 </p:sld>
 </file>
 
-<file path=ppt/slides/slide14.xml><?xml version="1.0" encoding="utf-8"?>
+<file path=ppt/slides/slide15.xml><?xml version="1.0" encoding="utf-8"?>
 <p:sld xmlns:a="http://schemas.openxmlformats.org/drawingml/2006/main" xmlns:r="http://schemas.openxmlformats.org/officeDocument/2006/relationships" xmlns:p="http://schemas.openxmlformats.org/presentationml/2006/main">
   <p:cSld>
     <p:spTree>
@@ -15626,7 +17196,7 @@
             <a:fld id="{EA7C8D44-3667-46F6-9772-CC52308E2A7F}" type="slidenum">
               <a:rPr kumimoji="0" lang="en-US" smtClean="0"/>
               <a:pPr/>
-              <a:t>14</a:t>
+              <a:t>15</a:t>
             </a:fld>
             <a:endParaRPr kumimoji="0" lang="en-US"/>
           </a:p>
@@ -17062,7 +18632,7 @@
 </p:sld>
 </file>
 
-<file path=ppt/slides/slide15.xml><?xml version="1.0" encoding="utf-8"?>
+<file path=ppt/slides/slide16.xml><?xml version="1.0" encoding="utf-8"?>
 <p:sld xmlns:a="http://schemas.openxmlformats.org/drawingml/2006/main" xmlns:r="http://schemas.openxmlformats.org/officeDocument/2006/relationships" xmlns:p="http://schemas.openxmlformats.org/presentationml/2006/main">
   <p:cSld>
     <p:spTree>
@@ -17125,7 +18695,7 @@
             <a:fld id="{EA7C8D44-3667-46F6-9772-CC52308E2A7F}" type="slidenum">
               <a:rPr kumimoji="0" lang="en-US" smtClean="0"/>
               <a:pPr/>
-              <a:t>15</a:t>
+              <a:t>16</a:t>
             </a:fld>
             <a:endParaRPr kumimoji="0" lang="en-US" dirty="0"/>
           </a:p>
@@ -17265,106 +18835,6 @@
     <p:extLst>
       <p:ext uri="{BB962C8B-B14F-4D97-AF65-F5344CB8AC3E}">
         <p14:creationId xmlns:p14="http://schemas.microsoft.com/office/powerpoint/2010/main" val="3686948551"/>
-      </p:ext>
-    </p:extLst>
-  </p:cSld>
-  <p:clrMapOvr>
-    <a:masterClrMapping/>
-  </p:clrMapOvr>
-</p:sld>
-</file>
-
-<file path=ppt/slides/slide16.xml><?xml version="1.0" encoding="utf-8"?>
-<p:sld xmlns:a="http://schemas.openxmlformats.org/drawingml/2006/main" xmlns:r="http://schemas.openxmlformats.org/officeDocument/2006/relationships" xmlns:p="http://schemas.openxmlformats.org/presentationml/2006/main">
-  <p:cSld>
-    <p:spTree>
-      <p:nvGrpSpPr>
-        <p:cNvPr id="1" name=""/>
-        <p:cNvGrpSpPr/>
-        <p:nvPr/>
-      </p:nvGrpSpPr>
-      <p:grpSpPr>
-        <a:xfrm>
-          <a:off x="0" y="0"/>
-          <a:ext cx="0" cy="0"/>
-          <a:chOff x="0" y="0"/>
-          <a:chExt cx="0" cy="0"/>
-        </a:xfrm>
-      </p:grpSpPr>
-      <p:sp>
-        <p:nvSpPr>
-          <p:cNvPr id="2" name="Title 1"/>
-          <p:cNvSpPr>
-            <a:spLocks noGrp="1"/>
-          </p:cNvSpPr>
-          <p:nvPr>
-            <p:ph type="title"/>
-          </p:nvPr>
-        </p:nvSpPr>
-        <p:spPr/>
-        <p:txBody>
-          <a:bodyPr/>
-          <a:lstStyle/>
-          <a:p>
-            <a:r>
-              <a:rPr lang="en-US" dirty="0"/>
-              <a:t>64-bit Logic Shift Left</a:t>
-            </a:r>
-          </a:p>
-        </p:txBody>
-      </p:sp>
-      <p:sp>
-        <p:nvSpPr>
-          <p:cNvPr id="3" name="Slide Number Placeholder 2"/>
-          <p:cNvSpPr>
-            <a:spLocks noGrp="1"/>
-          </p:cNvSpPr>
-          <p:nvPr>
-            <p:ph type="sldNum" sz="quarter" idx="12"/>
-          </p:nvPr>
-        </p:nvSpPr>
-        <p:spPr/>
-        <p:txBody>
-          <a:bodyPr/>
-          <a:lstStyle/>
-          <a:p>
-            <a:fld id="{EA7C8D44-3667-46F6-9772-CC52308E2A7F}" type="slidenum">
-              <a:rPr kumimoji="0" lang="en-US" smtClean="0"/>
-              <a:pPr/>
-              <a:t>16</a:t>
-            </a:fld>
-            <a:endParaRPr kumimoji="0" lang="en-US" dirty="0"/>
-          </a:p>
-        </p:txBody>
-      </p:sp>
-      <p:pic>
-        <p:nvPicPr>
-          <p:cNvPr id="4" name="Picture 3"/>
-          <p:cNvPicPr>
-            <a:picLocks noChangeAspect="1"/>
-          </p:cNvPicPr>
-          <p:nvPr/>
-        </p:nvPicPr>
-        <p:blipFill>
-          <a:blip r:embed="rId2"/>
-          <a:stretch>
-            <a:fillRect/>
-          </a:stretch>
-        </p:blipFill>
-        <p:spPr>
-          <a:xfrm>
-            <a:off x="256124" y="3086370"/>
-            <a:ext cx="8631751" cy="685260"/>
-          </a:xfrm>
-          <a:prstGeom prst="rect">
-            <a:avLst/>
-          </a:prstGeom>
-        </p:spPr>
-      </p:pic>
-    </p:spTree>
-    <p:extLst>
-      <p:ext uri="{BB962C8B-B14F-4D97-AF65-F5344CB8AC3E}">
-        <p14:creationId xmlns:p14="http://schemas.microsoft.com/office/powerpoint/2010/main" val="2714306100"/>
       </p:ext>
     </p:extLst>
   </p:cSld>
@@ -17432,6 +18902,106 @@
               <a:rPr kumimoji="0" lang="en-US" smtClean="0"/>
               <a:pPr/>
               <a:t>17</a:t>
+            </a:fld>
+            <a:endParaRPr kumimoji="0" lang="en-US" dirty="0"/>
+          </a:p>
+        </p:txBody>
+      </p:sp>
+      <p:pic>
+        <p:nvPicPr>
+          <p:cNvPr id="4" name="Picture 3"/>
+          <p:cNvPicPr>
+            <a:picLocks noChangeAspect="1"/>
+          </p:cNvPicPr>
+          <p:nvPr/>
+        </p:nvPicPr>
+        <p:blipFill>
+          <a:blip r:embed="rId2"/>
+          <a:stretch>
+            <a:fillRect/>
+          </a:stretch>
+        </p:blipFill>
+        <p:spPr>
+          <a:xfrm>
+            <a:off x="256124" y="3086370"/>
+            <a:ext cx="8631751" cy="685260"/>
+          </a:xfrm>
+          <a:prstGeom prst="rect">
+            <a:avLst/>
+          </a:prstGeom>
+        </p:spPr>
+      </p:pic>
+    </p:spTree>
+    <p:extLst>
+      <p:ext uri="{BB962C8B-B14F-4D97-AF65-F5344CB8AC3E}">
+        <p14:creationId xmlns:p14="http://schemas.microsoft.com/office/powerpoint/2010/main" val="2714306100"/>
+      </p:ext>
+    </p:extLst>
+  </p:cSld>
+  <p:clrMapOvr>
+    <a:masterClrMapping/>
+  </p:clrMapOvr>
+</p:sld>
+</file>
+
+<file path=ppt/slides/slide18.xml><?xml version="1.0" encoding="utf-8"?>
+<p:sld xmlns:a="http://schemas.openxmlformats.org/drawingml/2006/main" xmlns:r="http://schemas.openxmlformats.org/officeDocument/2006/relationships" xmlns:p="http://schemas.openxmlformats.org/presentationml/2006/main">
+  <p:cSld>
+    <p:spTree>
+      <p:nvGrpSpPr>
+        <p:cNvPr id="1" name=""/>
+        <p:cNvGrpSpPr/>
+        <p:nvPr/>
+      </p:nvGrpSpPr>
+      <p:grpSpPr>
+        <a:xfrm>
+          <a:off x="0" y="0"/>
+          <a:ext cx="0" cy="0"/>
+          <a:chOff x="0" y="0"/>
+          <a:chExt cx="0" cy="0"/>
+        </a:xfrm>
+      </p:grpSpPr>
+      <p:sp>
+        <p:nvSpPr>
+          <p:cNvPr id="2" name="Title 1"/>
+          <p:cNvSpPr>
+            <a:spLocks noGrp="1"/>
+          </p:cNvSpPr>
+          <p:nvPr>
+            <p:ph type="title"/>
+          </p:nvPr>
+        </p:nvSpPr>
+        <p:spPr/>
+        <p:txBody>
+          <a:bodyPr/>
+          <a:lstStyle/>
+          <a:p>
+            <a:r>
+              <a:rPr lang="en-US" dirty="0"/>
+              <a:t>64-bit Logic Shift Left</a:t>
+            </a:r>
+          </a:p>
+        </p:txBody>
+      </p:sp>
+      <p:sp>
+        <p:nvSpPr>
+          <p:cNvPr id="3" name="Slide Number Placeholder 2"/>
+          <p:cNvSpPr>
+            <a:spLocks noGrp="1"/>
+          </p:cNvSpPr>
+          <p:nvPr>
+            <p:ph type="sldNum" sz="quarter" idx="12"/>
+          </p:nvPr>
+        </p:nvSpPr>
+        <p:spPr/>
+        <p:txBody>
+          <a:bodyPr/>
+          <a:lstStyle/>
+          <a:p>
+            <a:fld id="{EA7C8D44-3667-46F6-9772-CC52308E2A7F}" type="slidenum">
+              <a:rPr kumimoji="0" lang="en-US" smtClean="0"/>
+              <a:pPr/>
+              <a:t>18</a:t>
             </a:fld>
             <a:endParaRPr kumimoji="0" lang="en-US" dirty="0"/>
           </a:p>
@@ -17533,7 +19103,7 @@
 </p:sld>
 </file>
 
-<file path=ppt/slides/slide18.xml><?xml version="1.0" encoding="utf-8"?>
+<file path=ppt/slides/slide19.xml><?xml version="1.0" encoding="utf-8"?>
 <p:sld xmlns:a="http://schemas.openxmlformats.org/drawingml/2006/main" xmlns:r="http://schemas.openxmlformats.org/officeDocument/2006/relationships" xmlns:p="http://schemas.openxmlformats.org/presentationml/2006/main">
   <p:cSld>
     <p:spTree>
@@ -17590,7 +19160,7 @@
             <a:fld id="{EA7C8D44-3667-46F6-9772-CC52308E2A7F}" type="slidenum">
               <a:rPr kumimoji="0" lang="en-US" smtClean="0"/>
               <a:pPr/>
-              <a:t>18</a:t>
+              <a:t>19</a:t>
             </a:fld>
             <a:endParaRPr kumimoji="0" lang="en-US" dirty="0"/>
           </a:p>
@@ -17633,7 +19203,2713 @@
 </p:sld>
 </file>
 
-<file path=ppt/slides/slide19.xml><?xml version="1.0" encoding="utf-8"?>
+<file path=ppt/slides/slide2.xml><?xml version="1.0" encoding="utf-8"?>
+<p:sld xmlns:a="http://schemas.openxmlformats.org/drawingml/2006/main" xmlns:r="http://schemas.openxmlformats.org/officeDocument/2006/relationships" xmlns:p="http://schemas.openxmlformats.org/presentationml/2006/main">
+  <p:cSld>
+    <p:spTree>
+      <p:nvGrpSpPr>
+        <p:cNvPr id="1" name=""/>
+        <p:cNvGrpSpPr/>
+        <p:nvPr/>
+      </p:nvGrpSpPr>
+      <p:grpSpPr>
+        <a:xfrm>
+          <a:off x="0" y="0"/>
+          <a:ext cx="0" cy="0"/>
+          <a:chOff x="0" y="0"/>
+          <a:chExt cx="0" cy="0"/>
+        </a:xfrm>
+      </p:grpSpPr>
+      <p:sp>
+        <p:nvSpPr>
+          <p:cNvPr id="14339" name="Rectangle 3"/>
+          <p:cNvSpPr>
+            <a:spLocks noGrp="1" noChangeArrowheads="1"/>
+          </p:cNvSpPr>
+          <p:nvPr>
+            <p:ph type="title"/>
+          </p:nvPr>
+        </p:nvSpPr>
+        <p:spPr>
+          <a:xfrm>
+            <a:off x="1390649" y="152400"/>
+            <a:ext cx="7296151" cy="990600"/>
+          </a:xfrm>
+        </p:spPr>
+        <p:txBody>
+          <a:bodyPr>
+            <a:normAutofit fontScale="90000"/>
+          </a:bodyPr>
+          <a:lstStyle/>
+          <a:p>
+            <a:r>
+              <a:rPr lang="en-US" dirty="0"/>
+              <a:t>Summary:</a:t>
+            </a:r>
+            <a:br>
+              <a:rPr lang="en-US" dirty="0"/>
+            </a:br>
+            <a:r>
+              <a:rPr lang="en-US" dirty="0"/>
+              <a:t>Condition Codes </a:t>
+            </a:r>
+          </a:p>
+        </p:txBody>
+      </p:sp>
+      <p:sp>
+        <p:nvSpPr>
+          <p:cNvPr id="54" name="Slide Number Placeholder 53"/>
+          <p:cNvSpPr>
+            <a:spLocks noGrp="1"/>
+          </p:cNvSpPr>
+          <p:nvPr>
+            <p:ph type="sldNum" sz="quarter" idx="12"/>
+          </p:nvPr>
+        </p:nvSpPr>
+        <p:spPr/>
+        <p:txBody>
+          <a:bodyPr/>
+          <a:lstStyle/>
+          <a:p>
+            <a:fld id="{AEE14D4A-FE32-40AF-B06D-E9622816B101}" type="slidenum">
+              <a:rPr lang="en-US" smtClean="0"/>
+              <a:pPr/>
+              <a:t>2</a:t>
+            </a:fld>
+            <a:endParaRPr lang="en-US"/>
+          </a:p>
+        </p:txBody>
+      </p:sp>
+      <p:sp>
+        <p:nvSpPr>
+          <p:cNvPr id="2" name="Rectangle 1"/>
+          <p:cNvSpPr/>
+          <p:nvPr/>
+        </p:nvSpPr>
+        <p:spPr>
+          <a:xfrm>
+            <a:off x="1390649" y="5765380"/>
+            <a:ext cx="6358825" cy="307777"/>
+          </a:xfrm>
+          <a:prstGeom prst="rect">
+            <a:avLst/>
+          </a:prstGeom>
+        </p:spPr>
+        <p:txBody>
+          <a:bodyPr wrap="square">
+            <a:spAutoFit/>
+          </a:bodyPr>
+          <a:lstStyle/>
+          <a:p>
+            <a:pPr lvl="2"/>
+            <a:r>
+              <a:rPr lang="en-US" sz="1400" i="1" dirty="0"/>
+              <a:t>Note AL is the default and does not need to be specified </a:t>
+            </a:r>
+            <a:endParaRPr lang="en-GB" sz="1400" i="1" dirty="0"/>
+          </a:p>
+        </p:txBody>
+      </p:sp>
+      <p:grpSp>
+        <p:nvGrpSpPr>
+          <p:cNvPr id="4" name="Group 3"/>
+          <p:cNvGrpSpPr/>
+          <p:nvPr/>
+        </p:nvGrpSpPr>
+        <p:grpSpPr>
+          <a:xfrm>
+            <a:off x="1390650" y="1412356"/>
+            <a:ext cx="6362700" cy="4241801"/>
+            <a:chOff x="1423974" y="1779588"/>
+            <a:chExt cx="6362700" cy="4241801"/>
+          </a:xfrm>
+        </p:grpSpPr>
+        <p:sp>
+          <p:nvSpPr>
+            <p:cNvPr id="14342" name="Rectangle 5"/>
+            <p:cNvSpPr>
+              <a:spLocks noChangeArrowheads="1"/>
+            </p:cNvSpPr>
+            <p:nvPr/>
+          </p:nvSpPr>
+          <p:spPr bwMode="auto">
+            <a:xfrm>
+              <a:off x="2696971" y="2309813"/>
+              <a:ext cx="3435035" cy="265113"/>
+            </a:xfrm>
+            <a:prstGeom prst="rect">
+              <a:avLst/>
+            </a:prstGeom>
+            <a:noFill/>
+            <a:ln w="12700">
+              <a:solidFill>
+                <a:schemeClr val="tx1"/>
+              </a:solidFill>
+              <a:miter lim="800000"/>
+              <a:headEnd/>
+              <a:tailEnd/>
+            </a:ln>
+          </p:spPr>
+          <p:txBody>
+            <a:bodyPr wrap="none" anchor="ctr"/>
+            <a:lstStyle/>
+            <a:p>
+              <a:r>
+                <a:rPr lang="en-US" sz="1800" b="1" dirty="0">
+                  <a:solidFill>
+                    <a:srgbClr val="FF0000"/>
+                  </a:solidFill>
+                  <a:latin typeface="Consolas" panose="020B0609020204030204" pitchFamily="49" charset="0"/>
+                  <a:cs typeface="Consolas" panose="020B0609020204030204" pitchFamily="49" charset="0"/>
+                </a:rPr>
+                <a:t>N</a:t>
+              </a:r>
+              <a:r>
+                <a:rPr lang="en-US" sz="1800" b="0" dirty="0">
+                  <a:latin typeface="Consolas" panose="020B0609020204030204" pitchFamily="49" charset="0"/>
+                  <a:cs typeface="Consolas" panose="020B0609020204030204" pitchFamily="49" charset="0"/>
+                </a:rPr>
+                <a:t>ot </a:t>
+              </a:r>
+              <a:r>
+                <a:rPr lang="en-US" sz="1800" b="1" dirty="0">
+                  <a:solidFill>
+                    <a:srgbClr val="FF0000"/>
+                  </a:solidFill>
+                  <a:latin typeface="Consolas" panose="020B0609020204030204" pitchFamily="49" charset="0"/>
+                  <a:cs typeface="Consolas" panose="020B0609020204030204" pitchFamily="49" charset="0"/>
+                </a:rPr>
+                <a:t>E</a:t>
+              </a:r>
+              <a:r>
+                <a:rPr lang="en-US" sz="1800" b="0" dirty="0">
+                  <a:latin typeface="Consolas" panose="020B0609020204030204" pitchFamily="49" charset="0"/>
+                  <a:cs typeface="Consolas" panose="020B0609020204030204" pitchFamily="49" charset="0"/>
+                </a:rPr>
+                <a:t>qual</a:t>
+              </a:r>
+            </a:p>
+          </p:txBody>
+        </p:sp>
+        <p:sp>
+          <p:nvSpPr>
+            <p:cNvPr id="14343" name="Rectangle 6"/>
+            <p:cNvSpPr>
+              <a:spLocks noChangeArrowheads="1"/>
+            </p:cNvSpPr>
+            <p:nvPr/>
+          </p:nvSpPr>
+          <p:spPr bwMode="auto">
+            <a:xfrm>
+              <a:off x="2696971" y="2574926"/>
+              <a:ext cx="3435035" cy="265113"/>
+            </a:xfrm>
+            <a:prstGeom prst="rect">
+              <a:avLst/>
+            </a:prstGeom>
+            <a:noFill/>
+            <a:ln w="12700">
+              <a:solidFill>
+                <a:schemeClr val="tx1"/>
+              </a:solidFill>
+              <a:miter lim="800000"/>
+              <a:headEnd/>
+              <a:tailEnd/>
+            </a:ln>
+          </p:spPr>
+          <p:txBody>
+            <a:bodyPr wrap="none" anchor="ctr"/>
+            <a:lstStyle/>
+            <a:p>
+              <a:r>
+                <a:rPr lang="en-US" sz="1800" b="0" dirty="0">
+                  <a:latin typeface="Consolas" panose="020B0609020204030204" pitchFamily="49" charset="0"/>
+                  <a:cs typeface="Consolas" panose="020B0609020204030204" pitchFamily="49" charset="0"/>
+                </a:rPr>
+                <a:t>Unsigned </a:t>
+              </a:r>
+              <a:r>
+                <a:rPr lang="en-US" sz="1800" b="1" dirty="0">
+                  <a:solidFill>
+                    <a:srgbClr val="FF0000"/>
+                  </a:solidFill>
+                  <a:latin typeface="Consolas" panose="020B0609020204030204" pitchFamily="49" charset="0"/>
+                  <a:cs typeface="Consolas" panose="020B0609020204030204" pitchFamily="49" charset="0"/>
+                </a:rPr>
+                <a:t>H</a:t>
+              </a:r>
+              <a:r>
+                <a:rPr lang="en-US" sz="1800" b="0" dirty="0">
+                  <a:latin typeface="Consolas" panose="020B0609020204030204" pitchFamily="49" charset="0"/>
+                  <a:cs typeface="Consolas" panose="020B0609020204030204" pitchFamily="49" charset="0"/>
+                </a:rPr>
+                <a:t>igher or </a:t>
+              </a:r>
+              <a:r>
+                <a:rPr lang="en-US" sz="1800" b="1" dirty="0">
+                  <a:solidFill>
+                    <a:srgbClr val="FF0000"/>
+                  </a:solidFill>
+                  <a:latin typeface="Consolas" panose="020B0609020204030204" pitchFamily="49" charset="0"/>
+                  <a:cs typeface="Consolas" panose="020B0609020204030204" pitchFamily="49" charset="0"/>
+                </a:rPr>
+                <a:t>S</a:t>
+              </a:r>
+              <a:r>
+                <a:rPr lang="en-US" sz="1800" b="0" dirty="0">
+                  <a:latin typeface="Consolas" panose="020B0609020204030204" pitchFamily="49" charset="0"/>
+                  <a:cs typeface="Consolas" panose="020B0609020204030204" pitchFamily="49" charset="0"/>
+                </a:rPr>
+                <a:t>ame</a:t>
+              </a:r>
+            </a:p>
+          </p:txBody>
+        </p:sp>
+        <p:sp>
+          <p:nvSpPr>
+            <p:cNvPr id="14344" name="Rectangle 7"/>
+            <p:cNvSpPr>
+              <a:spLocks noChangeArrowheads="1"/>
+            </p:cNvSpPr>
+            <p:nvPr/>
+          </p:nvSpPr>
+          <p:spPr bwMode="auto">
+            <a:xfrm>
+              <a:off x="2696971" y="2840038"/>
+              <a:ext cx="3435035" cy="265113"/>
+            </a:xfrm>
+            <a:prstGeom prst="rect">
+              <a:avLst/>
+            </a:prstGeom>
+            <a:noFill/>
+            <a:ln w="12700">
+              <a:solidFill>
+                <a:schemeClr val="tx1"/>
+              </a:solidFill>
+              <a:miter lim="800000"/>
+              <a:headEnd/>
+              <a:tailEnd/>
+            </a:ln>
+          </p:spPr>
+          <p:txBody>
+            <a:bodyPr wrap="none" anchor="ctr"/>
+            <a:lstStyle/>
+            <a:p>
+              <a:r>
+                <a:rPr lang="en-US" sz="1800" b="0" dirty="0">
+                  <a:latin typeface="Consolas" panose="020B0609020204030204" pitchFamily="49" charset="0"/>
+                  <a:cs typeface="Consolas" panose="020B0609020204030204" pitchFamily="49" charset="0"/>
+                </a:rPr>
+                <a:t>Unsigned </a:t>
+              </a:r>
+              <a:r>
+                <a:rPr lang="en-US" sz="1800" b="1" dirty="0" err="1">
+                  <a:solidFill>
+                    <a:srgbClr val="FF0000"/>
+                  </a:solidFill>
+                  <a:latin typeface="Consolas" panose="020B0609020204030204" pitchFamily="49" charset="0"/>
+                  <a:cs typeface="Consolas" panose="020B0609020204030204" pitchFamily="49" charset="0"/>
+                </a:rPr>
+                <a:t>LO</a:t>
+              </a:r>
+              <a:r>
+                <a:rPr lang="en-US" sz="1800" b="0" dirty="0" err="1">
+                  <a:latin typeface="Consolas" panose="020B0609020204030204" pitchFamily="49" charset="0"/>
+                  <a:cs typeface="Consolas" panose="020B0609020204030204" pitchFamily="49" charset="0"/>
+                </a:rPr>
+                <a:t>wer</a:t>
+              </a:r>
+              <a:endParaRPr lang="en-US" sz="1800" b="0" dirty="0">
+                <a:latin typeface="Consolas" panose="020B0609020204030204" pitchFamily="49" charset="0"/>
+                <a:cs typeface="Consolas" panose="020B0609020204030204" pitchFamily="49" charset="0"/>
+              </a:endParaRPr>
+            </a:p>
+          </p:txBody>
+        </p:sp>
+        <p:sp>
+          <p:nvSpPr>
+            <p:cNvPr id="14345" name="Rectangle 8"/>
+            <p:cNvSpPr>
+              <a:spLocks noChangeArrowheads="1"/>
+            </p:cNvSpPr>
+            <p:nvPr/>
+          </p:nvSpPr>
+          <p:spPr bwMode="auto">
+            <a:xfrm>
+              <a:off x="2696971" y="3105151"/>
+              <a:ext cx="3435035" cy="265113"/>
+            </a:xfrm>
+            <a:prstGeom prst="rect">
+              <a:avLst/>
+            </a:prstGeom>
+            <a:noFill/>
+            <a:ln w="12700">
+              <a:solidFill>
+                <a:schemeClr val="tx1"/>
+              </a:solidFill>
+              <a:miter lim="800000"/>
+              <a:headEnd/>
+              <a:tailEnd/>
+            </a:ln>
+          </p:spPr>
+          <p:txBody>
+            <a:bodyPr wrap="none" anchor="ctr"/>
+            <a:lstStyle/>
+            <a:p>
+              <a:r>
+                <a:rPr lang="en-US" sz="1800" b="1" dirty="0" err="1">
+                  <a:solidFill>
+                    <a:srgbClr val="FF0000"/>
+                  </a:solidFill>
+                  <a:latin typeface="Consolas" panose="020B0609020204030204" pitchFamily="49" charset="0"/>
+                  <a:cs typeface="Consolas" panose="020B0609020204030204" pitchFamily="49" charset="0"/>
+                </a:rPr>
+                <a:t>MI</a:t>
+              </a:r>
+              <a:r>
+                <a:rPr lang="en-US" sz="1800" b="0" dirty="0" err="1">
+                  <a:latin typeface="Consolas" panose="020B0609020204030204" pitchFamily="49" charset="0"/>
+                  <a:cs typeface="Consolas" panose="020B0609020204030204" pitchFamily="49" charset="0"/>
+                </a:rPr>
+                <a:t>nus</a:t>
+              </a:r>
+              <a:r>
+                <a:rPr lang="en-US" sz="1800" b="0" dirty="0">
+                  <a:latin typeface="Consolas" panose="020B0609020204030204" pitchFamily="49" charset="0"/>
+                  <a:cs typeface="Consolas" panose="020B0609020204030204" pitchFamily="49" charset="0"/>
+                </a:rPr>
+                <a:t> </a:t>
+              </a:r>
+              <a:r>
+                <a:rPr lang="en-US" dirty="0">
+                  <a:latin typeface="Consolas" panose="020B0609020204030204" pitchFamily="49" charset="0"/>
+                  <a:cs typeface="Consolas" panose="020B0609020204030204" pitchFamily="49" charset="0"/>
+                </a:rPr>
+                <a:t>(</a:t>
+              </a:r>
+              <a:r>
+                <a:rPr lang="en-US" sz="1800" b="0" dirty="0">
+                  <a:latin typeface="Consolas" panose="020B0609020204030204" pitchFamily="49" charset="0"/>
+                  <a:cs typeface="Consolas" panose="020B0609020204030204" pitchFamily="49" charset="0"/>
+                </a:rPr>
+                <a:t>Negative)</a:t>
+              </a:r>
+            </a:p>
+          </p:txBody>
+        </p:sp>
+        <p:sp>
+          <p:nvSpPr>
+            <p:cNvPr id="14346" name="Rectangle 9"/>
+            <p:cNvSpPr>
+              <a:spLocks noChangeArrowheads="1"/>
+            </p:cNvSpPr>
+            <p:nvPr/>
+          </p:nvSpPr>
+          <p:spPr bwMode="auto">
+            <a:xfrm>
+              <a:off x="2696971" y="2044701"/>
+              <a:ext cx="3435035" cy="265113"/>
+            </a:xfrm>
+            <a:prstGeom prst="rect">
+              <a:avLst/>
+            </a:prstGeom>
+            <a:noFill/>
+            <a:ln w="12700">
+              <a:solidFill>
+                <a:schemeClr val="tx1"/>
+              </a:solidFill>
+              <a:miter lim="800000"/>
+              <a:headEnd/>
+              <a:tailEnd/>
+            </a:ln>
+          </p:spPr>
+          <p:txBody>
+            <a:bodyPr wrap="none" anchor="ctr"/>
+            <a:lstStyle/>
+            <a:p>
+              <a:r>
+                <a:rPr lang="en-US" sz="1800" b="1" dirty="0" err="1">
+                  <a:solidFill>
+                    <a:srgbClr val="FF0000"/>
+                  </a:solidFill>
+                  <a:latin typeface="Consolas" panose="020B0609020204030204" pitchFamily="49" charset="0"/>
+                  <a:cs typeface="Consolas" panose="020B0609020204030204" pitchFamily="49" charset="0"/>
+                </a:rPr>
+                <a:t>EQ</a:t>
+              </a:r>
+              <a:r>
+                <a:rPr lang="en-US" sz="1800" b="0" dirty="0" err="1">
+                  <a:latin typeface="Consolas" panose="020B0609020204030204" pitchFamily="49" charset="0"/>
+                  <a:cs typeface="Consolas" panose="020B0609020204030204" pitchFamily="49" charset="0"/>
+                </a:rPr>
+                <a:t>ual</a:t>
+              </a:r>
+              <a:endParaRPr lang="en-US" sz="1800" b="0" dirty="0">
+                <a:latin typeface="Consolas" panose="020B0609020204030204" pitchFamily="49" charset="0"/>
+                <a:cs typeface="Consolas" panose="020B0609020204030204" pitchFamily="49" charset="0"/>
+              </a:endParaRPr>
+            </a:p>
+          </p:txBody>
+        </p:sp>
+        <p:sp>
+          <p:nvSpPr>
+            <p:cNvPr id="14347" name="Rectangle 10"/>
+            <p:cNvSpPr>
+              <a:spLocks noChangeArrowheads="1"/>
+            </p:cNvSpPr>
+            <p:nvPr/>
+          </p:nvSpPr>
+          <p:spPr bwMode="auto">
+            <a:xfrm>
+              <a:off x="2696971" y="3635376"/>
+              <a:ext cx="3435035" cy="265113"/>
+            </a:xfrm>
+            <a:prstGeom prst="rect">
+              <a:avLst/>
+            </a:prstGeom>
+            <a:noFill/>
+            <a:ln w="12700">
+              <a:solidFill>
+                <a:schemeClr val="tx1"/>
+              </a:solidFill>
+              <a:miter lim="800000"/>
+              <a:headEnd/>
+              <a:tailEnd/>
+            </a:ln>
+          </p:spPr>
+          <p:txBody>
+            <a:bodyPr wrap="none" anchor="ctr"/>
+            <a:lstStyle/>
+            <a:p>
+              <a:r>
+                <a:rPr lang="en-US" dirty="0" err="1">
+                  <a:latin typeface="Consolas" panose="020B0609020204030204" pitchFamily="49" charset="0"/>
+                  <a:cs typeface="Consolas" panose="020B0609020204030204" pitchFamily="49" charset="0"/>
+                </a:rPr>
+                <a:t>o</a:t>
+              </a:r>
+              <a:r>
+                <a:rPr lang="en-US" sz="1800" b="1" dirty="0" err="1">
+                  <a:solidFill>
+                    <a:srgbClr val="FF0000"/>
+                  </a:solidFill>
+                  <a:latin typeface="Consolas" panose="020B0609020204030204" pitchFamily="49" charset="0"/>
+                  <a:cs typeface="Consolas" panose="020B0609020204030204" pitchFamily="49" charset="0"/>
+                </a:rPr>
+                <a:t>V</a:t>
+              </a:r>
+              <a:r>
+                <a:rPr lang="en-US" sz="1800" b="0" dirty="0" err="1">
+                  <a:latin typeface="Consolas" panose="020B0609020204030204" pitchFamily="49" charset="0"/>
+                  <a:cs typeface="Consolas" panose="020B0609020204030204" pitchFamily="49" charset="0"/>
+                </a:rPr>
+                <a:t>erflow</a:t>
+              </a:r>
+              <a:r>
+                <a:rPr lang="en-US" sz="1800" b="0" dirty="0">
+                  <a:latin typeface="Consolas" panose="020B0609020204030204" pitchFamily="49" charset="0"/>
+                  <a:cs typeface="Consolas" panose="020B0609020204030204" pitchFamily="49" charset="0"/>
+                </a:rPr>
+                <a:t> </a:t>
+              </a:r>
+              <a:r>
+                <a:rPr lang="en-US" sz="1800" b="1" dirty="0">
+                  <a:solidFill>
+                    <a:srgbClr val="FF0000"/>
+                  </a:solidFill>
+                  <a:latin typeface="Consolas" panose="020B0609020204030204" pitchFamily="49" charset="0"/>
+                  <a:cs typeface="Consolas" panose="020B0609020204030204" pitchFamily="49" charset="0"/>
+                </a:rPr>
+                <a:t>S</a:t>
+              </a:r>
+              <a:r>
+                <a:rPr lang="en-US" sz="1800" b="0" dirty="0">
+                  <a:latin typeface="Consolas" panose="020B0609020204030204" pitchFamily="49" charset="0"/>
+                  <a:cs typeface="Consolas" panose="020B0609020204030204" pitchFamily="49" charset="0"/>
+                </a:rPr>
+                <a:t>et</a:t>
+              </a:r>
+            </a:p>
+          </p:txBody>
+        </p:sp>
+        <p:sp>
+          <p:nvSpPr>
+            <p:cNvPr id="14348" name="Rectangle 11"/>
+            <p:cNvSpPr>
+              <a:spLocks noChangeArrowheads="1"/>
+            </p:cNvSpPr>
+            <p:nvPr/>
+          </p:nvSpPr>
+          <p:spPr bwMode="auto">
+            <a:xfrm>
+              <a:off x="2696971" y="3900488"/>
+              <a:ext cx="3435035" cy="265113"/>
+            </a:xfrm>
+            <a:prstGeom prst="rect">
+              <a:avLst/>
+            </a:prstGeom>
+            <a:noFill/>
+            <a:ln w="12700">
+              <a:solidFill>
+                <a:schemeClr val="tx1"/>
+              </a:solidFill>
+              <a:miter lim="800000"/>
+              <a:headEnd/>
+              <a:tailEnd/>
+            </a:ln>
+          </p:spPr>
+          <p:txBody>
+            <a:bodyPr wrap="none" anchor="ctr"/>
+            <a:lstStyle/>
+            <a:p>
+              <a:r>
+                <a:rPr lang="en-US" dirty="0" err="1">
+                  <a:latin typeface="Consolas" panose="020B0609020204030204" pitchFamily="49" charset="0"/>
+                  <a:cs typeface="Consolas" panose="020B0609020204030204" pitchFamily="49" charset="0"/>
+                </a:rPr>
+                <a:t>o</a:t>
+              </a:r>
+              <a:r>
+                <a:rPr lang="en-US" b="1" dirty="0" err="1">
+                  <a:solidFill>
+                    <a:srgbClr val="FF0000"/>
+                  </a:solidFill>
+                  <a:latin typeface="Consolas" panose="020B0609020204030204" pitchFamily="49" charset="0"/>
+                  <a:cs typeface="Consolas" panose="020B0609020204030204" pitchFamily="49" charset="0"/>
+                </a:rPr>
+                <a:t>V</a:t>
+              </a:r>
+              <a:r>
+                <a:rPr lang="en-US" dirty="0" err="1">
+                  <a:latin typeface="Consolas" panose="020B0609020204030204" pitchFamily="49" charset="0"/>
+                  <a:cs typeface="Consolas" panose="020B0609020204030204" pitchFamily="49" charset="0"/>
+                </a:rPr>
+                <a:t>erflow</a:t>
+              </a:r>
+              <a:r>
+                <a:rPr lang="en-US" dirty="0">
+                  <a:latin typeface="Consolas" panose="020B0609020204030204" pitchFamily="49" charset="0"/>
+                  <a:cs typeface="Consolas" panose="020B0609020204030204" pitchFamily="49" charset="0"/>
+                </a:rPr>
+                <a:t> </a:t>
+              </a:r>
+              <a:r>
+                <a:rPr lang="en-US" b="1" dirty="0">
+                  <a:solidFill>
+                    <a:srgbClr val="FF0000"/>
+                  </a:solidFill>
+                  <a:latin typeface="Consolas" panose="020B0609020204030204" pitchFamily="49" charset="0"/>
+                  <a:cs typeface="Consolas" panose="020B0609020204030204" pitchFamily="49" charset="0"/>
+                </a:rPr>
+                <a:t>C</a:t>
+              </a:r>
+              <a:r>
+                <a:rPr lang="en-US" dirty="0">
+                  <a:latin typeface="Consolas" panose="020B0609020204030204" pitchFamily="49" charset="0"/>
+                  <a:cs typeface="Consolas" panose="020B0609020204030204" pitchFamily="49" charset="0"/>
+                </a:rPr>
+                <a:t>leared</a:t>
+              </a:r>
+            </a:p>
+          </p:txBody>
+        </p:sp>
+        <p:sp>
+          <p:nvSpPr>
+            <p:cNvPr id="14349" name="Rectangle 12"/>
+            <p:cNvSpPr>
+              <a:spLocks noChangeArrowheads="1"/>
+            </p:cNvSpPr>
+            <p:nvPr/>
+          </p:nvSpPr>
+          <p:spPr bwMode="auto">
+            <a:xfrm>
+              <a:off x="2696971" y="4165601"/>
+              <a:ext cx="3435035" cy="265113"/>
+            </a:xfrm>
+            <a:prstGeom prst="rect">
+              <a:avLst/>
+            </a:prstGeom>
+            <a:noFill/>
+            <a:ln w="12700">
+              <a:solidFill>
+                <a:schemeClr val="tx1"/>
+              </a:solidFill>
+              <a:miter lim="800000"/>
+              <a:headEnd/>
+              <a:tailEnd/>
+            </a:ln>
+          </p:spPr>
+          <p:txBody>
+            <a:bodyPr wrap="none" anchor="ctr"/>
+            <a:lstStyle/>
+            <a:p>
+              <a:r>
+                <a:rPr lang="en-US" sz="1800" b="0" dirty="0">
+                  <a:latin typeface="Consolas" panose="020B0609020204030204" pitchFamily="49" charset="0"/>
+                  <a:cs typeface="Consolas" panose="020B0609020204030204" pitchFamily="49" charset="0"/>
+                </a:rPr>
+                <a:t>Unsigned </a:t>
+              </a:r>
+              <a:r>
+                <a:rPr lang="en-US" sz="1800" b="1" dirty="0" err="1">
+                  <a:solidFill>
+                    <a:srgbClr val="FF0000"/>
+                  </a:solidFill>
+                  <a:latin typeface="Consolas" panose="020B0609020204030204" pitchFamily="49" charset="0"/>
+                  <a:cs typeface="Consolas" panose="020B0609020204030204" pitchFamily="49" charset="0"/>
+                </a:rPr>
+                <a:t>HI</a:t>
+              </a:r>
+              <a:r>
+                <a:rPr lang="en-US" sz="1800" b="0" dirty="0" err="1">
+                  <a:latin typeface="Consolas" panose="020B0609020204030204" pitchFamily="49" charset="0"/>
+                  <a:cs typeface="Consolas" panose="020B0609020204030204" pitchFamily="49" charset="0"/>
+                </a:rPr>
+                <a:t>gher</a:t>
+              </a:r>
+              <a:endParaRPr lang="en-US" sz="1800" b="0" dirty="0">
+                <a:latin typeface="Consolas" panose="020B0609020204030204" pitchFamily="49" charset="0"/>
+                <a:cs typeface="Consolas" panose="020B0609020204030204" pitchFamily="49" charset="0"/>
+              </a:endParaRPr>
+            </a:p>
+          </p:txBody>
+        </p:sp>
+        <p:sp>
+          <p:nvSpPr>
+            <p:cNvPr id="14350" name="Rectangle 13"/>
+            <p:cNvSpPr>
+              <a:spLocks noChangeArrowheads="1"/>
+            </p:cNvSpPr>
+            <p:nvPr/>
+          </p:nvSpPr>
+          <p:spPr bwMode="auto">
+            <a:xfrm>
+              <a:off x="2696971" y="4430713"/>
+              <a:ext cx="3435035" cy="265113"/>
+            </a:xfrm>
+            <a:prstGeom prst="rect">
+              <a:avLst/>
+            </a:prstGeom>
+            <a:noFill/>
+            <a:ln w="12700">
+              <a:solidFill>
+                <a:schemeClr val="tx1"/>
+              </a:solidFill>
+              <a:miter lim="800000"/>
+              <a:headEnd/>
+              <a:tailEnd/>
+            </a:ln>
+          </p:spPr>
+          <p:txBody>
+            <a:bodyPr wrap="none" anchor="ctr"/>
+            <a:lstStyle/>
+            <a:p>
+              <a:r>
+                <a:rPr lang="en-US" sz="1800" b="0" dirty="0">
+                  <a:latin typeface="Consolas" panose="020B0609020204030204" pitchFamily="49" charset="0"/>
+                  <a:cs typeface="Consolas" panose="020B0609020204030204" pitchFamily="49" charset="0"/>
+                </a:rPr>
+                <a:t>Unsigned </a:t>
+              </a:r>
+              <a:r>
+                <a:rPr lang="en-US" sz="1800" b="1" dirty="0">
+                  <a:solidFill>
+                    <a:srgbClr val="FF0000"/>
+                  </a:solidFill>
+                  <a:latin typeface="Consolas" panose="020B0609020204030204" pitchFamily="49" charset="0"/>
+                  <a:cs typeface="Consolas" panose="020B0609020204030204" pitchFamily="49" charset="0"/>
+                </a:rPr>
+                <a:t>L</a:t>
+              </a:r>
+              <a:r>
+                <a:rPr lang="en-US" sz="1800" b="0" dirty="0">
+                  <a:latin typeface="Consolas" panose="020B0609020204030204" pitchFamily="49" charset="0"/>
+                  <a:cs typeface="Consolas" panose="020B0609020204030204" pitchFamily="49" charset="0"/>
+                </a:rPr>
+                <a:t>ower or </a:t>
+              </a:r>
+              <a:r>
+                <a:rPr lang="en-US" sz="1800" b="1" dirty="0">
+                  <a:solidFill>
+                    <a:srgbClr val="FF0000"/>
+                  </a:solidFill>
+                  <a:latin typeface="Consolas" panose="020B0609020204030204" pitchFamily="49" charset="0"/>
+                  <a:cs typeface="Consolas" panose="020B0609020204030204" pitchFamily="49" charset="0"/>
+                </a:rPr>
+                <a:t>S</a:t>
+              </a:r>
+              <a:r>
+                <a:rPr lang="en-US" sz="1800" b="0" dirty="0">
+                  <a:latin typeface="Consolas" panose="020B0609020204030204" pitchFamily="49" charset="0"/>
+                  <a:cs typeface="Consolas" panose="020B0609020204030204" pitchFamily="49" charset="0"/>
+                </a:rPr>
+                <a:t>ame</a:t>
+              </a:r>
+            </a:p>
+          </p:txBody>
+        </p:sp>
+        <p:sp>
+          <p:nvSpPr>
+            <p:cNvPr id="14351" name="Rectangle 14"/>
+            <p:cNvSpPr>
+              <a:spLocks noChangeArrowheads="1"/>
+            </p:cNvSpPr>
+            <p:nvPr/>
+          </p:nvSpPr>
+          <p:spPr bwMode="auto">
+            <a:xfrm>
+              <a:off x="2696971" y="3370263"/>
+              <a:ext cx="3435035" cy="265113"/>
+            </a:xfrm>
+            <a:prstGeom prst="rect">
+              <a:avLst/>
+            </a:prstGeom>
+            <a:noFill/>
+            <a:ln w="12700">
+              <a:solidFill>
+                <a:schemeClr val="tx1"/>
+              </a:solidFill>
+              <a:miter lim="800000"/>
+              <a:headEnd/>
+              <a:tailEnd/>
+            </a:ln>
+          </p:spPr>
+          <p:txBody>
+            <a:bodyPr wrap="none" anchor="ctr"/>
+            <a:lstStyle/>
+            <a:p>
+              <a:r>
+                <a:rPr lang="en-US" sz="1800" b="1" dirty="0" err="1">
+                  <a:solidFill>
+                    <a:srgbClr val="FF0000"/>
+                  </a:solidFill>
+                  <a:latin typeface="Consolas" panose="020B0609020204030204" pitchFamily="49" charset="0"/>
+                  <a:cs typeface="Consolas" panose="020B0609020204030204" pitchFamily="49" charset="0"/>
+                </a:rPr>
+                <a:t>PL</a:t>
+              </a:r>
+              <a:r>
+                <a:rPr lang="en-US" sz="1800" b="0" dirty="0" err="1">
+                  <a:latin typeface="Consolas" panose="020B0609020204030204" pitchFamily="49" charset="0"/>
+                  <a:cs typeface="Consolas" panose="020B0609020204030204" pitchFamily="49" charset="0"/>
+                </a:rPr>
+                <a:t>us</a:t>
+              </a:r>
+              <a:r>
+                <a:rPr lang="en-US" sz="1800" b="0" dirty="0">
+                  <a:latin typeface="Consolas" panose="020B0609020204030204" pitchFamily="49" charset="0"/>
+                  <a:cs typeface="Consolas" panose="020B0609020204030204" pitchFamily="49" charset="0"/>
+                </a:rPr>
+                <a:t> (Positive or Zero)</a:t>
+              </a:r>
+            </a:p>
+          </p:txBody>
+        </p:sp>
+        <p:sp>
+          <p:nvSpPr>
+            <p:cNvPr id="14352" name="Rectangle 15"/>
+            <p:cNvSpPr>
+              <a:spLocks noChangeArrowheads="1"/>
+            </p:cNvSpPr>
+            <p:nvPr/>
+          </p:nvSpPr>
+          <p:spPr bwMode="auto">
+            <a:xfrm>
+              <a:off x="2696971" y="4960938"/>
+              <a:ext cx="3435035" cy="265113"/>
+            </a:xfrm>
+            <a:prstGeom prst="rect">
+              <a:avLst/>
+            </a:prstGeom>
+            <a:noFill/>
+            <a:ln w="12700">
+              <a:solidFill>
+                <a:schemeClr val="tx1"/>
+              </a:solidFill>
+              <a:miter lim="800000"/>
+              <a:headEnd/>
+              <a:tailEnd/>
+            </a:ln>
+          </p:spPr>
+          <p:txBody>
+            <a:bodyPr wrap="none" anchor="ctr"/>
+            <a:lstStyle/>
+            <a:p>
+              <a:r>
+                <a:rPr lang="en-US" sz="1800" b="0" dirty="0">
+                  <a:latin typeface="Consolas" panose="020B0609020204030204" pitchFamily="49" charset="0"/>
+                  <a:cs typeface="Consolas" panose="020B0609020204030204" pitchFamily="49" charset="0"/>
+                </a:rPr>
+                <a:t>Signed </a:t>
+              </a:r>
+              <a:r>
+                <a:rPr lang="en-US" sz="1800" b="1" dirty="0">
+                  <a:solidFill>
+                    <a:srgbClr val="FF0000"/>
+                  </a:solidFill>
+                  <a:latin typeface="Consolas" panose="020B0609020204030204" pitchFamily="49" charset="0"/>
+                  <a:cs typeface="Consolas" panose="020B0609020204030204" pitchFamily="49" charset="0"/>
+                </a:rPr>
+                <a:t>L</a:t>
+              </a:r>
+              <a:r>
+                <a:rPr lang="en-US" sz="1800" b="0" dirty="0">
+                  <a:latin typeface="Consolas" panose="020B0609020204030204" pitchFamily="49" charset="0"/>
+                  <a:cs typeface="Consolas" panose="020B0609020204030204" pitchFamily="49" charset="0"/>
+                </a:rPr>
+                <a:t>ess </a:t>
+              </a:r>
+              <a:r>
+                <a:rPr lang="en-US" sz="1800" b="1" dirty="0">
+                  <a:solidFill>
+                    <a:srgbClr val="FF0000"/>
+                  </a:solidFill>
+                  <a:latin typeface="Consolas" panose="020B0609020204030204" pitchFamily="49" charset="0"/>
+                  <a:cs typeface="Consolas" panose="020B0609020204030204" pitchFamily="49" charset="0"/>
+                </a:rPr>
+                <a:t>T</a:t>
+              </a:r>
+              <a:r>
+                <a:rPr lang="en-US" sz="1800" b="0" dirty="0">
+                  <a:latin typeface="Consolas" panose="020B0609020204030204" pitchFamily="49" charset="0"/>
+                  <a:cs typeface="Consolas" panose="020B0609020204030204" pitchFamily="49" charset="0"/>
+                </a:rPr>
+                <a:t>han</a:t>
+              </a:r>
+            </a:p>
+          </p:txBody>
+        </p:sp>
+        <p:sp>
+          <p:nvSpPr>
+            <p:cNvPr id="14353" name="Rectangle 16"/>
+            <p:cNvSpPr>
+              <a:spLocks noChangeArrowheads="1"/>
+            </p:cNvSpPr>
+            <p:nvPr/>
+          </p:nvSpPr>
+          <p:spPr bwMode="auto">
+            <a:xfrm>
+              <a:off x="2696971" y="5226051"/>
+              <a:ext cx="3435035" cy="265113"/>
+            </a:xfrm>
+            <a:prstGeom prst="rect">
+              <a:avLst/>
+            </a:prstGeom>
+            <a:noFill/>
+            <a:ln w="12700">
+              <a:solidFill>
+                <a:schemeClr val="tx1"/>
+              </a:solidFill>
+              <a:miter lim="800000"/>
+              <a:headEnd/>
+              <a:tailEnd/>
+            </a:ln>
+          </p:spPr>
+          <p:txBody>
+            <a:bodyPr wrap="none" anchor="ctr"/>
+            <a:lstStyle/>
+            <a:p>
+              <a:r>
+                <a:rPr lang="en-US" dirty="0">
+                  <a:latin typeface="Consolas" panose="020B0609020204030204" pitchFamily="49" charset="0"/>
+                  <a:cs typeface="Consolas" panose="020B0609020204030204" pitchFamily="49" charset="0"/>
+                </a:rPr>
+                <a:t>Signed </a:t>
+              </a:r>
+              <a:r>
+                <a:rPr lang="en-US" sz="1800" b="1" dirty="0">
+                  <a:solidFill>
+                    <a:srgbClr val="FF0000"/>
+                  </a:solidFill>
+                  <a:latin typeface="Consolas" panose="020B0609020204030204" pitchFamily="49" charset="0"/>
+                  <a:cs typeface="Consolas" panose="020B0609020204030204" pitchFamily="49" charset="0"/>
+                </a:rPr>
+                <a:t>G</a:t>
+              </a:r>
+              <a:r>
+                <a:rPr lang="en-US" sz="1800" b="0" dirty="0">
+                  <a:latin typeface="Consolas" panose="020B0609020204030204" pitchFamily="49" charset="0"/>
+                  <a:cs typeface="Consolas" panose="020B0609020204030204" pitchFamily="49" charset="0"/>
+                </a:rPr>
+                <a:t>reater </a:t>
+              </a:r>
+              <a:r>
+                <a:rPr lang="en-US" sz="1800" b="1" dirty="0">
+                  <a:solidFill>
+                    <a:srgbClr val="FF0000"/>
+                  </a:solidFill>
+                  <a:latin typeface="Consolas" panose="020B0609020204030204" pitchFamily="49" charset="0"/>
+                  <a:cs typeface="Consolas" panose="020B0609020204030204" pitchFamily="49" charset="0"/>
+                </a:rPr>
+                <a:t>T</a:t>
+              </a:r>
+              <a:r>
+                <a:rPr lang="en-US" sz="1800" b="0" dirty="0">
+                  <a:latin typeface="Consolas" panose="020B0609020204030204" pitchFamily="49" charset="0"/>
+                  <a:cs typeface="Consolas" panose="020B0609020204030204" pitchFamily="49" charset="0"/>
+                </a:rPr>
+                <a:t>han</a:t>
+              </a:r>
+            </a:p>
+          </p:txBody>
+        </p:sp>
+        <p:sp>
+          <p:nvSpPr>
+            <p:cNvPr id="14354" name="Rectangle 17"/>
+            <p:cNvSpPr>
+              <a:spLocks noChangeArrowheads="1"/>
+            </p:cNvSpPr>
+            <p:nvPr/>
+          </p:nvSpPr>
+          <p:spPr bwMode="auto">
+            <a:xfrm>
+              <a:off x="2696971" y="5491163"/>
+              <a:ext cx="3435035" cy="265113"/>
+            </a:xfrm>
+            <a:prstGeom prst="rect">
+              <a:avLst/>
+            </a:prstGeom>
+            <a:noFill/>
+            <a:ln w="12700">
+              <a:solidFill>
+                <a:schemeClr val="tx1"/>
+              </a:solidFill>
+              <a:miter lim="800000"/>
+              <a:headEnd/>
+              <a:tailEnd/>
+            </a:ln>
+          </p:spPr>
+          <p:txBody>
+            <a:bodyPr wrap="none" anchor="ctr"/>
+            <a:lstStyle/>
+            <a:p>
+              <a:r>
+                <a:rPr lang="en-US" sz="1800" b="0" dirty="0">
+                  <a:latin typeface="Consolas" panose="020B0609020204030204" pitchFamily="49" charset="0"/>
+                  <a:cs typeface="Consolas" panose="020B0609020204030204" pitchFamily="49" charset="0"/>
+                </a:rPr>
+                <a:t>Signed </a:t>
+              </a:r>
+              <a:r>
+                <a:rPr lang="en-US" sz="1800" b="1" dirty="0">
+                  <a:solidFill>
+                    <a:srgbClr val="FF0000"/>
+                  </a:solidFill>
+                  <a:latin typeface="Consolas" panose="020B0609020204030204" pitchFamily="49" charset="0"/>
+                  <a:cs typeface="Consolas" panose="020B0609020204030204" pitchFamily="49" charset="0"/>
+                </a:rPr>
+                <a:t>L</a:t>
+              </a:r>
+              <a:r>
+                <a:rPr lang="en-US" sz="1800" b="0" dirty="0">
+                  <a:latin typeface="Consolas" panose="020B0609020204030204" pitchFamily="49" charset="0"/>
+                  <a:cs typeface="Consolas" panose="020B0609020204030204" pitchFamily="49" charset="0"/>
+                </a:rPr>
+                <a:t>ess than or </a:t>
+              </a:r>
+              <a:r>
+                <a:rPr lang="en-US" sz="1800" b="1" dirty="0">
+                  <a:solidFill>
+                    <a:srgbClr val="FF0000"/>
+                  </a:solidFill>
+                  <a:latin typeface="Consolas" panose="020B0609020204030204" pitchFamily="49" charset="0"/>
+                  <a:cs typeface="Consolas" panose="020B0609020204030204" pitchFamily="49" charset="0"/>
+                </a:rPr>
+                <a:t>E</a:t>
+              </a:r>
+              <a:r>
+                <a:rPr lang="en-US" sz="1800" b="0" dirty="0">
+                  <a:latin typeface="Consolas" panose="020B0609020204030204" pitchFamily="49" charset="0"/>
+                  <a:cs typeface="Consolas" panose="020B0609020204030204" pitchFamily="49" charset="0"/>
+                </a:rPr>
+                <a:t>qual</a:t>
+              </a:r>
+            </a:p>
+          </p:txBody>
+        </p:sp>
+        <p:sp>
+          <p:nvSpPr>
+            <p:cNvPr id="14355" name="Rectangle 18"/>
+            <p:cNvSpPr>
+              <a:spLocks noChangeArrowheads="1"/>
+            </p:cNvSpPr>
+            <p:nvPr/>
+          </p:nvSpPr>
+          <p:spPr bwMode="auto">
+            <a:xfrm>
+              <a:off x="2696971" y="5756276"/>
+              <a:ext cx="3435035" cy="265113"/>
+            </a:xfrm>
+            <a:prstGeom prst="rect">
+              <a:avLst/>
+            </a:prstGeom>
+            <a:noFill/>
+            <a:ln w="12700">
+              <a:solidFill>
+                <a:schemeClr val="tx1"/>
+              </a:solidFill>
+              <a:miter lim="800000"/>
+              <a:headEnd/>
+              <a:tailEnd/>
+            </a:ln>
+          </p:spPr>
+          <p:txBody>
+            <a:bodyPr wrap="none" anchor="ctr"/>
+            <a:lstStyle/>
+            <a:p>
+              <a:r>
+                <a:rPr lang="en-US" sz="1800" b="1" dirty="0" err="1">
+                  <a:solidFill>
+                    <a:srgbClr val="FF0000"/>
+                  </a:solidFill>
+                  <a:latin typeface="Consolas" panose="020B0609020204030204" pitchFamily="49" charset="0"/>
+                  <a:cs typeface="Consolas" panose="020B0609020204030204" pitchFamily="49" charset="0"/>
+                </a:rPr>
+                <a:t>AL</a:t>
+              </a:r>
+              <a:r>
+                <a:rPr lang="en-US" sz="1800" b="0" dirty="0" err="1">
+                  <a:latin typeface="Consolas" panose="020B0609020204030204" pitchFamily="49" charset="0"/>
+                  <a:cs typeface="Consolas" panose="020B0609020204030204" pitchFamily="49" charset="0"/>
+                </a:rPr>
+                <a:t>ways</a:t>
+              </a:r>
+              <a:endParaRPr lang="en-US" sz="1800" b="0" dirty="0">
+                <a:latin typeface="Consolas" panose="020B0609020204030204" pitchFamily="49" charset="0"/>
+                <a:cs typeface="Consolas" panose="020B0609020204030204" pitchFamily="49" charset="0"/>
+              </a:endParaRPr>
+            </a:p>
+          </p:txBody>
+        </p:sp>
+        <p:sp>
+          <p:nvSpPr>
+            <p:cNvPr id="14356" name="Rectangle 19"/>
+            <p:cNvSpPr>
+              <a:spLocks noChangeArrowheads="1"/>
+            </p:cNvSpPr>
+            <p:nvPr/>
+          </p:nvSpPr>
+          <p:spPr bwMode="auto">
+            <a:xfrm>
+              <a:off x="2696971" y="4695826"/>
+              <a:ext cx="3435035" cy="265113"/>
+            </a:xfrm>
+            <a:prstGeom prst="rect">
+              <a:avLst/>
+            </a:prstGeom>
+            <a:noFill/>
+            <a:ln w="12700">
+              <a:solidFill>
+                <a:schemeClr val="tx1"/>
+              </a:solidFill>
+              <a:miter lim="800000"/>
+              <a:headEnd/>
+              <a:tailEnd/>
+            </a:ln>
+          </p:spPr>
+          <p:txBody>
+            <a:bodyPr wrap="none" anchor="ctr"/>
+            <a:lstStyle/>
+            <a:p>
+              <a:r>
+                <a:rPr lang="en-US" sz="1800" b="0" dirty="0">
+                  <a:latin typeface="Consolas" panose="020B0609020204030204" pitchFamily="49" charset="0"/>
+                  <a:cs typeface="Consolas" panose="020B0609020204030204" pitchFamily="49" charset="0"/>
+                </a:rPr>
+                <a:t>Signed </a:t>
+              </a:r>
+              <a:r>
+                <a:rPr lang="en-US" sz="1800" b="1" dirty="0">
+                  <a:solidFill>
+                    <a:srgbClr val="FF0000"/>
+                  </a:solidFill>
+                  <a:latin typeface="Consolas" panose="020B0609020204030204" pitchFamily="49" charset="0"/>
+                  <a:cs typeface="Consolas" panose="020B0609020204030204" pitchFamily="49" charset="0"/>
+                </a:rPr>
+                <a:t>G</a:t>
+              </a:r>
+              <a:r>
+                <a:rPr lang="en-US" sz="1800" b="0" dirty="0">
+                  <a:latin typeface="Consolas" panose="020B0609020204030204" pitchFamily="49" charset="0"/>
+                  <a:cs typeface="Consolas" panose="020B0609020204030204" pitchFamily="49" charset="0"/>
+                </a:rPr>
+                <a:t>reater or </a:t>
+              </a:r>
+              <a:r>
+                <a:rPr lang="en-US" sz="1800" b="1" dirty="0">
+                  <a:solidFill>
+                    <a:srgbClr val="FF0000"/>
+                  </a:solidFill>
+                  <a:latin typeface="Consolas" panose="020B0609020204030204" pitchFamily="49" charset="0"/>
+                  <a:cs typeface="Consolas" panose="020B0609020204030204" pitchFamily="49" charset="0"/>
+                </a:rPr>
+                <a:t>E</a:t>
+              </a:r>
+              <a:r>
+                <a:rPr lang="en-US" sz="1800" b="0" dirty="0">
+                  <a:latin typeface="Consolas" panose="020B0609020204030204" pitchFamily="49" charset="0"/>
+                  <a:cs typeface="Consolas" panose="020B0609020204030204" pitchFamily="49" charset="0"/>
+                </a:rPr>
+                <a:t>qual</a:t>
+              </a:r>
+            </a:p>
+          </p:txBody>
+        </p:sp>
+        <p:sp>
+          <p:nvSpPr>
+            <p:cNvPr id="14357" name="Rectangle 20"/>
+            <p:cNvSpPr>
+              <a:spLocks noChangeArrowheads="1"/>
+            </p:cNvSpPr>
+            <p:nvPr/>
+          </p:nvSpPr>
+          <p:spPr bwMode="auto">
+            <a:xfrm>
+              <a:off x="1423974" y="2044701"/>
+              <a:ext cx="1272997" cy="265113"/>
+            </a:xfrm>
+            <a:prstGeom prst="rect">
+              <a:avLst/>
+            </a:prstGeom>
+            <a:noFill/>
+            <a:ln w="12700">
+              <a:solidFill>
+                <a:schemeClr val="tx1"/>
+              </a:solidFill>
+              <a:miter lim="800000"/>
+              <a:headEnd/>
+              <a:tailEnd/>
+            </a:ln>
+          </p:spPr>
+          <p:txBody>
+            <a:bodyPr wrap="none" anchor="ctr"/>
+            <a:lstStyle/>
+            <a:p>
+              <a:pPr algn="ctr"/>
+              <a:r>
+                <a:rPr lang="en-US" sz="2000" b="1" dirty="0">
+                  <a:solidFill>
+                    <a:srgbClr val="FF0000"/>
+                  </a:solidFill>
+                  <a:latin typeface="Consolas" panose="020B0609020204030204" pitchFamily="49" charset="0"/>
+                  <a:cs typeface="Consolas" panose="020B0609020204030204" pitchFamily="49" charset="0"/>
+                </a:rPr>
+                <a:t>EQ</a:t>
+              </a:r>
+            </a:p>
+          </p:txBody>
+        </p:sp>
+        <p:sp>
+          <p:nvSpPr>
+            <p:cNvPr id="14358" name="Rectangle 21"/>
+            <p:cNvSpPr>
+              <a:spLocks noChangeArrowheads="1"/>
+            </p:cNvSpPr>
+            <p:nvPr/>
+          </p:nvSpPr>
+          <p:spPr bwMode="auto">
+            <a:xfrm>
+              <a:off x="1423974" y="2309813"/>
+              <a:ext cx="1272997" cy="265113"/>
+            </a:xfrm>
+            <a:prstGeom prst="rect">
+              <a:avLst/>
+            </a:prstGeom>
+            <a:noFill/>
+            <a:ln w="12700">
+              <a:solidFill>
+                <a:schemeClr val="tx1"/>
+              </a:solidFill>
+              <a:miter lim="800000"/>
+              <a:headEnd/>
+              <a:tailEnd/>
+            </a:ln>
+          </p:spPr>
+          <p:txBody>
+            <a:bodyPr wrap="none" anchor="ctr"/>
+            <a:lstStyle/>
+            <a:p>
+              <a:pPr algn="ctr"/>
+              <a:r>
+                <a:rPr lang="en-US" sz="2000" b="1" dirty="0">
+                  <a:solidFill>
+                    <a:srgbClr val="FF0000"/>
+                  </a:solidFill>
+                  <a:latin typeface="Consolas" panose="020B0609020204030204" pitchFamily="49" charset="0"/>
+                  <a:cs typeface="Consolas" panose="020B0609020204030204" pitchFamily="49" charset="0"/>
+                </a:rPr>
+                <a:t>NE</a:t>
+              </a:r>
+            </a:p>
+          </p:txBody>
+        </p:sp>
+        <p:sp>
+          <p:nvSpPr>
+            <p:cNvPr id="14359" name="Rectangle 22"/>
+            <p:cNvSpPr>
+              <a:spLocks noChangeArrowheads="1"/>
+            </p:cNvSpPr>
+            <p:nvPr/>
+          </p:nvSpPr>
+          <p:spPr bwMode="auto">
+            <a:xfrm>
+              <a:off x="1423974" y="2574926"/>
+              <a:ext cx="1272997" cy="265113"/>
+            </a:xfrm>
+            <a:prstGeom prst="rect">
+              <a:avLst/>
+            </a:prstGeom>
+            <a:noFill/>
+            <a:ln w="12700">
+              <a:solidFill>
+                <a:schemeClr val="tx1"/>
+              </a:solidFill>
+              <a:miter lim="800000"/>
+              <a:headEnd/>
+              <a:tailEnd/>
+            </a:ln>
+          </p:spPr>
+          <p:txBody>
+            <a:bodyPr wrap="none" anchor="ctr"/>
+            <a:lstStyle/>
+            <a:p>
+              <a:pPr algn="ctr"/>
+              <a:r>
+                <a:rPr lang="en-US" sz="2000" b="1" dirty="0">
+                  <a:solidFill>
+                    <a:srgbClr val="FF0000"/>
+                  </a:solidFill>
+                  <a:latin typeface="Consolas" panose="020B0609020204030204" pitchFamily="49" charset="0"/>
+                  <a:cs typeface="Consolas" panose="020B0609020204030204" pitchFamily="49" charset="0"/>
+                </a:rPr>
+                <a:t>CS/HS</a:t>
+              </a:r>
+            </a:p>
+          </p:txBody>
+        </p:sp>
+        <p:sp>
+          <p:nvSpPr>
+            <p:cNvPr id="14360" name="Rectangle 23"/>
+            <p:cNvSpPr>
+              <a:spLocks noChangeArrowheads="1"/>
+            </p:cNvSpPr>
+            <p:nvPr/>
+          </p:nvSpPr>
+          <p:spPr bwMode="auto">
+            <a:xfrm>
+              <a:off x="1423974" y="2840038"/>
+              <a:ext cx="1272997" cy="265113"/>
+            </a:xfrm>
+            <a:prstGeom prst="rect">
+              <a:avLst/>
+            </a:prstGeom>
+            <a:noFill/>
+            <a:ln w="12700">
+              <a:solidFill>
+                <a:schemeClr val="tx1"/>
+              </a:solidFill>
+              <a:miter lim="800000"/>
+              <a:headEnd/>
+              <a:tailEnd/>
+            </a:ln>
+          </p:spPr>
+          <p:txBody>
+            <a:bodyPr wrap="none" anchor="ctr"/>
+            <a:lstStyle/>
+            <a:p>
+              <a:pPr algn="ctr"/>
+              <a:r>
+                <a:rPr lang="en-US" sz="2000" b="1" dirty="0">
+                  <a:solidFill>
+                    <a:srgbClr val="FF0000"/>
+                  </a:solidFill>
+                  <a:latin typeface="Consolas" panose="020B0609020204030204" pitchFamily="49" charset="0"/>
+                  <a:cs typeface="Consolas" panose="020B0609020204030204" pitchFamily="49" charset="0"/>
+                </a:rPr>
+                <a:t>CC/LO</a:t>
+              </a:r>
+            </a:p>
+          </p:txBody>
+        </p:sp>
+        <p:sp>
+          <p:nvSpPr>
+            <p:cNvPr id="14361" name="Rectangle 24"/>
+            <p:cNvSpPr>
+              <a:spLocks noChangeArrowheads="1"/>
+            </p:cNvSpPr>
+            <p:nvPr/>
+          </p:nvSpPr>
+          <p:spPr bwMode="auto">
+            <a:xfrm>
+              <a:off x="1423974" y="3370263"/>
+              <a:ext cx="1272997" cy="265113"/>
+            </a:xfrm>
+            <a:prstGeom prst="rect">
+              <a:avLst/>
+            </a:prstGeom>
+            <a:noFill/>
+            <a:ln w="12700">
+              <a:solidFill>
+                <a:schemeClr val="tx1"/>
+              </a:solidFill>
+              <a:miter lim="800000"/>
+              <a:headEnd/>
+              <a:tailEnd/>
+            </a:ln>
+          </p:spPr>
+          <p:txBody>
+            <a:bodyPr wrap="none" anchor="ctr"/>
+            <a:lstStyle/>
+            <a:p>
+              <a:pPr algn="ctr"/>
+              <a:r>
+                <a:rPr lang="en-US" sz="2000" b="1" dirty="0">
+                  <a:solidFill>
+                    <a:srgbClr val="FF0000"/>
+                  </a:solidFill>
+                  <a:latin typeface="Consolas" panose="020B0609020204030204" pitchFamily="49" charset="0"/>
+                  <a:cs typeface="Consolas" panose="020B0609020204030204" pitchFamily="49" charset="0"/>
+                </a:rPr>
+                <a:t>PL</a:t>
+              </a:r>
+            </a:p>
+          </p:txBody>
+        </p:sp>
+        <p:sp>
+          <p:nvSpPr>
+            <p:cNvPr id="14362" name="Rectangle 25"/>
+            <p:cNvSpPr>
+              <a:spLocks noChangeArrowheads="1"/>
+            </p:cNvSpPr>
+            <p:nvPr/>
+          </p:nvSpPr>
+          <p:spPr bwMode="auto">
+            <a:xfrm>
+              <a:off x="1423974" y="3635376"/>
+              <a:ext cx="1272997" cy="265113"/>
+            </a:xfrm>
+            <a:prstGeom prst="rect">
+              <a:avLst/>
+            </a:prstGeom>
+            <a:noFill/>
+            <a:ln w="12700">
+              <a:solidFill>
+                <a:schemeClr val="tx1"/>
+              </a:solidFill>
+              <a:miter lim="800000"/>
+              <a:headEnd/>
+              <a:tailEnd/>
+            </a:ln>
+          </p:spPr>
+          <p:txBody>
+            <a:bodyPr wrap="none" anchor="ctr"/>
+            <a:lstStyle/>
+            <a:p>
+              <a:pPr algn="ctr"/>
+              <a:r>
+                <a:rPr lang="en-US" sz="2000" b="1" dirty="0">
+                  <a:solidFill>
+                    <a:srgbClr val="FF0000"/>
+                  </a:solidFill>
+                  <a:latin typeface="Consolas" panose="020B0609020204030204" pitchFamily="49" charset="0"/>
+                  <a:cs typeface="Consolas" panose="020B0609020204030204" pitchFamily="49" charset="0"/>
+                </a:rPr>
+                <a:t>VS</a:t>
+              </a:r>
+            </a:p>
+          </p:txBody>
+        </p:sp>
+        <p:sp>
+          <p:nvSpPr>
+            <p:cNvPr id="14363" name="Rectangle 26"/>
+            <p:cNvSpPr>
+              <a:spLocks noChangeArrowheads="1"/>
+            </p:cNvSpPr>
+            <p:nvPr/>
+          </p:nvSpPr>
+          <p:spPr bwMode="auto">
+            <a:xfrm>
+              <a:off x="1423974" y="4165601"/>
+              <a:ext cx="1272997" cy="265113"/>
+            </a:xfrm>
+            <a:prstGeom prst="rect">
+              <a:avLst/>
+            </a:prstGeom>
+            <a:noFill/>
+            <a:ln w="12700">
+              <a:solidFill>
+                <a:schemeClr val="tx1"/>
+              </a:solidFill>
+              <a:miter lim="800000"/>
+              <a:headEnd/>
+              <a:tailEnd/>
+            </a:ln>
+          </p:spPr>
+          <p:txBody>
+            <a:bodyPr wrap="none" anchor="ctr"/>
+            <a:lstStyle/>
+            <a:p>
+              <a:pPr algn="ctr"/>
+              <a:r>
+                <a:rPr lang="en-US" sz="2000" b="1" dirty="0">
+                  <a:solidFill>
+                    <a:srgbClr val="FF0000"/>
+                  </a:solidFill>
+                  <a:latin typeface="Consolas" panose="020B0609020204030204" pitchFamily="49" charset="0"/>
+                  <a:cs typeface="Consolas" panose="020B0609020204030204" pitchFamily="49" charset="0"/>
+                </a:rPr>
+                <a:t>HI</a:t>
+              </a:r>
+            </a:p>
+          </p:txBody>
+        </p:sp>
+        <p:sp>
+          <p:nvSpPr>
+            <p:cNvPr id="14364" name="Rectangle 27"/>
+            <p:cNvSpPr>
+              <a:spLocks noChangeArrowheads="1"/>
+            </p:cNvSpPr>
+            <p:nvPr/>
+          </p:nvSpPr>
+          <p:spPr bwMode="auto">
+            <a:xfrm>
+              <a:off x="1423974" y="4430713"/>
+              <a:ext cx="1272997" cy="265113"/>
+            </a:xfrm>
+            <a:prstGeom prst="rect">
+              <a:avLst/>
+            </a:prstGeom>
+            <a:noFill/>
+            <a:ln w="12700">
+              <a:solidFill>
+                <a:schemeClr val="tx1"/>
+              </a:solidFill>
+              <a:miter lim="800000"/>
+              <a:headEnd/>
+              <a:tailEnd/>
+            </a:ln>
+          </p:spPr>
+          <p:txBody>
+            <a:bodyPr wrap="none" anchor="ctr"/>
+            <a:lstStyle/>
+            <a:p>
+              <a:pPr algn="ctr"/>
+              <a:r>
+                <a:rPr lang="en-US" sz="2000" b="1" dirty="0">
+                  <a:solidFill>
+                    <a:srgbClr val="FF0000"/>
+                  </a:solidFill>
+                  <a:latin typeface="Consolas" panose="020B0609020204030204" pitchFamily="49" charset="0"/>
+                  <a:cs typeface="Consolas" panose="020B0609020204030204" pitchFamily="49" charset="0"/>
+                </a:rPr>
+                <a:t>LS</a:t>
+              </a:r>
+            </a:p>
+          </p:txBody>
+        </p:sp>
+        <p:sp>
+          <p:nvSpPr>
+            <p:cNvPr id="14365" name="Rectangle 28"/>
+            <p:cNvSpPr>
+              <a:spLocks noChangeArrowheads="1"/>
+            </p:cNvSpPr>
+            <p:nvPr/>
+          </p:nvSpPr>
+          <p:spPr bwMode="auto">
+            <a:xfrm>
+              <a:off x="1423974" y="4695826"/>
+              <a:ext cx="1272997" cy="265113"/>
+            </a:xfrm>
+            <a:prstGeom prst="rect">
+              <a:avLst/>
+            </a:prstGeom>
+            <a:noFill/>
+            <a:ln w="12700">
+              <a:solidFill>
+                <a:schemeClr val="tx1"/>
+              </a:solidFill>
+              <a:miter lim="800000"/>
+              <a:headEnd/>
+              <a:tailEnd/>
+            </a:ln>
+          </p:spPr>
+          <p:txBody>
+            <a:bodyPr wrap="none" anchor="ctr"/>
+            <a:lstStyle/>
+            <a:p>
+              <a:pPr algn="ctr"/>
+              <a:r>
+                <a:rPr lang="en-US" sz="2000" b="1" dirty="0">
+                  <a:solidFill>
+                    <a:srgbClr val="FF0000"/>
+                  </a:solidFill>
+                  <a:latin typeface="Consolas" panose="020B0609020204030204" pitchFamily="49" charset="0"/>
+                  <a:cs typeface="Consolas" panose="020B0609020204030204" pitchFamily="49" charset="0"/>
+                </a:rPr>
+                <a:t>GE</a:t>
+              </a:r>
+            </a:p>
+          </p:txBody>
+        </p:sp>
+        <p:sp>
+          <p:nvSpPr>
+            <p:cNvPr id="14366" name="Rectangle 29"/>
+            <p:cNvSpPr>
+              <a:spLocks noChangeArrowheads="1"/>
+            </p:cNvSpPr>
+            <p:nvPr/>
+          </p:nvSpPr>
+          <p:spPr bwMode="auto">
+            <a:xfrm>
+              <a:off x="1423974" y="4960938"/>
+              <a:ext cx="1272997" cy="265113"/>
+            </a:xfrm>
+            <a:prstGeom prst="rect">
+              <a:avLst/>
+            </a:prstGeom>
+            <a:noFill/>
+            <a:ln w="12700">
+              <a:solidFill>
+                <a:schemeClr val="tx1"/>
+              </a:solidFill>
+              <a:miter lim="800000"/>
+              <a:headEnd/>
+              <a:tailEnd/>
+            </a:ln>
+          </p:spPr>
+          <p:txBody>
+            <a:bodyPr wrap="none" anchor="ctr"/>
+            <a:lstStyle/>
+            <a:p>
+              <a:pPr algn="ctr"/>
+              <a:r>
+                <a:rPr lang="en-US" sz="2000" b="1" dirty="0">
+                  <a:solidFill>
+                    <a:srgbClr val="FF0000"/>
+                  </a:solidFill>
+                  <a:latin typeface="Consolas" panose="020B0609020204030204" pitchFamily="49" charset="0"/>
+                  <a:cs typeface="Consolas" panose="020B0609020204030204" pitchFamily="49" charset="0"/>
+                </a:rPr>
+                <a:t>LT</a:t>
+              </a:r>
+            </a:p>
+          </p:txBody>
+        </p:sp>
+        <p:sp>
+          <p:nvSpPr>
+            <p:cNvPr id="14367" name="Rectangle 30"/>
+            <p:cNvSpPr>
+              <a:spLocks noChangeArrowheads="1"/>
+            </p:cNvSpPr>
+            <p:nvPr/>
+          </p:nvSpPr>
+          <p:spPr bwMode="auto">
+            <a:xfrm>
+              <a:off x="1423974" y="5226051"/>
+              <a:ext cx="1272997" cy="265113"/>
+            </a:xfrm>
+            <a:prstGeom prst="rect">
+              <a:avLst/>
+            </a:prstGeom>
+            <a:noFill/>
+            <a:ln w="12700">
+              <a:solidFill>
+                <a:schemeClr val="tx1"/>
+              </a:solidFill>
+              <a:miter lim="800000"/>
+              <a:headEnd/>
+              <a:tailEnd/>
+            </a:ln>
+          </p:spPr>
+          <p:txBody>
+            <a:bodyPr wrap="none" anchor="ctr"/>
+            <a:lstStyle/>
+            <a:p>
+              <a:pPr algn="ctr"/>
+              <a:r>
+                <a:rPr lang="en-US" sz="2000" b="1" dirty="0">
+                  <a:solidFill>
+                    <a:srgbClr val="FF0000"/>
+                  </a:solidFill>
+                  <a:latin typeface="Consolas" panose="020B0609020204030204" pitchFamily="49" charset="0"/>
+                  <a:cs typeface="Consolas" panose="020B0609020204030204" pitchFamily="49" charset="0"/>
+                </a:rPr>
+                <a:t>GT</a:t>
+              </a:r>
+            </a:p>
+          </p:txBody>
+        </p:sp>
+        <p:sp>
+          <p:nvSpPr>
+            <p:cNvPr id="14368" name="Rectangle 31"/>
+            <p:cNvSpPr>
+              <a:spLocks noChangeArrowheads="1"/>
+            </p:cNvSpPr>
+            <p:nvPr/>
+          </p:nvSpPr>
+          <p:spPr bwMode="auto">
+            <a:xfrm>
+              <a:off x="1423974" y="5491163"/>
+              <a:ext cx="1272997" cy="265113"/>
+            </a:xfrm>
+            <a:prstGeom prst="rect">
+              <a:avLst/>
+            </a:prstGeom>
+            <a:noFill/>
+            <a:ln w="12700">
+              <a:solidFill>
+                <a:schemeClr val="tx1"/>
+              </a:solidFill>
+              <a:miter lim="800000"/>
+              <a:headEnd/>
+              <a:tailEnd/>
+            </a:ln>
+          </p:spPr>
+          <p:txBody>
+            <a:bodyPr wrap="none" anchor="ctr"/>
+            <a:lstStyle/>
+            <a:p>
+              <a:pPr algn="ctr"/>
+              <a:r>
+                <a:rPr lang="en-US" sz="2000" b="1" dirty="0">
+                  <a:solidFill>
+                    <a:srgbClr val="FF0000"/>
+                  </a:solidFill>
+                  <a:latin typeface="Consolas" panose="020B0609020204030204" pitchFamily="49" charset="0"/>
+                  <a:cs typeface="Consolas" panose="020B0609020204030204" pitchFamily="49" charset="0"/>
+                </a:rPr>
+                <a:t>LE</a:t>
+              </a:r>
+            </a:p>
+          </p:txBody>
+        </p:sp>
+        <p:sp>
+          <p:nvSpPr>
+            <p:cNvPr id="14369" name="Rectangle 32"/>
+            <p:cNvSpPr>
+              <a:spLocks noChangeArrowheads="1"/>
+            </p:cNvSpPr>
+            <p:nvPr/>
+          </p:nvSpPr>
+          <p:spPr bwMode="auto">
+            <a:xfrm>
+              <a:off x="1423974" y="5756276"/>
+              <a:ext cx="1272997" cy="265113"/>
+            </a:xfrm>
+            <a:prstGeom prst="rect">
+              <a:avLst/>
+            </a:prstGeom>
+            <a:noFill/>
+            <a:ln w="12700">
+              <a:solidFill>
+                <a:schemeClr val="tx1"/>
+              </a:solidFill>
+              <a:miter lim="800000"/>
+              <a:headEnd/>
+              <a:tailEnd/>
+            </a:ln>
+          </p:spPr>
+          <p:txBody>
+            <a:bodyPr wrap="none" anchor="ctr"/>
+            <a:lstStyle/>
+            <a:p>
+              <a:pPr algn="ctr"/>
+              <a:r>
+                <a:rPr lang="en-US" sz="2000" b="1" dirty="0">
+                  <a:solidFill>
+                    <a:srgbClr val="FF0000"/>
+                  </a:solidFill>
+                  <a:latin typeface="Consolas" panose="020B0609020204030204" pitchFamily="49" charset="0"/>
+                  <a:cs typeface="Consolas" panose="020B0609020204030204" pitchFamily="49" charset="0"/>
+                </a:rPr>
+                <a:t>AL</a:t>
+              </a:r>
+            </a:p>
+          </p:txBody>
+        </p:sp>
+        <p:sp>
+          <p:nvSpPr>
+            <p:cNvPr id="14370" name="Rectangle 33"/>
+            <p:cNvSpPr>
+              <a:spLocks noChangeArrowheads="1"/>
+            </p:cNvSpPr>
+            <p:nvPr/>
+          </p:nvSpPr>
+          <p:spPr bwMode="auto">
+            <a:xfrm>
+              <a:off x="1423974" y="3105151"/>
+              <a:ext cx="1272997" cy="265113"/>
+            </a:xfrm>
+            <a:prstGeom prst="rect">
+              <a:avLst/>
+            </a:prstGeom>
+            <a:noFill/>
+            <a:ln w="12700">
+              <a:solidFill>
+                <a:schemeClr val="tx1"/>
+              </a:solidFill>
+              <a:miter lim="800000"/>
+              <a:headEnd/>
+              <a:tailEnd/>
+            </a:ln>
+          </p:spPr>
+          <p:txBody>
+            <a:bodyPr wrap="none" anchor="ctr"/>
+            <a:lstStyle/>
+            <a:p>
+              <a:pPr algn="ctr"/>
+              <a:r>
+                <a:rPr lang="en-US" sz="2000" b="1" dirty="0">
+                  <a:solidFill>
+                    <a:srgbClr val="FF0000"/>
+                  </a:solidFill>
+                  <a:latin typeface="Consolas" panose="020B0609020204030204" pitchFamily="49" charset="0"/>
+                  <a:cs typeface="Consolas" panose="020B0609020204030204" pitchFamily="49" charset="0"/>
+                </a:rPr>
+                <a:t>MI</a:t>
+              </a:r>
+            </a:p>
+          </p:txBody>
+        </p:sp>
+        <p:sp>
+          <p:nvSpPr>
+            <p:cNvPr id="14371" name="Rectangle 34"/>
+            <p:cNvSpPr>
+              <a:spLocks noChangeArrowheads="1"/>
+            </p:cNvSpPr>
+            <p:nvPr/>
+          </p:nvSpPr>
+          <p:spPr bwMode="auto">
+            <a:xfrm>
+              <a:off x="1423974" y="3900488"/>
+              <a:ext cx="1272997" cy="265113"/>
+            </a:xfrm>
+            <a:prstGeom prst="rect">
+              <a:avLst/>
+            </a:prstGeom>
+            <a:noFill/>
+            <a:ln w="12700">
+              <a:solidFill>
+                <a:schemeClr val="tx1"/>
+              </a:solidFill>
+              <a:miter lim="800000"/>
+              <a:headEnd/>
+              <a:tailEnd/>
+            </a:ln>
+          </p:spPr>
+          <p:txBody>
+            <a:bodyPr wrap="none" anchor="ctr"/>
+            <a:lstStyle/>
+            <a:p>
+              <a:pPr algn="ctr"/>
+              <a:r>
+                <a:rPr lang="en-US" sz="2000" b="1" dirty="0">
+                  <a:solidFill>
+                    <a:srgbClr val="FF0000"/>
+                  </a:solidFill>
+                  <a:latin typeface="Consolas" panose="020B0609020204030204" pitchFamily="49" charset="0"/>
+                  <a:cs typeface="Consolas" panose="020B0609020204030204" pitchFamily="49" charset="0"/>
+                </a:rPr>
+                <a:t>VC</a:t>
+              </a:r>
+            </a:p>
+          </p:txBody>
+        </p:sp>
+        <p:sp>
+          <p:nvSpPr>
+            <p:cNvPr id="14372" name="Rectangle 35"/>
+            <p:cNvSpPr>
+              <a:spLocks noChangeArrowheads="1"/>
+            </p:cNvSpPr>
+            <p:nvPr/>
+          </p:nvSpPr>
+          <p:spPr bwMode="auto">
+            <a:xfrm>
+              <a:off x="1423974" y="1779588"/>
+              <a:ext cx="1272997" cy="265113"/>
+            </a:xfrm>
+            <a:prstGeom prst="rect">
+              <a:avLst/>
+            </a:prstGeom>
+            <a:solidFill>
+              <a:schemeClr val="accent1"/>
+            </a:solidFill>
+            <a:ln w="12700">
+              <a:solidFill>
+                <a:schemeClr val="tx1"/>
+              </a:solidFill>
+              <a:miter lim="800000"/>
+              <a:headEnd/>
+              <a:tailEnd/>
+            </a:ln>
+          </p:spPr>
+          <p:txBody>
+            <a:bodyPr wrap="none" anchor="ctr"/>
+            <a:lstStyle/>
+            <a:p>
+              <a:pPr algn="ctr"/>
+              <a:r>
+                <a:rPr lang="en-US" sz="1800" b="1" dirty="0">
+                  <a:solidFill>
+                    <a:schemeClr val="bg1"/>
+                  </a:solidFill>
+                  <a:latin typeface="Consolas" panose="020B0609020204030204" pitchFamily="49" charset="0"/>
+                  <a:cs typeface="Consolas" panose="020B0609020204030204" pitchFamily="49" charset="0"/>
+                </a:rPr>
+                <a:t>Suffix</a:t>
+              </a:r>
+            </a:p>
+          </p:txBody>
+        </p:sp>
+        <p:sp>
+          <p:nvSpPr>
+            <p:cNvPr id="14373" name="Rectangle 36"/>
+            <p:cNvSpPr>
+              <a:spLocks noChangeArrowheads="1"/>
+            </p:cNvSpPr>
+            <p:nvPr/>
+          </p:nvSpPr>
+          <p:spPr bwMode="auto">
+            <a:xfrm>
+              <a:off x="2696971" y="1779588"/>
+              <a:ext cx="3435035" cy="265113"/>
+            </a:xfrm>
+            <a:prstGeom prst="rect">
+              <a:avLst/>
+            </a:prstGeom>
+            <a:solidFill>
+              <a:schemeClr val="accent1"/>
+            </a:solidFill>
+            <a:ln w="12700">
+              <a:solidFill>
+                <a:schemeClr val="tx1"/>
+              </a:solidFill>
+              <a:miter lim="800000"/>
+              <a:headEnd/>
+              <a:tailEnd/>
+            </a:ln>
+          </p:spPr>
+          <p:txBody>
+            <a:bodyPr wrap="none" anchor="ctr"/>
+            <a:lstStyle/>
+            <a:p>
+              <a:r>
+                <a:rPr lang="en-US" sz="1800" b="1" dirty="0">
+                  <a:solidFill>
+                    <a:schemeClr val="bg1"/>
+                  </a:solidFill>
+                  <a:latin typeface="Consolas" panose="020B0609020204030204" pitchFamily="49" charset="0"/>
+                  <a:cs typeface="Consolas" panose="020B0609020204030204" pitchFamily="49" charset="0"/>
+                </a:rPr>
+                <a:t>Description</a:t>
+              </a:r>
+            </a:p>
+          </p:txBody>
+        </p:sp>
+        <p:sp>
+          <p:nvSpPr>
+            <p:cNvPr id="14374" name="Rectangle 37"/>
+            <p:cNvSpPr>
+              <a:spLocks noChangeArrowheads="1"/>
+            </p:cNvSpPr>
+            <p:nvPr/>
+          </p:nvSpPr>
+          <p:spPr bwMode="auto">
+            <a:xfrm>
+              <a:off x="6132006" y="2309813"/>
+              <a:ext cx="1654668" cy="265113"/>
+            </a:xfrm>
+            <a:prstGeom prst="rect">
+              <a:avLst/>
+            </a:prstGeom>
+            <a:noFill/>
+            <a:ln w="12700">
+              <a:solidFill>
+                <a:schemeClr val="tx1"/>
+              </a:solidFill>
+              <a:miter lim="800000"/>
+              <a:headEnd/>
+              <a:tailEnd/>
+            </a:ln>
+          </p:spPr>
+          <p:txBody>
+            <a:bodyPr wrap="none" anchor="ctr"/>
+            <a:lstStyle/>
+            <a:p>
+              <a:r>
+                <a:rPr lang="en-US" sz="1800" b="1" dirty="0">
+                  <a:solidFill>
+                    <a:srgbClr val="0000FF"/>
+                  </a:solidFill>
+                  <a:latin typeface="Consolas" panose="020B0609020204030204" pitchFamily="49" charset="0"/>
+                  <a:cs typeface="Consolas" panose="020B0609020204030204" pitchFamily="49" charset="0"/>
+                </a:rPr>
+                <a:t>Z=0</a:t>
+              </a:r>
+            </a:p>
+          </p:txBody>
+        </p:sp>
+        <p:sp>
+          <p:nvSpPr>
+            <p:cNvPr id="14375" name="Rectangle 38"/>
+            <p:cNvSpPr>
+              <a:spLocks noChangeArrowheads="1"/>
+            </p:cNvSpPr>
+            <p:nvPr/>
+          </p:nvSpPr>
+          <p:spPr bwMode="auto">
+            <a:xfrm>
+              <a:off x="6132006" y="2574926"/>
+              <a:ext cx="1654668" cy="265113"/>
+            </a:xfrm>
+            <a:prstGeom prst="rect">
+              <a:avLst/>
+            </a:prstGeom>
+            <a:noFill/>
+            <a:ln w="12700">
+              <a:solidFill>
+                <a:schemeClr val="tx1"/>
+              </a:solidFill>
+              <a:miter lim="800000"/>
+              <a:headEnd/>
+              <a:tailEnd/>
+            </a:ln>
+          </p:spPr>
+          <p:txBody>
+            <a:bodyPr wrap="none" anchor="ctr"/>
+            <a:lstStyle/>
+            <a:p>
+              <a:r>
+                <a:rPr lang="en-US" sz="1800" b="1" dirty="0">
+                  <a:solidFill>
+                    <a:srgbClr val="0000FF"/>
+                  </a:solidFill>
+                  <a:latin typeface="Consolas" panose="020B0609020204030204" pitchFamily="49" charset="0"/>
+                  <a:cs typeface="Consolas" panose="020B0609020204030204" pitchFamily="49" charset="0"/>
+                </a:rPr>
+                <a:t>C=1</a:t>
+              </a:r>
+            </a:p>
+          </p:txBody>
+        </p:sp>
+        <p:sp>
+          <p:nvSpPr>
+            <p:cNvPr id="14376" name="Rectangle 39"/>
+            <p:cNvSpPr>
+              <a:spLocks noChangeArrowheads="1"/>
+            </p:cNvSpPr>
+            <p:nvPr/>
+          </p:nvSpPr>
+          <p:spPr bwMode="auto">
+            <a:xfrm>
+              <a:off x="6132006" y="2840038"/>
+              <a:ext cx="1654668" cy="265113"/>
+            </a:xfrm>
+            <a:prstGeom prst="rect">
+              <a:avLst/>
+            </a:prstGeom>
+            <a:noFill/>
+            <a:ln w="12700">
+              <a:solidFill>
+                <a:schemeClr val="tx1"/>
+              </a:solidFill>
+              <a:miter lim="800000"/>
+              <a:headEnd/>
+              <a:tailEnd/>
+            </a:ln>
+          </p:spPr>
+          <p:txBody>
+            <a:bodyPr wrap="none" anchor="ctr"/>
+            <a:lstStyle/>
+            <a:p>
+              <a:r>
+                <a:rPr lang="en-US" sz="1800" b="1" dirty="0">
+                  <a:solidFill>
+                    <a:srgbClr val="0000FF"/>
+                  </a:solidFill>
+                  <a:latin typeface="Consolas" panose="020B0609020204030204" pitchFamily="49" charset="0"/>
+                  <a:cs typeface="Consolas" panose="020B0609020204030204" pitchFamily="49" charset="0"/>
+                </a:rPr>
+                <a:t>C=0</a:t>
+              </a:r>
+            </a:p>
+          </p:txBody>
+        </p:sp>
+        <p:sp>
+          <p:nvSpPr>
+            <p:cNvPr id="14377" name="Rectangle 40"/>
+            <p:cNvSpPr>
+              <a:spLocks noChangeArrowheads="1"/>
+            </p:cNvSpPr>
+            <p:nvPr/>
+          </p:nvSpPr>
+          <p:spPr bwMode="auto">
+            <a:xfrm>
+              <a:off x="6132006" y="2044701"/>
+              <a:ext cx="1654668" cy="265113"/>
+            </a:xfrm>
+            <a:prstGeom prst="rect">
+              <a:avLst/>
+            </a:prstGeom>
+            <a:noFill/>
+            <a:ln w="12700">
+              <a:solidFill>
+                <a:schemeClr val="tx1"/>
+              </a:solidFill>
+              <a:miter lim="800000"/>
+              <a:headEnd/>
+              <a:tailEnd/>
+            </a:ln>
+          </p:spPr>
+          <p:txBody>
+            <a:bodyPr wrap="none" anchor="ctr"/>
+            <a:lstStyle/>
+            <a:p>
+              <a:r>
+                <a:rPr lang="en-US" sz="1800" b="1" dirty="0">
+                  <a:solidFill>
+                    <a:srgbClr val="0000FF"/>
+                  </a:solidFill>
+                  <a:latin typeface="Consolas" panose="020B0609020204030204" pitchFamily="49" charset="0"/>
+                  <a:cs typeface="Consolas" panose="020B0609020204030204" pitchFamily="49" charset="0"/>
+                </a:rPr>
+                <a:t>Z=1</a:t>
+              </a:r>
+            </a:p>
+          </p:txBody>
+        </p:sp>
+        <p:sp>
+          <p:nvSpPr>
+            <p:cNvPr id="14378" name="Rectangle 41"/>
+            <p:cNvSpPr>
+              <a:spLocks noChangeArrowheads="1"/>
+            </p:cNvSpPr>
+            <p:nvPr/>
+          </p:nvSpPr>
+          <p:spPr bwMode="auto">
+            <a:xfrm>
+              <a:off x="6132006" y="1779588"/>
+              <a:ext cx="1654668" cy="265113"/>
+            </a:xfrm>
+            <a:prstGeom prst="rect">
+              <a:avLst/>
+            </a:prstGeom>
+            <a:solidFill>
+              <a:schemeClr val="accent1"/>
+            </a:solidFill>
+            <a:ln w="12700">
+              <a:solidFill>
+                <a:schemeClr val="tx1"/>
+              </a:solidFill>
+              <a:miter lim="800000"/>
+              <a:headEnd/>
+              <a:tailEnd/>
+            </a:ln>
+          </p:spPr>
+          <p:txBody>
+            <a:bodyPr wrap="none" anchor="ctr"/>
+            <a:lstStyle/>
+            <a:p>
+              <a:r>
+                <a:rPr lang="en-US" sz="1800" b="1" dirty="0">
+                  <a:solidFill>
+                    <a:schemeClr val="bg1"/>
+                  </a:solidFill>
+                  <a:latin typeface="Consolas" panose="020B0609020204030204" pitchFamily="49" charset="0"/>
+                  <a:cs typeface="Consolas" panose="020B0609020204030204" pitchFamily="49" charset="0"/>
+                </a:rPr>
+                <a:t>Flags tested</a:t>
+              </a:r>
+            </a:p>
+          </p:txBody>
+        </p:sp>
+        <p:sp>
+          <p:nvSpPr>
+            <p:cNvPr id="14379" name="Rectangle 42"/>
+            <p:cNvSpPr>
+              <a:spLocks noChangeArrowheads="1"/>
+            </p:cNvSpPr>
+            <p:nvPr/>
+          </p:nvSpPr>
+          <p:spPr bwMode="auto">
+            <a:xfrm>
+              <a:off x="6132006" y="3105151"/>
+              <a:ext cx="1654668" cy="265113"/>
+            </a:xfrm>
+            <a:prstGeom prst="rect">
+              <a:avLst/>
+            </a:prstGeom>
+            <a:noFill/>
+            <a:ln w="12700">
+              <a:solidFill>
+                <a:schemeClr val="tx1"/>
+              </a:solidFill>
+              <a:miter lim="800000"/>
+              <a:headEnd/>
+              <a:tailEnd/>
+            </a:ln>
+          </p:spPr>
+          <p:txBody>
+            <a:bodyPr wrap="none" anchor="ctr"/>
+            <a:lstStyle/>
+            <a:p>
+              <a:r>
+                <a:rPr lang="en-US" sz="1800" b="1" dirty="0">
+                  <a:solidFill>
+                    <a:srgbClr val="0000FF"/>
+                  </a:solidFill>
+                  <a:latin typeface="Consolas" panose="020B0609020204030204" pitchFamily="49" charset="0"/>
+                  <a:cs typeface="Consolas" panose="020B0609020204030204" pitchFamily="49" charset="0"/>
+                </a:rPr>
+                <a:t>N=1</a:t>
+              </a:r>
+            </a:p>
+          </p:txBody>
+        </p:sp>
+        <p:sp>
+          <p:nvSpPr>
+            <p:cNvPr id="14380" name="Rectangle 43"/>
+            <p:cNvSpPr>
+              <a:spLocks noChangeArrowheads="1"/>
+            </p:cNvSpPr>
+            <p:nvPr/>
+          </p:nvSpPr>
+          <p:spPr bwMode="auto">
+            <a:xfrm>
+              <a:off x="6132006" y="3370263"/>
+              <a:ext cx="1654668" cy="265113"/>
+            </a:xfrm>
+            <a:prstGeom prst="rect">
+              <a:avLst/>
+            </a:prstGeom>
+            <a:noFill/>
+            <a:ln w="12700">
+              <a:solidFill>
+                <a:schemeClr val="tx1"/>
+              </a:solidFill>
+              <a:miter lim="800000"/>
+              <a:headEnd/>
+              <a:tailEnd/>
+            </a:ln>
+          </p:spPr>
+          <p:txBody>
+            <a:bodyPr wrap="none" anchor="ctr"/>
+            <a:lstStyle/>
+            <a:p>
+              <a:r>
+                <a:rPr lang="en-US" sz="1800" b="1" dirty="0">
+                  <a:solidFill>
+                    <a:srgbClr val="0000FF"/>
+                  </a:solidFill>
+                  <a:latin typeface="Consolas" panose="020B0609020204030204" pitchFamily="49" charset="0"/>
+                  <a:cs typeface="Consolas" panose="020B0609020204030204" pitchFamily="49" charset="0"/>
+                </a:rPr>
+                <a:t>N=0</a:t>
+              </a:r>
+            </a:p>
+          </p:txBody>
+        </p:sp>
+        <p:sp>
+          <p:nvSpPr>
+            <p:cNvPr id="14381" name="Rectangle 44"/>
+            <p:cNvSpPr>
+              <a:spLocks noChangeArrowheads="1"/>
+            </p:cNvSpPr>
+            <p:nvPr/>
+          </p:nvSpPr>
+          <p:spPr bwMode="auto">
+            <a:xfrm>
+              <a:off x="6132006" y="3635376"/>
+              <a:ext cx="1654668" cy="265113"/>
+            </a:xfrm>
+            <a:prstGeom prst="rect">
+              <a:avLst/>
+            </a:prstGeom>
+            <a:noFill/>
+            <a:ln w="12700">
+              <a:solidFill>
+                <a:schemeClr val="tx1"/>
+              </a:solidFill>
+              <a:miter lim="800000"/>
+              <a:headEnd/>
+              <a:tailEnd/>
+            </a:ln>
+          </p:spPr>
+          <p:txBody>
+            <a:bodyPr wrap="none" anchor="ctr"/>
+            <a:lstStyle/>
+            <a:p>
+              <a:r>
+                <a:rPr lang="en-US" sz="1800" b="1" dirty="0">
+                  <a:solidFill>
+                    <a:srgbClr val="0000FF"/>
+                  </a:solidFill>
+                  <a:latin typeface="Consolas" panose="020B0609020204030204" pitchFamily="49" charset="0"/>
+                  <a:cs typeface="Consolas" panose="020B0609020204030204" pitchFamily="49" charset="0"/>
+                </a:rPr>
+                <a:t>V=1</a:t>
+              </a:r>
+            </a:p>
+          </p:txBody>
+        </p:sp>
+        <p:sp>
+          <p:nvSpPr>
+            <p:cNvPr id="14382" name="Rectangle 45"/>
+            <p:cNvSpPr>
+              <a:spLocks noChangeArrowheads="1"/>
+            </p:cNvSpPr>
+            <p:nvPr/>
+          </p:nvSpPr>
+          <p:spPr bwMode="auto">
+            <a:xfrm>
+              <a:off x="6132006" y="3900488"/>
+              <a:ext cx="1654668" cy="265113"/>
+            </a:xfrm>
+            <a:prstGeom prst="rect">
+              <a:avLst/>
+            </a:prstGeom>
+            <a:noFill/>
+            <a:ln w="12700">
+              <a:solidFill>
+                <a:schemeClr val="tx1"/>
+              </a:solidFill>
+              <a:miter lim="800000"/>
+              <a:headEnd/>
+              <a:tailEnd/>
+            </a:ln>
+          </p:spPr>
+          <p:txBody>
+            <a:bodyPr wrap="none" anchor="ctr"/>
+            <a:lstStyle/>
+            <a:p>
+              <a:r>
+                <a:rPr lang="en-US" sz="1800" b="1" dirty="0">
+                  <a:solidFill>
+                    <a:srgbClr val="0000FF"/>
+                  </a:solidFill>
+                  <a:latin typeface="Consolas" panose="020B0609020204030204" pitchFamily="49" charset="0"/>
+                  <a:cs typeface="Consolas" panose="020B0609020204030204" pitchFamily="49" charset="0"/>
+                </a:rPr>
+                <a:t>V=0</a:t>
+              </a:r>
+            </a:p>
+          </p:txBody>
+        </p:sp>
+        <p:sp>
+          <p:nvSpPr>
+            <p:cNvPr id="14383" name="Rectangle 46"/>
+            <p:cNvSpPr>
+              <a:spLocks noChangeArrowheads="1"/>
+            </p:cNvSpPr>
+            <p:nvPr/>
+          </p:nvSpPr>
+          <p:spPr bwMode="auto">
+            <a:xfrm>
+              <a:off x="6132006" y="4165601"/>
+              <a:ext cx="1654668" cy="265113"/>
+            </a:xfrm>
+            <a:prstGeom prst="rect">
+              <a:avLst/>
+            </a:prstGeom>
+            <a:noFill/>
+            <a:ln w="12700">
+              <a:solidFill>
+                <a:schemeClr val="tx1"/>
+              </a:solidFill>
+              <a:miter lim="800000"/>
+              <a:headEnd/>
+              <a:tailEnd/>
+            </a:ln>
+          </p:spPr>
+          <p:txBody>
+            <a:bodyPr wrap="none" anchor="ctr"/>
+            <a:lstStyle/>
+            <a:p>
+              <a:r>
+                <a:rPr lang="en-US" sz="1800" b="1" dirty="0">
+                  <a:solidFill>
+                    <a:srgbClr val="0000FF"/>
+                  </a:solidFill>
+                  <a:latin typeface="Consolas" panose="020B0609020204030204" pitchFamily="49" charset="0"/>
+                  <a:cs typeface="Consolas" panose="020B0609020204030204" pitchFamily="49" charset="0"/>
+                </a:rPr>
+                <a:t>C=1 &amp; Z=0</a:t>
+              </a:r>
+            </a:p>
+          </p:txBody>
+        </p:sp>
+        <p:sp>
+          <p:nvSpPr>
+            <p:cNvPr id="14384" name="Rectangle 47"/>
+            <p:cNvSpPr>
+              <a:spLocks noChangeArrowheads="1"/>
+            </p:cNvSpPr>
+            <p:nvPr/>
+          </p:nvSpPr>
+          <p:spPr bwMode="auto">
+            <a:xfrm>
+              <a:off x="6132006" y="4430713"/>
+              <a:ext cx="1654668" cy="265113"/>
+            </a:xfrm>
+            <a:prstGeom prst="rect">
+              <a:avLst/>
+            </a:prstGeom>
+            <a:noFill/>
+            <a:ln w="12700">
+              <a:solidFill>
+                <a:schemeClr val="tx1"/>
+              </a:solidFill>
+              <a:miter lim="800000"/>
+              <a:headEnd/>
+              <a:tailEnd/>
+            </a:ln>
+          </p:spPr>
+          <p:txBody>
+            <a:bodyPr wrap="none" anchor="ctr"/>
+            <a:lstStyle/>
+            <a:p>
+              <a:r>
+                <a:rPr lang="en-US" sz="1800" b="1">
+                  <a:solidFill>
+                    <a:srgbClr val="0000FF"/>
+                  </a:solidFill>
+                  <a:latin typeface="Consolas" panose="020B0609020204030204" pitchFamily="49" charset="0"/>
+                  <a:cs typeface="Consolas" panose="020B0609020204030204" pitchFamily="49" charset="0"/>
+                </a:rPr>
+                <a:t>C=0 or Z=1</a:t>
+              </a:r>
+            </a:p>
+          </p:txBody>
+        </p:sp>
+        <p:sp>
+          <p:nvSpPr>
+            <p:cNvPr id="14385" name="Rectangle 48"/>
+            <p:cNvSpPr>
+              <a:spLocks noChangeArrowheads="1"/>
+            </p:cNvSpPr>
+            <p:nvPr/>
+          </p:nvSpPr>
+          <p:spPr bwMode="auto">
+            <a:xfrm>
+              <a:off x="6132006" y="4695826"/>
+              <a:ext cx="1654668" cy="265113"/>
+            </a:xfrm>
+            <a:prstGeom prst="rect">
+              <a:avLst/>
+            </a:prstGeom>
+            <a:noFill/>
+            <a:ln w="12700">
+              <a:solidFill>
+                <a:schemeClr val="tx1"/>
+              </a:solidFill>
+              <a:miter lim="800000"/>
+              <a:headEnd/>
+              <a:tailEnd/>
+            </a:ln>
+          </p:spPr>
+          <p:txBody>
+            <a:bodyPr wrap="none" anchor="ctr"/>
+            <a:lstStyle/>
+            <a:p>
+              <a:r>
+                <a:rPr lang="en-US" sz="1800" b="1">
+                  <a:solidFill>
+                    <a:srgbClr val="0000FF"/>
+                  </a:solidFill>
+                  <a:latin typeface="Consolas" panose="020B0609020204030204" pitchFamily="49" charset="0"/>
+                  <a:cs typeface="Consolas" panose="020B0609020204030204" pitchFamily="49" charset="0"/>
+                </a:rPr>
+                <a:t>N=V</a:t>
+              </a:r>
+            </a:p>
+          </p:txBody>
+        </p:sp>
+        <p:sp>
+          <p:nvSpPr>
+            <p:cNvPr id="14386" name="Rectangle 49"/>
+            <p:cNvSpPr>
+              <a:spLocks noChangeArrowheads="1"/>
+            </p:cNvSpPr>
+            <p:nvPr/>
+          </p:nvSpPr>
+          <p:spPr bwMode="auto">
+            <a:xfrm>
+              <a:off x="6132006" y="4960938"/>
+              <a:ext cx="1654668" cy="265113"/>
+            </a:xfrm>
+            <a:prstGeom prst="rect">
+              <a:avLst/>
+            </a:prstGeom>
+            <a:noFill/>
+            <a:ln w="12700">
+              <a:solidFill>
+                <a:schemeClr val="tx1"/>
+              </a:solidFill>
+              <a:miter lim="800000"/>
+              <a:headEnd/>
+              <a:tailEnd/>
+            </a:ln>
+          </p:spPr>
+          <p:txBody>
+            <a:bodyPr wrap="none" anchor="ctr"/>
+            <a:lstStyle/>
+            <a:p>
+              <a:r>
+                <a:rPr lang="en-US" sz="1800" b="1">
+                  <a:solidFill>
+                    <a:srgbClr val="0000FF"/>
+                  </a:solidFill>
+                  <a:latin typeface="Consolas" panose="020B0609020204030204" pitchFamily="49" charset="0"/>
+                  <a:cs typeface="Consolas" panose="020B0609020204030204" pitchFamily="49" charset="0"/>
+                </a:rPr>
+                <a:t>N!=V</a:t>
+              </a:r>
+            </a:p>
+          </p:txBody>
+        </p:sp>
+        <p:sp>
+          <p:nvSpPr>
+            <p:cNvPr id="14387" name="Rectangle 50"/>
+            <p:cNvSpPr>
+              <a:spLocks noChangeArrowheads="1"/>
+            </p:cNvSpPr>
+            <p:nvPr/>
+          </p:nvSpPr>
+          <p:spPr bwMode="auto">
+            <a:xfrm>
+              <a:off x="6132006" y="5226051"/>
+              <a:ext cx="1654668" cy="265113"/>
+            </a:xfrm>
+            <a:prstGeom prst="rect">
+              <a:avLst/>
+            </a:prstGeom>
+            <a:noFill/>
+            <a:ln w="12700">
+              <a:solidFill>
+                <a:schemeClr val="tx1"/>
+              </a:solidFill>
+              <a:miter lim="800000"/>
+              <a:headEnd/>
+              <a:tailEnd/>
+            </a:ln>
+          </p:spPr>
+          <p:txBody>
+            <a:bodyPr wrap="none" anchor="ctr"/>
+            <a:lstStyle/>
+            <a:p>
+              <a:r>
+                <a:rPr lang="en-US" sz="1800" b="1">
+                  <a:solidFill>
+                    <a:srgbClr val="0000FF"/>
+                  </a:solidFill>
+                  <a:latin typeface="Consolas" panose="020B0609020204030204" pitchFamily="49" charset="0"/>
+                  <a:cs typeface="Consolas" panose="020B0609020204030204" pitchFamily="49" charset="0"/>
+                </a:rPr>
+                <a:t>Z=0 &amp; N=V</a:t>
+              </a:r>
+            </a:p>
+          </p:txBody>
+        </p:sp>
+        <p:sp>
+          <p:nvSpPr>
+            <p:cNvPr id="14388" name="Rectangle 51"/>
+            <p:cNvSpPr>
+              <a:spLocks noChangeArrowheads="1"/>
+            </p:cNvSpPr>
+            <p:nvPr/>
+          </p:nvSpPr>
+          <p:spPr bwMode="auto">
+            <a:xfrm>
+              <a:off x="6132006" y="5491163"/>
+              <a:ext cx="1654668" cy="265113"/>
+            </a:xfrm>
+            <a:prstGeom prst="rect">
+              <a:avLst/>
+            </a:prstGeom>
+            <a:noFill/>
+            <a:ln w="12700">
+              <a:solidFill>
+                <a:schemeClr val="tx1"/>
+              </a:solidFill>
+              <a:miter lim="800000"/>
+              <a:headEnd/>
+              <a:tailEnd/>
+            </a:ln>
+          </p:spPr>
+          <p:txBody>
+            <a:bodyPr wrap="none" anchor="ctr"/>
+            <a:lstStyle/>
+            <a:p>
+              <a:r>
+                <a:rPr lang="en-US" sz="1800" b="1" dirty="0">
+                  <a:solidFill>
+                    <a:srgbClr val="0000FF"/>
+                  </a:solidFill>
+                  <a:latin typeface="Consolas" panose="020B0609020204030204" pitchFamily="49" charset="0"/>
+                  <a:cs typeface="Consolas" panose="020B0609020204030204" pitchFamily="49" charset="0"/>
+                </a:rPr>
+                <a:t>Z=1 or N!=V</a:t>
+              </a:r>
+            </a:p>
+          </p:txBody>
+        </p:sp>
+        <p:sp>
+          <p:nvSpPr>
+            <p:cNvPr id="14389" name="Rectangle 52"/>
+            <p:cNvSpPr>
+              <a:spLocks noChangeArrowheads="1"/>
+            </p:cNvSpPr>
+            <p:nvPr/>
+          </p:nvSpPr>
+          <p:spPr bwMode="auto">
+            <a:xfrm>
+              <a:off x="6132006" y="5756276"/>
+              <a:ext cx="1654668" cy="265113"/>
+            </a:xfrm>
+            <a:prstGeom prst="rect">
+              <a:avLst/>
+            </a:prstGeom>
+            <a:noFill/>
+            <a:ln w="12700">
+              <a:solidFill>
+                <a:schemeClr val="tx1"/>
+              </a:solidFill>
+              <a:miter lim="800000"/>
+              <a:headEnd/>
+              <a:tailEnd/>
+            </a:ln>
+          </p:spPr>
+          <p:txBody>
+            <a:bodyPr wrap="none" anchor="ctr"/>
+            <a:lstStyle/>
+            <a:p>
+              <a:endParaRPr lang="en-GB" sz="1800" b="1">
+                <a:solidFill>
+                  <a:srgbClr val="0000FF"/>
+                </a:solidFill>
+                <a:latin typeface="Consolas" panose="020B0609020204030204" pitchFamily="49" charset="0"/>
+                <a:cs typeface="Consolas" panose="020B0609020204030204" pitchFamily="49" charset="0"/>
+              </a:endParaRPr>
+            </a:p>
+          </p:txBody>
+        </p:sp>
+      </p:grpSp>
+      <p:sp>
+        <p:nvSpPr>
+          <p:cNvPr id="3" name="Horizontal Scroll 15">
+            <a:extLst>
+              <a:ext uri="{FF2B5EF4-FFF2-40B4-BE49-F238E27FC236}">
+                <a16:creationId xmlns:a16="http://schemas.microsoft.com/office/drawing/2014/main" id="{4ACAA33B-8833-6998-194D-3EC418B6F321}"/>
+              </a:ext>
+            </a:extLst>
+          </p:cNvPr>
+          <p:cNvSpPr/>
+          <p:nvPr/>
+        </p:nvSpPr>
+        <p:spPr>
+          <a:xfrm>
+            <a:off x="76200" y="-23210"/>
+            <a:ext cx="1265712" cy="762000"/>
+          </a:xfrm>
+          <a:prstGeom prst="horizontalScroll">
+            <a:avLst/>
+          </a:prstGeom>
+          <a:gradFill rotWithShape="1">
+            <a:gsLst>
+              <a:gs pos="0">
+                <a:srgbClr val="4F81BD">
+                  <a:tint val="50000"/>
+                  <a:satMod val="300000"/>
+                </a:srgbClr>
+              </a:gs>
+              <a:gs pos="35000">
+                <a:srgbClr val="4F81BD">
+                  <a:tint val="37000"/>
+                  <a:satMod val="300000"/>
+                </a:srgbClr>
+              </a:gs>
+              <a:gs pos="100000">
+                <a:srgbClr val="4F81BD">
+                  <a:tint val="15000"/>
+                  <a:satMod val="350000"/>
+                </a:srgbClr>
+              </a:gs>
+            </a:gsLst>
+            <a:lin ang="16200000" scaled="1"/>
+          </a:gradFill>
+          <a:ln w="9525" cap="flat" cmpd="sng" algn="ctr">
+            <a:solidFill>
+              <a:srgbClr val="4F81BD">
+                <a:shade val="95000"/>
+                <a:satMod val="105000"/>
+              </a:srgbClr>
+            </a:solidFill>
+            <a:prstDash val="solid"/>
+          </a:ln>
+          <a:effectLst>
+            <a:outerShdw blurRad="40000" dist="20000" dir="5400000" rotWithShape="0">
+              <a:srgbClr val="000000">
+                <a:alpha val="38000"/>
+              </a:srgbClr>
+            </a:outerShdw>
+          </a:effectLst>
+        </p:spPr>
+        <p:txBody>
+          <a:bodyPr rtlCol="0" anchor="ctr"/>
+          <a:lstStyle/>
+          <a:p>
+            <a:pPr marL="0" marR="0" lvl="0" indent="0" algn="ctr" defTabSz="457200" eaLnBrk="1" fontAlgn="auto" latinLnBrk="0" hangingPunct="1">
+              <a:lnSpc>
+                <a:spcPct val="100000"/>
+              </a:lnSpc>
+              <a:spcBef>
+                <a:spcPts val="0"/>
+              </a:spcBef>
+              <a:spcAft>
+                <a:spcPts val="0"/>
+              </a:spcAft>
+              <a:buClrTx/>
+              <a:buSzTx/>
+              <a:buFontTx/>
+              <a:buNone/>
+              <a:tabLst/>
+              <a:defRPr/>
+            </a:pPr>
+            <a:r>
+              <a:rPr kumimoji="0" lang="en-US" sz="2400" b="0" i="0" u="none" strike="noStrike" kern="0" cap="none" spc="0" normalizeH="0" baseline="0" noProof="0" dirty="0">
+                <a:ln>
+                  <a:noFill/>
+                </a:ln>
+                <a:solidFill>
+                  <a:prstClr val="black"/>
+                </a:solidFill>
+                <a:effectLst/>
+                <a:uLnTx/>
+                <a:uFillTx/>
+                <a:latin typeface="Calibri"/>
+                <a:ea typeface="+mn-ea"/>
+                <a:cs typeface="+mn-cs"/>
+              </a:rPr>
+              <a:t>Review</a:t>
+            </a:r>
+          </a:p>
+        </p:txBody>
+      </p:sp>
+    </p:spTree>
+    <p:extLst>
+      <p:ext uri="{BB962C8B-B14F-4D97-AF65-F5344CB8AC3E}">
+        <p14:creationId xmlns:p14="http://schemas.microsoft.com/office/powerpoint/2010/main" val="2083494270"/>
+      </p:ext>
+    </p:extLst>
+  </p:cSld>
+  <p:clrMapOvr>
+    <a:masterClrMapping/>
+  </p:clrMapOvr>
+  <p:transition/>
+</p:sld>
+</file>
+
+<file path=ppt/slides/slide20.xml><?xml version="1.0" encoding="utf-8"?>
 <p:sld xmlns:a="http://schemas.openxmlformats.org/drawingml/2006/main" xmlns:r="http://schemas.openxmlformats.org/officeDocument/2006/relationships" xmlns:p="http://schemas.openxmlformats.org/presentationml/2006/main">
   <p:cSld>
     <p:spTree>
@@ -17690,7 +21966,7 @@
             <a:fld id="{EA7C8D44-3667-46F6-9772-CC52308E2A7F}" type="slidenum">
               <a:rPr kumimoji="0" lang="en-US" smtClean="0"/>
               <a:pPr/>
-              <a:t>19</a:t>
+              <a:t>20</a:t>
             </a:fld>
             <a:endParaRPr kumimoji="0" lang="en-US" dirty="0"/>
           </a:p>
@@ -17792,704 +22068,7 @@
 </p:sld>
 </file>
 
-<file path=ppt/slides/slide2.xml><?xml version="1.0" encoding="utf-8"?>
-<p:sld xmlns:a="http://schemas.openxmlformats.org/drawingml/2006/main" xmlns:r="http://schemas.openxmlformats.org/officeDocument/2006/relationships" xmlns:p="http://schemas.openxmlformats.org/presentationml/2006/main">
-  <p:cSld>
-    <p:spTree>
-      <p:nvGrpSpPr>
-        <p:cNvPr id="1" name=""/>
-        <p:cNvGrpSpPr/>
-        <p:nvPr/>
-      </p:nvGrpSpPr>
-      <p:grpSpPr>
-        <a:xfrm>
-          <a:off x="0" y="0"/>
-          <a:ext cx="0" cy="0"/>
-          <a:chOff x="0" y="0"/>
-          <a:chExt cx="0" cy="0"/>
-        </a:xfrm>
-      </p:grpSpPr>
-      <p:sp>
-        <p:nvSpPr>
-          <p:cNvPr id="2" name="Title 1"/>
-          <p:cNvSpPr>
-            <a:spLocks noGrp="1"/>
-          </p:cNvSpPr>
-          <p:nvPr>
-            <p:ph type="title"/>
-          </p:nvPr>
-        </p:nvSpPr>
-        <p:spPr/>
-        <p:txBody>
-          <a:bodyPr>
-            <a:normAutofit/>
-          </a:bodyPr>
-          <a:lstStyle/>
-          <a:p>
-            <a:r>
-              <a:rPr lang="en-US" dirty="0"/>
-              <a:t>Signed Comparison</a:t>
-            </a:r>
-          </a:p>
-        </p:txBody>
-      </p:sp>
-      <p:sp>
-        <p:nvSpPr>
-          <p:cNvPr id="3" name="Slide Number Placeholder 2"/>
-          <p:cNvSpPr>
-            <a:spLocks noGrp="1"/>
-          </p:cNvSpPr>
-          <p:nvPr>
-            <p:ph type="sldNum" sz="quarter" idx="12"/>
-          </p:nvPr>
-        </p:nvSpPr>
-        <p:spPr/>
-        <p:txBody>
-          <a:bodyPr/>
-          <a:lstStyle/>
-          <a:p>
-            <a:pPr defTabSz="685800"/>
-            <a:fld id="{EA7C8D44-3667-46F6-9772-CC52308E2A7F}" type="slidenum">
-              <a:rPr lang="en-US">
-                <a:solidFill>
-                  <a:srgbClr val="1F497D"/>
-                </a:solidFill>
-                <a:latin typeface="Gill Sans MT"/>
-              </a:rPr>
-              <a:pPr defTabSz="685800"/>
-              <a:t>2</a:t>
-            </a:fld>
-            <a:endParaRPr lang="en-US" dirty="0">
-              <a:solidFill>
-                <a:srgbClr val="1F497D"/>
-              </a:solidFill>
-              <a:latin typeface="Gill Sans MT"/>
-            </a:endParaRPr>
-          </a:p>
-        </p:txBody>
-      </p:sp>
-      <p:graphicFrame>
-        <p:nvGraphicFramePr>
-          <p:cNvPr id="5" name="Table 4"/>
-          <p:cNvGraphicFramePr>
-            <a:graphicFrameLocks noGrp="1"/>
-          </p:cNvGraphicFramePr>
-          <p:nvPr/>
-        </p:nvGraphicFramePr>
-        <p:xfrm>
-          <a:off x="1257301" y="2256399"/>
-          <a:ext cx="6572251" cy="2979420"/>
-        </p:xfrm>
-        <a:graphic>
-          <a:graphicData uri="http://schemas.openxmlformats.org/drawingml/2006/table">
-            <a:tbl>
-              <a:tblPr firstRow="1" firstCol="1" bandRow="1">
-                <a:tableStyleId>{5C22544A-7EE6-4342-B048-85BDC9FD1C3A}</a:tableStyleId>
-              </a:tblPr>
-              <a:tblGrid>
-                <a:gridCol w="685799">
-                  <a:extLst>
-                    <a:ext uri="{9D8B030D-6E8A-4147-A177-3AD203B41FA5}">
-                      <a16:colId xmlns:a16="http://schemas.microsoft.com/office/drawing/2014/main" val="20000"/>
-                    </a:ext>
-                  </a:extLst>
-                </a:gridCol>
-                <a:gridCol w="2900070">
-                  <a:extLst>
-                    <a:ext uri="{9D8B030D-6E8A-4147-A177-3AD203B41FA5}">
-                      <a16:colId xmlns:a16="http://schemas.microsoft.com/office/drawing/2014/main" val="20001"/>
-                    </a:ext>
-                  </a:extLst>
-                </a:gridCol>
-                <a:gridCol w="2986382">
-                  <a:extLst>
-                    <a:ext uri="{9D8B030D-6E8A-4147-A177-3AD203B41FA5}">
-                      <a16:colId xmlns:a16="http://schemas.microsoft.com/office/drawing/2014/main" val="20002"/>
-                    </a:ext>
-                  </a:extLst>
-                </a:gridCol>
-              </a:tblGrid>
-              <a:tr h="274320">
-                <a:tc>
-                  <a:txBody>
-                    <a:bodyPr/>
-                    <a:lstStyle/>
-                    <a:p>
-                      <a:endParaRPr lang="en-US" sz="1400" dirty="0">
-                        <a:latin typeface="Consolas" panose="020B0609020204030204" pitchFamily="49" charset="0"/>
-                        <a:cs typeface="Consolas" panose="020B0609020204030204" pitchFamily="49" charset="0"/>
-                      </a:endParaRPr>
-                    </a:p>
-                  </a:txBody>
-                  <a:tcPr marL="68580" marR="68580" marT="34290" marB="34290" anchor="ctr" anchorCtr="1"/>
-                </a:tc>
-                <a:tc>
-                  <a:txBody>
-                    <a:bodyPr/>
-                    <a:lstStyle/>
-                    <a:p>
-                      <a:pPr algn="ctr"/>
-                      <a:r>
-                        <a:rPr lang="en-US" sz="1400" dirty="0">
-                          <a:latin typeface="Consolas" panose="020B0609020204030204" pitchFamily="49" charset="0"/>
-                          <a:cs typeface="Consolas" panose="020B0609020204030204" pitchFamily="49" charset="0"/>
-                        </a:rPr>
-                        <a:t> N = 0</a:t>
-                      </a:r>
-                    </a:p>
-                  </a:txBody>
-                  <a:tcPr marL="68580" marR="68580" marT="34290" marB="34290" anchor="ctr" anchorCtr="1"/>
-                </a:tc>
-                <a:tc>
-                  <a:txBody>
-                    <a:bodyPr/>
-                    <a:lstStyle/>
-                    <a:p>
-                      <a:pPr algn="ctr"/>
-                      <a:r>
-                        <a:rPr lang="en-US" sz="1400" dirty="0">
-                          <a:latin typeface="Consolas" panose="020B0609020204030204" pitchFamily="49" charset="0"/>
-                          <a:cs typeface="Consolas" panose="020B0609020204030204" pitchFamily="49" charset="0"/>
-                        </a:rPr>
-                        <a:t> N = 1</a:t>
-                      </a:r>
-                    </a:p>
-                  </a:txBody>
-                  <a:tcPr marL="68580" marR="68580" marT="34290" marB="34290" anchor="ctr" anchorCtr="1"/>
-                </a:tc>
-                <a:extLst>
-                  <a:ext uri="{0D108BD9-81ED-4DB2-BD59-A6C34878D82A}">
-                    <a16:rowId xmlns:a16="http://schemas.microsoft.com/office/drawing/2014/main" val="10000"/>
-                  </a:ext>
-                </a:extLst>
-              </a:tr>
-              <a:tr h="955432">
-                <a:tc>
-                  <a:txBody>
-                    <a:bodyPr/>
-                    <a:lstStyle/>
-                    <a:p>
-                      <a:pPr algn="ctr"/>
-                      <a:r>
-                        <a:rPr lang="en-US" sz="1400" dirty="0">
-                          <a:latin typeface="Consolas" panose="020B0609020204030204" pitchFamily="49" charset="0"/>
-                          <a:cs typeface="Consolas" panose="020B0609020204030204" pitchFamily="49" charset="0"/>
-                        </a:rPr>
-                        <a:t>V = 0</a:t>
-                      </a:r>
-                    </a:p>
-                  </a:txBody>
-                  <a:tcPr marL="68580" marR="68580" marT="34290" marB="34290" anchor="ctr" anchorCtr="1"/>
-                </a:tc>
-                <a:tc>
-                  <a:txBody>
-                    <a:bodyPr/>
-                    <a:lstStyle/>
-                    <a:p>
-                      <a:pPr marL="285750" indent="-285750">
-                        <a:buFont typeface="Arial" pitchFamily="34" charset="0"/>
-                        <a:buChar char="•"/>
-                      </a:pPr>
-                      <a:r>
-                        <a:rPr lang="en-US" sz="1400" dirty="0"/>
-                        <a:t>No</a:t>
-                      </a:r>
-                      <a:r>
-                        <a:rPr lang="en-US" sz="1400" baseline="0" dirty="0"/>
-                        <a:t> overflow, implying the result is correct. </a:t>
-                      </a:r>
-                    </a:p>
-                    <a:p>
-                      <a:pPr marL="285750" indent="-285750">
-                        <a:buFont typeface="Arial" pitchFamily="34" charset="0"/>
-                        <a:buChar char="•"/>
-                      </a:pPr>
-                      <a:r>
-                        <a:rPr lang="en-US" sz="1400" baseline="0" dirty="0"/>
-                        <a:t>The result is non-negative, </a:t>
-                      </a:r>
-                    </a:p>
-                    <a:p>
-                      <a:pPr marL="285750" indent="-285750">
-                        <a:buFont typeface="Arial" pitchFamily="34" charset="0"/>
-                        <a:buChar char="•"/>
-                      </a:pPr>
-                      <a:r>
-                        <a:rPr lang="en-US" sz="1400" baseline="0" dirty="0"/>
-                        <a:t>Thus </a:t>
-                      </a:r>
-                      <a:r>
-                        <a:rPr lang="en-US" sz="1400" baseline="0" dirty="0">
-                          <a:latin typeface="Consolas" panose="020B0609020204030204" pitchFamily="49" charset="0"/>
-                        </a:rPr>
-                        <a:t>r0 – r1 ≥ 0</a:t>
-                      </a:r>
-                      <a:r>
-                        <a:rPr lang="en-US" sz="1400" baseline="0" dirty="0"/>
-                        <a:t>, i.e., </a:t>
-                      </a:r>
-                      <a:r>
-                        <a:rPr lang="en-US" sz="1400" baseline="0" dirty="0">
-                          <a:latin typeface="Consolas" panose="020B0609020204030204" pitchFamily="49" charset="0"/>
-                        </a:rPr>
-                        <a:t>r0 ≥ r1</a:t>
-                      </a:r>
-                      <a:endParaRPr lang="en-US" sz="1400" dirty="0">
-                        <a:latin typeface="Consolas" panose="020B0609020204030204" pitchFamily="49" charset="0"/>
-                        <a:cs typeface="Times New Roman" pitchFamily="18" charset="0"/>
-                      </a:endParaRPr>
-                    </a:p>
-                  </a:txBody>
-                  <a:tcPr marL="68580" marR="68580" marT="34290" marB="34290" anchor="ctr" anchorCtr="1"/>
-                </a:tc>
-                <a:tc>
-                  <a:txBody>
-                    <a:bodyPr/>
-                    <a:lstStyle/>
-                    <a:p>
-                      <a:pPr marL="285750" indent="-285750">
-                        <a:buFont typeface="Arial" pitchFamily="34" charset="0"/>
-                        <a:buChar char="•"/>
-                      </a:pPr>
-                      <a:r>
-                        <a:rPr lang="en-US" sz="1400" dirty="0"/>
-                        <a:t>No overflow, implying the result is correct.</a:t>
-                      </a:r>
-                    </a:p>
-                    <a:p>
-                      <a:pPr marL="285750" indent="-285750">
-                        <a:buFont typeface="Arial" pitchFamily="34" charset="0"/>
-                        <a:buChar char="•"/>
-                      </a:pPr>
-                      <a:r>
-                        <a:rPr lang="en-US" sz="1400" dirty="0"/>
-                        <a:t>The</a:t>
-                      </a:r>
-                      <a:r>
-                        <a:rPr lang="en-US" sz="1400" baseline="0" dirty="0"/>
-                        <a:t> result is</a:t>
-                      </a:r>
-                      <a:r>
-                        <a:rPr lang="en-US" sz="1400" dirty="0"/>
-                        <a:t> negative</a:t>
-                      </a:r>
-                      <a:r>
-                        <a:rPr lang="en-US" sz="1400" baseline="0" dirty="0"/>
-                        <a:t>.</a:t>
-                      </a:r>
-                    </a:p>
-                    <a:p>
-                      <a:pPr marL="285750" indent="-285750">
-                        <a:buFont typeface="Arial" pitchFamily="34" charset="0"/>
-                        <a:buChar char="•"/>
-                      </a:pPr>
-                      <a:r>
-                        <a:rPr lang="en-US" sz="1400" baseline="0" dirty="0"/>
-                        <a:t>Thus </a:t>
-                      </a:r>
-                      <a:r>
-                        <a:rPr lang="en-US" sz="1400" baseline="0" dirty="0">
-                          <a:latin typeface="Consolas" panose="020B0609020204030204" pitchFamily="49" charset="0"/>
-                        </a:rPr>
-                        <a:t>r0 – r1 &lt; 0</a:t>
-                      </a:r>
-                      <a:r>
-                        <a:rPr lang="en-US" sz="1400" baseline="0" dirty="0"/>
-                        <a:t>, i.e., </a:t>
-                      </a:r>
-                      <a:r>
-                        <a:rPr lang="en-US" sz="1400" baseline="0" dirty="0">
-                          <a:latin typeface="Consolas" panose="020B0609020204030204" pitchFamily="49" charset="0"/>
-                        </a:rPr>
-                        <a:t>r0 &lt; r1</a:t>
-                      </a:r>
-                      <a:endParaRPr lang="en-US" sz="1400" dirty="0">
-                        <a:latin typeface="Consolas" panose="020B0609020204030204" pitchFamily="49" charset="0"/>
-                        <a:cs typeface="Times New Roman" pitchFamily="18" charset="0"/>
-                      </a:endParaRPr>
-                    </a:p>
-                  </a:txBody>
-                  <a:tcPr marL="68580" marR="68580" marT="34290" marB="34290" anchor="ctr" anchorCtr="1"/>
-                </a:tc>
-                <a:extLst>
-                  <a:ext uri="{0D108BD9-81ED-4DB2-BD59-A6C34878D82A}">
-                    <a16:rowId xmlns:a16="http://schemas.microsoft.com/office/drawing/2014/main" val="10001"/>
-                  </a:ext>
-                </a:extLst>
-              </a:tr>
-              <a:tr h="1508760">
-                <a:tc>
-                  <a:txBody>
-                    <a:bodyPr/>
-                    <a:lstStyle/>
-                    <a:p>
-                      <a:pPr algn="ctr"/>
-                      <a:r>
-                        <a:rPr lang="en-US" sz="1400" dirty="0">
-                          <a:latin typeface="Consolas" panose="020B0609020204030204" pitchFamily="49" charset="0"/>
-                          <a:cs typeface="Consolas" panose="020B0609020204030204" pitchFamily="49" charset="0"/>
-                        </a:rPr>
-                        <a:t>V = 1</a:t>
-                      </a:r>
-                    </a:p>
-                  </a:txBody>
-                  <a:tcPr marL="68580" marR="68580" marT="34290" marB="34290" anchor="ctr" anchorCtr="1"/>
-                </a:tc>
-                <a:tc>
-                  <a:txBody>
-                    <a:bodyPr/>
-                    <a:lstStyle/>
-                    <a:p>
-                      <a:pPr marL="285750" marR="0" indent="-285750" algn="l" defTabSz="914400" rtl="0" eaLnBrk="1" fontAlgn="auto" latinLnBrk="0" hangingPunct="1">
-                        <a:lnSpc>
-                          <a:spcPct val="100000"/>
-                        </a:lnSpc>
-                        <a:spcBef>
-                          <a:spcPts val="0"/>
-                        </a:spcBef>
-                        <a:spcAft>
-                          <a:spcPts val="0"/>
-                        </a:spcAft>
-                        <a:buClrTx/>
-                        <a:buSzTx/>
-                        <a:buFont typeface="Arial" pitchFamily="34" charset="0"/>
-                        <a:buChar char="•"/>
-                        <a:tabLst/>
-                        <a:defRPr/>
-                      </a:pPr>
-                      <a:r>
-                        <a:rPr lang="en-US" sz="1400" dirty="0"/>
-                        <a:t>O</a:t>
-                      </a:r>
-                      <a:r>
-                        <a:rPr lang="en-US" sz="1400" baseline="0" dirty="0"/>
-                        <a:t>verflow occurs, implying the result is incorrect. </a:t>
-                      </a:r>
-                    </a:p>
-                    <a:p>
-                      <a:pPr marL="285750" marR="0" indent="-285750" algn="l" defTabSz="914400" rtl="0" eaLnBrk="1" fontAlgn="auto" latinLnBrk="0" hangingPunct="1">
-                        <a:lnSpc>
-                          <a:spcPct val="100000"/>
-                        </a:lnSpc>
-                        <a:spcBef>
-                          <a:spcPts val="0"/>
-                        </a:spcBef>
-                        <a:spcAft>
-                          <a:spcPts val="0"/>
-                        </a:spcAft>
-                        <a:buClrTx/>
-                        <a:buSzTx/>
-                        <a:buFont typeface="Arial" pitchFamily="34" charset="0"/>
-                        <a:buChar char="•"/>
-                        <a:tabLst/>
-                        <a:defRPr/>
-                      </a:pPr>
-                      <a:r>
-                        <a:rPr lang="en-US" sz="1400" baseline="0" dirty="0"/>
-                        <a:t>The result is mistakenly reported as non-negative and in fact it should be negative. </a:t>
-                      </a:r>
-                    </a:p>
-                    <a:p>
-                      <a:pPr marL="285750" marR="0" indent="-285750" algn="l" defTabSz="914400" rtl="0" eaLnBrk="1" fontAlgn="auto" latinLnBrk="0" hangingPunct="1">
-                        <a:lnSpc>
-                          <a:spcPct val="100000"/>
-                        </a:lnSpc>
-                        <a:spcBef>
-                          <a:spcPts val="0"/>
-                        </a:spcBef>
-                        <a:spcAft>
-                          <a:spcPts val="0"/>
-                        </a:spcAft>
-                        <a:buClrTx/>
-                        <a:buSzTx/>
-                        <a:buFont typeface="Arial" pitchFamily="34" charset="0"/>
-                        <a:buChar char="•"/>
-                        <a:tabLst/>
-                        <a:defRPr/>
-                      </a:pPr>
-                      <a:r>
-                        <a:rPr lang="en-US" sz="1400" baseline="0" dirty="0"/>
-                        <a:t>Thus </a:t>
-                      </a:r>
-                      <a:r>
-                        <a:rPr lang="en-US" sz="1400" baseline="0" dirty="0">
-                          <a:latin typeface="Consolas" panose="020B0609020204030204" pitchFamily="49" charset="0"/>
-                        </a:rPr>
-                        <a:t>r0 – r1 &lt; 0 </a:t>
-                      </a:r>
-                      <a:r>
-                        <a:rPr lang="en-US" sz="1400" baseline="0" dirty="0"/>
-                        <a:t>in reality, i.e., </a:t>
-                      </a:r>
-                      <a:r>
-                        <a:rPr lang="en-US" sz="1400" baseline="0" dirty="0">
-                          <a:latin typeface="Consolas" panose="020B0609020204030204" pitchFamily="49" charset="0"/>
-                        </a:rPr>
-                        <a:t>r0 &lt; r1</a:t>
-                      </a:r>
-                      <a:endParaRPr lang="en-US" sz="1400" dirty="0">
-                        <a:latin typeface="Consolas" panose="020B0609020204030204" pitchFamily="49" charset="0"/>
-                        <a:cs typeface="Times New Roman" pitchFamily="18" charset="0"/>
-                      </a:endParaRPr>
-                    </a:p>
-                  </a:txBody>
-                  <a:tcPr marL="68580" marR="68580" marT="34290" marB="34290" anchor="ctr" anchorCtr="1"/>
-                </a:tc>
-                <a:tc>
-                  <a:txBody>
-                    <a:bodyPr/>
-                    <a:lstStyle/>
-                    <a:p>
-                      <a:pPr marL="285750" marR="0" indent="-285750" algn="l" defTabSz="914400" rtl="0" eaLnBrk="1" fontAlgn="auto" latinLnBrk="0" hangingPunct="1">
-                        <a:lnSpc>
-                          <a:spcPct val="100000"/>
-                        </a:lnSpc>
-                        <a:spcBef>
-                          <a:spcPts val="0"/>
-                        </a:spcBef>
-                        <a:spcAft>
-                          <a:spcPts val="0"/>
-                        </a:spcAft>
-                        <a:buClrTx/>
-                        <a:buSzTx/>
-                        <a:buFont typeface="Arial" pitchFamily="34" charset="0"/>
-                        <a:buChar char="•"/>
-                        <a:tabLst/>
-                        <a:defRPr/>
-                      </a:pPr>
-                      <a:r>
-                        <a:rPr lang="en-US" sz="1400" dirty="0"/>
-                        <a:t>O</a:t>
-                      </a:r>
-                      <a:r>
-                        <a:rPr lang="en-US" sz="1400" baseline="0" dirty="0"/>
-                        <a:t>verflow occurs, implying the result is incorrect. </a:t>
-                      </a:r>
-                    </a:p>
-                    <a:p>
-                      <a:pPr marL="285750" marR="0" indent="-285750" algn="l" defTabSz="914400" rtl="0" eaLnBrk="1" fontAlgn="auto" latinLnBrk="0" hangingPunct="1">
-                        <a:lnSpc>
-                          <a:spcPct val="100000"/>
-                        </a:lnSpc>
-                        <a:spcBef>
-                          <a:spcPts val="0"/>
-                        </a:spcBef>
-                        <a:spcAft>
-                          <a:spcPts val="0"/>
-                        </a:spcAft>
-                        <a:buClrTx/>
-                        <a:buSzTx/>
-                        <a:buFont typeface="Arial" pitchFamily="34" charset="0"/>
-                        <a:buChar char="•"/>
-                        <a:tabLst/>
-                        <a:defRPr/>
-                      </a:pPr>
-                      <a:r>
-                        <a:rPr lang="en-US" sz="1400" baseline="0" dirty="0"/>
-                        <a:t>The result is mistakenly reported as negative and in fact it should be non-negative. </a:t>
-                      </a:r>
-                    </a:p>
-                    <a:p>
-                      <a:pPr marL="285750" marR="0" indent="-285750" algn="l" defTabSz="914400" rtl="0" eaLnBrk="1" fontAlgn="auto" latinLnBrk="0" hangingPunct="1">
-                        <a:lnSpc>
-                          <a:spcPct val="100000"/>
-                        </a:lnSpc>
-                        <a:spcBef>
-                          <a:spcPts val="0"/>
-                        </a:spcBef>
-                        <a:spcAft>
-                          <a:spcPts val="0"/>
-                        </a:spcAft>
-                        <a:buClrTx/>
-                        <a:buSzTx/>
-                        <a:buFont typeface="Arial" pitchFamily="34" charset="0"/>
-                        <a:buChar char="•"/>
-                        <a:tabLst/>
-                        <a:defRPr/>
-                      </a:pPr>
-                      <a:r>
-                        <a:rPr lang="en-US" sz="1400" baseline="0" dirty="0"/>
-                        <a:t>Thus </a:t>
-                      </a:r>
-                      <a:r>
-                        <a:rPr lang="en-US" sz="1400" baseline="0" dirty="0">
-                          <a:latin typeface="Consolas" panose="020B0609020204030204" pitchFamily="49" charset="0"/>
-                        </a:rPr>
-                        <a:t>r0 – r1 ≥ 0 </a:t>
-                      </a:r>
-                      <a:r>
-                        <a:rPr lang="en-US" sz="1400" baseline="0" dirty="0"/>
-                        <a:t>in reality., i.e.  </a:t>
-                      </a:r>
-                      <a:r>
-                        <a:rPr lang="en-US" sz="1400" baseline="0" dirty="0">
-                          <a:latin typeface="Consolas" panose="020B0609020204030204" pitchFamily="49" charset="0"/>
-                        </a:rPr>
-                        <a:t>r0 ≥ r1</a:t>
-                      </a:r>
-                      <a:endParaRPr lang="en-US" sz="1400" dirty="0">
-                        <a:latin typeface="Consolas" panose="020B0609020204030204" pitchFamily="49" charset="0"/>
-                        <a:cs typeface="Times New Roman" pitchFamily="18" charset="0"/>
-                      </a:endParaRPr>
-                    </a:p>
-                  </a:txBody>
-                  <a:tcPr marL="68580" marR="68580" marT="34290" marB="34290" anchor="ctr" anchorCtr="1"/>
-                </a:tc>
-                <a:extLst>
-                  <a:ext uri="{0D108BD9-81ED-4DB2-BD59-A6C34878D82A}">
-                    <a16:rowId xmlns:a16="http://schemas.microsoft.com/office/drawing/2014/main" val="10002"/>
-                  </a:ext>
-                </a:extLst>
-              </a:tr>
-            </a:tbl>
-          </a:graphicData>
-        </a:graphic>
-      </p:graphicFrame>
-      <p:sp>
-        <p:nvSpPr>
-          <p:cNvPr id="6" name="TextBox 5"/>
-          <p:cNvSpPr txBox="1"/>
-          <p:nvPr/>
-        </p:nvSpPr>
-        <p:spPr>
-          <a:xfrm>
-            <a:off x="1543051" y="1771651"/>
-            <a:ext cx="4113947" cy="507831"/>
-          </a:xfrm>
-          <a:prstGeom prst="rect">
-            <a:avLst/>
-          </a:prstGeom>
-          <a:noFill/>
-        </p:spPr>
-        <p:txBody>
-          <a:bodyPr wrap="none" rtlCol="0">
-            <a:spAutoFit/>
-          </a:bodyPr>
-          <a:lstStyle/>
-          <a:p>
-            <a:pPr defTabSz="685800"/>
-            <a:r>
-              <a:rPr lang="en-US" sz="1350" b="1" dirty="0">
-                <a:solidFill>
-                  <a:srgbClr val="C00000"/>
-                </a:solidFill>
-                <a:latin typeface="Consolas" panose="020B0609020204030204" pitchFamily="49" charset="0"/>
-                <a:cs typeface="Consolas" panose="020B0609020204030204" pitchFamily="49" charset="0"/>
-              </a:rPr>
-              <a:t>CMP r0, r1</a:t>
-            </a:r>
-          </a:p>
-          <a:p>
-            <a:pPr defTabSz="685800"/>
-            <a:r>
-              <a:rPr lang="en-US" sz="1350" dirty="0">
-                <a:solidFill>
-                  <a:prstClr val="black"/>
-                </a:solidFill>
-                <a:latin typeface="Gill Sans MT"/>
-              </a:rPr>
-              <a:t>perform subtraction </a:t>
-            </a:r>
-            <a:r>
-              <a:rPr lang="en-US" sz="1350" dirty="0">
-                <a:solidFill>
-                  <a:prstClr val="black"/>
-                </a:solidFill>
-                <a:latin typeface="Consolas" panose="020B0609020204030204" pitchFamily="49" charset="0"/>
-              </a:rPr>
-              <a:t>r0 – r1</a:t>
-            </a:r>
-            <a:r>
-              <a:rPr lang="en-US" sz="1350" dirty="0">
-                <a:solidFill>
-                  <a:prstClr val="black"/>
-                </a:solidFill>
-                <a:latin typeface="Gill Sans MT"/>
-              </a:rPr>
-              <a:t>, without saving the result</a:t>
-            </a:r>
-          </a:p>
-        </p:txBody>
-      </p:sp>
-      <p:sp>
-        <p:nvSpPr>
-          <p:cNvPr id="7" name="TextBox 6"/>
-          <p:cNvSpPr txBox="1"/>
-          <p:nvPr/>
-        </p:nvSpPr>
-        <p:spPr>
-          <a:xfrm>
-            <a:off x="1543050" y="5011520"/>
-            <a:ext cx="4800600" cy="646331"/>
-          </a:xfrm>
-          <a:prstGeom prst="rect">
-            <a:avLst/>
-          </a:prstGeom>
-          <a:noFill/>
-        </p:spPr>
-        <p:txBody>
-          <a:bodyPr wrap="square" rtlCol="0">
-            <a:spAutoFit/>
-          </a:bodyPr>
-          <a:lstStyle/>
-          <a:p>
-            <a:pPr defTabSz="685800"/>
-            <a:r>
-              <a:rPr lang="en-US" sz="1200" dirty="0">
-                <a:solidFill>
-                  <a:prstClr val="black"/>
-                </a:solidFill>
-                <a:latin typeface="Gill Sans MT"/>
-              </a:rPr>
-              <a:t>Conclusions:</a:t>
-            </a:r>
-          </a:p>
-          <a:p>
-            <a:pPr marL="214313" indent="-214313" defTabSz="685800">
-              <a:buFont typeface="Arial" pitchFamily="34" charset="0"/>
-              <a:buChar char="•"/>
-            </a:pPr>
-            <a:r>
-              <a:rPr lang="en-US" sz="1200" dirty="0">
-                <a:solidFill>
-                  <a:prstClr val="black"/>
-                </a:solidFill>
-                <a:latin typeface="Gill Sans MT"/>
-              </a:rPr>
-              <a:t>If N == V, then it is signed greater or equal (GE).</a:t>
-            </a:r>
-          </a:p>
-          <a:p>
-            <a:pPr marL="214313" indent="-214313" defTabSz="685800">
-              <a:buFont typeface="Arial" pitchFamily="34" charset="0"/>
-              <a:buChar char="•"/>
-            </a:pPr>
-            <a:r>
-              <a:rPr lang="en-US" sz="1200" dirty="0">
-                <a:solidFill>
-                  <a:prstClr val="black"/>
-                </a:solidFill>
-                <a:latin typeface="Gill Sans MT"/>
-              </a:rPr>
-              <a:t>Otherwise, it is signed less than (LT)</a:t>
-            </a:r>
-          </a:p>
-        </p:txBody>
-      </p:sp>
-    </p:spTree>
-    <p:extLst>
-      <p:ext uri="{BB962C8B-B14F-4D97-AF65-F5344CB8AC3E}">
-        <p14:creationId xmlns:p14="http://schemas.microsoft.com/office/powerpoint/2010/main" val="203524775"/>
-      </p:ext>
-    </p:extLst>
-  </p:cSld>
-  <p:clrMapOvr>
-    <a:masterClrMapping/>
-  </p:clrMapOvr>
-</p:sld>
-</file>
-
-<file path=ppt/slides/slide20.xml><?xml version="1.0" encoding="utf-8"?>
+<file path=ppt/slides/slide21.xml><?xml version="1.0" encoding="utf-8"?>
 <p:sld xmlns:a="http://schemas.openxmlformats.org/drawingml/2006/main" xmlns:r="http://schemas.openxmlformats.org/officeDocument/2006/relationships" xmlns:p="http://schemas.openxmlformats.org/presentationml/2006/main">
   <p:cSld>
     <p:spTree>
@@ -18565,7 +22144,7 @@
             <a:fld id="{EA7C8D44-3667-46F6-9772-CC52308E2A7F}" type="slidenum">
               <a:rPr kumimoji="0" lang="en-US" smtClean="0"/>
               <a:pPr/>
-              <a:t>20</a:t>
+              <a:t>21</a:t>
             </a:fld>
             <a:endParaRPr kumimoji="0" lang="en-US" dirty="0"/>
           </a:p>
@@ -19135,7 +22714,7 @@
 </p:sld>
 </file>
 
-<file path=ppt/slides/slide21.xml><?xml version="1.0" encoding="utf-8"?>
+<file path=ppt/slides/slide22.xml><?xml version="1.0" encoding="utf-8"?>
 <p:sld xmlns:a="http://schemas.openxmlformats.org/drawingml/2006/main" xmlns:r="http://schemas.openxmlformats.org/officeDocument/2006/relationships" xmlns:p="http://schemas.openxmlformats.org/presentationml/2006/main">
   <p:cSld>
     <p:spTree>
@@ -19192,7 +22771,7 @@
             <a:fld id="{EA7C8D44-3667-46F6-9772-CC52308E2A7F}" type="slidenum">
               <a:rPr kumimoji="0" lang="en-US" smtClean="0"/>
               <a:pPr/>
-              <a:t>21</a:t>
+              <a:t>22</a:t>
             </a:fld>
             <a:endParaRPr kumimoji="0" lang="en-US" dirty="0"/>
           </a:p>
@@ -20476,7 +24055,7 @@
 </p:sld>
 </file>
 
-<file path=ppt/slides/slide22.xml><?xml version="1.0" encoding="utf-8"?>
+<file path=ppt/slides/slide23.xml><?xml version="1.0" encoding="utf-8"?>
 <p:sld xmlns:a="http://schemas.openxmlformats.org/drawingml/2006/main" xmlns:r="http://schemas.openxmlformats.org/officeDocument/2006/relationships" xmlns:p="http://schemas.openxmlformats.org/presentationml/2006/main">
   <p:cSld>
     <p:spTree>
@@ -20533,7 +24112,7 @@
             <a:fld id="{EA7C8D44-3667-46F6-9772-CC52308E2A7F}" type="slidenum">
               <a:rPr kumimoji="0" lang="en-US" smtClean="0"/>
               <a:pPr/>
-              <a:t>22</a:t>
+              <a:t>23</a:t>
             </a:fld>
             <a:endParaRPr kumimoji="0" lang="en-US" dirty="0"/>
           </a:p>
@@ -22164,10 +25743,707 @@
           <a:bodyPr/>
           <a:lstStyle/>
           <a:p>
+            <a:pPr defTabSz="685800"/>
+            <a:fld id="{EA7C8D44-3667-46F6-9772-CC52308E2A7F}" type="slidenum">
+              <a:rPr lang="en-US">
+                <a:solidFill>
+                  <a:srgbClr val="1F497D"/>
+                </a:solidFill>
+                <a:latin typeface="Gill Sans MT"/>
+              </a:rPr>
+              <a:pPr defTabSz="685800"/>
+              <a:t>3</a:t>
+            </a:fld>
+            <a:endParaRPr lang="en-US" dirty="0">
+              <a:solidFill>
+                <a:srgbClr val="1F497D"/>
+              </a:solidFill>
+              <a:latin typeface="Gill Sans MT"/>
+            </a:endParaRPr>
+          </a:p>
+        </p:txBody>
+      </p:sp>
+      <p:graphicFrame>
+        <p:nvGraphicFramePr>
+          <p:cNvPr id="5" name="Table 4"/>
+          <p:cNvGraphicFramePr>
+            <a:graphicFrameLocks noGrp="1"/>
+          </p:cNvGraphicFramePr>
+          <p:nvPr/>
+        </p:nvGraphicFramePr>
+        <p:xfrm>
+          <a:off x="1257301" y="2256399"/>
+          <a:ext cx="6572251" cy="2979420"/>
+        </p:xfrm>
+        <a:graphic>
+          <a:graphicData uri="http://schemas.openxmlformats.org/drawingml/2006/table">
+            <a:tbl>
+              <a:tblPr firstRow="1" firstCol="1" bandRow="1">
+                <a:tableStyleId>{5C22544A-7EE6-4342-B048-85BDC9FD1C3A}</a:tableStyleId>
+              </a:tblPr>
+              <a:tblGrid>
+                <a:gridCol w="685799">
+                  <a:extLst>
+                    <a:ext uri="{9D8B030D-6E8A-4147-A177-3AD203B41FA5}">
+                      <a16:colId xmlns:a16="http://schemas.microsoft.com/office/drawing/2014/main" val="20000"/>
+                    </a:ext>
+                  </a:extLst>
+                </a:gridCol>
+                <a:gridCol w="2900070">
+                  <a:extLst>
+                    <a:ext uri="{9D8B030D-6E8A-4147-A177-3AD203B41FA5}">
+                      <a16:colId xmlns:a16="http://schemas.microsoft.com/office/drawing/2014/main" val="20001"/>
+                    </a:ext>
+                  </a:extLst>
+                </a:gridCol>
+                <a:gridCol w="2986382">
+                  <a:extLst>
+                    <a:ext uri="{9D8B030D-6E8A-4147-A177-3AD203B41FA5}">
+                      <a16:colId xmlns:a16="http://schemas.microsoft.com/office/drawing/2014/main" val="20002"/>
+                    </a:ext>
+                  </a:extLst>
+                </a:gridCol>
+              </a:tblGrid>
+              <a:tr h="274320">
+                <a:tc>
+                  <a:txBody>
+                    <a:bodyPr/>
+                    <a:lstStyle/>
+                    <a:p>
+                      <a:endParaRPr lang="en-US" sz="1400" dirty="0">
+                        <a:latin typeface="Consolas" panose="020B0609020204030204" pitchFamily="49" charset="0"/>
+                        <a:cs typeface="Consolas" panose="020B0609020204030204" pitchFamily="49" charset="0"/>
+                      </a:endParaRPr>
+                    </a:p>
+                  </a:txBody>
+                  <a:tcPr marL="68580" marR="68580" marT="34290" marB="34290" anchor="ctr" anchorCtr="1"/>
+                </a:tc>
+                <a:tc>
+                  <a:txBody>
+                    <a:bodyPr/>
+                    <a:lstStyle/>
+                    <a:p>
+                      <a:pPr algn="ctr"/>
+                      <a:r>
+                        <a:rPr lang="en-US" sz="1400" dirty="0">
+                          <a:latin typeface="Consolas" panose="020B0609020204030204" pitchFamily="49" charset="0"/>
+                          <a:cs typeface="Consolas" panose="020B0609020204030204" pitchFamily="49" charset="0"/>
+                        </a:rPr>
+                        <a:t> N = 0</a:t>
+                      </a:r>
+                    </a:p>
+                  </a:txBody>
+                  <a:tcPr marL="68580" marR="68580" marT="34290" marB="34290" anchor="ctr" anchorCtr="1"/>
+                </a:tc>
+                <a:tc>
+                  <a:txBody>
+                    <a:bodyPr/>
+                    <a:lstStyle/>
+                    <a:p>
+                      <a:pPr algn="ctr"/>
+                      <a:r>
+                        <a:rPr lang="en-US" sz="1400" dirty="0">
+                          <a:latin typeface="Consolas" panose="020B0609020204030204" pitchFamily="49" charset="0"/>
+                          <a:cs typeface="Consolas" panose="020B0609020204030204" pitchFamily="49" charset="0"/>
+                        </a:rPr>
+                        <a:t> N = 1</a:t>
+                      </a:r>
+                    </a:p>
+                  </a:txBody>
+                  <a:tcPr marL="68580" marR="68580" marT="34290" marB="34290" anchor="ctr" anchorCtr="1"/>
+                </a:tc>
+                <a:extLst>
+                  <a:ext uri="{0D108BD9-81ED-4DB2-BD59-A6C34878D82A}">
+                    <a16:rowId xmlns:a16="http://schemas.microsoft.com/office/drawing/2014/main" val="10000"/>
+                  </a:ext>
+                </a:extLst>
+              </a:tr>
+              <a:tr h="955432">
+                <a:tc>
+                  <a:txBody>
+                    <a:bodyPr/>
+                    <a:lstStyle/>
+                    <a:p>
+                      <a:pPr algn="ctr"/>
+                      <a:r>
+                        <a:rPr lang="en-US" sz="1400" dirty="0">
+                          <a:latin typeface="Consolas" panose="020B0609020204030204" pitchFamily="49" charset="0"/>
+                          <a:cs typeface="Consolas" panose="020B0609020204030204" pitchFamily="49" charset="0"/>
+                        </a:rPr>
+                        <a:t>V = 0</a:t>
+                      </a:r>
+                    </a:p>
+                  </a:txBody>
+                  <a:tcPr marL="68580" marR="68580" marT="34290" marB="34290" anchor="ctr" anchorCtr="1"/>
+                </a:tc>
+                <a:tc>
+                  <a:txBody>
+                    <a:bodyPr/>
+                    <a:lstStyle/>
+                    <a:p>
+                      <a:pPr marL="285750" indent="-285750">
+                        <a:buFont typeface="Arial" pitchFamily="34" charset="0"/>
+                        <a:buChar char="•"/>
+                      </a:pPr>
+                      <a:r>
+                        <a:rPr lang="en-US" sz="1400" dirty="0"/>
+                        <a:t>No</a:t>
+                      </a:r>
+                      <a:r>
+                        <a:rPr lang="en-US" sz="1400" baseline="0" dirty="0"/>
+                        <a:t> overflow, implying the result is correct. </a:t>
+                      </a:r>
+                    </a:p>
+                    <a:p>
+                      <a:pPr marL="285750" indent="-285750">
+                        <a:buFont typeface="Arial" pitchFamily="34" charset="0"/>
+                        <a:buChar char="•"/>
+                      </a:pPr>
+                      <a:r>
+                        <a:rPr lang="en-US" sz="1400" baseline="0" dirty="0"/>
+                        <a:t>The result is non-negative, </a:t>
+                      </a:r>
+                    </a:p>
+                    <a:p>
+                      <a:pPr marL="285750" indent="-285750">
+                        <a:buFont typeface="Arial" pitchFamily="34" charset="0"/>
+                        <a:buChar char="•"/>
+                      </a:pPr>
+                      <a:r>
+                        <a:rPr lang="en-US" sz="1400" baseline="0" dirty="0"/>
+                        <a:t>Thus </a:t>
+                      </a:r>
+                      <a:r>
+                        <a:rPr lang="en-US" sz="1400" baseline="0" dirty="0">
+                          <a:latin typeface="Consolas" panose="020B0609020204030204" pitchFamily="49" charset="0"/>
+                        </a:rPr>
+                        <a:t>r0 – r1 ≥ 0</a:t>
+                      </a:r>
+                      <a:r>
+                        <a:rPr lang="en-US" sz="1400" baseline="0" dirty="0"/>
+                        <a:t>, i.e., </a:t>
+                      </a:r>
+                      <a:r>
+                        <a:rPr lang="en-US" sz="1400" baseline="0" dirty="0">
+                          <a:latin typeface="Consolas" panose="020B0609020204030204" pitchFamily="49" charset="0"/>
+                        </a:rPr>
+                        <a:t>r0 ≥ r1</a:t>
+                      </a:r>
+                      <a:endParaRPr lang="en-US" sz="1400" dirty="0">
+                        <a:latin typeface="Consolas" panose="020B0609020204030204" pitchFamily="49" charset="0"/>
+                        <a:cs typeface="Times New Roman" pitchFamily="18" charset="0"/>
+                      </a:endParaRPr>
+                    </a:p>
+                  </a:txBody>
+                  <a:tcPr marL="68580" marR="68580" marT="34290" marB="34290" anchor="ctr" anchorCtr="1"/>
+                </a:tc>
+                <a:tc>
+                  <a:txBody>
+                    <a:bodyPr/>
+                    <a:lstStyle/>
+                    <a:p>
+                      <a:pPr marL="285750" indent="-285750">
+                        <a:buFont typeface="Arial" pitchFamily="34" charset="0"/>
+                        <a:buChar char="•"/>
+                      </a:pPr>
+                      <a:r>
+                        <a:rPr lang="en-US" sz="1400" dirty="0"/>
+                        <a:t>No overflow, implying the result is correct.</a:t>
+                      </a:r>
+                    </a:p>
+                    <a:p>
+                      <a:pPr marL="285750" indent="-285750">
+                        <a:buFont typeface="Arial" pitchFamily="34" charset="0"/>
+                        <a:buChar char="•"/>
+                      </a:pPr>
+                      <a:r>
+                        <a:rPr lang="en-US" sz="1400" dirty="0"/>
+                        <a:t>The</a:t>
+                      </a:r>
+                      <a:r>
+                        <a:rPr lang="en-US" sz="1400" baseline="0" dirty="0"/>
+                        <a:t> result is</a:t>
+                      </a:r>
+                      <a:r>
+                        <a:rPr lang="en-US" sz="1400" dirty="0"/>
+                        <a:t> negative</a:t>
+                      </a:r>
+                      <a:r>
+                        <a:rPr lang="en-US" sz="1400" baseline="0" dirty="0"/>
+                        <a:t>.</a:t>
+                      </a:r>
+                    </a:p>
+                    <a:p>
+                      <a:pPr marL="285750" indent="-285750">
+                        <a:buFont typeface="Arial" pitchFamily="34" charset="0"/>
+                        <a:buChar char="•"/>
+                      </a:pPr>
+                      <a:r>
+                        <a:rPr lang="en-US" sz="1400" baseline="0" dirty="0"/>
+                        <a:t>Thus </a:t>
+                      </a:r>
+                      <a:r>
+                        <a:rPr lang="en-US" sz="1400" baseline="0" dirty="0">
+                          <a:latin typeface="Consolas" panose="020B0609020204030204" pitchFamily="49" charset="0"/>
+                        </a:rPr>
+                        <a:t>r0 – r1 &lt; 0</a:t>
+                      </a:r>
+                      <a:r>
+                        <a:rPr lang="en-US" sz="1400" baseline="0" dirty="0"/>
+                        <a:t>, i.e., </a:t>
+                      </a:r>
+                      <a:r>
+                        <a:rPr lang="en-US" sz="1400" baseline="0" dirty="0">
+                          <a:latin typeface="Consolas" panose="020B0609020204030204" pitchFamily="49" charset="0"/>
+                        </a:rPr>
+                        <a:t>r0 &lt; r1</a:t>
+                      </a:r>
+                      <a:endParaRPr lang="en-US" sz="1400" dirty="0">
+                        <a:latin typeface="Consolas" panose="020B0609020204030204" pitchFamily="49" charset="0"/>
+                        <a:cs typeface="Times New Roman" pitchFamily="18" charset="0"/>
+                      </a:endParaRPr>
+                    </a:p>
+                  </a:txBody>
+                  <a:tcPr marL="68580" marR="68580" marT="34290" marB="34290" anchor="ctr" anchorCtr="1"/>
+                </a:tc>
+                <a:extLst>
+                  <a:ext uri="{0D108BD9-81ED-4DB2-BD59-A6C34878D82A}">
+                    <a16:rowId xmlns:a16="http://schemas.microsoft.com/office/drawing/2014/main" val="10001"/>
+                  </a:ext>
+                </a:extLst>
+              </a:tr>
+              <a:tr h="1508760">
+                <a:tc>
+                  <a:txBody>
+                    <a:bodyPr/>
+                    <a:lstStyle/>
+                    <a:p>
+                      <a:pPr algn="ctr"/>
+                      <a:r>
+                        <a:rPr lang="en-US" sz="1400" dirty="0">
+                          <a:latin typeface="Consolas" panose="020B0609020204030204" pitchFamily="49" charset="0"/>
+                          <a:cs typeface="Consolas" panose="020B0609020204030204" pitchFamily="49" charset="0"/>
+                        </a:rPr>
+                        <a:t>V = 1</a:t>
+                      </a:r>
+                    </a:p>
+                  </a:txBody>
+                  <a:tcPr marL="68580" marR="68580" marT="34290" marB="34290" anchor="ctr" anchorCtr="1"/>
+                </a:tc>
+                <a:tc>
+                  <a:txBody>
+                    <a:bodyPr/>
+                    <a:lstStyle/>
+                    <a:p>
+                      <a:pPr marL="285750" marR="0" indent="-285750" algn="l" defTabSz="914400" rtl="0" eaLnBrk="1" fontAlgn="auto" latinLnBrk="0" hangingPunct="1">
+                        <a:lnSpc>
+                          <a:spcPct val="100000"/>
+                        </a:lnSpc>
+                        <a:spcBef>
+                          <a:spcPts val="0"/>
+                        </a:spcBef>
+                        <a:spcAft>
+                          <a:spcPts val="0"/>
+                        </a:spcAft>
+                        <a:buClrTx/>
+                        <a:buSzTx/>
+                        <a:buFont typeface="Arial" pitchFamily="34" charset="0"/>
+                        <a:buChar char="•"/>
+                        <a:tabLst/>
+                        <a:defRPr/>
+                      </a:pPr>
+                      <a:r>
+                        <a:rPr lang="en-US" sz="1400" dirty="0"/>
+                        <a:t>O</a:t>
+                      </a:r>
+                      <a:r>
+                        <a:rPr lang="en-US" sz="1400" baseline="0" dirty="0"/>
+                        <a:t>verflow occurs, implying the result is incorrect. </a:t>
+                      </a:r>
+                    </a:p>
+                    <a:p>
+                      <a:pPr marL="285750" marR="0" indent="-285750" algn="l" defTabSz="914400" rtl="0" eaLnBrk="1" fontAlgn="auto" latinLnBrk="0" hangingPunct="1">
+                        <a:lnSpc>
+                          <a:spcPct val="100000"/>
+                        </a:lnSpc>
+                        <a:spcBef>
+                          <a:spcPts val="0"/>
+                        </a:spcBef>
+                        <a:spcAft>
+                          <a:spcPts val="0"/>
+                        </a:spcAft>
+                        <a:buClrTx/>
+                        <a:buSzTx/>
+                        <a:buFont typeface="Arial" pitchFamily="34" charset="0"/>
+                        <a:buChar char="•"/>
+                        <a:tabLst/>
+                        <a:defRPr/>
+                      </a:pPr>
+                      <a:r>
+                        <a:rPr lang="en-US" sz="1400" baseline="0" dirty="0"/>
+                        <a:t>The result is mistakenly reported as non-negative and in fact it should be negative. </a:t>
+                      </a:r>
+                    </a:p>
+                    <a:p>
+                      <a:pPr marL="285750" marR="0" indent="-285750" algn="l" defTabSz="914400" rtl="0" eaLnBrk="1" fontAlgn="auto" latinLnBrk="0" hangingPunct="1">
+                        <a:lnSpc>
+                          <a:spcPct val="100000"/>
+                        </a:lnSpc>
+                        <a:spcBef>
+                          <a:spcPts val="0"/>
+                        </a:spcBef>
+                        <a:spcAft>
+                          <a:spcPts val="0"/>
+                        </a:spcAft>
+                        <a:buClrTx/>
+                        <a:buSzTx/>
+                        <a:buFont typeface="Arial" pitchFamily="34" charset="0"/>
+                        <a:buChar char="•"/>
+                        <a:tabLst/>
+                        <a:defRPr/>
+                      </a:pPr>
+                      <a:r>
+                        <a:rPr lang="en-US" sz="1400" baseline="0" dirty="0"/>
+                        <a:t>Thus </a:t>
+                      </a:r>
+                      <a:r>
+                        <a:rPr lang="en-US" sz="1400" baseline="0" dirty="0">
+                          <a:latin typeface="Consolas" panose="020B0609020204030204" pitchFamily="49" charset="0"/>
+                        </a:rPr>
+                        <a:t>r0 – r1 &lt; 0 </a:t>
+                      </a:r>
+                      <a:r>
+                        <a:rPr lang="en-US" sz="1400" baseline="0" dirty="0"/>
+                        <a:t>in reality, i.e., </a:t>
+                      </a:r>
+                      <a:r>
+                        <a:rPr lang="en-US" sz="1400" baseline="0" dirty="0">
+                          <a:latin typeface="Consolas" panose="020B0609020204030204" pitchFamily="49" charset="0"/>
+                        </a:rPr>
+                        <a:t>r0 &lt; r1</a:t>
+                      </a:r>
+                      <a:endParaRPr lang="en-US" sz="1400" dirty="0">
+                        <a:latin typeface="Consolas" panose="020B0609020204030204" pitchFamily="49" charset="0"/>
+                        <a:cs typeface="Times New Roman" pitchFamily="18" charset="0"/>
+                      </a:endParaRPr>
+                    </a:p>
+                  </a:txBody>
+                  <a:tcPr marL="68580" marR="68580" marT="34290" marB="34290" anchor="ctr" anchorCtr="1"/>
+                </a:tc>
+                <a:tc>
+                  <a:txBody>
+                    <a:bodyPr/>
+                    <a:lstStyle/>
+                    <a:p>
+                      <a:pPr marL="285750" marR="0" indent="-285750" algn="l" defTabSz="914400" rtl="0" eaLnBrk="1" fontAlgn="auto" latinLnBrk="0" hangingPunct="1">
+                        <a:lnSpc>
+                          <a:spcPct val="100000"/>
+                        </a:lnSpc>
+                        <a:spcBef>
+                          <a:spcPts val="0"/>
+                        </a:spcBef>
+                        <a:spcAft>
+                          <a:spcPts val="0"/>
+                        </a:spcAft>
+                        <a:buClrTx/>
+                        <a:buSzTx/>
+                        <a:buFont typeface="Arial" pitchFamily="34" charset="0"/>
+                        <a:buChar char="•"/>
+                        <a:tabLst/>
+                        <a:defRPr/>
+                      </a:pPr>
+                      <a:r>
+                        <a:rPr lang="en-US" sz="1400" dirty="0"/>
+                        <a:t>O</a:t>
+                      </a:r>
+                      <a:r>
+                        <a:rPr lang="en-US" sz="1400" baseline="0" dirty="0"/>
+                        <a:t>verflow occurs, implying the result is incorrect. </a:t>
+                      </a:r>
+                    </a:p>
+                    <a:p>
+                      <a:pPr marL="285750" marR="0" indent="-285750" algn="l" defTabSz="914400" rtl="0" eaLnBrk="1" fontAlgn="auto" latinLnBrk="0" hangingPunct="1">
+                        <a:lnSpc>
+                          <a:spcPct val="100000"/>
+                        </a:lnSpc>
+                        <a:spcBef>
+                          <a:spcPts val="0"/>
+                        </a:spcBef>
+                        <a:spcAft>
+                          <a:spcPts val="0"/>
+                        </a:spcAft>
+                        <a:buClrTx/>
+                        <a:buSzTx/>
+                        <a:buFont typeface="Arial" pitchFamily="34" charset="0"/>
+                        <a:buChar char="•"/>
+                        <a:tabLst/>
+                        <a:defRPr/>
+                      </a:pPr>
+                      <a:r>
+                        <a:rPr lang="en-US" sz="1400" baseline="0" dirty="0"/>
+                        <a:t>The result is mistakenly reported as negative and in fact it should be non-negative. </a:t>
+                      </a:r>
+                    </a:p>
+                    <a:p>
+                      <a:pPr marL="285750" marR="0" indent="-285750" algn="l" defTabSz="914400" rtl="0" eaLnBrk="1" fontAlgn="auto" latinLnBrk="0" hangingPunct="1">
+                        <a:lnSpc>
+                          <a:spcPct val="100000"/>
+                        </a:lnSpc>
+                        <a:spcBef>
+                          <a:spcPts val="0"/>
+                        </a:spcBef>
+                        <a:spcAft>
+                          <a:spcPts val="0"/>
+                        </a:spcAft>
+                        <a:buClrTx/>
+                        <a:buSzTx/>
+                        <a:buFont typeface="Arial" pitchFamily="34" charset="0"/>
+                        <a:buChar char="•"/>
+                        <a:tabLst/>
+                        <a:defRPr/>
+                      </a:pPr>
+                      <a:r>
+                        <a:rPr lang="en-US" sz="1400" baseline="0" dirty="0"/>
+                        <a:t>Thus </a:t>
+                      </a:r>
+                      <a:r>
+                        <a:rPr lang="en-US" sz="1400" baseline="0" dirty="0">
+                          <a:latin typeface="Consolas" panose="020B0609020204030204" pitchFamily="49" charset="0"/>
+                        </a:rPr>
+                        <a:t>r0 – r1 ≥ 0 </a:t>
+                      </a:r>
+                      <a:r>
+                        <a:rPr lang="en-US" sz="1400" baseline="0" dirty="0"/>
+                        <a:t>in reality., i.e.  </a:t>
+                      </a:r>
+                      <a:r>
+                        <a:rPr lang="en-US" sz="1400" baseline="0" dirty="0">
+                          <a:latin typeface="Consolas" panose="020B0609020204030204" pitchFamily="49" charset="0"/>
+                        </a:rPr>
+                        <a:t>r0 ≥ r1</a:t>
+                      </a:r>
+                      <a:endParaRPr lang="en-US" sz="1400" dirty="0">
+                        <a:latin typeface="Consolas" panose="020B0609020204030204" pitchFamily="49" charset="0"/>
+                        <a:cs typeface="Times New Roman" pitchFamily="18" charset="0"/>
+                      </a:endParaRPr>
+                    </a:p>
+                  </a:txBody>
+                  <a:tcPr marL="68580" marR="68580" marT="34290" marB="34290" anchor="ctr" anchorCtr="1"/>
+                </a:tc>
+                <a:extLst>
+                  <a:ext uri="{0D108BD9-81ED-4DB2-BD59-A6C34878D82A}">
+                    <a16:rowId xmlns:a16="http://schemas.microsoft.com/office/drawing/2014/main" val="10002"/>
+                  </a:ext>
+                </a:extLst>
+              </a:tr>
+            </a:tbl>
+          </a:graphicData>
+        </a:graphic>
+      </p:graphicFrame>
+      <p:sp>
+        <p:nvSpPr>
+          <p:cNvPr id="6" name="TextBox 5"/>
+          <p:cNvSpPr txBox="1"/>
+          <p:nvPr/>
+        </p:nvSpPr>
+        <p:spPr>
+          <a:xfrm>
+            <a:off x="1543051" y="1771651"/>
+            <a:ext cx="4113947" cy="507831"/>
+          </a:xfrm>
+          <a:prstGeom prst="rect">
+            <a:avLst/>
+          </a:prstGeom>
+          <a:noFill/>
+        </p:spPr>
+        <p:txBody>
+          <a:bodyPr wrap="none" rtlCol="0">
+            <a:spAutoFit/>
+          </a:bodyPr>
+          <a:lstStyle/>
+          <a:p>
+            <a:pPr defTabSz="685800"/>
+            <a:r>
+              <a:rPr lang="en-US" sz="1350" b="1" dirty="0">
+                <a:solidFill>
+                  <a:srgbClr val="C00000"/>
+                </a:solidFill>
+                <a:latin typeface="Consolas" panose="020B0609020204030204" pitchFamily="49" charset="0"/>
+                <a:cs typeface="Consolas" panose="020B0609020204030204" pitchFamily="49" charset="0"/>
+              </a:rPr>
+              <a:t>CMP r0, r1</a:t>
+            </a:r>
+          </a:p>
+          <a:p>
+            <a:pPr defTabSz="685800"/>
+            <a:r>
+              <a:rPr lang="en-US" sz="1350" dirty="0">
+                <a:solidFill>
+                  <a:prstClr val="black"/>
+                </a:solidFill>
+                <a:latin typeface="Gill Sans MT"/>
+              </a:rPr>
+              <a:t>perform subtraction </a:t>
+            </a:r>
+            <a:r>
+              <a:rPr lang="en-US" sz="1350" dirty="0">
+                <a:solidFill>
+                  <a:prstClr val="black"/>
+                </a:solidFill>
+                <a:latin typeface="Consolas" panose="020B0609020204030204" pitchFamily="49" charset="0"/>
+              </a:rPr>
+              <a:t>r0 – r1</a:t>
+            </a:r>
+            <a:r>
+              <a:rPr lang="en-US" sz="1350" dirty="0">
+                <a:solidFill>
+                  <a:prstClr val="black"/>
+                </a:solidFill>
+                <a:latin typeface="Gill Sans MT"/>
+              </a:rPr>
+              <a:t>, without saving the result</a:t>
+            </a:r>
+          </a:p>
+        </p:txBody>
+      </p:sp>
+      <p:sp>
+        <p:nvSpPr>
+          <p:cNvPr id="7" name="TextBox 6"/>
+          <p:cNvSpPr txBox="1"/>
+          <p:nvPr/>
+        </p:nvSpPr>
+        <p:spPr>
+          <a:xfrm>
+            <a:off x="1543050" y="5011520"/>
+            <a:ext cx="4800600" cy="646331"/>
+          </a:xfrm>
+          <a:prstGeom prst="rect">
+            <a:avLst/>
+          </a:prstGeom>
+          <a:noFill/>
+        </p:spPr>
+        <p:txBody>
+          <a:bodyPr wrap="square" rtlCol="0">
+            <a:spAutoFit/>
+          </a:bodyPr>
+          <a:lstStyle/>
+          <a:p>
+            <a:pPr defTabSz="685800"/>
+            <a:r>
+              <a:rPr lang="en-US" sz="1200" dirty="0">
+                <a:solidFill>
+                  <a:prstClr val="black"/>
+                </a:solidFill>
+                <a:latin typeface="Gill Sans MT"/>
+              </a:rPr>
+              <a:t>Conclusions:</a:t>
+            </a:r>
+          </a:p>
+          <a:p>
+            <a:pPr marL="214313" indent="-214313" defTabSz="685800">
+              <a:buFont typeface="Arial" pitchFamily="34" charset="0"/>
+              <a:buChar char="•"/>
+            </a:pPr>
+            <a:r>
+              <a:rPr lang="en-US" sz="1200" dirty="0">
+                <a:solidFill>
+                  <a:prstClr val="black"/>
+                </a:solidFill>
+                <a:latin typeface="Gill Sans MT"/>
+              </a:rPr>
+              <a:t>If N == V, then it is signed greater or equal (GE).</a:t>
+            </a:r>
+          </a:p>
+          <a:p>
+            <a:pPr marL="214313" indent="-214313" defTabSz="685800">
+              <a:buFont typeface="Arial" pitchFamily="34" charset="0"/>
+              <a:buChar char="•"/>
+            </a:pPr>
+            <a:r>
+              <a:rPr lang="en-US" sz="1200" dirty="0">
+                <a:solidFill>
+                  <a:prstClr val="black"/>
+                </a:solidFill>
+                <a:latin typeface="Gill Sans MT"/>
+              </a:rPr>
+              <a:t>Otherwise, it is signed less than (LT)</a:t>
+            </a:r>
+          </a:p>
+        </p:txBody>
+      </p:sp>
+    </p:spTree>
+    <p:extLst>
+      <p:ext uri="{BB962C8B-B14F-4D97-AF65-F5344CB8AC3E}">
+        <p14:creationId xmlns:p14="http://schemas.microsoft.com/office/powerpoint/2010/main" val="203524775"/>
+      </p:ext>
+    </p:extLst>
+  </p:cSld>
+  <p:clrMapOvr>
+    <a:masterClrMapping/>
+  </p:clrMapOvr>
+</p:sld>
+</file>
+
+<file path=ppt/slides/slide4.xml><?xml version="1.0" encoding="utf-8"?>
+<p:sld xmlns:a="http://schemas.openxmlformats.org/drawingml/2006/main" xmlns:r="http://schemas.openxmlformats.org/officeDocument/2006/relationships" xmlns:p="http://schemas.openxmlformats.org/presentationml/2006/main">
+  <p:cSld>
+    <p:spTree>
+      <p:nvGrpSpPr>
+        <p:cNvPr id="1" name=""/>
+        <p:cNvGrpSpPr/>
+        <p:nvPr/>
+      </p:nvGrpSpPr>
+      <p:grpSpPr>
+        <a:xfrm>
+          <a:off x="0" y="0"/>
+          <a:ext cx="0" cy="0"/>
+          <a:chOff x="0" y="0"/>
+          <a:chExt cx="0" cy="0"/>
+        </a:xfrm>
+      </p:grpSpPr>
+      <p:sp>
+        <p:nvSpPr>
+          <p:cNvPr id="2" name="Title 1"/>
+          <p:cNvSpPr>
+            <a:spLocks noGrp="1"/>
+          </p:cNvSpPr>
+          <p:nvPr>
+            <p:ph type="title"/>
+          </p:nvPr>
+        </p:nvSpPr>
+        <p:spPr/>
+        <p:txBody>
+          <a:bodyPr>
+            <a:normAutofit/>
+          </a:bodyPr>
+          <a:lstStyle/>
+          <a:p>
+            <a:r>
+              <a:rPr lang="en-US" dirty="0"/>
+              <a:t>Signed Comparison</a:t>
+            </a:r>
+          </a:p>
+        </p:txBody>
+      </p:sp>
+      <p:sp>
+        <p:nvSpPr>
+          <p:cNvPr id="3" name="Slide Number Placeholder 2"/>
+          <p:cNvSpPr>
+            <a:spLocks noGrp="1"/>
+          </p:cNvSpPr>
+          <p:nvPr>
+            <p:ph type="sldNum" sz="quarter" idx="12"/>
+          </p:nvPr>
+        </p:nvSpPr>
+        <p:spPr/>
+        <p:txBody>
+          <a:bodyPr/>
+          <a:lstStyle/>
+          <a:p>
             <a:fld id="{EA7C8D44-3667-46F6-9772-CC52308E2A7F}" type="slidenum">
               <a:rPr kumimoji="0" lang="en-US" smtClean="0"/>
               <a:pPr/>
-              <a:t>3</a:t>
+              <a:t>4</a:t>
             </a:fld>
             <a:endParaRPr kumimoji="0" lang="en-US" dirty="0"/>
           </a:p>
@@ -22642,7 +26918,7 @@
 </p:sld>
 </file>
 
-<file path=ppt/slides/slide4.xml><?xml version="1.0" encoding="utf-8"?>
+<file path=ppt/slides/slide5.xml><?xml version="1.0" encoding="utf-8"?>
 <p:sld xmlns:a="http://schemas.openxmlformats.org/drawingml/2006/main" xmlns:r="http://schemas.openxmlformats.org/officeDocument/2006/relationships" xmlns:p="http://schemas.openxmlformats.org/presentationml/2006/main">
   <p:cSld>
     <p:spTree>
@@ -22774,7 +27050,7 @@
                 <a:tabLst/>
                 <a:defRPr/>
               </a:pPr>
-              <a:t>4</a:t>
+              <a:t>5</a:t>
             </a:fld>
             <a:endParaRPr kumimoji="0" lang="en-US" sz="1400" b="0" i="0" u="none" strike="noStrike" kern="1200" cap="none" spc="0" normalizeH="0" baseline="0" noProof="0">
               <a:ln>
@@ -23158,7 +27434,7 @@
                 <a:tabLst/>
                 <a:defRPr/>
               </a:pPr>
-              <a:t>4</a:t>
+              <a:t>5</a:t>
             </a:fld>
             <a:endParaRPr kumimoji="0" lang="en-US" sz="1400" b="0" i="0" u="none" strike="noStrike" kern="1200" cap="none" spc="0" normalizeH="0" baseline="0" noProof="0">
               <a:ln>
@@ -25011,7 +29287,7 @@
 </p:sld>
 </file>
 
-<file path=ppt/slides/slide5.xml><?xml version="1.0" encoding="utf-8"?>
+<file path=ppt/slides/slide6.xml><?xml version="1.0" encoding="utf-8"?>
 <p:sld xmlns:a="http://schemas.openxmlformats.org/drawingml/2006/main" xmlns:r="http://schemas.openxmlformats.org/officeDocument/2006/relationships" xmlns:p="http://schemas.openxmlformats.org/presentationml/2006/main">
   <p:cSld>
     <p:spTree>
@@ -25085,7 +29361,7 @@
             <a:fld id="{EA7C8D44-3667-46F6-9772-CC52308E2A7F}" type="slidenum">
               <a:rPr kumimoji="0" lang="en-US" smtClean="0"/>
               <a:pPr/>
-              <a:t>5</a:t>
+              <a:t>6</a:t>
             </a:fld>
             <a:endParaRPr kumimoji="0" lang="en-US" dirty="0"/>
           </a:p>
@@ -25307,7 +29583,7 @@
 </p:sld>
 </file>
 
-<file path=ppt/slides/slide6.xml><?xml version="1.0" encoding="utf-8"?>
+<file path=ppt/slides/slide7.xml><?xml version="1.0" encoding="utf-8"?>
 <p:sld xmlns:a="http://schemas.openxmlformats.org/drawingml/2006/main" xmlns:r="http://schemas.openxmlformats.org/officeDocument/2006/relationships" xmlns:p="http://schemas.openxmlformats.org/presentationml/2006/main">
   <p:cSld>
     <p:spTree>
@@ -25519,7 +29795,7 @@
                 <a:latin typeface="Gill Sans MT"/>
               </a:rPr>
               <a:pPr/>
-              <a:t>6</a:t>
+              <a:t>7</a:t>
             </a:fld>
             <a:endParaRPr lang="en-US">
               <a:solidFill>
@@ -26489,17 +30765,17 @@
           <a:ln/>
           <a:extLst>
             <a:ext uri="{FAA26D3D-D897-4be2-8F04-BA451C77F1D7}">
-              <ma14:placeholderFlag xmlns:ma14="http://schemas.microsoft.com/office/mac/drawingml/2011/main" xmlns="" val="1"/>
+              <ma14:placeholderFlag xmlns="" xmlns:ma14="http://schemas.microsoft.com/office/mac/drawingml/2011/main" val="1"/>
             </a:ext>
             <a:ext uri="{909E8E84-426E-40dd-AFC4-6F175D3DCCD1}">
-              <a14:hiddenFill xmlns:a14="http://schemas.microsoft.com/office/drawing/2010/main" xmlns="">
+              <a14:hiddenFill xmlns="" xmlns:a14="http://schemas.microsoft.com/office/drawing/2010/main">
                 <a:solidFill>
                   <a:schemeClr val="bg1"/>
                 </a:solidFill>
               </a14:hiddenFill>
             </a:ext>
             <a:ext uri="{91240B29-F687-4f45-9708-019B960494DF}">
-              <a14:hiddenLine xmlns:a14="http://schemas.microsoft.com/office/drawing/2010/main" xmlns="" w="12700">
+              <a14:hiddenLine xmlns="" xmlns:a14="http://schemas.microsoft.com/office/drawing/2010/main" w="12700">
                 <a:pattFill prst="narHorz">
                   <a:fgClr>
                     <a:schemeClr val="tx1"/>
@@ -26514,7 +30790,7 @@
               </a14:hiddenLine>
             </a:ext>
             <a:ext uri="{AF507438-7753-43e0-B8FC-AC1667EBCBE1}">
-              <a14:hiddenEffects xmlns:a14="http://schemas.microsoft.com/office/drawing/2010/main" xmlns="">
+              <a14:hiddenEffects xmlns="" xmlns:a14="http://schemas.microsoft.com/office/drawing/2010/main">
                 <a:effectLst>
                   <a:outerShdw blurRad="63500" dist="38099" dir="2700000" algn="ctr" rotWithShape="0">
                     <a:schemeClr val="bg2">
@@ -26957,7 +31233,7 @@
 </p:sld>
 </file>
 
-<file path=ppt/slides/slide7.xml><?xml version="1.0" encoding="utf-8"?>
+<file path=ppt/slides/slide8.xml><?xml version="1.0" encoding="utf-8"?>
 <p:sld xmlns:a="http://schemas.openxmlformats.org/drawingml/2006/main" xmlns:r="http://schemas.openxmlformats.org/officeDocument/2006/relationships" xmlns:p="http://schemas.openxmlformats.org/presentationml/2006/main">
   <p:cSld>
     <p:spTree>
@@ -27026,7 +31302,7 @@
             <a:fld id="{EA7C8D44-3667-46F6-9772-CC52308E2A7F}" type="slidenum">
               <a:rPr kumimoji="0" lang="en-US" smtClean="0"/>
               <a:pPr/>
-              <a:t>7</a:t>
+              <a:t>8</a:t>
             </a:fld>
             <a:endParaRPr kumimoji="0" lang="en-US" dirty="0"/>
           </a:p>
@@ -27080,7 +31356,7 @@
 </p:sld>
 </file>
 
-<file path=ppt/slides/slide8.xml><?xml version="1.0" encoding="utf-8"?>
+<file path=ppt/slides/slide9.xml><?xml version="1.0" encoding="utf-8"?>
 <p:sld xmlns:a="http://schemas.openxmlformats.org/drawingml/2006/main" xmlns:r="http://schemas.openxmlformats.org/officeDocument/2006/relationships" xmlns:p="http://schemas.openxmlformats.org/presentationml/2006/main">
   <p:cSld>
     <p:spTree>
@@ -27137,7 +31413,7 @@
             <a:fld id="{EA7C8D44-3667-46F6-9772-CC52308E2A7F}" type="slidenum">
               <a:rPr kumimoji="0" lang="en-US" smtClean="0"/>
               <a:pPr/>
-              <a:t>8</a:t>
+              <a:t>9</a:t>
             </a:fld>
             <a:endParaRPr kumimoji="0" lang="en-US" dirty="0"/>
           </a:p>
@@ -28963,1851 +33239,6 @@
 </p:sld>
 </file>
 
-<file path=ppt/slides/slide9.xml><?xml version="1.0" encoding="utf-8"?>
-<p:sld xmlns:a="http://schemas.openxmlformats.org/drawingml/2006/main" xmlns:r="http://schemas.openxmlformats.org/officeDocument/2006/relationships" xmlns:p="http://schemas.openxmlformats.org/presentationml/2006/main">
-  <p:cSld>
-    <p:spTree>
-      <p:nvGrpSpPr>
-        <p:cNvPr id="1" name=""/>
-        <p:cNvGrpSpPr/>
-        <p:nvPr/>
-      </p:nvGrpSpPr>
-      <p:grpSpPr>
-        <a:xfrm>
-          <a:off x="0" y="0"/>
-          <a:ext cx="0" cy="0"/>
-          <a:chOff x="0" y="0"/>
-          <a:chExt cx="0" cy="0"/>
-        </a:xfrm>
-      </p:grpSpPr>
-      <p:sp>
-        <p:nvSpPr>
-          <p:cNvPr id="2" name="Title 1"/>
-          <p:cNvSpPr>
-            <a:spLocks noGrp="1"/>
-          </p:cNvSpPr>
-          <p:nvPr>
-            <p:ph type="title"/>
-          </p:nvPr>
-        </p:nvSpPr>
-        <p:spPr/>
-        <p:txBody>
-          <a:bodyPr/>
-          <a:lstStyle/>
-          <a:p>
-            <a:r>
-              <a:rPr lang="en-US" dirty="0"/>
-              <a:t>Logic View of Memory</a:t>
-            </a:r>
-          </a:p>
-        </p:txBody>
-      </p:sp>
-      <p:sp>
-        <p:nvSpPr>
-          <p:cNvPr id="4" name="Slide Number Placeholder 3"/>
-          <p:cNvSpPr>
-            <a:spLocks noGrp="1"/>
-          </p:cNvSpPr>
-          <p:nvPr>
-            <p:ph type="sldNum" sz="quarter" idx="12"/>
-          </p:nvPr>
-        </p:nvSpPr>
-        <p:spPr/>
-        <p:txBody>
-          <a:bodyPr/>
-          <a:lstStyle/>
-          <a:p>
-            <a:fld id="{EA7C8D44-3667-46F6-9772-CC52308E2A7F}" type="slidenum">
-              <a:rPr kumimoji="0" lang="en-US" smtClean="0"/>
-              <a:pPr/>
-              <a:t>9</a:t>
-            </a:fld>
-            <a:endParaRPr kumimoji="0" lang="en-US" dirty="0"/>
-          </a:p>
-        </p:txBody>
-      </p:sp>
-      <p:grpSp>
-        <p:nvGrpSpPr>
-          <p:cNvPr id="13" name="Group 42"/>
-          <p:cNvGrpSpPr/>
-          <p:nvPr/>
-        </p:nvGrpSpPr>
-        <p:grpSpPr>
-          <a:xfrm>
-            <a:off x="5943600" y="1307068"/>
-            <a:ext cx="2690286" cy="4803577"/>
-            <a:chOff x="5943600" y="1307068"/>
-            <a:chExt cx="2690286" cy="4803577"/>
-          </a:xfrm>
-        </p:grpSpPr>
-        <p:sp>
-          <p:nvSpPr>
-            <p:cNvPr id="5" name="Rectangle 4"/>
-            <p:cNvSpPr/>
-            <p:nvPr/>
-          </p:nvSpPr>
-          <p:spPr>
-            <a:xfrm>
-              <a:off x="7342456" y="2690336"/>
-              <a:ext cx="1289400" cy="307777"/>
-            </a:xfrm>
-            <a:prstGeom prst="rect">
-              <a:avLst/>
-            </a:prstGeom>
-            <a:ln>
-              <a:solidFill>
-                <a:schemeClr val="tx2"/>
-              </a:solidFill>
-            </a:ln>
-          </p:spPr>
-          <p:style>
-            <a:lnRef idx="2">
-              <a:schemeClr val="accent1"/>
-            </a:lnRef>
-            <a:fillRef idx="1">
-              <a:schemeClr val="lt1"/>
-            </a:fillRef>
-            <a:effectRef idx="0">
-              <a:schemeClr val="accent1"/>
-            </a:effectRef>
-            <a:fontRef idx="minor">
-              <a:schemeClr val="dk1"/>
-            </a:fontRef>
-          </p:style>
-          <p:txBody>
-            <a:bodyPr wrap="square">
-              <a:spAutoFit/>
-            </a:bodyPr>
-            <a:lstStyle/>
-            <a:p>
-              <a:pPr algn="ctr"/>
-              <a:r>
-                <a:rPr lang="en-US" dirty="0">
-                  <a:latin typeface="Consolas" panose="020B0609020204030204" pitchFamily="49" charset="0"/>
-                  <a:cs typeface="Consolas" panose="020B0609020204030204" pitchFamily="49" charset="0"/>
-                </a:rPr>
-                <a:t>01110010</a:t>
-              </a:r>
-              <a:endParaRPr lang="pl-PL" dirty="0">
-                <a:latin typeface="Consolas" panose="020B0609020204030204" pitchFamily="49" charset="0"/>
-                <a:cs typeface="Consolas" panose="020B0609020204030204" pitchFamily="49" charset="0"/>
-              </a:endParaRPr>
-            </a:p>
-          </p:txBody>
-        </p:sp>
-        <p:sp>
-          <p:nvSpPr>
-            <p:cNvPr id="6" name="Rectangle 5"/>
-            <p:cNvSpPr/>
-            <p:nvPr/>
-          </p:nvSpPr>
-          <p:spPr>
-            <a:xfrm>
-              <a:off x="7344136" y="3059222"/>
-              <a:ext cx="1289400" cy="307777"/>
-            </a:xfrm>
-            <a:prstGeom prst="rect">
-              <a:avLst/>
-            </a:prstGeom>
-            <a:ln>
-              <a:solidFill>
-                <a:schemeClr val="tx2"/>
-              </a:solidFill>
-            </a:ln>
-          </p:spPr>
-          <p:style>
-            <a:lnRef idx="2">
-              <a:schemeClr val="accent1"/>
-            </a:lnRef>
-            <a:fillRef idx="1">
-              <a:schemeClr val="lt1"/>
-            </a:fillRef>
-            <a:effectRef idx="0">
-              <a:schemeClr val="accent1"/>
-            </a:effectRef>
-            <a:fontRef idx="minor">
-              <a:schemeClr val="dk1"/>
-            </a:fontRef>
-          </p:style>
-          <p:txBody>
-            <a:bodyPr wrap="square">
-              <a:spAutoFit/>
-            </a:bodyPr>
-            <a:lstStyle/>
-            <a:p>
-              <a:pPr algn="ctr"/>
-              <a:r>
-                <a:rPr lang="en-US" dirty="0">
-                  <a:latin typeface="Consolas" panose="020B0609020204030204" pitchFamily="49" charset="0"/>
-                  <a:cs typeface="Consolas" panose="020B0609020204030204" pitchFamily="49" charset="0"/>
-                </a:rPr>
-                <a:t>00100101</a:t>
-              </a:r>
-              <a:endParaRPr lang="pl-PL" dirty="0">
-                <a:latin typeface="Consolas" panose="020B0609020204030204" pitchFamily="49" charset="0"/>
-                <a:cs typeface="Consolas" panose="020B0609020204030204" pitchFamily="49" charset="0"/>
-              </a:endParaRPr>
-            </a:p>
-          </p:txBody>
-        </p:sp>
-        <p:sp>
-          <p:nvSpPr>
-            <p:cNvPr id="7" name="Rectangle 6"/>
-            <p:cNvSpPr/>
-            <p:nvPr/>
-          </p:nvSpPr>
-          <p:spPr>
-            <a:xfrm>
-              <a:off x="7343951" y="3426936"/>
-              <a:ext cx="1289400" cy="307777"/>
-            </a:xfrm>
-            <a:prstGeom prst="rect">
-              <a:avLst/>
-            </a:prstGeom>
-            <a:ln>
-              <a:solidFill>
-                <a:schemeClr val="tx2"/>
-              </a:solidFill>
-            </a:ln>
-          </p:spPr>
-          <p:style>
-            <a:lnRef idx="2">
-              <a:schemeClr val="accent1"/>
-            </a:lnRef>
-            <a:fillRef idx="1">
-              <a:schemeClr val="lt1"/>
-            </a:fillRef>
-            <a:effectRef idx="0">
-              <a:schemeClr val="accent1"/>
-            </a:effectRef>
-            <a:fontRef idx="minor">
-              <a:schemeClr val="dk1"/>
-            </a:fontRef>
-          </p:style>
-          <p:txBody>
-            <a:bodyPr wrap="square">
-              <a:spAutoFit/>
-            </a:bodyPr>
-            <a:lstStyle/>
-            <a:p>
-              <a:pPr algn="ctr"/>
-              <a:r>
-                <a:rPr lang="en-US" dirty="0">
-                  <a:latin typeface="Consolas" panose="020B0609020204030204" pitchFamily="49" charset="0"/>
-                  <a:cs typeface="Consolas" panose="020B0609020204030204" pitchFamily="49" charset="0"/>
-                </a:rPr>
-                <a:t>11100010</a:t>
-              </a:r>
-              <a:endParaRPr lang="pl-PL" dirty="0">
-                <a:latin typeface="Consolas" panose="020B0609020204030204" pitchFamily="49" charset="0"/>
-                <a:cs typeface="Consolas" panose="020B0609020204030204" pitchFamily="49" charset="0"/>
-              </a:endParaRPr>
-            </a:p>
-          </p:txBody>
-        </p:sp>
-        <p:sp>
-          <p:nvSpPr>
-            <p:cNvPr id="8" name="Rectangle 7"/>
-            <p:cNvSpPr/>
-            <p:nvPr/>
-          </p:nvSpPr>
-          <p:spPr>
-            <a:xfrm>
-              <a:off x="7342456" y="3795822"/>
-              <a:ext cx="1289400" cy="307777"/>
-            </a:xfrm>
-            <a:prstGeom prst="rect">
-              <a:avLst/>
-            </a:prstGeom>
-            <a:ln>
-              <a:solidFill>
-                <a:schemeClr val="tx2"/>
-              </a:solidFill>
-            </a:ln>
-          </p:spPr>
-          <p:style>
-            <a:lnRef idx="2">
-              <a:schemeClr val="accent1"/>
-            </a:lnRef>
-            <a:fillRef idx="1">
-              <a:schemeClr val="lt1"/>
-            </a:fillRef>
-            <a:effectRef idx="0">
-              <a:schemeClr val="accent1"/>
-            </a:effectRef>
-            <a:fontRef idx="minor">
-              <a:schemeClr val="dk1"/>
-            </a:fontRef>
-          </p:style>
-          <p:txBody>
-            <a:bodyPr wrap="square">
-              <a:spAutoFit/>
-            </a:bodyPr>
-            <a:lstStyle/>
-            <a:p>
-              <a:pPr algn="ctr"/>
-              <a:r>
-                <a:rPr lang="en-US" dirty="0">
-                  <a:solidFill>
-                    <a:srgbClr val="000000"/>
-                  </a:solidFill>
-                  <a:latin typeface="Consolas" panose="020B0609020204030204" pitchFamily="49" charset="0"/>
-                  <a:cs typeface="Consolas" panose="020B0609020204030204" pitchFamily="49" charset="0"/>
-                </a:rPr>
-                <a:t>10000100</a:t>
-              </a:r>
-              <a:endParaRPr lang="pl-PL" dirty="0">
-                <a:solidFill>
-                  <a:srgbClr val="000000"/>
-                </a:solidFill>
-                <a:latin typeface="Consolas" panose="020B0609020204030204" pitchFamily="49" charset="0"/>
-                <a:cs typeface="Consolas" panose="020B0609020204030204" pitchFamily="49" charset="0"/>
-              </a:endParaRPr>
-            </a:p>
-          </p:txBody>
-        </p:sp>
-        <p:sp>
-          <p:nvSpPr>
-            <p:cNvPr id="9" name="Rectangle 8"/>
-            <p:cNvSpPr/>
-            <p:nvPr/>
-          </p:nvSpPr>
-          <p:spPr>
-            <a:xfrm>
-              <a:off x="7342806" y="4163536"/>
-              <a:ext cx="1289400" cy="307777"/>
-            </a:xfrm>
-            <a:prstGeom prst="rect">
-              <a:avLst/>
-            </a:prstGeom>
-            <a:ln>
-              <a:solidFill>
-                <a:schemeClr val="tx2"/>
-              </a:solidFill>
-            </a:ln>
-          </p:spPr>
-          <p:style>
-            <a:lnRef idx="2">
-              <a:schemeClr val="accent1"/>
-            </a:lnRef>
-            <a:fillRef idx="1">
-              <a:schemeClr val="lt1"/>
-            </a:fillRef>
-            <a:effectRef idx="0">
-              <a:schemeClr val="accent1"/>
-            </a:effectRef>
-            <a:fontRef idx="minor">
-              <a:schemeClr val="dk1"/>
-            </a:fontRef>
-          </p:style>
-          <p:txBody>
-            <a:bodyPr wrap="square">
-              <a:spAutoFit/>
-            </a:bodyPr>
-            <a:lstStyle/>
-            <a:p>
-              <a:pPr algn="ctr"/>
-              <a:r>
-                <a:rPr lang="en-US" dirty="0">
-                  <a:latin typeface="Consolas" panose="020B0609020204030204" pitchFamily="49" charset="0"/>
-                  <a:cs typeface="Consolas" panose="020B0609020204030204" pitchFamily="49" charset="0"/>
-                </a:rPr>
-                <a:t>01100001</a:t>
-              </a:r>
-              <a:endParaRPr lang="pl-PL" dirty="0">
-                <a:latin typeface="Consolas" panose="020B0609020204030204" pitchFamily="49" charset="0"/>
-                <a:cs typeface="Consolas" panose="020B0609020204030204" pitchFamily="49" charset="0"/>
-              </a:endParaRPr>
-            </a:p>
-          </p:txBody>
-        </p:sp>
-        <p:sp>
-          <p:nvSpPr>
-            <p:cNvPr id="10" name="Rectangle 9"/>
-            <p:cNvSpPr/>
-            <p:nvPr/>
-          </p:nvSpPr>
-          <p:spPr>
-            <a:xfrm>
-              <a:off x="7344486" y="4532422"/>
-              <a:ext cx="1289400" cy="307777"/>
-            </a:xfrm>
-            <a:prstGeom prst="rect">
-              <a:avLst/>
-            </a:prstGeom>
-            <a:ln>
-              <a:solidFill>
-                <a:schemeClr val="tx2"/>
-              </a:solidFill>
-            </a:ln>
-          </p:spPr>
-          <p:style>
-            <a:lnRef idx="2">
-              <a:schemeClr val="accent1"/>
-            </a:lnRef>
-            <a:fillRef idx="1">
-              <a:schemeClr val="lt1"/>
-            </a:fillRef>
-            <a:effectRef idx="0">
-              <a:schemeClr val="accent1"/>
-            </a:effectRef>
-            <a:fontRef idx="minor">
-              <a:schemeClr val="dk1"/>
-            </a:fontRef>
-          </p:style>
-          <p:txBody>
-            <a:bodyPr wrap="square">
-              <a:spAutoFit/>
-            </a:bodyPr>
-            <a:lstStyle/>
-            <a:p>
-              <a:pPr algn="ctr"/>
-              <a:r>
-                <a:rPr lang="en-US" dirty="0">
-                  <a:latin typeface="Consolas" panose="020B0609020204030204" pitchFamily="49" charset="0"/>
-                  <a:cs typeface="Consolas" panose="020B0609020204030204" pitchFamily="49" charset="0"/>
-                </a:rPr>
-                <a:t>10001111</a:t>
-              </a:r>
-              <a:endParaRPr lang="pl-PL" dirty="0">
-                <a:latin typeface="Consolas" panose="020B0609020204030204" pitchFamily="49" charset="0"/>
-                <a:cs typeface="Consolas" panose="020B0609020204030204" pitchFamily="49" charset="0"/>
-              </a:endParaRPr>
-            </a:p>
-          </p:txBody>
-        </p:sp>
-        <p:sp>
-          <p:nvSpPr>
-            <p:cNvPr id="11" name="Rectangle 10"/>
-            <p:cNvSpPr/>
-            <p:nvPr/>
-          </p:nvSpPr>
-          <p:spPr>
-            <a:xfrm>
-              <a:off x="7344301" y="4900136"/>
-              <a:ext cx="1289400" cy="307777"/>
-            </a:xfrm>
-            <a:prstGeom prst="rect">
-              <a:avLst/>
-            </a:prstGeom>
-            <a:ln>
-              <a:solidFill>
-                <a:schemeClr val="tx2"/>
-              </a:solidFill>
-            </a:ln>
-          </p:spPr>
-          <p:style>
-            <a:lnRef idx="2">
-              <a:schemeClr val="accent1"/>
-            </a:lnRef>
-            <a:fillRef idx="1">
-              <a:schemeClr val="lt1"/>
-            </a:fillRef>
-            <a:effectRef idx="0">
-              <a:schemeClr val="accent1"/>
-            </a:effectRef>
-            <a:fontRef idx="minor">
-              <a:schemeClr val="dk1"/>
-            </a:fontRef>
-          </p:style>
-          <p:txBody>
-            <a:bodyPr wrap="square">
-              <a:spAutoFit/>
-            </a:bodyPr>
-            <a:lstStyle/>
-            <a:p>
-              <a:pPr algn="ctr"/>
-              <a:r>
-                <a:rPr lang="en-US" dirty="0">
-                  <a:latin typeface="Consolas" panose="020B0609020204030204" pitchFamily="49" charset="0"/>
-                  <a:cs typeface="Consolas" panose="020B0609020204030204" pitchFamily="49" charset="0"/>
-                </a:rPr>
-                <a:t>00010010</a:t>
-              </a:r>
-              <a:endParaRPr lang="pl-PL" dirty="0">
-                <a:latin typeface="Consolas" panose="020B0609020204030204" pitchFamily="49" charset="0"/>
-                <a:cs typeface="Consolas" panose="020B0609020204030204" pitchFamily="49" charset="0"/>
-              </a:endParaRPr>
-            </a:p>
-          </p:txBody>
-        </p:sp>
-        <p:sp>
-          <p:nvSpPr>
-            <p:cNvPr id="12" name="Rectangle 11"/>
-            <p:cNvSpPr/>
-            <p:nvPr/>
-          </p:nvSpPr>
-          <p:spPr>
-            <a:xfrm>
-              <a:off x="7342806" y="5269022"/>
-              <a:ext cx="1289400" cy="307777"/>
-            </a:xfrm>
-            <a:prstGeom prst="rect">
-              <a:avLst/>
-            </a:prstGeom>
-            <a:ln>
-              <a:solidFill>
-                <a:schemeClr val="tx2"/>
-              </a:solidFill>
-            </a:ln>
-          </p:spPr>
-          <p:style>
-            <a:lnRef idx="2">
-              <a:schemeClr val="accent1"/>
-            </a:lnRef>
-            <a:fillRef idx="1">
-              <a:schemeClr val="lt1"/>
-            </a:fillRef>
-            <a:effectRef idx="0">
-              <a:schemeClr val="accent1"/>
-            </a:effectRef>
-            <a:fontRef idx="minor">
-              <a:schemeClr val="dk1"/>
-            </a:fontRef>
-          </p:style>
-          <p:txBody>
-            <a:bodyPr wrap="square">
-              <a:spAutoFit/>
-            </a:bodyPr>
-            <a:lstStyle/>
-            <a:p>
-              <a:pPr algn="ctr"/>
-              <a:r>
-                <a:rPr lang="en-US" dirty="0">
-                  <a:latin typeface="Consolas" panose="020B0609020204030204" pitchFamily="49" charset="0"/>
-                  <a:cs typeface="Consolas" panose="020B0609020204030204" pitchFamily="49" charset="0"/>
-                </a:rPr>
-                <a:t>10010100</a:t>
-              </a:r>
-              <a:endParaRPr lang="pl-PL" dirty="0">
-                <a:latin typeface="Consolas" panose="020B0609020204030204" pitchFamily="49" charset="0"/>
-                <a:cs typeface="Consolas" panose="020B0609020204030204" pitchFamily="49" charset="0"/>
-              </a:endParaRPr>
-            </a:p>
-          </p:txBody>
-        </p:sp>
-        <p:cxnSp>
-          <p:nvCxnSpPr>
-            <p:cNvPr id="14" name="Straight Connector 13"/>
-            <p:cNvCxnSpPr>
-              <a:stCxn id="31" idx="0"/>
-              <a:endCxn id="5" idx="1"/>
-            </p:cNvCxnSpPr>
-            <p:nvPr/>
-          </p:nvCxnSpPr>
-          <p:spPr>
-            <a:xfrm>
-              <a:off x="7342456" y="2434633"/>
-              <a:ext cx="0" cy="409592"/>
-            </a:xfrm>
-            <a:prstGeom prst="line">
-              <a:avLst/>
-            </a:prstGeom>
-            <a:ln>
-              <a:solidFill>
-                <a:schemeClr val="tx2">
-                  <a:lumMod val="75000"/>
-                </a:schemeClr>
-              </a:solidFill>
-            </a:ln>
-            <a:effectLst/>
-          </p:spPr>
-          <p:style>
-            <a:lnRef idx="2">
-              <a:schemeClr val="accent1"/>
-            </a:lnRef>
-            <a:fillRef idx="0">
-              <a:schemeClr val="accent1"/>
-            </a:fillRef>
-            <a:effectRef idx="1">
-              <a:schemeClr val="accent1"/>
-            </a:effectRef>
-            <a:fontRef idx="minor">
-              <a:schemeClr val="tx1"/>
-            </a:fontRef>
-          </p:style>
-        </p:cxnSp>
-        <p:cxnSp>
-          <p:nvCxnSpPr>
-            <p:cNvPr id="15" name="Straight Connector 14"/>
-            <p:cNvCxnSpPr>
-              <a:stCxn id="31" idx="3"/>
-              <a:endCxn id="5" idx="3"/>
-            </p:cNvCxnSpPr>
-            <p:nvPr/>
-          </p:nvCxnSpPr>
-          <p:spPr>
-            <a:xfrm>
-              <a:off x="8628331" y="2225175"/>
-              <a:ext cx="3525" cy="619050"/>
-            </a:xfrm>
-            <a:prstGeom prst="line">
-              <a:avLst/>
-            </a:prstGeom>
-            <a:ln>
-              <a:solidFill>
-                <a:schemeClr val="tx2">
-                  <a:lumMod val="75000"/>
-                </a:schemeClr>
-              </a:solidFill>
-            </a:ln>
-            <a:effectLst/>
-          </p:spPr>
-          <p:style>
-            <a:lnRef idx="2">
-              <a:schemeClr val="accent1"/>
-            </a:lnRef>
-            <a:fillRef idx="0">
-              <a:schemeClr val="accent1"/>
-            </a:fillRef>
-            <a:effectRef idx="1">
-              <a:schemeClr val="accent1"/>
-            </a:effectRef>
-            <a:fontRef idx="minor">
-              <a:schemeClr val="tx1"/>
-            </a:fontRef>
-          </p:style>
-        </p:cxnSp>
-        <p:cxnSp>
-          <p:nvCxnSpPr>
-            <p:cNvPr id="16" name="Straight Connector 15"/>
-            <p:cNvCxnSpPr>
-              <a:stCxn id="12" idx="1"/>
-              <a:endCxn id="34" idx="0"/>
-            </p:cNvCxnSpPr>
-            <p:nvPr/>
-          </p:nvCxnSpPr>
-          <p:spPr>
-            <a:xfrm flipH="1">
-              <a:off x="7342456" y="5422911"/>
-              <a:ext cx="350" cy="604790"/>
-            </a:xfrm>
-            <a:prstGeom prst="line">
-              <a:avLst/>
-            </a:prstGeom>
-            <a:ln>
-              <a:solidFill>
-                <a:schemeClr val="tx2">
-                  <a:lumMod val="75000"/>
-                </a:schemeClr>
-              </a:solidFill>
-            </a:ln>
-            <a:effectLst/>
-          </p:spPr>
-          <p:style>
-            <a:lnRef idx="2">
-              <a:schemeClr val="accent1"/>
-            </a:lnRef>
-            <a:fillRef idx="0">
-              <a:schemeClr val="accent1"/>
-            </a:fillRef>
-            <a:effectRef idx="1">
-              <a:schemeClr val="accent1"/>
-            </a:effectRef>
-            <a:fontRef idx="minor">
-              <a:schemeClr val="tx1"/>
-            </a:fontRef>
-          </p:style>
-        </p:cxnSp>
-        <p:cxnSp>
-          <p:nvCxnSpPr>
-            <p:cNvPr id="17" name="Straight Connector 16"/>
-            <p:cNvCxnSpPr>
-              <a:stCxn id="12" idx="3"/>
-              <a:endCxn id="34" idx="3"/>
-            </p:cNvCxnSpPr>
-            <p:nvPr/>
-          </p:nvCxnSpPr>
-          <p:spPr>
-            <a:xfrm flipH="1">
-              <a:off x="8628331" y="5422911"/>
-              <a:ext cx="3875" cy="395332"/>
-            </a:xfrm>
-            <a:prstGeom prst="line">
-              <a:avLst/>
-            </a:prstGeom>
-            <a:ln>
-              <a:solidFill>
-                <a:schemeClr val="tx2">
-                  <a:lumMod val="75000"/>
-                </a:schemeClr>
-              </a:solidFill>
-            </a:ln>
-            <a:effectLst/>
-          </p:spPr>
-          <p:style>
-            <a:lnRef idx="2">
-              <a:schemeClr val="accent1"/>
-            </a:lnRef>
-            <a:fillRef idx="0">
-              <a:schemeClr val="accent1"/>
-            </a:fillRef>
-            <a:effectRef idx="1">
-              <a:schemeClr val="accent1"/>
-            </a:effectRef>
-            <a:fontRef idx="minor">
-              <a:schemeClr val="tx1"/>
-            </a:fontRef>
-          </p:style>
-        </p:cxnSp>
-        <p:sp>
-          <p:nvSpPr>
-            <p:cNvPr id="31" name="Freeform 30"/>
-            <p:cNvSpPr/>
-            <p:nvPr/>
-          </p:nvSpPr>
-          <p:spPr>
-            <a:xfrm>
-              <a:off x="7342456" y="2221468"/>
-              <a:ext cx="1285875" cy="213783"/>
-            </a:xfrm>
-            <a:custGeom>
-              <a:avLst/>
-              <a:gdLst>
-                <a:gd name="connsiteX0" fmla="*/ 0 w 1285875"/>
-                <a:gd name="connsiteY0" fmla="*/ 365125 h 366183"/>
-                <a:gd name="connsiteX1" fmla="*/ 428625 w 1285875"/>
-                <a:gd name="connsiteY1" fmla="*/ 0 h 366183"/>
-                <a:gd name="connsiteX2" fmla="*/ 885825 w 1285875"/>
-                <a:gd name="connsiteY2" fmla="*/ 365125 h 366183"/>
-                <a:gd name="connsiteX3" fmla="*/ 1285875 w 1285875"/>
-                <a:gd name="connsiteY3" fmla="*/ 6350 h 366183"/>
-              </a:gdLst>
-              <a:ahLst/>
-              <a:cxnLst>
-                <a:cxn ang="0">
-                  <a:pos x="connsiteX0" y="connsiteY0"/>
-                </a:cxn>
-                <a:cxn ang="0">
-                  <a:pos x="connsiteX1" y="connsiteY1"/>
-                </a:cxn>
-                <a:cxn ang="0">
-                  <a:pos x="connsiteX2" y="connsiteY2"/>
-                </a:cxn>
-                <a:cxn ang="0">
-                  <a:pos x="connsiteX3" y="connsiteY3"/>
-                </a:cxn>
-              </a:cxnLst>
-              <a:rect l="l" t="t" r="r" b="b"/>
-              <a:pathLst>
-                <a:path w="1285875" h="366183">
-                  <a:moveTo>
-                    <a:pt x="0" y="365125"/>
-                  </a:moveTo>
-                  <a:cubicBezTo>
-                    <a:pt x="140494" y="182562"/>
-                    <a:pt x="280988" y="0"/>
-                    <a:pt x="428625" y="0"/>
-                  </a:cubicBezTo>
-                  <a:cubicBezTo>
-                    <a:pt x="576262" y="0"/>
-                    <a:pt x="742950" y="364067"/>
-                    <a:pt x="885825" y="365125"/>
-                  </a:cubicBezTo>
-                  <a:cubicBezTo>
-                    <a:pt x="1028700" y="366183"/>
-                    <a:pt x="1233488" y="58737"/>
-                    <a:pt x="1285875" y="6350"/>
-                  </a:cubicBezTo>
-                </a:path>
-              </a:pathLst>
-            </a:custGeom>
-            <a:ln>
-              <a:solidFill>
-                <a:schemeClr val="tx2">
-                  <a:lumMod val="75000"/>
-                </a:schemeClr>
-              </a:solidFill>
-            </a:ln>
-            <a:effectLst/>
-          </p:spPr>
-          <p:style>
-            <a:lnRef idx="2">
-              <a:schemeClr val="accent1"/>
-            </a:lnRef>
-            <a:fillRef idx="0">
-              <a:schemeClr val="accent1"/>
-            </a:fillRef>
-            <a:effectRef idx="1">
-              <a:schemeClr val="accent1"/>
-            </a:effectRef>
-            <a:fontRef idx="minor">
-              <a:schemeClr val="tx1"/>
-            </a:fontRef>
-          </p:style>
-          <p:txBody>
-            <a:bodyPr rtlCol="0" anchor="ctr"/>
-            <a:lstStyle/>
-            <a:p>
-              <a:pPr algn="ctr"/>
-              <a:endParaRPr lang="en-US">
-                <a:latin typeface="Consolas" panose="020B0609020204030204" pitchFamily="49" charset="0"/>
-                <a:cs typeface="Consolas" panose="020B0609020204030204" pitchFamily="49" charset="0"/>
-              </a:endParaRPr>
-            </a:p>
-          </p:txBody>
-        </p:sp>
-        <p:sp>
-          <p:nvSpPr>
-            <p:cNvPr id="34" name="Freeform 33"/>
-            <p:cNvSpPr/>
-            <p:nvPr/>
-          </p:nvSpPr>
-          <p:spPr>
-            <a:xfrm>
-              <a:off x="7342456" y="5814536"/>
-              <a:ext cx="1285875" cy="213783"/>
-            </a:xfrm>
-            <a:custGeom>
-              <a:avLst/>
-              <a:gdLst>
-                <a:gd name="connsiteX0" fmla="*/ 0 w 1285875"/>
-                <a:gd name="connsiteY0" fmla="*/ 365125 h 366183"/>
-                <a:gd name="connsiteX1" fmla="*/ 428625 w 1285875"/>
-                <a:gd name="connsiteY1" fmla="*/ 0 h 366183"/>
-                <a:gd name="connsiteX2" fmla="*/ 885825 w 1285875"/>
-                <a:gd name="connsiteY2" fmla="*/ 365125 h 366183"/>
-                <a:gd name="connsiteX3" fmla="*/ 1285875 w 1285875"/>
-                <a:gd name="connsiteY3" fmla="*/ 6350 h 366183"/>
-              </a:gdLst>
-              <a:ahLst/>
-              <a:cxnLst>
-                <a:cxn ang="0">
-                  <a:pos x="connsiteX0" y="connsiteY0"/>
-                </a:cxn>
-                <a:cxn ang="0">
-                  <a:pos x="connsiteX1" y="connsiteY1"/>
-                </a:cxn>
-                <a:cxn ang="0">
-                  <a:pos x="connsiteX2" y="connsiteY2"/>
-                </a:cxn>
-                <a:cxn ang="0">
-                  <a:pos x="connsiteX3" y="connsiteY3"/>
-                </a:cxn>
-              </a:cxnLst>
-              <a:rect l="l" t="t" r="r" b="b"/>
-              <a:pathLst>
-                <a:path w="1285875" h="366183">
-                  <a:moveTo>
-                    <a:pt x="0" y="365125"/>
-                  </a:moveTo>
-                  <a:cubicBezTo>
-                    <a:pt x="140494" y="182562"/>
-                    <a:pt x="280988" y="0"/>
-                    <a:pt x="428625" y="0"/>
-                  </a:cubicBezTo>
-                  <a:cubicBezTo>
-                    <a:pt x="576262" y="0"/>
-                    <a:pt x="742950" y="364067"/>
-                    <a:pt x="885825" y="365125"/>
-                  </a:cubicBezTo>
-                  <a:cubicBezTo>
-                    <a:pt x="1028700" y="366183"/>
-                    <a:pt x="1233488" y="58737"/>
-                    <a:pt x="1285875" y="6350"/>
-                  </a:cubicBezTo>
-                </a:path>
-              </a:pathLst>
-            </a:custGeom>
-            <a:ln>
-              <a:solidFill>
-                <a:schemeClr val="tx2">
-                  <a:lumMod val="75000"/>
-                </a:schemeClr>
-              </a:solidFill>
-            </a:ln>
-            <a:effectLst/>
-          </p:spPr>
-          <p:style>
-            <a:lnRef idx="2">
-              <a:schemeClr val="accent1"/>
-            </a:lnRef>
-            <a:fillRef idx="0">
-              <a:schemeClr val="accent1"/>
-            </a:fillRef>
-            <a:effectRef idx="1">
-              <a:schemeClr val="accent1"/>
-            </a:effectRef>
-            <a:fontRef idx="minor">
-              <a:schemeClr val="tx1"/>
-            </a:fontRef>
-          </p:style>
-          <p:txBody>
-            <a:bodyPr rtlCol="0" anchor="ctr"/>
-            <a:lstStyle/>
-            <a:p>
-              <a:pPr algn="ctr"/>
-              <a:endParaRPr lang="en-US">
-                <a:latin typeface="Consolas" panose="020B0609020204030204" pitchFamily="49" charset="0"/>
-                <a:cs typeface="Consolas" panose="020B0609020204030204" pitchFamily="49" charset="0"/>
-              </a:endParaRPr>
-            </a:p>
-          </p:txBody>
-        </p:sp>
-        <p:sp>
-          <p:nvSpPr>
-            <p:cNvPr id="41" name="TextBox 40"/>
-            <p:cNvSpPr txBox="1"/>
-            <p:nvPr/>
-          </p:nvSpPr>
-          <p:spPr>
-            <a:xfrm>
-              <a:off x="5943600" y="5802868"/>
-              <a:ext cx="1277914" cy="307777"/>
-            </a:xfrm>
-            <a:prstGeom prst="rect">
-              <a:avLst/>
-            </a:prstGeom>
-            <a:noFill/>
-          </p:spPr>
-          <p:txBody>
-            <a:bodyPr wrap="none" rtlCol="0">
-              <a:spAutoFit/>
-            </a:bodyPr>
-            <a:lstStyle/>
-            <a:p>
-              <a:r>
-                <a:rPr lang="en-US" dirty="0">
-                  <a:latin typeface="Consolas" panose="020B0609020204030204" pitchFamily="49" charset="0"/>
-                  <a:cs typeface="Consolas" panose="020B0609020204030204" pitchFamily="49" charset="0"/>
-                </a:rPr>
-                <a:t>Low Address</a:t>
-              </a:r>
-            </a:p>
-          </p:txBody>
-        </p:sp>
-        <p:sp>
-          <p:nvSpPr>
-            <p:cNvPr id="42" name="TextBox 41"/>
-            <p:cNvSpPr txBox="1"/>
-            <p:nvPr/>
-          </p:nvSpPr>
-          <p:spPr>
-            <a:xfrm>
-              <a:off x="5943600" y="2145268"/>
-              <a:ext cx="1377300" cy="307777"/>
-            </a:xfrm>
-            <a:prstGeom prst="rect">
-              <a:avLst/>
-            </a:prstGeom>
-            <a:noFill/>
-          </p:spPr>
-          <p:txBody>
-            <a:bodyPr wrap="none" rtlCol="0">
-              <a:spAutoFit/>
-            </a:bodyPr>
-            <a:lstStyle/>
-            <a:p>
-              <a:r>
-                <a:rPr lang="en-US" dirty="0">
-                  <a:latin typeface="Consolas" panose="020B0609020204030204" pitchFamily="49" charset="0"/>
-                  <a:cs typeface="Consolas" panose="020B0609020204030204" pitchFamily="49" charset="0"/>
-                </a:rPr>
-                <a:t>High Address</a:t>
-              </a:r>
-            </a:p>
-          </p:txBody>
-        </p:sp>
-        <p:sp>
-          <p:nvSpPr>
-            <p:cNvPr id="45" name="Rectangle 44"/>
-            <p:cNvSpPr/>
-            <p:nvPr/>
-          </p:nvSpPr>
-          <p:spPr>
-            <a:xfrm>
-              <a:off x="5943600" y="2690336"/>
-              <a:ext cx="1365600" cy="307777"/>
-            </a:xfrm>
-            <a:prstGeom prst="rect">
-              <a:avLst/>
-            </a:prstGeom>
-            <a:ln>
-              <a:noFill/>
-            </a:ln>
-          </p:spPr>
-          <p:style>
-            <a:lnRef idx="2">
-              <a:schemeClr val="accent1"/>
-            </a:lnRef>
-            <a:fillRef idx="1">
-              <a:schemeClr val="lt1"/>
-            </a:fillRef>
-            <a:effectRef idx="0">
-              <a:schemeClr val="accent1"/>
-            </a:effectRef>
-            <a:fontRef idx="minor">
-              <a:schemeClr val="dk1"/>
-            </a:fontRef>
-          </p:style>
-          <p:txBody>
-            <a:bodyPr wrap="square">
-              <a:spAutoFit/>
-            </a:bodyPr>
-            <a:lstStyle/>
-            <a:p>
-              <a:pPr algn="ctr"/>
-              <a:r>
-                <a:rPr lang="en-US" dirty="0" err="1">
-                  <a:latin typeface="Consolas" panose="020B0609020204030204" pitchFamily="49" charset="0"/>
-                  <a:cs typeface="Consolas" panose="020B0609020204030204" pitchFamily="49" charset="0"/>
-                </a:rPr>
-                <a:t>0x20000007</a:t>
-              </a:r>
-              <a:endParaRPr lang="pl-PL" dirty="0">
-                <a:latin typeface="Consolas" panose="020B0609020204030204" pitchFamily="49" charset="0"/>
-                <a:cs typeface="Consolas" panose="020B0609020204030204" pitchFamily="49" charset="0"/>
-              </a:endParaRPr>
-            </a:p>
-          </p:txBody>
-        </p:sp>
-        <p:sp>
-          <p:nvSpPr>
-            <p:cNvPr id="46" name="Rectangle 45"/>
-            <p:cNvSpPr/>
-            <p:nvPr/>
-          </p:nvSpPr>
-          <p:spPr>
-            <a:xfrm>
-              <a:off x="5945280" y="3059222"/>
-              <a:ext cx="1365600" cy="307777"/>
-            </a:xfrm>
-            <a:prstGeom prst="rect">
-              <a:avLst/>
-            </a:prstGeom>
-            <a:ln>
-              <a:noFill/>
-            </a:ln>
-          </p:spPr>
-          <p:style>
-            <a:lnRef idx="2">
-              <a:schemeClr val="accent1"/>
-            </a:lnRef>
-            <a:fillRef idx="1">
-              <a:schemeClr val="lt1"/>
-            </a:fillRef>
-            <a:effectRef idx="0">
-              <a:schemeClr val="accent1"/>
-            </a:effectRef>
-            <a:fontRef idx="minor">
-              <a:schemeClr val="dk1"/>
-            </a:fontRef>
-          </p:style>
-          <p:txBody>
-            <a:bodyPr wrap="square">
-              <a:spAutoFit/>
-            </a:bodyPr>
-            <a:lstStyle/>
-            <a:p>
-              <a:pPr algn="ctr"/>
-              <a:r>
-                <a:rPr lang="en-US" dirty="0" err="1">
-                  <a:latin typeface="Consolas" panose="020B0609020204030204" pitchFamily="49" charset="0"/>
-                  <a:cs typeface="Consolas" panose="020B0609020204030204" pitchFamily="49" charset="0"/>
-                </a:rPr>
-                <a:t>0x20000006</a:t>
-              </a:r>
-              <a:endParaRPr lang="pl-PL" dirty="0">
-                <a:latin typeface="Consolas" panose="020B0609020204030204" pitchFamily="49" charset="0"/>
-                <a:cs typeface="Consolas" panose="020B0609020204030204" pitchFamily="49" charset="0"/>
-              </a:endParaRPr>
-            </a:p>
-          </p:txBody>
-        </p:sp>
-        <p:sp>
-          <p:nvSpPr>
-            <p:cNvPr id="47" name="Rectangle 46"/>
-            <p:cNvSpPr/>
-            <p:nvPr/>
-          </p:nvSpPr>
-          <p:spPr>
-            <a:xfrm>
-              <a:off x="5945095" y="3426936"/>
-              <a:ext cx="1365600" cy="307777"/>
-            </a:xfrm>
-            <a:prstGeom prst="rect">
-              <a:avLst/>
-            </a:prstGeom>
-            <a:ln>
-              <a:noFill/>
-            </a:ln>
-          </p:spPr>
-          <p:style>
-            <a:lnRef idx="2">
-              <a:schemeClr val="accent1"/>
-            </a:lnRef>
-            <a:fillRef idx="1">
-              <a:schemeClr val="lt1"/>
-            </a:fillRef>
-            <a:effectRef idx="0">
-              <a:schemeClr val="accent1"/>
-            </a:effectRef>
-            <a:fontRef idx="minor">
-              <a:schemeClr val="dk1"/>
-            </a:fontRef>
-          </p:style>
-          <p:txBody>
-            <a:bodyPr wrap="square">
-              <a:spAutoFit/>
-            </a:bodyPr>
-            <a:lstStyle/>
-            <a:p>
-              <a:pPr algn="ctr"/>
-              <a:r>
-                <a:rPr lang="en-US" dirty="0" err="1">
-                  <a:latin typeface="Consolas" panose="020B0609020204030204" pitchFamily="49" charset="0"/>
-                  <a:cs typeface="Consolas" panose="020B0609020204030204" pitchFamily="49" charset="0"/>
-                </a:rPr>
-                <a:t>0x20000005</a:t>
-              </a:r>
-              <a:endParaRPr lang="pl-PL" dirty="0">
-                <a:latin typeface="Consolas" panose="020B0609020204030204" pitchFamily="49" charset="0"/>
-                <a:cs typeface="Consolas" panose="020B0609020204030204" pitchFamily="49" charset="0"/>
-              </a:endParaRPr>
-            </a:p>
-          </p:txBody>
-        </p:sp>
-        <p:sp>
-          <p:nvSpPr>
-            <p:cNvPr id="48" name="Rectangle 47"/>
-            <p:cNvSpPr/>
-            <p:nvPr/>
-          </p:nvSpPr>
-          <p:spPr>
-            <a:xfrm>
-              <a:off x="5943600" y="3795822"/>
-              <a:ext cx="1365600" cy="307777"/>
-            </a:xfrm>
-            <a:prstGeom prst="rect">
-              <a:avLst/>
-            </a:prstGeom>
-            <a:ln>
-              <a:noFill/>
-            </a:ln>
-          </p:spPr>
-          <p:style>
-            <a:lnRef idx="2">
-              <a:schemeClr val="accent1"/>
-            </a:lnRef>
-            <a:fillRef idx="1">
-              <a:schemeClr val="lt1"/>
-            </a:fillRef>
-            <a:effectRef idx="0">
-              <a:schemeClr val="accent1"/>
-            </a:effectRef>
-            <a:fontRef idx="minor">
-              <a:schemeClr val="dk1"/>
-            </a:fontRef>
-          </p:style>
-          <p:txBody>
-            <a:bodyPr wrap="square">
-              <a:spAutoFit/>
-            </a:bodyPr>
-            <a:lstStyle/>
-            <a:p>
-              <a:pPr algn="ctr"/>
-              <a:r>
-                <a:rPr lang="en-US" dirty="0" err="1">
-                  <a:solidFill>
-                    <a:schemeClr val="tx1"/>
-                  </a:solidFill>
-                  <a:latin typeface="Consolas" panose="020B0609020204030204" pitchFamily="49" charset="0"/>
-                  <a:cs typeface="Consolas" panose="020B0609020204030204" pitchFamily="49" charset="0"/>
-                </a:rPr>
-                <a:t>0x20000004</a:t>
-              </a:r>
-              <a:endParaRPr lang="pl-PL" dirty="0">
-                <a:solidFill>
-                  <a:schemeClr val="tx1"/>
-                </a:solidFill>
-                <a:latin typeface="Consolas" panose="020B0609020204030204" pitchFamily="49" charset="0"/>
-                <a:cs typeface="Consolas" panose="020B0609020204030204" pitchFamily="49" charset="0"/>
-              </a:endParaRPr>
-            </a:p>
-          </p:txBody>
-        </p:sp>
-        <p:sp>
-          <p:nvSpPr>
-            <p:cNvPr id="49" name="Rectangle 48"/>
-            <p:cNvSpPr/>
-            <p:nvPr/>
-          </p:nvSpPr>
-          <p:spPr>
-            <a:xfrm>
-              <a:off x="5943950" y="4163536"/>
-              <a:ext cx="1365600" cy="307777"/>
-            </a:xfrm>
-            <a:prstGeom prst="rect">
-              <a:avLst/>
-            </a:prstGeom>
-            <a:ln>
-              <a:noFill/>
-            </a:ln>
-          </p:spPr>
-          <p:style>
-            <a:lnRef idx="2">
-              <a:schemeClr val="accent1"/>
-            </a:lnRef>
-            <a:fillRef idx="1">
-              <a:schemeClr val="lt1"/>
-            </a:fillRef>
-            <a:effectRef idx="0">
-              <a:schemeClr val="accent1"/>
-            </a:effectRef>
-            <a:fontRef idx="minor">
-              <a:schemeClr val="dk1"/>
-            </a:fontRef>
-          </p:style>
-          <p:txBody>
-            <a:bodyPr wrap="square">
-              <a:spAutoFit/>
-            </a:bodyPr>
-            <a:lstStyle/>
-            <a:p>
-              <a:pPr algn="ctr"/>
-              <a:r>
-                <a:rPr lang="en-US" dirty="0" err="1">
-                  <a:latin typeface="Consolas" panose="020B0609020204030204" pitchFamily="49" charset="0"/>
-                  <a:cs typeface="Consolas" panose="020B0609020204030204" pitchFamily="49" charset="0"/>
-                </a:rPr>
-                <a:t>0x20000003</a:t>
-              </a:r>
-              <a:endParaRPr lang="pl-PL" dirty="0">
-                <a:latin typeface="Consolas" panose="020B0609020204030204" pitchFamily="49" charset="0"/>
-                <a:cs typeface="Consolas" panose="020B0609020204030204" pitchFamily="49" charset="0"/>
-              </a:endParaRPr>
-            </a:p>
-          </p:txBody>
-        </p:sp>
-        <p:sp>
-          <p:nvSpPr>
-            <p:cNvPr id="50" name="Rectangle 49"/>
-            <p:cNvSpPr/>
-            <p:nvPr/>
-          </p:nvSpPr>
-          <p:spPr>
-            <a:xfrm>
-              <a:off x="5945630" y="4532422"/>
-              <a:ext cx="1365600" cy="307777"/>
-            </a:xfrm>
-            <a:prstGeom prst="rect">
-              <a:avLst/>
-            </a:prstGeom>
-            <a:ln>
-              <a:noFill/>
-            </a:ln>
-          </p:spPr>
-          <p:style>
-            <a:lnRef idx="2">
-              <a:schemeClr val="accent1"/>
-            </a:lnRef>
-            <a:fillRef idx="1">
-              <a:schemeClr val="lt1"/>
-            </a:fillRef>
-            <a:effectRef idx="0">
-              <a:schemeClr val="accent1"/>
-            </a:effectRef>
-            <a:fontRef idx="minor">
-              <a:schemeClr val="dk1"/>
-            </a:fontRef>
-          </p:style>
-          <p:txBody>
-            <a:bodyPr wrap="square">
-              <a:spAutoFit/>
-            </a:bodyPr>
-            <a:lstStyle/>
-            <a:p>
-              <a:pPr algn="ctr"/>
-              <a:r>
-                <a:rPr lang="en-US" dirty="0" err="1">
-                  <a:latin typeface="Consolas" panose="020B0609020204030204" pitchFamily="49" charset="0"/>
-                  <a:cs typeface="Consolas" panose="020B0609020204030204" pitchFamily="49" charset="0"/>
-                </a:rPr>
-                <a:t>0x20000002</a:t>
-              </a:r>
-              <a:endParaRPr lang="pl-PL" dirty="0">
-                <a:latin typeface="Consolas" panose="020B0609020204030204" pitchFamily="49" charset="0"/>
-                <a:cs typeface="Consolas" panose="020B0609020204030204" pitchFamily="49" charset="0"/>
-              </a:endParaRPr>
-            </a:p>
-          </p:txBody>
-        </p:sp>
-        <p:sp>
-          <p:nvSpPr>
-            <p:cNvPr id="51" name="Rectangle 50"/>
-            <p:cNvSpPr/>
-            <p:nvPr/>
-          </p:nvSpPr>
-          <p:spPr>
-            <a:xfrm>
-              <a:off x="5945445" y="4900136"/>
-              <a:ext cx="1365600" cy="307777"/>
-            </a:xfrm>
-            <a:prstGeom prst="rect">
-              <a:avLst/>
-            </a:prstGeom>
-            <a:ln>
-              <a:noFill/>
-            </a:ln>
-          </p:spPr>
-          <p:style>
-            <a:lnRef idx="2">
-              <a:schemeClr val="accent1"/>
-            </a:lnRef>
-            <a:fillRef idx="1">
-              <a:schemeClr val="lt1"/>
-            </a:fillRef>
-            <a:effectRef idx="0">
-              <a:schemeClr val="accent1"/>
-            </a:effectRef>
-            <a:fontRef idx="minor">
-              <a:schemeClr val="dk1"/>
-            </a:fontRef>
-          </p:style>
-          <p:txBody>
-            <a:bodyPr wrap="square">
-              <a:spAutoFit/>
-            </a:bodyPr>
-            <a:lstStyle/>
-            <a:p>
-              <a:pPr algn="ctr"/>
-              <a:r>
-                <a:rPr lang="en-US" dirty="0" err="1">
-                  <a:solidFill>
-                    <a:srgbClr val="C00000"/>
-                  </a:solidFill>
-                  <a:latin typeface="Consolas" panose="020B0609020204030204" pitchFamily="49" charset="0"/>
-                  <a:cs typeface="Consolas" panose="020B0609020204030204" pitchFamily="49" charset="0"/>
-                </a:rPr>
-                <a:t>0x20000001</a:t>
-              </a:r>
-              <a:endParaRPr lang="pl-PL" dirty="0">
-                <a:solidFill>
-                  <a:srgbClr val="C00000"/>
-                </a:solidFill>
-                <a:latin typeface="Consolas" panose="020B0609020204030204" pitchFamily="49" charset="0"/>
-                <a:cs typeface="Consolas" panose="020B0609020204030204" pitchFamily="49" charset="0"/>
-              </a:endParaRPr>
-            </a:p>
-          </p:txBody>
-        </p:sp>
-        <p:sp>
-          <p:nvSpPr>
-            <p:cNvPr id="52" name="Rectangle 51"/>
-            <p:cNvSpPr/>
-            <p:nvPr/>
-          </p:nvSpPr>
-          <p:spPr>
-            <a:xfrm>
-              <a:off x="5943950" y="5269022"/>
-              <a:ext cx="1365600" cy="307777"/>
-            </a:xfrm>
-            <a:prstGeom prst="rect">
-              <a:avLst/>
-            </a:prstGeom>
-            <a:ln>
-              <a:noFill/>
-            </a:ln>
-          </p:spPr>
-          <p:style>
-            <a:lnRef idx="2">
-              <a:schemeClr val="accent1"/>
-            </a:lnRef>
-            <a:fillRef idx="1">
-              <a:schemeClr val="lt1"/>
-            </a:fillRef>
-            <a:effectRef idx="0">
-              <a:schemeClr val="accent1"/>
-            </a:effectRef>
-            <a:fontRef idx="minor">
-              <a:schemeClr val="dk1"/>
-            </a:fontRef>
-          </p:style>
-          <p:txBody>
-            <a:bodyPr wrap="square">
-              <a:spAutoFit/>
-            </a:bodyPr>
-            <a:lstStyle/>
-            <a:p>
-              <a:pPr algn="ctr"/>
-              <a:r>
-                <a:rPr lang="en-US" dirty="0" err="1">
-                  <a:latin typeface="Consolas" panose="020B0609020204030204" pitchFamily="49" charset="0"/>
-                  <a:cs typeface="Consolas" panose="020B0609020204030204" pitchFamily="49" charset="0"/>
-                </a:rPr>
-                <a:t>0x20000000</a:t>
-              </a:r>
-              <a:endParaRPr lang="pl-PL" dirty="0">
-                <a:latin typeface="Consolas" panose="020B0609020204030204" pitchFamily="49" charset="0"/>
-                <a:cs typeface="Consolas" panose="020B0609020204030204" pitchFamily="49" charset="0"/>
-              </a:endParaRPr>
-            </a:p>
-          </p:txBody>
-        </p:sp>
-        <p:grpSp>
-          <p:nvGrpSpPr>
-            <p:cNvPr id="18" name="Group 63"/>
-            <p:cNvGrpSpPr/>
-            <p:nvPr/>
-          </p:nvGrpSpPr>
-          <p:grpSpPr>
-            <a:xfrm>
-              <a:off x="7327900" y="1307068"/>
-              <a:ext cx="1295400" cy="794266"/>
-              <a:chOff x="3124200" y="4191000"/>
-              <a:chExt cx="1295400" cy="794266"/>
-            </a:xfrm>
-          </p:grpSpPr>
-          <p:sp>
-            <p:nvSpPr>
-              <p:cNvPr id="53" name="Rectangle 52"/>
-              <p:cNvSpPr/>
-              <p:nvPr/>
-            </p:nvSpPr>
-            <p:spPr>
-              <a:xfrm>
-                <a:off x="3124200" y="4191000"/>
-                <a:ext cx="1289400" cy="307777"/>
-              </a:xfrm>
-              <a:prstGeom prst="rect">
-                <a:avLst/>
-              </a:prstGeom>
-              <a:noFill/>
-              <a:ln>
-                <a:noFill/>
-              </a:ln>
-            </p:spPr>
-            <p:style>
-              <a:lnRef idx="2">
-                <a:schemeClr val="accent1"/>
-              </a:lnRef>
-              <a:fillRef idx="1">
-                <a:schemeClr val="lt1"/>
-              </a:fillRef>
-              <a:effectRef idx="0">
-                <a:schemeClr val="accent1"/>
-              </a:effectRef>
-              <a:fontRef idx="minor">
-                <a:schemeClr val="dk1"/>
-              </a:fontRef>
-            </p:style>
-            <p:txBody>
-              <a:bodyPr wrap="square">
-                <a:spAutoFit/>
-              </a:bodyPr>
-              <a:lstStyle/>
-              <a:p>
-                <a:pPr algn="ctr"/>
-                <a:r>
-                  <a:rPr lang="en-US" dirty="0">
-                    <a:latin typeface="Consolas" panose="020B0609020204030204" pitchFamily="49" charset="0"/>
-                    <a:cs typeface="Consolas" panose="020B0609020204030204" pitchFamily="49" charset="0"/>
-                  </a:rPr>
-                  <a:t>8 bits</a:t>
-                </a:r>
-                <a:endParaRPr lang="pl-PL" dirty="0">
-                  <a:latin typeface="Consolas" panose="020B0609020204030204" pitchFamily="49" charset="0"/>
-                  <a:cs typeface="Consolas" panose="020B0609020204030204" pitchFamily="49" charset="0"/>
-                </a:endParaRPr>
-              </a:p>
-            </p:txBody>
-          </p:sp>
-          <p:cxnSp>
-            <p:nvCxnSpPr>
-              <p:cNvPr id="55" name="Straight Connector 54"/>
-              <p:cNvCxnSpPr>
-                <a:stCxn id="53" idx="1"/>
-              </p:cNvCxnSpPr>
-              <p:nvPr/>
-            </p:nvCxnSpPr>
-            <p:spPr>
-              <a:xfrm>
-                <a:off x="3124200" y="4344889"/>
-                <a:ext cx="0" cy="640377"/>
-              </a:xfrm>
-              <a:prstGeom prst="line">
-                <a:avLst/>
-              </a:prstGeom>
-              <a:ln>
-                <a:solidFill>
-                  <a:schemeClr val="tx2">
-                    <a:lumMod val="75000"/>
-                  </a:schemeClr>
-                </a:solidFill>
-              </a:ln>
-              <a:effectLst/>
-            </p:spPr>
-            <p:style>
-              <a:lnRef idx="2">
-                <a:schemeClr val="accent1"/>
-              </a:lnRef>
-              <a:fillRef idx="0">
-                <a:schemeClr val="accent1"/>
-              </a:fillRef>
-              <a:effectRef idx="1">
-                <a:schemeClr val="accent1"/>
-              </a:effectRef>
-              <a:fontRef idx="minor">
-                <a:schemeClr val="tx1"/>
-              </a:fontRef>
-            </p:style>
-          </p:cxnSp>
-          <p:cxnSp>
-            <p:nvCxnSpPr>
-              <p:cNvPr id="58" name="Straight Connector 57"/>
-              <p:cNvCxnSpPr>
-                <a:stCxn id="53" idx="3"/>
-              </p:cNvCxnSpPr>
-              <p:nvPr/>
-            </p:nvCxnSpPr>
-            <p:spPr>
-              <a:xfrm>
-                <a:off x="4413600" y="4344889"/>
-                <a:ext cx="1588" cy="640377"/>
-              </a:xfrm>
-              <a:prstGeom prst="line">
-                <a:avLst/>
-              </a:prstGeom>
-              <a:ln>
-                <a:solidFill>
-                  <a:schemeClr val="tx2">
-                    <a:lumMod val="75000"/>
-                  </a:schemeClr>
-                </a:solidFill>
-              </a:ln>
-              <a:effectLst/>
-            </p:spPr>
-            <p:style>
-              <a:lnRef idx="2">
-                <a:schemeClr val="accent1"/>
-              </a:lnRef>
-              <a:fillRef idx="0">
-                <a:schemeClr val="accent1"/>
-              </a:fillRef>
-              <a:effectRef idx="1">
-                <a:schemeClr val="accent1"/>
-              </a:effectRef>
-              <a:fontRef idx="minor">
-                <a:schemeClr val="tx1"/>
-              </a:fontRef>
-            </p:style>
-          </p:cxnSp>
-          <p:cxnSp>
-            <p:nvCxnSpPr>
-              <p:cNvPr id="61" name="Straight Connector 60"/>
-              <p:cNvCxnSpPr/>
-              <p:nvPr/>
-            </p:nvCxnSpPr>
-            <p:spPr>
-              <a:xfrm>
-                <a:off x="3124200" y="4648200"/>
-                <a:ext cx="1295400" cy="1588"/>
-              </a:xfrm>
-              <a:prstGeom prst="line">
-                <a:avLst/>
-              </a:prstGeom>
-              <a:ln>
-                <a:solidFill>
-                  <a:schemeClr val="tx2">
-                    <a:lumMod val="75000"/>
-                  </a:schemeClr>
-                </a:solidFill>
-                <a:headEnd type="arrow" w="lg" len="med"/>
-                <a:tailEnd type="arrow" w="lg" len="med"/>
-              </a:ln>
-              <a:effectLst/>
-            </p:spPr>
-            <p:style>
-              <a:lnRef idx="2">
-                <a:schemeClr val="accent1"/>
-              </a:lnRef>
-              <a:fillRef idx="0">
-                <a:schemeClr val="accent1"/>
-              </a:fillRef>
-              <a:effectRef idx="1">
-                <a:schemeClr val="accent1"/>
-              </a:effectRef>
-              <a:fontRef idx="minor">
-                <a:schemeClr val="tx1"/>
-              </a:fontRef>
-            </p:style>
-          </p:cxnSp>
-        </p:grpSp>
-      </p:grpSp>
-      <p:sp>
-        <p:nvSpPr>
-          <p:cNvPr id="44" name="Rectangle 43"/>
-          <p:cNvSpPr/>
-          <p:nvPr/>
-        </p:nvSpPr>
-        <p:spPr>
-          <a:xfrm>
-            <a:off x="7270750" y="4518210"/>
-            <a:ext cx="1447800" cy="685800"/>
-          </a:xfrm>
-          <a:prstGeom prst="rect">
-            <a:avLst/>
-          </a:prstGeom>
-          <a:noFill/>
-          <a:ln w="28575" cmpd="sng">
-            <a:solidFill>
-              <a:srgbClr val="FF0000"/>
-            </a:solidFill>
-          </a:ln>
-          <a:effectLst/>
-        </p:spPr>
-        <p:style>
-          <a:lnRef idx="1">
-            <a:schemeClr val="accent1"/>
-          </a:lnRef>
-          <a:fillRef idx="3">
-            <a:schemeClr val="accent1"/>
-          </a:fillRef>
-          <a:effectRef idx="2">
-            <a:schemeClr val="accent1"/>
-          </a:effectRef>
-          <a:fontRef idx="minor">
-            <a:schemeClr val="lt1"/>
-          </a:fontRef>
-        </p:style>
-        <p:txBody>
-          <a:bodyPr rtlCol="0" anchor="ctr"/>
-          <a:lstStyle/>
-          <a:p>
-            <a:pPr algn="ctr"/>
-            <a:endParaRPr lang="en-US">
-              <a:latin typeface="Consolas" panose="020B0609020204030204" pitchFamily="49" charset="0"/>
-              <a:cs typeface="Consolas" panose="020B0609020204030204" pitchFamily="49" charset="0"/>
-            </a:endParaRPr>
-          </a:p>
-        </p:txBody>
-      </p:sp>
-      <p:cxnSp>
-        <p:nvCxnSpPr>
-          <p:cNvPr id="43" name="Straight Connector 42"/>
-          <p:cNvCxnSpPr/>
-          <p:nvPr/>
-        </p:nvCxnSpPr>
-        <p:spPr>
-          <a:xfrm flipH="1" flipV="1">
-            <a:off x="7086600" y="4442010"/>
-            <a:ext cx="1828800" cy="838200"/>
-          </a:xfrm>
-          <a:prstGeom prst="line">
-            <a:avLst/>
-          </a:prstGeom>
-          <a:ln w="38100" cmpd="sng">
-            <a:solidFill>
-              <a:srgbClr val="FF0000"/>
-            </a:solidFill>
-          </a:ln>
-          <a:effectLst/>
-        </p:spPr>
-        <p:style>
-          <a:lnRef idx="2">
-            <a:schemeClr val="accent1"/>
-          </a:lnRef>
-          <a:fillRef idx="0">
-            <a:schemeClr val="accent1"/>
-          </a:fillRef>
-          <a:effectRef idx="1">
-            <a:schemeClr val="accent1"/>
-          </a:effectRef>
-          <a:fontRef idx="minor">
-            <a:schemeClr val="tx1"/>
-          </a:fontRef>
-        </p:style>
-      </p:cxnSp>
-      <p:cxnSp>
-        <p:nvCxnSpPr>
-          <p:cNvPr id="63" name="Straight Connector 62"/>
-          <p:cNvCxnSpPr/>
-          <p:nvPr/>
-        </p:nvCxnSpPr>
-        <p:spPr>
-          <a:xfrm rot="10800000" flipV="1">
-            <a:off x="7086600" y="4442010"/>
-            <a:ext cx="1828800" cy="838200"/>
-          </a:xfrm>
-          <a:prstGeom prst="line">
-            <a:avLst/>
-          </a:prstGeom>
-          <a:ln w="38100" cmpd="sng">
-            <a:solidFill>
-              <a:srgbClr val="FF0000"/>
-            </a:solidFill>
-          </a:ln>
-          <a:effectLst/>
-        </p:spPr>
-        <p:style>
-          <a:lnRef idx="2">
-            <a:schemeClr val="accent1"/>
-          </a:lnRef>
-          <a:fillRef idx="0">
-            <a:schemeClr val="accent1"/>
-          </a:fillRef>
-          <a:effectRef idx="1">
-            <a:schemeClr val="accent1"/>
-          </a:effectRef>
-          <a:fontRef idx="minor">
-            <a:schemeClr val="tx1"/>
-          </a:fontRef>
-        </p:style>
-      </p:cxnSp>
-      <p:sp>
-        <p:nvSpPr>
-          <p:cNvPr id="66" name="TextBox 65"/>
-          <p:cNvSpPr txBox="1"/>
-          <p:nvPr/>
-        </p:nvSpPr>
-        <p:spPr>
-          <a:xfrm>
-            <a:off x="2769481" y="4465346"/>
-            <a:ext cx="2685177" cy="830997"/>
-          </a:xfrm>
-          <a:prstGeom prst="rect">
-            <a:avLst/>
-          </a:prstGeom>
-          <a:solidFill>
-            <a:schemeClr val="bg2"/>
-          </a:solidFill>
-        </p:spPr>
-        <p:txBody>
-          <a:bodyPr wrap="square" rtlCol="0">
-            <a:spAutoFit/>
-          </a:bodyPr>
-          <a:lstStyle/>
-          <a:p>
-            <a:pPr algn="ctr"/>
-            <a:r>
-              <a:rPr lang="en-US" sz="1600" dirty="0">
-                <a:solidFill>
-                  <a:schemeClr val="bg1"/>
-                </a:solidFill>
-              </a:rPr>
-              <a:t>We c</a:t>
-            </a:r>
-            <a:r>
-              <a:rPr lang="en-US" sz="1600" b="1" dirty="0">
-                <a:solidFill>
-                  <a:schemeClr val="bg1"/>
-                </a:solidFill>
-              </a:rPr>
-              <a:t>annot store a halfword at address 0x20000001.</a:t>
-            </a:r>
-          </a:p>
-        </p:txBody>
-      </p:sp>
-      <p:sp>
-        <p:nvSpPr>
-          <p:cNvPr id="54" name="Content Placeholder 2"/>
-          <p:cNvSpPr>
-            <a:spLocks noGrp="1"/>
-          </p:cNvSpPr>
-          <p:nvPr>
-            <p:ph sz="quarter" idx="1"/>
-          </p:nvPr>
-        </p:nvSpPr>
-        <p:spPr>
-          <a:xfrm>
-            <a:off x="142043" y="1219200"/>
-            <a:ext cx="5768301" cy="4937760"/>
-          </a:xfrm>
-        </p:spPr>
-        <p:txBody>
-          <a:bodyPr>
-            <a:normAutofit/>
-          </a:bodyPr>
-          <a:lstStyle/>
-          <a:p>
-            <a:pPr lvl="1"/>
-            <a:r>
-              <a:rPr lang="en-US" sz="2000" dirty="0"/>
-              <a:t>Can you store a halfword anywhere?  </a:t>
-            </a:r>
-            <a:r>
-              <a:rPr lang="en-US" sz="2000" b="1" dirty="0">
-                <a:solidFill>
-                  <a:schemeClr val="accent2"/>
-                </a:solidFill>
-              </a:rPr>
-              <a:t>NO.</a:t>
-            </a:r>
-          </a:p>
-          <a:p>
-            <a:pPr lvl="1"/>
-            <a:r>
-              <a:rPr lang="en-US" sz="2000" dirty="0"/>
-              <a:t>A halfword can only be stored at an address that's divisible by 2.</a:t>
-            </a:r>
-          </a:p>
-          <a:p>
-            <a:pPr lvl="1"/>
-            <a:r>
-              <a:rPr lang="en-US" sz="2000" dirty="0"/>
-              <a:t>Memory address of a halfword is the lowest address of its two bytes.</a:t>
-            </a:r>
-          </a:p>
-          <a:p>
-            <a:pPr lvl="1"/>
-            <a:endParaRPr lang="en-US" sz="2000" dirty="0"/>
-          </a:p>
-          <a:p>
-            <a:pPr lvl="1"/>
-            <a:endParaRPr lang="en-US" sz="2000" b="1" dirty="0">
-              <a:solidFill>
-                <a:schemeClr val="accent2"/>
-              </a:solidFill>
-            </a:endParaRPr>
-          </a:p>
-        </p:txBody>
-      </p:sp>
-      <p:sp>
-        <p:nvSpPr>
-          <p:cNvPr id="56" name="Rectangle 55"/>
-          <p:cNvSpPr/>
-          <p:nvPr/>
-        </p:nvSpPr>
-        <p:spPr>
-          <a:xfrm>
-            <a:off x="290989" y="3025517"/>
-            <a:ext cx="5163669" cy="415498"/>
-          </a:xfrm>
-          <a:prstGeom prst="rect">
-            <a:avLst/>
-          </a:prstGeom>
-        </p:spPr>
-        <p:txBody>
-          <a:bodyPr wrap="square">
-            <a:spAutoFit/>
-          </a:bodyPr>
-          <a:lstStyle/>
-          <a:p>
-            <a:pPr lvl="1" algn="ctr"/>
-            <a:r>
-              <a:rPr lang="en-US" sz="2100" dirty="0" err="1"/>
-              <a:t>Halfword</a:t>
-            </a:r>
-            <a:r>
-              <a:rPr lang="en-US" sz="2100" dirty="0"/>
-              <a:t>-address mod 2 = 0</a:t>
-            </a:r>
-          </a:p>
-        </p:txBody>
-      </p:sp>
-    </p:spTree>
-    <p:extLst>
-      <p:ext uri="{BB962C8B-B14F-4D97-AF65-F5344CB8AC3E}">
-        <p14:creationId xmlns:p14="http://schemas.microsoft.com/office/powerpoint/2010/main" val="2963767799"/>
-      </p:ext>
-    </p:extLst>
-  </p:cSld>
-  <p:clrMapOvr>
-    <a:masterClrMapping/>
-  </p:clrMapOvr>
-</p:sld>
-</file>
-
 <file path=ppt/theme/theme1.xml><?xml version="1.0" encoding="utf-8"?>
 <a:theme xmlns:a="http://schemas.openxmlformats.org/drawingml/2006/main" name="Origin">
   <a:themeElements>
